--- a/U2-Work-and-Energy/figures/all-figs.pptx
+++ b/U2-Work-and-Energy/figures/all-figs.pptx
@@ -6,6 +6,7 @@
   </p:sldMasterIdLst>
   <p:sldIdLst>
     <p:sldId id="256" r:id="rId2"/>
+    <p:sldId id="257" r:id="rId3"/>
   </p:sldIdLst>
   <p:sldSz cx="12192000" cy="6858000"/>
   <p:notesSz cx="6858000" cy="9144000"/>
@@ -241,7 +242,7 @@
           <a:p>
             <a:fld id="{ED22BB23-F442-40A7-A37A-0DE665FB7F05}" type="datetimeFigureOut">
               <a:rPr lang="en-US" smtClean="0"/>
-              <a:t>10/10/2026</a:t>
+              <a:t>10/11/2026</a:t>
             </a:fld>
             <a:endParaRPr lang="en-US"/>
           </a:p>
@@ -409,7 +410,7 @@
           <a:p>
             <a:fld id="{ED22BB23-F442-40A7-A37A-0DE665FB7F05}" type="datetimeFigureOut">
               <a:rPr lang="en-US" smtClean="0"/>
-              <a:t>10/10/2026</a:t>
+              <a:t>10/11/2026</a:t>
             </a:fld>
             <a:endParaRPr lang="en-US"/>
           </a:p>
@@ -587,7 +588,7 @@
           <a:p>
             <a:fld id="{ED22BB23-F442-40A7-A37A-0DE665FB7F05}" type="datetimeFigureOut">
               <a:rPr lang="en-US" smtClean="0"/>
-              <a:t>10/10/2026</a:t>
+              <a:t>10/11/2026</a:t>
             </a:fld>
             <a:endParaRPr lang="en-US"/>
           </a:p>
@@ -755,7 +756,7 @@
           <a:p>
             <a:fld id="{ED22BB23-F442-40A7-A37A-0DE665FB7F05}" type="datetimeFigureOut">
               <a:rPr lang="en-US" smtClean="0"/>
-              <a:t>10/10/2026</a:t>
+              <a:t>10/11/2026</a:t>
             </a:fld>
             <a:endParaRPr lang="en-US"/>
           </a:p>
@@ -1000,7 +1001,7 @@
           <a:p>
             <a:fld id="{ED22BB23-F442-40A7-A37A-0DE665FB7F05}" type="datetimeFigureOut">
               <a:rPr lang="en-US" smtClean="0"/>
-              <a:t>10/10/2026</a:t>
+              <a:t>10/11/2026</a:t>
             </a:fld>
             <a:endParaRPr lang="en-US"/>
           </a:p>
@@ -1229,7 +1230,7 @@
           <a:p>
             <a:fld id="{ED22BB23-F442-40A7-A37A-0DE665FB7F05}" type="datetimeFigureOut">
               <a:rPr lang="en-US" smtClean="0"/>
-              <a:t>10/10/2026</a:t>
+              <a:t>10/11/2026</a:t>
             </a:fld>
             <a:endParaRPr lang="en-US"/>
           </a:p>
@@ -1593,7 +1594,7 @@
           <a:p>
             <a:fld id="{ED22BB23-F442-40A7-A37A-0DE665FB7F05}" type="datetimeFigureOut">
               <a:rPr lang="en-US" smtClean="0"/>
-              <a:t>10/10/2026</a:t>
+              <a:t>10/11/2026</a:t>
             </a:fld>
             <a:endParaRPr lang="en-US"/>
           </a:p>
@@ -1710,7 +1711,7 @@
           <a:p>
             <a:fld id="{ED22BB23-F442-40A7-A37A-0DE665FB7F05}" type="datetimeFigureOut">
               <a:rPr lang="en-US" smtClean="0"/>
-              <a:t>10/10/2026</a:t>
+              <a:t>10/11/2026</a:t>
             </a:fld>
             <a:endParaRPr lang="en-US"/>
           </a:p>
@@ -1805,7 +1806,7 @@
           <a:p>
             <a:fld id="{ED22BB23-F442-40A7-A37A-0DE665FB7F05}" type="datetimeFigureOut">
               <a:rPr lang="en-US" smtClean="0"/>
-              <a:t>10/10/2026</a:t>
+              <a:t>10/11/2026</a:t>
             </a:fld>
             <a:endParaRPr lang="en-US"/>
           </a:p>
@@ -2080,7 +2081,7 @@
           <a:p>
             <a:fld id="{ED22BB23-F442-40A7-A37A-0DE665FB7F05}" type="datetimeFigureOut">
               <a:rPr lang="en-US" smtClean="0"/>
-              <a:t>10/10/2026</a:t>
+              <a:t>10/11/2026</a:t>
             </a:fld>
             <a:endParaRPr lang="en-US"/>
           </a:p>
@@ -2332,7 +2333,7 @@
           <a:p>
             <a:fld id="{ED22BB23-F442-40A7-A37A-0DE665FB7F05}" type="datetimeFigureOut">
               <a:rPr lang="en-US" smtClean="0"/>
-              <a:t>10/10/2026</a:t>
+              <a:t>10/11/2026</a:t>
             </a:fld>
             <a:endParaRPr lang="en-US"/>
           </a:p>
@@ -2543,7 +2544,7 @@
           <a:p>
             <a:fld id="{ED22BB23-F442-40A7-A37A-0DE665FB7F05}" type="datetimeFigureOut">
               <a:rPr lang="en-US" smtClean="0"/>
-              <a:t>10/10/2026</a:t>
+              <a:t>10/11/2026</a:t>
             </a:fld>
             <a:endParaRPr lang="en-US"/>
           </a:p>
@@ -2948,108 +2949,8 @@
           <a:chExt cx="0" cy="0"/>
         </a:xfrm>
       </p:grpSpPr>
-      <p:sp>
-        <p:nvSpPr>
-          <p:cNvPr id="101" name="Arc 100">
-            <a:extLst>
-              <a:ext uri="{FF2B5EF4-FFF2-40B4-BE49-F238E27FC236}">
-                <a16:creationId xmlns:a16="http://schemas.microsoft.com/office/drawing/2014/main" id="{8BFA085B-627B-AA36-E879-9A67E9C0EAA7}"/>
-              </a:ext>
-            </a:extLst>
-          </p:cNvPr>
-          <p:cNvSpPr/>
-          <p:nvPr/>
-        </p:nvSpPr>
-        <p:spPr>
-          <a:xfrm rot="1336568">
-            <a:off x="3400329" y="2985954"/>
-            <a:ext cx="303021" cy="330200"/>
-          </a:xfrm>
-          <a:prstGeom prst="arc">
-            <a:avLst>
-              <a:gd name="adj1" fmla="val 17541800"/>
-              <a:gd name="adj2" fmla="val 227391"/>
-            </a:avLst>
-          </a:prstGeom>
-          <a:ln w="12700">
-            <a:solidFill>
-              <a:schemeClr val="tx1"/>
-            </a:solidFill>
-          </a:ln>
-        </p:spPr>
-        <p:style>
-          <a:lnRef idx="1">
-            <a:schemeClr val="accent1"/>
-          </a:lnRef>
-          <a:fillRef idx="0">
-            <a:schemeClr val="accent1"/>
-          </a:fillRef>
-          <a:effectRef idx="0">
-            <a:schemeClr val="accent1"/>
-          </a:effectRef>
-          <a:fontRef idx="minor">
-            <a:schemeClr val="tx1"/>
-          </a:fontRef>
-        </p:style>
-        <p:txBody>
-          <a:bodyPr rtlCol="0" anchor="ctr"/>
-          <a:lstStyle/>
-          <a:p>
-            <a:pPr algn="ctr"/>
-            <a:endParaRPr lang="en-IN"/>
-          </a:p>
-        </p:txBody>
-      </p:sp>
-      <p:cxnSp>
-        <p:nvCxnSpPr>
-          <p:cNvPr id="85" name="Straight Connector 84">
-            <a:extLst>
-              <a:ext uri="{FF2B5EF4-FFF2-40B4-BE49-F238E27FC236}">
-                <a16:creationId xmlns:a16="http://schemas.microsoft.com/office/drawing/2014/main" id="{80D031FE-6011-7F47-95CE-E598678DF9DB}"/>
-              </a:ext>
-            </a:extLst>
-          </p:cNvPr>
-          <p:cNvCxnSpPr>
-            <a:cxnSpLocks/>
-          </p:cNvCxnSpPr>
-          <p:nvPr/>
-        </p:nvCxnSpPr>
-        <p:spPr>
-          <a:xfrm>
-            <a:off x="3131042" y="2707481"/>
-            <a:ext cx="165685" cy="466724"/>
-          </a:xfrm>
-          <a:prstGeom prst="line">
-            <a:avLst/>
-          </a:prstGeom>
-          <a:ln w="12700" cap="rnd">
-            <a:solidFill>
-              <a:schemeClr val="tx1">
-                <a:lumMod val="85000"/>
-                <a:lumOff val="15000"/>
-              </a:schemeClr>
-            </a:solidFill>
-            <a:prstDash val="dash"/>
-            <a:round/>
-          </a:ln>
-        </p:spPr>
-        <p:style>
-          <a:lnRef idx="1">
-            <a:schemeClr val="accent1"/>
-          </a:lnRef>
-          <a:fillRef idx="0">
-            <a:schemeClr val="accent1"/>
-          </a:fillRef>
-          <a:effectRef idx="0">
-            <a:schemeClr val="accent1"/>
-          </a:effectRef>
-          <a:fontRef idx="minor">
-            <a:schemeClr val="tx1"/>
-          </a:fontRef>
-        </p:style>
-      </p:cxnSp>
-      <mc:AlternateContent xmlns:mc="http://schemas.openxmlformats.org/markup-compatibility/2006">
-        <mc:Choice xmlns:a14="http://schemas.microsoft.com/office/drawing/2010/main" Requires="a14">
+      <mc:AlternateContent xmlns:mc="http://schemas.openxmlformats.org/markup-compatibility/2006" xmlns:a14="http://schemas.microsoft.com/office/drawing/2010/main">
+        <mc:Choice Requires="a14">
           <p:sp>
             <p:nvSpPr>
               <p:cNvPr id="43" name="TextBox 42"/>
@@ -3102,7 +3003,7 @@
             </p:txBody>
           </p:sp>
         </mc:Choice>
-        <mc:Fallback>
+        <mc:Fallback xmlns="">
           <p:sp>
             <p:nvSpPr>
               <p:cNvPr id="43" name="TextBox 42"/>
@@ -3392,54 +3293,6 @@
       </p:cxnSp>
       <p:cxnSp>
         <p:nvCxnSpPr>
-          <p:cNvPr id="50" name="Straight Connector 49">
-            <a:extLst>
-              <a:ext uri="{FF2B5EF4-FFF2-40B4-BE49-F238E27FC236}">
-                <a16:creationId xmlns:a16="http://schemas.microsoft.com/office/drawing/2014/main" id="{F66A0BFF-7538-9DB3-9A9B-E74F66BBF8D5}"/>
-              </a:ext>
-            </a:extLst>
-          </p:cNvPr>
-          <p:cNvCxnSpPr>
-            <a:cxnSpLocks/>
-          </p:cNvCxnSpPr>
-          <p:nvPr/>
-        </p:nvCxnSpPr>
-        <p:spPr>
-          <a:xfrm>
-            <a:off x="4212431" y="2368668"/>
-            <a:ext cx="312738" cy="880963"/>
-          </a:xfrm>
-          <a:prstGeom prst="line">
-            <a:avLst/>
-          </a:prstGeom>
-          <a:ln w="12700" cap="rnd">
-            <a:solidFill>
-              <a:schemeClr val="tx1">
-                <a:lumMod val="85000"/>
-                <a:lumOff val="15000"/>
-              </a:schemeClr>
-            </a:solidFill>
-            <a:prstDash val="dash"/>
-            <a:round/>
-          </a:ln>
-        </p:spPr>
-        <p:style>
-          <a:lnRef idx="1">
-            <a:schemeClr val="accent1"/>
-          </a:lnRef>
-          <a:fillRef idx="0">
-            <a:schemeClr val="accent1"/>
-          </a:fillRef>
-          <a:effectRef idx="0">
-            <a:schemeClr val="accent1"/>
-          </a:effectRef>
-          <a:fontRef idx="minor">
-            <a:schemeClr val="tx1"/>
-          </a:fontRef>
-        </p:style>
-      </p:cxnSp>
-      <p:cxnSp>
-        <p:nvCxnSpPr>
           <p:cNvPr id="38" name="Straight Arrow Connector 37">
             <a:extLst>
               <a:ext uri="{FF2B5EF4-FFF2-40B4-BE49-F238E27FC236}">
@@ -3600,166 +3453,8 @@
           </a:fontRef>
         </p:style>
       </p:cxnSp>
-      <p:cxnSp>
-        <p:nvCxnSpPr>
-          <p:cNvPr id="90" name="Straight Arrow Connector 89">
-            <a:extLst>
-              <a:ext uri="{FF2B5EF4-FFF2-40B4-BE49-F238E27FC236}">
-                <a16:creationId xmlns:a16="http://schemas.microsoft.com/office/drawing/2014/main" id="{DF5F5CAF-F444-E2BB-2FB5-FDC96AE78661}"/>
-              </a:ext>
-            </a:extLst>
-          </p:cNvPr>
-          <p:cNvCxnSpPr/>
-          <p:nvPr/>
-        </p:nvCxnSpPr>
-        <p:spPr>
-          <a:xfrm flipV="1">
-            <a:off x="3183731" y="2436019"/>
-            <a:ext cx="1052513" cy="373130"/>
-          </a:xfrm>
-          <a:prstGeom prst="straightConnector1">
-            <a:avLst/>
-          </a:prstGeom>
-          <a:ln>
-            <a:solidFill>
-              <a:schemeClr val="tx1"/>
-            </a:solidFill>
-            <a:headEnd type="arrow" w="sm" len="sm"/>
-            <a:tailEnd type="arrow" w="sm" len="sm"/>
-          </a:ln>
-        </p:spPr>
-        <p:style>
-          <a:lnRef idx="1">
-            <a:schemeClr val="accent1"/>
-          </a:lnRef>
-          <a:fillRef idx="0">
-            <a:schemeClr val="accent1"/>
-          </a:fillRef>
-          <a:effectRef idx="0">
-            <a:schemeClr val="accent1"/>
-          </a:effectRef>
-          <a:fontRef idx="minor">
-            <a:schemeClr val="tx1"/>
-          </a:fontRef>
-        </p:style>
-      </p:cxnSp>
-      <mc:AlternateContent xmlns:mc="http://schemas.openxmlformats.org/markup-compatibility/2006">
-        <mc:Choice xmlns:a14="http://schemas.microsoft.com/office/drawing/2010/main" Requires="a14">
-          <p:sp>
-            <p:nvSpPr>
-              <p:cNvPr id="92" name="TextBox 91">
-                <a:extLst>
-                  <a:ext uri="{FF2B5EF4-FFF2-40B4-BE49-F238E27FC236}">
-                    <a16:creationId xmlns:a16="http://schemas.microsoft.com/office/drawing/2014/main" id="{40D2853F-9772-0151-A105-A49278990065}"/>
-                  </a:ext>
-                </a:extLst>
-              </p:cNvPr>
-              <p:cNvSpPr txBox="1"/>
-              <p:nvPr/>
-            </p:nvSpPr>
-            <p:spPr>
-              <a:xfrm rot="20393323">
-                <a:off x="3558032" y="2471807"/>
-                <a:ext cx="283989" cy="314253"/>
-              </a:xfrm>
-              <a:prstGeom prst="rect">
-                <a:avLst/>
-              </a:prstGeom>
-              <a:solidFill>
-                <a:schemeClr val="bg1"/>
-              </a:solidFill>
-            </p:spPr>
-            <p:txBody>
-              <a:bodyPr wrap="none" lIns="0" tIns="0" rIns="0" bIns="0" rtlCol="0">
-                <a:spAutoFit/>
-              </a:bodyPr>
-              <a:lstStyle/>
-              <a:p>
-                <a:pPr/>
-                <a14:m>
-                  <m:oMathPara xmlns:m="http://schemas.openxmlformats.org/officeDocument/2006/math">
-                    <m:oMath>
-                      <m:sSub>
-                        <m:sSubPr>
-                          <m:ctrlPr>
-                            <a:rPr lang="en-US" sz="2000" b="0" i="1" smtClean="0">
-                              <a:latin typeface="Cambria Math" panose="02040503050406030204" pitchFamily="18" charset="0"/>
-                            </a:rPr>
-                          </m:ctrlPr>
-                        </m:sSubPr>
-                        <m:e>
-                          <m:r>
-                            <a:rPr lang="en-US" sz="2000" b="0" i="1" smtClean="0">
-                              <a:latin typeface="Cambria Math" panose="02040503050406030204" pitchFamily="18" charset="0"/>
-                            </a:rPr>
-                            <m:t>𝐹</m:t>
-                          </m:r>
-                        </m:e>
-                        <m:sub>
-                          <m:r>
-                            <a:rPr lang="en-US" sz="2000" i="1" smtClean="0">
-                              <a:latin typeface="Cambria Math" panose="02040503050406030204" pitchFamily="18" charset="0"/>
-                              <a:ea typeface="Cambria Math" panose="02040503050406030204" pitchFamily="18" charset="0"/>
-                            </a:rPr>
-                            <m:t>∥</m:t>
-                          </m:r>
-                        </m:sub>
-                      </m:sSub>
-                    </m:oMath>
-                  </m:oMathPara>
-                </a14:m>
-                <a:endParaRPr lang="en-US" sz="2000" dirty="0"/>
-              </a:p>
-            </p:txBody>
-          </p:sp>
-        </mc:Choice>
-        <mc:Fallback>
-          <p:sp>
-            <p:nvSpPr>
-              <p:cNvPr id="92" name="TextBox 91">
-                <a:extLst>
-                  <a:ext uri="{FF2B5EF4-FFF2-40B4-BE49-F238E27FC236}">
-                    <a16:creationId xmlns:a16="http://schemas.microsoft.com/office/drawing/2014/main" id="{40D2853F-9772-0151-A105-A49278990065}"/>
-                  </a:ext>
-                </a:extLst>
-              </p:cNvPr>
-              <p:cNvSpPr txBox="1">
-                <a:spLocks noRot="1" noChangeAspect="1" noMove="1" noResize="1" noEditPoints="1" noAdjustHandles="1" noChangeArrowheads="1" noChangeShapeType="1" noTextEdit="1"/>
-              </p:cNvSpPr>
-              <p:nvPr/>
-            </p:nvSpPr>
-            <p:spPr>
-              <a:xfrm rot="20393323">
-                <a:off x="3558032" y="2471807"/>
-                <a:ext cx="283989" cy="314253"/>
-              </a:xfrm>
-              <a:prstGeom prst="rect">
-                <a:avLst/>
-              </a:prstGeom>
-              <a:blipFill>
-                <a:blip r:embed="rId3"/>
-                <a:stretch>
-                  <a:fillRect l="-11290" r="-14516" b="-9231"/>
-                </a:stretch>
-              </a:blipFill>
-            </p:spPr>
-            <p:txBody>
-              <a:bodyPr/>
-              <a:lstStyle/>
-              <a:p>
-                <a:r>
-                  <a:rPr lang="en-IN">
-                    <a:noFill/>
-                  </a:rPr>
-                  <a:t> </a:t>
-                </a:r>
-              </a:p>
-            </p:txBody>
-          </p:sp>
-        </mc:Fallback>
-      </mc:AlternateContent>
-      <mc:AlternateContent xmlns:mc="http://schemas.openxmlformats.org/markup-compatibility/2006">
-        <mc:Choice xmlns:a14="http://schemas.microsoft.com/office/drawing/2010/main" Requires="a14">
+      <mc:AlternateContent xmlns:mc="http://schemas.openxmlformats.org/markup-compatibility/2006" xmlns:a14="http://schemas.microsoft.com/office/drawing/2010/main">
+        <mc:Choice Requires="a14">
           <p:sp>
             <p:nvSpPr>
               <p:cNvPr id="94" name="TextBox 93">
@@ -3851,7 +3546,7 @@
             </p:txBody>
           </p:sp>
         </mc:Choice>
-        <mc:Fallback>
+        <mc:Fallback xmlns="">
           <p:sp>
             <p:nvSpPr>
               <p:cNvPr id="94" name="TextBox 93">
@@ -3896,8 +3591,8 @@
           </p:sp>
         </mc:Fallback>
       </mc:AlternateContent>
-      <mc:AlternateContent xmlns:mc="http://schemas.openxmlformats.org/markup-compatibility/2006">
-        <mc:Choice xmlns:a14="http://schemas.microsoft.com/office/drawing/2010/main" Requires="a14">
+      <mc:AlternateContent xmlns:mc="http://schemas.openxmlformats.org/markup-compatibility/2006" xmlns:a14="http://schemas.microsoft.com/office/drawing/2010/main">
+        <mc:Choice Requires="a14">
           <p:sp>
             <p:nvSpPr>
               <p:cNvPr id="98" name="TextBox 97">
@@ -3965,7 +3660,7 @@
             </p:txBody>
           </p:sp>
         </mc:Choice>
-        <mc:Fallback>
+        <mc:Fallback xmlns="">
           <p:sp>
             <p:nvSpPr>
               <p:cNvPr id="98" name="TextBox 97">
@@ -4010,8 +3705,8 @@
           </p:sp>
         </mc:Fallback>
       </mc:AlternateContent>
-      <mc:AlternateContent xmlns:mc="http://schemas.openxmlformats.org/markup-compatibility/2006">
-        <mc:Choice xmlns:a14="http://schemas.microsoft.com/office/drawing/2010/main" Requires="a14">
+      <mc:AlternateContent xmlns:mc="http://schemas.openxmlformats.org/markup-compatibility/2006" xmlns:a14="http://schemas.microsoft.com/office/drawing/2010/main">
+        <mc:Choice Requires="a14">
           <p:sp>
             <p:nvSpPr>
               <p:cNvPr id="100" name="TextBox 99">
@@ -4070,7 +3765,7 @@
             </p:txBody>
           </p:sp>
         </mc:Choice>
-        <mc:Fallback>
+        <mc:Fallback xmlns="">
           <p:sp>
             <p:nvSpPr>
               <p:cNvPr id="100" name="TextBox 99">
@@ -4115,100 +3810,6 @@
           </p:sp>
         </mc:Fallback>
       </mc:AlternateContent>
-      <mc:AlternateContent xmlns:mc="http://schemas.openxmlformats.org/markup-compatibility/2006">
-        <mc:Choice xmlns:a14="http://schemas.microsoft.com/office/drawing/2010/main" Requires="a14">
-          <p:sp>
-            <p:nvSpPr>
-              <p:cNvPr id="104" name="TextBox 103">
-                <a:extLst>
-                  <a:ext uri="{FF2B5EF4-FFF2-40B4-BE49-F238E27FC236}">
-                    <a16:creationId xmlns:a16="http://schemas.microsoft.com/office/drawing/2014/main" id="{91BB2D4A-E70E-63C5-21F8-A4767B600A63}"/>
-                  </a:ext>
-                </a:extLst>
-              </p:cNvPr>
-              <p:cNvSpPr txBox="1"/>
-              <p:nvPr/>
-            </p:nvSpPr>
-            <p:spPr>
-              <a:xfrm>
-                <a:off x="3659292" y="2958758"/>
-                <a:ext cx="338234" cy="307777"/>
-              </a:xfrm>
-              <a:prstGeom prst="rect">
-                <a:avLst/>
-              </a:prstGeom>
-              <a:noFill/>
-            </p:spPr>
-            <p:txBody>
-              <a:bodyPr wrap="square" lIns="0" tIns="0" rIns="0" bIns="0" rtlCol="0">
-                <a:spAutoFit/>
-              </a:bodyPr>
-              <a:lstStyle/>
-              <a:p>
-                <a:pPr/>
-                <a14:m>
-                  <m:oMathPara xmlns:m="http://schemas.openxmlformats.org/officeDocument/2006/math">
-                    <m:oMath>
-                      <m:r>
-                        <a:rPr lang="en-US" sz="2000" b="0" i="1" smtClean="0">
-                          <a:latin typeface="Cambria Math" panose="02040503050406030204" pitchFamily="18" charset="0"/>
-                          <a:ea typeface="Cambria Math" panose="02040503050406030204" pitchFamily="18" charset="0"/>
-                        </a:rPr>
-                        <m:t>𝜃</m:t>
-                      </m:r>
-                    </m:oMath>
-                  </m:oMathPara>
-                </a14:m>
-                <a:endParaRPr lang="en-US" sz="2000" i="1" dirty="0"/>
-              </a:p>
-            </p:txBody>
-          </p:sp>
-        </mc:Choice>
-        <mc:Fallback>
-          <p:sp>
-            <p:nvSpPr>
-              <p:cNvPr id="104" name="TextBox 103">
-                <a:extLst>
-                  <a:ext uri="{FF2B5EF4-FFF2-40B4-BE49-F238E27FC236}">
-                    <a16:creationId xmlns:a16="http://schemas.microsoft.com/office/drawing/2014/main" id="{91BB2D4A-E70E-63C5-21F8-A4767B600A63}"/>
-                  </a:ext>
-                </a:extLst>
-              </p:cNvPr>
-              <p:cNvSpPr txBox="1">
-                <a:spLocks noRot="1" noChangeAspect="1" noMove="1" noResize="1" noEditPoints="1" noAdjustHandles="1" noChangeArrowheads="1" noChangeShapeType="1" noTextEdit="1"/>
-              </p:cNvSpPr>
-              <p:nvPr/>
-            </p:nvSpPr>
-            <p:spPr>
-              <a:xfrm>
-                <a:off x="3659292" y="2958758"/>
-                <a:ext cx="338234" cy="307777"/>
-              </a:xfrm>
-              <a:prstGeom prst="rect">
-                <a:avLst/>
-              </a:prstGeom>
-              <a:blipFill>
-                <a:blip r:embed="rId7"/>
-                <a:stretch>
-                  <a:fillRect b="-5882"/>
-                </a:stretch>
-              </a:blipFill>
-            </p:spPr>
-            <p:txBody>
-              <a:bodyPr/>
-              <a:lstStyle/>
-              <a:p>
-                <a:r>
-                  <a:rPr lang="en-IN">
-                    <a:noFill/>
-                  </a:rPr>
-                  <a:t> </a:t>
-                </a:r>
-              </a:p>
-            </p:txBody>
-          </p:sp>
-        </mc:Fallback>
-      </mc:AlternateContent>
       <p:sp>
         <p:nvSpPr>
           <p:cNvPr id="106" name="Oval 105">
@@ -4313,8 +3914,8 @@
           </a:p>
         </p:txBody>
       </p:sp>
-      <mc:AlternateContent xmlns:mc="http://schemas.openxmlformats.org/markup-compatibility/2006">
-        <mc:Choice xmlns:a14="http://schemas.microsoft.com/office/drawing/2010/main" Requires="a14">
+      <mc:AlternateContent xmlns:mc="http://schemas.openxmlformats.org/markup-compatibility/2006" xmlns:a14="http://schemas.microsoft.com/office/drawing/2010/main">
+        <mc:Choice Requires="a14">
           <p:sp>
             <p:nvSpPr>
               <p:cNvPr id="110" name="TextBox 109">
@@ -4362,7 +3963,7 @@
             </p:txBody>
           </p:sp>
         </mc:Choice>
-        <mc:Fallback>
+        <mc:Fallback xmlns="">
           <p:sp>
             <p:nvSpPr>
               <p:cNvPr id="110" name="TextBox 109">
@@ -4407,8 +4008,8 @@
           </p:sp>
         </mc:Fallback>
       </mc:AlternateContent>
-      <mc:AlternateContent xmlns:mc="http://schemas.openxmlformats.org/markup-compatibility/2006">
-        <mc:Choice xmlns:a14="http://schemas.microsoft.com/office/drawing/2010/main" Requires="a14">
+      <mc:AlternateContent xmlns:mc="http://schemas.openxmlformats.org/markup-compatibility/2006" xmlns:a14="http://schemas.microsoft.com/office/drawing/2010/main">
+        <mc:Choice Requires="a14">
           <p:sp>
             <p:nvSpPr>
               <p:cNvPr id="112" name="TextBox 111">
@@ -4456,7 +4057,7 @@
             </p:txBody>
           </p:sp>
         </mc:Choice>
-        <mc:Fallback>
+        <mc:Fallback xmlns="">
           <p:sp>
             <p:nvSpPr>
               <p:cNvPr id="112" name="TextBox 111">
@@ -4501,8 +4102,8 @@
           </p:sp>
         </mc:Fallback>
       </mc:AlternateContent>
-      <mc:AlternateContent xmlns:mc="http://schemas.openxmlformats.org/markup-compatibility/2006">
-        <mc:Choice xmlns:a14="http://schemas.microsoft.com/office/drawing/2010/main" Requires="a14">
+      <mc:AlternateContent xmlns:mc="http://schemas.openxmlformats.org/markup-compatibility/2006" xmlns:a14="http://schemas.microsoft.com/office/drawing/2010/main">
+        <mc:Choice Requires="a14">
           <p:sp>
             <p:nvSpPr>
               <p:cNvPr id="114" name="TextBox 113">
@@ -4550,7 +4151,7 @@
             </p:txBody>
           </p:sp>
         </mc:Choice>
-        <mc:Fallback>
+        <mc:Fallback xmlns="">
           <p:sp>
             <p:nvSpPr>
               <p:cNvPr id="114" name="TextBox 113">
@@ -4647,8 +4248,8 @@
           </a:p>
         </p:txBody>
       </p:sp>
-      <mc:AlternateContent xmlns:mc="http://schemas.openxmlformats.org/markup-compatibility/2006">
-        <mc:Choice xmlns:a14="http://schemas.microsoft.com/office/drawing/2010/main" Requires="a14">
+      <mc:AlternateContent xmlns:mc="http://schemas.openxmlformats.org/markup-compatibility/2006" xmlns:a14="http://schemas.microsoft.com/office/drawing/2010/main">
+        <mc:Choice Requires="a14">
           <p:sp>
             <p:nvSpPr>
               <p:cNvPr id="118" name="TextBox 117">
@@ -4696,7 +4297,7 @@
             </p:txBody>
           </p:sp>
         </mc:Choice>
-        <mc:Fallback>
+        <mc:Fallback xmlns="">
           <p:sp>
             <p:nvSpPr>
               <p:cNvPr id="118" name="TextBox 117">
@@ -4741,8 +4342,8 @@
           </p:sp>
         </mc:Fallback>
       </mc:AlternateContent>
-      <mc:AlternateContent xmlns:mc="http://schemas.openxmlformats.org/markup-compatibility/2006">
-        <mc:Choice xmlns:a14="http://schemas.microsoft.com/office/drawing/2010/main" Requires="a14">
+      <mc:AlternateContent xmlns:mc="http://schemas.openxmlformats.org/markup-compatibility/2006" xmlns:a14="http://schemas.microsoft.com/office/drawing/2010/main">
+        <mc:Choice Requires="a14">
           <p:sp>
             <p:nvSpPr>
               <p:cNvPr id="120" name="TextBox 119">
@@ -4790,7 +4391,7 @@
             </p:txBody>
           </p:sp>
         </mc:Choice>
-        <mc:Fallback>
+        <mc:Fallback xmlns="">
           <p:sp>
             <p:nvSpPr>
               <p:cNvPr id="120" name="TextBox 119">
@@ -4839,6 +4440,1947 @@
     <p:extLst>
       <p:ext uri="{BB962C8B-B14F-4D97-AF65-F5344CB8AC3E}">
         <p14:creationId xmlns:p14="http://schemas.microsoft.com/office/powerpoint/2010/main" val="3326414452"/>
+      </p:ext>
+    </p:extLst>
+  </p:cSld>
+  <p:clrMapOvr>
+    <a:masterClrMapping/>
+  </p:clrMapOvr>
+</p:sld>
+</file>
+
+<file path=ppt/slides/slide2.xml><?xml version="1.0" encoding="utf-8"?>
+<p:sld xmlns:a="http://schemas.openxmlformats.org/drawingml/2006/main" xmlns:r="http://schemas.openxmlformats.org/officeDocument/2006/relationships" xmlns:p="http://schemas.openxmlformats.org/presentationml/2006/main">
+  <p:cSld>
+    <p:spTree>
+      <p:nvGrpSpPr>
+        <p:cNvPr id="1" name="">
+          <a:extLst>
+            <a:ext uri="{FF2B5EF4-FFF2-40B4-BE49-F238E27FC236}">
+              <a16:creationId xmlns:a16="http://schemas.microsoft.com/office/drawing/2014/main" id="{33F1DB02-023C-94EC-AF71-0BD6C2AEB5D2}"/>
+            </a:ext>
+          </a:extLst>
+        </p:cNvPr>
+        <p:cNvGrpSpPr/>
+        <p:nvPr/>
+      </p:nvGrpSpPr>
+      <p:grpSpPr>
+        <a:xfrm>
+          <a:off x="0" y="0"/>
+          <a:ext cx="0" cy="0"/>
+          <a:chOff x="0" y="0"/>
+          <a:chExt cx="0" cy="0"/>
+        </a:xfrm>
+      </p:grpSpPr>
+      <p:sp>
+        <p:nvSpPr>
+          <p:cNvPr id="101" name="Arc 100">
+            <a:extLst>
+              <a:ext uri="{FF2B5EF4-FFF2-40B4-BE49-F238E27FC236}">
+                <a16:creationId xmlns:a16="http://schemas.microsoft.com/office/drawing/2014/main" id="{1C18C743-36B9-E7D3-644E-BCEBC94E6E68}"/>
+              </a:ext>
+            </a:extLst>
+          </p:cNvPr>
+          <p:cNvSpPr/>
+          <p:nvPr/>
+        </p:nvSpPr>
+        <p:spPr>
+          <a:xfrm rot="1336568">
+            <a:off x="3400329" y="2985954"/>
+            <a:ext cx="303021" cy="330200"/>
+          </a:xfrm>
+          <a:prstGeom prst="arc">
+            <a:avLst>
+              <a:gd name="adj1" fmla="val 17541800"/>
+              <a:gd name="adj2" fmla="val 227391"/>
+            </a:avLst>
+          </a:prstGeom>
+          <a:ln w="12700">
+            <a:solidFill>
+              <a:schemeClr val="tx1"/>
+            </a:solidFill>
+          </a:ln>
+        </p:spPr>
+        <p:style>
+          <a:lnRef idx="1">
+            <a:schemeClr val="accent1"/>
+          </a:lnRef>
+          <a:fillRef idx="0">
+            <a:schemeClr val="accent1"/>
+          </a:fillRef>
+          <a:effectRef idx="0">
+            <a:schemeClr val="accent1"/>
+          </a:effectRef>
+          <a:fontRef idx="minor">
+            <a:schemeClr val="tx1"/>
+          </a:fontRef>
+        </p:style>
+        <p:txBody>
+          <a:bodyPr rtlCol="0" anchor="ctr"/>
+          <a:lstStyle/>
+          <a:p>
+            <a:pPr algn="ctr"/>
+            <a:endParaRPr lang="en-IN"/>
+          </a:p>
+        </p:txBody>
+      </p:sp>
+      <p:cxnSp>
+        <p:nvCxnSpPr>
+          <p:cNvPr id="85" name="Straight Connector 84">
+            <a:extLst>
+              <a:ext uri="{FF2B5EF4-FFF2-40B4-BE49-F238E27FC236}">
+                <a16:creationId xmlns:a16="http://schemas.microsoft.com/office/drawing/2014/main" id="{8A199E41-2CA4-6BC2-74D9-15EA841E81C6}"/>
+              </a:ext>
+            </a:extLst>
+          </p:cNvPr>
+          <p:cNvCxnSpPr>
+            <a:cxnSpLocks/>
+          </p:cNvCxnSpPr>
+          <p:nvPr/>
+        </p:nvCxnSpPr>
+        <p:spPr>
+          <a:xfrm>
+            <a:off x="3131042" y="2707481"/>
+            <a:ext cx="165685" cy="466724"/>
+          </a:xfrm>
+          <a:prstGeom prst="line">
+            <a:avLst/>
+          </a:prstGeom>
+          <a:ln w="12700" cap="rnd">
+            <a:solidFill>
+              <a:schemeClr val="tx1">
+                <a:lumMod val="85000"/>
+                <a:lumOff val="15000"/>
+              </a:schemeClr>
+            </a:solidFill>
+            <a:prstDash val="dash"/>
+            <a:round/>
+          </a:ln>
+        </p:spPr>
+        <p:style>
+          <a:lnRef idx="1">
+            <a:schemeClr val="accent1"/>
+          </a:lnRef>
+          <a:fillRef idx="0">
+            <a:schemeClr val="accent1"/>
+          </a:fillRef>
+          <a:effectRef idx="0">
+            <a:schemeClr val="accent1"/>
+          </a:effectRef>
+          <a:fontRef idx="minor">
+            <a:schemeClr val="tx1"/>
+          </a:fontRef>
+        </p:style>
+      </p:cxnSp>
+      <mc:AlternateContent xmlns:mc="http://schemas.openxmlformats.org/markup-compatibility/2006" xmlns:a14="http://schemas.microsoft.com/office/drawing/2010/main">
+        <mc:Choice Requires="a14">
+          <p:sp>
+            <p:nvSpPr>
+              <p:cNvPr id="43" name="TextBox 42">
+                <a:extLst>
+                  <a:ext uri="{FF2B5EF4-FFF2-40B4-BE49-F238E27FC236}">
+                    <a16:creationId xmlns:a16="http://schemas.microsoft.com/office/drawing/2014/main" id="{D40CC65D-8E52-39B1-CEE0-B17C91BD7C66}"/>
+                  </a:ext>
+                </a:extLst>
+              </p:cNvPr>
+              <p:cNvSpPr txBox="1"/>
+              <p:nvPr/>
+            </p:nvSpPr>
+            <p:spPr>
+              <a:xfrm>
+                <a:off x="3691825" y="4044521"/>
+                <a:ext cx="195566" cy="307777"/>
+              </a:xfrm>
+              <a:prstGeom prst="rect">
+                <a:avLst/>
+              </a:prstGeom>
+              <a:noFill/>
+            </p:spPr>
+            <p:txBody>
+              <a:bodyPr wrap="none" lIns="0" tIns="0" rIns="0" bIns="0" rtlCol="0">
+                <a:spAutoFit/>
+              </a:bodyPr>
+              <a:lstStyle/>
+              <a:p>
+                <a:pPr/>
+                <a14:m>
+                  <m:oMathPara xmlns:m="http://schemas.openxmlformats.org/officeDocument/2006/math">
+                    <m:oMath>
+                      <m:acc>
+                        <m:accPr>
+                          <m:chr m:val="̅"/>
+                          <m:ctrlPr>
+                            <a:rPr lang="en-US" sz="2000" b="1" i="1" smtClean="0">
+                              <a:latin typeface="Cambria Math" panose="02040503050406030204" pitchFamily="18" charset="0"/>
+                            </a:rPr>
+                          </m:ctrlPr>
+                        </m:accPr>
+                        <m:e>
+                          <m:r>
+                            <a:rPr lang="en-US" sz="2000" b="1" i="1" smtClean="0">
+                              <a:latin typeface="Cambria Math" panose="02040503050406030204" pitchFamily="18" charset="0"/>
+                            </a:rPr>
+                            <m:t>𝒓</m:t>
+                          </m:r>
+                        </m:e>
+                      </m:acc>
+                    </m:oMath>
+                  </m:oMathPara>
+                </a14:m>
+                <a:endParaRPr lang="en-US" sz="2000" dirty="0"/>
+              </a:p>
+            </p:txBody>
+          </p:sp>
+        </mc:Choice>
+        <mc:Fallback xmlns="">
+          <p:sp>
+            <p:nvSpPr>
+              <p:cNvPr id="43" name="TextBox 42">
+                <a:extLst>
+                  <a:ext uri="{FF2B5EF4-FFF2-40B4-BE49-F238E27FC236}">
+                    <a16:creationId xmlns:a16="http://schemas.microsoft.com/office/drawing/2014/main" id="{D40CC65D-8E52-39B1-CEE0-B17C91BD7C66}"/>
+                  </a:ext>
+                </a:extLst>
+              </p:cNvPr>
+              <p:cNvSpPr txBox="1">
+                <a:spLocks noRot="1" noChangeAspect="1" noMove="1" noResize="1" noEditPoints="1" noAdjustHandles="1" noChangeArrowheads="1" noChangeShapeType="1" noTextEdit="1"/>
+              </p:cNvSpPr>
+              <p:nvPr/>
+            </p:nvSpPr>
+            <p:spPr>
+              <a:xfrm>
+                <a:off x="3691825" y="4044521"/>
+                <a:ext cx="195566" cy="307777"/>
+              </a:xfrm>
+              <a:prstGeom prst="rect">
+                <a:avLst/>
+              </a:prstGeom>
+              <a:blipFill>
+                <a:blip r:embed="rId2"/>
+                <a:stretch>
+                  <a:fillRect l="-18750" r="-34375"/>
+                </a:stretch>
+              </a:blipFill>
+            </p:spPr>
+            <p:txBody>
+              <a:bodyPr/>
+              <a:lstStyle/>
+              <a:p>
+                <a:r>
+                  <a:rPr lang="en-IN">
+                    <a:noFill/>
+                  </a:rPr>
+                  <a:t> </a:t>
+                </a:r>
+              </a:p>
+            </p:txBody>
+          </p:sp>
+        </mc:Fallback>
+      </mc:AlternateContent>
+      <p:sp>
+        <p:nvSpPr>
+          <p:cNvPr id="4" name="Freeform: Shape 3">
+            <a:extLst>
+              <a:ext uri="{FF2B5EF4-FFF2-40B4-BE49-F238E27FC236}">
+                <a16:creationId xmlns:a16="http://schemas.microsoft.com/office/drawing/2014/main" id="{87502716-AB6F-D299-8615-FD22DCCF9747}"/>
+              </a:ext>
+            </a:extLst>
+          </p:cNvPr>
+          <p:cNvSpPr/>
+          <p:nvPr/>
+        </p:nvSpPr>
+        <p:spPr>
+          <a:xfrm>
+            <a:off x="2590510" y="1999527"/>
+            <a:ext cx="5428526" cy="2465407"/>
+          </a:xfrm>
+          <a:custGeom>
+            <a:avLst/>
+            <a:gdLst>
+              <a:gd name="csX0" fmla="*/ 0 w 5428526"/>
+              <a:gd name="csY0" fmla="*/ 2465407 h 2465407"/>
+              <a:gd name="csX1" fmla="*/ 2372809 w 5428526"/>
+              <a:gd name="csY1" fmla="*/ 706055 h 2465407"/>
+              <a:gd name="csX2" fmla="*/ 5428526 w 5428526"/>
+              <a:gd name="csY2" fmla="*/ 0 h 2465407"/>
+            </a:gdLst>
+            <a:ahLst/>
+            <a:cxnLst>
+              <a:cxn ang="0">
+                <a:pos x="csX0" y="csY0"/>
+              </a:cxn>
+              <a:cxn ang="0">
+                <a:pos x="csX1" y="csY1"/>
+              </a:cxn>
+              <a:cxn ang="0">
+                <a:pos x="csX2" y="csY2"/>
+              </a:cxn>
+            </a:cxnLst>
+            <a:rect l="l" t="t" r="r" b="b"/>
+            <a:pathLst>
+              <a:path w="5428526" h="2465407">
+                <a:moveTo>
+                  <a:pt x="0" y="2465407"/>
+                </a:moveTo>
+                <a:cubicBezTo>
+                  <a:pt x="559443" y="898002"/>
+                  <a:pt x="1294435" y="572946"/>
+                  <a:pt x="2372809" y="706055"/>
+                </a:cubicBezTo>
+                <a:cubicBezTo>
+                  <a:pt x="3451183" y="839164"/>
+                  <a:pt x="4058855" y="1492170"/>
+                  <a:pt x="5428526" y="0"/>
+                </a:cubicBezTo>
+              </a:path>
+            </a:pathLst>
+          </a:custGeom>
+          <a:noFill/>
+          <a:ln w="28575" cap="rnd">
+            <a:solidFill>
+              <a:schemeClr val="accent1">
+                <a:lumMod val="75000"/>
+              </a:schemeClr>
+            </a:solidFill>
+            <a:round/>
+          </a:ln>
+        </p:spPr>
+        <p:style>
+          <a:lnRef idx="2">
+            <a:schemeClr val="accent1">
+              <a:shade val="15000"/>
+            </a:schemeClr>
+          </a:lnRef>
+          <a:fillRef idx="1">
+            <a:schemeClr val="accent1"/>
+          </a:fillRef>
+          <a:effectRef idx="0">
+            <a:schemeClr val="accent1"/>
+          </a:effectRef>
+          <a:fontRef idx="minor">
+            <a:schemeClr val="lt1"/>
+          </a:fontRef>
+        </p:style>
+        <p:txBody>
+          <a:bodyPr rtlCol="0" anchor="ctr"/>
+          <a:lstStyle/>
+          <a:p>
+            <a:pPr algn="ctr"/>
+            <a:endParaRPr lang="en-IN"/>
+          </a:p>
+        </p:txBody>
+      </p:sp>
+      <p:cxnSp>
+        <p:nvCxnSpPr>
+          <p:cNvPr id="31" name="Straight Arrow Connector 30">
+            <a:extLst>
+              <a:ext uri="{FF2B5EF4-FFF2-40B4-BE49-F238E27FC236}">
+                <a16:creationId xmlns:a16="http://schemas.microsoft.com/office/drawing/2014/main" id="{1322A60F-A392-F3F8-461A-A5B665ED5D72}"/>
+              </a:ext>
+            </a:extLst>
+          </p:cNvPr>
+          <p:cNvCxnSpPr>
+            <a:cxnSpLocks/>
+            <a:endCxn id="26" idx="5"/>
+          </p:cNvCxnSpPr>
+          <p:nvPr/>
+        </p:nvCxnSpPr>
+        <p:spPr>
+          <a:xfrm flipH="1" flipV="1">
+            <a:off x="3342856" y="3230936"/>
+            <a:ext cx="1543370" cy="2224482"/>
+          </a:xfrm>
+          <a:prstGeom prst="straightConnector1">
+            <a:avLst/>
+          </a:prstGeom>
+          <a:ln w="19050">
+            <a:solidFill>
+              <a:schemeClr val="tx1"/>
+            </a:solidFill>
+            <a:tailEnd type="stealth" w="lg" len="lg"/>
+          </a:ln>
+        </p:spPr>
+        <p:style>
+          <a:lnRef idx="1">
+            <a:schemeClr val="accent1"/>
+          </a:lnRef>
+          <a:fillRef idx="0">
+            <a:schemeClr val="accent1"/>
+          </a:fillRef>
+          <a:effectRef idx="0">
+            <a:schemeClr val="accent1"/>
+          </a:effectRef>
+          <a:fontRef idx="minor">
+            <a:schemeClr val="tx1"/>
+          </a:fontRef>
+        </p:style>
+      </p:cxnSp>
+      <p:sp>
+        <p:nvSpPr>
+          <p:cNvPr id="32" name="Oval 31">
+            <a:extLst>
+              <a:ext uri="{FF2B5EF4-FFF2-40B4-BE49-F238E27FC236}">
+                <a16:creationId xmlns:a16="http://schemas.microsoft.com/office/drawing/2014/main" id="{7272C3E2-8279-0C84-F5FB-D2C76D424996}"/>
+              </a:ext>
+            </a:extLst>
+          </p:cNvPr>
+          <p:cNvSpPr/>
+          <p:nvPr/>
+        </p:nvSpPr>
+        <p:spPr>
+          <a:xfrm>
+            <a:off x="4671218" y="2629693"/>
+            <a:ext cx="116681" cy="116681"/>
+          </a:xfrm>
+          <a:prstGeom prst="ellipse">
+            <a:avLst/>
+          </a:prstGeom>
+          <a:gradFill flip="none" rotWithShape="1">
+            <a:gsLst>
+              <a:gs pos="0">
+                <a:schemeClr val="accent1">
+                  <a:lumMod val="20000"/>
+                  <a:lumOff val="80000"/>
+                </a:schemeClr>
+              </a:gs>
+              <a:gs pos="54000">
+                <a:schemeClr val="accent5">
+                  <a:lumMod val="95000"/>
+                  <a:lumOff val="5000"/>
+                </a:schemeClr>
+              </a:gs>
+              <a:gs pos="100000">
+                <a:srgbClr val="1C325A"/>
+              </a:gs>
+            </a:gsLst>
+            <a:path path="circle">
+              <a:fillToRect r="100000" b="100000"/>
+            </a:path>
+            <a:tileRect l="-100000" t="-100000"/>
+          </a:gradFill>
+          <a:ln>
+            <a:noFill/>
+          </a:ln>
+        </p:spPr>
+        <p:style>
+          <a:lnRef idx="2">
+            <a:schemeClr val="accent1">
+              <a:shade val="15000"/>
+            </a:schemeClr>
+          </a:lnRef>
+          <a:fillRef idx="1">
+            <a:schemeClr val="accent1"/>
+          </a:fillRef>
+          <a:effectRef idx="0">
+            <a:schemeClr val="accent1"/>
+          </a:effectRef>
+          <a:fontRef idx="minor">
+            <a:schemeClr val="lt1"/>
+          </a:fontRef>
+        </p:style>
+        <p:txBody>
+          <a:bodyPr rtlCol="0" anchor="ctr"/>
+          <a:lstStyle/>
+          <a:p>
+            <a:pPr algn="ctr"/>
+            <a:endParaRPr lang="en-IN"/>
+          </a:p>
+        </p:txBody>
+      </p:sp>
+      <p:cxnSp>
+        <p:nvCxnSpPr>
+          <p:cNvPr id="33" name="Straight Arrow Connector 32">
+            <a:extLst>
+              <a:ext uri="{FF2B5EF4-FFF2-40B4-BE49-F238E27FC236}">
+                <a16:creationId xmlns:a16="http://schemas.microsoft.com/office/drawing/2014/main" id="{85863511-D0F5-16DF-D039-5E91A8DC0750}"/>
+              </a:ext>
+            </a:extLst>
+          </p:cNvPr>
+          <p:cNvCxnSpPr>
+            <a:cxnSpLocks/>
+            <a:endCxn id="32" idx="4"/>
+          </p:cNvCxnSpPr>
+          <p:nvPr/>
+        </p:nvCxnSpPr>
+        <p:spPr>
+          <a:xfrm flipH="1" flipV="1">
+            <a:off x="4729559" y="2746374"/>
+            <a:ext cx="156667" cy="2709044"/>
+          </a:xfrm>
+          <a:prstGeom prst="straightConnector1">
+            <a:avLst/>
+          </a:prstGeom>
+          <a:ln w="19050">
+            <a:solidFill>
+              <a:schemeClr val="tx1"/>
+            </a:solidFill>
+            <a:tailEnd type="stealth" w="lg" len="lg"/>
+          </a:ln>
+        </p:spPr>
+        <p:style>
+          <a:lnRef idx="1">
+            <a:schemeClr val="accent1"/>
+          </a:lnRef>
+          <a:fillRef idx="0">
+            <a:schemeClr val="accent1"/>
+          </a:fillRef>
+          <a:effectRef idx="0">
+            <a:schemeClr val="accent1"/>
+          </a:effectRef>
+          <a:fontRef idx="minor">
+            <a:schemeClr val="tx1"/>
+          </a:fontRef>
+        </p:style>
+      </p:cxnSp>
+      <p:cxnSp>
+        <p:nvCxnSpPr>
+          <p:cNvPr id="50" name="Straight Connector 49">
+            <a:extLst>
+              <a:ext uri="{FF2B5EF4-FFF2-40B4-BE49-F238E27FC236}">
+                <a16:creationId xmlns:a16="http://schemas.microsoft.com/office/drawing/2014/main" id="{095F0F8D-4F58-E1E7-78E0-E0F70C5CC466}"/>
+              </a:ext>
+            </a:extLst>
+          </p:cNvPr>
+          <p:cNvCxnSpPr>
+            <a:cxnSpLocks/>
+          </p:cNvCxnSpPr>
+          <p:nvPr/>
+        </p:nvCxnSpPr>
+        <p:spPr>
+          <a:xfrm>
+            <a:off x="4212431" y="2368668"/>
+            <a:ext cx="312738" cy="880963"/>
+          </a:xfrm>
+          <a:prstGeom prst="line">
+            <a:avLst/>
+          </a:prstGeom>
+          <a:ln w="12700" cap="rnd">
+            <a:solidFill>
+              <a:schemeClr val="tx1">
+                <a:lumMod val="85000"/>
+                <a:lumOff val="15000"/>
+              </a:schemeClr>
+            </a:solidFill>
+            <a:prstDash val="dash"/>
+            <a:round/>
+          </a:ln>
+        </p:spPr>
+        <p:style>
+          <a:lnRef idx="1">
+            <a:schemeClr val="accent1"/>
+          </a:lnRef>
+          <a:fillRef idx="0">
+            <a:schemeClr val="accent1"/>
+          </a:fillRef>
+          <a:effectRef idx="0">
+            <a:schemeClr val="accent1"/>
+          </a:effectRef>
+          <a:fontRef idx="minor">
+            <a:schemeClr val="tx1"/>
+          </a:fontRef>
+        </p:style>
+      </p:cxnSp>
+      <p:cxnSp>
+        <p:nvCxnSpPr>
+          <p:cNvPr id="38" name="Straight Arrow Connector 37">
+            <a:extLst>
+              <a:ext uri="{FF2B5EF4-FFF2-40B4-BE49-F238E27FC236}">
+                <a16:creationId xmlns:a16="http://schemas.microsoft.com/office/drawing/2014/main" id="{7CAC9EF2-E6E3-B0AF-B9E2-406CDDF0FDF4}"/>
+              </a:ext>
+            </a:extLst>
+          </p:cNvPr>
+          <p:cNvCxnSpPr>
+            <a:cxnSpLocks/>
+            <a:stCxn id="26" idx="7"/>
+            <a:endCxn id="32" idx="2"/>
+          </p:cNvCxnSpPr>
+          <p:nvPr/>
+        </p:nvCxnSpPr>
+        <p:spPr>
+          <a:xfrm flipV="1">
+            <a:off x="3342856" y="2688034"/>
+            <a:ext cx="1328362" cy="460397"/>
+          </a:xfrm>
+          <a:prstGeom prst="straightConnector1">
+            <a:avLst/>
+          </a:prstGeom>
+          <a:ln w="19050">
+            <a:solidFill>
+              <a:srgbClr val="862626"/>
+            </a:solidFill>
+            <a:tailEnd type="stealth" w="lg" len="lg"/>
+          </a:ln>
+        </p:spPr>
+        <p:style>
+          <a:lnRef idx="1">
+            <a:schemeClr val="accent1"/>
+          </a:lnRef>
+          <a:fillRef idx="0">
+            <a:schemeClr val="accent1"/>
+          </a:fillRef>
+          <a:effectRef idx="0">
+            <a:schemeClr val="accent1"/>
+          </a:effectRef>
+          <a:fontRef idx="minor">
+            <a:schemeClr val="tx1"/>
+          </a:fontRef>
+        </p:style>
+      </p:cxnSp>
+      <p:sp>
+        <p:nvSpPr>
+          <p:cNvPr id="26" name="Oval 25">
+            <a:extLst>
+              <a:ext uri="{FF2B5EF4-FFF2-40B4-BE49-F238E27FC236}">
+                <a16:creationId xmlns:a16="http://schemas.microsoft.com/office/drawing/2014/main" id="{AAFCDFD3-DA6B-9FBC-45DC-766384B751C8}"/>
+              </a:ext>
+            </a:extLst>
+          </p:cNvPr>
+          <p:cNvSpPr/>
+          <p:nvPr/>
+        </p:nvSpPr>
+        <p:spPr>
+          <a:xfrm>
+            <a:off x="3243263" y="3131343"/>
+            <a:ext cx="116681" cy="116681"/>
+          </a:xfrm>
+          <a:prstGeom prst="ellipse">
+            <a:avLst/>
+          </a:prstGeom>
+          <a:gradFill flip="none" rotWithShape="1">
+            <a:gsLst>
+              <a:gs pos="0">
+                <a:schemeClr val="accent1">
+                  <a:lumMod val="20000"/>
+                  <a:lumOff val="80000"/>
+                </a:schemeClr>
+              </a:gs>
+              <a:gs pos="54000">
+                <a:schemeClr val="accent5">
+                  <a:lumMod val="95000"/>
+                  <a:lumOff val="5000"/>
+                </a:schemeClr>
+              </a:gs>
+              <a:gs pos="100000">
+                <a:srgbClr val="1C325A"/>
+              </a:gs>
+            </a:gsLst>
+            <a:path path="circle">
+              <a:fillToRect r="100000" b="100000"/>
+            </a:path>
+            <a:tileRect l="-100000" t="-100000"/>
+          </a:gradFill>
+          <a:ln>
+            <a:noFill/>
+          </a:ln>
+        </p:spPr>
+        <p:style>
+          <a:lnRef idx="2">
+            <a:schemeClr val="accent1">
+              <a:shade val="15000"/>
+            </a:schemeClr>
+          </a:lnRef>
+          <a:fillRef idx="1">
+            <a:schemeClr val="accent1"/>
+          </a:fillRef>
+          <a:effectRef idx="0">
+            <a:schemeClr val="accent1"/>
+          </a:effectRef>
+          <a:fontRef idx="minor">
+            <a:schemeClr val="lt1"/>
+          </a:fontRef>
+        </p:style>
+        <p:txBody>
+          <a:bodyPr rtlCol="0" anchor="ctr"/>
+          <a:lstStyle/>
+          <a:p>
+            <a:pPr algn="ctr"/>
+            <a:endParaRPr lang="en-IN"/>
+          </a:p>
+        </p:txBody>
+      </p:sp>
+      <p:cxnSp>
+        <p:nvCxnSpPr>
+          <p:cNvPr id="66" name="Straight Arrow Connector 65">
+            <a:extLst>
+              <a:ext uri="{FF2B5EF4-FFF2-40B4-BE49-F238E27FC236}">
+                <a16:creationId xmlns:a16="http://schemas.microsoft.com/office/drawing/2014/main" id="{397882B5-0BDD-9312-EB1D-899C21DBE611}"/>
+              </a:ext>
+            </a:extLst>
+          </p:cNvPr>
+          <p:cNvCxnSpPr>
+            <a:cxnSpLocks/>
+          </p:cNvCxnSpPr>
+          <p:nvPr/>
+        </p:nvCxnSpPr>
+        <p:spPr>
+          <a:xfrm>
+            <a:off x="3359944" y="3196826"/>
+            <a:ext cx="1167606" cy="55268"/>
+          </a:xfrm>
+          <a:prstGeom prst="straightConnector1">
+            <a:avLst/>
+          </a:prstGeom>
+          <a:ln w="19050">
+            <a:solidFill>
+              <a:srgbClr val="003A00"/>
+            </a:solidFill>
+            <a:tailEnd type="stealth" w="lg" len="lg"/>
+          </a:ln>
+        </p:spPr>
+        <p:style>
+          <a:lnRef idx="1">
+            <a:schemeClr val="accent1"/>
+          </a:lnRef>
+          <a:fillRef idx="0">
+            <a:schemeClr val="accent1"/>
+          </a:fillRef>
+          <a:effectRef idx="0">
+            <a:schemeClr val="accent1"/>
+          </a:effectRef>
+          <a:fontRef idx="minor">
+            <a:schemeClr val="tx1"/>
+          </a:fontRef>
+        </p:style>
+      </p:cxnSp>
+      <p:cxnSp>
+        <p:nvCxnSpPr>
+          <p:cNvPr id="90" name="Straight Arrow Connector 89">
+            <a:extLst>
+              <a:ext uri="{FF2B5EF4-FFF2-40B4-BE49-F238E27FC236}">
+                <a16:creationId xmlns:a16="http://schemas.microsoft.com/office/drawing/2014/main" id="{D7E73836-6CCC-3198-B0AD-83EA3FB95441}"/>
+              </a:ext>
+            </a:extLst>
+          </p:cNvPr>
+          <p:cNvCxnSpPr/>
+          <p:nvPr/>
+        </p:nvCxnSpPr>
+        <p:spPr>
+          <a:xfrm flipV="1">
+            <a:off x="3183731" y="2436019"/>
+            <a:ext cx="1052513" cy="373130"/>
+          </a:xfrm>
+          <a:prstGeom prst="straightConnector1">
+            <a:avLst/>
+          </a:prstGeom>
+          <a:ln>
+            <a:solidFill>
+              <a:schemeClr val="tx1"/>
+            </a:solidFill>
+            <a:headEnd type="arrow" w="sm" len="sm"/>
+            <a:tailEnd type="arrow" w="sm" len="sm"/>
+          </a:ln>
+        </p:spPr>
+        <p:style>
+          <a:lnRef idx="1">
+            <a:schemeClr val="accent1"/>
+          </a:lnRef>
+          <a:fillRef idx="0">
+            <a:schemeClr val="accent1"/>
+          </a:fillRef>
+          <a:effectRef idx="0">
+            <a:schemeClr val="accent1"/>
+          </a:effectRef>
+          <a:fontRef idx="minor">
+            <a:schemeClr val="tx1"/>
+          </a:fontRef>
+        </p:style>
+      </p:cxnSp>
+      <mc:AlternateContent xmlns:mc="http://schemas.openxmlformats.org/markup-compatibility/2006" xmlns:a14="http://schemas.microsoft.com/office/drawing/2010/main">
+        <mc:Choice Requires="a14">
+          <p:sp>
+            <p:nvSpPr>
+              <p:cNvPr id="92" name="TextBox 91">
+                <a:extLst>
+                  <a:ext uri="{FF2B5EF4-FFF2-40B4-BE49-F238E27FC236}">
+                    <a16:creationId xmlns:a16="http://schemas.microsoft.com/office/drawing/2014/main" id="{2BE0F641-0BCF-218F-9BE8-5D3CD4D7AE67}"/>
+                  </a:ext>
+                </a:extLst>
+              </p:cNvPr>
+              <p:cNvSpPr txBox="1"/>
+              <p:nvPr/>
+            </p:nvSpPr>
+            <p:spPr>
+              <a:xfrm rot="20393323">
+                <a:off x="3558032" y="2471807"/>
+                <a:ext cx="283989" cy="314253"/>
+              </a:xfrm>
+              <a:prstGeom prst="rect">
+                <a:avLst/>
+              </a:prstGeom>
+              <a:solidFill>
+                <a:schemeClr val="bg1"/>
+              </a:solidFill>
+            </p:spPr>
+            <p:txBody>
+              <a:bodyPr wrap="none" lIns="0" tIns="0" rIns="0" bIns="0" rtlCol="0">
+                <a:spAutoFit/>
+              </a:bodyPr>
+              <a:lstStyle/>
+              <a:p>
+                <a:pPr/>
+                <a14:m>
+                  <m:oMathPara xmlns:m="http://schemas.openxmlformats.org/officeDocument/2006/math">
+                    <m:oMath>
+                      <m:sSub>
+                        <m:sSubPr>
+                          <m:ctrlPr>
+                            <a:rPr lang="en-US" sz="2000" b="0" i="1" smtClean="0">
+                              <a:latin typeface="Cambria Math" panose="02040503050406030204" pitchFamily="18" charset="0"/>
+                            </a:rPr>
+                          </m:ctrlPr>
+                        </m:sSubPr>
+                        <m:e>
+                          <m:r>
+                            <a:rPr lang="en-US" sz="2000" b="0" i="1" smtClean="0">
+                              <a:latin typeface="Cambria Math" panose="02040503050406030204" pitchFamily="18" charset="0"/>
+                            </a:rPr>
+                            <m:t>𝐹</m:t>
+                          </m:r>
+                        </m:e>
+                        <m:sub>
+                          <m:r>
+                            <a:rPr lang="en-US" sz="2000" i="1" smtClean="0">
+                              <a:latin typeface="Cambria Math" panose="02040503050406030204" pitchFamily="18" charset="0"/>
+                              <a:ea typeface="Cambria Math" panose="02040503050406030204" pitchFamily="18" charset="0"/>
+                            </a:rPr>
+                            <m:t>∥</m:t>
+                          </m:r>
+                        </m:sub>
+                      </m:sSub>
+                    </m:oMath>
+                  </m:oMathPara>
+                </a14:m>
+                <a:endParaRPr lang="en-US" sz="2000" dirty="0"/>
+              </a:p>
+            </p:txBody>
+          </p:sp>
+        </mc:Choice>
+        <mc:Fallback xmlns="">
+          <p:sp>
+            <p:nvSpPr>
+              <p:cNvPr id="92" name="TextBox 91">
+                <a:extLst>
+                  <a:ext uri="{FF2B5EF4-FFF2-40B4-BE49-F238E27FC236}">
+                    <a16:creationId xmlns:a16="http://schemas.microsoft.com/office/drawing/2014/main" id="{2BE0F641-0BCF-218F-9BE8-5D3CD4D7AE67}"/>
+                  </a:ext>
+                </a:extLst>
+              </p:cNvPr>
+              <p:cNvSpPr txBox="1">
+                <a:spLocks noRot="1" noChangeAspect="1" noMove="1" noResize="1" noEditPoints="1" noAdjustHandles="1" noChangeArrowheads="1" noChangeShapeType="1" noTextEdit="1"/>
+              </p:cNvSpPr>
+              <p:nvPr/>
+            </p:nvSpPr>
+            <p:spPr>
+              <a:xfrm rot="20393323">
+                <a:off x="3558032" y="2471807"/>
+                <a:ext cx="283989" cy="314253"/>
+              </a:xfrm>
+              <a:prstGeom prst="rect">
+                <a:avLst/>
+              </a:prstGeom>
+              <a:blipFill>
+                <a:blip r:embed="rId3"/>
+                <a:stretch>
+                  <a:fillRect l="-11290" r="-14516" b="-9231"/>
+                </a:stretch>
+              </a:blipFill>
+            </p:spPr>
+            <p:txBody>
+              <a:bodyPr/>
+              <a:lstStyle/>
+              <a:p>
+                <a:r>
+                  <a:rPr lang="en-IN">
+                    <a:noFill/>
+                  </a:rPr>
+                  <a:t> </a:t>
+                </a:r>
+              </a:p>
+            </p:txBody>
+          </p:sp>
+        </mc:Fallback>
+      </mc:AlternateContent>
+      <mc:AlternateContent xmlns:mc="http://schemas.openxmlformats.org/markup-compatibility/2006" xmlns:a14="http://schemas.microsoft.com/office/drawing/2010/main">
+        <mc:Choice Requires="a14">
+          <p:sp>
+            <p:nvSpPr>
+              <p:cNvPr id="94" name="TextBox 93">
+                <a:extLst>
+                  <a:ext uri="{FF2B5EF4-FFF2-40B4-BE49-F238E27FC236}">
+                    <a16:creationId xmlns:a16="http://schemas.microsoft.com/office/drawing/2014/main" id="{1AB4254A-E98D-84D7-7E60-ED11869FF266}"/>
+                  </a:ext>
+                </a:extLst>
+              </p:cNvPr>
+              <p:cNvSpPr txBox="1"/>
+              <p:nvPr/>
+            </p:nvSpPr>
+            <p:spPr>
+              <a:xfrm>
+                <a:off x="4865777" y="3736744"/>
+                <a:ext cx="782458" cy="307777"/>
+              </a:xfrm>
+              <a:prstGeom prst="rect">
+                <a:avLst/>
+              </a:prstGeom>
+              <a:noFill/>
+            </p:spPr>
+            <p:txBody>
+              <a:bodyPr wrap="none" lIns="0" tIns="0" rIns="0" bIns="0" rtlCol="0">
+                <a:spAutoFit/>
+              </a:bodyPr>
+              <a:lstStyle/>
+              <a:p>
+                <a:pPr/>
+                <a14:m>
+                  <m:oMathPara xmlns:m="http://schemas.openxmlformats.org/officeDocument/2006/math">
+                    <m:oMath>
+                      <m:acc>
+                        <m:accPr>
+                          <m:chr m:val="̅"/>
+                          <m:ctrlPr>
+                            <a:rPr lang="en-US" sz="2000" b="1" i="1" smtClean="0">
+                              <a:latin typeface="Cambria Math" panose="02040503050406030204" pitchFamily="18" charset="0"/>
+                            </a:rPr>
+                          </m:ctrlPr>
+                        </m:accPr>
+                        <m:e>
+                          <m:r>
+                            <a:rPr lang="en-US" sz="2000" b="1" i="1" smtClean="0">
+                              <a:latin typeface="Cambria Math" panose="02040503050406030204" pitchFamily="18" charset="0"/>
+                            </a:rPr>
+                            <m:t>𝒓</m:t>
+                          </m:r>
+                        </m:e>
+                      </m:acc>
+                      <m:r>
+                        <a:rPr lang="en-US" sz="2000" b="1" i="1" smtClean="0">
+                          <a:latin typeface="Cambria Math" panose="02040503050406030204" pitchFamily="18" charset="0"/>
+                        </a:rPr>
+                        <m:t>+</m:t>
+                      </m:r>
+                      <m:r>
+                        <m:rPr>
+                          <m:sty m:val="p"/>
+                        </m:rPr>
+                        <a:rPr lang="en-US" sz="2000" b="0" i="0" smtClean="0">
+                          <a:latin typeface="Cambria Math" panose="02040503050406030204" pitchFamily="18" charset="0"/>
+                        </a:rPr>
+                        <m:t>d</m:t>
+                      </m:r>
+                      <m:acc>
+                        <m:accPr>
+                          <m:chr m:val="̅"/>
+                          <m:ctrlPr>
+                            <a:rPr lang="en-US" sz="2000" b="1" i="1">
+                              <a:latin typeface="Cambria Math" panose="02040503050406030204" pitchFamily="18" charset="0"/>
+                            </a:rPr>
+                          </m:ctrlPr>
+                        </m:accPr>
+                        <m:e>
+                          <m:r>
+                            <a:rPr lang="en-US" sz="2000" b="1" i="1">
+                              <a:latin typeface="Cambria Math" panose="02040503050406030204" pitchFamily="18" charset="0"/>
+                            </a:rPr>
+                            <m:t>𝒓</m:t>
+                          </m:r>
+                        </m:e>
+                      </m:acc>
+                    </m:oMath>
+                  </m:oMathPara>
+                </a14:m>
+                <a:endParaRPr lang="en-US" sz="2000" dirty="0"/>
+              </a:p>
+            </p:txBody>
+          </p:sp>
+        </mc:Choice>
+        <mc:Fallback xmlns="">
+          <p:sp>
+            <p:nvSpPr>
+              <p:cNvPr id="94" name="TextBox 93">
+                <a:extLst>
+                  <a:ext uri="{FF2B5EF4-FFF2-40B4-BE49-F238E27FC236}">
+                    <a16:creationId xmlns:a16="http://schemas.microsoft.com/office/drawing/2014/main" id="{1AB4254A-E98D-84D7-7E60-ED11869FF266}"/>
+                  </a:ext>
+                </a:extLst>
+              </p:cNvPr>
+              <p:cNvSpPr txBox="1">
+                <a:spLocks noRot="1" noChangeAspect="1" noMove="1" noResize="1" noEditPoints="1" noAdjustHandles="1" noChangeArrowheads="1" noChangeShapeType="1" noTextEdit="1"/>
+              </p:cNvSpPr>
+              <p:nvPr/>
+            </p:nvSpPr>
+            <p:spPr>
+              <a:xfrm>
+                <a:off x="4865777" y="3736744"/>
+                <a:ext cx="782458" cy="307777"/>
+              </a:xfrm>
+              <a:prstGeom prst="rect">
+                <a:avLst/>
+              </a:prstGeom>
+              <a:blipFill>
+                <a:blip r:embed="rId4"/>
+                <a:stretch>
+                  <a:fillRect l="-4651" r="-39535" b="-8000"/>
+                </a:stretch>
+              </a:blipFill>
+            </p:spPr>
+            <p:txBody>
+              <a:bodyPr/>
+              <a:lstStyle/>
+              <a:p>
+                <a:r>
+                  <a:rPr lang="en-IN">
+                    <a:noFill/>
+                  </a:rPr>
+                  <a:t> </a:t>
+                </a:r>
+              </a:p>
+            </p:txBody>
+          </p:sp>
+        </mc:Fallback>
+      </mc:AlternateContent>
+      <mc:AlternateContent xmlns:mc="http://schemas.openxmlformats.org/markup-compatibility/2006" xmlns:a14="http://schemas.microsoft.com/office/drawing/2010/main">
+        <mc:Choice Requires="a14">
+          <p:sp>
+            <p:nvSpPr>
+              <p:cNvPr id="98" name="TextBox 97">
+                <a:extLst>
+                  <a:ext uri="{FF2B5EF4-FFF2-40B4-BE49-F238E27FC236}">
+                    <a16:creationId xmlns:a16="http://schemas.microsoft.com/office/drawing/2014/main" id="{CE2765A7-BA9C-2D72-D56B-B866A029A926}"/>
+                  </a:ext>
+                </a:extLst>
+              </p:cNvPr>
+              <p:cNvSpPr txBox="1"/>
+              <p:nvPr/>
+            </p:nvSpPr>
+            <p:spPr>
+              <a:xfrm>
+                <a:off x="4086012" y="2829218"/>
+                <a:ext cx="338234" cy="307777"/>
+              </a:xfrm>
+              <a:prstGeom prst="rect">
+                <a:avLst/>
+              </a:prstGeom>
+              <a:noFill/>
+            </p:spPr>
+            <p:txBody>
+              <a:bodyPr wrap="square" lIns="0" tIns="0" rIns="0" bIns="0" rtlCol="0">
+                <a:spAutoFit/>
+              </a:bodyPr>
+              <a:lstStyle/>
+              <a:p>
+                <a:pPr/>
+                <a14:m>
+                  <m:oMathPara xmlns:m="http://schemas.openxmlformats.org/officeDocument/2006/math">
+                    <m:oMath>
+                      <m:r>
+                        <m:rPr>
+                          <m:sty m:val="p"/>
+                        </m:rPr>
+                        <a:rPr lang="en-US" sz="2000" b="0" i="0" smtClean="0">
+                          <a:latin typeface="Cambria Math" panose="02040503050406030204" pitchFamily="18" charset="0"/>
+                        </a:rPr>
+                        <m:t>d</m:t>
+                      </m:r>
+                      <m:acc>
+                        <m:accPr>
+                          <m:chr m:val="̅"/>
+                          <m:ctrlPr>
+                            <a:rPr lang="en-US" sz="2000" b="1" i="1">
+                              <a:latin typeface="Cambria Math" panose="02040503050406030204" pitchFamily="18" charset="0"/>
+                            </a:rPr>
+                          </m:ctrlPr>
+                        </m:accPr>
+                        <m:e>
+                          <m:r>
+                            <a:rPr lang="en-US" sz="2000" b="1" i="1">
+                              <a:latin typeface="Cambria Math" panose="02040503050406030204" pitchFamily="18" charset="0"/>
+                            </a:rPr>
+                            <m:t>𝒓</m:t>
+                          </m:r>
+                        </m:e>
+                      </m:acc>
+                    </m:oMath>
+                  </m:oMathPara>
+                </a14:m>
+                <a:endParaRPr lang="en-US" sz="2000" dirty="0"/>
+              </a:p>
+            </p:txBody>
+          </p:sp>
+        </mc:Choice>
+        <mc:Fallback xmlns="">
+          <p:sp>
+            <p:nvSpPr>
+              <p:cNvPr id="98" name="TextBox 97">
+                <a:extLst>
+                  <a:ext uri="{FF2B5EF4-FFF2-40B4-BE49-F238E27FC236}">
+                    <a16:creationId xmlns:a16="http://schemas.microsoft.com/office/drawing/2014/main" id="{CE2765A7-BA9C-2D72-D56B-B866A029A926}"/>
+                  </a:ext>
+                </a:extLst>
+              </p:cNvPr>
+              <p:cNvSpPr txBox="1">
+                <a:spLocks noRot="1" noChangeAspect="1" noMove="1" noResize="1" noEditPoints="1" noAdjustHandles="1" noChangeArrowheads="1" noChangeShapeType="1" noTextEdit="1"/>
+              </p:cNvSpPr>
+              <p:nvPr/>
+            </p:nvSpPr>
+            <p:spPr>
+              <a:xfrm>
+                <a:off x="4086012" y="2829218"/>
+                <a:ext cx="338234" cy="307777"/>
+              </a:xfrm>
+              <a:prstGeom prst="rect">
+                <a:avLst/>
+              </a:prstGeom>
+              <a:blipFill>
+                <a:blip r:embed="rId5"/>
+                <a:stretch>
+                  <a:fillRect l="-17857" r="-60714" b="-5882"/>
+                </a:stretch>
+              </a:blipFill>
+            </p:spPr>
+            <p:txBody>
+              <a:bodyPr/>
+              <a:lstStyle/>
+              <a:p>
+                <a:r>
+                  <a:rPr lang="en-IN">
+                    <a:noFill/>
+                  </a:rPr>
+                  <a:t> </a:t>
+                </a:r>
+              </a:p>
+            </p:txBody>
+          </p:sp>
+        </mc:Fallback>
+      </mc:AlternateContent>
+      <mc:AlternateContent xmlns:mc="http://schemas.openxmlformats.org/markup-compatibility/2006" xmlns:a14="http://schemas.microsoft.com/office/drawing/2010/main">
+        <mc:Choice Requires="a14">
+          <p:sp>
+            <p:nvSpPr>
+              <p:cNvPr id="100" name="TextBox 99">
+                <a:extLst>
+                  <a:ext uri="{FF2B5EF4-FFF2-40B4-BE49-F238E27FC236}">
+                    <a16:creationId xmlns:a16="http://schemas.microsoft.com/office/drawing/2014/main" id="{515E3208-8316-AB01-1224-96F0875AD2EC}"/>
+                  </a:ext>
+                </a:extLst>
+              </p:cNvPr>
+              <p:cNvSpPr txBox="1"/>
+              <p:nvPr/>
+            </p:nvSpPr>
+            <p:spPr>
+              <a:xfrm>
+                <a:off x="3891468" y="3288970"/>
+                <a:ext cx="221214" cy="307777"/>
+              </a:xfrm>
+              <a:prstGeom prst="rect">
+                <a:avLst/>
+              </a:prstGeom>
+              <a:noFill/>
+            </p:spPr>
+            <p:txBody>
+              <a:bodyPr wrap="none" lIns="0" tIns="0" rIns="0" bIns="0" rtlCol="0">
+                <a:spAutoFit/>
+              </a:bodyPr>
+              <a:lstStyle/>
+              <a:p>
+                <a:pPr/>
+                <a14:m>
+                  <m:oMathPara xmlns:m="http://schemas.openxmlformats.org/officeDocument/2006/math">
+                    <m:oMath>
+                      <m:acc>
+                        <m:accPr>
+                          <m:chr m:val="̅"/>
+                          <m:ctrlPr>
+                            <a:rPr lang="en-US" sz="2000" b="1" i="1" smtClean="0">
+                              <a:latin typeface="Cambria Math" panose="02040503050406030204" pitchFamily="18" charset="0"/>
+                            </a:rPr>
+                          </m:ctrlPr>
+                        </m:accPr>
+                        <m:e>
+                          <m:r>
+                            <a:rPr lang="en-US" sz="2000" b="1" i="1" smtClean="0">
+                              <a:latin typeface="Cambria Math" panose="02040503050406030204" pitchFamily="18" charset="0"/>
+                            </a:rPr>
+                            <m:t>𝑭</m:t>
+                          </m:r>
+                        </m:e>
+                      </m:acc>
+                    </m:oMath>
+                  </m:oMathPara>
+                </a14:m>
+                <a:endParaRPr lang="en-US" sz="2000" dirty="0"/>
+              </a:p>
+            </p:txBody>
+          </p:sp>
+        </mc:Choice>
+        <mc:Fallback xmlns="">
+          <p:sp>
+            <p:nvSpPr>
+              <p:cNvPr id="100" name="TextBox 99">
+                <a:extLst>
+                  <a:ext uri="{FF2B5EF4-FFF2-40B4-BE49-F238E27FC236}">
+                    <a16:creationId xmlns:a16="http://schemas.microsoft.com/office/drawing/2014/main" id="{515E3208-8316-AB01-1224-96F0875AD2EC}"/>
+                  </a:ext>
+                </a:extLst>
+              </p:cNvPr>
+              <p:cNvSpPr txBox="1">
+                <a:spLocks noRot="1" noChangeAspect="1" noMove="1" noResize="1" noEditPoints="1" noAdjustHandles="1" noChangeArrowheads="1" noChangeShapeType="1" noTextEdit="1"/>
+              </p:cNvSpPr>
+              <p:nvPr/>
+            </p:nvSpPr>
+            <p:spPr>
+              <a:xfrm>
+                <a:off x="3891468" y="3288970"/>
+                <a:ext cx="221214" cy="307777"/>
+              </a:xfrm>
+              <a:prstGeom prst="rect">
+                <a:avLst/>
+              </a:prstGeom>
+              <a:blipFill>
+                <a:blip r:embed="rId6"/>
+                <a:stretch>
+                  <a:fillRect l="-24324" t="-2000" r="-27027" b="-6000"/>
+                </a:stretch>
+              </a:blipFill>
+            </p:spPr>
+            <p:txBody>
+              <a:bodyPr/>
+              <a:lstStyle/>
+              <a:p>
+                <a:r>
+                  <a:rPr lang="en-IN">
+                    <a:noFill/>
+                  </a:rPr>
+                  <a:t> </a:t>
+                </a:r>
+              </a:p>
+            </p:txBody>
+          </p:sp>
+        </mc:Fallback>
+      </mc:AlternateContent>
+      <mc:AlternateContent xmlns:mc="http://schemas.openxmlformats.org/markup-compatibility/2006" xmlns:a14="http://schemas.microsoft.com/office/drawing/2010/main">
+        <mc:Choice Requires="a14">
+          <p:sp>
+            <p:nvSpPr>
+              <p:cNvPr id="104" name="TextBox 103">
+                <a:extLst>
+                  <a:ext uri="{FF2B5EF4-FFF2-40B4-BE49-F238E27FC236}">
+                    <a16:creationId xmlns:a16="http://schemas.microsoft.com/office/drawing/2014/main" id="{C3F4BC6F-7972-C1B2-33D3-92FF611D9AE8}"/>
+                  </a:ext>
+                </a:extLst>
+              </p:cNvPr>
+              <p:cNvSpPr txBox="1"/>
+              <p:nvPr/>
+            </p:nvSpPr>
+            <p:spPr>
+              <a:xfrm>
+                <a:off x="3659292" y="2958758"/>
+                <a:ext cx="338234" cy="307777"/>
+              </a:xfrm>
+              <a:prstGeom prst="rect">
+                <a:avLst/>
+              </a:prstGeom>
+              <a:noFill/>
+            </p:spPr>
+            <p:txBody>
+              <a:bodyPr wrap="square" lIns="0" tIns="0" rIns="0" bIns="0" rtlCol="0">
+                <a:spAutoFit/>
+              </a:bodyPr>
+              <a:lstStyle/>
+              <a:p>
+                <a:pPr/>
+                <a14:m>
+                  <m:oMathPara xmlns:m="http://schemas.openxmlformats.org/officeDocument/2006/math">
+                    <m:oMath>
+                      <m:r>
+                        <a:rPr lang="en-US" sz="2000" b="0" i="1" smtClean="0">
+                          <a:latin typeface="Cambria Math" panose="02040503050406030204" pitchFamily="18" charset="0"/>
+                          <a:ea typeface="Cambria Math" panose="02040503050406030204" pitchFamily="18" charset="0"/>
+                        </a:rPr>
+                        <m:t>𝜃</m:t>
+                      </m:r>
+                    </m:oMath>
+                  </m:oMathPara>
+                </a14:m>
+                <a:endParaRPr lang="en-US" sz="2000" i="1" dirty="0"/>
+              </a:p>
+            </p:txBody>
+          </p:sp>
+        </mc:Choice>
+        <mc:Fallback xmlns="">
+          <p:sp>
+            <p:nvSpPr>
+              <p:cNvPr id="104" name="TextBox 103">
+                <a:extLst>
+                  <a:ext uri="{FF2B5EF4-FFF2-40B4-BE49-F238E27FC236}">
+                    <a16:creationId xmlns:a16="http://schemas.microsoft.com/office/drawing/2014/main" id="{C3F4BC6F-7972-C1B2-33D3-92FF611D9AE8}"/>
+                  </a:ext>
+                </a:extLst>
+              </p:cNvPr>
+              <p:cNvSpPr txBox="1">
+                <a:spLocks noRot="1" noChangeAspect="1" noMove="1" noResize="1" noEditPoints="1" noAdjustHandles="1" noChangeArrowheads="1" noChangeShapeType="1" noTextEdit="1"/>
+              </p:cNvSpPr>
+              <p:nvPr/>
+            </p:nvSpPr>
+            <p:spPr>
+              <a:xfrm>
+                <a:off x="3659292" y="2958758"/>
+                <a:ext cx="338234" cy="307777"/>
+              </a:xfrm>
+              <a:prstGeom prst="rect">
+                <a:avLst/>
+              </a:prstGeom>
+              <a:blipFill>
+                <a:blip r:embed="rId7"/>
+                <a:stretch>
+                  <a:fillRect b="-5882"/>
+                </a:stretch>
+              </a:blipFill>
+            </p:spPr>
+            <p:txBody>
+              <a:bodyPr/>
+              <a:lstStyle/>
+              <a:p>
+                <a:r>
+                  <a:rPr lang="en-IN">
+                    <a:noFill/>
+                  </a:rPr>
+                  <a:t> </a:t>
+                </a:r>
+              </a:p>
+            </p:txBody>
+          </p:sp>
+        </mc:Fallback>
+      </mc:AlternateContent>
+      <p:sp>
+        <p:nvSpPr>
+          <p:cNvPr id="106" name="Oval 105">
+            <a:extLst>
+              <a:ext uri="{FF2B5EF4-FFF2-40B4-BE49-F238E27FC236}">
+                <a16:creationId xmlns:a16="http://schemas.microsoft.com/office/drawing/2014/main" id="{C39A8063-C6FD-F393-9236-8B0D22731AB4}"/>
+              </a:ext>
+            </a:extLst>
+          </p:cNvPr>
+          <p:cNvSpPr/>
+          <p:nvPr/>
+        </p:nvSpPr>
+        <p:spPr>
+          <a:xfrm>
+            <a:off x="2543936" y="4455410"/>
+            <a:ext cx="75141" cy="75141"/>
+          </a:xfrm>
+          <a:prstGeom prst="ellipse">
+            <a:avLst/>
+          </a:prstGeom>
+          <a:solidFill>
+            <a:schemeClr val="tx1"/>
+          </a:solidFill>
+          <a:ln>
+            <a:noFill/>
+          </a:ln>
+        </p:spPr>
+        <p:style>
+          <a:lnRef idx="2">
+            <a:schemeClr val="accent1">
+              <a:shade val="15000"/>
+            </a:schemeClr>
+          </a:lnRef>
+          <a:fillRef idx="1">
+            <a:schemeClr val="accent1"/>
+          </a:fillRef>
+          <a:effectRef idx="0">
+            <a:schemeClr val="accent1"/>
+          </a:effectRef>
+          <a:fontRef idx="minor">
+            <a:schemeClr val="lt1"/>
+          </a:fontRef>
+        </p:style>
+        <p:txBody>
+          <a:bodyPr rtlCol="0" anchor="ctr"/>
+          <a:lstStyle/>
+          <a:p>
+            <a:pPr algn="ctr"/>
+            <a:endParaRPr lang="en-IN"/>
+          </a:p>
+        </p:txBody>
+      </p:sp>
+      <p:sp>
+        <p:nvSpPr>
+          <p:cNvPr id="108" name="Oval 107">
+            <a:extLst>
+              <a:ext uri="{FF2B5EF4-FFF2-40B4-BE49-F238E27FC236}">
+                <a16:creationId xmlns:a16="http://schemas.microsoft.com/office/drawing/2014/main" id="{E66EA0DB-6674-0F59-B29A-1716042AE471}"/>
+              </a:ext>
+            </a:extLst>
+          </p:cNvPr>
+          <p:cNvSpPr/>
+          <p:nvPr/>
+        </p:nvSpPr>
+        <p:spPr>
+          <a:xfrm>
+            <a:off x="7988608" y="1959043"/>
+            <a:ext cx="75141" cy="75141"/>
+          </a:xfrm>
+          <a:prstGeom prst="ellipse">
+            <a:avLst/>
+          </a:prstGeom>
+          <a:solidFill>
+            <a:schemeClr val="tx1"/>
+          </a:solidFill>
+          <a:ln>
+            <a:noFill/>
+          </a:ln>
+        </p:spPr>
+        <p:style>
+          <a:lnRef idx="2">
+            <a:schemeClr val="accent1">
+              <a:shade val="15000"/>
+            </a:schemeClr>
+          </a:lnRef>
+          <a:fillRef idx="1">
+            <a:schemeClr val="accent1"/>
+          </a:fillRef>
+          <a:effectRef idx="0">
+            <a:schemeClr val="accent1"/>
+          </a:effectRef>
+          <a:fontRef idx="minor">
+            <a:schemeClr val="lt1"/>
+          </a:fontRef>
+        </p:style>
+        <p:txBody>
+          <a:bodyPr rtlCol="0" anchor="ctr"/>
+          <a:lstStyle/>
+          <a:p>
+            <a:pPr algn="ctr"/>
+            <a:endParaRPr lang="en-IN"/>
+          </a:p>
+        </p:txBody>
+      </p:sp>
+      <mc:AlternateContent xmlns:mc="http://schemas.openxmlformats.org/markup-compatibility/2006" xmlns:a14="http://schemas.microsoft.com/office/drawing/2010/main">
+        <mc:Choice Requires="a14">
+          <p:sp>
+            <p:nvSpPr>
+              <p:cNvPr id="110" name="TextBox 109">
+                <a:extLst>
+                  <a:ext uri="{FF2B5EF4-FFF2-40B4-BE49-F238E27FC236}">
+                    <a16:creationId xmlns:a16="http://schemas.microsoft.com/office/drawing/2014/main" id="{38A67961-5041-045D-E92E-E2380165E600}"/>
+                  </a:ext>
+                </a:extLst>
+              </p:cNvPr>
+              <p:cNvSpPr txBox="1"/>
+              <p:nvPr/>
+            </p:nvSpPr>
+            <p:spPr>
+              <a:xfrm>
+                <a:off x="2210257" y="4339091"/>
+                <a:ext cx="338234" cy="307777"/>
+              </a:xfrm>
+              <a:prstGeom prst="rect">
+                <a:avLst/>
+              </a:prstGeom>
+              <a:noFill/>
+            </p:spPr>
+            <p:txBody>
+              <a:bodyPr wrap="square" lIns="0" tIns="0" rIns="0" bIns="0" rtlCol="0">
+                <a:spAutoFit/>
+              </a:bodyPr>
+              <a:lstStyle/>
+              <a:p>
+                <a:pPr/>
+                <a14:m>
+                  <m:oMathPara xmlns:m="http://schemas.openxmlformats.org/officeDocument/2006/math">
+                    <m:oMath>
+                      <m:r>
+                        <a:rPr lang="en-US" sz="2000" b="0" i="1" smtClean="0">
+                          <a:latin typeface="Cambria Math" panose="02040503050406030204" pitchFamily="18" charset="0"/>
+                          <a:ea typeface="Cambria Math" panose="02040503050406030204" pitchFamily="18" charset="0"/>
+                        </a:rPr>
+                        <m:t>𝐴</m:t>
+                      </m:r>
+                    </m:oMath>
+                  </m:oMathPara>
+                </a14:m>
+                <a:endParaRPr lang="en-US" sz="2000" i="1" dirty="0"/>
+              </a:p>
+            </p:txBody>
+          </p:sp>
+        </mc:Choice>
+        <mc:Fallback xmlns="">
+          <p:sp>
+            <p:nvSpPr>
+              <p:cNvPr id="110" name="TextBox 109">
+                <a:extLst>
+                  <a:ext uri="{FF2B5EF4-FFF2-40B4-BE49-F238E27FC236}">
+                    <a16:creationId xmlns:a16="http://schemas.microsoft.com/office/drawing/2014/main" id="{38A67961-5041-045D-E92E-E2380165E600}"/>
+                  </a:ext>
+                </a:extLst>
+              </p:cNvPr>
+              <p:cNvSpPr txBox="1">
+                <a:spLocks noRot="1" noChangeAspect="1" noMove="1" noResize="1" noEditPoints="1" noAdjustHandles="1" noChangeArrowheads="1" noChangeShapeType="1" noTextEdit="1"/>
+              </p:cNvSpPr>
+              <p:nvPr/>
+            </p:nvSpPr>
+            <p:spPr>
+              <a:xfrm>
+                <a:off x="2210257" y="4339091"/>
+                <a:ext cx="338234" cy="307777"/>
+              </a:xfrm>
+              <a:prstGeom prst="rect">
+                <a:avLst/>
+              </a:prstGeom>
+              <a:blipFill>
+                <a:blip r:embed="rId8"/>
+                <a:stretch>
+                  <a:fillRect l="-1818" b="-6000"/>
+                </a:stretch>
+              </a:blipFill>
+            </p:spPr>
+            <p:txBody>
+              <a:bodyPr/>
+              <a:lstStyle/>
+              <a:p>
+                <a:r>
+                  <a:rPr lang="en-IN">
+                    <a:noFill/>
+                  </a:rPr>
+                  <a:t> </a:t>
+                </a:r>
+              </a:p>
+            </p:txBody>
+          </p:sp>
+        </mc:Fallback>
+      </mc:AlternateContent>
+      <mc:AlternateContent xmlns:mc="http://schemas.openxmlformats.org/markup-compatibility/2006" xmlns:a14="http://schemas.microsoft.com/office/drawing/2010/main">
+        <mc:Choice Requires="a14">
+          <p:sp>
+            <p:nvSpPr>
+              <p:cNvPr id="112" name="TextBox 111">
+                <a:extLst>
+                  <a:ext uri="{FF2B5EF4-FFF2-40B4-BE49-F238E27FC236}">
+                    <a16:creationId xmlns:a16="http://schemas.microsoft.com/office/drawing/2014/main" id="{0BCD1608-0E3B-8B03-DC37-D8A50660DE1F}"/>
+                  </a:ext>
+                </a:extLst>
+              </p:cNvPr>
+              <p:cNvSpPr txBox="1"/>
+              <p:nvPr/>
+            </p:nvSpPr>
+            <p:spPr>
+              <a:xfrm>
+                <a:off x="8071341" y="1805154"/>
+                <a:ext cx="338234" cy="307777"/>
+              </a:xfrm>
+              <a:prstGeom prst="rect">
+                <a:avLst/>
+              </a:prstGeom>
+              <a:noFill/>
+            </p:spPr>
+            <p:txBody>
+              <a:bodyPr wrap="square" lIns="0" tIns="0" rIns="0" bIns="0" rtlCol="0">
+                <a:spAutoFit/>
+              </a:bodyPr>
+              <a:lstStyle/>
+              <a:p>
+                <a:pPr/>
+                <a14:m>
+                  <m:oMathPara xmlns:m="http://schemas.openxmlformats.org/officeDocument/2006/math">
+                    <m:oMath>
+                      <m:r>
+                        <a:rPr lang="en-US" sz="2000" b="0" i="1" smtClean="0">
+                          <a:latin typeface="Cambria Math" panose="02040503050406030204" pitchFamily="18" charset="0"/>
+                          <a:ea typeface="Cambria Math" panose="02040503050406030204" pitchFamily="18" charset="0"/>
+                        </a:rPr>
+                        <m:t>𝐵</m:t>
+                      </m:r>
+                    </m:oMath>
+                  </m:oMathPara>
+                </a14:m>
+                <a:endParaRPr lang="en-US" sz="2000" i="1" dirty="0"/>
+              </a:p>
+            </p:txBody>
+          </p:sp>
+        </mc:Choice>
+        <mc:Fallback xmlns="">
+          <p:sp>
+            <p:nvSpPr>
+              <p:cNvPr id="112" name="TextBox 111">
+                <a:extLst>
+                  <a:ext uri="{FF2B5EF4-FFF2-40B4-BE49-F238E27FC236}">
+                    <a16:creationId xmlns:a16="http://schemas.microsoft.com/office/drawing/2014/main" id="{0BCD1608-0E3B-8B03-DC37-D8A50660DE1F}"/>
+                  </a:ext>
+                </a:extLst>
+              </p:cNvPr>
+              <p:cNvSpPr txBox="1">
+                <a:spLocks noRot="1" noChangeAspect="1" noMove="1" noResize="1" noEditPoints="1" noAdjustHandles="1" noChangeArrowheads="1" noChangeShapeType="1" noTextEdit="1"/>
+              </p:cNvSpPr>
+              <p:nvPr/>
+            </p:nvSpPr>
+            <p:spPr>
+              <a:xfrm>
+                <a:off x="8071341" y="1805154"/>
+                <a:ext cx="338234" cy="307777"/>
+              </a:xfrm>
+              <a:prstGeom prst="rect">
+                <a:avLst/>
+              </a:prstGeom>
+              <a:blipFill>
+                <a:blip r:embed="rId9"/>
+                <a:stretch>
+                  <a:fillRect r="-1786" b="-5882"/>
+                </a:stretch>
+              </a:blipFill>
+            </p:spPr>
+            <p:txBody>
+              <a:bodyPr/>
+              <a:lstStyle/>
+              <a:p>
+                <a:r>
+                  <a:rPr lang="en-IN">
+                    <a:noFill/>
+                  </a:rPr>
+                  <a:t> </a:t>
+                </a:r>
+              </a:p>
+            </p:txBody>
+          </p:sp>
+        </mc:Fallback>
+      </mc:AlternateContent>
+      <mc:AlternateContent xmlns:mc="http://schemas.openxmlformats.org/markup-compatibility/2006" xmlns:a14="http://schemas.microsoft.com/office/drawing/2010/main">
+        <mc:Choice Requires="a14">
+          <p:sp>
+            <p:nvSpPr>
+              <p:cNvPr id="114" name="TextBox 113">
+                <a:extLst>
+                  <a:ext uri="{FF2B5EF4-FFF2-40B4-BE49-F238E27FC236}">
+                    <a16:creationId xmlns:a16="http://schemas.microsoft.com/office/drawing/2014/main" id="{24FC8F4E-919F-92F3-1A12-59935A8E5222}"/>
+                  </a:ext>
+                </a:extLst>
+              </p:cNvPr>
+              <p:cNvSpPr txBox="1"/>
+              <p:nvPr/>
+            </p:nvSpPr>
+            <p:spPr>
+              <a:xfrm>
+                <a:off x="4886225" y="5408067"/>
+                <a:ext cx="338234" cy="307777"/>
+              </a:xfrm>
+              <a:prstGeom prst="rect">
+                <a:avLst/>
+              </a:prstGeom>
+              <a:noFill/>
+            </p:spPr>
+            <p:txBody>
+              <a:bodyPr wrap="square" lIns="0" tIns="0" rIns="0" bIns="0" rtlCol="0">
+                <a:spAutoFit/>
+              </a:bodyPr>
+              <a:lstStyle/>
+              <a:p>
+                <a:pPr/>
+                <a14:m>
+                  <m:oMathPara xmlns:m="http://schemas.openxmlformats.org/officeDocument/2006/math">
+                    <m:oMath>
+                      <m:r>
+                        <a:rPr lang="en-US" sz="2000" b="0" i="1" smtClean="0">
+                          <a:latin typeface="Cambria Math" panose="02040503050406030204" pitchFamily="18" charset="0"/>
+                          <a:ea typeface="Cambria Math" panose="02040503050406030204" pitchFamily="18" charset="0"/>
+                        </a:rPr>
+                        <m:t>𝑂</m:t>
+                      </m:r>
+                    </m:oMath>
+                  </m:oMathPara>
+                </a14:m>
+                <a:endParaRPr lang="en-US" sz="2000" i="1" dirty="0"/>
+              </a:p>
+            </p:txBody>
+          </p:sp>
+        </mc:Choice>
+        <mc:Fallback xmlns="">
+          <p:sp>
+            <p:nvSpPr>
+              <p:cNvPr id="114" name="TextBox 113">
+                <a:extLst>
+                  <a:ext uri="{FF2B5EF4-FFF2-40B4-BE49-F238E27FC236}">
+                    <a16:creationId xmlns:a16="http://schemas.microsoft.com/office/drawing/2014/main" id="{24FC8F4E-919F-92F3-1A12-59935A8E5222}"/>
+                  </a:ext>
+                </a:extLst>
+              </p:cNvPr>
+              <p:cNvSpPr txBox="1">
+                <a:spLocks noRot="1" noChangeAspect="1" noMove="1" noResize="1" noEditPoints="1" noAdjustHandles="1" noChangeArrowheads="1" noChangeShapeType="1" noTextEdit="1"/>
+              </p:cNvSpPr>
+              <p:nvPr/>
+            </p:nvSpPr>
+            <p:spPr>
+              <a:xfrm>
+                <a:off x="4886225" y="5408067"/>
+                <a:ext cx="338234" cy="307777"/>
+              </a:xfrm>
+              <a:prstGeom prst="rect">
+                <a:avLst/>
+              </a:prstGeom>
+              <a:blipFill>
+                <a:blip r:embed="rId10"/>
+                <a:stretch>
+                  <a:fillRect l="-3636" b="-5882"/>
+                </a:stretch>
+              </a:blipFill>
+            </p:spPr>
+            <p:txBody>
+              <a:bodyPr/>
+              <a:lstStyle/>
+              <a:p>
+                <a:r>
+                  <a:rPr lang="en-IN">
+                    <a:noFill/>
+                  </a:rPr>
+                  <a:t> </a:t>
+                </a:r>
+              </a:p>
+            </p:txBody>
+          </p:sp>
+        </mc:Fallback>
+      </mc:AlternateContent>
+      <p:sp>
+        <p:nvSpPr>
+          <p:cNvPr id="116" name="Oval 115">
+            <a:extLst>
+              <a:ext uri="{FF2B5EF4-FFF2-40B4-BE49-F238E27FC236}">
+                <a16:creationId xmlns:a16="http://schemas.microsoft.com/office/drawing/2014/main" id="{B48AF66E-1E0E-802D-044E-CED43284E1F2}"/>
+              </a:ext>
+            </a:extLst>
+          </p:cNvPr>
+          <p:cNvSpPr/>
+          <p:nvPr/>
+        </p:nvSpPr>
+        <p:spPr>
+          <a:xfrm>
+            <a:off x="4848655" y="5417733"/>
+            <a:ext cx="75141" cy="75141"/>
+          </a:xfrm>
+          <a:prstGeom prst="ellipse">
+            <a:avLst/>
+          </a:prstGeom>
+          <a:solidFill>
+            <a:schemeClr val="tx1"/>
+          </a:solidFill>
+          <a:ln>
+            <a:noFill/>
+          </a:ln>
+        </p:spPr>
+        <p:style>
+          <a:lnRef idx="2">
+            <a:schemeClr val="accent1">
+              <a:shade val="15000"/>
+            </a:schemeClr>
+          </a:lnRef>
+          <a:fillRef idx="1">
+            <a:schemeClr val="accent1"/>
+          </a:fillRef>
+          <a:effectRef idx="0">
+            <a:schemeClr val="accent1"/>
+          </a:effectRef>
+          <a:fontRef idx="minor">
+            <a:schemeClr val="lt1"/>
+          </a:fontRef>
+        </p:style>
+        <p:txBody>
+          <a:bodyPr rtlCol="0" anchor="ctr"/>
+          <a:lstStyle/>
+          <a:p>
+            <a:pPr algn="ctr"/>
+            <a:endParaRPr lang="en-IN"/>
+          </a:p>
+        </p:txBody>
+      </p:sp>
+      <mc:AlternateContent xmlns:mc="http://schemas.openxmlformats.org/markup-compatibility/2006" xmlns:a14="http://schemas.microsoft.com/office/drawing/2010/main">
+        <mc:Choice Requires="a14">
+          <p:sp>
+            <p:nvSpPr>
+              <p:cNvPr id="118" name="TextBox 117">
+                <a:extLst>
+                  <a:ext uri="{FF2B5EF4-FFF2-40B4-BE49-F238E27FC236}">
+                    <a16:creationId xmlns:a16="http://schemas.microsoft.com/office/drawing/2014/main" id="{B4385092-4992-4D7D-8009-1A71B8072DB7}"/>
+                  </a:ext>
+                </a:extLst>
+              </p:cNvPr>
+              <p:cNvSpPr txBox="1"/>
+              <p:nvPr/>
+            </p:nvSpPr>
+            <p:spPr>
+              <a:xfrm>
+                <a:off x="2966660" y="2977884"/>
+                <a:ext cx="338234" cy="307777"/>
+              </a:xfrm>
+              <a:prstGeom prst="rect">
+                <a:avLst/>
+              </a:prstGeom>
+              <a:noFill/>
+            </p:spPr>
+            <p:txBody>
+              <a:bodyPr wrap="square" lIns="0" tIns="0" rIns="0" bIns="0" rtlCol="0">
+                <a:spAutoFit/>
+              </a:bodyPr>
+              <a:lstStyle/>
+              <a:p>
+                <a:pPr/>
+                <a14:m>
+                  <m:oMathPara xmlns:m="http://schemas.openxmlformats.org/officeDocument/2006/math">
+                    <m:oMath>
+                      <m:r>
+                        <a:rPr lang="en-US" sz="2000" b="0" i="1" smtClean="0">
+                          <a:latin typeface="Cambria Math" panose="02040503050406030204" pitchFamily="18" charset="0"/>
+                          <a:ea typeface="Cambria Math" panose="02040503050406030204" pitchFamily="18" charset="0"/>
+                        </a:rPr>
+                        <m:t>𝑃</m:t>
+                      </m:r>
+                    </m:oMath>
+                  </m:oMathPara>
+                </a14:m>
+                <a:endParaRPr lang="en-US" sz="2000" i="1" dirty="0"/>
+              </a:p>
+            </p:txBody>
+          </p:sp>
+        </mc:Choice>
+        <mc:Fallback xmlns="">
+          <p:sp>
+            <p:nvSpPr>
+              <p:cNvPr id="118" name="TextBox 117">
+                <a:extLst>
+                  <a:ext uri="{FF2B5EF4-FFF2-40B4-BE49-F238E27FC236}">
+                    <a16:creationId xmlns:a16="http://schemas.microsoft.com/office/drawing/2014/main" id="{B4385092-4992-4D7D-8009-1A71B8072DB7}"/>
+                  </a:ext>
+                </a:extLst>
+              </p:cNvPr>
+              <p:cNvSpPr txBox="1">
+                <a:spLocks noRot="1" noChangeAspect="1" noMove="1" noResize="1" noEditPoints="1" noAdjustHandles="1" noChangeArrowheads="1" noChangeShapeType="1" noTextEdit="1"/>
+              </p:cNvSpPr>
+              <p:nvPr/>
+            </p:nvSpPr>
+            <p:spPr>
+              <a:xfrm>
+                <a:off x="2966660" y="2977884"/>
+                <a:ext cx="338234" cy="307777"/>
+              </a:xfrm>
+              <a:prstGeom prst="rect">
+                <a:avLst/>
+              </a:prstGeom>
+              <a:blipFill>
+                <a:blip r:embed="rId11"/>
+                <a:stretch>
+                  <a:fillRect l="-1818" b="-5882"/>
+                </a:stretch>
+              </a:blipFill>
+            </p:spPr>
+            <p:txBody>
+              <a:bodyPr/>
+              <a:lstStyle/>
+              <a:p>
+                <a:r>
+                  <a:rPr lang="en-IN">
+                    <a:noFill/>
+                  </a:rPr>
+                  <a:t> </a:t>
+                </a:r>
+              </a:p>
+            </p:txBody>
+          </p:sp>
+        </mc:Fallback>
+      </mc:AlternateContent>
+      <mc:AlternateContent xmlns:mc="http://schemas.openxmlformats.org/markup-compatibility/2006" xmlns:a14="http://schemas.microsoft.com/office/drawing/2010/main">
+        <mc:Choice Requires="a14">
+          <p:sp>
+            <p:nvSpPr>
+              <p:cNvPr id="120" name="TextBox 119">
+                <a:extLst>
+                  <a:ext uri="{FF2B5EF4-FFF2-40B4-BE49-F238E27FC236}">
+                    <a16:creationId xmlns:a16="http://schemas.microsoft.com/office/drawing/2014/main" id="{4C705AC2-C692-301B-BACF-8DB808D87021}"/>
+                  </a:ext>
+                </a:extLst>
+              </p:cNvPr>
+              <p:cNvSpPr txBox="1"/>
+              <p:nvPr/>
+            </p:nvSpPr>
+            <p:spPr>
+              <a:xfrm>
+                <a:off x="4662590" y="2347418"/>
+                <a:ext cx="338234" cy="307777"/>
+              </a:xfrm>
+              <a:prstGeom prst="rect">
+                <a:avLst/>
+              </a:prstGeom>
+              <a:noFill/>
+            </p:spPr>
+            <p:txBody>
+              <a:bodyPr wrap="square" lIns="0" tIns="0" rIns="0" bIns="0" rtlCol="0">
+                <a:spAutoFit/>
+              </a:bodyPr>
+              <a:lstStyle/>
+              <a:p>
+                <a:pPr/>
+                <a14:m>
+                  <m:oMathPara xmlns:m="http://schemas.openxmlformats.org/officeDocument/2006/math">
+                    <m:oMath>
+                      <m:r>
+                        <a:rPr lang="en-US" sz="2000" b="0" i="1" smtClean="0">
+                          <a:latin typeface="Cambria Math" panose="02040503050406030204" pitchFamily="18" charset="0"/>
+                          <a:ea typeface="Cambria Math" panose="02040503050406030204" pitchFamily="18" charset="0"/>
+                        </a:rPr>
+                        <m:t>𝑄</m:t>
+                      </m:r>
+                    </m:oMath>
+                  </m:oMathPara>
+                </a14:m>
+                <a:endParaRPr lang="en-US" sz="2000" i="1" dirty="0"/>
+              </a:p>
+            </p:txBody>
+          </p:sp>
+        </mc:Choice>
+        <mc:Fallback xmlns="">
+          <p:sp>
+            <p:nvSpPr>
+              <p:cNvPr id="120" name="TextBox 119">
+                <a:extLst>
+                  <a:ext uri="{FF2B5EF4-FFF2-40B4-BE49-F238E27FC236}">
+                    <a16:creationId xmlns:a16="http://schemas.microsoft.com/office/drawing/2014/main" id="{4C705AC2-C692-301B-BACF-8DB808D87021}"/>
+                  </a:ext>
+                </a:extLst>
+              </p:cNvPr>
+              <p:cNvSpPr txBox="1">
+                <a:spLocks noRot="1" noChangeAspect="1" noMove="1" noResize="1" noEditPoints="1" noAdjustHandles="1" noChangeArrowheads="1" noChangeShapeType="1" noTextEdit="1"/>
+              </p:cNvSpPr>
+              <p:nvPr/>
+            </p:nvSpPr>
+            <p:spPr>
+              <a:xfrm>
+                <a:off x="4662590" y="2347418"/>
+                <a:ext cx="338234" cy="307777"/>
+              </a:xfrm>
+              <a:prstGeom prst="rect">
+                <a:avLst/>
+              </a:prstGeom>
+              <a:blipFill>
+                <a:blip r:embed="rId12"/>
+                <a:stretch>
+                  <a:fillRect l="-9091" r="-7273" b="-25490"/>
+                </a:stretch>
+              </a:blipFill>
+            </p:spPr>
+            <p:txBody>
+              <a:bodyPr/>
+              <a:lstStyle/>
+              <a:p>
+                <a:r>
+                  <a:rPr lang="en-IN">
+                    <a:noFill/>
+                  </a:rPr>
+                  <a:t> </a:t>
+                </a:r>
+              </a:p>
+            </p:txBody>
+          </p:sp>
+        </mc:Fallback>
+      </mc:AlternateContent>
+    </p:spTree>
+    <p:extLst>
+      <p:ext uri="{BB962C8B-B14F-4D97-AF65-F5344CB8AC3E}">
+        <p14:creationId xmlns:p14="http://schemas.microsoft.com/office/powerpoint/2010/main" val="3126725147"/>
       </p:ext>
     </p:extLst>
   </p:cSld>

--- a/U2-Work-and-Energy/figures/all-figs.pptx
+++ b/U2-Work-and-Energy/figures/all-figs.pptx
@@ -7,6 +7,8 @@
   <p:sldIdLst>
     <p:sldId id="256" r:id="rId2"/>
     <p:sldId id="257" r:id="rId3"/>
+    <p:sldId id="258" r:id="rId4"/>
+    <p:sldId id="259" r:id="rId5"/>
   </p:sldIdLst>
   <p:sldSz cx="12192000" cy="6858000"/>
   <p:notesSz cx="6858000" cy="9144000"/>
@@ -6390,6 +6392,2639 @@
 </p:sld>
 </file>
 
+<file path=ppt/slides/slide3.xml><?xml version="1.0" encoding="utf-8"?>
+<p:sld xmlns:a="http://schemas.openxmlformats.org/drawingml/2006/main" xmlns:r="http://schemas.openxmlformats.org/officeDocument/2006/relationships" xmlns:p="http://schemas.openxmlformats.org/presentationml/2006/main">
+  <p:cSld>
+    <p:spTree>
+      <p:nvGrpSpPr>
+        <p:cNvPr id="1" name=""/>
+        <p:cNvGrpSpPr/>
+        <p:nvPr/>
+      </p:nvGrpSpPr>
+      <p:grpSpPr>
+        <a:xfrm>
+          <a:off x="0" y="0"/>
+          <a:ext cx="0" cy="0"/>
+          <a:chOff x="0" y="0"/>
+          <a:chExt cx="0" cy="0"/>
+        </a:xfrm>
+      </p:grpSpPr>
+      <p:sp>
+        <p:nvSpPr>
+          <p:cNvPr id="12" name="Arc 11">
+            <a:extLst>
+              <a:ext uri="{FF2B5EF4-FFF2-40B4-BE49-F238E27FC236}">
+                <a16:creationId xmlns:a16="http://schemas.microsoft.com/office/drawing/2014/main" id="{FD847279-352E-ABD8-C209-3F57EA5AF73D}"/>
+              </a:ext>
+            </a:extLst>
+          </p:cNvPr>
+          <p:cNvSpPr/>
+          <p:nvPr/>
+        </p:nvSpPr>
+        <p:spPr>
+          <a:xfrm rot="550380">
+            <a:off x="2832498" y="2407333"/>
+            <a:ext cx="385206" cy="400369"/>
+          </a:xfrm>
+          <a:prstGeom prst="arc">
+            <a:avLst>
+              <a:gd name="adj1" fmla="val 16958553"/>
+              <a:gd name="adj2" fmla="val 750384"/>
+            </a:avLst>
+          </a:prstGeom>
+          <a:ln w="12700">
+            <a:solidFill>
+              <a:schemeClr val="tx1"/>
+            </a:solidFill>
+          </a:ln>
+        </p:spPr>
+        <p:style>
+          <a:lnRef idx="1">
+            <a:schemeClr val="accent1"/>
+          </a:lnRef>
+          <a:fillRef idx="0">
+            <a:schemeClr val="accent1"/>
+          </a:fillRef>
+          <a:effectRef idx="0">
+            <a:schemeClr val="accent1"/>
+          </a:effectRef>
+          <a:fontRef idx="minor">
+            <a:schemeClr val="tx1"/>
+          </a:fontRef>
+        </p:style>
+        <p:txBody>
+          <a:bodyPr rtlCol="0" anchor="ctr"/>
+          <a:lstStyle/>
+          <a:p>
+            <a:pPr algn="ctr"/>
+            <a:endParaRPr lang="en-IN"/>
+          </a:p>
+        </p:txBody>
+      </p:sp>
+      <p:sp>
+        <p:nvSpPr>
+          <p:cNvPr id="2" name="Freeform: Shape 1">
+            <a:extLst>
+              <a:ext uri="{FF2B5EF4-FFF2-40B4-BE49-F238E27FC236}">
+                <a16:creationId xmlns:a16="http://schemas.microsoft.com/office/drawing/2014/main" id="{3B3A3032-56A7-08DC-DE03-EFA064163E36}"/>
+              </a:ext>
+            </a:extLst>
+          </p:cNvPr>
+          <p:cNvSpPr/>
+          <p:nvPr/>
+        </p:nvSpPr>
+        <p:spPr>
+          <a:xfrm>
+            <a:off x="2199190" y="1631158"/>
+            <a:ext cx="3275635" cy="2049591"/>
+          </a:xfrm>
+          <a:custGeom>
+            <a:avLst/>
+            <a:gdLst>
+              <a:gd name="csX0" fmla="*/ 0 w 3275635"/>
+              <a:gd name="csY0" fmla="*/ 2049591 h 2049591"/>
+              <a:gd name="csX1" fmla="*/ 1342663 w 3275635"/>
+              <a:gd name="csY1" fmla="*/ 463860 h 2049591"/>
+              <a:gd name="csX2" fmla="*/ 3275635 w 3275635"/>
+              <a:gd name="csY2" fmla="*/ 872 h 2049591"/>
+            </a:gdLst>
+            <a:ahLst/>
+            <a:cxnLst>
+              <a:cxn ang="0">
+                <a:pos x="csX0" y="csY0"/>
+              </a:cxn>
+              <a:cxn ang="0">
+                <a:pos x="csX1" y="csY1"/>
+              </a:cxn>
+              <a:cxn ang="0">
+                <a:pos x="csX2" y="csY2"/>
+              </a:cxn>
+            </a:cxnLst>
+            <a:rect l="l" t="t" r="r" b="b"/>
+            <a:pathLst>
+              <a:path w="3275635" h="2049591">
+                <a:moveTo>
+                  <a:pt x="0" y="2049591"/>
+                </a:moveTo>
+                <a:cubicBezTo>
+                  <a:pt x="166868" y="1647370"/>
+                  <a:pt x="646252" y="886337"/>
+                  <a:pt x="1342663" y="463860"/>
+                </a:cubicBezTo>
+                <a:cubicBezTo>
+                  <a:pt x="2039074" y="41383"/>
+                  <a:pt x="2825186" y="-7809"/>
+                  <a:pt x="3275635" y="872"/>
+                </a:cubicBezTo>
+              </a:path>
+            </a:pathLst>
+          </a:custGeom>
+          <a:noFill/>
+          <a:ln w="19050">
+            <a:solidFill>
+              <a:schemeClr val="accent1">
+                <a:lumMod val="50000"/>
+                <a:alpha val="65000"/>
+              </a:schemeClr>
+            </a:solidFill>
+          </a:ln>
+        </p:spPr>
+        <p:style>
+          <a:lnRef idx="2">
+            <a:schemeClr val="accent1">
+              <a:shade val="15000"/>
+            </a:schemeClr>
+          </a:lnRef>
+          <a:fillRef idx="1">
+            <a:schemeClr val="accent1"/>
+          </a:fillRef>
+          <a:effectRef idx="0">
+            <a:schemeClr val="accent1"/>
+          </a:effectRef>
+          <a:fontRef idx="minor">
+            <a:schemeClr val="lt1"/>
+          </a:fontRef>
+        </p:style>
+        <p:txBody>
+          <a:bodyPr rtlCol="0" anchor="ctr"/>
+          <a:lstStyle/>
+          <a:p>
+            <a:pPr algn="ctr"/>
+            <a:endParaRPr lang="en-IN"/>
+          </a:p>
+        </p:txBody>
+      </p:sp>
+      <p:cxnSp>
+        <p:nvCxnSpPr>
+          <p:cNvPr id="5" name="Straight Arrow Connector 4">
+            <a:extLst>
+              <a:ext uri="{FF2B5EF4-FFF2-40B4-BE49-F238E27FC236}">
+                <a16:creationId xmlns:a16="http://schemas.microsoft.com/office/drawing/2014/main" id="{62B67A0E-48FD-3839-804D-0F20F8C0BB22}"/>
+              </a:ext>
+            </a:extLst>
+          </p:cNvPr>
+          <p:cNvCxnSpPr>
+            <a:cxnSpLocks/>
+          </p:cNvCxnSpPr>
+          <p:nvPr/>
+        </p:nvCxnSpPr>
+        <p:spPr>
+          <a:xfrm flipV="1">
+            <a:off x="2867665" y="1866900"/>
+            <a:ext cx="758979" cy="796196"/>
+          </a:xfrm>
+          <a:prstGeom prst="straightConnector1">
+            <a:avLst/>
+          </a:prstGeom>
+          <a:ln w="28575" cap="rnd">
+            <a:solidFill>
+              <a:srgbClr val="862626"/>
+            </a:solidFill>
+            <a:round/>
+            <a:tailEnd type="stealth" w="lg" len="lg"/>
+          </a:ln>
+        </p:spPr>
+        <p:style>
+          <a:lnRef idx="1">
+            <a:schemeClr val="accent1"/>
+          </a:lnRef>
+          <a:fillRef idx="0">
+            <a:schemeClr val="accent1"/>
+          </a:fillRef>
+          <a:effectRef idx="0">
+            <a:schemeClr val="accent1"/>
+          </a:effectRef>
+          <a:fontRef idx="minor">
+            <a:schemeClr val="tx1"/>
+          </a:fontRef>
+        </p:style>
+      </p:cxnSp>
+      <p:cxnSp>
+        <p:nvCxnSpPr>
+          <p:cNvPr id="9" name="Straight Arrow Connector 8">
+            <a:extLst>
+              <a:ext uri="{FF2B5EF4-FFF2-40B4-BE49-F238E27FC236}">
+                <a16:creationId xmlns:a16="http://schemas.microsoft.com/office/drawing/2014/main" id="{0BCE6F67-9DC2-7750-9BEC-84BCA006C11D}"/>
+              </a:ext>
+            </a:extLst>
+          </p:cNvPr>
+          <p:cNvCxnSpPr>
+            <a:cxnSpLocks/>
+          </p:cNvCxnSpPr>
+          <p:nvPr/>
+        </p:nvCxnSpPr>
+        <p:spPr>
+          <a:xfrm>
+            <a:off x="2867665" y="2663096"/>
+            <a:ext cx="2373676" cy="112357"/>
+          </a:xfrm>
+          <a:prstGeom prst="straightConnector1">
+            <a:avLst/>
+          </a:prstGeom>
+          <a:ln w="28575" cap="rnd">
+            <a:solidFill>
+              <a:srgbClr val="003A00"/>
+            </a:solidFill>
+            <a:tailEnd type="stealth" w="lg" len="lg"/>
+          </a:ln>
+        </p:spPr>
+        <p:style>
+          <a:lnRef idx="1">
+            <a:schemeClr val="accent1"/>
+          </a:lnRef>
+          <a:fillRef idx="0">
+            <a:schemeClr val="accent1"/>
+          </a:fillRef>
+          <a:effectRef idx="0">
+            <a:schemeClr val="accent1"/>
+          </a:effectRef>
+          <a:fontRef idx="minor">
+            <a:schemeClr val="tx1"/>
+          </a:fontRef>
+        </p:style>
+      </p:cxnSp>
+      <p:sp>
+        <p:nvSpPr>
+          <p:cNvPr id="4" name="Oval 3">
+            <a:extLst>
+              <a:ext uri="{FF2B5EF4-FFF2-40B4-BE49-F238E27FC236}">
+                <a16:creationId xmlns:a16="http://schemas.microsoft.com/office/drawing/2014/main" id="{05CB6731-BF10-D527-7411-93C6197E6B15}"/>
+              </a:ext>
+            </a:extLst>
+          </p:cNvPr>
+          <p:cNvSpPr/>
+          <p:nvPr/>
+        </p:nvSpPr>
+        <p:spPr>
+          <a:xfrm>
+            <a:off x="2809325" y="2603962"/>
+            <a:ext cx="116681" cy="116681"/>
+          </a:xfrm>
+          <a:prstGeom prst="ellipse">
+            <a:avLst/>
+          </a:prstGeom>
+          <a:gradFill flip="none" rotWithShape="1">
+            <a:gsLst>
+              <a:gs pos="0">
+                <a:schemeClr val="accent1">
+                  <a:lumMod val="20000"/>
+                  <a:lumOff val="80000"/>
+                </a:schemeClr>
+              </a:gs>
+              <a:gs pos="54000">
+                <a:schemeClr val="accent5">
+                  <a:lumMod val="95000"/>
+                  <a:lumOff val="5000"/>
+                </a:schemeClr>
+              </a:gs>
+              <a:gs pos="100000">
+                <a:srgbClr val="080E1A"/>
+              </a:gs>
+            </a:gsLst>
+            <a:path path="circle">
+              <a:fillToRect r="100000" b="100000"/>
+            </a:path>
+            <a:tileRect l="-100000" t="-100000"/>
+          </a:gradFill>
+          <a:ln>
+            <a:noFill/>
+          </a:ln>
+        </p:spPr>
+        <p:style>
+          <a:lnRef idx="2">
+            <a:schemeClr val="accent1">
+              <a:shade val="15000"/>
+            </a:schemeClr>
+          </a:lnRef>
+          <a:fillRef idx="1">
+            <a:schemeClr val="accent1"/>
+          </a:fillRef>
+          <a:effectRef idx="0">
+            <a:schemeClr val="accent1"/>
+          </a:effectRef>
+          <a:fontRef idx="minor">
+            <a:schemeClr val="lt1"/>
+          </a:fontRef>
+        </p:style>
+        <p:txBody>
+          <a:bodyPr rtlCol="0" anchor="ctr"/>
+          <a:lstStyle/>
+          <a:p>
+            <a:pPr algn="ctr"/>
+            <a:endParaRPr lang="en-IN"/>
+          </a:p>
+        </p:txBody>
+      </p:sp>
+      <mc:AlternateContent xmlns:mc="http://schemas.openxmlformats.org/markup-compatibility/2006">
+        <mc:Choice xmlns:a14="http://schemas.microsoft.com/office/drawing/2010/main" Requires="a14">
+          <p:sp>
+            <p:nvSpPr>
+              <p:cNvPr id="14" name="TextBox 13">
+                <a:extLst>
+                  <a:ext uri="{FF2B5EF4-FFF2-40B4-BE49-F238E27FC236}">
+                    <a16:creationId xmlns:a16="http://schemas.microsoft.com/office/drawing/2014/main" id="{11E3C134-4E91-BCA3-F796-E961F2E543E8}"/>
+                  </a:ext>
+                </a:extLst>
+              </p:cNvPr>
+              <p:cNvSpPr txBox="1"/>
+              <p:nvPr/>
+            </p:nvSpPr>
+            <p:spPr>
+              <a:xfrm>
+                <a:off x="3168127" y="2345726"/>
+                <a:ext cx="338234" cy="307777"/>
+              </a:xfrm>
+              <a:prstGeom prst="rect">
+                <a:avLst/>
+              </a:prstGeom>
+              <a:noFill/>
+            </p:spPr>
+            <p:txBody>
+              <a:bodyPr wrap="square" lIns="0" tIns="0" rIns="0" bIns="0" rtlCol="0">
+                <a:spAutoFit/>
+              </a:bodyPr>
+              <a:lstStyle/>
+              <a:p>
+                <a:pPr/>
+                <a14:m>
+                  <m:oMathPara xmlns:m="http://schemas.openxmlformats.org/officeDocument/2006/math">
+                    <m:oMath>
+                      <m:r>
+                        <a:rPr lang="en-US" sz="2000" b="0" i="1" smtClean="0">
+                          <a:latin typeface="Cambria Math" panose="02040503050406030204" pitchFamily="18" charset="0"/>
+                          <a:ea typeface="Cambria Math" panose="02040503050406030204" pitchFamily="18" charset="0"/>
+                        </a:rPr>
+                        <m:t>𝜃</m:t>
+                      </m:r>
+                    </m:oMath>
+                  </m:oMathPara>
+                </a14:m>
+                <a:endParaRPr lang="en-US" sz="2000" i="1" dirty="0"/>
+              </a:p>
+            </p:txBody>
+          </p:sp>
+        </mc:Choice>
+        <mc:Fallback>
+          <p:sp>
+            <p:nvSpPr>
+              <p:cNvPr id="14" name="TextBox 13">
+                <a:extLst>
+                  <a:ext uri="{FF2B5EF4-FFF2-40B4-BE49-F238E27FC236}">
+                    <a16:creationId xmlns:a16="http://schemas.microsoft.com/office/drawing/2014/main" id="{11E3C134-4E91-BCA3-F796-E961F2E543E8}"/>
+                  </a:ext>
+                </a:extLst>
+              </p:cNvPr>
+              <p:cNvSpPr txBox="1">
+                <a:spLocks noRot="1" noChangeAspect="1" noMove="1" noResize="1" noEditPoints="1" noAdjustHandles="1" noChangeArrowheads="1" noChangeShapeType="1" noTextEdit="1"/>
+              </p:cNvSpPr>
+              <p:nvPr/>
+            </p:nvSpPr>
+            <p:spPr>
+              <a:xfrm>
+                <a:off x="3168127" y="2345726"/>
+                <a:ext cx="338234" cy="307777"/>
+              </a:xfrm>
+              <a:prstGeom prst="rect">
+                <a:avLst/>
+              </a:prstGeom>
+              <a:blipFill>
+                <a:blip r:embed="rId2"/>
+                <a:stretch>
+                  <a:fillRect b="-8000"/>
+                </a:stretch>
+              </a:blipFill>
+            </p:spPr>
+            <p:txBody>
+              <a:bodyPr/>
+              <a:lstStyle/>
+              <a:p>
+                <a:r>
+                  <a:rPr lang="en-IN">
+                    <a:noFill/>
+                  </a:rPr>
+                  <a:t> </a:t>
+                </a:r>
+              </a:p>
+            </p:txBody>
+          </p:sp>
+        </mc:Fallback>
+      </mc:AlternateContent>
+      <mc:AlternateContent xmlns:mc="http://schemas.openxmlformats.org/markup-compatibility/2006">
+        <mc:Choice xmlns:a14="http://schemas.microsoft.com/office/drawing/2010/main" Requires="a14">
+          <p:sp>
+            <p:nvSpPr>
+              <p:cNvPr id="16" name="TextBox 15">
+                <a:extLst>
+                  <a:ext uri="{FF2B5EF4-FFF2-40B4-BE49-F238E27FC236}">
+                    <a16:creationId xmlns:a16="http://schemas.microsoft.com/office/drawing/2014/main" id="{8D2DE921-3CEF-96C4-8E6E-6A66A8608A6D}"/>
+                  </a:ext>
+                </a:extLst>
+              </p:cNvPr>
+              <p:cNvSpPr txBox="1"/>
+              <p:nvPr/>
+            </p:nvSpPr>
+            <p:spPr>
+              <a:xfrm>
+                <a:off x="2921620" y="1900792"/>
+                <a:ext cx="338234" cy="307777"/>
+              </a:xfrm>
+              <a:prstGeom prst="rect">
+                <a:avLst/>
+              </a:prstGeom>
+              <a:noFill/>
+            </p:spPr>
+            <p:txBody>
+              <a:bodyPr wrap="square" lIns="0" tIns="0" rIns="0" bIns="0" rtlCol="0">
+                <a:spAutoFit/>
+              </a:bodyPr>
+              <a:lstStyle/>
+              <a:p>
+                <a:pPr/>
+                <a14:m>
+                  <m:oMathPara xmlns:m="http://schemas.openxmlformats.org/officeDocument/2006/math">
+                    <m:oMath>
+                      <m:r>
+                        <m:rPr>
+                          <m:sty m:val="p"/>
+                        </m:rPr>
+                        <a:rPr lang="en-US" sz="2000" b="0" i="0" smtClean="0">
+                          <a:latin typeface="Cambria Math" panose="02040503050406030204" pitchFamily="18" charset="0"/>
+                          <a:ea typeface="Cambria Math" panose="02040503050406030204" pitchFamily="18" charset="0"/>
+                        </a:rPr>
+                        <m:t>Δ</m:t>
+                      </m:r>
+                      <m:acc>
+                        <m:accPr>
+                          <m:chr m:val="̅"/>
+                          <m:ctrlPr>
+                            <a:rPr lang="en-US" sz="2000" b="1" i="1">
+                              <a:latin typeface="Cambria Math" panose="02040503050406030204" pitchFamily="18" charset="0"/>
+                            </a:rPr>
+                          </m:ctrlPr>
+                        </m:accPr>
+                        <m:e>
+                          <m:r>
+                            <a:rPr lang="en-US" sz="2000" b="1" i="1">
+                              <a:latin typeface="Cambria Math" panose="02040503050406030204" pitchFamily="18" charset="0"/>
+                            </a:rPr>
+                            <m:t>𝒓</m:t>
+                          </m:r>
+                        </m:e>
+                      </m:acc>
+                    </m:oMath>
+                  </m:oMathPara>
+                </a14:m>
+                <a:endParaRPr lang="en-US" sz="2000" dirty="0"/>
+              </a:p>
+            </p:txBody>
+          </p:sp>
+        </mc:Choice>
+        <mc:Fallback>
+          <p:sp>
+            <p:nvSpPr>
+              <p:cNvPr id="16" name="TextBox 15">
+                <a:extLst>
+                  <a:ext uri="{FF2B5EF4-FFF2-40B4-BE49-F238E27FC236}">
+                    <a16:creationId xmlns:a16="http://schemas.microsoft.com/office/drawing/2014/main" id="{8D2DE921-3CEF-96C4-8E6E-6A66A8608A6D}"/>
+                  </a:ext>
+                </a:extLst>
+              </p:cNvPr>
+              <p:cNvSpPr txBox="1">
+                <a:spLocks noRot="1" noChangeAspect="1" noMove="1" noResize="1" noEditPoints="1" noAdjustHandles="1" noChangeArrowheads="1" noChangeShapeType="1" noTextEdit="1"/>
+              </p:cNvSpPr>
+              <p:nvPr/>
+            </p:nvSpPr>
+            <p:spPr>
+              <a:xfrm>
+                <a:off x="2921620" y="1900792"/>
+                <a:ext cx="338234" cy="307777"/>
+              </a:xfrm>
+              <a:prstGeom prst="rect">
+                <a:avLst/>
+              </a:prstGeom>
+              <a:blipFill>
+                <a:blip r:embed="rId3"/>
+                <a:stretch>
+                  <a:fillRect l="-17857" r="-62500" b="-6000"/>
+                </a:stretch>
+              </a:blipFill>
+            </p:spPr>
+            <p:txBody>
+              <a:bodyPr/>
+              <a:lstStyle/>
+              <a:p>
+                <a:r>
+                  <a:rPr lang="en-IN">
+                    <a:noFill/>
+                  </a:rPr>
+                  <a:t> </a:t>
+                </a:r>
+              </a:p>
+            </p:txBody>
+          </p:sp>
+        </mc:Fallback>
+      </mc:AlternateContent>
+      <mc:AlternateContent xmlns:mc="http://schemas.openxmlformats.org/markup-compatibility/2006">
+        <mc:Choice xmlns:a14="http://schemas.microsoft.com/office/drawing/2010/main" Requires="a14">
+          <p:sp>
+            <p:nvSpPr>
+              <p:cNvPr id="18" name="TextBox 17">
+                <a:extLst>
+                  <a:ext uri="{FF2B5EF4-FFF2-40B4-BE49-F238E27FC236}">
+                    <a16:creationId xmlns:a16="http://schemas.microsoft.com/office/drawing/2014/main" id="{D5D61438-0CE6-BC7F-6509-20F4921207AF}"/>
+                  </a:ext>
+                </a:extLst>
+              </p:cNvPr>
+              <p:cNvSpPr txBox="1"/>
+              <p:nvPr/>
+            </p:nvSpPr>
+            <p:spPr>
+              <a:xfrm>
+                <a:off x="4139775" y="2785046"/>
+                <a:ext cx="221214" cy="307777"/>
+              </a:xfrm>
+              <a:prstGeom prst="rect">
+                <a:avLst/>
+              </a:prstGeom>
+              <a:noFill/>
+            </p:spPr>
+            <p:txBody>
+              <a:bodyPr wrap="none" lIns="0" tIns="0" rIns="0" bIns="0" rtlCol="0">
+                <a:spAutoFit/>
+              </a:bodyPr>
+              <a:lstStyle/>
+              <a:p>
+                <a:pPr/>
+                <a14:m>
+                  <m:oMathPara xmlns:m="http://schemas.openxmlformats.org/officeDocument/2006/math">
+                    <m:oMath>
+                      <m:acc>
+                        <m:accPr>
+                          <m:chr m:val="̅"/>
+                          <m:ctrlPr>
+                            <a:rPr lang="en-US" sz="2000" b="1" i="1" smtClean="0">
+                              <a:latin typeface="Cambria Math" panose="02040503050406030204" pitchFamily="18" charset="0"/>
+                            </a:rPr>
+                          </m:ctrlPr>
+                        </m:accPr>
+                        <m:e>
+                          <m:r>
+                            <a:rPr lang="en-US" sz="2000" b="1" i="1" smtClean="0">
+                              <a:latin typeface="Cambria Math" panose="02040503050406030204" pitchFamily="18" charset="0"/>
+                            </a:rPr>
+                            <m:t>𝑭</m:t>
+                          </m:r>
+                        </m:e>
+                      </m:acc>
+                    </m:oMath>
+                  </m:oMathPara>
+                </a14:m>
+                <a:endParaRPr lang="en-US" sz="2000" dirty="0"/>
+              </a:p>
+            </p:txBody>
+          </p:sp>
+        </mc:Choice>
+        <mc:Fallback>
+          <p:sp>
+            <p:nvSpPr>
+              <p:cNvPr id="18" name="TextBox 17">
+                <a:extLst>
+                  <a:ext uri="{FF2B5EF4-FFF2-40B4-BE49-F238E27FC236}">
+                    <a16:creationId xmlns:a16="http://schemas.microsoft.com/office/drawing/2014/main" id="{D5D61438-0CE6-BC7F-6509-20F4921207AF}"/>
+                  </a:ext>
+                </a:extLst>
+              </p:cNvPr>
+              <p:cNvSpPr txBox="1">
+                <a:spLocks noRot="1" noChangeAspect="1" noMove="1" noResize="1" noEditPoints="1" noAdjustHandles="1" noChangeArrowheads="1" noChangeShapeType="1" noTextEdit="1"/>
+              </p:cNvSpPr>
+              <p:nvPr/>
+            </p:nvSpPr>
+            <p:spPr>
+              <a:xfrm>
+                <a:off x="4139775" y="2785046"/>
+                <a:ext cx="221214" cy="307777"/>
+              </a:xfrm>
+              <a:prstGeom prst="rect">
+                <a:avLst/>
+              </a:prstGeom>
+              <a:blipFill>
+                <a:blip r:embed="rId4"/>
+                <a:stretch>
+                  <a:fillRect l="-25000" t="-2000" r="-30556" b="-6000"/>
+                </a:stretch>
+              </a:blipFill>
+            </p:spPr>
+            <p:txBody>
+              <a:bodyPr/>
+              <a:lstStyle/>
+              <a:p>
+                <a:r>
+                  <a:rPr lang="en-IN">
+                    <a:noFill/>
+                  </a:rPr>
+                  <a:t> </a:t>
+                </a:r>
+              </a:p>
+            </p:txBody>
+          </p:sp>
+        </mc:Fallback>
+      </mc:AlternateContent>
+    </p:spTree>
+    <p:extLst>
+      <p:ext uri="{BB962C8B-B14F-4D97-AF65-F5344CB8AC3E}">
+        <p14:creationId xmlns:p14="http://schemas.microsoft.com/office/powerpoint/2010/main" val="3295610568"/>
+      </p:ext>
+    </p:extLst>
+  </p:cSld>
+  <p:clrMapOvr>
+    <a:masterClrMapping/>
+  </p:clrMapOvr>
+</p:sld>
+</file>
+
+<file path=ppt/slides/slide4.xml><?xml version="1.0" encoding="utf-8"?>
+<p:sld xmlns:a="http://schemas.openxmlformats.org/drawingml/2006/main" xmlns:r="http://schemas.openxmlformats.org/officeDocument/2006/relationships" xmlns:p="http://schemas.openxmlformats.org/presentationml/2006/main">
+  <p:cSld>
+    <p:spTree>
+      <p:nvGrpSpPr>
+        <p:cNvPr id="1" name=""/>
+        <p:cNvGrpSpPr/>
+        <p:nvPr/>
+      </p:nvGrpSpPr>
+      <p:grpSpPr>
+        <a:xfrm>
+          <a:off x="0" y="0"/>
+          <a:ext cx="0" cy="0"/>
+          <a:chOff x="0" y="0"/>
+          <a:chExt cx="0" cy="0"/>
+        </a:xfrm>
+      </p:grpSpPr>
+      <p:cxnSp>
+        <p:nvCxnSpPr>
+          <p:cNvPr id="3" name="Straight Arrow Connector 2">
+            <a:extLst>
+              <a:ext uri="{FF2B5EF4-FFF2-40B4-BE49-F238E27FC236}">
+                <a16:creationId xmlns:a16="http://schemas.microsoft.com/office/drawing/2014/main" id="{55C9B2C4-FCE5-2296-8D58-7A2F8A91BFC0}"/>
+              </a:ext>
+            </a:extLst>
+          </p:cNvPr>
+          <p:cNvCxnSpPr>
+            <a:cxnSpLocks/>
+          </p:cNvCxnSpPr>
+          <p:nvPr/>
+        </p:nvCxnSpPr>
+        <p:spPr>
+          <a:xfrm>
+            <a:off x="3039660" y="2599961"/>
+            <a:ext cx="272659" cy="214677"/>
+          </a:xfrm>
+          <a:prstGeom prst="straightConnector1">
+            <a:avLst/>
+          </a:prstGeom>
+          <a:ln w="28575" cap="rnd">
+            <a:solidFill>
+              <a:srgbClr val="862626">
+                <a:alpha val="50000"/>
+              </a:srgbClr>
+            </a:solidFill>
+            <a:round/>
+            <a:tailEnd type="triangle" w="med" len="lg"/>
+          </a:ln>
+        </p:spPr>
+        <p:style>
+          <a:lnRef idx="1">
+            <a:schemeClr val="accent1"/>
+          </a:lnRef>
+          <a:fillRef idx="0">
+            <a:schemeClr val="accent1"/>
+          </a:fillRef>
+          <a:effectRef idx="0">
+            <a:schemeClr val="accent1"/>
+          </a:effectRef>
+          <a:fontRef idx="minor">
+            <a:schemeClr val="tx1"/>
+          </a:fontRef>
+        </p:style>
+      </p:cxnSp>
+      <p:cxnSp>
+        <p:nvCxnSpPr>
+          <p:cNvPr id="8" name="Straight Arrow Connector 7">
+            <a:extLst>
+              <a:ext uri="{FF2B5EF4-FFF2-40B4-BE49-F238E27FC236}">
+                <a16:creationId xmlns:a16="http://schemas.microsoft.com/office/drawing/2014/main" id="{05ED8BE0-320D-E0D3-3684-5DFEE2522C3B}"/>
+              </a:ext>
+            </a:extLst>
+          </p:cNvPr>
+          <p:cNvCxnSpPr>
+            <a:cxnSpLocks/>
+          </p:cNvCxnSpPr>
+          <p:nvPr/>
+        </p:nvCxnSpPr>
+        <p:spPr>
+          <a:xfrm>
+            <a:off x="3312319" y="2814638"/>
+            <a:ext cx="350044" cy="118041"/>
+          </a:xfrm>
+          <a:prstGeom prst="straightConnector1">
+            <a:avLst/>
+          </a:prstGeom>
+          <a:ln w="28575" cap="rnd">
+            <a:solidFill>
+              <a:srgbClr val="862626">
+                <a:alpha val="50000"/>
+              </a:srgbClr>
+            </a:solidFill>
+            <a:round/>
+            <a:tailEnd type="triangle" w="med" len="lg"/>
+          </a:ln>
+        </p:spPr>
+        <p:style>
+          <a:lnRef idx="1">
+            <a:schemeClr val="accent1"/>
+          </a:lnRef>
+          <a:fillRef idx="0">
+            <a:schemeClr val="accent1"/>
+          </a:fillRef>
+          <a:effectRef idx="0">
+            <a:schemeClr val="accent1"/>
+          </a:effectRef>
+          <a:fontRef idx="minor">
+            <a:schemeClr val="tx1"/>
+          </a:fontRef>
+        </p:style>
+      </p:cxnSp>
+      <p:cxnSp>
+        <p:nvCxnSpPr>
+          <p:cNvPr id="10" name="Straight Arrow Connector 9">
+            <a:extLst>
+              <a:ext uri="{FF2B5EF4-FFF2-40B4-BE49-F238E27FC236}">
+                <a16:creationId xmlns:a16="http://schemas.microsoft.com/office/drawing/2014/main" id="{A29A5716-ACC9-BF18-60A2-4484A120254A}"/>
+              </a:ext>
+            </a:extLst>
+          </p:cNvPr>
+          <p:cNvCxnSpPr>
+            <a:cxnSpLocks/>
+          </p:cNvCxnSpPr>
+          <p:nvPr/>
+        </p:nvCxnSpPr>
+        <p:spPr>
+          <a:xfrm>
+            <a:off x="3662363" y="2932679"/>
+            <a:ext cx="350044" cy="32212"/>
+          </a:xfrm>
+          <a:prstGeom prst="straightConnector1">
+            <a:avLst/>
+          </a:prstGeom>
+          <a:ln w="28575" cap="rnd">
+            <a:solidFill>
+              <a:srgbClr val="862626">
+                <a:alpha val="50000"/>
+              </a:srgbClr>
+            </a:solidFill>
+            <a:round/>
+            <a:tailEnd type="triangle" w="med" len="lg"/>
+          </a:ln>
+        </p:spPr>
+        <p:style>
+          <a:lnRef idx="1">
+            <a:schemeClr val="accent1"/>
+          </a:lnRef>
+          <a:fillRef idx="0">
+            <a:schemeClr val="accent1"/>
+          </a:fillRef>
+          <a:effectRef idx="0">
+            <a:schemeClr val="accent1"/>
+          </a:effectRef>
+          <a:fontRef idx="minor">
+            <a:schemeClr val="tx1"/>
+          </a:fontRef>
+        </p:style>
+      </p:cxnSp>
+      <p:cxnSp>
+        <p:nvCxnSpPr>
+          <p:cNvPr id="12" name="Straight Arrow Connector 11">
+            <a:extLst>
+              <a:ext uri="{FF2B5EF4-FFF2-40B4-BE49-F238E27FC236}">
+                <a16:creationId xmlns:a16="http://schemas.microsoft.com/office/drawing/2014/main" id="{49ADCFB3-F5A8-69C9-8F48-641E9C1BEC04}"/>
+              </a:ext>
+            </a:extLst>
+          </p:cNvPr>
+          <p:cNvCxnSpPr>
+            <a:cxnSpLocks/>
+          </p:cNvCxnSpPr>
+          <p:nvPr/>
+        </p:nvCxnSpPr>
+        <p:spPr>
+          <a:xfrm flipV="1">
+            <a:off x="4012407" y="2932679"/>
+            <a:ext cx="333374" cy="32212"/>
+          </a:xfrm>
+          <a:prstGeom prst="straightConnector1">
+            <a:avLst/>
+          </a:prstGeom>
+          <a:ln w="28575" cap="rnd">
+            <a:solidFill>
+              <a:srgbClr val="862626">
+                <a:alpha val="50000"/>
+              </a:srgbClr>
+            </a:solidFill>
+            <a:round/>
+            <a:tailEnd type="triangle" w="med" len="lg"/>
+          </a:ln>
+        </p:spPr>
+        <p:style>
+          <a:lnRef idx="1">
+            <a:schemeClr val="accent1"/>
+          </a:lnRef>
+          <a:fillRef idx="0">
+            <a:schemeClr val="accent1"/>
+          </a:fillRef>
+          <a:effectRef idx="0">
+            <a:schemeClr val="accent1"/>
+          </a:effectRef>
+          <a:fontRef idx="minor">
+            <a:schemeClr val="tx1"/>
+          </a:fontRef>
+        </p:style>
+      </p:cxnSp>
+      <p:cxnSp>
+        <p:nvCxnSpPr>
+          <p:cNvPr id="14" name="Straight Arrow Connector 13">
+            <a:extLst>
+              <a:ext uri="{FF2B5EF4-FFF2-40B4-BE49-F238E27FC236}">
+                <a16:creationId xmlns:a16="http://schemas.microsoft.com/office/drawing/2014/main" id="{7C6FD6FD-8622-3190-CBEC-5606E5FBC003}"/>
+              </a:ext>
+            </a:extLst>
+          </p:cNvPr>
+          <p:cNvCxnSpPr>
+            <a:cxnSpLocks/>
+          </p:cNvCxnSpPr>
+          <p:nvPr/>
+        </p:nvCxnSpPr>
+        <p:spPr>
+          <a:xfrm flipV="1">
+            <a:off x="4345781" y="2845594"/>
+            <a:ext cx="333374" cy="87085"/>
+          </a:xfrm>
+          <a:prstGeom prst="straightConnector1">
+            <a:avLst/>
+          </a:prstGeom>
+          <a:ln w="28575" cap="rnd">
+            <a:solidFill>
+              <a:srgbClr val="862626">
+                <a:alpha val="50000"/>
+              </a:srgbClr>
+            </a:solidFill>
+            <a:round/>
+            <a:tailEnd type="triangle" w="med" len="lg"/>
+          </a:ln>
+        </p:spPr>
+        <p:style>
+          <a:lnRef idx="1">
+            <a:schemeClr val="accent1"/>
+          </a:lnRef>
+          <a:fillRef idx="0">
+            <a:schemeClr val="accent1"/>
+          </a:fillRef>
+          <a:effectRef idx="0">
+            <a:schemeClr val="accent1"/>
+          </a:effectRef>
+          <a:fontRef idx="minor">
+            <a:schemeClr val="tx1"/>
+          </a:fontRef>
+        </p:style>
+      </p:cxnSp>
+      <p:cxnSp>
+        <p:nvCxnSpPr>
+          <p:cNvPr id="16" name="Straight Arrow Connector 15">
+            <a:extLst>
+              <a:ext uri="{FF2B5EF4-FFF2-40B4-BE49-F238E27FC236}">
+                <a16:creationId xmlns:a16="http://schemas.microsoft.com/office/drawing/2014/main" id="{9726A5D7-747C-377C-A4D5-8D2D573872F9}"/>
+              </a:ext>
+            </a:extLst>
+          </p:cNvPr>
+          <p:cNvCxnSpPr>
+            <a:cxnSpLocks/>
+          </p:cNvCxnSpPr>
+          <p:nvPr/>
+        </p:nvCxnSpPr>
+        <p:spPr>
+          <a:xfrm flipV="1">
+            <a:off x="4679155" y="2707299"/>
+            <a:ext cx="295276" cy="138295"/>
+          </a:xfrm>
+          <a:prstGeom prst="straightConnector1">
+            <a:avLst/>
+          </a:prstGeom>
+          <a:ln w="28575" cap="rnd">
+            <a:solidFill>
+              <a:srgbClr val="862626"/>
+            </a:solidFill>
+            <a:round/>
+            <a:tailEnd type="triangle" w="med" len="lg"/>
+          </a:ln>
+        </p:spPr>
+        <p:style>
+          <a:lnRef idx="1">
+            <a:schemeClr val="accent1"/>
+          </a:lnRef>
+          <a:fillRef idx="0">
+            <a:schemeClr val="accent1"/>
+          </a:fillRef>
+          <a:effectRef idx="0">
+            <a:schemeClr val="accent1"/>
+          </a:effectRef>
+          <a:fontRef idx="minor">
+            <a:schemeClr val="tx1"/>
+          </a:fontRef>
+        </p:style>
+      </p:cxnSp>
+      <p:cxnSp>
+        <p:nvCxnSpPr>
+          <p:cNvPr id="18" name="Straight Arrow Connector 17">
+            <a:extLst>
+              <a:ext uri="{FF2B5EF4-FFF2-40B4-BE49-F238E27FC236}">
+                <a16:creationId xmlns:a16="http://schemas.microsoft.com/office/drawing/2014/main" id="{D3C3B8B4-9855-9FDF-F14F-081CEE1D51B6}"/>
+              </a:ext>
+            </a:extLst>
+          </p:cNvPr>
+          <p:cNvCxnSpPr>
+            <a:cxnSpLocks/>
+          </p:cNvCxnSpPr>
+          <p:nvPr/>
+        </p:nvCxnSpPr>
+        <p:spPr>
+          <a:xfrm flipV="1">
+            <a:off x="4974431" y="2500901"/>
+            <a:ext cx="325361" cy="206398"/>
+          </a:xfrm>
+          <a:prstGeom prst="straightConnector1">
+            <a:avLst/>
+          </a:prstGeom>
+          <a:ln w="28575" cap="rnd">
+            <a:solidFill>
+              <a:srgbClr val="862626">
+                <a:alpha val="50000"/>
+              </a:srgbClr>
+            </a:solidFill>
+            <a:round/>
+            <a:tailEnd type="triangle" w="med" len="lg"/>
+          </a:ln>
+        </p:spPr>
+        <p:style>
+          <a:lnRef idx="1">
+            <a:schemeClr val="accent1"/>
+          </a:lnRef>
+          <a:fillRef idx="0">
+            <a:schemeClr val="accent1"/>
+          </a:fillRef>
+          <a:effectRef idx="0">
+            <a:schemeClr val="accent1"/>
+          </a:effectRef>
+          <a:fontRef idx="minor">
+            <a:schemeClr val="tx1"/>
+          </a:fontRef>
+        </p:style>
+      </p:cxnSp>
+      <p:cxnSp>
+        <p:nvCxnSpPr>
+          <p:cNvPr id="21" name="Straight Arrow Connector 20">
+            <a:extLst>
+              <a:ext uri="{FF2B5EF4-FFF2-40B4-BE49-F238E27FC236}">
+                <a16:creationId xmlns:a16="http://schemas.microsoft.com/office/drawing/2014/main" id="{8CECB20E-F8A0-C227-A017-F668D76DDC03}"/>
+              </a:ext>
+            </a:extLst>
+          </p:cNvPr>
+          <p:cNvCxnSpPr>
+            <a:cxnSpLocks/>
+          </p:cNvCxnSpPr>
+          <p:nvPr/>
+        </p:nvCxnSpPr>
+        <p:spPr>
+          <a:xfrm flipV="1">
+            <a:off x="5299792" y="2274094"/>
+            <a:ext cx="295276" cy="226807"/>
+          </a:xfrm>
+          <a:prstGeom prst="straightConnector1">
+            <a:avLst/>
+          </a:prstGeom>
+          <a:ln w="28575" cap="rnd">
+            <a:solidFill>
+              <a:srgbClr val="862626">
+                <a:alpha val="50000"/>
+              </a:srgbClr>
+            </a:solidFill>
+            <a:round/>
+            <a:tailEnd type="triangle" w="med" len="lg"/>
+          </a:ln>
+        </p:spPr>
+        <p:style>
+          <a:lnRef idx="1">
+            <a:schemeClr val="accent1"/>
+          </a:lnRef>
+          <a:fillRef idx="0">
+            <a:schemeClr val="accent1"/>
+          </a:fillRef>
+          <a:effectRef idx="0">
+            <a:schemeClr val="accent1"/>
+          </a:effectRef>
+          <a:fontRef idx="minor">
+            <a:schemeClr val="tx1"/>
+          </a:fontRef>
+        </p:style>
+      </p:cxnSp>
+      <p:cxnSp>
+        <p:nvCxnSpPr>
+          <p:cNvPr id="23" name="Straight Arrow Connector 22">
+            <a:extLst>
+              <a:ext uri="{FF2B5EF4-FFF2-40B4-BE49-F238E27FC236}">
+                <a16:creationId xmlns:a16="http://schemas.microsoft.com/office/drawing/2014/main" id="{4154146F-7348-56CD-D6D0-3B8BEBC2275B}"/>
+              </a:ext>
+            </a:extLst>
+          </p:cNvPr>
+          <p:cNvCxnSpPr>
+            <a:cxnSpLocks/>
+          </p:cNvCxnSpPr>
+          <p:nvPr/>
+        </p:nvCxnSpPr>
+        <p:spPr>
+          <a:xfrm flipV="1">
+            <a:off x="5595068" y="2047287"/>
+            <a:ext cx="325361" cy="226807"/>
+          </a:xfrm>
+          <a:prstGeom prst="straightConnector1">
+            <a:avLst/>
+          </a:prstGeom>
+          <a:ln w="28575" cap="rnd">
+            <a:solidFill>
+              <a:srgbClr val="862626">
+                <a:alpha val="50000"/>
+              </a:srgbClr>
+            </a:solidFill>
+            <a:round/>
+            <a:tailEnd type="triangle" w="med" len="lg"/>
+          </a:ln>
+        </p:spPr>
+        <p:style>
+          <a:lnRef idx="1">
+            <a:schemeClr val="accent1"/>
+          </a:lnRef>
+          <a:fillRef idx="0">
+            <a:schemeClr val="accent1"/>
+          </a:fillRef>
+          <a:effectRef idx="0">
+            <a:schemeClr val="accent1"/>
+          </a:effectRef>
+          <a:fontRef idx="minor">
+            <a:schemeClr val="tx1"/>
+          </a:fontRef>
+        </p:style>
+      </p:cxnSp>
+      <p:cxnSp>
+        <p:nvCxnSpPr>
+          <p:cNvPr id="25" name="Straight Arrow Connector 24">
+            <a:extLst>
+              <a:ext uri="{FF2B5EF4-FFF2-40B4-BE49-F238E27FC236}">
+                <a16:creationId xmlns:a16="http://schemas.microsoft.com/office/drawing/2014/main" id="{09A6D79A-51E6-0C62-4A6B-037DB8D2A3E3}"/>
+              </a:ext>
+            </a:extLst>
+          </p:cNvPr>
+          <p:cNvCxnSpPr>
+            <a:cxnSpLocks/>
+          </p:cNvCxnSpPr>
+          <p:nvPr/>
+        </p:nvCxnSpPr>
+        <p:spPr>
+          <a:xfrm flipV="1">
+            <a:off x="5920429" y="1843088"/>
+            <a:ext cx="325361" cy="204199"/>
+          </a:xfrm>
+          <a:prstGeom prst="straightConnector1">
+            <a:avLst/>
+          </a:prstGeom>
+          <a:ln w="28575" cap="rnd">
+            <a:solidFill>
+              <a:srgbClr val="862626">
+                <a:alpha val="50000"/>
+              </a:srgbClr>
+            </a:solidFill>
+            <a:round/>
+            <a:tailEnd type="triangle" w="med" len="lg"/>
+          </a:ln>
+        </p:spPr>
+        <p:style>
+          <a:lnRef idx="1">
+            <a:schemeClr val="accent1"/>
+          </a:lnRef>
+          <a:fillRef idx="0">
+            <a:schemeClr val="accent1"/>
+          </a:fillRef>
+          <a:effectRef idx="0">
+            <a:schemeClr val="accent1"/>
+          </a:effectRef>
+          <a:fontRef idx="minor">
+            <a:schemeClr val="tx1"/>
+          </a:fontRef>
+        </p:style>
+      </p:cxnSp>
+      <p:cxnSp>
+        <p:nvCxnSpPr>
+          <p:cNvPr id="27" name="Straight Arrow Connector 26">
+            <a:extLst>
+              <a:ext uri="{FF2B5EF4-FFF2-40B4-BE49-F238E27FC236}">
+                <a16:creationId xmlns:a16="http://schemas.microsoft.com/office/drawing/2014/main" id="{7F361299-8CAC-34EE-6085-400B7776EEDD}"/>
+              </a:ext>
+            </a:extLst>
+          </p:cNvPr>
+          <p:cNvCxnSpPr>
+            <a:cxnSpLocks/>
+          </p:cNvCxnSpPr>
+          <p:nvPr/>
+        </p:nvCxnSpPr>
+        <p:spPr>
+          <a:xfrm flipV="1">
+            <a:off x="6245790" y="1674019"/>
+            <a:ext cx="300266" cy="169069"/>
+          </a:xfrm>
+          <a:prstGeom prst="straightConnector1">
+            <a:avLst/>
+          </a:prstGeom>
+          <a:ln w="28575" cap="rnd">
+            <a:solidFill>
+              <a:srgbClr val="862626">
+                <a:alpha val="50000"/>
+              </a:srgbClr>
+            </a:solidFill>
+            <a:round/>
+            <a:tailEnd type="triangle" w="med" len="lg"/>
+          </a:ln>
+        </p:spPr>
+        <p:style>
+          <a:lnRef idx="1">
+            <a:schemeClr val="accent1"/>
+          </a:lnRef>
+          <a:fillRef idx="0">
+            <a:schemeClr val="accent1"/>
+          </a:fillRef>
+          <a:effectRef idx="0">
+            <a:schemeClr val="accent1"/>
+          </a:effectRef>
+          <a:fontRef idx="minor">
+            <a:schemeClr val="tx1"/>
+          </a:fontRef>
+        </p:style>
+      </p:cxnSp>
+      <p:cxnSp>
+        <p:nvCxnSpPr>
+          <p:cNvPr id="32" name="Straight Arrow Connector 31">
+            <a:extLst>
+              <a:ext uri="{FF2B5EF4-FFF2-40B4-BE49-F238E27FC236}">
+                <a16:creationId xmlns:a16="http://schemas.microsoft.com/office/drawing/2014/main" id="{BA65EF9D-1F6F-4899-A441-2864E408E577}"/>
+              </a:ext>
+            </a:extLst>
+          </p:cNvPr>
+          <p:cNvCxnSpPr>
+            <a:cxnSpLocks/>
+          </p:cNvCxnSpPr>
+          <p:nvPr/>
+        </p:nvCxnSpPr>
+        <p:spPr>
+          <a:xfrm flipV="1">
+            <a:off x="6546056" y="1531144"/>
+            <a:ext cx="325361" cy="142875"/>
+          </a:xfrm>
+          <a:prstGeom prst="straightConnector1">
+            <a:avLst/>
+          </a:prstGeom>
+          <a:ln w="28575" cap="rnd">
+            <a:solidFill>
+              <a:srgbClr val="862626">
+                <a:alpha val="50000"/>
+              </a:srgbClr>
+            </a:solidFill>
+            <a:round/>
+            <a:tailEnd type="triangle" w="med" len="lg"/>
+          </a:ln>
+        </p:spPr>
+        <p:style>
+          <a:lnRef idx="1">
+            <a:schemeClr val="accent1"/>
+          </a:lnRef>
+          <a:fillRef idx="0">
+            <a:schemeClr val="accent1"/>
+          </a:fillRef>
+          <a:effectRef idx="0">
+            <a:schemeClr val="accent1"/>
+          </a:effectRef>
+          <a:fontRef idx="minor">
+            <a:schemeClr val="tx1"/>
+          </a:fontRef>
+        </p:style>
+      </p:cxnSp>
+      <p:cxnSp>
+        <p:nvCxnSpPr>
+          <p:cNvPr id="34" name="Straight Arrow Connector 33">
+            <a:extLst>
+              <a:ext uri="{FF2B5EF4-FFF2-40B4-BE49-F238E27FC236}">
+                <a16:creationId xmlns:a16="http://schemas.microsoft.com/office/drawing/2014/main" id="{6D5B5524-A10B-8063-DA90-7EEEE6780FE7}"/>
+              </a:ext>
+            </a:extLst>
+          </p:cNvPr>
+          <p:cNvCxnSpPr>
+            <a:cxnSpLocks/>
+          </p:cNvCxnSpPr>
+          <p:nvPr/>
+        </p:nvCxnSpPr>
+        <p:spPr>
+          <a:xfrm flipV="1">
+            <a:off x="6871417" y="1414463"/>
+            <a:ext cx="325361" cy="116681"/>
+          </a:xfrm>
+          <a:prstGeom prst="straightConnector1">
+            <a:avLst/>
+          </a:prstGeom>
+          <a:ln w="28575" cap="rnd">
+            <a:solidFill>
+              <a:srgbClr val="862626">
+                <a:alpha val="50000"/>
+              </a:srgbClr>
+            </a:solidFill>
+            <a:round/>
+            <a:tailEnd type="triangle" w="med" len="lg"/>
+          </a:ln>
+        </p:spPr>
+        <p:style>
+          <a:lnRef idx="1">
+            <a:schemeClr val="accent1"/>
+          </a:lnRef>
+          <a:fillRef idx="0">
+            <a:schemeClr val="accent1"/>
+          </a:fillRef>
+          <a:effectRef idx="0">
+            <a:schemeClr val="accent1"/>
+          </a:effectRef>
+          <a:fontRef idx="minor">
+            <a:schemeClr val="tx1"/>
+          </a:fontRef>
+        </p:style>
+      </p:cxnSp>
+      <p:cxnSp>
+        <p:nvCxnSpPr>
+          <p:cNvPr id="36" name="Straight Arrow Connector 35">
+            <a:extLst>
+              <a:ext uri="{FF2B5EF4-FFF2-40B4-BE49-F238E27FC236}">
+                <a16:creationId xmlns:a16="http://schemas.microsoft.com/office/drawing/2014/main" id="{CAE204BF-90BA-DE73-66A2-93228726D3E3}"/>
+              </a:ext>
+            </a:extLst>
+          </p:cNvPr>
+          <p:cNvCxnSpPr>
+            <a:cxnSpLocks/>
+          </p:cNvCxnSpPr>
+          <p:nvPr/>
+        </p:nvCxnSpPr>
+        <p:spPr>
+          <a:xfrm flipV="1">
+            <a:off x="7202090" y="1356122"/>
+            <a:ext cx="328018" cy="58341"/>
+          </a:xfrm>
+          <a:prstGeom prst="straightConnector1">
+            <a:avLst/>
+          </a:prstGeom>
+          <a:ln w="28575" cap="rnd">
+            <a:solidFill>
+              <a:srgbClr val="862626">
+                <a:alpha val="50000"/>
+              </a:srgbClr>
+            </a:solidFill>
+            <a:round/>
+            <a:tailEnd type="triangle" w="med" len="lg"/>
+          </a:ln>
+        </p:spPr>
+        <p:style>
+          <a:lnRef idx="1">
+            <a:schemeClr val="accent1"/>
+          </a:lnRef>
+          <a:fillRef idx="0">
+            <a:schemeClr val="accent1"/>
+          </a:fillRef>
+          <a:effectRef idx="0">
+            <a:schemeClr val="accent1"/>
+          </a:effectRef>
+          <a:fontRef idx="minor">
+            <a:schemeClr val="tx1"/>
+          </a:fontRef>
+        </p:style>
+      </p:cxnSp>
+      <p:cxnSp>
+        <p:nvCxnSpPr>
+          <p:cNvPr id="38" name="Straight Arrow Connector 37">
+            <a:extLst>
+              <a:ext uri="{FF2B5EF4-FFF2-40B4-BE49-F238E27FC236}">
+                <a16:creationId xmlns:a16="http://schemas.microsoft.com/office/drawing/2014/main" id="{1BF65C57-1F65-BB7C-30EA-89005B41A309}"/>
+              </a:ext>
+            </a:extLst>
+          </p:cNvPr>
+          <p:cNvCxnSpPr>
+            <a:cxnSpLocks/>
+          </p:cNvCxnSpPr>
+          <p:nvPr/>
+        </p:nvCxnSpPr>
+        <p:spPr>
+          <a:xfrm flipV="1">
+            <a:off x="7530108" y="1327009"/>
+            <a:ext cx="328018" cy="29113"/>
+          </a:xfrm>
+          <a:prstGeom prst="straightConnector1">
+            <a:avLst/>
+          </a:prstGeom>
+          <a:ln w="28575" cap="rnd">
+            <a:solidFill>
+              <a:srgbClr val="862626">
+                <a:alpha val="50000"/>
+              </a:srgbClr>
+            </a:solidFill>
+            <a:round/>
+            <a:tailEnd type="triangle" w="med" len="lg"/>
+          </a:ln>
+        </p:spPr>
+        <p:style>
+          <a:lnRef idx="1">
+            <a:schemeClr val="accent1"/>
+          </a:lnRef>
+          <a:fillRef idx="0">
+            <a:schemeClr val="accent1"/>
+          </a:fillRef>
+          <a:effectRef idx="0">
+            <a:schemeClr val="accent1"/>
+          </a:effectRef>
+          <a:fontRef idx="minor">
+            <a:schemeClr val="tx1"/>
+          </a:fontRef>
+        </p:style>
+      </p:cxnSp>
+      <mc:AlternateContent xmlns:mc="http://schemas.openxmlformats.org/markup-compatibility/2006">
+        <mc:Choice xmlns:a14="http://schemas.microsoft.com/office/drawing/2010/main" Requires="a14">
+          <p:sp>
+            <p:nvSpPr>
+              <p:cNvPr id="41" name="TextBox 40">
+                <a:extLst>
+                  <a:ext uri="{FF2B5EF4-FFF2-40B4-BE49-F238E27FC236}">
+                    <a16:creationId xmlns:a16="http://schemas.microsoft.com/office/drawing/2014/main" id="{FF43E93F-25E4-C44F-2DD0-8E2C53F3159E}"/>
+                  </a:ext>
+                </a:extLst>
+              </p:cNvPr>
+              <p:cNvSpPr txBox="1"/>
+              <p:nvPr/>
+            </p:nvSpPr>
+            <p:spPr>
+              <a:xfrm>
+                <a:off x="4030927" y="5739634"/>
+                <a:ext cx="338234" cy="307777"/>
+              </a:xfrm>
+              <a:prstGeom prst="rect">
+                <a:avLst/>
+              </a:prstGeom>
+              <a:noFill/>
+            </p:spPr>
+            <p:txBody>
+              <a:bodyPr wrap="square" lIns="0" tIns="0" rIns="0" bIns="0" rtlCol="0">
+                <a:spAutoFit/>
+              </a:bodyPr>
+              <a:lstStyle/>
+              <a:p>
+                <a:pPr/>
+                <a14:m>
+                  <m:oMathPara xmlns:m="http://schemas.openxmlformats.org/officeDocument/2006/math">
+                    <m:oMath>
+                      <m:r>
+                        <a:rPr lang="en-US" sz="2000" b="0" i="1" smtClean="0">
+                          <a:latin typeface="Cambria Math" panose="02040503050406030204" pitchFamily="18" charset="0"/>
+                          <a:ea typeface="Cambria Math" panose="02040503050406030204" pitchFamily="18" charset="0"/>
+                        </a:rPr>
+                        <m:t>𝑂</m:t>
+                      </m:r>
+                    </m:oMath>
+                  </m:oMathPara>
+                </a14:m>
+                <a:endParaRPr lang="en-US" sz="2000" i="1" dirty="0"/>
+              </a:p>
+            </p:txBody>
+          </p:sp>
+        </mc:Choice>
+        <mc:Fallback>
+          <p:sp>
+            <p:nvSpPr>
+              <p:cNvPr id="41" name="TextBox 40">
+                <a:extLst>
+                  <a:ext uri="{FF2B5EF4-FFF2-40B4-BE49-F238E27FC236}">
+                    <a16:creationId xmlns:a16="http://schemas.microsoft.com/office/drawing/2014/main" id="{FF43E93F-25E4-C44F-2DD0-8E2C53F3159E}"/>
+                  </a:ext>
+                </a:extLst>
+              </p:cNvPr>
+              <p:cNvSpPr txBox="1">
+                <a:spLocks noRot="1" noChangeAspect="1" noMove="1" noResize="1" noEditPoints="1" noAdjustHandles="1" noChangeArrowheads="1" noChangeShapeType="1" noTextEdit="1"/>
+              </p:cNvSpPr>
+              <p:nvPr/>
+            </p:nvSpPr>
+            <p:spPr>
+              <a:xfrm>
+                <a:off x="4030927" y="5739634"/>
+                <a:ext cx="338234" cy="307777"/>
+              </a:xfrm>
+              <a:prstGeom prst="rect">
+                <a:avLst/>
+              </a:prstGeom>
+              <a:blipFill>
+                <a:blip r:embed="rId2"/>
+                <a:stretch>
+                  <a:fillRect l="-1786" b="-6000"/>
+                </a:stretch>
+              </a:blipFill>
+            </p:spPr>
+            <p:txBody>
+              <a:bodyPr/>
+              <a:lstStyle/>
+              <a:p>
+                <a:r>
+                  <a:rPr lang="en-IN">
+                    <a:noFill/>
+                  </a:rPr>
+                  <a:t> </a:t>
+                </a:r>
+              </a:p>
+            </p:txBody>
+          </p:sp>
+        </mc:Fallback>
+      </mc:AlternateContent>
+      <p:sp>
+        <p:nvSpPr>
+          <p:cNvPr id="43" name="Oval 42">
+            <a:extLst>
+              <a:ext uri="{FF2B5EF4-FFF2-40B4-BE49-F238E27FC236}">
+                <a16:creationId xmlns:a16="http://schemas.microsoft.com/office/drawing/2014/main" id="{153E5505-99B8-5E01-7164-7A3A99ADFB02}"/>
+              </a:ext>
+            </a:extLst>
+          </p:cNvPr>
+          <p:cNvSpPr/>
+          <p:nvPr/>
+        </p:nvSpPr>
+        <p:spPr>
+          <a:xfrm>
+            <a:off x="4012407" y="5749300"/>
+            <a:ext cx="75141" cy="75141"/>
+          </a:xfrm>
+          <a:prstGeom prst="ellipse">
+            <a:avLst/>
+          </a:prstGeom>
+          <a:solidFill>
+            <a:schemeClr val="tx1"/>
+          </a:solidFill>
+          <a:ln>
+            <a:noFill/>
+          </a:ln>
+        </p:spPr>
+        <p:style>
+          <a:lnRef idx="2">
+            <a:schemeClr val="accent1">
+              <a:shade val="15000"/>
+            </a:schemeClr>
+          </a:lnRef>
+          <a:fillRef idx="1">
+            <a:schemeClr val="accent1"/>
+          </a:fillRef>
+          <a:effectRef idx="0">
+            <a:schemeClr val="accent1"/>
+          </a:effectRef>
+          <a:fontRef idx="minor">
+            <a:schemeClr val="lt1"/>
+          </a:fontRef>
+        </p:style>
+        <p:txBody>
+          <a:bodyPr rtlCol="0" anchor="ctr"/>
+          <a:lstStyle/>
+          <a:p>
+            <a:pPr algn="ctr"/>
+            <a:endParaRPr lang="en-IN"/>
+          </a:p>
+        </p:txBody>
+      </p:sp>
+      <p:sp>
+        <p:nvSpPr>
+          <p:cNvPr id="45" name="Oval 44">
+            <a:extLst>
+              <a:ext uri="{FF2B5EF4-FFF2-40B4-BE49-F238E27FC236}">
+                <a16:creationId xmlns:a16="http://schemas.microsoft.com/office/drawing/2014/main" id="{B45708B0-950F-AD55-A25D-D5011A850FF7}"/>
+              </a:ext>
+            </a:extLst>
+          </p:cNvPr>
+          <p:cNvSpPr/>
+          <p:nvPr/>
+        </p:nvSpPr>
+        <p:spPr>
+          <a:xfrm>
+            <a:off x="2964519" y="2528312"/>
+            <a:ext cx="75141" cy="75141"/>
+          </a:xfrm>
+          <a:prstGeom prst="ellipse">
+            <a:avLst/>
+          </a:prstGeom>
+          <a:solidFill>
+            <a:schemeClr val="tx1"/>
+          </a:solidFill>
+          <a:ln>
+            <a:noFill/>
+          </a:ln>
+        </p:spPr>
+        <p:style>
+          <a:lnRef idx="2">
+            <a:schemeClr val="accent1">
+              <a:shade val="15000"/>
+            </a:schemeClr>
+          </a:lnRef>
+          <a:fillRef idx="1">
+            <a:schemeClr val="accent1"/>
+          </a:fillRef>
+          <a:effectRef idx="0">
+            <a:schemeClr val="accent1"/>
+          </a:effectRef>
+          <a:fontRef idx="minor">
+            <a:schemeClr val="lt1"/>
+          </a:fontRef>
+        </p:style>
+        <p:txBody>
+          <a:bodyPr rtlCol="0" anchor="ctr"/>
+          <a:lstStyle/>
+          <a:p>
+            <a:pPr algn="ctr"/>
+            <a:endParaRPr lang="en-IN"/>
+          </a:p>
+        </p:txBody>
+      </p:sp>
+      <mc:AlternateContent xmlns:mc="http://schemas.openxmlformats.org/markup-compatibility/2006">
+        <mc:Choice xmlns:a14="http://schemas.microsoft.com/office/drawing/2010/main" Requires="a14">
+          <p:sp>
+            <p:nvSpPr>
+              <p:cNvPr id="47" name="TextBox 46">
+                <a:extLst>
+                  <a:ext uri="{FF2B5EF4-FFF2-40B4-BE49-F238E27FC236}">
+                    <a16:creationId xmlns:a16="http://schemas.microsoft.com/office/drawing/2014/main" id="{AC7E7ED7-5FBF-21EC-26F6-3167F8BE93AC}"/>
+                  </a:ext>
+                </a:extLst>
+              </p:cNvPr>
+              <p:cNvSpPr txBox="1"/>
+              <p:nvPr/>
+            </p:nvSpPr>
+            <p:spPr>
+              <a:xfrm>
+                <a:off x="2630840" y="2411993"/>
+                <a:ext cx="338234" cy="307777"/>
+              </a:xfrm>
+              <a:prstGeom prst="rect">
+                <a:avLst/>
+              </a:prstGeom>
+              <a:noFill/>
+            </p:spPr>
+            <p:txBody>
+              <a:bodyPr wrap="square" lIns="0" tIns="0" rIns="0" bIns="0" rtlCol="0">
+                <a:spAutoFit/>
+              </a:bodyPr>
+              <a:lstStyle/>
+              <a:p>
+                <a:pPr/>
+                <a14:m>
+                  <m:oMathPara xmlns:m="http://schemas.openxmlformats.org/officeDocument/2006/math">
+                    <m:oMath>
+                      <m:r>
+                        <a:rPr lang="en-US" sz="2000" b="0" i="1" smtClean="0">
+                          <a:latin typeface="Cambria Math" panose="02040503050406030204" pitchFamily="18" charset="0"/>
+                          <a:ea typeface="Cambria Math" panose="02040503050406030204" pitchFamily="18" charset="0"/>
+                        </a:rPr>
+                        <m:t>𝐴</m:t>
+                      </m:r>
+                    </m:oMath>
+                  </m:oMathPara>
+                </a14:m>
+                <a:endParaRPr lang="en-US" sz="2000" i="1" dirty="0"/>
+              </a:p>
+            </p:txBody>
+          </p:sp>
+        </mc:Choice>
+        <mc:Fallback>
+          <p:sp>
+            <p:nvSpPr>
+              <p:cNvPr id="47" name="TextBox 46">
+                <a:extLst>
+                  <a:ext uri="{FF2B5EF4-FFF2-40B4-BE49-F238E27FC236}">
+                    <a16:creationId xmlns:a16="http://schemas.microsoft.com/office/drawing/2014/main" id="{AC7E7ED7-5FBF-21EC-26F6-3167F8BE93AC}"/>
+                  </a:ext>
+                </a:extLst>
+              </p:cNvPr>
+              <p:cNvSpPr txBox="1">
+                <a:spLocks noRot="1" noChangeAspect="1" noMove="1" noResize="1" noEditPoints="1" noAdjustHandles="1" noChangeArrowheads="1" noChangeShapeType="1" noTextEdit="1"/>
+              </p:cNvSpPr>
+              <p:nvPr/>
+            </p:nvSpPr>
+            <p:spPr>
+              <a:xfrm>
+                <a:off x="2630840" y="2411993"/>
+                <a:ext cx="338234" cy="307777"/>
+              </a:xfrm>
+              <a:prstGeom prst="rect">
+                <a:avLst/>
+              </a:prstGeom>
+              <a:blipFill>
+                <a:blip r:embed="rId3"/>
+                <a:stretch>
+                  <a:fillRect l="-1818" b="-6000"/>
+                </a:stretch>
+              </a:blipFill>
+            </p:spPr>
+            <p:txBody>
+              <a:bodyPr/>
+              <a:lstStyle/>
+              <a:p>
+                <a:r>
+                  <a:rPr lang="en-IN">
+                    <a:noFill/>
+                  </a:rPr>
+                  <a:t> </a:t>
+                </a:r>
+              </a:p>
+            </p:txBody>
+          </p:sp>
+        </mc:Fallback>
+      </mc:AlternateContent>
+      <p:sp>
+        <p:nvSpPr>
+          <p:cNvPr id="49" name="Oval 48">
+            <a:extLst>
+              <a:ext uri="{FF2B5EF4-FFF2-40B4-BE49-F238E27FC236}">
+                <a16:creationId xmlns:a16="http://schemas.microsoft.com/office/drawing/2014/main" id="{6F3552B3-EBE8-CAE6-F879-E368FC070B23}"/>
+              </a:ext>
+            </a:extLst>
+          </p:cNvPr>
+          <p:cNvSpPr/>
+          <p:nvPr/>
+        </p:nvSpPr>
+        <p:spPr>
+          <a:xfrm>
+            <a:off x="7858126" y="1292293"/>
+            <a:ext cx="75141" cy="75141"/>
+          </a:xfrm>
+          <a:prstGeom prst="ellipse">
+            <a:avLst/>
+          </a:prstGeom>
+          <a:solidFill>
+            <a:schemeClr val="tx1"/>
+          </a:solidFill>
+          <a:ln>
+            <a:noFill/>
+          </a:ln>
+        </p:spPr>
+        <p:style>
+          <a:lnRef idx="2">
+            <a:schemeClr val="accent1">
+              <a:shade val="15000"/>
+            </a:schemeClr>
+          </a:lnRef>
+          <a:fillRef idx="1">
+            <a:schemeClr val="accent1"/>
+          </a:fillRef>
+          <a:effectRef idx="0">
+            <a:schemeClr val="accent1"/>
+          </a:effectRef>
+          <a:fontRef idx="minor">
+            <a:schemeClr val="lt1"/>
+          </a:fontRef>
+        </p:style>
+        <p:txBody>
+          <a:bodyPr rtlCol="0" anchor="ctr"/>
+          <a:lstStyle/>
+          <a:p>
+            <a:pPr algn="ctr"/>
+            <a:endParaRPr lang="en-IN"/>
+          </a:p>
+        </p:txBody>
+      </p:sp>
+      <mc:AlternateContent xmlns:mc="http://schemas.openxmlformats.org/markup-compatibility/2006">
+        <mc:Choice xmlns:a14="http://schemas.microsoft.com/office/drawing/2010/main" Requires="a14">
+          <p:sp>
+            <p:nvSpPr>
+              <p:cNvPr id="51" name="TextBox 50">
+                <a:extLst>
+                  <a:ext uri="{FF2B5EF4-FFF2-40B4-BE49-F238E27FC236}">
+                    <a16:creationId xmlns:a16="http://schemas.microsoft.com/office/drawing/2014/main" id="{05C772DF-C2C1-6345-DD40-46B406657C9E}"/>
+                  </a:ext>
+                </a:extLst>
+              </p:cNvPr>
+              <p:cNvSpPr txBox="1"/>
+              <p:nvPr/>
+            </p:nvSpPr>
+            <p:spPr>
+              <a:xfrm>
+                <a:off x="7940859" y="1138404"/>
+                <a:ext cx="338234" cy="307777"/>
+              </a:xfrm>
+              <a:prstGeom prst="rect">
+                <a:avLst/>
+              </a:prstGeom>
+              <a:noFill/>
+            </p:spPr>
+            <p:txBody>
+              <a:bodyPr wrap="square" lIns="0" tIns="0" rIns="0" bIns="0" rtlCol="0">
+                <a:spAutoFit/>
+              </a:bodyPr>
+              <a:lstStyle/>
+              <a:p>
+                <a:pPr/>
+                <a14:m>
+                  <m:oMathPara xmlns:m="http://schemas.openxmlformats.org/officeDocument/2006/math">
+                    <m:oMath>
+                      <m:r>
+                        <a:rPr lang="en-US" sz="2000" b="0" i="1" smtClean="0">
+                          <a:latin typeface="Cambria Math" panose="02040503050406030204" pitchFamily="18" charset="0"/>
+                          <a:ea typeface="Cambria Math" panose="02040503050406030204" pitchFamily="18" charset="0"/>
+                        </a:rPr>
+                        <m:t>𝐵</m:t>
+                      </m:r>
+                    </m:oMath>
+                  </m:oMathPara>
+                </a14:m>
+                <a:endParaRPr lang="en-US" sz="2000" i="1" dirty="0"/>
+              </a:p>
+            </p:txBody>
+          </p:sp>
+        </mc:Choice>
+        <mc:Fallback>
+          <p:sp>
+            <p:nvSpPr>
+              <p:cNvPr id="51" name="TextBox 50">
+                <a:extLst>
+                  <a:ext uri="{FF2B5EF4-FFF2-40B4-BE49-F238E27FC236}">
+                    <a16:creationId xmlns:a16="http://schemas.microsoft.com/office/drawing/2014/main" id="{05C772DF-C2C1-6345-DD40-46B406657C9E}"/>
+                  </a:ext>
+                </a:extLst>
+              </p:cNvPr>
+              <p:cNvSpPr txBox="1">
+                <a:spLocks noRot="1" noChangeAspect="1" noMove="1" noResize="1" noEditPoints="1" noAdjustHandles="1" noChangeArrowheads="1" noChangeShapeType="1" noTextEdit="1"/>
+              </p:cNvSpPr>
+              <p:nvPr/>
+            </p:nvSpPr>
+            <p:spPr>
+              <a:xfrm>
+                <a:off x="7940859" y="1138404"/>
+                <a:ext cx="338234" cy="307777"/>
+              </a:xfrm>
+              <a:prstGeom prst="rect">
+                <a:avLst/>
+              </a:prstGeom>
+              <a:blipFill>
+                <a:blip r:embed="rId4"/>
+                <a:stretch>
+                  <a:fillRect l="-1818" r="-1818" b="-6000"/>
+                </a:stretch>
+              </a:blipFill>
+            </p:spPr>
+            <p:txBody>
+              <a:bodyPr/>
+              <a:lstStyle/>
+              <a:p>
+                <a:r>
+                  <a:rPr lang="en-IN">
+                    <a:noFill/>
+                  </a:rPr>
+                  <a:t> </a:t>
+                </a:r>
+              </a:p>
+            </p:txBody>
+          </p:sp>
+        </mc:Fallback>
+      </mc:AlternateContent>
+      <p:cxnSp>
+        <p:nvCxnSpPr>
+          <p:cNvPr id="52" name="Straight Arrow Connector 51">
+            <a:extLst>
+              <a:ext uri="{FF2B5EF4-FFF2-40B4-BE49-F238E27FC236}">
+                <a16:creationId xmlns:a16="http://schemas.microsoft.com/office/drawing/2014/main" id="{8CEA0DB8-4951-AA36-95A0-1E9393E60E9A}"/>
+              </a:ext>
+            </a:extLst>
+          </p:cNvPr>
+          <p:cNvCxnSpPr>
+            <a:cxnSpLocks/>
+            <a:stCxn id="43" idx="1"/>
+            <a:endCxn id="45" idx="4"/>
+          </p:cNvCxnSpPr>
+          <p:nvPr/>
+        </p:nvCxnSpPr>
+        <p:spPr>
+          <a:xfrm flipH="1" flipV="1">
+            <a:off x="3002090" y="2603453"/>
+            <a:ext cx="1021321" cy="3156851"/>
+          </a:xfrm>
+          <a:prstGeom prst="straightConnector1">
+            <a:avLst/>
+          </a:prstGeom>
+          <a:ln w="19050">
+            <a:solidFill>
+              <a:schemeClr val="tx1"/>
+            </a:solidFill>
+            <a:tailEnd type="triangle" w="lg" len="lg"/>
+          </a:ln>
+        </p:spPr>
+        <p:style>
+          <a:lnRef idx="1">
+            <a:schemeClr val="accent1"/>
+          </a:lnRef>
+          <a:fillRef idx="0">
+            <a:schemeClr val="accent1"/>
+          </a:fillRef>
+          <a:effectRef idx="0">
+            <a:schemeClr val="accent1"/>
+          </a:effectRef>
+          <a:fontRef idx="minor">
+            <a:schemeClr val="tx1"/>
+          </a:fontRef>
+        </p:style>
+      </p:cxnSp>
+      <p:cxnSp>
+        <p:nvCxnSpPr>
+          <p:cNvPr id="65" name="Straight Arrow Connector 64">
+            <a:extLst>
+              <a:ext uri="{FF2B5EF4-FFF2-40B4-BE49-F238E27FC236}">
+                <a16:creationId xmlns:a16="http://schemas.microsoft.com/office/drawing/2014/main" id="{E6547002-4623-6CB2-9989-110C2DD4A38E}"/>
+              </a:ext>
+            </a:extLst>
+          </p:cNvPr>
+          <p:cNvCxnSpPr>
+            <a:cxnSpLocks/>
+          </p:cNvCxnSpPr>
+          <p:nvPr/>
+        </p:nvCxnSpPr>
+        <p:spPr>
+          <a:xfrm flipV="1">
+            <a:off x="4674165" y="1807670"/>
+            <a:ext cx="846790" cy="1037924"/>
+          </a:xfrm>
+          <a:prstGeom prst="straightConnector1">
+            <a:avLst/>
+          </a:prstGeom>
+          <a:ln w="28575" cap="rnd">
+            <a:solidFill>
+              <a:srgbClr val="003A00"/>
+            </a:solidFill>
+            <a:tailEnd type="triangle" w="lg" len="lg"/>
+          </a:ln>
+        </p:spPr>
+        <p:style>
+          <a:lnRef idx="1">
+            <a:schemeClr val="accent1"/>
+          </a:lnRef>
+          <a:fillRef idx="0">
+            <a:schemeClr val="accent1"/>
+          </a:fillRef>
+          <a:effectRef idx="0">
+            <a:schemeClr val="accent1"/>
+          </a:effectRef>
+          <a:fontRef idx="minor">
+            <a:schemeClr val="tx1"/>
+          </a:fontRef>
+        </p:style>
+      </p:cxnSp>
+      <p:cxnSp>
+        <p:nvCxnSpPr>
+          <p:cNvPr id="57" name="Straight Arrow Connector 56">
+            <a:extLst>
+              <a:ext uri="{FF2B5EF4-FFF2-40B4-BE49-F238E27FC236}">
+                <a16:creationId xmlns:a16="http://schemas.microsoft.com/office/drawing/2014/main" id="{29C7484F-4FA9-A9EF-0806-B3FB2AF6A777}"/>
+              </a:ext>
+            </a:extLst>
+          </p:cNvPr>
+          <p:cNvCxnSpPr>
+            <a:cxnSpLocks/>
+            <a:stCxn id="43" idx="7"/>
+            <a:endCxn id="49" idx="3"/>
+          </p:cNvCxnSpPr>
+          <p:nvPr/>
+        </p:nvCxnSpPr>
+        <p:spPr>
+          <a:xfrm flipV="1">
+            <a:off x="4076544" y="1356430"/>
+            <a:ext cx="3792586" cy="4403874"/>
+          </a:xfrm>
+          <a:prstGeom prst="straightConnector1">
+            <a:avLst/>
+          </a:prstGeom>
+          <a:ln w="19050">
+            <a:solidFill>
+              <a:schemeClr val="tx1"/>
+            </a:solidFill>
+            <a:tailEnd type="triangle" w="lg" len="lg"/>
+          </a:ln>
+        </p:spPr>
+        <p:style>
+          <a:lnRef idx="1">
+            <a:schemeClr val="accent1"/>
+          </a:lnRef>
+          <a:fillRef idx="0">
+            <a:schemeClr val="accent1"/>
+          </a:fillRef>
+          <a:effectRef idx="0">
+            <a:schemeClr val="accent1"/>
+          </a:effectRef>
+          <a:fontRef idx="minor">
+            <a:schemeClr val="tx1"/>
+          </a:fontRef>
+        </p:style>
+      </p:cxnSp>
+      <p:cxnSp>
+        <p:nvCxnSpPr>
+          <p:cNvPr id="71" name="Straight Arrow Connector 70">
+            <a:extLst>
+              <a:ext uri="{FF2B5EF4-FFF2-40B4-BE49-F238E27FC236}">
+                <a16:creationId xmlns:a16="http://schemas.microsoft.com/office/drawing/2014/main" id="{EDD39794-AF92-D573-91D0-39C1B3A4D7CF}"/>
+              </a:ext>
+            </a:extLst>
+          </p:cNvPr>
+          <p:cNvCxnSpPr>
+            <a:cxnSpLocks/>
+            <a:stCxn id="43" idx="0"/>
+          </p:cNvCxnSpPr>
+          <p:nvPr/>
+        </p:nvCxnSpPr>
+        <p:spPr>
+          <a:xfrm flipV="1">
+            <a:off x="4049978" y="2868542"/>
+            <a:ext cx="624187" cy="2880758"/>
+          </a:xfrm>
+          <a:prstGeom prst="straightConnector1">
+            <a:avLst/>
+          </a:prstGeom>
+          <a:ln w="19050">
+            <a:solidFill>
+              <a:schemeClr val="tx1"/>
+            </a:solidFill>
+            <a:tailEnd type="triangle" w="lg" len="lg"/>
+          </a:ln>
+        </p:spPr>
+        <p:style>
+          <a:lnRef idx="1">
+            <a:schemeClr val="accent1"/>
+          </a:lnRef>
+          <a:fillRef idx="0">
+            <a:schemeClr val="accent1"/>
+          </a:fillRef>
+          <a:effectRef idx="0">
+            <a:schemeClr val="accent1"/>
+          </a:effectRef>
+          <a:fontRef idx="minor">
+            <a:schemeClr val="tx1"/>
+          </a:fontRef>
+        </p:style>
+      </p:cxnSp>
+      <mc:AlternateContent xmlns:mc="http://schemas.openxmlformats.org/markup-compatibility/2006">
+        <mc:Choice xmlns:a14="http://schemas.microsoft.com/office/drawing/2010/main" Requires="a14">
+          <p:sp>
+            <p:nvSpPr>
+              <p:cNvPr id="79" name="TextBox 78">
+                <a:extLst>
+                  <a:ext uri="{FF2B5EF4-FFF2-40B4-BE49-F238E27FC236}">
+                    <a16:creationId xmlns:a16="http://schemas.microsoft.com/office/drawing/2014/main" id="{1398B3E4-0F16-CE6E-C319-A1ED11B8DEA8}"/>
+                  </a:ext>
+                </a:extLst>
+              </p:cNvPr>
+              <p:cNvSpPr txBox="1"/>
+              <p:nvPr/>
+            </p:nvSpPr>
+            <p:spPr>
+              <a:xfrm>
+                <a:off x="3039660" y="3760954"/>
+                <a:ext cx="318677" cy="307777"/>
+              </a:xfrm>
+              <a:prstGeom prst="rect">
+                <a:avLst/>
+              </a:prstGeom>
+              <a:noFill/>
+            </p:spPr>
+            <p:txBody>
+              <a:bodyPr wrap="none" lIns="0" tIns="0" rIns="0" bIns="0" rtlCol="0">
+                <a:spAutoFit/>
+              </a:bodyPr>
+              <a:lstStyle/>
+              <a:p>
+                <a:pPr/>
+                <a14:m>
+                  <m:oMathPara xmlns:m="http://schemas.openxmlformats.org/officeDocument/2006/math">
+                    <m:oMath>
+                      <m:sSub>
+                        <m:sSubPr>
+                          <m:ctrlPr>
+                            <a:rPr lang="en-US" sz="2000" b="1" i="1">
+                              <a:latin typeface="Cambria Math" panose="02040503050406030204" pitchFamily="18" charset="0"/>
+                            </a:rPr>
+                          </m:ctrlPr>
+                        </m:sSubPr>
+                        <m:e>
+                          <m:acc>
+                            <m:accPr>
+                              <m:chr m:val="̅"/>
+                              <m:ctrlPr>
+                                <a:rPr lang="en-US" sz="2000" b="1" i="1">
+                                  <a:latin typeface="Cambria Math" panose="02040503050406030204" pitchFamily="18" charset="0"/>
+                                </a:rPr>
+                              </m:ctrlPr>
+                            </m:accPr>
+                            <m:e>
+                              <m:r>
+                                <a:rPr lang="en-US" sz="2000" b="1" i="1">
+                                  <a:latin typeface="Cambria Math" panose="02040503050406030204" pitchFamily="18" charset="0"/>
+                                </a:rPr>
+                                <m:t>𝒓</m:t>
+                              </m:r>
+                            </m:e>
+                          </m:acc>
+                        </m:e>
+                        <m:sub>
+                          <m:r>
+                            <a:rPr lang="en-US" sz="2000" b="0" i="1" smtClean="0">
+                              <a:latin typeface="Cambria Math" panose="02040503050406030204" pitchFamily="18" charset="0"/>
+                            </a:rPr>
+                            <m:t>𝐴</m:t>
+                          </m:r>
+                        </m:sub>
+                      </m:sSub>
+                    </m:oMath>
+                  </m:oMathPara>
+                </a14:m>
+                <a:endParaRPr lang="en-US" sz="2000" dirty="0"/>
+              </a:p>
+            </p:txBody>
+          </p:sp>
+        </mc:Choice>
+        <mc:Fallback>
+          <p:sp>
+            <p:nvSpPr>
+              <p:cNvPr id="79" name="TextBox 78">
+                <a:extLst>
+                  <a:ext uri="{FF2B5EF4-FFF2-40B4-BE49-F238E27FC236}">
+                    <a16:creationId xmlns:a16="http://schemas.microsoft.com/office/drawing/2014/main" id="{1398B3E4-0F16-CE6E-C319-A1ED11B8DEA8}"/>
+                  </a:ext>
+                </a:extLst>
+              </p:cNvPr>
+              <p:cNvSpPr txBox="1">
+                <a:spLocks noRot="1" noChangeAspect="1" noMove="1" noResize="1" noEditPoints="1" noAdjustHandles="1" noChangeArrowheads="1" noChangeShapeType="1" noTextEdit="1"/>
+              </p:cNvSpPr>
+              <p:nvPr/>
+            </p:nvSpPr>
+            <p:spPr>
+              <a:xfrm>
+                <a:off x="3039660" y="3760954"/>
+                <a:ext cx="318677" cy="307777"/>
+              </a:xfrm>
+              <a:prstGeom prst="rect">
+                <a:avLst/>
+              </a:prstGeom>
+              <a:blipFill>
+                <a:blip r:embed="rId5"/>
+                <a:stretch>
+                  <a:fillRect l="-11538" r="-21154" b="-16000"/>
+                </a:stretch>
+              </a:blipFill>
+            </p:spPr>
+            <p:txBody>
+              <a:bodyPr/>
+              <a:lstStyle/>
+              <a:p>
+                <a:r>
+                  <a:rPr lang="en-IN">
+                    <a:noFill/>
+                  </a:rPr>
+                  <a:t> </a:t>
+                </a:r>
+              </a:p>
+            </p:txBody>
+          </p:sp>
+        </mc:Fallback>
+      </mc:AlternateContent>
+      <mc:AlternateContent xmlns:mc="http://schemas.openxmlformats.org/markup-compatibility/2006">
+        <mc:Choice xmlns:a14="http://schemas.microsoft.com/office/drawing/2010/main" Requires="a14">
+          <p:sp>
+            <p:nvSpPr>
+              <p:cNvPr id="80" name="TextBox 79">
+                <a:extLst>
+                  <a:ext uri="{FF2B5EF4-FFF2-40B4-BE49-F238E27FC236}">
+                    <a16:creationId xmlns:a16="http://schemas.microsoft.com/office/drawing/2014/main" id="{4F48085F-8668-64E0-74D9-B269CAE23105}"/>
+                  </a:ext>
+                </a:extLst>
+              </p:cNvPr>
+              <p:cNvSpPr txBox="1"/>
+              <p:nvPr/>
+            </p:nvSpPr>
+            <p:spPr>
+              <a:xfrm>
+                <a:off x="5818203" y="3760954"/>
+                <a:ext cx="337657" cy="307777"/>
+              </a:xfrm>
+              <a:prstGeom prst="rect">
+                <a:avLst/>
+              </a:prstGeom>
+              <a:noFill/>
+            </p:spPr>
+            <p:txBody>
+              <a:bodyPr wrap="none" lIns="0" tIns="0" rIns="0" bIns="0" rtlCol="0">
+                <a:spAutoFit/>
+              </a:bodyPr>
+              <a:lstStyle/>
+              <a:p>
+                <a:pPr/>
+                <a14:m>
+                  <m:oMathPara xmlns:m="http://schemas.openxmlformats.org/officeDocument/2006/math">
+                    <m:oMath>
+                      <m:sSub>
+                        <m:sSubPr>
+                          <m:ctrlPr>
+                            <a:rPr lang="en-US" sz="2000" b="1" i="1">
+                              <a:latin typeface="Cambria Math" panose="02040503050406030204" pitchFamily="18" charset="0"/>
+                            </a:rPr>
+                          </m:ctrlPr>
+                        </m:sSubPr>
+                        <m:e>
+                          <m:acc>
+                            <m:accPr>
+                              <m:chr m:val="̅"/>
+                              <m:ctrlPr>
+                                <a:rPr lang="en-US" sz="2000" b="1" i="1">
+                                  <a:latin typeface="Cambria Math" panose="02040503050406030204" pitchFamily="18" charset="0"/>
+                                </a:rPr>
+                              </m:ctrlPr>
+                            </m:accPr>
+                            <m:e>
+                              <m:r>
+                                <a:rPr lang="en-US" sz="2000" b="1" i="1">
+                                  <a:latin typeface="Cambria Math" panose="02040503050406030204" pitchFamily="18" charset="0"/>
+                                </a:rPr>
+                                <m:t>𝒓</m:t>
+                              </m:r>
+                            </m:e>
+                          </m:acc>
+                        </m:e>
+                        <m:sub>
+                          <m:r>
+                            <a:rPr lang="en-US" sz="2000" b="0" i="1" smtClean="0">
+                              <a:latin typeface="Cambria Math" panose="02040503050406030204" pitchFamily="18" charset="0"/>
+                            </a:rPr>
+                            <m:t>𝐵</m:t>
+                          </m:r>
+                        </m:sub>
+                      </m:sSub>
+                    </m:oMath>
+                  </m:oMathPara>
+                </a14:m>
+                <a:endParaRPr lang="en-US" sz="2000" dirty="0"/>
+              </a:p>
+            </p:txBody>
+          </p:sp>
+        </mc:Choice>
+        <mc:Fallback>
+          <p:sp>
+            <p:nvSpPr>
+              <p:cNvPr id="80" name="TextBox 79">
+                <a:extLst>
+                  <a:ext uri="{FF2B5EF4-FFF2-40B4-BE49-F238E27FC236}">
+                    <a16:creationId xmlns:a16="http://schemas.microsoft.com/office/drawing/2014/main" id="{4F48085F-8668-64E0-74D9-B269CAE23105}"/>
+                  </a:ext>
+                </a:extLst>
+              </p:cNvPr>
+              <p:cNvSpPr txBox="1">
+                <a:spLocks noRot="1" noChangeAspect="1" noMove="1" noResize="1" noEditPoints="1" noAdjustHandles="1" noChangeArrowheads="1" noChangeShapeType="1" noTextEdit="1"/>
+              </p:cNvSpPr>
+              <p:nvPr/>
+            </p:nvSpPr>
+            <p:spPr>
+              <a:xfrm>
+                <a:off x="5818203" y="3760954"/>
+                <a:ext cx="337657" cy="307777"/>
+              </a:xfrm>
+              <a:prstGeom prst="rect">
+                <a:avLst/>
+              </a:prstGeom>
+              <a:blipFill>
+                <a:blip r:embed="rId6"/>
+                <a:stretch>
+                  <a:fillRect l="-10714" r="-19643" b="-16000"/>
+                </a:stretch>
+              </a:blipFill>
+            </p:spPr>
+            <p:txBody>
+              <a:bodyPr/>
+              <a:lstStyle/>
+              <a:p>
+                <a:r>
+                  <a:rPr lang="en-IN">
+                    <a:noFill/>
+                  </a:rPr>
+                  <a:t> </a:t>
+                </a:r>
+              </a:p>
+            </p:txBody>
+          </p:sp>
+        </mc:Fallback>
+      </mc:AlternateContent>
+      <mc:AlternateContent xmlns:mc="http://schemas.openxmlformats.org/markup-compatibility/2006">
+        <mc:Choice xmlns:a14="http://schemas.microsoft.com/office/drawing/2010/main" Requires="a14">
+          <p:sp>
+            <p:nvSpPr>
+              <p:cNvPr id="81" name="TextBox 80">
+                <a:extLst>
+                  <a:ext uri="{FF2B5EF4-FFF2-40B4-BE49-F238E27FC236}">
+                    <a16:creationId xmlns:a16="http://schemas.microsoft.com/office/drawing/2014/main" id="{878387B3-6E46-8B45-3EDC-C6D351D5B647}"/>
+                  </a:ext>
+                </a:extLst>
+              </p:cNvPr>
+              <p:cNvSpPr txBox="1"/>
+              <p:nvPr/>
+            </p:nvSpPr>
+            <p:spPr>
+              <a:xfrm>
+                <a:off x="4550953" y="3760954"/>
+                <a:ext cx="278345" cy="307777"/>
+              </a:xfrm>
+              <a:prstGeom prst="rect">
+                <a:avLst/>
+              </a:prstGeom>
+              <a:noFill/>
+            </p:spPr>
+            <p:txBody>
+              <a:bodyPr wrap="none" lIns="0" tIns="0" rIns="0" bIns="0" rtlCol="0">
+                <a:spAutoFit/>
+              </a:bodyPr>
+              <a:lstStyle/>
+              <a:p>
+                <a:pPr/>
+                <a14:m>
+                  <m:oMathPara xmlns:m="http://schemas.openxmlformats.org/officeDocument/2006/math">
+                    <m:oMath>
+                      <m:sSub>
+                        <m:sSubPr>
+                          <m:ctrlPr>
+                            <a:rPr lang="en-US" sz="2000" b="1" i="1">
+                              <a:latin typeface="Cambria Math" panose="02040503050406030204" pitchFamily="18" charset="0"/>
+                            </a:rPr>
+                          </m:ctrlPr>
+                        </m:sSubPr>
+                        <m:e>
+                          <m:acc>
+                            <m:accPr>
+                              <m:chr m:val="̅"/>
+                              <m:ctrlPr>
+                                <a:rPr lang="en-US" sz="2000" b="1" i="1">
+                                  <a:latin typeface="Cambria Math" panose="02040503050406030204" pitchFamily="18" charset="0"/>
+                                </a:rPr>
+                              </m:ctrlPr>
+                            </m:accPr>
+                            <m:e>
+                              <m:r>
+                                <a:rPr lang="en-US" sz="2000" b="1" i="1">
+                                  <a:latin typeface="Cambria Math" panose="02040503050406030204" pitchFamily="18" charset="0"/>
+                                </a:rPr>
+                                <m:t>𝒓</m:t>
+                              </m:r>
+                            </m:e>
+                          </m:acc>
+                        </m:e>
+                        <m:sub>
+                          <m:r>
+                            <a:rPr lang="en-US" sz="2000" b="0" i="1" smtClean="0">
+                              <a:latin typeface="Cambria Math" panose="02040503050406030204" pitchFamily="18" charset="0"/>
+                            </a:rPr>
+                            <m:t>𝑖</m:t>
+                          </m:r>
+                        </m:sub>
+                      </m:sSub>
+                    </m:oMath>
+                  </m:oMathPara>
+                </a14:m>
+                <a:endParaRPr lang="en-US" sz="2000" dirty="0"/>
+              </a:p>
+            </p:txBody>
+          </p:sp>
+        </mc:Choice>
+        <mc:Fallback>
+          <p:sp>
+            <p:nvSpPr>
+              <p:cNvPr id="81" name="TextBox 80">
+                <a:extLst>
+                  <a:ext uri="{FF2B5EF4-FFF2-40B4-BE49-F238E27FC236}">
+                    <a16:creationId xmlns:a16="http://schemas.microsoft.com/office/drawing/2014/main" id="{878387B3-6E46-8B45-3EDC-C6D351D5B647}"/>
+                  </a:ext>
+                </a:extLst>
+              </p:cNvPr>
+              <p:cNvSpPr txBox="1">
+                <a:spLocks noRot="1" noChangeAspect="1" noMove="1" noResize="1" noEditPoints="1" noAdjustHandles="1" noChangeArrowheads="1" noChangeShapeType="1" noTextEdit="1"/>
+              </p:cNvSpPr>
+              <p:nvPr/>
+            </p:nvSpPr>
+            <p:spPr>
+              <a:xfrm>
+                <a:off x="4550953" y="3760954"/>
+                <a:ext cx="278345" cy="307777"/>
+              </a:xfrm>
+              <a:prstGeom prst="rect">
+                <a:avLst/>
+              </a:prstGeom>
+              <a:blipFill>
+                <a:blip r:embed="rId7"/>
+                <a:stretch>
+                  <a:fillRect l="-13333" r="-26667" b="-18000"/>
+                </a:stretch>
+              </a:blipFill>
+            </p:spPr>
+            <p:txBody>
+              <a:bodyPr/>
+              <a:lstStyle/>
+              <a:p>
+                <a:r>
+                  <a:rPr lang="en-IN">
+                    <a:noFill/>
+                  </a:rPr>
+                  <a:t> </a:t>
+                </a:r>
+              </a:p>
+            </p:txBody>
+          </p:sp>
+        </mc:Fallback>
+      </mc:AlternateContent>
+      <mc:AlternateContent xmlns:mc="http://schemas.openxmlformats.org/markup-compatibility/2006">
+        <mc:Choice xmlns:a14="http://schemas.microsoft.com/office/drawing/2010/main" Requires="a14">
+          <p:sp>
+            <p:nvSpPr>
+              <p:cNvPr id="85" name="TextBox 84">
+                <a:extLst>
+                  <a:ext uri="{FF2B5EF4-FFF2-40B4-BE49-F238E27FC236}">
+                    <a16:creationId xmlns:a16="http://schemas.microsoft.com/office/drawing/2014/main" id="{5E05A734-2C8E-9B93-7E77-2817BCAF6487}"/>
+                  </a:ext>
+                </a:extLst>
+              </p:cNvPr>
+              <p:cNvSpPr txBox="1"/>
+              <p:nvPr/>
+            </p:nvSpPr>
+            <p:spPr>
+              <a:xfrm>
+                <a:off x="4927929" y="1851397"/>
+                <a:ext cx="303993" cy="307777"/>
+              </a:xfrm>
+              <a:prstGeom prst="rect">
+                <a:avLst/>
+              </a:prstGeom>
+              <a:noFill/>
+            </p:spPr>
+            <p:txBody>
+              <a:bodyPr wrap="none" lIns="0" tIns="0" rIns="0" bIns="0" rtlCol="0">
+                <a:spAutoFit/>
+              </a:bodyPr>
+              <a:lstStyle/>
+              <a:p>
+                <a:pPr/>
+                <a14:m>
+                  <m:oMathPara xmlns:m="http://schemas.openxmlformats.org/officeDocument/2006/math">
+                    <m:oMath>
+                      <m:sSub>
+                        <m:sSubPr>
+                          <m:ctrlPr>
+                            <a:rPr lang="en-US" sz="2000" b="1" i="1">
+                              <a:latin typeface="Cambria Math" panose="02040503050406030204" pitchFamily="18" charset="0"/>
+                            </a:rPr>
+                          </m:ctrlPr>
+                        </m:sSubPr>
+                        <m:e>
+                          <m:acc>
+                            <m:accPr>
+                              <m:chr m:val="̅"/>
+                              <m:ctrlPr>
+                                <a:rPr lang="en-US" sz="2000" b="1" i="1" smtClean="0">
+                                  <a:latin typeface="Cambria Math" panose="02040503050406030204" pitchFamily="18" charset="0"/>
+                                </a:rPr>
+                              </m:ctrlPr>
+                            </m:accPr>
+                            <m:e>
+                              <m:r>
+                                <a:rPr lang="en-US" sz="2000" b="1" i="1" smtClean="0">
+                                  <a:latin typeface="Cambria Math" panose="02040503050406030204" pitchFamily="18" charset="0"/>
+                                </a:rPr>
+                                <m:t>𝑭</m:t>
+                              </m:r>
+                            </m:e>
+                          </m:acc>
+                        </m:e>
+                        <m:sub>
+                          <m:r>
+                            <a:rPr lang="en-US" sz="2000" b="0" i="1" smtClean="0">
+                              <a:latin typeface="Cambria Math" panose="02040503050406030204" pitchFamily="18" charset="0"/>
+                            </a:rPr>
+                            <m:t>𝑖</m:t>
+                          </m:r>
+                        </m:sub>
+                      </m:sSub>
+                    </m:oMath>
+                  </m:oMathPara>
+                </a14:m>
+                <a:endParaRPr lang="en-US" sz="2000" dirty="0"/>
+              </a:p>
+            </p:txBody>
+          </p:sp>
+        </mc:Choice>
+        <mc:Fallback>
+          <p:sp>
+            <p:nvSpPr>
+              <p:cNvPr id="85" name="TextBox 84">
+                <a:extLst>
+                  <a:ext uri="{FF2B5EF4-FFF2-40B4-BE49-F238E27FC236}">
+                    <a16:creationId xmlns:a16="http://schemas.microsoft.com/office/drawing/2014/main" id="{5E05A734-2C8E-9B93-7E77-2817BCAF6487}"/>
+                  </a:ext>
+                </a:extLst>
+              </p:cNvPr>
+              <p:cNvSpPr txBox="1">
+                <a:spLocks noRot="1" noChangeAspect="1" noMove="1" noResize="1" noEditPoints="1" noAdjustHandles="1" noChangeArrowheads="1" noChangeShapeType="1" noTextEdit="1"/>
+              </p:cNvSpPr>
+              <p:nvPr/>
+            </p:nvSpPr>
+            <p:spPr>
+              <a:xfrm>
+                <a:off x="4927929" y="1851397"/>
+                <a:ext cx="303993" cy="307777"/>
+              </a:xfrm>
+              <a:prstGeom prst="rect">
+                <a:avLst/>
+              </a:prstGeom>
+              <a:blipFill>
+                <a:blip r:embed="rId8"/>
+                <a:stretch>
+                  <a:fillRect l="-18000" t="-2000" r="-22000" b="-18000"/>
+                </a:stretch>
+              </a:blipFill>
+            </p:spPr>
+            <p:txBody>
+              <a:bodyPr/>
+              <a:lstStyle/>
+              <a:p>
+                <a:r>
+                  <a:rPr lang="en-IN">
+                    <a:noFill/>
+                  </a:rPr>
+                  <a:t> </a:t>
+                </a:r>
+              </a:p>
+            </p:txBody>
+          </p:sp>
+        </mc:Fallback>
+      </mc:AlternateContent>
+      <mc:AlternateContent xmlns:mc="http://schemas.openxmlformats.org/markup-compatibility/2006">
+        <mc:Choice xmlns:a14="http://schemas.microsoft.com/office/drawing/2010/main" Requires="a14">
+          <p:sp>
+            <p:nvSpPr>
+              <p:cNvPr id="87" name="TextBox 86">
+                <a:extLst>
+                  <a:ext uri="{FF2B5EF4-FFF2-40B4-BE49-F238E27FC236}">
+                    <a16:creationId xmlns:a16="http://schemas.microsoft.com/office/drawing/2014/main" id="{3BE5E5F9-F202-A2EB-95AC-BCBC1E07ED21}"/>
+                  </a:ext>
+                </a:extLst>
+              </p:cNvPr>
+              <p:cNvSpPr txBox="1"/>
+              <p:nvPr/>
+            </p:nvSpPr>
+            <p:spPr>
+              <a:xfrm>
+                <a:off x="4848260" y="2771436"/>
+                <a:ext cx="338234" cy="307777"/>
+              </a:xfrm>
+              <a:prstGeom prst="rect">
+                <a:avLst/>
+              </a:prstGeom>
+              <a:noFill/>
+            </p:spPr>
+            <p:txBody>
+              <a:bodyPr wrap="square" lIns="0" tIns="0" rIns="0" bIns="0" rtlCol="0">
+                <a:spAutoFit/>
+              </a:bodyPr>
+              <a:lstStyle/>
+              <a:p>
+                <a:pPr/>
+                <a14:m>
+                  <m:oMathPara xmlns:m="http://schemas.openxmlformats.org/officeDocument/2006/math">
+                    <m:oMath>
+                      <m:r>
+                        <m:rPr>
+                          <m:sty m:val="p"/>
+                        </m:rPr>
+                        <a:rPr lang="en-US" sz="2000" b="0" i="0" smtClean="0">
+                          <a:latin typeface="Cambria Math" panose="02040503050406030204" pitchFamily="18" charset="0"/>
+                          <a:ea typeface="Cambria Math" panose="02040503050406030204" pitchFamily="18" charset="0"/>
+                        </a:rPr>
+                        <m:t>Δ</m:t>
+                      </m:r>
+                      <m:sSub>
+                        <m:sSubPr>
+                          <m:ctrlPr>
+                            <a:rPr lang="en-US" sz="2000" b="1" i="1">
+                              <a:latin typeface="Cambria Math" panose="02040503050406030204" pitchFamily="18" charset="0"/>
+                            </a:rPr>
+                          </m:ctrlPr>
+                        </m:sSubPr>
+                        <m:e>
+                          <m:acc>
+                            <m:accPr>
+                              <m:chr m:val="̅"/>
+                              <m:ctrlPr>
+                                <a:rPr lang="en-US" sz="2000" b="1" i="1">
+                                  <a:latin typeface="Cambria Math" panose="02040503050406030204" pitchFamily="18" charset="0"/>
+                                </a:rPr>
+                              </m:ctrlPr>
+                            </m:accPr>
+                            <m:e>
+                              <m:r>
+                                <a:rPr lang="en-US" sz="2000" b="1" i="1">
+                                  <a:latin typeface="Cambria Math" panose="02040503050406030204" pitchFamily="18" charset="0"/>
+                                </a:rPr>
+                                <m:t>𝒓</m:t>
+                              </m:r>
+                            </m:e>
+                          </m:acc>
+                        </m:e>
+                        <m:sub>
+                          <m:r>
+                            <a:rPr lang="en-US" sz="2000" b="0" i="1" smtClean="0">
+                              <a:latin typeface="Cambria Math" panose="02040503050406030204" pitchFamily="18" charset="0"/>
+                              <a:ea typeface="Cambria Math" panose="02040503050406030204" pitchFamily="18" charset="0"/>
+                            </a:rPr>
+                            <m:t>𝑖</m:t>
+                          </m:r>
+                        </m:sub>
+                      </m:sSub>
+                    </m:oMath>
+                  </m:oMathPara>
+                </a14:m>
+                <a:endParaRPr lang="en-US" sz="2000" dirty="0"/>
+              </a:p>
+            </p:txBody>
+          </p:sp>
+        </mc:Choice>
+        <mc:Fallback>
+          <p:sp>
+            <p:nvSpPr>
+              <p:cNvPr id="87" name="TextBox 86">
+                <a:extLst>
+                  <a:ext uri="{FF2B5EF4-FFF2-40B4-BE49-F238E27FC236}">
+                    <a16:creationId xmlns:a16="http://schemas.microsoft.com/office/drawing/2014/main" id="{3BE5E5F9-F202-A2EB-95AC-BCBC1E07ED21}"/>
+                  </a:ext>
+                </a:extLst>
+              </p:cNvPr>
+              <p:cNvSpPr txBox="1">
+                <a:spLocks noRot="1" noChangeAspect="1" noMove="1" noResize="1" noEditPoints="1" noAdjustHandles="1" noChangeArrowheads="1" noChangeShapeType="1" noTextEdit="1"/>
+              </p:cNvSpPr>
+              <p:nvPr/>
+            </p:nvSpPr>
+            <p:spPr>
+              <a:xfrm>
+                <a:off x="4848260" y="2771436"/>
+                <a:ext cx="338234" cy="307777"/>
+              </a:xfrm>
+              <a:prstGeom prst="rect">
+                <a:avLst/>
+              </a:prstGeom>
+              <a:blipFill>
+                <a:blip r:embed="rId9"/>
+                <a:stretch>
+                  <a:fillRect l="-25000" r="-55357" b="-18000"/>
+                </a:stretch>
+              </a:blipFill>
+            </p:spPr>
+            <p:txBody>
+              <a:bodyPr/>
+              <a:lstStyle/>
+              <a:p>
+                <a:r>
+                  <a:rPr lang="en-IN">
+                    <a:noFill/>
+                  </a:rPr>
+                  <a:t> </a:t>
+                </a:r>
+              </a:p>
+            </p:txBody>
+          </p:sp>
+        </mc:Fallback>
+      </mc:AlternateContent>
+    </p:spTree>
+    <p:extLst>
+      <p:ext uri="{BB962C8B-B14F-4D97-AF65-F5344CB8AC3E}">
+        <p14:creationId xmlns:p14="http://schemas.microsoft.com/office/powerpoint/2010/main" val="3587990339"/>
+      </p:ext>
+    </p:extLst>
+  </p:cSld>
+  <p:clrMapOvr>
+    <a:masterClrMapping/>
+  </p:clrMapOvr>
+</p:sld>
+</file>
+
 <file path=ppt/theme/theme1.xml><?xml version="1.0" encoding="utf-8"?>
 <a:theme xmlns:a="http://schemas.openxmlformats.org/drawingml/2006/main" name="Office Theme">
   <a:themeElements>

--- a/U2-Work-and-Energy/figures/all-figs.pptx
+++ b/U2-Work-and-Energy/figures/all-figs.pptx
@@ -9,6 +9,7 @@
     <p:sldId id="257" r:id="rId3"/>
     <p:sldId id="258" r:id="rId4"/>
     <p:sldId id="259" r:id="rId5"/>
+    <p:sldId id="260" r:id="rId6"/>
   </p:sldIdLst>
   <p:sldSz cx="12192000" cy="6858000"/>
   <p:notesSz cx="6858000" cy="9144000"/>
@@ -244,7 +245,7 @@
           <a:p>
             <a:fld id="{ED22BB23-F442-40A7-A37A-0DE665FB7F05}" type="datetimeFigureOut">
               <a:rPr lang="en-US" smtClean="0"/>
-              <a:t>10/11/2026</a:t>
+              <a:t>10/12/2026</a:t>
             </a:fld>
             <a:endParaRPr lang="en-US"/>
           </a:p>
@@ -412,7 +413,7 @@
           <a:p>
             <a:fld id="{ED22BB23-F442-40A7-A37A-0DE665FB7F05}" type="datetimeFigureOut">
               <a:rPr lang="en-US" smtClean="0"/>
-              <a:t>10/11/2026</a:t>
+              <a:t>10/12/2026</a:t>
             </a:fld>
             <a:endParaRPr lang="en-US"/>
           </a:p>
@@ -590,7 +591,7 @@
           <a:p>
             <a:fld id="{ED22BB23-F442-40A7-A37A-0DE665FB7F05}" type="datetimeFigureOut">
               <a:rPr lang="en-US" smtClean="0"/>
-              <a:t>10/11/2026</a:t>
+              <a:t>10/12/2026</a:t>
             </a:fld>
             <a:endParaRPr lang="en-US"/>
           </a:p>
@@ -758,7 +759,7 @@
           <a:p>
             <a:fld id="{ED22BB23-F442-40A7-A37A-0DE665FB7F05}" type="datetimeFigureOut">
               <a:rPr lang="en-US" smtClean="0"/>
-              <a:t>10/11/2026</a:t>
+              <a:t>10/12/2026</a:t>
             </a:fld>
             <a:endParaRPr lang="en-US"/>
           </a:p>
@@ -1003,7 +1004,7 @@
           <a:p>
             <a:fld id="{ED22BB23-F442-40A7-A37A-0DE665FB7F05}" type="datetimeFigureOut">
               <a:rPr lang="en-US" smtClean="0"/>
-              <a:t>10/11/2026</a:t>
+              <a:t>10/12/2026</a:t>
             </a:fld>
             <a:endParaRPr lang="en-US"/>
           </a:p>
@@ -1232,7 +1233,7 @@
           <a:p>
             <a:fld id="{ED22BB23-F442-40A7-A37A-0DE665FB7F05}" type="datetimeFigureOut">
               <a:rPr lang="en-US" smtClean="0"/>
-              <a:t>10/11/2026</a:t>
+              <a:t>10/12/2026</a:t>
             </a:fld>
             <a:endParaRPr lang="en-US"/>
           </a:p>
@@ -1596,7 +1597,7 @@
           <a:p>
             <a:fld id="{ED22BB23-F442-40A7-A37A-0DE665FB7F05}" type="datetimeFigureOut">
               <a:rPr lang="en-US" smtClean="0"/>
-              <a:t>10/11/2026</a:t>
+              <a:t>10/12/2026</a:t>
             </a:fld>
             <a:endParaRPr lang="en-US"/>
           </a:p>
@@ -1713,7 +1714,7 @@
           <a:p>
             <a:fld id="{ED22BB23-F442-40A7-A37A-0DE665FB7F05}" type="datetimeFigureOut">
               <a:rPr lang="en-US" smtClean="0"/>
-              <a:t>10/11/2026</a:t>
+              <a:t>10/12/2026</a:t>
             </a:fld>
             <a:endParaRPr lang="en-US"/>
           </a:p>
@@ -1808,7 +1809,7 @@
           <a:p>
             <a:fld id="{ED22BB23-F442-40A7-A37A-0DE665FB7F05}" type="datetimeFigureOut">
               <a:rPr lang="en-US" smtClean="0"/>
-              <a:t>10/11/2026</a:t>
+              <a:t>10/12/2026</a:t>
             </a:fld>
             <a:endParaRPr lang="en-US"/>
           </a:p>
@@ -2083,7 +2084,7 @@
           <a:p>
             <a:fld id="{ED22BB23-F442-40A7-A37A-0DE665FB7F05}" type="datetimeFigureOut">
               <a:rPr lang="en-US" smtClean="0"/>
-              <a:t>10/11/2026</a:t>
+              <a:t>10/12/2026</a:t>
             </a:fld>
             <a:endParaRPr lang="en-US"/>
           </a:p>
@@ -2335,7 +2336,7 @@
           <a:p>
             <a:fld id="{ED22BB23-F442-40A7-A37A-0DE665FB7F05}" type="datetimeFigureOut">
               <a:rPr lang="en-US" smtClean="0"/>
-              <a:t>10/11/2026</a:t>
+              <a:t>10/12/2026</a:t>
             </a:fld>
             <a:endParaRPr lang="en-US"/>
           </a:p>
@@ -2546,7 +2547,7 @@
           <a:p>
             <a:fld id="{ED22BB23-F442-40A7-A37A-0DE665FB7F05}" type="datetimeFigureOut">
               <a:rPr lang="en-US" smtClean="0"/>
-              <a:t>10/11/2026</a:t>
+              <a:t>10/12/2026</a:t>
             </a:fld>
             <a:endParaRPr lang="en-US"/>
           </a:p>
@@ -2978,7 +2979,10 @@
                 <a:pPr/>
                 <a14:m>
                   <m:oMathPara xmlns:m="http://schemas.openxmlformats.org/officeDocument/2006/math">
-                    <m:oMath>
+                    <m:oMathParaPr>
+                      <m:jc m:val="centerGroup"/>
+                    </m:oMathParaPr>
+                    <m:oMath xmlns:m="http://schemas.openxmlformats.org/officeDocument/2006/math">
                       <m:acc>
                         <m:accPr>
                           <m:chr m:val="̅"/>
@@ -3488,7 +3492,10 @@
                 <a:pPr/>
                 <a14:m>
                   <m:oMathPara xmlns:m="http://schemas.openxmlformats.org/officeDocument/2006/math">
-                    <m:oMath>
+                    <m:oMathParaPr>
+                      <m:jc m:val="centerGroup"/>
+                    </m:oMathParaPr>
+                    <m:oMath xmlns:m="http://schemas.openxmlformats.org/officeDocument/2006/math">
                       <m:acc>
                         <m:accPr>
                           <m:chr m:val="̅"/>
@@ -3626,7 +3633,10 @@
                 <a:pPr/>
                 <a14:m>
                   <m:oMathPara xmlns:m="http://schemas.openxmlformats.org/officeDocument/2006/math">
-                    <m:oMath>
+                    <m:oMathParaPr>
+                      <m:jc m:val="centerGroup"/>
+                    </m:oMathParaPr>
+                    <m:oMath xmlns:m="http://schemas.openxmlformats.org/officeDocument/2006/math">
                       <m:r>
                         <m:rPr>
                           <m:sty m:val="p"/>
@@ -3740,7 +3750,10 @@
                 <a:pPr/>
                 <a14:m>
                   <m:oMathPara xmlns:m="http://schemas.openxmlformats.org/officeDocument/2006/math">
-                    <m:oMath>
+                    <m:oMathParaPr>
+                      <m:jc m:val="centerGroup"/>
+                    </m:oMathParaPr>
+                    <m:oMath xmlns:m="http://schemas.openxmlformats.org/officeDocument/2006/math">
                       <m:acc>
                         <m:accPr>
                           <m:chr m:val="̅"/>
@@ -3949,7 +3962,10 @@
                 <a:pPr/>
                 <a14:m>
                   <m:oMathPara xmlns:m="http://schemas.openxmlformats.org/officeDocument/2006/math">
-                    <m:oMath>
+                    <m:oMathParaPr>
+                      <m:jc m:val="centerGroup"/>
+                    </m:oMathParaPr>
+                    <m:oMath xmlns:m="http://schemas.openxmlformats.org/officeDocument/2006/math">
                       <m:r>
                         <a:rPr lang="en-US" sz="2000" b="0" i="1" smtClean="0">
                           <a:latin typeface="Cambria Math" panose="02040503050406030204" pitchFamily="18" charset="0"/>
@@ -4043,7 +4059,10 @@
                 <a:pPr/>
                 <a14:m>
                   <m:oMathPara xmlns:m="http://schemas.openxmlformats.org/officeDocument/2006/math">
-                    <m:oMath>
+                    <m:oMathParaPr>
+                      <m:jc m:val="centerGroup"/>
+                    </m:oMathParaPr>
+                    <m:oMath xmlns:m="http://schemas.openxmlformats.org/officeDocument/2006/math">
                       <m:r>
                         <a:rPr lang="en-US" sz="2000" b="0" i="1" smtClean="0">
                           <a:latin typeface="Cambria Math" panose="02040503050406030204" pitchFamily="18" charset="0"/>
@@ -4137,7 +4156,10 @@
                 <a:pPr/>
                 <a14:m>
                   <m:oMathPara xmlns:m="http://schemas.openxmlformats.org/officeDocument/2006/math">
-                    <m:oMath>
+                    <m:oMathParaPr>
+                      <m:jc m:val="centerGroup"/>
+                    </m:oMathParaPr>
+                    <m:oMath xmlns:m="http://schemas.openxmlformats.org/officeDocument/2006/math">
                       <m:r>
                         <a:rPr lang="en-US" sz="2000" b="0" i="1" smtClean="0">
                           <a:latin typeface="Cambria Math" panose="02040503050406030204" pitchFamily="18" charset="0"/>
@@ -4283,7 +4305,10 @@
                 <a:pPr/>
                 <a14:m>
                   <m:oMathPara xmlns:m="http://schemas.openxmlformats.org/officeDocument/2006/math">
-                    <m:oMath>
+                    <m:oMathParaPr>
+                      <m:jc m:val="centerGroup"/>
+                    </m:oMathParaPr>
+                    <m:oMath xmlns:m="http://schemas.openxmlformats.org/officeDocument/2006/math">
                       <m:r>
                         <a:rPr lang="en-US" sz="2000" b="0" i="1" smtClean="0">
                           <a:latin typeface="Cambria Math" panose="02040503050406030204" pitchFamily="18" charset="0"/>
@@ -4377,7 +4402,10 @@
                 <a:pPr/>
                 <a14:m>
                   <m:oMathPara xmlns:m="http://schemas.openxmlformats.org/officeDocument/2006/math">
-                    <m:oMath>
+                    <m:oMathParaPr>
+                      <m:jc m:val="centerGroup"/>
+                    </m:oMathParaPr>
+                    <m:oMath xmlns:m="http://schemas.openxmlformats.org/officeDocument/2006/math">
                       <m:r>
                         <a:rPr lang="en-US" sz="2000" b="0" i="1" smtClean="0">
                           <a:latin typeface="Cambria Math" panose="02040503050406030204" pitchFamily="18" charset="0"/>
@@ -4607,7 +4635,10 @@
                 <a:pPr/>
                 <a14:m>
                   <m:oMathPara xmlns:m="http://schemas.openxmlformats.org/officeDocument/2006/math">
-                    <m:oMath>
+                    <m:oMathParaPr>
+                      <m:jc m:val="centerGroup"/>
+                    </m:oMathParaPr>
+                    <m:oMath xmlns:m="http://schemas.openxmlformats.org/officeDocument/2006/math">
                       <m:acc>
                         <m:accPr>
                           <m:chr m:val="̅"/>
@@ -5222,7 +5253,10 @@
                 <a:pPr/>
                 <a14:m>
                   <m:oMathPara xmlns:m="http://schemas.openxmlformats.org/officeDocument/2006/math">
-                    <m:oMath>
+                    <m:oMathParaPr>
+                      <m:jc m:val="centerGroup"/>
+                    </m:oMathParaPr>
+                    <m:oMath xmlns:m="http://schemas.openxmlformats.org/officeDocument/2006/math">
                       <m:sSub>
                         <m:sSubPr>
                           <m:ctrlPr>
@@ -5335,7 +5369,10 @@
                 <a:pPr/>
                 <a14:m>
                   <m:oMathPara xmlns:m="http://schemas.openxmlformats.org/officeDocument/2006/math">
-                    <m:oMath>
+                    <m:oMathParaPr>
+                      <m:jc m:val="centerGroup"/>
+                    </m:oMathParaPr>
+                    <m:oMath xmlns:m="http://schemas.openxmlformats.org/officeDocument/2006/math">
                       <m:acc>
                         <m:accPr>
                           <m:chr m:val="̅"/>
@@ -5473,7 +5510,10 @@
                 <a:pPr/>
                 <a14:m>
                   <m:oMathPara xmlns:m="http://schemas.openxmlformats.org/officeDocument/2006/math">
-                    <m:oMath>
+                    <m:oMathParaPr>
+                      <m:jc m:val="centerGroup"/>
+                    </m:oMathParaPr>
+                    <m:oMath xmlns:m="http://schemas.openxmlformats.org/officeDocument/2006/math">
                       <m:r>
                         <m:rPr>
                           <m:sty m:val="p"/>
@@ -5587,7 +5627,10 @@
                 <a:pPr/>
                 <a14:m>
                   <m:oMathPara xmlns:m="http://schemas.openxmlformats.org/officeDocument/2006/math">
-                    <m:oMath>
+                    <m:oMathParaPr>
+                      <m:jc m:val="centerGroup"/>
+                    </m:oMathParaPr>
+                    <m:oMath xmlns:m="http://schemas.openxmlformats.org/officeDocument/2006/math">
                       <m:acc>
                         <m:accPr>
                           <m:chr m:val="̅"/>
@@ -5692,7 +5735,10 @@
                 <a:pPr/>
                 <a14:m>
                   <m:oMathPara xmlns:m="http://schemas.openxmlformats.org/officeDocument/2006/math">
-                    <m:oMath>
+                    <m:oMathParaPr>
+                      <m:jc m:val="centerGroup"/>
+                    </m:oMathParaPr>
+                    <m:oMath xmlns:m="http://schemas.openxmlformats.org/officeDocument/2006/math">
                       <m:r>
                         <a:rPr lang="en-US" sz="2000" b="0" i="1" smtClean="0">
                           <a:latin typeface="Cambria Math" panose="02040503050406030204" pitchFamily="18" charset="0"/>
@@ -5890,7 +5936,10 @@
                 <a:pPr/>
                 <a14:m>
                   <m:oMathPara xmlns:m="http://schemas.openxmlformats.org/officeDocument/2006/math">
-                    <m:oMath>
+                    <m:oMathParaPr>
+                      <m:jc m:val="centerGroup"/>
+                    </m:oMathParaPr>
+                    <m:oMath xmlns:m="http://schemas.openxmlformats.org/officeDocument/2006/math">
                       <m:r>
                         <a:rPr lang="en-US" sz="2000" b="0" i="1" smtClean="0">
                           <a:latin typeface="Cambria Math" panose="02040503050406030204" pitchFamily="18" charset="0"/>
@@ -5984,7 +6033,10 @@
                 <a:pPr/>
                 <a14:m>
                   <m:oMathPara xmlns:m="http://schemas.openxmlformats.org/officeDocument/2006/math">
-                    <m:oMath>
+                    <m:oMathParaPr>
+                      <m:jc m:val="centerGroup"/>
+                    </m:oMathParaPr>
+                    <m:oMath xmlns:m="http://schemas.openxmlformats.org/officeDocument/2006/math">
                       <m:r>
                         <a:rPr lang="en-US" sz="2000" b="0" i="1" smtClean="0">
                           <a:latin typeface="Cambria Math" panose="02040503050406030204" pitchFamily="18" charset="0"/>
@@ -6078,7 +6130,10 @@
                 <a:pPr/>
                 <a14:m>
                   <m:oMathPara xmlns:m="http://schemas.openxmlformats.org/officeDocument/2006/math">
-                    <m:oMath>
+                    <m:oMathParaPr>
+                      <m:jc m:val="centerGroup"/>
+                    </m:oMathParaPr>
+                    <m:oMath xmlns:m="http://schemas.openxmlformats.org/officeDocument/2006/math">
                       <m:r>
                         <a:rPr lang="en-US" sz="2000" b="0" i="1" smtClean="0">
                           <a:latin typeface="Cambria Math" panose="02040503050406030204" pitchFamily="18" charset="0"/>
@@ -6224,7 +6279,10 @@
                 <a:pPr/>
                 <a14:m>
                   <m:oMathPara xmlns:m="http://schemas.openxmlformats.org/officeDocument/2006/math">
-                    <m:oMath>
+                    <m:oMathParaPr>
+                      <m:jc m:val="centerGroup"/>
+                    </m:oMathParaPr>
+                    <m:oMath xmlns:m="http://schemas.openxmlformats.org/officeDocument/2006/math">
                       <m:r>
                         <a:rPr lang="en-US" sz="2000" b="0" i="1" smtClean="0">
                           <a:latin typeface="Cambria Math" panose="02040503050406030204" pitchFamily="18" charset="0"/>
@@ -6318,7 +6376,10 @@
                 <a:pPr/>
                 <a14:m>
                   <m:oMathPara xmlns:m="http://schemas.openxmlformats.org/officeDocument/2006/math">
-                    <m:oMath>
+                    <m:oMathParaPr>
+                      <m:jc m:val="centerGroup"/>
+                    </m:oMathParaPr>
+                    <m:oMath xmlns:m="http://schemas.openxmlformats.org/officeDocument/2006/math">
                       <m:r>
                         <a:rPr lang="en-US" sz="2000" b="0" i="1" smtClean="0">
                           <a:latin typeface="Cambria Math" panose="02040503050406030204" pitchFamily="18" charset="0"/>
@@ -6715,8 +6776,8 @@
           </a:p>
         </p:txBody>
       </p:sp>
-      <mc:AlternateContent xmlns:mc="http://schemas.openxmlformats.org/markup-compatibility/2006">
-        <mc:Choice xmlns:a14="http://schemas.microsoft.com/office/drawing/2010/main" Requires="a14">
+      <mc:AlternateContent xmlns:mc="http://schemas.openxmlformats.org/markup-compatibility/2006" xmlns:a14="http://schemas.microsoft.com/office/drawing/2010/main">
+        <mc:Choice Requires="a14">
           <p:sp>
             <p:nvSpPr>
               <p:cNvPr id="14" name="TextBox 13">
@@ -6748,7 +6809,10 @@
                 <a:pPr/>
                 <a14:m>
                   <m:oMathPara xmlns:m="http://schemas.openxmlformats.org/officeDocument/2006/math">
-                    <m:oMath>
+                    <m:oMathParaPr>
+                      <m:jc m:val="centerGroup"/>
+                    </m:oMathParaPr>
+                    <m:oMath xmlns:m="http://schemas.openxmlformats.org/officeDocument/2006/math">
                       <m:r>
                         <a:rPr lang="en-US" sz="2000" b="0" i="1" smtClean="0">
                           <a:latin typeface="Cambria Math" panose="02040503050406030204" pitchFamily="18" charset="0"/>
@@ -6764,7 +6828,7 @@
             </p:txBody>
           </p:sp>
         </mc:Choice>
-        <mc:Fallback>
+        <mc:Fallback xmlns="">
           <p:sp>
             <p:nvSpPr>
               <p:cNvPr id="14" name="TextBox 13">
@@ -6809,8 +6873,8 @@
           </p:sp>
         </mc:Fallback>
       </mc:AlternateContent>
-      <mc:AlternateContent xmlns:mc="http://schemas.openxmlformats.org/markup-compatibility/2006">
-        <mc:Choice xmlns:a14="http://schemas.microsoft.com/office/drawing/2010/main" Requires="a14">
+      <mc:AlternateContent xmlns:mc="http://schemas.openxmlformats.org/markup-compatibility/2006" xmlns:a14="http://schemas.microsoft.com/office/drawing/2010/main">
+        <mc:Choice Requires="a14">
           <p:sp>
             <p:nvSpPr>
               <p:cNvPr id="16" name="TextBox 15">
@@ -6842,7 +6906,10 @@
                 <a:pPr/>
                 <a14:m>
                   <m:oMathPara xmlns:m="http://schemas.openxmlformats.org/officeDocument/2006/math">
-                    <m:oMath>
+                    <m:oMathParaPr>
+                      <m:jc m:val="centerGroup"/>
+                    </m:oMathParaPr>
+                    <m:oMath xmlns:m="http://schemas.openxmlformats.org/officeDocument/2006/math">
                       <m:r>
                         <m:rPr>
                           <m:sty m:val="p"/>
@@ -6879,7 +6946,7 @@
             </p:txBody>
           </p:sp>
         </mc:Choice>
-        <mc:Fallback>
+        <mc:Fallback xmlns="">
           <p:sp>
             <p:nvSpPr>
               <p:cNvPr id="16" name="TextBox 15">
@@ -6924,8 +6991,8 @@
           </p:sp>
         </mc:Fallback>
       </mc:AlternateContent>
-      <mc:AlternateContent xmlns:mc="http://schemas.openxmlformats.org/markup-compatibility/2006">
-        <mc:Choice xmlns:a14="http://schemas.microsoft.com/office/drawing/2010/main" Requires="a14">
+      <mc:AlternateContent xmlns:mc="http://schemas.openxmlformats.org/markup-compatibility/2006" xmlns:a14="http://schemas.microsoft.com/office/drawing/2010/main">
+        <mc:Choice Requires="a14">
           <p:sp>
             <p:nvSpPr>
               <p:cNvPr id="18" name="TextBox 17">
@@ -6957,7 +7024,10 @@
                 <a:pPr/>
                 <a14:m>
                   <m:oMathPara xmlns:m="http://schemas.openxmlformats.org/officeDocument/2006/math">
-                    <m:oMath>
+                    <m:oMathParaPr>
+                      <m:jc m:val="centerGroup"/>
+                    </m:oMathParaPr>
+                    <m:oMath xmlns:m="http://schemas.openxmlformats.org/officeDocument/2006/math">
                       <m:acc>
                         <m:accPr>
                           <m:chr m:val="̅"/>
@@ -6984,7 +7054,7 @@
             </p:txBody>
           </p:sp>
         </mc:Choice>
-        <mc:Fallback>
+        <mc:Fallback xmlns="">
           <p:sp>
             <p:nvSpPr>
               <p:cNvPr id="18" name="TextBox 17">
@@ -7762,8 +7832,8 @@
           </a:fontRef>
         </p:style>
       </p:cxnSp>
-      <mc:AlternateContent xmlns:mc="http://schemas.openxmlformats.org/markup-compatibility/2006">
-        <mc:Choice xmlns:a14="http://schemas.microsoft.com/office/drawing/2010/main" Requires="a14">
+      <mc:AlternateContent xmlns:mc="http://schemas.openxmlformats.org/markup-compatibility/2006" xmlns:a14="http://schemas.microsoft.com/office/drawing/2010/main">
+        <mc:Choice Requires="a14">
           <p:sp>
             <p:nvSpPr>
               <p:cNvPr id="41" name="TextBox 40">
@@ -7795,7 +7865,10 @@
                 <a:pPr/>
                 <a14:m>
                   <m:oMathPara xmlns:m="http://schemas.openxmlformats.org/officeDocument/2006/math">
-                    <m:oMath>
+                    <m:oMathParaPr>
+                      <m:jc m:val="centerGroup"/>
+                    </m:oMathParaPr>
+                    <m:oMath xmlns:m="http://schemas.openxmlformats.org/officeDocument/2006/math">
                       <m:r>
                         <a:rPr lang="en-US" sz="2000" b="0" i="1" smtClean="0">
                           <a:latin typeface="Cambria Math" panose="02040503050406030204" pitchFamily="18" charset="0"/>
@@ -7811,7 +7884,7 @@
             </p:txBody>
           </p:sp>
         </mc:Choice>
-        <mc:Fallback>
+        <mc:Fallback xmlns="">
           <p:sp>
             <p:nvSpPr>
               <p:cNvPr id="41" name="TextBox 40">
@@ -7960,8 +8033,8 @@
           </a:p>
         </p:txBody>
       </p:sp>
-      <mc:AlternateContent xmlns:mc="http://schemas.openxmlformats.org/markup-compatibility/2006">
-        <mc:Choice xmlns:a14="http://schemas.microsoft.com/office/drawing/2010/main" Requires="a14">
+      <mc:AlternateContent xmlns:mc="http://schemas.openxmlformats.org/markup-compatibility/2006" xmlns:a14="http://schemas.microsoft.com/office/drawing/2010/main">
+        <mc:Choice Requires="a14">
           <p:sp>
             <p:nvSpPr>
               <p:cNvPr id="47" name="TextBox 46">
@@ -7993,7 +8066,10 @@
                 <a:pPr/>
                 <a14:m>
                   <m:oMathPara xmlns:m="http://schemas.openxmlformats.org/officeDocument/2006/math">
-                    <m:oMath>
+                    <m:oMathParaPr>
+                      <m:jc m:val="centerGroup"/>
+                    </m:oMathParaPr>
+                    <m:oMath xmlns:m="http://schemas.openxmlformats.org/officeDocument/2006/math">
                       <m:r>
                         <a:rPr lang="en-US" sz="2000" b="0" i="1" smtClean="0">
                           <a:latin typeface="Cambria Math" panose="02040503050406030204" pitchFamily="18" charset="0"/>
@@ -8009,7 +8085,7 @@
             </p:txBody>
           </p:sp>
         </mc:Choice>
-        <mc:Fallback>
+        <mc:Fallback xmlns="">
           <p:sp>
             <p:nvSpPr>
               <p:cNvPr id="47" name="TextBox 46">
@@ -8106,8 +8182,8 @@
           </a:p>
         </p:txBody>
       </p:sp>
-      <mc:AlternateContent xmlns:mc="http://schemas.openxmlformats.org/markup-compatibility/2006">
-        <mc:Choice xmlns:a14="http://schemas.microsoft.com/office/drawing/2010/main" Requires="a14">
+      <mc:AlternateContent xmlns:mc="http://schemas.openxmlformats.org/markup-compatibility/2006" xmlns:a14="http://schemas.microsoft.com/office/drawing/2010/main">
+        <mc:Choice Requires="a14">
           <p:sp>
             <p:nvSpPr>
               <p:cNvPr id="51" name="TextBox 50">
@@ -8139,7 +8215,10 @@
                 <a:pPr/>
                 <a14:m>
                   <m:oMathPara xmlns:m="http://schemas.openxmlformats.org/officeDocument/2006/math">
-                    <m:oMath>
+                    <m:oMathParaPr>
+                      <m:jc m:val="centerGroup"/>
+                    </m:oMathParaPr>
+                    <m:oMath xmlns:m="http://schemas.openxmlformats.org/officeDocument/2006/math">
                       <m:r>
                         <a:rPr lang="en-US" sz="2000" b="0" i="1" smtClean="0">
                           <a:latin typeface="Cambria Math" panose="02040503050406030204" pitchFamily="18" charset="0"/>
@@ -8155,7 +8234,7 @@
             </p:txBody>
           </p:sp>
         </mc:Choice>
-        <mc:Fallback>
+        <mc:Fallback xmlns="">
           <p:sp>
             <p:nvSpPr>
               <p:cNvPr id="51" name="TextBox 50">
@@ -8381,8 +8460,8 @@
           </a:fontRef>
         </p:style>
       </p:cxnSp>
-      <mc:AlternateContent xmlns:mc="http://schemas.openxmlformats.org/markup-compatibility/2006">
-        <mc:Choice xmlns:a14="http://schemas.microsoft.com/office/drawing/2010/main" Requires="a14">
+      <mc:AlternateContent xmlns:mc="http://schemas.openxmlformats.org/markup-compatibility/2006" xmlns:a14="http://schemas.microsoft.com/office/drawing/2010/main">
+        <mc:Choice Requires="a14">
           <p:sp>
             <p:nvSpPr>
               <p:cNvPr id="79" name="TextBox 78">
@@ -8414,7 +8493,10 @@
                 <a:pPr/>
                 <a14:m>
                   <m:oMathPara xmlns:m="http://schemas.openxmlformats.org/officeDocument/2006/math">
-                    <m:oMath>
+                    <m:oMathParaPr>
+                      <m:jc m:val="centerGroup"/>
+                    </m:oMathParaPr>
+                    <m:oMath xmlns:m="http://schemas.openxmlformats.org/officeDocument/2006/math">
                       <m:sSub>
                         <m:sSubPr>
                           <m:ctrlPr>
@@ -8460,7 +8542,7 @@
             </p:txBody>
           </p:sp>
         </mc:Choice>
-        <mc:Fallback>
+        <mc:Fallback xmlns="">
           <p:sp>
             <p:nvSpPr>
               <p:cNvPr id="79" name="TextBox 78">
@@ -8505,8 +8587,8 @@
           </p:sp>
         </mc:Fallback>
       </mc:AlternateContent>
-      <mc:AlternateContent xmlns:mc="http://schemas.openxmlformats.org/markup-compatibility/2006">
-        <mc:Choice xmlns:a14="http://schemas.microsoft.com/office/drawing/2010/main" Requires="a14">
+      <mc:AlternateContent xmlns:mc="http://schemas.openxmlformats.org/markup-compatibility/2006" xmlns:a14="http://schemas.microsoft.com/office/drawing/2010/main">
+        <mc:Choice Requires="a14">
           <p:sp>
             <p:nvSpPr>
               <p:cNvPr id="80" name="TextBox 79">
@@ -8538,7 +8620,10 @@
                 <a:pPr/>
                 <a14:m>
                   <m:oMathPara xmlns:m="http://schemas.openxmlformats.org/officeDocument/2006/math">
-                    <m:oMath>
+                    <m:oMathParaPr>
+                      <m:jc m:val="centerGroup"/>
+                    </m:oMathParaPr>
+                    <m:oMath xmlns:m="http://schemas.openxmlformats.org/officeDocument/2006/math">
                       <m:sSub>
                         <m:sSubPr>
                           <m:ctrlPr>
@@ -8584,7 +8669,7 @@
             </p:txBody>
           </p:sp>
         </mc:Choice>
-        <mc:Fallback>
+        <mc:Fallback xmlns="">
           <p:sp>
             <p:nvSpPr>
               <p:cNvPr id="80" name="TextBox 79">
@@ -8629,8 +8714,8 @@
           </p:sp>
         </mc:Fallback>
       </mc:AlternateContent>
-      <mc:AlternateContent xmlns:mc="http://schemas.openxmlformats.org/markup-compatibility/2006">
-        <mc:Choice xmlns:a14="http://schemas.microsoft.com/office/drawing/2010/main" Requires="a14">
+      <mc:AlternateContent xmlns:mc="http://schemas.openxmlformats.org/markup-compatibility/2006" xmlns:a14="http://schemas.microsoft.com/office/drawing/2010/main">
+        <mc:Choice Requires="a14">
           <p:sp>
             <p:nvSpPr>
               <p:cNvPr id="81" name="TextBox 80">
@@ -8662,7 +8747,10 @@
                 <a:pPr/>
                 <a14:m>
                   <m:oMathPara xmlns:m="http://schemas.openxmlformats.org/officeDocument/2006/math">
-                    <m:oMath>
+                    <m:oMathParaPr>
+                      <m:jc m:val="centerGroup"/>
+                    </m:oMathParaPr>
+                    <m:oMath xmlns:m="http://schemas.openxmlformats.org/officeDocument/2006/math">
                       <m:sSub>
                         <m:sSubPr>
                           <m:ctrlPr>
@@ -8708,7 +8796,7 @@
             </p:txBody>
           </p:sp>
         </mc:Choice>
-        <mc:Fallback>
+        <mc:Fallback xmlns="">
           <p:sp>
             <p:nvSpPr>
               <p:cNvPr id="81" name="TextBox 80">
@@ -8753,8 +8841,8 @@
           </p:sp>
         </mc:Fallback>
       </mc:AlternateContent>
-      <mc:AlternateContent xmlns:mc="http://schemas.openxmlformats.org/markup-compatibility/2006">
-        <mc:Choice xmlns:a14="http://schemas.microsoft.com/office/drawing/2010/main" Requires="a14">
+      <mc:AlternateContent xmlns:mc="http://schemas.openxmlformats.org/markup-compatibility/2006" xmlns:a14="http://schemas.microsoft.com/office/drawing/2010/main">
+        <mc:Choice Requires="a14">
           <p:sp>
             <p:nvSpPr>
               <p:cNvPr id="85" name="TextBox 84">
@@ -8786,7 +8874,10 @@
                 <a:pPr/>
                 <a14:m>
                   <m:oMathPara xmlns:m="http://schemas.openxmlformats.org/officeDocument/2006/math">
-                    <m:oMath>
+                    <m:oMathParaPr>
+                      <m:jc m:val="centerGroup"/>
+                    </m:oMathParaPr>
+                    <m:oMath xmlns:m="http://schemas.openxmlformats.org/officeDocument/2006/math">
                       <m:sSub>
                         <m:sSubPr>
                           <m:ctrlPr>
@@ -8832,7 +8923,7 @@
             </p:txBody>
           </p:sp>
         </mc:Choice>
-        <mc:Fallback>
+        <mc:Fallback xmlns="">
           <p:sp>
             <p:nvSpPr>
               <p:cNvPr id="85" name="TextBox 84">
@@ -8877,8 +8968,8 @@
           </p:sp>
         </mc:Fallback>
       </mc:AlternateContent>
-      <mc:AlternateContent xmlns:mc="http://schemas.openxmlformats.org/markup-compatibility/2006">
-        <mc:Choice xmlns:a14="http://schemas.microsoft.com/office/drawing/2010/main" Requires="a14">
+      <mc:AlternateContent xmlns:mc="http://schemas.openxmlformats.org/markup-compatibility/2006" xmlns:a14="http://schemas.microsoft.com/office/drawing/2010/main">
+        <mc:Choice Requires="a14">
           <p:sp>
             <p:nvSpPr>
               <p:cNvPr id="87" name="TextBox 86">
@@ -8910,7 +9001,10 @@
                 <a:pPr/>
                 <a14:m>
                   <m:oMathPara xmlns:m="http://schemas.openxmlformats.org/officeDocument/2006/math">
-                    <m:oMath>
+                    <m:oMathParaPr>
+                      <m:jc m:val="centerGroup"/>
+                    </m:oMathParaPr>
+                    <m:oMath xmlns:m="http://schemas.openxmlformats.org/officeDocument/2006/math">
                       <m:r>
                         <m:rPr>
                           <m:sty m:val="p"/>
@@ -8967,7 +9061,7 @@
             </p:txBody>
           </p:sp>
         </mc:Choice>
-        <mc:Fallback>
+        <mc:Fallback xmlns="">
           <p:sp>
             <p:nvSpPr>
               <p:cNvPr id="87" name="TextBox 86">
@@ -9016,6 +9110,1371 @@
     <p:extLst>
       <p:ext uri="{BB962C8B-B14F-4D97-AF65-F5344CB8AC3E}">
         <p14:creationId xmlns:p14="http://schemas.microsoft.com/office/powerpoint/2010/main" val="3587990339"/>
+      </p:ext>
+    </p:extLst>
+  </p:cSld>
+  <p:clrMapOvr>
+    <a:masterClrMapping/>
+  </p:clrMapOvr>
+</p:sld>
+</file>
+
+<file path=ppt/slides/slide5.xml><?xml version="1.0" encoding="utf-8"?>
+<p:sld xmlns:a="http://schemas.openxmlformats.org/drawingml/2006/main" xmlns:r="http://schemas.openxmlformats.org/officeDocument/2006/relationships" xmlns:p="http://schemas.openxmlformats.org/presentationml/2006/main">
+  <p:cSld>
+    <p:spTree>
+      <p:nvGrpSpPr>
+        <p:cNvPr id="1" name=""/>
+        <p:cNvGrpSpPr/>
+        <p:nvPr/>
+      </p:nvGrpSpPr>
+      <p:grpSpPr>
+        <a:xfrm>
+          <a:off x="0" y="0"/>
+          <a:ext cx="0" cy="0"/>
+          <a:chOff x="0" y="0"/>
+          <a:chExt cx="0" cy="0"/>
+        </a:xfrm>
+      </p:grpSpPr>
+      <p:sp>
+        <p:nvSpPr>
+          <p:cNvPr id="2" name="Freeform 1"/>
+          <p:cNvSpPr/>
+          <p:nvPr/>
+        </p:nvSpPr>
+        <p:spPr>
+          <a:xfrm>
+            <a:off x="3082835" y="1767840"/>
+            <a:ext cx="2917372" cy="1767840"/>
+          </a:xfrm>
+          <a:custGeom>
+            <a:avLst/>
+            <a:gdLst>
+              <a:gd name="connsiteX0" fmla="*/ 48590 w 2965962"/>
+              <a:gd name="connsiteY0" fmla="*/ 1767840 h 1767840"/>
+              <a:gd name="connsiteX1" fmla="*/ 396933 w 2965962"/>
+              <a:gd name="connsiteY1" fmla="*/ 1036320 h 1767840"/>
+              <a:gd name="connsiteX2" fmla="*/ 2965962 w 2965962"/>
+              <a:gd name="connsiteY2" fmla="*/ 0 h 1767840"/>
+              <a:gd name="connsiteX0" fmla="*/ 3859 w 2921231"/>
+              <a:gd name="connsiteY0" fmla="*/ 1767840 h 1767840"/>
+              <a:gd name="connsiteX1" fmla="*/ 1292727 w 2921231"/>
+              <a:gd name="connsiteY1" fmla="*/ 644435 h 1767840"/>
+              <a:gd name="connsiteX2" fmla="*/ 2921231 w 2921231"/>
+              <a:gd name="connsiteY2" fmla="*/ 0 h 1767840"/>
+              <a:gd name="connsiteX0" fmla="*/ 7179 w 2924551"/>
+              <a:gd name="connsiteY0" fmla="*/ 1767840 h 1767840"/>
+              <a:gd name="connsiteX1" fmla="*/ 1296047 w 2924551"/>
+              <a:gd name="connsiteY1" fmla="*/ 644435 h 1767840"/>
+              <a:gd name="connsiteX2" fmla="*/ 2924551 w 2924551"/>
+              <a:gd name="connsiteY2" fmla="*/ 0 h 1767840"/>
+              <a:gd name="connsiteX0" fmla="*/ 0 w 2917372"/>
+              <a:gd name="connsiteY0" fmla="*/ 1767840 h 1767840"/>
+              <a:gd name="connsiteX1" fmla="*/ 1288868 w 2917372"/>
+              <a:gd name="connsiteY1" fmla="*/ 644435 h 1767840"/>
+              <a:gd name="connsiteX2" fmla="*/ 2917372 w 2917372"/>
+              <a:gd name="connsiteY2" fmla="*/ 0 h 1767840"/>
+              <a:gd name="connsiteX0" fmla="*/ 0 w 2917372"/>
+              <a:gd name="connsiteY0" fmla="*/ 1767840 h 1767840"/>
+              <a:gd name="connsiteX1" fmla="*/ 1288868 w 2917372"/>
+              <a:gd name="connsiteY1" fmla="*/ 644435 h 1767840"/>
+              <a:gd name="connsiteX2" fmla="*/ 2917372 w 2917372"/>
+              <a:gd name="connsiteY2" fmla="*/ 0 h 1767840"/>
+              <a:gd name="connsiteX0" fmla="*/ 0 w 2917372"/>
+              <a:gd name="connsiteY0" fmla="*/ 1767840 h 1767840"/>
+              <a:gd name="connsiteX1" fmla="*/ 1149531 w 2917372"/>
+              <a:gd name="connsiteY1" fmla="*/ 818606 h 1767840"/>
+              <a:gd name="connsiteX2" fmla="*/ 2917372 w 2917372"/>
+              <a:gd name="connsiteY2" fmla="*/ 0 h 1767840"/>
+              <a:gd name="connsiteX0" fmla="*/ 0 w 2917372"/>
+              <a:gd name="connsiteY0" fmla="*/ 1767840 h 1767840"/>
+              <a:gd name="connsiteX1" fmla="*/ 1428205 w 2917372"/>
+              <a:gd name="connsiteY1" fmla="*/ 783771 h 1767840"/>
+              <a:gd name="connsiteX2" fmla="*/ 2917372 w 2917372"/>
+              <a:gd name="connsiteY2" fmla="*/ 0 h 1767840"/>
+              <a:gd name="connsiteX0" fmla="*/ 0 w 2917372"/>
+              <a:gd name="connsiteY0" fmla="*/ 1767840 h 1767840"/>
+              <a:gd name="connsiteX1" fmla="*/ 1428205 w 2917372"/>
+              <a:gd name="connsiteY1" fmla="*/ 783771 h 1767840"/>
+              <a:gd name="connsiteX2" fmla="*/ 2917372 w 2917372"/>
+              <a:gd name="connsiteY2" fmla="*/ 0 h 1767840"/>
+              <a:gd name="connsiteX0" fmla="*/ 0 w 2917372"/>
+              <a:gd name="connsiteY0" fmla="*/ 1767840 h 1767840"/>
+              <a:gd name="connsiteX1" fmla="*/ 1541417 w 2917372"/>
+              <a:gd name="connsiteY1" fmla="*/ 783771 h 1767840"/>
+              <a:gd name="connsiteX2" fmla="*/ 2917372 w 2917372"/>
+              <a:gd name="connsiteY2" fmla="*/ 0 h 1767840"/>
+              <a:gd name="connsiteX0" fmla="*/ 0 w 2917372"/>
+              <a:gd name="connsiteY0" fmla="*/ 1767840 h 1767840"/>
+              <a:gd name="connsiteX1" fmla="*/ 1541417 w 2917372"/>
+              <a:gd name="connsiteY1" fmla="*/ 783771 h 1767840"/>
+              <a:gd name="connsiteX2" fmla="*/ 2917372 w 2917372"/>
+              <a:gd name="connsiteY2" fmla="*/ 0 h 1767840"/>
+            </a:gdLst>
+            <a:ahLst/>
+            <a:cxnLst>
+              <a:cxn ang="0">
+                <a:pos x="connsiteX0" y="connsiteY0"/>
+              </a:cxn>
+              <a:cxn ang="0">
+                <a:pos x="connsiteX1" y="connsiteY1"/>
+              </a:cxn>
+              <a:cxn ang="0">
+                <a:pos x="connsiteX2" y="connsiteY2"/>
+              </a:cxn>
+            </a:cxnLst>
+            <a:rect l="l" t="t" r="r" b="b"/>
+            <a:pathLst>
+              <a:path w="2917372" h="1767840">
+                <a:moveTo>
+                  <a:pt x="0" y="1767840"/>
+                </a:moveTo>
+                <a:cubicBezTo>
+                  <a:pt x="157480" y="1218475"/>
+                  <a:pt x="497838" y="991326"/>
+                  <a:pt x="1541417" y="783771"/>
+                </a:cubicBezTo>
+                <a:cubicBezTo>
+                  <a:pt x="2584996" y="576216"/>
+                  <a:pt x="2633617" y="431800"/>
+                  <a:pt x="2917372" y="0"/>
+                </a:cubicBezTo>
+              </a:path>
+            </a:pathLst>
+          </a:custGeom>
+          <a:noFill/>
+          <a:ln w="28575">
+            <a:solidFill>
+              <a:srgbClr val="0070C0"/>
+            </a:solidFill>
+          </a:ln>
+        </p:spPr>
+        <p:style>
+          <a:lnRef idx="2">
+            <a:schemeClr val="accent1">
+              <a:shade val="50000"/>
+            </a:schemeClr>
+          </a:lnRef>
+          <a:fillRef idx="1">
+            <a:schemeClr val="accent1"/>
+          </a:fillRef>
+          <a:effectRef idx="0">
+            <a:schemeClr val="accent1"/>
+          </a:effectRef>
+          <a:fontRef idx="minor">
+            <a:schemeClr val="lt1"/>
+          </a:fontRef>
+        </p:style>
+        <p:txBody>
+          <a:bodyPr rtlCol="0" anchor="ctr"/>
+          <a:lstStyle/>
+          <a:p>
+            <a:pPr algn="ctr"/>
+            <a:endParaRPr lang="en-US"/>
+          </a:p>
+        </p:txBody>
+      </p:sp>
+      <p:sp>
+        <p:nvSpPr>
+          <p:cNvPr id="3" name="Oval 2">
+            <a:extLst>
+              <a:ext uri="{FF2B5EF4-FFF2-40B4-BE49-F238E27FC236}">
+                <a16:creationId xmlns:a16="http://schemas.microsoft.com/office/drawing/2014/main" id="{B45708B0-950F-AD55-A25D-D5011A850FF7}"/>
+              </a:ext>
+            </a:extLst>
+          </p:cNvPr>
+          <p:cNvSpPr/>
+          <p:nvPr/>
+        </p:nvSpPr>
+        <p:spPr>
+          <a:xfrm>
+            <a:off x="3036909" y="3526532"/>
+            <a:ext cx="75141" cy="75141"/>
+          </a:xfrm>
+          <a:prstGeom prst="ellipse">
+            <a:avLst/>
+          </a:prstGeom>
+          <a:solidFill>
+            <a:schemeClr val="tx1"/>
+          </a:solidFill>
+          <a:ln>
+            <a:noFill/>
+          </a:ln>
+        </p:spPr>
+        <p:style>
+          <a:lnRef idx="2">
+            <a:schemeClr val="accent1">
+              <a:shade val="15000"/>
+            </a:schemeClr>
+          </a:lnRef>
+          <a:fillRef idx="1">
+            <a:schemeClr val="accent1"/>
+          </a:fillRef>
+          <a:effectRef idx="0">
+            <a:schemeClr val="accent1"/>
+          </a:effectRef>
+          <a:fontRef idx="minor">
+            <a:schemeClr val="lt1"/>
+          </a:fontRef>
+        </p:style>
+        <p:txBody>
+          <a:bodyPr rtlCol="0" anchor="ctr"/>
+          <a:lstStyle/>
+          <a:p>
+            <a:pPr algn="ctr"/>
+            <a:endParaRPr lang="en-IN"/>
+          </a:p>
+        </p:txBody>
+      </p:sp>
+      <mc:AlternateContent xmlns:mc="http://schemas.openxmlformats.org/markup-compatibility/2006">
+        <mc:Choice xmlns:a14="http://schemas.microsoft.com/office/drawing/2010/main" Requires="a14">
+          <p:sp>
+            <p:nvSpPr>
+              <p:cNvPr id="4" name="TextBox 3">
+                <a:extLst>
+                  <a:ext uri="{FF2B5EF4-FFF2-40B4-BE49-F238E27FC236}">
+                    <a16:creationId xmlns:a16="http://schemas.microsoft.com/office/drawing/2014/main" id="{AC7E7ED7-5FBF-21EC-26F6-3167F8BE93AC}"/>
+                  </a:ext>
+                </a:extLst>
+              </p:cNvPr>
+              <p:cNvSpPr txBox="1"/>
+              <p:nvPr/>
+            </p:nvSpPr>
+            <p:spPr>
+              <a:xfrm>
+                <a:off x="2703230" y="3410213"/>
+                <a:ext cx="338234" cy="307777"/>
+              </a:xfrm>
+              <a:prstGeom prst="rect">
+                <a:avLst/>
+              </a:prstGeom>
+              <a:noFill/>
+            </p:spPr>
+            <p:txBody>
+              <a:bodyPr wrap="square" lIns="0" tIns="0" rIns="0" bIns="0" rtlCol="0">
+                <a:spAutoFit/>
+              </a:bodyPr>
+              <a:lstStyle/>
+              <a:p>
+                <a:pPr/>
+                <a14:m>
+                  <m:oMathPara xmlns:m="http://schemas.openxmlformats.org/officeDocument/2006/math">
+                    <m:oMathParaPr>
+                      <m:jc m:val="centerGroup"/>
+                    </m:oMathParaPr>
+                    <m:oMath xmlns:m="http://schemas.openxmlformats.org/officeDocument/2006/math">
+                      <m:r>
+                        <a:rPr lang="en-US" sz="2000" b="0" i="1" smtClean="0">
+                          <a:latin typeface="Cambria Math" panose="02040503050406030204" pitchFamily="18" charset="0"/>
+                          <a:ea typeface="Cambria Math" panose="02040503050406030204" pitchFamily="18" charset="0"/>
+                        </a:rPr>
+                        <m:t>𝐴</m:t>
+                      </m:r>
+                    </m:oMath>
+                  </m:oMathPara>
+                </a14:m>
+                <a:endParaRPr lang="en-US" sz="2000" i="1" dirty="0"/>
+              </a:p>
+            </p:txBody>
+          </p:sp>
+        </mc:Choice>
+        <mc:Fallback>
+          <p:sp>
+            <p:nvSpPr>
+              <p:cNvPr id="4" name="TextBox 3">
+                <a:extLst>
+                  <a:ext uri="{FF2B5EF4-FFF2-40B4-BE49-F238E27FC236}">
+                    <a16:creationId xmlns:a16="http://schemas.microsoft.com/office/drawing/2014/main" id="{AC7E7ED7-5FBF-21EC-26F6-3167F8BE93AC}"/>
+                  </a:ext>
+                </a:extLst>
+              </p:cNvPr>
+              <p:cNvSpPr txBox="1">
+                <a:spLocks noRot="1" noChangeAspect="1" noMove="1" noResize="1" noEditPoints="1" noAdjustHandles="1" noChangeArrowheads="1" noChangeShapeType="1" noTextEdit="1"/>
+              </p:cNvSpPr>
+              <p:nvPr/>
+            </p:nvSpPr>
+            <p:spPr>
+              <a:xfrm>
+                <a:off x="2703230" y="3410213"/>
+                <a:ext cx="338234" cy="307777"/>
+              </a:xfrm>
+              <a:prstGeom prst="rect">
+                <a:avLst/>
+              </a:prstGeom>
+              <a:blipFill>
+                <a:blip r:embed="rId2"/>
+                <a:stretch>
+                  <a:fillRect b="-5882"/>
+                </a:stretch>
+              </a:blipFill>
+            </p:spPr>
+            <p:txBody>
+              <a:bodyPr/>
+              <a:lstStyle/>
+              <a:p>
+                <a:r>
+                  <a:rPr lang="en-US">
+                    <a:noFill/>
+                  </a:rPr>
+                  <a:t> </a:t>
+                </a:r>
+              </a:p>
+            </p:txBody>
+          </p:sp>
+        </mc:Fallback>
+      </mc:AlternateContent>
+      <p:sp>
+        <p:nvSpPr>
+          <p:cNvPr id="5" name="Oval 4">
+            <a:extLst>
+              <a:ext uri="{FF2B5EF4-FFF2-40B4-BE49-F238E27FC236}">
+                <a16:creationId xmlns:a16="http://schemas.microsoft.com/office/drawing/2014/main" id="{6F3552B3-EBE8-CAE6-F879-E368FC070B23}"/>
+              </a:ext>
+            </a:extLst>
+          </p:cNvPr>
+          <p:cNvSpPr/>
+          <p:nvPr/>
+        </p:nvSpPr>
+        <p:spPr>
+          <a:xfrm>
+            <a:off x="5979796" y="1703773"/>
+            <a:ext cx="75141" cy="75141"/>
+          </a:xfrm>
+          <a:prstGeom prst="ellipse">
+            <a:avLst/>
+          </a:prstGeom>
+          <a:solidFill>
+            <a:schemeClr val="tx1"/>
+          </a:solidFill>
+          <a:ln>
+            <a:noFill/>
+          </a:ln>
+        </p:spPr>
+        <p:style>
+          <a:lnRef idx="2">
+            <a:schemeClr val="accent1">
+              <a:shade val="15000"/>
+            </a:schemeClr>
+          </a:lnRef>
+          <a:fillRef idx="1">
+            <a:schemeClr val="accent1"/>
+          </a:fillRef>
+          <a:effectRef idx="0">
+            <a:schemeClr val="accent1"/>
+          </a:effectRef>
+          <a:fontRef idx="minor">
+            <a:schemeClr val="lt1"/>
+          </a:fontRef>
+        </p:style>
+        <p:txBody>
+          <a:bodyPr rtlCol="0" anchor="ctr"/>
+          <a:lstStyle/>
+          <a:p>
+            <a:pPr algn="ctr"/>
+            <a:endParaRPr lang="en-IN"/>
+          </a:p>
+        </p:txBody>
+      </p:sp>
+      <mc:AlternateContent xmlns:mc="http://schemas.openxmlformats.org/markup-compatibility/2006">
+        <mc:Choice xmlns:a14="http://schemas.microsoft.com/office/drawing/2010/main" Requires="a14">
+          <p:sp>
+            <p:nvSpPr>
+              <p:cNvPr id="6" name="TextBox 5">
+                <a:extLst>
+                  <a:ext uri="{FF2B5EF4-FFF2-40B4-BE49-F238E27FC236}">
+                    <a16:creationId xmlns:a16="http://schemas.microsoft.com/office/drawing/2014/main" id="{05C772DF-C2C1-6345-DD40-46B406657C9E}"/>
+                  </a:ext>
+                </a:extLst>
+              </p:cNvPr>
+              <p:cNvSpPr txBox="1"/>
+              <p:nvPr/>
+            </p:nvSpPr>
+            <p:spPr>
+              <a:xfrm>
+                <a:off x="6062529" y="1549884"/>
+                <a:ext cx="338234" cy="307777"/>
+              </a:xfrm>
+              <a:prstGeom prst="rect">
+                <a:avLst/>
+              </a:prstGeom>
+              <a:noFill/>
+            </p:spPr>
+            <p:txBody>
+              <a:bodyPr wrap="square" lIns="0" tIns="0" rIns="0" bIns="0" rtlCol="0">
+                <a:spAutoFit/>
+              </a:bodyPr>
+              <a:lstStyle/>
+              <a:p>
+                <a:pPr/>
+                <a14:m>
+                  <m:oMathPara xmlns:m="http://schemas.openxmlformats.org/officeDocument/2006/math">
+                    <m:oMathParaPr>
+                      <m:jc m:val="centerGroup"/>
+                    </m:oMathParaPr>
+                    <m:oMath xmlns:m="http://schemas.openxmlformats.org/officeDocument/2006/math">
+                      <m:r>
+                        <a:rPr lang="en-US" sz="2000" b="0" i="1" smtClean="0">
+                          <a:latin typeface="Cambria Math" panose="02040503050406030204" pitchFamily="18" charset="0"/>
+                          <a:ea typeface="Cambria Math" panose="02040503050406030204" pitchFamily="18" charset="0"/>
+                        </a:rPr>
+                        <m:t>𝐵</m:t>
+                      </m:r>
+                    </m:oMath>
+                  </m:oMathPara>
+                </a14:m>
+                <a:endParaRPr lang="en-US" sz="2000" i="1" dirty="0"/>
+              </a:p>
+            </p:txBody>
+          </p:sp>
+        </mc:Choice>
+        <mc:Fallback>
+          <p:sp>
+            <p:nvSpPr>
+              <p:cNvPr id="6" name="TextBox 5">
+                <a:extLst>
+                  <a:ext uri="{FF2B5EF4-FFF2-40B4-BE49-F238E27FC236}">
+                    <a16:creationId xmlns:a16="http://schemas.microsoft.com/office/drawing/2014/main" id="{05C772DF-C2C1-6345-DD40-46B406657C9E}"/>
+                  </a:ext>
+                </a:extLst>
+              </p:cNvPr>
+              <p:cNvSpPr txBox="1">
+                <a:spLocks noRot="1" noChangeAspect="1" noMove="1" noResize="1" noEditPoints="1" noAdjustHandles="1" noChangeArrowheads="1" noChangeShapeType="1" noTextEdit="1"/>
+              </p:cNvSpPr>
+              <p:nvPr/>
+            </p:nvSpPr>
+            <p:spPr>
+              <a:xfrm>
+                <a:off x="6062529" y="1549884"/>
+                <a:ext cx="338234" cy="307777"/>
+              </a:xfrm>
+              <a:prstGeom prst="rect">
+                <a:avLst/>
+              </a:prstGeom>
+              <a:blipFill>
+                <a:blip r:embed="rId3"/>
+                <a:stretch>
+                  <a:fillRect l="-1818" r="-1818" b="-5882"/>
+                </a:stretch>
+              </a:blipFill>
+            </p:spPr>
+            <p:txBody>
+              <a:bodyPr/>
+              <a:lstStyle/>
+              <a:p>
+                <a:r>
+                  <a:rPr lang="en-US">
+                    <a:noFill/>
+                  </a:rPr>
+                  <a:t> </a:t>
+                </a:r>
+              </a:p>
+            </p:txBody>
+          </p:sp>
+        </mc:Fallback>
+      </mc:AlternateContent>
+      <mc:AlternateContent xmlns:mc="http://schemas.openxmlformats.org/markup-compatibility/2006">
+        <mc:Choice xmlns:a14="http://schemas.microsoft.com/office/drawing/2010/main" Requires="a14">
+          <p:sp>
+            <p:nvSpPr>
+              <p:cNvPr id="12" name="TextBox 11">
+                <a:extLst>
+                  <a:ext uri="{FF2B5EF4-FFF2-40B4-BE49-F238E27FC236}">
+                    <a16:creationId xmlns:a16="http://schemas.microsoft.com/office/drawing/2014/main" id="{FF43E93F-25E4-C44F-2DD0-8E2C53F3159E}"/>
+                  </a:ext>
+                </a:extLst>
+              </p:cNvPr>
+              <p:cNvSpPr txBox="1"/>
+              <p:nvPr/>
+            </p:nvSpPr>
+            <p:spPr>
+              <a:xfrm>
+                <a:off x="5676846" y="4547650"/>
+                <a:ext cx="338234" cy="307777"/>
+              </a:xfrm>
+              <a:prstGeom prst="rect">
+                <a:avLst/>
+              </a:prstGeom>
+              <a:noFill/>
+            </p:spPr>
+            <p:txBody>
+              <a:bodyPr wrap="square" lIns="0" tIns="0" rIns="0" bIns="0" rtlCol="0">
+                <a:spAutoFit/>
+              </a:bodyPr>
+              <a:lstStyle/>
+              <a:p>
+                <a:pPr/>
+                <a14:m>
+                  <m:oMathPara xmlns:m="http://schemas.openxmlformats.org/officeDocument/2006/math">
+                    <m:oMathParaPr>
+                      <m:jc m:val="centerGroup"/>
+                    </m:oMathParaPr>
+                    <m:oMath xmlns:m="http://schemas.openxmlformats.org/officeDocument/2006/math">
+                      <m:r>
+                        <a:rPr lang="en-US" sz="2000" b="0" i="1" smtClean="0">
+                          <a:latin typeface="Cambria Math" panose="02040503050406030204" pitchFamily="18" charset="0"/>
+                          <a:ea typeface="Cambria Math" panose="02040503050406030204" pitchFamily="18" charset="0"/>
+                        </a:rPr>
+                        <m:t>𝑂</m:t>
+                      </m:r>
+                    </m:oMath>
+                  </m:oMathPara>
+                </a14:m>
+                <a:endParaRPr lang="en-US" sz="2000" i="1" dirty="0"/>
+              </a:p>
+            </p:txBody>
+          </p:sp>
+        </mc:Choice>
+        <mc:Fallback>
+          <p:sp>
+            <p:nvSpPr>
+              <p:cNvPr id="12" name="TextBox 11">
+                <a:extLst>
+                  <a:ext uri="{FF2B5EF4-FFF2-40B4-BE49-F238E27FC236}">
+                    <a16:creationId xmlns:a16="http://schemas.microsoft.com/office/drawing/2014/main" id="{FF43E93F-25E4-C44F-2DD0-8E2C53F3159E}"/>
+                  </a:ext>
+                </a:extLst>
+              </p:cNvPr>
+              <p:cNvSpPr txBox="1">
+                <a:spLocks noRot="1" noChangeAspect="1" noMove="1" noResize="1" noEditPoints="1" noAdjustHandles="1" noChangeArrowheads="1" noChangeShapeType="1" noTextEdit="1"/>
+              </p:cNvSpPr>
+              <p:nvPr/>
+            </p:nvSpPr>
+            <p:spPr>
+              <a:xfrm>
+                <a:off x="5676846" y="4547650"/>
+                <a:ext cx="338234" cy="307777"/>
+              </a:xfrm>
+              <a:prstGeom prst="rect">
+                <a:avLst/>
+              </a:prstGeom>
+              <a:blipFill>
+                <a:blip r:embed="rId4"/>
+                <a:stretch>
+                  <a:fillRect l="-1786" b="-8000"/>
+                </a:stretch>
+              </a:blipFill>
+            </p:spPr>
+            <p:txBody>
+              <a:bodyPr/>
+              <a:lstStyle/>
+              <a:p>
+                <a:r>
+                  <a:rPr lang="en-US">
+                    <a:noFill/>
+                  </a:rPr>
+                  <a:t> </a:t>
+                </a:r>
+              </a:p>
+            </p:txBody>
+          </p:sp>
+        </mc:Fallback>
+      </mc:AlternateContent>
+      <p:sp>
+        <p:nvSpPr>
+          <p:cNvPr id="13" name="Oval 12">
+            <a:extLst>
+              <a:ext uri="{FF2B5EF4-FFF2-40B4-BE49-F238E27FC236}">
+                <a16:creationId xmlns:a16="http://schemas.microsoft.com/office/drawing/2014/main" id="{153E5505-99B8-5E01-7164-7A3A99ADFB02}"/>
+              </a:ext>
+            </a:extLst>
+          </p:cNvPr>
+          <p:cNvSpPr/>
+          <p:nvPr/>
+        </p:nvSpPr>
+        <p:spPr>
+          <a:xfrm>
+            <a:off x="5588658" y="4714070"/>
+            <a:ext cx="75141" cy="75141"/>
+          </a:xfrm>
+          <a:prstGeom prst="ellipse">
+            <a:avLst/>
+          </a:prstGeom>
+          <a:solidFill>
+            <a:schemeClr val="tx1"/>
+          </a:solidFill>
+          <a:ln>
+            <a:noFill/>
+          </a:ln>
+        </p:spPr>
+        <p:style>
+          <a:lnRef idx="2">
+            <a:schemeClr val="accent1">
+              <a:shade val="15000"/>
+            </a:schemeClr>
+          </a:lnRef>
+          <a:fillRef idx="1">
+            <a:schemeClr val="accent1"/>
+          </a:fillRef>
+          <a:effectRef idx="0">
+            <a:schemeClr val="accent1"/>
+          </a:effectRef>
+          <a:fontRef idx="minor">
+            <a:schemeClr val="lt1"/>
+          </a:fontRef>
+        </p:style>
+        <p:txBody>
+          <a:bodyPr rtlCol="0" anchor="ctr"/>
+          <a:lstStyle/>
+          <a:p>
+            <a:pPr algn="ctr"/>
+            <a:endParaRPr lang="en-IN"/>
+          </a:p>
+        </p:txBody>
+      </p:sp>
+      <p:cxnSp>
+        <p:nvCxnSpPr>
+          <p:cNvPr id="14" name="Straight Arrow Connector 13">
+            <a:extLst>
+              <a:ext uri="{FF2B5EF4-FFF2-40B4-BE49-F238E27FC236}">
+                <a16:creationId xmlns:a16="http://schemas.microsoft.com/office/drawing/2014/main" id="{8CEA0DB8-4951-AA36-95A0-1E9393E60E9A}"/>
+              </a:ext>
+            </a:extLst>
+          </p:cNvPr>
+          <p:cNvCxnSpPr>
+            <a:cxnSpLocks/>
+            <a:stCxn id="13" idx="1"/>
+            <a:endCxn id="3" idx="5"/>
+          </p:cNvCxnSpPr>
+          <p:nvPr/>
+        </p:nvCxnSpPr>
+        <p:spPr>
+          <a:xfrm flipH="1" flipV="1">
+            <a:off x="3101046" y="3590669"/>
+            <a:ext cx="2498616" cy="1134405"/>
+          </a:xfrm>
+          <a:prstGeom prst="straightConnector1">
+            <a:avLst/>
+          </a:prstGeom>
+          <a:ln w="19050">
+            <a:solidFill>
+              <a:schemeClr val="tx1"/>
+            </a:solidFill>
+            <a:tailEnd type="triangle" w="lg" len="lg"/>
+          </a:ln>
+        </p:spPr>
+        <p:style>
+          <a:lnRef idx="1">
+            <a:schemeClr val="accent1"/>
+          </a:lnRef>
+          <a:fillRef idx="0">
+            <a:schemeClr val="accent1"/>
+          </a:fillRef>
+          <a:effectRef idx="0">
+            <a:schemeClr val="accent1"/>
+          </a:effectRef>
+          <a:fontRef idx="minor">
+            <a:schemeClr val="tx1"/>
+          </a:fontRef>
+        </p:style>
+      </p:cxnSp>
+      <p:cxnSp>
+        <p:nvCxnSpPr>
+          <p:cNvPr id="15" name="Straight Arrow Connector 14">
+            <a:extLst>
+              <a:ext uri="{FF2B5EF4-FFF2-40B4-BE49-F238E27FC236}">
+                <a16:creationId xmlns:a16="http://schemas.microsoft.com/office/drawing/2014/main" id="{29C7484F-4FA9-A9EF-0806-B3FB2AF6A777}"/>
+              </a:ext>
+            </a:extLst>
+          </p:cNvPr>
+          <p:cNvCxnSpPr>
+            <a:cxnSpLocks/>
+            <a:stCxn id="13" idx="0"/>
+            <a:endCxn id="5" idx="4"/>
+          </p:cNvCxnSpPr>
+          <p:nvPr/>
+        </p:nvCxnSpPr>
+        <p:spPr>
+          <a:xfrm flipV="1">
+            <a:off x="5626229" y="1778914"/>
+            <a:ext cx="391138" cy="2935156"/>
+          </a:xfrm>
+          <a:prstGeom prst="straightConnector1">
+            <a:avLst/>
+          </a:prstGeom>
+          <a:ln w="19050">
+            <a:solidFill>
+              <a:schemeClr val="tx1"/>
+            </a:solidFill>
+            <a:tailEnd type="triangle" w="lg" len="lg"/>
+          </a:ln>
+        </p:spPr>
+        <p:style>
+          <a:lnRef idx="1">
+            <a:schemeClr val="accent1"/>
+          </a:lnRef>
+          <a:fillRef idx="0">
+            <a:schemeClr val="accent1"/>
+          </a:fillRef>
+          <a:effectRef idx="0">
+            <a:schemeClr val="accent1"/>
+          </a:effectRef>
+          <a:fontRef idx="minor">
+            <a:schemeClr val="tx1"/>
+          </a:fontRef>
+        </p:style>
+      </p:cxnSp>
+      <mc:AlternateContent xmlns:mc="http://schemas.openxmlformats.org/markup-compatibility/2006">
+        <mc:Choice xmlns:a14="http://schemas.microsoft.com/office/drawing/2010/main" Requires="a14">
+          <p:sp>
+            <p:nvSpPr>
+              <p:cNvPr id="16" name="TextBox 15">
+                <a:extLst>
+                  <a:ext uri="{FF2B5EF4-FFF2-40B4-BE49-F238E27FC236}">
+                    <a16:creationId xmlns:a16="http://schemas.microsoft.com/office/drawing/2014/main" id="{1398B3E4-0F16-CE6E-C319-A1ED11B8DEA8}"/>
+                  </a:ext>
+                </a:extLst>
+              </p:cNvPr>
+              <p:cNvSpPr txBox="1"/>
+              <p:nvPr/>
+            </p:nvSpPr>
+            <p:spPr>
+              <a:xfrm>
+                <a:off x="4092308" y="4160461"/>
+                <a:ext cx="318677" cy="307777"/>
+              </a:xfrm>
+              <a:prstGeom prst="rect">
+                <a:avLst/>
+              </a:prstGeom>
+              <a:noFill/>
+            </p:spPr>
+            <p:txBody>
+              <a:bodyPr wrap="none" lIns="0" tIns="0" rIns="0" bIns="0" rtlCol="0">
+                <a:spAutoFit/>
+              </a:bodyPr>
+              <a:lstStyle/>
+              <a:p>
+                <a:pPr/>
+                <a14:m>
+                  <m:oMathPara xmlns:m="http://schemas.openxmlformats.org/officeDocument/2006/math">
+                    <m:oMathParaPr>
+                      <m:jc m:val="centerGroup"/>
+                    </m:oMathParaPr>
+                    <m:oMath xmlns:m="http://schemas.openxmlformats.org/officeDocument/2006/math">
+                      <m:sSub>
+                        <m:sSubPr>
+                          <m:ctrlPr>
+                            <a:rPr lang="en-US" sz="2000" b="1" i="1">
+                              <a:latin typeface="Cambria Math" panose="02040503050406030204" pitchFamily="18" charset="0"/>
+                            </a:rPr>
+                          </m:ctrlPr>
+                        </m:sSubPr>
+                        <m:e>
+                          <m:acc>
+                            <m:accPr>
+                              <m:chr m:val="̅"/>
+                              <m:ctrlPr>
+                                <a:rPr lang="en-US" sz="2000" b="1" i="1">
+                                  <a:latin typeface="Cambria Math" panose="02040503050406030204" pitchFamily="18" charset="0"/>
+                                </a:rPr>
+                              </m:ctrlPr>
+                            </m:accPr>
+                            <m:e>
+                              <m:r>
+                                <a:rPr lang="en-US" sz="2000" b="1" i="1">
+                                  <a:latin typeface="Cambria Math" panose="02040503050406030204" pitchFamily="18" charset="0"/>
+                                </a:rPr>
+                                <m:t>𝒓</m:t>
+                              </m:r>
+                            </m:e>
+                          </m:acc>
+                        </m:e>
+                        <m:sub>
+                          <m:r>
+                            <a:rPr lang="en-US" sz="2000" b="0" i="1" smtClean="0">
+                              <a:latin typeface="Cambria Math" panose="02040503050406030204" pitchFamily="18" charset="0"/>
+                            </a:rPr>
+                            <m:t>𝐴</m:t>
+                          </m:r>
+                        </m:sub>
+                      </m:sSub>
+                    </m:oMath>
+                  </m:oMathPara>
+                </a14:m>
+                <a:endParaRPr lang="en-US" sz="2000" dirty="0"/>
+              </a:p>
+            </p:txBody>
+          </p:sp>
+        </mc:Choice>
+        <mc:Fallback>
+          <p:sp>
+            <p:nvSpPr>
+              <p:cNvPr id="16" name="TextBox 15">
+                <a:extLst>
+                  <a:ext uri="{FF2B5EF4-FFF2-40B4-BE49-F238E27FC236}">
+                    <a16:creationId xmlns:a16="http://schemas.microsoft.com/office/drawing/2014/main" id="{1398B3E4-0F16-CE6E-C319-A1ED11B8DEA8}"/>
+                  </a:ext>
+                </a:extLst>
+              </p:cNvPr>
+              <p:cNvSpPr txBox="1">
+                <a:spLocks noRot="1" noChangeAspect="1" noMove="1" noResize="1" noEditPoints="1" noAdjustHandles="1" noChangeArrowheads="1" noChangeShapeType="1" noTextEdit="1"/>
+              </p:cNvSpPr>
+              <p:nvPr/>
+            </p:nvSpPr>
+            <p:spPr>
+              <a:xfrm>
+                <a:off x="4092308" y="4160461"/>
+                <a:ext cx="318677" cy="307777"/>
+              </a:xfrm>
+              <a:prstGeom prst="rect">
+                <a:avLst/>
+              </a:prstGeom>
+              <a:blipFill>
+                <a:blip r:embed="rId5"/>
+                <a:stretch>
+                  <a:fillRect l="-11321" r="-20755" b="-15686"/>
+                </a:stretch>
+              </a:blipFill>
+            </p:spPr>
+            <p:txBody>
+              <a:bodyPr/>
+              <a:lstStyle/>
+              <a:p>
+                <a:r>
+                  <a:rPr lang="en-US">
+                    <a:noFill/>
+                  </a:rPr>
+                  <a:t> </a:t>
+                </a:r>
+              </a:p>
+            </p:txBody>
+          </p:sp>
+        </mc:Fallback>
+      </mc:AlternateContent>
+      <mc:AlternateContent xmlns:mc="http://schemas.openxmlformats.org/markup-compatibility/2006">
+        <mc:Choice xmlns:a14="http://schemas.microsoft.com/office/drawing/2010/main" Requires="a14">
+          <p:sp>
+            <p:nvSpPr>
+              <p:cNvPr id="17" name="TextBox 16">
+                <a:extLst>
+                  <a:ext uri="{FF2B5EF4-FFF2-40B4-BE49-F238E27FC236}">
+                    <a16:creationId xmlns:a16="http://schemas.microsoft.com/office/drawing/2014/main" id="{4F48085F-8668-64E0-74D9-B269CAE23105}"/>
+                  </a:ext>
+                </a:extLst>
+              </p:cNvPr>
+              <p:cNvSpPr txBox="1"/>
+              <p:nvPr/>
+            </p:nvSpPr>
+            <p:spPr>
+              <a:xfrm>
+                <a:off x="5877743" y="3240370"/>
+                <a:ext cx="337657" cy="307777"/>
+              </a:xfrm>
+              <a:prstGeom prst="rect">
+                <a:avLst/>
+              </a:prstGeom>
+              <a:noFill/>
+            </p:spPr>
+            <p:txBody>
+              <a:bodyPr wrap="none" lIns="0" tIns="0" rIns="0" bIns="0" rtlCol="0">
+                <a:spAutoFit/>
+              </a:bodyPr>
+              <a:lstStyle/>
+              <a:p>
+                <a:pPr/>
+                <a14:m>
+                  <m:oMathPara xmlns:m="http://schemas.openxmlformats.org/officeDocument/2006/math">
+                    <m:oMathParaPr>
+                      <m:jc m:val="centerGroup"/>
+                    </m:oMathParaPr>
+                    <m:oMath xmlns:m="http://schemas.openxmlformats.org/officeDocument/2006/math">
+                      <m:sSub>
+                        <m:sSubPr>
+                          <m:ctrlPr>
+                            <a:rPr lang="en-US" sz="2000" b="1" i="1">
+                              <a:latin typeface="Cambria Math" panose="02040503050406030204" pitchFamily="18" charset="0"/>
+                            </a:rPr>
+                          </m:ctrlPr>
+                        </m:sSubPr>
+                        <m:e>
+                          <m:acc>
+                            <m:accPr>
+                              <m:chr m:val="̅"/>
+                              <m:ctrlPr>
+                                <a:rPr lang="en-US" sz="2000" b="1" i="1">
+                                  <a:latin typeface="Cambria Math" panose="02040503050406030204" pitchFamily="18" charset="0"/>
+                                </a:rPr>
+                              </m:ctrlPr>
+                            </m:accPr>
+                            <m:e>
+                              <m:r>
+                                <a:rPr lang="en-US" sz="2000" b="1" i="1">
+                                  <a:latin typeface="Cambria Math" panose="02040503050406030204" pitchFamily="18" charset="0"/>
+                                </a:rPr>
+                                <m:t>𝒓</m:t>
+                              </m:r>
+                            </m:e>
+                          </m:acc>
+                        </m:e>
+                        <m:sub>
+                          <m:r>
+                            <a:rPr lang="en-US" sz="2000" b="0" i="1" smtClean="0">
+                              <a:latin typeface="Cambria Math" panose="02040503050406030204" pitchFamily="18" charset="0"/>
+                            </a:rPr>
+                            <m:t>𝐵</m:t>
+                          </m:r>
+                        </m:sub>
+                      </m:sSub>
+                    </m:oMath>
+                  </m:oMathPara>
+                </a14:m>
+                <a:endParaRPr lang="en-US" sz="2000" dirty="0"/>
+              </a:p>
+            </p:txBody>
+          </p:sp>
+        </mc:Choice>
+        <mc:Fallback>
+          <p:sp>
+            <p:nvSpPr>
+              <p:cNvPr id="17" name="TextBox 16">
+                <a:extLst>
+                  <a:ext uri="{FF2B5EF4-FFF2-40B4-BE49-F238E27FC236}">
+                    <a16:creationId xmlns:a16="http://schemas.microsoft.com/office/drawing/2014/main" id="{4F48085F-8668-64E0-74D9-B269CAE23105}"/>
+                  </a:ext>
+                </a:extLst>
+              </p:cNvPr>
+              <p:cNvSpPr txBox="1">
+                <a:spLocks noRot="1" noChangeAspect="1" noMove="1" noResize="1" noEditPoints="1" noAdjustHandles="1" noChangeArrowheads="1" noChangeShapeType="1" noTextEdit="1"/>
+              </p:cNvSpPr>
+              <p:nvPr/>
+            </p:nvSpPr>
+            <p:spPr>
+              <a:xfrm>
+                <a:off x="5877743" y="3240370"/>
+                <a:ext cx="337657" cy="307777"/>
+              </a:xfrm>
+              <a:prstGeom prst="rect">
+                <a:avLst/>
+              </a:prstGeom>
+              <a:blipFill>
+                <a:blip r:embed="rId6"/>
+                <a:stretch>
+                  <a:fillRect l="-10714" r="-19643" b="-16000"/>
+                </a:stretch>
+              </a:blipFill>
+            </p:spPr>
+            <p:txBody>
+              <a:bodyPr/>
+              <a:lstStyle/>
+              <a:p>
+                <a:r>
+                  <a:rPr lang="en-US">
+                    <a:noFill/>
+                  </a:rPr>
+                  <a:t> </a:t>
+                </a:r>
+              </a:p>
+            </p:txBody>
+          </p:sp>
+        </mc:Fallback>
+      </mc:AlternateContent>
+      <p:cxnSp>
+        <p:nvCxnSpPr>
+          <p:cNvPr id="24" name="Straight Arrow Connector 23">
+            <a:extLst>
+              <a:ext uri="{FF2B5EF4-FFF2-40B4-BE49-F238E27FC236}">
+                <a16:creationId xmlns:a16="http://schemas.microsoft.com/office/drawing/2014/main" id="{3D21645E-5BC5-9530-6C34-39DA26F8F7FC}"/>
+              </a:ext>
+            </a:extLst>
+          </p:cNvPr>
+          <p:cNvCxnSpPr>
+            <a:cxnSpLocks/>
+          </p:cNvCxnSpPr>
+          <p:nvPr/>
+        </p:nvCxnSpPr>
+        <p:spPr>
+          <a:xfrm flipV="1">
+            <a:off x="4471886" y="2482215"/>
+            <a:ext cx="475399" cy="100432"/>
+          </a:xfrm>
+          <a:prstGeom prst="straightConnector1">
+            <a:avLst/>
+          </a:prstGeom>
+          <a:ln w="28575">
+            <a:solidFill>
+              <a:srgbClr val="862626"/>
+            </a:solidFill>
+            <a:tailEnd type="triangle" w="lg" len="med"/>
+          </a:ln>
+        </p:spPr>
+        <p:style>
+          <a:lnRef idx="1">
+            <a:schemeClr val="accent1"/>
+          </a:lnRef>
+          <a:fillRef idx="0">
+            <a:schemeClr val="accent1"/>
+          </a:fillRef>
+          <a:effectRef idx="0">
+            <a:schemeClr val="accent1"/>
+          </a:effectRef>
+          <a:fontRef idx="minor">
+            <a:schemeClr val="tx1"/>
+          </a:fontRef>
+        </p:style>
+      </p:cxnSp>
+      <p:cxnSp>
+        <p:nvCxnSpPr>
+          <p:cNvPr id="25" name="Straight Arrow Connector 24">
+            <a:extLst>
+              <a:ext uri="{FF2B5EF4-FFF2-40B4-BE49-F238E27FC236}">
+                <a16:creationId xmlns:a16="http://schemas.microsoft.com/office/drawing/2014/main" id="{E34B3D9C-C667-3145-01DB-65904CBFE045}"/>
+              </a:ext>
+            </a:extLst>
+          </p:cNvPr>
+          <p:cNvCxnSpPr>
+            <a:cxnSpLocks/>
+          </p:cNvCxnSpPr>
+          <p:nvPr/>
+        </p:nvCxnSpPr>
+        <p:spPr>
+          <a:xfrm flipV="1">
+            <a:off x="4470637" y="1760220"/>
+            <a:ext cx="663338" cy="826922"/>
+          </a:xfrm>
+          <a:prstGeom prst="straightConnector1">
+            <a:avLst/>
+          </a:prstGeom>
+          <a:ln w="28575">
+            <a:solidFill>
+              <a:srgbClr val="003A00"/>
+            </a:solidFill>
+            <a:tailEnd type="triangle" w="lg" len="lg"/>
+          </a:ln>
+        </p:spPr>
+        <p:style>
+          <a:lnRef idx="1">
+            <a:schemeClr val="accent1"/>
+          </a:lnRef>
+          <a:fillRef idx="0">
+            <a:schemeClr val="accent1"/>
+          </a:fillRef>
+          <a:effectRef idx="0">
+            <a:schemeClr val="accent1"/>
+          </a:effectRef>
+          <a:fontRef idx="minor">
+            <a:schemeClr val="tx1"/>
+          </a:fontRef>
+        </p:style>
+      </p:cxnSp>
+      <mc:AlternateContent xmlns:mc="http://schemas.openxmlformats.org/markup-compatibility/2006">
+        <mc:Choice xmlns:a14="http://schemas.microsoft.com/office/drawing/2010/main" Requires="a14">
+          <p:sp>
+            <p:nvSpPr>
+              <p:cNvPr id="26" name="TextBox 25">
+                <a:extLst>
+                  <a:ext uri="{FF2B5EF4-FFF2-40B4-BE49-F238E27FC236}">
+                    <a16:creationId xmlns:a16="http://schemas.microsoft.com/office/drawing/2014/main" id="{7ED9E766-2C13-AF86-25A2-3B049A5AE732}"/>
+                  </a:ext>
+                </a:extLst>
+              </p:cNvPr>
+              <p:cNvSpPr txBox="1"/>
+              <p:nvPr/>
+            </p:nvSpPr>
+            <p:spPr>
+              <a:xfrm>
+                <a:off x="4638716" y="2556930"/>
+                <a:ext cx="338234" cy="307777"/>
+              </a:xfrm>
+              <a:prstGeom prst="rect">
+                <a:avLst/>
+              </a:prstGeom>
+              <a:noFill/>
+            </p:spPr>
+            <p:txBody>
+              <a:bodyPr wrap="square" lIns="0" tIns="0" rIns="0" bIns="0" rtlCol="0">
+                <a:spAutoFit/>
+              </a:bodyPr>
+              <a:lstStyle/>
+              <a:p>
+                <a:pPr/>
+                <a14:m>
+                  <m:oMathPara xmlns:m="http://schemas.openxmlformats.org/officeDocument/2006/math">
+                    <m:oMathParaPr>
+                      <m:jc m:val="centerGroup"/>
+                    </m:oMathParaPr>
+                    <m:oMath xmlns:m="http://schemas.openxmlformats.org/officeDocument/2006/math">
+                      <m:r>
+                        <m:rPr>
+                          <m:sty m:val="p"/>
+                        </m:rPr>
+                        <a:rPr lang="en-US" sz="2000" b="0" i="0" smtClean="0">
+                          <a:latin typeface="Cambria Math" panose="02040503050406030204" pitchFamily="18" charset="0"/>
+                        </a:rPr>
+                        <m:t>d</m:t>
+                      </m:r>
+                      <m:acc>
+                        <m:accPr>
+                          <m:chr m:val="̅"/>
+                          <m:ctrlPr>
+                            <a:rPr lang="en-US" sz="2000" b="1" i="1">
+                              <a:latin typeface="Cambria Math" panose="02040503050406030204" pitchFamily="18" charset="0"/>
+                            </a:rPr>
+                          </m:ctrlPr>
+                        </m:accPr>
+                        <m:e>
+                          <m:r>
+                            <a:rPr lang="en-US" sz="2000" b="1" i="1">
+                              <a:latin typeface="Cambria Math" panose="02040503050406030204" pitchFamily="18" charset="0"/>
+                            </a:rPr>
+                            <m:t>𝒓</m:t>
+                          </m:r>
+                        </m:e>
+                      </m:acc>
+                    </m:oMath>
+                  </m:oMathPara>
+                </a14:m>
+                <a:endParaRPr lang="en-US" sz="2000" dirty="0"/>
+              </a:p>
+            </p:txBody>
+          </p:sp>
+        </mc:Choice>
+        <mc:Fallback>
+          <p:sp>
+            <p:nvSpPr>
+              <p:cNvPr id="26" name="TextBox 25">
+                <a:extLst>
+                  <a:ext uri="{FF2B5EF4-FFF2-40B4-BE49-F238E27FC236}">
+                    <a16:creationId xmlns:a16="http://schemas.microsoft.com/office/drawing/2014/main" id="{7ED9E766-2C13-AF86-25A2-3B049A5AE732}"/>
+                  </a:ext>
+                </a:extLst>
+              </p:cNvPr>
+              <p:cNvSpPr txBox="1">
+                <a:spLocks noRot="1" noChangeAspect="1" noMove="1" noResize="1" noEditPoints="1" noAdjustHandles="1" noChangeArrowheads="1" noChangeShapeType="1" noTextEdit="1"/>
+              </p:cNvSpPr>
+              <p:nvPr/>
+            </p:nvSpPr>
+            <p:spPr>
+              <a:xfrm>
+                <a:off x="4638716" y="2556930"/>
+                <a:ext cx="338234" cy="307777"/>
+              </a:xfrm>
+              <a:prstGeom prst="rect">
+                <a:avLst/>
+              </a:prstGeom>
+              <a:blipFill>
+                <a:blip r:embed="rId7"/>
+                <a:stretch>
+                  <a:fillRect l="-18182" r="-61818" b="-5882"/>
+                </a:stretch>
+              </a:blipFill>
+            </p:spPr>
+            <p:txBody>
+              <a:bodyPr/>
+              <a:lstStyle/>
+              <a:p>
+                <a:r>
+                  <a:rPr lang="en-US">
+                    <a:noFill/>
+                  </a:rPr>
+                  <a:t> </a:t>
+                </a:r>
+              </a:p>
+            </p:txBody>
+          </p:sp>
+        </mc:Fallback>
+      </mc:AlternateContent>
+      <mc:AlternateContent xmlns:mc="http://schemas.openxmlformats.org/markup-compatibility/2006">
+        <mc:Choice xmlns:a14="http://schemas.microsoft.com/office/drawing/2010/main" Requires="a14">
+          <p:sp>
+            <p:nvSpPr>
+              <p:cNvPr id="27" name="TextBox 26">
+                <a:extLst>
+                  <a:ext uri="{FF2B5EF4-FFF2-40B4-BE49-F238E27FC236}">
+                    <a16:creationId xmlns:a16="http://schemas.microsoft.com/office/drawing/2014/main" id="{356BA0BB-F8E7-2DBD-6075-4819A0981B88}"/>
+                  </a:ext>
+                </a:extLst>
+              </p:cNvPr>
+              <p:cNvSpPr txBox="1"/>
+              <p:nvPr/>
+            </p:nvSpPr>
+            <p:spPr>
+              <a:xfrm>
+                <a:off x="4431980" y="1876730"/>
+                <a:ext cx="326436" cy="307777"/>
+              </a:xfrm>
+              <a:prstGeom prst="rect">
+                <a:avLst/>
+              </a:prstGeom>
+              <a:noFill/>
+            </p:spPr>
+            <p:txBody>
+              <a:bodyPr wrap="none" lIns="0" tIns="0" rIns="0" bIns="0" rtlCol="0">
+                <a:spAutoFit/>
+              </a:bodyPr>
+              <a:lstStyle/>
+              <a:p>
+                <a:pPr/>
+                <a14:m>
+                  <m:oMathPara xmlns:m="http://schemas.openxmlformats.org/officeDocument/2006/math">
+                    <m:oMathParaPr>
+                      <m:jc m:val="centerGroup"/>
+                    </m:oMathParaPr>
+                    <m:oMath xmlns:m="http://schemas.openxmlformats.org/officeDocument/2006/math">
+                      <m:sSub>
+                        <m:sSubPr>
+                          <m:ctrlPr>
+                            <a:rPr lang="en-US" sz="2000" b="1" i="1" smtClean="0">
+                              <a:latin typeface="Cambria Math" panose="02040503050406030204" pitchFamily="18" charset="0"/>
+                            </a:rPr>
+                          </m:ctrlPr>
+                        </m:sSubPr>
+                        <m:e>
+                          <m:acc>
+                            <m:accPr>
+                              <m:chr m:val="̅"/>
+                              <m:ctrlPr>
+                                <a:rPr lang="en-US" sz="2000" b="1" i="1">
+                                  <a:latin typeface="Cambria Math" panose="02040503050406030204" pitchFamily="18" charset="0"/>
+                                </a:rPr>
+                              </m:ctrlPr>
+                            </m:accPr>
+                            <m:e>
+                              <m:r>
+                                <a:rPr lang="en-US" sz="2000" b="1" i="1">
+                                  <a:latin typeface="Cambria Math" panose="02040503050406030204" pitchFamily="18" charset="0"/>
+                                </a:rPr>
+                                <m:t>𝑭</m:t>
+                              </m:r>
+                            </m:e>
+                          </m:acc>
+                        </m:e>
+                        <m:sub>
+                          <m:r>
+                            <a:rPr lang="en-US" sz="2000" b="1" i="1" smtClean="0">
+                              <a:latin typeface="Cambria Math" panose="02040503050406030204" pitchFamily="18" charset="0"/>
+                            </a:rPr>
+                            <m:t>𝒄</m:t>
+                          </m:r>
+                        </m:sub>
+                      </m:sSub>
+                    </m:oMath>
+                  </m:oMathPara>
+                </a14:m>
+                <a:endParaRPr lang="en-US" sz="2000" dirty="0"/>
+              </a:p>
+            </p:txBody>
+          </p:sp>
+        </mc:Choice>
+        <mc:Fallback>
+          <p:sp>
+            <p:nvSpPr>
+              <p:cNvPr id="27" name="TextBox 26">
+                <a:extLst>
+                  <a:ext uri="{FF2B5EF4-FFF2-40B4-BE49-F238E27FC236}">
+                    <a16:creationId xmlns:a16="http://schemas.microsoft.com/office/drawing/2014/main" id="{356BA0BB-F8E7-2DBD-6075-4819A0981B88}"/>
+                  </a:ext>
+                </a:extLst>
+              </p:cNvPr>
+              <p:cNvSpPr txBox="1">
+                <a:spLocks noRot="1" noChangeAspect="1" noMove="1" noResize="1" noEditPoints="1" noAdjustHandles="1" noChangeArrowheads="1" noChangeShapeType="1" noTextEdit="1"/>
+              </p:cNvSpPr>
+              <p:nvPr/>
+            </p:nvSpPr>
+            <p:spPr>
+              <a:xfrm>
+                <a:off x="4431980" y="1876730"/>
+                <a:ext cx="326436" cy="307777"/>
+              </a:xfrm>
+              <a:prstGeom prst="rect">
+                <a:avLst/>
+              </a:prstGeom>
+              <a:blipFill>
+                <a:blip r:embed="rId8"/>
+                <a:stretch>
+                  <a:fillRect l="-16667" t="-2000" r="-18519" b="-12000"/>
+                </a:stretch>
+              </a:blipFill>
+            </p:spPr>
+            <p:txBody>
+              <a:bodyPr/>
+              <a:lstStyle/>
+              <a:p>
+                <a:r>
+                  <a:rPr lang="en-US">
+                    <a:noFill/>
+                  </a:rPr>
+                  <a:t> </a:t>
+                </a:r>
+              </a:p>
+            </p:txBody>
+          </p:sp>
+        </mc:Fallback>
+      </mc:AlternateContent>
+      <p:sp>
+        <p:nvSpPr>
+          <p:cNvPr id="23" name="Oval 22">
+            <a:extLst>
+              <a:ext uri="{FF2B5EF4-FFF2-40B4-BE49-F238E27FC236}">
+                <a16:creationId xmlns:a16="http://schemas.microsoft.com/office/drawing/2014/main" id="{05CB6731-BF10-D527-7411-93C6197E6B15}"/>
+              </a:ext>
+            </a:extLst>
+          </p:cNvPr>
+          <p:cNvSpPr/>
+          <p:nvPr/>
+        </p:nvSpPr>
+        <p:spPr>
+          <a:xfrm>
+            <a:off x="4407239" y="2528143"/>
+            <a:ext cx="116681" cy="116681"/>
+          </a:xfrm>
+          <a:prstGeom prst="ellipse">
+            <a:avLst/>
+          </a:prstGeom>
+          <a:gradFill flip="none" rotWithShape="1">
+            <a:gsLst>
+              <a:gs pos="0">
+                <a:schemeClr val="accent1">
+                  <a:lumMod val="20000"/>
+                  <a:lumOff val="80000"/>
+                </a:schemeClr>
+              </a:gs>
+              <a:gs pos="54000">
+                <a:schemeClr val="accent5">
+                  <a:lumMod val="95000"/>
+                  <a:lumOff val="5000"/>
+                </a:schemeClr>
+              </a:gs>
+              <a:gs pos="100000">
+                <a:srgbClr val="080E1A"/>
+              </a:gs>
+            </a:gsLst>
+            <a:path path="circle">
+              <a:fillToRect r="100000" b="100000"/>
+            </a:path>
+            <a:tileRect l="-100000" t="-100000"/>
+          </a:gradFill>
+          <a:ln>
+            <a:noFill/>
+          </a:ln>
+        </p:spPr>
+        <p:style>
+          <a:lnRef idx="2">
+            <a:schemeClr val="accent1">
+              <a:shade val="15000"/>
+            </a:schemeClr>
+          </a:lnRef>
+          <a:fillRef idx="1">
+            <a:schemeClr val="accent1"/>
+          </a:fillRef>
+          <a:effectRef idx="0">
+            <a:schemeClr val="accent1"/>
+          </a:effectRef>
+          <a:fontRef idx="minor">
+            <a:schemeClr val="lt1"/>
+          </a:fontRef>
+        </p:style>
+        <p:txBody>
+          <a:bodyPr rtlCol="0" anchor="ctr"/>
+          <a:lstStyle/>
+          <a:p>
+            <a:pPr algn="ctr"/>
+            <a:endParaRPr lang="en-IN"/>
+          </a:p>
+        </p:txBody>
+      </p:sp>
+    </p:spTree>
+    <p:extLst>
+      <p:ext uri="{BB962C8B-B14F-4D97-AF65-F5344CB8AC3E}">
+        <p14:creationId xmlns:p14="http://schemas.microsoft.com/office/powerpoint/2010/main" val="118549185"/>
       </p:ext>
     </p:extLst>
   </p:cSld>

--- a/U2-Work-and-Energy/figures/all-figs.pptx
+++ b/U2-Work-and-Energy/figures/all-figs.pptx
@@ -10,6 +10,7 @@
     <p:sldId id="258" r:id="rId4"/>
     <p:sldId id="259" r:id="rId5"/>
     <p:sldId id="260" r:id="rId6"/>
+    <p:sldId id="261" r:id="rId7"/>
   </p:sldIdLst>
   <p:sldSz cx="12192000" cy="6858000"/>
   <p:notesSz cx="6858000" cy="9144000"/>
@@ -2979,10 +2980,7 @@
                 <a:pPr/>
                 <a14:m>
                   <m:oMathPara xmlns:m="http://schemas.openxmlformats.org/officeDocument/2006/math">
-                    <m:oMathParaPr>
-                      <m:jc m:val="centerGroup"/>
-                    </m:oMathParaPr>
-                    <m:oMath xmlns:m="http://schemas.openxmlformats.org/officeDocument/2006/math">
+                    <m:oMath>
                       <m:acc>
                         <m:accPr>
                           <m:chr m:val="̅"/>
@@ -3492,10 +3490,7 @@
                 <a:pPr/>
                 <a14:m>
                   <m:oMathPara xmlns:m="http://schemas.openxmlformats.org/officeDocument/2006/math">
-                    <m:oMathParaPr>
-                      <m:jc m:val="centerGroup"/>
-                    </m:oMathParaPr>
-                    <m:oMath xmlns:m="http://schemas.openxmlformats.org/officeDocument/2006/math">
+                    <m:oMath>
                       <m:acc>
                         <m:accPr>
                           <m:chr m:val="̅"/>
@@ -3633,10 +3628,7 @@
                 <a:pPr/>
                 <a14:m>
                   <m:oMathPara xmlns:m="http://schemas.openxmlformats.org/officeDocument/2006/math">
-                    <m:oMathParaPr>
-                      <m:jc m:val="centerGroup"/>
-                    </m:oMathParaPr>
-                    <m:oMath xmlns:m="http://schemas.openxmlformats.org/officeDocument/2006/math">
+                    <m:oMath>
                       <m:r>
                         <m:rPr>
                           <m:sty m:val="p"/>
@@ -3750,10 +3742,7 @@
                 <a:pPr/>
                 <a14:m>
                   <m:oMathPara xmlns:m="http://schemas.openxmlformats.org/officeDocument/2006/math">
-                    <m:oMathParaPr>
-                      <m:jc m:val="centerGroup"/>
-                    </m:oMathParaPr>
-                    <m:oMath xmlns:m="http://schemas.openxmlformats.org/officeDocument/2006/math">
+                    <m:oMath>
                       <m:acc>
                         <m:accPr>
                           <m:chr m:val="̅"/>
@@ -3962,10 +3951,7 @@
                 <a:pPr/>
                 <a14:m>
                   <m:oMathPara xmlns:m="http://schemas.openxmlformats.org/officeDocument/2006/math">
-                    <m:oMathParaPr>
-                      <m:jc m:val="centerGroup"/>
-                    </m:oMathParaPr>
-                    <m:oMath xmlns:m="http://schemas.openxmlformats.org/officeDocument/2006/math">
+                    <m:oMath>
                       <m:r>
                         <a:rPr lang="en-US" sz="2000" b="0" i="1" smtClean="0">
                           <a:latin typeface="Cambria Math" panose="02040503050406030204" pitchFamily="18" charset="0"/>
@@ -4059,10 +4045,7 @@
                 <a:pPr/>
                 <a14:m>
                   <m:oMathPara xmlns:m="http://schemas.openxmlformats.org/officeDocument/2006/math">
-                    <m:oMathParaPr>
-                      <m:jc m:val="centerGroup"/>
-                    </m:oMathParaPr>
-                    <m:oMath xmlns:m="http://schemas.openxmlformats.org/officeDocument/2006/math">
+                    <m:oMath>
                       <m:r>
                         <a:rPr lang="en-US" sz="2000" b="0" i="1" smtClean="0">
                           <a:latin typeface="Cambria Math" panose="02040503050406030204" pitchFamily="18" charset="0"/>
@@ -4156,10 +4139,7 @@
                 <a:pPr/>
                 <a14:m>
                   <m:oMathPara xmlns:m="http://schemas.openxmlformats.org/officeDocument/2006/math">
-                    <m:oMathParaPr>
-                      <m:jc m:val="centerGroup"/>
-                    </m:oMathParaPr>
-                    <m:oMath xmlns:m="http://schemas.openxmlformats.org/officeDocument/2006/math">
+                    <m:oMath>
                       <m:r>
                         <a:rPr lang="en-US" sz="2000" b="0" i="1" smtClean="0">
                           <a:latin typeface="Cambria Math" panose="02040503050406030204" pitchFamily="18" charset="0"/>
@@ -4305,10 +4285,7 @@
                 <a:pPr/>
                 <a14:m>
                   <m:oMathPara xmlns:m="http://schemas.openxmlformats.org/officeDocument/2006/math">
-                    <m:oMathParaPr>
-                      <m:jc m:val="centerGroup"/>
-                    </m:oMathParaPr>
-                    <m:oMath xmlns:m="http://schemas.openxmlformats.org/officeDocument/2006/math">
+                    <m:oMath>
                       <m:r>
                         <a:rPr lang="en-US" sz="2000" b="0" i="1" smtClean="0">
                           <a:latin typeface="Cambria Math" panose="02040503050406030204" pitchFamily="18" charset="0"/>
@@ -4402,10 +4379,7 @@
                 <a:pPr/>
                 <a14:m>
                   <m:oMathPara xmlns:m="http://schemas.openxmlformats.org/officeDocument/2006/math">
-                    <m:oMathParaPr>
-                      <m:jc m:val="centerGroup"/>
-                    </m:oMathParaPr>
-                    <m:oMath xmlns:m="http://schemas.openxmlformats.org/officeDocument/2006/math">
+                    <m:oMath>
                       <m:r>
                         <a:rPr lang="en-US" sz="2000" b="0" i="1" smtClean="0">
                           <a:latin typeface="Cambria Math" panose="02040503050406030204" pitchFamily="18" charset="0"/>
@@ -4635,10 +4609,7 @@
                 <a:pPr/>
                 <a14:m>
                   <m:oMathPara xmlns:m="http://schemas.openxmlformats.org/officeDocument/2006/math">
-                    <m:oMathParaPr>
-                      <m:jc m:val="centerGroup"/>
-                    </m:oMathParaPr>
-                    <m:oMath xmlns:m="http://schemas.openxmlformats.org/officeDocument/2006/math">
+                    <m:oMath>
                       <m:acc>
                         <m:accPr>
                           <m:chr m:val="̅"/>
@@ -5253,10 +5224,7 @@
                 <a:pPr/>
                 <a14:m>
                   <m:oMathPara xmlns:m="http://schemas.openxmlformats.org/officeDocument/2006/math">
-                    <m:oMathParaPr>
-                      <m:jc m:val="centerGroup"/>
-                    </m:oMathParaPr>
-                    <m:oMath xmlns:m="http://schemas.openxmlformats.org/officeDocument/2006/math">
+                    <m:oMath>
                       <m:sSub>
                         <m:sSubPr>
                           <m:ctrlPr>
@@ -5369,10 +5337,7 @@
                 <a:pPr/>
                 <a14:m>
                   <m:oMathPara xmlns:m="http://schemas.openxmlformats.org/officeDocument/2006/math">
-                    <m:oMathParaPr>
-                      <m:jc m:val="centerGroup"/>
-                    </m:oMathParaPr>
-                    <m:oMath xmlns:m="http://schemas.openxmlformats.org/officeDocument/2006/math">
+                    <m:oMath>
                       <m:acc>
                         <m:accPr>
                           <m:chr m:val="̅"/>
@@ -5510,10 +5475,7 @@
                 <a:pPr/>
                 <a14:m>
                   <m:oMathPara xmlns:m="http://schemas.openxmlformats.org/officeDocument/2006/math">
-                    <m:oMathParaPr>
-                      <m:jc m:val="centerGroup"/>
-                    </m:oMathParaPr>
-                    <m:oMath xmlns:m="http://schemas.openxmlformats.org/officeDocument/2006/math">
+                    <m:oMath>
                       <m:r>
                         <m:rPr>
                           <m:sty m:val="p"/>
@@ -5627,10 +5589,7 @@
                 <a:pPr/>
                 <a14:m>
                   <m:oMathPara xmlns:m="http://schemas.openxmlformats.org/officeDocument/2006/math">
-                    <m:oMathParaPr>
-                      <m:jc m:val="centerGroup"/>
-                    </m:oMathParaPr>
-                    <m:oMath xmlns:m="http://schemas.openxmlformats.org/officeDocument/2006/math">
+                    <m:oMath>
                       <m:acc>
                         <m:accPr>
                           <m:chr m:val="̅"/>
@@ -5735,10 +5694,7 @@
                 <a:pPr/>
                 <a14:m>
                   <m:oMathPara xmlns:m="http://schemas.openxmlformats.org/officeDocument/2006/math">
-                    <m:oMathParaPr>
-                      <m:jc m:val="centerGroup"/>
-                    </m:oMathParaPr>
-                    <m:oMath xmlns:m="http://schemas.openxmlformats.org/officeDocument/2006/math">
+                    <m:oMath>
                       <m:r>
                         <a:rPr lang="en-US" sz="2000" b="0" i="1" smtClean="0">
                           <a:latin typeface="Cambria Math" panose="02040503050406030204" pitchFamily="18" charset="0"/>
@@ -5936,10 +5892,7 @@
                 <a:pPr/>
                 <a14:m>
                   <m:oMathPara xmlns:m="http://schemas.openxmlformats.org/officeDocument/2006/math">
-                    <m:oMathParaPr>
-                      <m:jc m:val="centerGroup"/>
-                    </m:oMathParaPr>
-                    <m:oMath xmlns:m="http://schemas.openxmlformats.org/officeDocument/2006/math">
+                    <m:oMath>
                       <m:r>
                         <a:rPr lang="en-US" sz="2000" b="0" i="1" smtClean="0">
                           <a:latin typeface="Cambria Math" panose="02040503050406030204" pitchFamily="18" charset="0"/>
@@ -6033,10 +5986,7 @@
                 <a:pPr/>
                 <a14:m>
                   <m:oMathPara xmlns:m="http://schemas.openxmlformats.org/officeDocument/2006/math">
-                    <m:oMathParaPr>
-                      <m:jc m:val="centerGroup"/>
-                    </m:oMathParaPr>
-                    <m:oMath xmlns:m="http://schemas.openxmlformats.org/officeDocument/2006/math">
+                    <m:oMath>
                       <m:r>
                         <a:rPr lang="en-US" sz="2000" b="0" i="1" smtClean="0">
                           <a:latin typeface="Cambria Math" panose="02040503050406030204" pitchFamily="18" charset="0"/>
@@ -6130,10 +6080,7 @@
                 <a:pPr/>
                 <a14:m>
                   <m:oMathPara xmlns:m="http://schemas.openxmlformats.org/officeDocument/2006/math">
-                    <m:oMathParaPr>
-                      <m:jc m:val="centerGroup"/>
-                    </m:oMathParaPr>
-                    <m:oMath xmlns:m="http://schemas.openxmlformats.org/officeDocument/2006/math">
+                    <m:oMath>
                       <m:r>
                         <a:rPr lang="en-US" sz="2000" b="0" i="1" smtClean="0">
                           <a:latin typeface="Cambria Math" panose="02040503050406030204" pitchFamily="18" charset="0"/>
@@ -6279,10 +6226,7 @@
                 <a:pPr/>
                 <a14:m>
                   <m:oMathPara xmlns:m="http://schemas.openxmlformats.org/officeDocument/2006/math">
-                    <m:oMathParaPr>
-                      <m:jc m:val="centerGroup"/>
-                    </m:oMathParaPr>
-                    <m:oMath xmlns:m="http://schemas.openxmlformats.org/officeDocument/2006/math">
+                    <m:oMath>
                       <m:r>
                         <a:rPr lang="en-US" sz="2000" b="0" i="1" smtClean="0">
                           <a:latin typeface="Cambria Math" panose="02040503050406030204" pitchFamily="18" charset="0"/>
@@ -6376,10 +6320,7 @@
                 <a:pPr/>
                 <a14:m>
                   <m:oMathPara xmlns:m="http://schemas.openxmlformats.org/officeDocument/2006/math">
-                    <m:oMathParaPr>
-                      <m:jc m:val="centerGroup"/>
-                    </m:oMathParaPr>
-                    <m:oMath xmlns:m="http://schemas.openxmlformats.org/officeDocument/2006/math">
+                    <m:oMath>
                       <m:r>
                         <a:rPr lang="en-US" sz="2000" b="0" i="1" smtClean="0">
                           <a:latin typeface="Cambria Math" panose="02040503050406030204" pitchFamily="18" charset="0"/>
@@ -6809,10 +6750,7 @@
                 <a:pPr/>
                 <a14:m>
                   <m:oMathPara xmlns:m="http://schemas.openxmlformats.org/officeDocument/2006/math">
-                    <m:oMathParaPr>
-                      <m:jc m:val="centerGroup"/>
-                    </m:oMathParaPr>
-                    <m:oMath xmlns:m="http://schemas.openxmlformats.org/officeDocument/2006/math">
+                    <m:oMath>
                       <m:r>
                         <a:rPr lang="en-US" sz="2000" b="0" i="1" smtClean="0">
                           <a:latin typeface="Cambria Math" panose="02040503050406030204" pitchFamily="18" charset="0"/>
@@ -6906,10 +6844,7 @@
                 <a:pPr/>
                 <a14:m>
                   <m:oMathPara xmlns:m="http://schemas.openxmlformats.org/officeDocument/2006/math">
-                    <m:oMathParaPr>
-                      <m:jc m:val="centerGroup"/>
-                    </m:oMathParaPr>
-                    <m:oMath xmlns:m="http://schemas.openxmlformats.org/officeDocument/2006/math">
+                    <m:oMath>
                       <m:r>
                         <m:rPr>
                           <m:sty m:val="p"/>
@@ -7024,10 +6959,7 @@
                 <a:pPr/>
                 <a14:m>
                   <m:oMathPara xmlns:m="http://schemas.openxmlformats.org/officeDocument/2006/math">
-                    <m:oMathParaPr>
-                      <m:jc m:val="centerGroup"/>
-                    </m:oMathParaPr>
-                    <m:oMath xmlns:m="http://schemas.openxmlformats.org/officeDocument/2006/math">
+                    <m:oMath>
                       <m:acc>
                         <m:accPr>
                           <m:chr m:val="̅"/>
@@ -7865,10 +7797,7 @@
                 <a:pPr/>
                 <a14:m>
                   <m:oMathPara xmlns:m="http://schemas.openxmlformats.org/officeDocument/2006/math">
-                    <m:oMathParaPr>
-                      <m:jc m:val="centerGroup"/>
-                    </m:oMathParaPr>
-                    <m:oMath xmlns:m="http://schemas.openxmlformats.org/officeDocument/2006/math">
+                    <m:oMath>
                       <m:r>
                         <a:rPr lang="en-US" sz="2000" b="0" i="1" smtClean="0">
                           <a:latin typeface="Cambria Math" panose="02040503050406030204" pitchFamily="18" charset="0"/>
@@ -8066,10 +7995,7 @@
                 <a:pPr/>
                 <a14:m>
                   <m:oMathPara xmlns:m="http://schemas.openxmlformats.org/officeDocument/2006/math">
-                    <m:oMathParaPr>
-                      <m:jc m:val="centerGroup"/>
-                    </m:oMathParaPr>
-                    <m:oMath xmlns:m="http://schemas.openxmlformats.org/officeDocument/2006/math">
+                    <m:oMath>
                       <m:r>
                         <a:rPr lang="en-US" sz="2000" b="0" i="1" smtClean="0">
                           <a:latin typeface="Cambria Math" panose="02040503050406030204" pitchFamily="18" charset="0"/>
@@ -8215,10 +8141,7 @@
                 <a:pPr/>
                 <a14:m>
                   <m:oMathPara xmlns:m="http://schemas.openxmlformats.org/officeDocument/2006/math">
-                    <m:oMathParaPr>
-                      <m:jc m:val="centerGroup"/>
-                    </m:oMathParaPr>
-                    <m:oMath xmlns:m="http://schemas.openxmlformats.org/officeDocument/2006/math">
+                    <m:oMath>
                       <m:r>
                         <a:rPr lang="en-US" sz="2000" b="0" i="1" smtClean="0">
                           <a:latin typeface="Cambria Math" panose="02040503050406030204" pitchFamily="18" charset="0"/>
@@ -8493,10 +8416,7 @@
                 <a:pPr/>
                 <a14:m>
                   <m:oMathPara xmlns:m="http://schemas.openxmlformats.org/officeDocument/2006/math">
-                    <m:oMathParaPr>
-                      <m:jc m:val="centerGroup"/>
-                    </m:oMathParaPr>
-                    <m:oMath xmlns:m="http://schemas.openxmlformats.org/officeDocument/2006/math">
+                    <m:oMath>
                       <m:sSub>
                         <m:sSubPr>
                           <m:ctrlPr>
@@ -8620,10 +8540,7 @@
                 <a:pPr/>
                 <a14:m>
                   <m:oMathPara xmlns:m="http://schemas.openxmlformats.org/officeDocument/2006/math">
-                    <m:oMathParaPr>
-                      <m:jc m:val="centerGroup"/>
-                    </m:oMathParaPr>
-                    <m:oMath xmlns:m="http://schemas.openxmlformats.org/officeDocument/2006/math">
+                    <m:oMath>
                       <m:sSub>
                         <m:sSubPr>
                           <m:ctrlPr>
@@ -8747,10 +8664,7 @@
                 <a:pPr/>
                 <a14:m>
                   <m:oMathPara xmlns:m="http://schemas.openxmlformats.org/officeDocument/2006/math">
-                    <m:oMathParaPr>
-                      <m:jc m:val="centerGroup"/>
-                    </m:oMathParaPr>
-                    <m:oMath xmlns:m="http://schemas.openxmlformats.org/officeDocument/2006/math">
+                    <m:oMath>
                       <m:sSub>
                         <m:sSubPr>
                           <m:ctrlPr>
@@ -8874,14 +8788,11 @@
                 <a:pPr/>
                 <a14:m>
                   <m:oMathPara xmlns:m="http://schemas.openxmlformats.org/officeDocument/2006/math">
-                    <m:oMathParaPr>
-                      <m:jc m:val="centerGroup"/>
-                    </m:oMathParaPr>
-                    <m:oMath xmlns:m="http://schemas.openxmlformats.org/officeDocument/2006/math">
+                    <m:oMath>
                       <m:sSub>
                         <m:sSubPr>
                           <m:ctrlPr>
-                            <a:rPr lang="en-US" sz="2000" b="1" i="1">
+                            <a:rPr lang="en-US" sz="2000" b="1" i="1" smtClean="0">
                               <a:latin typeface="Cambria Math" panose="02040503050406030204" pitchFamily="18" charset="0"/>
                             </a:rPr>
                           </m:ctrlPr>
@@ -9001,10 +8912,7 @@
                 <a:pPr/>
                 <a14:m>
                   <m:oMathPara xmlns:m="http://schemas.openxmlformats.org/officeDocument/2006/math">
-                    <m:oMathParaPr>
-                      <m:jc m:val="centerGroup"/>
-                    </m:oMathParaPr>
-                    <m:oMath xmlns:m="http://schemas.openxmlformats.org/officeDocument/2006/math">
+                    <m:oMath>
                       <m:r>
                         <m:rPr>
                           <m:sty m:val="p"/>
@@ -9326,8 +9234,8 @@
           </a:p>
         </p:txBody>
       </p:sp>
-      <mc:AlternateContent xmlns:mc="http://schemas.openxmlformats.org/markup-compatibility/2006">
-        <mc:Choice xmlns:a14="http://schemas.microsoft.com/office/drawing/2010/main" Requires="a14">
+      <mc:AlternateContent xmlns:mc="http://schemas.openxmlformats.org/markup-compatibility/2006" xmlns:a14="http://schemas.microsoft.com/office/drawing/2010/main">
+        <mc:Choice Requires="a14">
           <p:sp>
             <p:nvSpPr>
               <p:cNvPr id="4" name="TextBox 3">
@@ -9359,10 +9267,7 @@
                 <a:pPr/>
                 <a14:m>
                   <m:oMathPara xmlns:m="http://schemas.openxmlformats.org/officeDocument/2006/math">
-                    <m:oMathParaPr>
-                      <m:jc m:val="centerGroup"/>
-                    </m:oMathParaPr>
-                    <m:oMath xmlns:m="http://schemas.openxmlformats.org/officeDocument/2006/math">
+                    <m:oMath>
                       <m:r>
                         <a:rPr lang="en-US" sz="2000" b="0" i="1" smtClean="0">
                           <a:latin typeface="Cambria Math" panose="02040503050406030204" pitchFamily="18" charset="0"/>
@@ -9378,7 +9283,7 @@
             </p:txBody>
           </p:sp>
         </mc:Choice>
-        <mc:Fallback>
+        <mc:Fallback xmlns="">
           <p:sp>
             <p:nvSpPr>
               <p:cNvPr id="4" name="TextBox 3">
@@ -9475,8 +9380,8 @@
           </a:p>
         </p:txBody>
       </p:sp>
-      <mc:AlternateContent xmlns:mc="http://schemas.openxmlformats.org/markup-compatibility/2006">
-        <mc:Choice xmlns:a14="http://schemas.microsoft.com/office/drawing/2010/main" Requires="a14">
+      <mc:AlternateContent xmlns:mc="http://schemas.openxmlformats.org/markup-compatibility/2006" xmlns:a14="http://schemas.microsoft.com/office/drawing/2010/main">
+        <mc:Choice Requires="a14">
           <p:sp>
             <p:nvSpPr>
               <p:cNvPr id="6" name="TextBox 5">
@@ -9508,10 +9413,7 @@
                 <a:pPr/>
                 <a14:m>
                   <m:oMathPara xmlns:m="http://schemas.openxmlformats.org/officeDocument/2006/math">
-                    <m:oMathParaPr>
-                      <m:jc m:val="centerGroup"/>
-                    </m:oMathParaPr>
-                    <m:oMath xmlns:m="http://schemas.openxmlformats.org/officeDocument/2006/math">
+                    <m:oMath>
                       <m:r>
                         <a:rPr lang="en-US" sz="2000" b="0" i="1" smtClean="0">
                           <a:latin typeface="Cambria Math" panose="02040503050406030204" pitchFamily="18" charset="0"/>
@@ -9527,7 +9429,7 @@
             </p:txBody>
           </p:sp>
         </mc:Choice>
-        <mc:Fallback>
+        <mc:Fallback xmlns="">
           <p:sp>
             <p:nvSpPr>
               <p:cNvPr id="6" name="TextBox 5">
@@ -9572,8 +9474,8 @@
           </p:sp>
         </mc:Fallback>
       </mc:AlternateContent>
-      <mc:AlternateContent xmlns:mc="http://schemas.openxmlformats.org/markup-compatibility/2006">
-        <mc:Choice xmlns:a14="http://schemas.microsoft.com/office/drawing/2010/main" Requires="a14">
+      <mc:AlternateContent xmlns:mc="http://schemas.openxmlformats.org/markup-compatibility/2006" xmlns:a14="http://schemas.microsoft.com/office/drawing/2010/main">
+        <mc:Choice Requires="a14">
           <p:sp>
             <p:nvSpPr>
               <p:cNvPr id="12" name="TextBox 11">
@@ -9605,10 +9507,7 @@
                 <a:pPr/>
                 <a14:m>
                   <m:oMathPara xmlns:m="http://schemas.openxmlformats.org/officeDocument/2006/math">
-                    <m:oMathParaPr>
-                      <m:jc m:val="centerGroup"/>
-                    </m:oMathParaPr>
-                    <m:oMath xmlns:m="http://schemas.openxmlformats.org/officeDocument/2006/math">
+                    <m:oMath>
                       <m:r>
                         <a:rPr lang="en-US" sz="2000" b="0" i="1" smtClean="0">
                           <a:latin typeface="Cambria Math" panose="02040503050406030204" pitchFamily="18" charset="0"/>
@@ -9624,7 +9523,7 @@
             </p:txBody>
           </p:sp>
         </mc:Choice>
-        <mc:Fallback>
+        <mc:Fallback xmlns="">
           <p:sp>
             <p:nvSpPr>
               <p:cNvPr id="12" name="TextBox 11">
@@ -9813,8 +9712,8 @@
           </a:fontRef>
         </p:style>
       </p:cxnSp>
-      <mc:AlternateContent xmlns:mc="http://schemas.openxmlformats.org/markup-compatibility/2006">
-        <mc:Choice xmlns:a14="http://schemas.microsoft.com/office/drawing/2010/main" Requires="a14">
+      <mc:AlternateContent xmlns:mc="http://schemas.openxmlformats.org/markup-compatibility/2006" xmlns:a14="http://schemas.microsoft.com/office/drawing/2010/main">
+        <mc:Choice Requires="a14">
           <p:sp>
             <p:nvSpPr>
               <p:cNvPr id="16" name="TextBox 15">
@@ -9846,10 +9745,7 @@
                 <a:pPr/>
                 <a14:m>
                   <m:oMathPara xmlns:m="http://schemas.openxmlformats.org/officeDocument/2006/math">
-                    <m:oMathParaPr>
-                      <m:jc m:val="centerGroup"/>
-                    </m:oMathParaPr>
-                    <m:oMath xmlns:m="http://schemas.openxmlformats.org/officeDocument/2006/math">
+                    <m:oMath>
                       <m:sSub>
                         <m:sSubPr>
                           <m:ctrlPr>
@@ -9895,7 +9791,7 @@
             </p:txBody>
           </p:sp>
         </mc:Choice>
-        <mc:Fallback>
+        <mc:Fallback xmlns="">
           <p:sp>
             <p:nvSpPr>
               <p:cNvPr id="16" name="TextBox 15">
@@ -9940,8 +9836,8 @@
           </p:sp>
         </mc:Fallback>
       </mc:AlternateContent>
-      <mc:AlternateContent xmlns:mc="http://schemas.openxmlformats.org/markup-compatibility/2006">
-        <mc:Choice xmlns:a14="http://schemas.microsoft.com/office/drawing/2010/main" Requires="a14">
+      <mc:AlternateContent xmlns:mc="http://schemas.openxmlformats.org/markup-compatibility/2006" xmlns:a14="http://schemas.microsoft.com/office/drawing/2010/main">
+        <mc:Choice Requires="a14">
           <p:sp>
             <p:nvSpPr>
               <p:cNvPr id="17" name="TextBox 16">
@@ -9973,10 +9869,7 @@
                 <a:pPr/>
                 <a14:m>
                   <m:oMathPara xmlns:m="http://schemas.openxmlformats.org/officeDocument/2006/math">
-                    <m:oMathParaPr>
-                      <m:jc m:val="centerGroup"/>
-                    </m:oMathParaPr>
-                    <m:oMath xmlns:m="http://schemas.openxmlformats.org/officeDocument/2006/math">
+                    <m:oMath>
                       <m:sSub>
                         <m:sSubPr>
                           <m:ctrlPr>
@@ -10022,7 +9915,7 @@
             </p:txBody>
           </p:sp>
         </mc:Choice>
-        <mc:Fallback>
+        <mc:Fallback xmlns="">
           <p:sp>
             <p:nvSpPr>
               <p:cNvPr id="17" name="TextBox 16">
@@ -10155,8 +10048,8 @@
           </a:fontRef>
         </p:style>
       </p:cxnSp>
-      <mc:AlternateContent xmlns:mc="http://schemas.openxmlformats.org/markup-compatibility/2006">
-        <mc:Choice xmlns:a14="http://schemas.microsoft.com/office/drawing/2010/main" Requires="a14">
+      <mc:AlternateContent xmlns:mc="http://schemas.openxmlformats.org/markup-compatibility/2006" xmlns:a14="http://schemas.microsoft.com/office/drawing/2010/main">
+        <mc:Choice Requires="a14">
           <p:sp>
             <p:nvSpPr>
               <p:cNvPr id="26" name="TextBox 25">
@@ -10188,10 +10081,7 @@
                 <a:pPr/>
                 <a14:m>
                   <m:oMathPara xmlns:m="http://schemas.openxmlformats.org/officeDocument/2006/math">
-                    <m:oMathParaPr>
-                      <m:jc m:val="centerGroup"/>
-                    </m:oMathParaPr>
-                    <m:oMath xmlns:m="http://schemas.openxmlformats.org/officeDocument/2006/math">
+                    <m:oMath>
                       <m:r>
                         <m:rPr>
                           <m:sty m:val="p"/>
@@ -10227,7 +10117,7 @@
             </p:txBody>
           </p:sp>
         </mc:Choice>
-        <mc:Fallback>
+        <mc:Fallback xmlns="">
           <p:sp>
             <p:nvSpPr>
               <p:cNvPr id="26" name="TextBox 25">
@@ -10272,8 +10162,8 @@
           </p:sp>
         </mc:Fallback>
       </mc:AlternateContent>
-      <mc:AlternateContent xmlns:mc="http://schemas.openxmlformats.org/markup-compatibility/2006">
-        <mc:Choice xmlns:a14="http://schemas.microsoft.com/office/drawing/2010/main" Requires="a14">
+      <mc:AlternateContent xmlns:mc="http://schemas.openxmlformats.org/markup-compatibility/2006" xmlns:a14="http://schemas.microsoft.com/office/drawing/2010/main">
+        <mc:Choice Requires="a14">
           <p:sp>
             <p:nvSpPr>
               <p:cNvPr id="27" name="TextBox 26">
@@ -10305,14 +10195,11 @@
                 <a:pPr/>
                 <a14:m>
                   <m:oMathPara xmlns:m="http://schemas.openxmlformats.org/officeDocument/2006/math">
-                    <m:oMathParaPr>
-                      <m:jc m:val="centerGroup"/>
-                    </m:oMathParaPr>
-                    <m:oMath xmlns:m="http://schemas.openxmlformats.org/officeDocument/2006/math">
+                    <m:oMath>
                       <m:sSub>
                         <m:sSubPr>
                           <m:ctrlPr>
-                            <a:rPr lang="en-US" sz="2000" b="1" i="1" smtClean="0">
+                            <a:rPr lang="en-US" sz="2000" b="1" i="1">
                               <a:latin typeface="Cambria Math" panose="02040503050406030204" pitchFamily="18" charset="0"/>
                             </a:rPr>
                           </m:ctrlPr>
@@ -10354,7 +10241,7 @@
             </p:txBody>
           </p:sp>
         </mc:Choice>
-        <mc:Fallback>
+        <mc:Fallback xmlns="">
           <p:sp>
             <p:nvSpPr>
               <p:cNvPr id="27" name="TextBox 26">
@@ -10475,6 +10362,1102 @@
     <p:extLst>
       <p:ext uri="{BB962C8B-B14F-4D97-AF65-F5344CB8AC3E}">
         <p14:creationId xmlns:p14="http://schemas.microsoft.com/office/powerpoint/2010/main" val="118549185"/>
+      </p:ext>
+    </p:extLst>
+  </p:cSld>
+  <p:clrMapOvr>
+    <a:masterClrMapping/>
+  </p:clrMapOvr>
+</p:sld>
+</file>
+
+<file path=ppt/slides/slide6.xml><?xml version="1.0" encoding="utf-8"?>
+<p:sld xmlns:a="http://schemas.openxmlformats.org/drawingml/2006/main" xmlns:r="http://schemas.openxmlformats.org/officeDocument/2006/relationships" xmlns:p="http://schemas.openxmlformats.org/presentationml/2006/main">
+  <p:cSld>
+    <p:spTree>
+      <p:nvGrpSpPr>
+        <p:cNvPr id="1" name=""/>
+        <p:cNvGrpSpPr/>
+        <p:nvPr/>
+      </p:nvGrpSpPr>
+      <p:grpSpPr>
+        <a:xfrm>
+          <a:off x="0" y="0"/>
+          <a:ext cx="0" cy="0"/>
+          <a:chOff x="0" y="0"/>
+          <a:chExt cx="0" cy="0"/>
+        </a:xfrm>
+      </p:grpSpPr>
+      <p:sp>
+        <p:nvSpPr>
+          <p:cNvPr id="7" name="Freeform 1">
+            <a:extLst>
+              <a:ext uri="{FF2B5EF4-FFF2-40B4-BE49-F238E27FC236}">
+                <a16:creationId xmlns:a16="http://schemas.microsoft.com/office/drawing/2014/main" id="{55C7EF6B-B40A-4683-8B65-271734D8E40E}"/>
+              </a:ext>
+            </a:extLst>
+          </p:cNvPr>
+          <p:cNvSpPr/>
+          <p:nvPr/>
+        </p:nvSpPr>
+        <p:spPr>
+          <a:xfrm>
+            <a:off x="3082835" y="1812171"/>
+            <a:ext cx="4301813" cy="1732277"/>
+          </a:xfrm>
+          <a:custGeom>
+            <a:avLst/>
+            <a:gdLst>
+              <a:gd name="csX0" fmla="*/ 0 w 3155069"/>
+              <a:gd name="csY0" fmla="*/ 1723508 h 1732277"/>
+              <a:gd name="csX1" fmla="*/ 1515950 w 3155069"/>
+              <a:gd name="csY1" fmla="*/ 727864 h 1732277"/>
+              <a:gd name="csX2" fmla="*/ 3155069 w 3155069"/>
+              <a:gd name="csY2" fmla="*/ 106139 h 1732277"/>
+            </a:gdLst>
+            <a:ahLst/>
+            <a:cxnLst>
+              <a:cxn ang="0">
+                <a:pos x="csX0" y="csY0"/>
+              </a:cxn>
+              <a:cxn ang="0">
+                <a:pos x="csX1" y="csY1"/>
+              </a:cxn>
+              <a:cxn ang="0">
+                <a:pos x="csX2" y="csY2"/>
+              </a:cxn>
+            </a:cxnLst>
+            <a:rect l="l" t="t" r="r" b="b"/>
+            <a:pathLst>
+              <a:path w="3155069" h="1732277">
+                <a:moveTo>
+                  <a:pt x="0" y="1723508"/>
+                </a:moveTo>
+                <a:cubicBezTo>
+                  <a:pt x="412156" y="1776026"/>
+                  <a:pt x="947657" y="1610883"/>
+                  <a:pt x="1515950" y="727864"/>
+                </a:cubicBezTo>
+                <a:cubicBezTo>
+                  <a:pt x="2084243" y="-155155"/>
+                  <a:pt x="2642107" y="-52371"/>
+                  <a:pt x="3155069" y="106139"/>
+                </a:cubicBezTo>
+              </a:path>
+            </a:pathLst>
+          </a:custGeom>
+          <a:noFill/>
+          <a:ln w="28575">
+            <a:solidFill>
+              <a:srgbClr val="0070C0">
+                <a:alpha val="66000"/>
+              </a:srgbClr>
+            </a:solidFill>
+          </a:ln>
+        </p:spPr>
+        <p:style>
+          <a:lnRef idx="2">
+            <a:schemeClr val="accent1">
+              <a:shade val="50000"/>
+            </a:schemeClr>
+          </a:lnRef>
+          <a:fillRef idx="1">
+            <a:schemeClr val="accent1"/>
+          </a:fillRef>
+          <a:effectRef idx="0">
+            <a:schemeClr val="accent1"/>
+          </a:effectRef>
+          <a:fontRef idx="minor">
+            <a:schemeClr val="lt1"/>
+          </a:fontRef>
+        </p:style>
+        <p:txBody>
+          <a:bodyPr rtlCol="0" anchor="ctr"/>
+          <a:lstStyle/>
+          <a:p>
+            <a:pPr algn="ctr"/>
+            <a:endParaRPr lang="en-US"/>
+          </a:p>
+        </p:txBody>
+      </p:sp>
+      <p:cxnSp>
+        <p:nvCxnSpPr>
+          <p:cNvPr id="10" name="Straight Arrow Connector 9">
+            <a:extLst>
+              <a:ext uri="{FF2B5EF4-FFF2-40B4-BE49-F238E27FC236}">
+                <a16:creationId xmlns:a16="http://schemas.microsoft.com/office/drawing/2014/main" id="{E5633072-E917-6B58-5554-E02072CB1FE5}"/>
+              </a:ext>
+            </a:extLst>
+          </p:cNvPr>
+          <p:cNvCxnSpPr>
+            <a:cxnSpLocks/>
+          </p:cNvCxnSpPr>
+          <p:nvPr/>
+        </p:nvCxnSpPr>
+        <p:spPr>
+          <a:xfrm flipV="1">
+            <a:off x="4831339" y="2056130"/>
+            <a:ext cx="341371" cy="803868"/>
+          </a:xfrm>
+          <a:prstGeom prst="straightConnector1">
+            <a:avLst/>
+          </a:prstGeom>
+          <a:ln w="28575">
+            <a:solidFill>
+              <a:srgbClr val="003A00"/>
+            </a:solidFill>
+            <a:tailEnd type="triangle" w="lg" len="lg"/>
+          </a:ln>
+        </p:spPr>
+        <p:style>
+          <a:lnRef idx="1">
+            <a:schemeClr val="accent1"/>
+          </a:lnRef>
+          <a:fillRef idx="0">
+            <a:schemeClr val="accent1"/>
+          </a:fillRef>
+          <a:effectRef idx="0">
+            <a:schemeClr val="accent1"/>
+          </a:effectRef>
+          <a:fontRef idx="minor">
+            <a:schemeClr val="tx1"/>
+          </a:fontRef>
+        </p:style>
+      </p:cxnSp>
+      <mc:AlternateContent xmlns:mc="http://schemas.openxmlformats.org/markup-compatibility/2006">
+        <mc:Choice xmlns:a14="http://schemas.microsoft.com/office/drawing/2010/main" Requires="a14">
+          <p:sp>
+            <p:nvSpPr>
+              <p:cNvPr id="11" name="TextBox 10">
+                <a:extLst>
+                  <a:ext uri="{FF2B5EF4-FFF2-40B4-BE49-F238E27FC236}">
+                    <a16:creationId xmlns:a16="http://schemas.microsoft.com/office/drawing/2014/main" id="{2E4B3002-E16F-9D9E-8FB0-245878660D68}"/>
+                  </a:ext>
+                </a:extLst>
+              </p:cNvPr>
+              <p:cNvSpPr txBox="1"/>
+              <p:nvPr/>
+            </p:nvSpPr>
+            <p:spPr>
+              <a:xfrm>
+                <a:off x="4638699" y="2198032"/>
+                <a:ext cx="326436" cy="307777"/>
+              </a:xfrm>
+              <a:prstGeom prst="rect">
+                <a:avLst/>
+              </a:prstGeom>
+              <a:noFill/>
+            </p:spPr>
+            <p:txBody>
+              <a:bodyPr wrap="none" lIns="0" tIns="0" rIns="0" bIns="0" rtlCol="0">
+                <a:spAutoFit/>
+              </a:bodyPr>
+              <a:lstStyle/>
+              <a:p>
+                <a:pPr/>
+                <a14:m>
+                  <m:oMathPara xmlns:m="http://schemas.openxmlformats.org/officeDocument/2006/math">
+                    <m:oMath>
+                      <m:sSub>
+                        <m:sSubPr>
+                          <m:ctrlPr>
+                            <a:rPr lang="en-US" sz="2000" b="1" i="1">
+                              <a:latin typeface="Cambria Math" panose="02040503050406030204" pitchFamily="18" charset="0"/>
+                            </a:rPr>
+                          </m:ctrlPr>
+                        </m:sSubPr>
+                        <m:e>
+                          <m:acc>
+                            <m:accPr>
+                              <m:chr m:val="̅"/>
+                              <m:ctrlPr>
+                                <a:rPr lang="en-US" sz="2000" b="1" i="1">
+                                  <a:latin typeface="Cambria Math" panose="02040503050406030204" pitchFamily="18" charset="0"/>
+                                </a:rPr>
+                              </m:ctrlPr>
+                            </m:accPr>
+                            <m:e>
+                              <m:r>
+                                <a:rPr lang="en-US" sz="2000" b="1" i="1">
+                                  <a:latin typeface="Cambria Math" panose="02040503050406030204" pitchFamily="18" charset="0"/>
+                                </a:rPr>
+                                <m:t>𝑭</m:t>
+                              </m:r>
+                            </m:e>
+                          </m:acc>
+                        </m:e>
+                        <m:sub>
+                          <m:r>
+                            <a:rPr lang="en-US" sz="2000" b="1" i="1" smtClean="0">
+                              <a:latin typeface="Cambria Math" panose="02040503050406030204" pitchFamily="18" charset="0"/>
+                            </a:rPr>
+                            <m:t>𝒄</m:t>
+                          </m:r>
+                        </m:sub>
+                      </m:sSub>
+                    </m:oMath>
+                  </m:oMathPara>
+                </a14:m>
+                <a:endParaRPr lang="en-US" sz="2000" dirty="0"/>
+              </a:p>
+            </p:txBody>
+          </p:sp>
+        </mc:Choice>
+        <mc:Fallback>
+          <p:sp>
+            <p:nvSpPr>
+              <p:cNvPr id="11" name="TextBox 10">
+                <a:extLst>
+                  <a:ext uri="{FF2B5EF4-FFF2-40B4-BE49-F238E27FC236}">
+                    <a16:creationId xmlns:a16="http://schemas.microsoft.com/office/drawing/2014/main" id="{2E4B3002-E16F-9D9E-8FB0-245878660D68}"/>
+                  </a:ext>
+                </a:extLst>
+              </p:cNvPr>
+              <p:cNvSpPr txBox="1">
+                <a:spLocks noRot="1" noChangeAspect="1" noMove="1" noResize="1" noEditPoints="1" noAdjustHandles="1" noChangeArrowheads="1" noChangeShapeType="1" noTextEdit="1"/>
+              </p:cNvSpPr>
+              <p:nvPr/>
+            </p:nvSpPr>
+            <p:spPr>
+              <a:xfrm>
+                <a:off x="4638699" y="2198032"/>
+                <a:ext cx="326436" cy="307777"/>
+              </a:xfrm>
+              <a:prstGeom prst="rect">
+                <a:avLst/>
+              </a:prstGeom>
+              <a:blipFill>
+                <a:blip r:embed="rId2"/>
+                <a:stretch>
+                  <a:fillRect l="-18868" t="-2000" r="-18868" b="-12000"/>
+                </a:stretch>
+              </a:blipFill>
+            </p:spPr>
+            <p:txBody>
+              <a:bodyPr/>
+              <a:lstStyle/>
+              <a:p>
+                <a:r>
+                  <a:rPr lang="en-IN">
+                    <a:noFill/>
+                  </a:rPr>
+                  <a:t> </a:t>
+                </a:r>
+              </a:p>
+            </p:txBody>
+          </p:sp>
+        </mc:Fallback>
+      </mc:AlternateContent>
+      <p:cxnSp>
+        <p:nvCxnSpPr>
+          <p:cNvPr id="14" name="Straight Arrow Connector 13">
+            <a:extLst>
+              <a:ext uri="{FF2B5EF4-FFF2-40B4-BE49-F238E27FC236}">
+                <a16:creationId xmlns:a16="http://schemas.microsoft.com/office/drawing/2014/main" id="{EF3D7D80-EC12-156A-25A6-ABCFF5F82737}"/>
+              </a:ext>
+            </a:extLst>
+          </p:cNvPr>
+          <p:cNvCxnSpPr>
+            <a:cxnSpLocks/>
+          </p:cNvCxnSpPr>
+          <p:nvPr/>
+        </p:nvCxnSpPr>
+        <p:spPr>
+          <a:xfrm>
+            <a:off x="4831339" y="2859998"/>
+            <a:ext cx="1322446" cy="331809"/>
+          </a:xfrm>
+          <a:prstGeom prst="straightConnector1">
+            <a:avLst/>
+          </a:prstGeom>
+          <a:ln w="28575">
+            <a:solidFill>
+              <a:srgbClr val="862626"/>
+            </a:solidFill>
+            <a:tailEnd type="triangle" w="lg" len="lg"/>
+          </a:ln>
+        </p:spPr>
+        <p:style>
+          <a:lnRef idx="1">
+            <a:schemeClr val="accent1"/>
+          </a:lnRef>
+          <a:fillRef idx="0">
+            <a:schemeClr val="accent1"/>
+          </a:fillRef>
+          <a:effectRef idx="0">
+            <a:schemeClr val="accent1"/>
+          </a:effectRef>
+          <a:fontRef idx="minor">
+            <a:schemeClr val="tx1"/>
+          </a:fontRef>
+        </p:style>
+      </p:cxnSp>
+      <p:cxnSp>
+        <p:nvCxnSpPr>
+          <p:cNvPr id="17" name="Straight Arrow Connector 16">
+            <a:extLst>
+              <a:ext uri="{FF2B5EF4-FFF2-40B4-BE49-F238E27FC236}">
+                <a16:creationId xmlns:a16="http://schemas.microsoft.com/office/drawing/2014/main" id="{25417516-6F00-282E-F979-DEC9FCFAE0A3}"/>
+              </a:ext>
+            </a:extLst>
+          </p:cNvPr>
+          <p:cNvCxnSpPr>
+            <a:cxnSpLocks/>
+          </p:cNvCxnSpPr>
+          <p:nvPr/>
+        </p:nvCxnSpPr>
+        <p:spPr>
+          <a:xfrm flipV="1">
+            <a:off x="6154290" y="2387939"/>
+            <a:ext cx="341371" cy="803868"/>
+          </a:xfrm>
+          <a:prstGeom prst="straightConnector1">
+            <a:avLst/>
+          </a:prstGeom>
+          <a:ln w="12700">
+            <a:solidFill>
+              <a:srgbClr val="003A00">
+                <a:alpha val="50000"/>
+              </a:srgbClr>
+            </a:solidFill>
+            <a:prstDash val="sysDash"/>
+            <a:tailEnd type="none" w="lg" len="lg"/>
+          </a:ln>
+        </p:spPr>
+        <p:style>
+          <a:lnRef idx="1">
+            <a:schemeClr val="accent1"/>
+          </a:lnRef>
+          <a:fillRef idx="0">
+            <a:schemeClr val="accent1"/>
+          </a:fillRef>
+          <a:effectRef idx="0">
+            <a:schemeClr val="accent1"/>
+          </a:effectRef>
+          <a:fontRef idx="minor">
+            <a:schemeClr val="tx1"/>
+          </a:fontRef>
+        </p:style>
+      </p:cxnSp>
+      <p:cxnSp>
+        <p:nvCxnSpPr>
+          <p:cNvPr id="18" name="Straight Arrow Connector 17">
+            <a:extLst>
+              <a:ext uri="{FF2B5EF4-FFF2-40B4-BE49-F238E27FC236}">
+                <a16:creationId xmlns:a16="http://schemas.microsoft.com/office/drawing/2014/main" id="{D20E3FF3-EF9F-6648-6C79-7820DEF5EF67}"/>
+              </a:ext>
+            </a:extLst>
+          </p:cNvPr>
+          <p:cNvCxnSpPr>
+            <a:cxnSpLocks/>
+          </p:cNvCxnSpPr>
+          <p:nvPr/>
+        </p:nvCxnSpPr>
+        <p:spPr>
+          <a:xfrm>
+            <a:off x="5172710" y="2056130"/>
+            <a:ext cx="1322446" cy="331809"/>
+          </a:xfrm>
+          <a:prstGeom prst="straightConnector1">
+            <a:avLst/>
+          </a:prstGeom>
+          <a:ln w="12700">
+            <a:solidFill>
+              <a:srgbClr val="003A00">
+                <a:alpha val="50000"/>
+              </a:srgbClr>
+            </a:solidFill>
+            <a:prstDash val="sysDash"/>
+            <a:tailEnd type="none" w="lg" len="lg"/>
+          </a:ln>
+        </p:spPr>
+        <p:style>
+          <a:lnRef idx="1">
+            <a:schemeClr val="accent1"/>
+          </a:lnRef>
+          <a:fillRef idx="0">
+            <a:schemeClr val="accent1"/>
+          </a:fillRef>
+          <a:effectRef idx="0">
+            <a:schemeClr val="accent1"/>
+          </a:effectRef>
+          <a:fontRef idx="minor">
+            <a:schemeClr val="tx1"/>
+          </a:fontRef>
+        </p:style>
+      </p:cxnSp>
+      <p:cxnSp>
+        <p:nvCxnSpPr>
+          <p:cNvPr id="19" name="Straight Arrow Connector 18">
+            <a:extLst>
+              <a:ext uri="{FF2B5EF4-FFF2-40B4-BE49-F238E27FC236}">
+                <a16:creationId xmlns:a16="http://schemas.microsoft.com/office/drawing/2014/main" id="{940477B6-06C2-4ECF-79C6-39D01F04E5C1}"/>
+              </a:ext>
+            </a:extLst>
+          </p:cNvPr>
+          <p:cNvCxnSpPr>
+            <a:cxnSpLocks/>
+          </p:cNvCxnSpPr>
+          <p:nvPr/>
+        </p:nvCxnSpPr>
+        <p:spPr>
+          <a:xfrm flipV="1">
+            <a:off x="4830834" y="2387939"/>
+            <a:ext cx="1664322" cy="472058"/>
+          </a:xfrm>
+          <a:prstGeom prst="straightConnector1">
+            <a:avLst/>
+          </a:prstGeom>
+          <a:ln w="28575">
+            <a:solidFill>
+              <a:srgbClr val="002060"/>
+            </a:solidFill>
+            <a:tailEnd type="triangle" w="lg" len="lg"/>
+          </a:ln>
+        </p:spPr>
+        <p:style>
+          <a:lnRef idx="1">
+            <a:schemeClr val="accent1"/>
+          </a:lnRef>
+          <a:fillRef idx="0">
+            <a:schemeClr val="accent1"/>
+          </a:fillRef>
+          <a:effectRef idx="0">
+            <a:schemeClr val="accent1"/>
+          </a:effectRef>
+          <a:fontRef idx="minor">
+            <a:schemeClr val="tx1"/>
+          </a:fontRef>
+        </p:style>
+      </p:cxnSp>
+      <p:sp>
+        <p:nvSpPr>
+          <p:cNvPr id="9" name="Oval 8">
+            <a:extLst>
+              <a:ext uri="{FF2B5EF4-FFF2-40B4-BE49-F238E27FC236}">
+                <a16:creationId xmlns:a16="http://schemas.microsoft.com/office/drawing/2014/main" id="{43AA850D-6D06-87EA-1DE5-1B5E3AB97541}"/>
+              </a:ext>
+            </a:extLst>
+          </p:cNvPr>
+          <p:cNvSpPr/>
+          <p:nvPr/>
+        </p:nvSpPr>
+        <p:spPr>
+          <a:xfrm>
+            <a:off x="4772999" y="2801658"/>
+            <a:ext cx="116681" cy="116681"/>
+          </a:xfrm>
+          <a:prstGeom prst="ellipse">
+            <a:avLst/>
+          </a:prstGeom>
+          <a:gradFill flip="none" rotWithShape="1">
+            <a:gsLst>
+              <a:gs pos="0">
+                <a:schemeClr val="accent1">
+                  <a:lumMod val="20000"/>
+                  <a:lumOff val="80000"/>
+                </a:schemeClr>
+              </a:gs>
+              <a:gs pos="54000">
+                <a:schemeClr val="accent5">
+                  <a:lumMod val="95000"/>
+                  <a:lumOff val="5000"/>
+                </a:schemeClr>
+              </a:gs>
+              <a:gs pos="100000">
+                <a:srgbClr val="080E1A"/>
+              </a:gs>
+            </a:gsLst>
+            <a:path path="circle">
+              <a:fillToRect r="100000" b="100000"/>
+            </a:path>
+            <a:tileRect l="-100000" t="-100000"/>
+          </a:gradFill>
+          <a:ln>
+            <a:noFill/>
+          </a:ln>
+        </p:spPr>
+        <p:style>
+          <a:lnRef idx="2">
+            <a:schemeClr val="accent1">
+              <a:shade val="15000"/>
+            </a:schemeClr>
+          </a:lnRef>
+          <a:fillRef idx="1">
+            <a:schemeClr val="accent1"/>
+          </a:fillRef>
+          <a:effectRef idx="0">
+            <a:schemeClr val="accent1"/>
+          </a:effectRef>
+          <a:fontRef idx="minor">
+            <a:schemeClr val="lt1"/>
+          </a:fontRef>
+        </p:style>
+        <p:txBody>
+          <a:bodyPr rtlCol="0" anchor="ctr"/>
+          <a:lstStyle/>
+          <a:p>
+            <a:pPr algn="ctr"/>
+            <a:endParaRPr lang="en-IN"/>
+          </a:p>
+        </p:txBody>
+      </p:sp>
+      <mc:AlternateContent xmlns:mc="http://schemas.openxmlformats.org/markup-compatibility/2006">
+        <mc:Choice xmlns:a14="http://schemas.microsoft.com/office/drawing/2010/main" Requires="a14">
+          <p:sp>
+            <p:nvSpPr>
+              <p:cNvPr id="22" name="TextBox 21">
+                <a:extLst>
+                  <a:ext uri="{FF2B5EF4-FFF2-40B4-BE49-F238E27FC236}">
+                    <a16:creationId xmlns:a16="http://schemas.microsoft.com/office/drawing/2014/main" id="{3716AA55-29C3-5C15-84F2-EAFFDB269856}"/>
+                  </a:ext>
+                </a:extLst>
+              </p:cNvPr>
+              <p:cNvSpPr txBox="1"/>
+              <p:nvPr/>
+            </p:nvSpPr>
+            <p:spPr>
+              <a:xfrm>
+                <a:off x="5338491" y="3111954"/>
+                <a:ext cx="448264" cy="307777"/>
+              </a:xfrm>
+              <a:prstGeom prst="rect">
+                <a:avLst/>
+              </a:prstGeom>
+              <a:noFill/>
+            </p:spPr>
+            <p:txBody>
+              <a:bodyPr wrap="none" lIns="0" tIns="0" rIns="0" bIns="0" rtlCol="0">
+                <a:spAutoFit/>
+              </a:bodyPr>
+              <a:lstStyle/>
+              <a:p>
+                <a:pPr/>
+                <a14:m>
+                  <m:oMathPara xmlns:m="http://schemas.openxmlformats.org/officeDocument/2006/math">
+                    <m:oMath>
+                      <m:sSub>
+                        <m:sSubPr>
+                          <m:ctrlPr>
+                            <a:rPr lang="en-US" sz="2000" b="1" i="1">
+                              <a:latin typeface="Cambria Math" panose="02040503050406030204" pitchFamily="18" charset="0"/>
+                            </a:rPr>
+                          </m:ctrlPr>
+                        </m:sSubPr>
+                        <m:e>
+                          <m:acc>
+                            <m:accPr>
+                              <m:chr m:val="̅"/>
+                              <m:ctrlPr>
+                                <a:rPr lang="en-US" sz="2000" b="1" i="1">
+                                  <a:latin typeface="Cambria Math" panose="02040503050406030204" pitchFamily="18" charset="0"/>
+                                </a:rPr>
+                              </m:ctrlPr>
+                            </m:accPr>
+                            <m:e>
+                              <m:r>
+                                <a:rPr lang="en-US" sz="2000" b="1" i="1">
+                                  <a:latin typeface="Cambria Math" panose="02040503050406030204" pitchFamily="18" charset="0"/>
+                                </a:rPr>
+                                <m:t>𝑭</m:t>
+                              </m:r>
+                            </m:e>
+                          </m:acc>
+                        </m:e>
+                        <m:sub>
+                          <m:r>
+                            <a:rPr lang="en-US" sz="2000" b="1" i="1" smtClean="0">
+                              <a:latin typeface="Cambria Math" panose="02040503050406030204" pitchFamily="18" charset="0"/>
+                            </a:rPr>
+                            <m:t>𝒏</m:t>
+                          </m:r>
+                          <m:r>
+                            <a:rPr lang="en-US" sz="2000" b="1" i="1" smtClean="0">
+                              <a:latin typeface="Cambria Math" panose="02040503050406030204" pitchFamily="18" charset="0"/>
+                            </a:rPr>
+                            <m:t>𝒄</m:t>
+                          </m:r>
+                        </m:sub>
+                      </m:sSub>
+                    </m:oMath>
+                  </m:oMathPara>
+                </a14:m>
+                <a:endParaRPr lang="en-US" sz="2000" dirty="0"/>
+              </a:p>
+            </p:txBody>
+          </p:sp>
+        </mc:Choice>
+        <mc:Fallback>
+          <p:sp>
+            <p:nvSpPr>
+              <p:cNvPr id="22" name="TextBox 21">
+                <a:extLst>
+                  <a:ext uri="{FF2B5EF4-FFF2-40B4-BE49-F238E27FC236}">
+                    <a16:creationId xmlns:a16="http://schemas.microsoft.com/office/drawing/2014/main" id="{3716AA55-29C3-5C15-84F2-EAFFDB269856}"/>
+                  </a:ext>
+                </a:extLst>
+              </p:cNvPr>
+              <p:cNvSpPr txBox="1">
+                <a:spLocks noRot="1" noChangeAspect="1" noMove="1" noResize="1" noEditPoints="1" noAdjustHandles="1" noChangeArrowheads="1" noChangeShapeType="1" noTextEdit="1"/>
+              </p:cNvSpPr>
+              <p:nvPr/>
+            </p:nvSpPr>
+            <p:spPr>
+              <a:xfrm>
+                <a:off x="5338491" y="3111954"/>
+                <a:ext cx="448264" cy="307777"/>
+              </a:xfrm>
+              <a:prstGeom prst="rect">
+                <a:avLst/>
+              </a:prstGeom>
+              <a:blipFill>
+                <a:blip r:embed="rId3"/>
+                <a:stretch>
+                  <a:fillRect l="-13699" r="-13699" b="-9804"/>
+                </a:stretch>
+              </a:blipFill>
+            </p:spPr>
+            <p:txBody>
+              <a:bodyPr/>
+              <a:lstStyle/>
+              <a:p>
+                <a:r>
+                  <a:rPr lang="en-IN">
+                    <a:noFill/>
+                  </a:rPr>
+                  <a:t> </a:t>
+                </a:r>
+              </a:p>
+            </p:txBody>
+          </p:sp>
+        </mc:Fallback>
+      </mc:AlternateContent>
+      <mc:AlternateContent xmlns:mc="http://schemas.openxmlformats.org/markup-compatibility/2006">
+        <mc:Choice xmlns:a14="http://schemas.microsoft.com/office/drawing/2010/main" Requires="a14">
+          <p:sp>
+            <p:nvSpPr>
+              <p:cNvPr id="24" name="TextBox 23">
+                <a:extLst>
+                  <a:ext uri="{FF2B5EF4-FFF2-40B4-BE49-F238E27FC236}">
+                    <a16:creationId xmlns:a16="http://schemas.microsoft.com/office/drawing/2014/main" id="{20DA2D82-3CBA-AF1F-AA91-5BEF1674DC93}"/>
+                  </a:ext>
+                </a:extLst>
+              </p:cNvPr>
+              <p:cNvSpPr txBox="1"/>
+              <p:nvPr/>
+            </p:nvSpPr>
+            <p:spPr>
+              <a:xfrm>
+                <a:off x="6337228" y="2014811"/>
+                <a:ext cx="534825" cy="307777"/>
+              </a:xfrm>
+              <a:prstGeom prst="rect">
+                <a:avLst/>
+              </a:prstGeom>
+              <a:noFill/>
+            </p:spPr>
+            <p:txBody>
+              <a:bodyPr wrap="none" lIns="0" tIns="0" rIns="0" bIns="0" rtlCol="0">
+                <a:spAutoFit/>
+              </a:bodyPr>
+              <a:lstStyle/>
+              <a:p>
+                <a:pPr/>
+                <a14:m>
+                  <m:oMathPara xmlns:m="http://schemas.openxmlformats.org/officeDocument/2006/math">
+                    <m:oMath>
+                      <m:sSub>
+                        <m:sSubPr>
+                          <m:ctrlPr>
+                            <a:rPr lang="en-US" sz="2000" b="1" i="1">
+                              <a:latin typeface="Cambria Math" panose="02040503050406030204" pitchFamily="18" charset="0"/>
+                            </a:rPr>
+                          </m:ctrlPr>
+                        </m:sSubPr>
+                        <m:e>
+                          <m:acc>
+                            <m:accPr>
+                              <m:chr m:val="̅"/>
+                              <m:ctrlPr>
+                                <a:rPr lang="en-US" sz="2000" b="1" i="1">
+                                  <a:latin typeface="Cambria Math" panose="02040503050406030204" pitchFamily="18" charset="0"/>
+                                </a:rPr>
+                              </m:ctrlPr>
+                            </m:accPr>
+                            <m:e>
+                              <m:r>
+                                <a:rPr lang="en-US" sz="2000" b="1" i="1">
+                                  <a:latin typeface="Cambria Math" panose="02040503050406030204" pitchFamily="18" charset="0"/>
+                                </a:rPr>
+                                <m:t>𝑭</m:t>
+                              </m:r>
+                            </m:e>
+                          </m:acc>
+                        </m:e>
+                        <m:sub>
+                          <m:r>
+                            <a:rPr lang="en-US" sz="2000" b="1" i="1" smtClean="0">
+                              <a:latin typeface="Cambria Math" panose="02040503050406030204" pitchFamily="18" charset="0"/>
+                            </a:rPr>
+                            <m:t>𝒏</m:t>
+                          </m:r>
+                          <m:r>
+                            <a:rPr lang="en-US" sz="2000" b="1" i="1" smtClean="0">
+                              <a:latin typeface="Cambria Math" panose="02040503050406030204" pitchFamily="18" charset="0"/>
+                            </a:rPr>
+                            <m:t>𝒆𝒕</m:t>
+                          </m:r>
+                        </m:sub>
+                      </m:sSub>
+                    </m:oMath>
+                  </m:oMathPara>
+                </a14:m>
+                <a:endParaRPr lang="en-US" sz="2000" dirty="0"/>
+              </a:p>
+            </p:txBody>
+          </p:sp>
+        </mc:Choice>
+        <mc:Fallback>
+          <p:sp>
+            <p:nvSpPr>
+              <p:cNvPr id="24" name="TextBox 23">
+                <a:extLst>
+                  <a:ext uri="{FF2B5EF4-FFF2-40B4-BE49-F238E27FC236}">
+                    <a16:creationId xmlns:a16="http://schemas.microsoft.com/office/drawing/2014/main" id="{20DA2D82-3CBA-AF1F-AA91-5BEF1674DC93}"/>
+                  </a:ext>
+                </a:extLst>
+              </p:cNvPr>
+              <p:cNvSpPr txBox="1">
+                <a:spLocks noRot="1" noChangeAspect="1" noMove="1" noResize="1" noEditPoints="1" noAdjustHandles="1" noChangeArrowheads="1" noChangeShapeType="1" noTextEdit="1"/>
+              </p:cNvSpPr>
+              <p:nvPr/>
+            </p:nvSpPr>
+            <p:spPr>
+              <a:xfrm>
+                <a:off x="6337228" y="2014811"/>
+                <a:ext cx="534825" cy="307777"/>
+              </a:xfrm>
+              <a:prstGeom prst="rect">
+                <a:avLst/>
+              </a:prstGeom>
+              <a:blipFill>
+                <a:blip r:embed="rId4"/>
+                <a:stretch>
+                  <a:fillRect l="-11494" t="-2000" r="-12644" b="-16000"/>
+                </a:stretch>
+              </a:blipFill>
+            </p:spPr>
+            <p:txBody>
+              <a:bodyPr/>
+              <a:lstStyle/>
+              <a:p>
+                <a:r>
+                  <a:rPr lang="en-IN">
+                    <a:noFill/>
+                  </a:rPr>
+                  <a:t> </a:t>
+                </a:r>
+              </a:p>
+            </p:txBody>
+          </p:sp>
+        </mc:Fallback>
+      </mc:AlternateContent>
+      <p:sp>
+        <p:nvSpPr>
+          <p:cNvPr id="26" name="Oval 25">
+            <a:extLst>
+              <a:ext uri="{FF2B5EF4-FFF2-40B4-BE49-F238E27FC236}">
+                <a16:creationId xmlns:a16="http://schemas.microsoft.com/office/drawing/2014/main" id="{B0D1422A-A14F-8F7A-9E20-C17113461357}"/>
+              </a:ext>
+            </a:extLst>
+          </p:cNvPr>
+          <p:cNvSpPr/>
+          <p:nvPr/>
+        </p:nvSpPr>
+        <p:spPr>
+          <a:xfrm>
+            <a:off x="3034528" y="3493193"/>
+            <a:ext cx="75141" cy="75141"/>
+          </a:xfrm>
+          <a:prstGeom prst="ellipse">
+            <a:avLst/>
+          </a:prstGeom>
+          <a:solidFill>
+            <a:schemeClr val="tx1"/>
+          </a:solidFill>
+          <a:ln>
+            <a:noFill/>
+          </a:ln>
+        </p:spPr>
+        <p:style>
+          <a:lnRef idx="2">
+            <a:schemeClr val="accent1">
+              <a:shade val="15000"/>
+            </a:schemeClr>
+          </a:lnRef>
+          <a:fillRef idx="1">
+            <a:schemeClr val="accent1"/>
+          </a:fillRef>
+          <a:effectRef idx="0">
+            <a:schemeClr val="accent1"/>
+          </a:effectRef>
+          <a:fontRef idx="minor">
+            <a:schemeClr val="lt1"/>
+          </a:fontRef>
+        </p:style>
+        <p:txBody>
+          <a:bodyPr rtlCol="0" anchor="ctr"/>
+          <a:lstStyle/>
+          <a:p>
+            <a:pPr algn="ctr"/>
+            <a:endParaRPr lang="en-IN"/>
+          </a:p>
+        </p:txBody>
+      </p:sp>
+      <mc:AlternateContent xmlns:mc="http://schemas.openxmlformats.org/markup-compatibility/2006">
+        <mc:Choice xmlns:a14="http://schemas.microsoft.com/office/drawing/2010/main" Requires="a14">
+          <p:sp>
+            <p:nvSpPr>
+              <p:cNvPr id="28" name="TextBox 27">
+                <a:extLst>
+                  <a:ext uri="{FF2B5EF4-FFF2-40B4-BE49-F238E27FC236}">
+                    <a16:creationId xmlns:a16="http://schemas.microsoft.com/office/drawing/2014/main" id="{AE9F1370-5ADF-55F0-18E1-3703FA1484AE}"/>
+                  </a:ext>
+                </a:extLst>
+              </p:cNvPr>
+              <p:cNvSpPr txBox="1"/>
+              <p:nvPr/>
+            </p:nvSpPr>
+            <p:spPr>
+              <a:xfrm>
+                <a:off x="2700849" y="3376874"/>
+                <a:ext cx="338234" cy="307777"/>
+              </a:xfrm>
+              <a:prstGeom prst="rect">
+                <a:avLst/>
+              </a:prstGeom>
+              <a:noFill/>
+            </p:spPr>
+            <p:txBody>
+              <a:bodyPr wrap="square" lIns="0" tIns="0" rIns="0" bIns="0" rtlCol="0">
+                <a:spAutoFit/>
+              </a:bodyPr>
+              <a:lstStyle/>
+              <a:p>
+                <a:pPr/>
+                <a14:m>
+                  <m:oMathPara xmlns:m="http://schemas.openxmlformats.org/officeDocument/2006/math">
+                    <m:oMath>
+                      <m:r>
+                        <a:rPr lang="en-US" sz="2000" b="0" i="1" smtClean="0">
+                          <a:latin typeface="Cambria Math" panose="02040503050406030204" pitchFamily="18" charset="0"/>
+                          <a:ea typeface="Cambria Math" panose="02040503050406030204" pitchFamily="18" charset="0"/>
+                        </a:rPr>
+                        <m:t>𝐴</m:t>
+                      </m:r>
+                    </m:oMath>
+                  </m:oMathPara>
+                </a14:m>
+                <a:endParaRPr lang="en-US" sz="2000" i="1" dirty="0"/>
+              </a:p>
+            </p:txBody>
+          </p:sp>
+        </mc:Choice>
+        <mc:Fallback>
+          <p:sp>
+            <p:nvSpPr>
+              <p:cNvPr id="28" name="TextBox 27">
+                <a:extLst>
+                  <a:ext uri="{FF2B5EF4-FFF2-40B4-BE49-F238E27FC236}">
+                    <a16:creationId xmlns:a16="http://schemas.microsoft.com/office/drawing/2014/main" id="{AE9F1370-5ADF-55F0-18E1-3703FA1484AE}"/>
+                  </a:ext>
+                </a:extLst>
+              </p:cNvPr>
+              <p:cNvSpPr txBox="1">
+                <a:spLocks noRot="1" noChangeAspect="1" noMove="1" noResize="1" noEditPoints="1" noAdjustHandles="1" noChangeArrowheads="1" noChangeShapeType="1" noTextEdit="1"/>
+              </p:cNvSpPr>
+              <p:nvPr/>
+            </p:nvSpPr>
+            <p:spPr>
+              <a:xfrm>
+                <a:off x="2700849" y="3376874"/>
+                <a:ext cx="338234" cy="307777"/>
+              </a:xfrm>
+              <a:prstGeom prst="rect">
+                <a:avLst/>
+              </a:prstGeom>
+              <a:blipFill>
+                <a:blip r:embed="rId5"/>
+                <a:stretch>
+                  <a:fillRect b="-6000"/>
+                </a:stretch>
+              </a:blipFill>
+            </p:spPr>
+            <p:txBody>
+              <a:bodyPr/>
+              <a:lstStyle/>
+              <a:p>
+                <a:r>
+                  <a:rPr lang="en-IN">
+                    <a:noFill/>
+                  </a:rPr>
+                  <a:t> </a:t>
+                </a:r>
+              </a:p>
+            </p:txBody>
+          </p:sp>
+        </mc:Fallback>
+      </mc:AlternateContent>
+      <p:sp>
+        <p:nvSpPr>
+          <p:cNvPr id="30" name="Oval 29">
+            <a:extLst>
+              <a:ext uri="{FF2B5EF4-FFF2-40B4-BE49-F238E27FC236}">
+                <a16:creationId xmlns:a16="http://schemas.microsoft.com/office/drawing/2014/main" id="{CB58E250-0B0E-189E-E456-923B6170FCF9}"/>
+              </a:ext>
+            </a:extLst>
+          </p:cNvPr>
+          <p:cNvSpPr/>
+          <p:nvPr/>
+        </p:nvSpPr>
+        <p:spPr>
+          <a:xfrm>
+            <a:off x="7376821" y="1885575"/>
+            <a:ext cx="75141" cy="75141"/>
+          </a:xfrm>
+          <a:prstGeom prst="ellipse">
+            <a:avLst/>
+          </a:prstGeom>
+          <a:solidFill>
+            <a:schemeClr val="tx1"/>
+          </a:solidFill>
+          <a:ln>
+            <a:noFill/>
+          </a:ln>
+        </p:spPr>
+        <p:style>
+          <a:lnRef idx="2">
+            <a:schemeClr val="accent1">
+              <a:shade val="15000"/>
+            </a:schemeClr>
+          </a:lnRef>
+          <a:fillRef idx="1">
+            <a:schemeClr val="accent1"/>
+          </a:fillRef>
+          <a:effectRef idx="0">
+            <a:schemeClr val="accent1"/>
+          </a:effectRef>
+          <a:fontRef idx="minor">
+            <a:schemeClr val="lt1"/>
+          </a:fontRef>
+        </p:style>
+        <p:txBody>
+          <a:bodyPr rtlCol="0" anchor="ctr"/>
+          <a:lstStyle/>
+          <a:p>
+            <a:pPr algn="ctr"/>
+            <a:endParaRPr lang="en-IN"/>
+          </a:p>
+        </p:txBody>
+      </p:sp>
+      <mc:AlternateContent xmlns:mc="http://schemas.openxmlformats.org/markup-compatibility/2006">
+        <mc:Choice xmlns:a14="http://schemas.microsoft.com/office/drawing/2010/main" Requires="a14">
+          <p:sp>
+            <p:nvSpPr>
+              <p:cNvPr id="32" name="TextBox 31">
+                <a:extLst>
+                  <a:ext uri="{FF2B5EF4-FFF2-40B4-BE49-F238E27FC236}">
+                    <a16:creationId xmlns:a16="http://schemas.microsoft.com/office/drawing/2014/main" id="{547DFFAD-2865-C81A-CA4F-7067E65EFC7D}"/>
+                  </a:ext>
+                </a:extLst>
+              </p:cNvPr>
+              <p:cNvSpPr txBox="1"/>
+              <p:nvPr/>
+            </p:nvSpPr>
+            <p:spPr>
+              <a:xfrm>
+                <a:off x="7459554" y="1731686"/>
+                <a:ext cx="338234" cy="307777"/>
+              </a:xfrm>
+              <a:prstGeom prst="rect">
+                <a:avLst/>
+              </a:prstGeom>
+              <a:noFill/>
+            </p:spPr>
+            <p:txBody>
+              <a:bodyPr wrap="square" lIns="0" tIns="0" rIns="0" bIns="0" rtlCol="0">
+                <a:spAutoFit/>
+              </a:bodyPr>
+              <a:lstStyle/>
+              <a:p>
+                <a:pPr/>
+                <a14:m>
+                  <m:oMathPara xmlns:m="http://schemas.openxmlformats.org/officeDocument/2006/math">
+                    <m:oMath>
+                      <m:r>
+                        <a:rPr lang="en-US" sz="2000" b="0" i="1" smtClean="0">
+                          <a:latin typeface="Cambria Math" panose="02040503050406030204" pitchFamily="18" charset="0"/>
+                          <a:ea typeface="Cambria Math" panose="02040503050406030204" pitchFamily="18" charset="0"/>
+                        </a:rPr>
+                        <m:t>𝐵</m:t>
+                      </m:r>
+                    </m:oMath>
+                  </m:oMathPara>
+                </a14:m>
+                <a:endParaRPr lang="en-US" sz="2000" i="1" dirty="0"/>
+              </a:p>
+            </p:txBody>
+          </p:sp>
+        </mc:Choice>
+        <mc:Fallback>
+          <p:sp>
+            <p:nvSpPr>
+              <p:cNvPr id="32" name="TextBox 31">
+                <a:extLst>
+                  <a:ext uri="{FF2B5EF4-FFF2-40B4-BE49-F238E27FC236}">
+                    <a16:creationId xmlns:a16="http://schemas.microsoft.com/office/drawing/2014/main" id="{547DFFAD-2865-C81A-CA4F-7067E65EFC7D}"/>
+                  </a:ext>
+                </a:extLst>
+              </p:cNvPr>
+              <p:cNvSpPr txBox="1">
+                <a:spLocks noRot="1" noChangeAspect="1" noMove="1" noResize="1" noEditPoints="1" noAdjustHandles="1" noChangeArrowheads="1" noChangeShapeType="1" noTextEdit="1"/>
+              </p:cNvSpPr>
+              <p:nvPr/>
+            </p:nvSpPr>
+            <p:spPr>
+              <a:xfrm>
+                <a:off x="7459554" y="1731686"/>
+                <a:ext cx="338234" cy="307777"/>
+              </a:xfrm>
+              <a:prstGeom prst="rect">
+                <a:avLst/>
+              </a:prstGeom>
+              <a:blipFill>
+                <a:blip r:embed="rId6"/>
+                <a:stretch>
+                  <a:fillRect l="-1818" r="-1818" b="-5882"/>
+                </a:stretch>
+              </a:blipFill>
+            </p:spPr>
+            <p:txBody>
+              <a:bodyPr/>
+              <a:lstStyle/>
+              <a:p>
+                <a:r>
+                  <a:rPr lang="en-IN">
+                    <a:noFill/>
+                  </a:rPr>
+                  <a:t> </a:t>
+                </a:r>
+              </a:p>
+            </p:txBody>
+          </p:sp>
+        </mc:Fallback>
+      </mc:AlternateContent>
+    </p:spTree>
+    <p:extLst>
+      <p:ext uri="{BB962C8B-B14F-4D97-AF65-F5344CB8AC3E}">
+        <p14:creationId xmlns:p14="http://schemas.microsoft.com/office/powerpoint/2010/main" val="1976470499"/>
       </p:ext>
     </p:extLst>
   </p:cSld>

--- a/U2-Work-and-Energy/figures/all-figs.pptx
+++ b/U2-Work-and-Energy/figures/all-figs.pptx
@@ -11,6 +11,9 @@
     <p:sldId id="259" r:id="rId5"/>
     <p:sldId id="260" r:id="rId6"/>
     <p:sldId id="261" r:id="rId7"/>
+    <p:sldId id="262" r:id="rId8"/>
+    <p:sldId id="263" r:id="rId9"/>
+    <p:sldId id="264" r:id="rId10"/>
   </p:sldIdLst>
   <p:sldSz cx="12192000" cy="6858000"/>
   <p:notesSz cx="6858000" cy="9144000"/>
@@ -246,7 +249,7 @@
           <a:p>
             <a:fld id="{ED22BB23-F442-40A7-A37A-0DE665FB7F05}" type="datetimeFigureOut">
               <a:rPr lang="en-US" smtClean="0"/>
-              <a:t>10/12/2026</a:t>
+              <a:t>10/19/2026</a:t>
             </a:fld>
             <a:endParaRPr lang="en-US"/>
           </a:p>
@@ -414,7 +417,7 @@
           <a:p>
             <a:fld id="{ED22BB23-F442-40A7-A37A-0DE665FB7F05}" type="datetimeFigureOut">
               <a:rPr lang="en-US" smtClean="0"/>
-              <a:t>10/12/2026</a:t>
+              <a:t>10/19/2026</a:t>
             </a:fld>
             <a:endParaRPr lang="en-US"/>
           </a:p>
@@ -592,7 +595,7 @@
           <a:p>
             <a:fld id="{ED22BB23-F442-40A7-A37A-0DE665FB7F05}" type="datetimeFigureOut">
               <a:rPr lang="en-US" smtClean="0"/>
-              <a:t>10/12/2026</a:t>
+              <a:t>10/19/2026</a:t>
             </a:fld>
             <a:endParaRPr lang="en-US"/>
           </a:p>
@@ -760,7 +763,7 @@
           <a:p>
             <a:fld id="{ED22BB23-F442-40A7-A37A-0DE665FB7F05}" type="datetimeFigureOut">
               <a:rPr lang="en-US" smtClean="0"/>
-              <a:t>10/12/2026</a:t>
+              <a:t>10/19/2026</a:t>
             </a:fld>
             <a:endParaRPr lang="en-US"/>
           </a:p>
@@ -1005,7 +1008,7 @@
           <a:p>
             <a:fld id="{ED22BB23-F442-40A7-A37A-0DE665FB7F05}" type="datetimeFigureOut">
               <a:rPr lang="en-US" smtClean="0"/>
-              <a:t>10/12/2026</a:t>
+              <a:t>10/19/2026</a:t>
             </a:fld>
             <a:endParaRPr lang="en-US"/>
           </a:p>
@@ -1234,7 +1237,7 @@
           <a:p>
             <a:fld id="{ED22BB23-F442-40A7-A37A-0DE665FB7F05}" type="datetimeFigureOut">
               <a:rPr lang="en-US" smtClean="0"/>
-              <a:t>10/12/2026</a:t>
+              <a:t>10/19/2026</a:t>
             </a:fld>
             <a:endParaRPr lang="en-US"/>
           </a:p>
@@ -1598,7 +1601,7 @@
           <a:p>
             <a:fld id="{ED22BB23-F442-40A7-A37A-0DE665FB7F05}" type="datetimeFigureOut">
               <a:rPr lang="en-US" smtClean="0"/>
-              <a:t>10/12/2026</a:t>
+              <a:t>10/19/2026</a:t>
             </a:fld>
             <a:endParaRPr lang="en-US"/>
           </a:p>
@@ -1715,7 +1718,7 @@
           <a:p>
             <a:fld id="{ED22BB23-F442-40A7-A37A-0DE665FB7F05}" type="datetimeFigureOut">
               <a:rPr lang="en-US" smtClean="0"/>
-              <a:t>10/12/2026</a:t>
+              <a:t>10/19/2026</a:t>
             </a:fld>
             <a:endParaRPr lang="en-US"/>
           </a:p>
@@ -1810,7 +1813,7 @@
           <a:p>
             <a:fld id="{ED22BB23-F442-40A7-A37A-0DE665FB7F05}" type="datetimeFigureOut">
               <a:rPr lang="en-US" smtClean="0"/>
-              <a:t>10/12/2026</a:t>
+              <a:t>10/19/2026</a:t>
             </a:fld>
             <a:endParaRPr lang="en-US"/>
           </a:p>
@@ -2085,7 +2088,7 @@
           <a:p>
             <a:fld id="{ED22BB23-F442-40A7-A37A-0DE665FB7F05}" type="datetimeFigureOut">
               <a:rPr lang="en-US" smtClean="0"/>
-              <a:t>10/12/2026</a:t>
+              <a:t>10/19/2026</a:t>
             </a:fld>
             <a:endParaRPr lang="en-US"/>
           </a:p>
@@ -2337,7 +2340,7 @@
           <a:p>
             <a:fld id="{ED22BB23-F442-40A7-A37A-0DE665FB7F05}" type="datetimeFigureOut">
               <a:rPr lang="en-US" smtClean="0"/>
-              <a:t>10/12/2026</a:t>
+              <a:t>10/19/2026</a:t>
             </a:fld>
             <a:endParaRPr lang="en-US"/>
           </a:p>
@@ -2548,7 +2551,7 @@
           <a:p>
             <a:fld id="{ED22BB23-F442-40A7-A37A-0DE665FB7F05}" type="datetimeFigureOut">
               <a:rPr lang="en-US" smtClean="0"/>
-              <a:t>10/12/2026</a:t>
+              <a:t>10/19/2026</a:t>
             </a:fld>
             <a:endParaRPr lang="en-US"/>
           </a:p>
@@ -10524,8 +10527,8 @@
           </a:fontRef>
         </p:style>
       </p:cxnSp>
-      <mc:AlternateContent xmlns:mc="http://schemas.openxmlformats.org/markup-compatibility/2006">
-        <mc:Choice xmlns:a14="http://schemas.microsoft.com/office/drawing/2010/main" Requires="a14">
+      <mc:AlternateContent xmlns:mc="http://schemas.openxmlformats.org/markup-compatibility/2006" xmlns:a14="http://schemas.microsoft.com/office/drawing/2010/main">
+        <mc:Choice Requires="a14">
           <p:sp>
             <p:nvSpPr>
               <p:cNvPr id="11" name="TextBox 10">
@@ -10603,7 +10606,7 @@
             </p:txBody>
           </p:sp>
         </mc:Choice>
-        <mc:Fallback>
+        <mc:Fallback xmlns="">
           <p:sp>
             <p:nvSpPr>
               <p:cNvPr id="11" name="TextBox 10">
@@ -10902,8 +10905,8 @@
           </a:p>
         </p:txBody>
       </p:sp>
-      <mc:AlternateContent xmlns:mc="http://schemas.openxmlformats.org/markup-compatibility/2006">
-        <mc:Choice xmlns:a14="http://schemas.microsoft.com/office/drawing/2010/main" Requires="a14">
+      <mc:AlternateContent xmlns:mc="http://schemas.openxmlformats.org/markup-compatibility/2006" xmlns:a14="http://schemas.microsoft.com/office/drawing/2010/main">
+        <mc:Choice Requires="a14">
           <p:sp>
             <p:nvSpPr>
               <p:cNvPr id="22" name="TextBox 21">
@@ -10969,13 +10972,7 @@
                             <a:rPr lang="en-US" sz="2000" b="1" i="1" smtClean="0">
                               <a:latin typeface="Cambria Math" panose="02040503050406030204" pitchFamily="18" charset="0"/>
                             </a:rPr>
-                            <m:t>𝒏</m:t>
-                          </m:r>
-                          <m:r>
-                            <a:rPr lang="en-US" sz="2000" b="1" i="1" smtClean="0">
-                              <a:latin typeface="Cambria Math" panose="02040503050406030204" pitchFamily="18" charset="0"/>
-                            </a:rPr>
-                            <m:t>𝒄</m:t>
+                            <m:t>𝒏𝒄</m:t>
                           </m:r>
                         </m:sub>
                       </m:sSub>
@@ -10987,7 +10984,7 @@
             </p:txBody>
           </p:sp>
         </mc:Choice>
-        <mc:Fallback>
+        <mc:Fallback xmlns="">
           <p:sp>
             <p:nvSpPr>
               <p:cNvPr id="22" name="TextBox 21">
@@ -11032,8 +11029,8 @@
           </p:sp>
         </mc:Fallback>
       </mc:AlternateContent>
-      <mc:AlternateContent xmlns:mc="http://schemas.openxmlformats.org/markup-compatibility/2006">
-        <mc:Choice xmlns:a14="http://schemas.microsoft.com/office/drawing/2010/main" Requires="a14">
+      <mc:AlternateContent xmlns:mc="http://schemas.openxmlformats.org/markup-compatibility/2006" xmlns:a14="http://schemas.microsoft.com/office/drawing/2010/main">
+        <mc:Choice Requires="a14">
           <p:sp>
             <p:nvSpPr>
               <p:cNvPr id="24" name="TextBox 23">
@@ -11099,13 +11096,7 @@
                             <a:rPr lang="en-US" sz="2000" b="1" i="1" smtClean="0">
                               <a:latin typeface="Cambria Math" panose="02040503050406030204" pitchFamily="18" charset="0"/>
                             </a:rPr>
-                            <m:t>𝒏</m:t>
-                          </m:r>
-                          <m:r>
-                            <a:rPr lang="en-US" sz="2000" b="1" i="1" smtClean="0">
-                              <a:latin typeface="Cambria Math" panose="02040503050406030204" pitchFamily="18" charset="0"/>
-                            </a:rPr>
-                            <m:t>𝒆𝒕</m:t>
+                            <m:t>𝒏𝒆𝒕</m:t>
                           </m:r>
                         </m:sub>
                       </m:sSub>
@@ -11117,7 +11108,7 @@
             </p:txBody>
           </p:sp>
         </mc:Choice>
-        <mc:Fallback>
+        <mc:Fallback xmlns="">
           <p:sp>
             <p:nvSpPr>
               <p:cNvPr id="24" name="TextBox 23">
@@ -11214,8 +11205,8 @@
           </a:p>
         </p:txBody>
       </p:sp>
-      <mc:AlternateContent xmlns:mc="http://schemas.openxmlformats.org/markup-compatibility/2006">
-        <mc:Choice xmlns:a14="http://schemas.microsoft.com/office/drawing/2010/main" Requires="a14">
+      <mc:AlternateContent xmlns:mc="http://schemas.openxmlformats.org/markup-compatibility/2006" xmlns:a14="http://schemas.microsoft.com/office/drawing/2010/main">
+        <mc:Choice Requires="a14">
           <p:sp>
             <p:nvSpPr>
               <p:cNvPr id="28" name="TextBox 27">
@@ -11263,7 +11254,7 @@
             </p:txBody>
           </p:sp>
         </mc:Choice>
-        <mc:Fallback>
+        <mc:Fallback xmlns="">
           <p:sp>
             <p:nvSpPr>
               <p:cNvPr id="28" name="TextBox 27">
@@ -11360,8 +11351,8 @@
           </a:p>
         </p:txBody>
       </p:sp>
-      <mc:AlternateContent xmlns:mc="http://schemas.openxmlformats.org/markup-compatibility/2006">
-        <mc:Choice xmlns:a14="http://schemas.microsoft.com/office/drawing/2010/main" Requires="a14">
+      <mc:AlternateContent xmlns:mc="http://schemas.openxmlformats.org/markup-compatibility/2006" xmlns:a14="http://schemas.microsoft.com/office/drawing/2010/main">
+        <mc:Choice Requires="a14">
           <p:sp>
             <p:nvSpPr>
               <p:cNvPr id="32" name="TextBox 31">
@@ -11409,7 +11400,7 @@
             </p:txBody>
           </p:sp>
         </mc:Choice>
-        <mc:Fallback>
+        <mc:Fallback xmlns="">
           <p:sp>
             <p:nvSpPr>
               <p:cNvPr id="32" name="TextBox 31">
@@ -11458,6 +11449,2853 @@
     <p:extLst>
       <p:ext uri="{BB962C8B-B14F-4D97-AF65-F5344CB8AC3E}">
         <p14:creationId xmlns:p14="http://schemas.microsoft.com/office/powerpoint/2010/main" val="1976470499"/>
+      </p:ext>
+    </p:extLst>
+  </p:cSld>
+  <p:clrMapOvr>
+    <a:masterClrMapping/>
+  </p:clrMapOvr>
+</p:sld>
+</file>
+
+<file path=ppt/slides/slide7.xml><?xml version="1.0" encoding="utf-8"?>
+<p:sld xmlns:a="http://schemas.openxmlformats.org/drawingml/2006/main" xmlns:r="http://schemas.openxmlformats.org/officeDocument/2006/relationships" xmlns:p="http://schemas.openxmlformats.org/presentationml/2006/main">
+  <p:cSld>
+    <p:spTree>
+      <p:nvGrpSpPr>
+        <p:cNvPr id="1" name=""/>
+        <p:cNvGrpSpPr/>
+        <p:nvPr/>
+      </p:nvGrpSpPr>
+      <p:grpSpPr>
+        <a:xfrm>
+          <a:off x="0" y="0"/>
+          <a:ext cx="0" cy="0"/>
+          <a:chOff x="0" y="0"/>
+          <a:chExt cx="0" cy="0"/>
+        </a:xfrm>
+      </p:grpSpPr>
+      <p:cxnSp>
+        <p:nvCxnSpPr>
+          <p:cNvPr id="3" name="Straight Connector 2">
+            <a:extLst>
+              <a:ext uri="{FF2B5EF4-FFF2-40B4-BE49-F238E27FC236}">
+                <a16:creationId xmlns:a16="http://schemas.microsoft.com/office/drawing/2014/main" id="{32B4E182-D56C-5F2B-89C1-19D59457CD5D}"/>
+              </a:ext>
+            </a:extLst>
+          </p:cNvPr>
+          <p:cNvCxnSpPr>
+            <a:cxnSpLocks/>
+          </p:cNvCxnSpPr>
+          <p:nvPr/>
+        </p:nvCxnSpPr>
+        <p:spPr>
+          <a:xfrm>
+            <a:off x="3861122" y="4011592"/>
+            <a:ext cx="2432998" cy="0"/>
+          </a:xfrm>
+          <a:prstGeom prst="line">
+            <a:avLst/>
+          </a:prstGeom>
+          <a:ln w="28575" cap="rnd">
+            <a:solidFill>
+              <a:srgbClr val="002060"/>
+            </a:solidFill>
+            <a:round/>
+          </a:ln>
+        </p:spPr>
+        <p:style>
+          <a:lnRef idx="1">
+            <a:schemeClr val="accent1"/>
+          </a:lnRef>
+          <a:fillRef idx="0">
+            <a:schemeClr val="accent1"/>
+          </a:fillRef>
+          <a:effectRef idx="0">
+            <a:schemeClr val="accent1"/>
+          </a:effectRef>
+          <a:fontRef idx="minor">
+            <a:schemeClr val="tx1"/>
+          </a:fontRef>
+        </p:style>
+      </p:cxnSp>
+      <p:cxnSp>
+        <p:nvCxnSpPr>
+          <p:cNvPr id="5" name="Straight Connector 4">
+            <a:extLst>
+              <a:ext uri="{FF2B5EF4-FFF2-40B4-BE49-F238E27FC236}">
+                <a16:creationId xmlns:a16="http://schemas.microsoft.com/office/drawing/2014/main" id="{A19D9CD6-F36F-30FB-5B24-AFBCBDCD5837}"/>
+              </a:ext>
+            </a:extLst>
+          </p:cNvPr>
+          <p:cNvCxnSpPr>
+            <a:cxnSpLocks/>
+          </p:cNvCxnSpPr>
+          <p:nvPr/>
+        </p:nvCxnSpPr>
+        <p:spPr>
+          <a:xfrm flipV="1">
+            <a:off x="3861122" y="1242060"/>
+            <a:ext cx="0" cy="2769532"/>
+          </a:xfrm>
+          <a:prstGeom prst="line">
+            <a:avLst/>
+          </a:prstGeom>
+          <a:ln w="28575" cap="rnd">
+            <a:solidFill>
+              <a:srgbClr val="002060"/>
+            </a:solidFill>
+            <a:round/>
+          </a:ln>
+        </p:spPr>
+        <p:style>
+          <a:lnRef idx="1">
+            <a:schemeClr val="accent1"/>
+          </a:lnRef>
+          <a:fillRef idx="0">
+            <a:schemeClr val="accent1"/>
+          </a:fillRef>
+          <a:effectRef idx="0">
+            <a:schemeClr val="accent1"/>
+          </a:effectRef>
+          <a:fontRef idx="minor">
+            <a:schemeClr val="tx1"/>
+          </a:fontRef>
+        </p:style>
+      </p:cxnSp>
+      <p:cxnSp>
+        <p:nvCxnSpPr>
+          <p:cNvPr id="8" name="Straight Connector 7">
+            <a:extLst>
+              <a:ext uri="{FF2B5EF4-FFF2-40B4-BE49-F238E27FC236}">
+                <a16:creationId xmlns:a16="http://schemas.microsoft.com/office/drawing/2014/main" id="{4FCC4224-1AA5-0631-65E2-8EEE7A5EF200}"/>
+              </a:ext>
+            </a:extLst>
+          </p:cNvPr>
+          <p:cNvCxnSpPr>
+            <a:cxnSpLocks/>
+          </p:cNvCxnSpPr>
+          <p:nvPr/>
+        </p:nvCxnSpPr>
+        <p:spPr>
+          <a:xfrm flipH="1">
+            <a:off x="2369820" y="4011592"/>
+            <a:ext cx="1491302" cy="853308"/>
+          </a:xfrm>
+          <a:prstGeom prst="line">
+            <a:avLst/>
+          </a:prstGeom>
+          <a:ln w="28575" cap="rnd">
+            <a:solidFill>
+              <a:srgbClr val="002060"/>
+            </a:solidFill>
+            <a:round/>
+          </a:ln>
+        </p:spPr>
+        <p:style>
+          <a:lnRef idx="1">
+            <a:schemeClr val="accent1"/>
+          </a:lnRef>
+          <a:fillRef idx="0">
+            <a:schemeClr val="accent1"/>
+          </a:fillRef>
+          <a:effectRef idx="0">
+            <a:schemeClr val="accent1"/>
+          </a:effectRef>
+          <a:fontRef idx="minor">
+            <a:schemeClr val="tx1"/>
+          </a:fontRef>
+        </p:style>
+      </p:cxnSp>
+      <p:cxnSp>
+        <p:nvCxnSpPr>
+          <p:cNvPr id="10" name="Straight Arrow Connector 9">
+            <a:extLst>
+              <a:ext uri="{FF2B5EF4-FFF2-40B4-BE49-F238E27FC236}">
+                <a16:creationId xmlns:a16="http://schemas.microsoft.com/office/drawing/2014/main" id="{9715D380-545D-E9E8-B52D-C5F7086B872E}"/>
+              </a:ext>
+            </a:extLst>
+          </p:cNvPr>
+          <p:cNvCxnSpPr>
+            <a:cxnSpLocks/>
+          </p:cNvCxnSpPr>
+          <p:nvPr/>
+        </p:nvCxnSpPr>
+        <p:spPr>
+          <a:xfrm flipV="1">
+            <a:off x="3861121" y="2176041"/>
+            <a:ext cx="1220165" cy="1835551"/>
+          </a:xfrm>
+          <a:prstGeom prst="straightConnector1">
+            <a:avLst/>
+          </a:prstGeom>
+          <a:ln w="19050">
+            <a:solidFill>
+              <a:schemeClr val="tx1"/>
+            </a:solidFill>
+            <a:tailEnd type="triangle" w="lg" len="lg"/>
+          </a:ln>
+        </p:spPr>
+        <p:style>
+          <a:lnRef idx="1">
+            <a:schemeClr val="accent1"/>
+          </a:lnRef>
+          <a:fillRef idx="0">
+            <a:schemeClr val="accent1"/>
+          </a:fillRef>
+          <a:effectRef idx="0">
+            <a:schemeClr val="accent1"/>
+          </a:effectRef>
+          <a:fontRef idx="minor">
+            <a:schemeClr val="tx1"/>
+          </a:fontRef>
+        </p:style>
+      </p:cxnSp>
+      <p:sp>
+        <p:nvSpPr>
+          <p:cNvPr id="15" name="Oval 14">
+            <a:extLst>
+              <a:ext uri="{FF2B5EF4-FFF2-40B4-BE49-F238E27FC236}">
+                <a16:creationId xmlns:a16="http://schemas.microsoft.com/office/drawing/2014/main" id="{B76A9C74-4429-92E8-8CE1-06D7AB2CB330}"/>
+              </a:ext>
+            </a:extLst>
+          </p:cNvPr>
+          <p:cNvSpPr/>
+          <p:nvPr/>
+        </p:nvSpPr>
+        <p:spPr>
+          <a:xfrm>
+            <a:off x="5038122" y="2004290"/>
+            <a:ext cx="193486" cy="193486"/>
+          </a:xfrm>
+          <a:prstGeom prst="ellipse">
+            <a:avLst/>
+          </a:prstGeom>
+          <a:gradFill flip="none" rotWithShape="1">
+            <a:gsLst>
+              <a:gs pos="0">
+                <a:schemeClr val="accent1">
+                  <a:lumMod val="20000"/>
+                  <a:lumOff val="80000"/>
+                </a:schemeClr>
+              </a:gs>
+              <a:gs pos="54000">
+                <a:schemeClr val="accent5">
+                  <a:lumMod val="95000"/>
+                  <a:lumOff val="5000"/>
+                </a:schemeClr>
+              </a:gs>
+              <a:gs pos="100000">
+                <a:srgbClr val="080E1A"/>
+              </a:gs>
+            </a:gsLst>
+            <a:path path="circle">
+              <a:fillToRect r="100000" b="100000"/>
+            </a:path>
+            <a:tileRect l="-100000" t="-100000"/>
+          </a:gradFill>
+          <a:ln>
+            <a:noFill/>
+          </a:ln>
+        </p:spPr>
+        <p:style>
+          <a:lnRef idx="2">
+            <a:schemeClr val="accent1">
+              <a:shade val="15000"/>
+            </a:schemeClr>
+          </a:lnRef>
+          <a:fillRef idx="1">
+            <a:schemeClr val="accent1"/>
+          </a:fillRef>
+          <a:effectRef idx="0">
+            <a:schemeClr val="accent1"/>
+          </a:effectRef>
+          <a:fontRef idx="minor">
+            <a:schemeClr val="lt1"/>
+          </a:fontRef>
+        </p:style>
+        <p:txBody>
+          <a:bodyPr rtlCol="0" anchor="ctr"/>
+          <a:lstStyle/>
+          <a:p>
+            <a:pPr algn="ctr"/>
+            <a:endParaRPr lang="en-IN"/>
+          </a:p>
+        </p:txBody>
+      </p:sp>
+      <p:cxnSp>
+        <p:nvCxnSpPr>
+          <p:cNvPr id="16" name="Straight Arrow Connector 15">
+            <a:extLst>
+              <a:ext uri="{FF2B5EF4-FFF2-40B4-BE49-F238E27FC236}">
+                <a16:creationId xmlns:a16="http://schemas.microsoft.com/office/drawing/2014/main" id="{1241D12D-B8C4-793B-EBF8-D2245A9C5A58}"/>
+              </a:ext>
+            </a:extLst>
+          </p:cNvPr>
+          <p:cNvCxnSpPr>
+            <a:cxnSpLocks/>
+          </p:cNvCxnSpPr>
+          <p:nvPr/>
+        </p:nvCxnSpPr>
+        <p:spPr>
+          <a:xfrm flipV="1">
+            <a:off x="4579533" y="2251910"/>
+            <a:ext cx="627875" cy="944542"/>
+          </a:xfrm>
+          <a:prstGeom prst="straightConnector1">
+            <a:avLst/>
+          </a:prstGeom>
+          <a:ln w="28575" cap="rnd">
+            <a:solidFill>
+              <a:srgbClr val="003A00"/>
+            </a:solidFill>
+            <a:round/>
+            <a:headEnd type="triangle" w="lg" len="lg"/>
+            <a:tailEnd type="none" w="lg" len="lg"/>
+          </a:ln>
+        </p:spPr>
+        <p:style>
+          <a:lnRef idx="1">
+            <a:schemeClr val="accent1"/>
+          </a:lnRef>
+          <a:fillRef idx="0">
+            <a:schemeClr val="accent1"/>
+          </a:fillRef>
+          <a:effectRef idx="0">
+            <a:schemeClr val="accent1"/>
+          </a:effectRef>
+          <a:fontRef idx="minor">
+            <a:schemeClr val="tx1"/>
+          </a:fontRef>
+        </p:style>
+      </p:cxnSp>
+      <mc:AlternateContent xmlns:mc="http://schemas.openxmlformats.org/markup-compatibility/2006">
+        <mc:Choice xmlns:a14="http://schemas.microsoft.com/office/drawing/2010/main" Requires="a14">
+          <p:sp>
+            <p:nvSpPr>
+              <p:cNvPr id="19" name="TextBox 18">
+                <a:extLst>
+                  <a:ext uri="{FF2B5EF4-FFF2-40B4-BE49-F238E27FC236}">
+                    <a16:creationId xmlns:a16="http://schemas.microsoft.com/office/drawing/2014/main" id="{C0B94833-0E08-AA6D-6892-E178F4BD17EC}"/>
+                  </a:ext>
+                </a:extLst>
+              </p:cNvPr>
+              <p:cNvSpPr txBox="1"/>
+              <p:nvPr/>
+            </p:nvSpPr>
+            <p:spPr>
+              <a:xfrm>
+                <a:off x="3692006" y="4054854"/>
+                <a:ext cx="338234" cy="307777"/>
+              </a:xfrm>
+              <a:prstGeom prst="rect">
+                <a:avLst/>
+              </a:prstGeom>
+              <a:noFill/>
+            </p:spPr>
+            <p:txBody>
+              <a:bodyPr wrap="square" lIns="0" tIns="0" rIns="0" bIns="0" rtlCol="0">
+                <a:spAutoFit/>
+              </a:bodyPr>
+              <a:lstStyle/>
+              <a:p>
+                <a:pPr/>
+                <a14:m>
+                  <m:oMathPara xmlns:m="http://schemas.openxmlformats.org/officeDocument/2006/math">
+                    <m:oMath>
+                      <m:r>
+                        <a:rPr lang="en-US" sz="2000" b="0" i="1" smtClean="0">
+                          <a:latin typeface="Cambria Math" panose="02040503050406030204" pitchFamily="18" charset="0"/>
+                          <a:ea typeface="Cambria Math" panose="02040503050406030204" pitchFamily="18" charset="0"/>
+                        </a:rPr>
+                        <m:t>𝑂</m:t>
+                      </m:r>
+                    </m:oMath>
+                  </m:oMathPara>
+                </a14:m>
+                <a:endParaRPr lang="en-US" sz="2000" i="1" dirty="0"/>
+              </a:p>
+            </p:txBody>
+          </p:sp>
+        </mc:Choice>
+        <mc:Fallback>
+          <p:sp>
+            <p:nvSpPr>
+              <p:cNvPr id="19" name="TextBox 18">
+                <a:extLst>
+                  <a:ext uri="{FF2B5EF4-FFF2-40B4-BE49-F238E27FC236}">
+                    <a16:creationId xmlns:a16="http://schemas.microsoft.com/office/drawing/2014/main" id="{C0B94833-0E08-AA6D-6892-E178F4BD17EC}"/>
+                  </a:ext>
+                </a:extLst>
+              </p:cNvPr>
+              <p:cNvSpPr txBox="1">
+                <a:spLocks noRot="1" noChangeAspect="1" noMove="1" noResize="1" noEditPoints="1" noAdjustHandles="1" noChangeArrowheads="1" noChangeShapeType="1" noTextEdit="1"/>
+              </p:cNvSpPr>
+              <p:nvPr/>
+            </p:nvSpPr>
+            <p:spPr>
+              <a:xfrm>
+                <a:off x="3692006" y="4054854"/>
+                <a:ext cx="338234" cy="307777"/>
+              </a:xfrm>
+              <a:prstGeom prst="rect">
+                <a:avLst/>
+              </a:prstGeom>
+              <a:blipFill>
+                <a:blip r:embed="rId2"/>
+                <a:stretch>
+                  <a:fillRect l="-3636" b="-5882"/>
+                </a:stretch>
+              </a:blipFill>
+            </p:spPr>
+            <p:txBody>
+              <a:bodyPr/>
+              <a:lstStyle/>
+              <a:p>
+                <a:r>
+                  <a:rPr lang="en-IN">
+                    <a:noFill/>
+                  </a:rPr>
+                  <a:t> </a:t>
+                </a:r>
+              </a:p>
+            </p:txBody>
+          </p:sp>
+        </mc:Fallback>
+      </mc:AlternateContent>
+      <mc:AlternateContent xmlns:mc="http://schemas.openxmlformats.org/markup-compatibility/2006">
+        <mc:Choice xmlns:a14="http://schemas.microsoft.com/office/drawing/2010/main" Requires="a14">
+          <p:sp>
+            <p:nvSpPr>
+              <p:cNvPr id="21" name="TextBox 20">
+                <a:extLst>
+                  <a:ext uri="{FF2B5EF4-FFF2-40B4-BE49-F238E27FC236}">
+                    <a16:creationId xmlns:a16="http://schemas.microsoft.com/office/drawing/2014/main" id="{4F8EBBCE-8B9D-B4D4-C952-FFFD199FFC7E}"/>
+                  </a:ext>
+                </a:extLst>
+              </p:cNvPr>
+              <p:cNvSpPr txBox="1"/>
+              <p:nvPr/>
+            </p:nvSpPr>
+            <p:spPr>
+              <a:xfrm>
+                <a:off x="4331428" y="2692519"/>
+                <a:ext cx="195566" cy="307777"/>
+              </a:xfrm>
+              <a:prstGeom prst="rect">
+                <a:avLst/>
+              </a:prstGeom>
+              <a:noFill/>
+            </p:spPr>
+            <p:txBody>
+              <a:bodyPr wrap="none" lIns="0" tIns="0" rIns="0" bIns="0" rtlCol="0">
+                <a:spAutoFit/>
+              </a:bodyPr>
+              <a:lstStyle/>
+              <a:p>
+                <a:pPr/>
+                <a14:m>
+                  <m:oMathPara xmlns:m="http://schemas.openxmlformats.org/officeDocument/2006/math">
+                    <m:oMath>
+                      <m:acc>
+                        <m:accPr>
+                          <m:chr m:val="̅"/>
+                          <m:ctrlPr>
+                            <a:rPr lang="en-US" sz="2000" b="1" i="1" smtClean="0">
+                              <a:latin typeface="Cambria Math" panose="02040503050406030204" pitchFamily="18" charset="0"/>
+                            </a:rPr>
+                          </m:ctrlPr>
+                        </m:accPr>
+                        <m:e>
+                          <m:r>
+                            <a:rPr lang="en-US" sz="2000" b="1" i="1" smtClean="0">
+                              <a:latin typeface="Cambria Math" panose="02040503050406030204" pitchFamily="18" charset="0"/>
+                            </a:rPr>
+                            <m:t>𝒓</m:t>
+                          </m:r>
+                        </m:e>
+                      </m:acc>
+                    </m:oMath>
+                  </m:oMathPara>
+                </a14:m>
+                <a:endParaRPr lang="en-US" sz="2000" dirty="0"/>
+              </a:p>
+            </p:txBody>
+          </p:sp>
+        </mc:Choice>
+        <mc:Fallback>
+          <p:sp>
+            <p:nvSpPr>
+              <p:cNvPr id="21" name="TextBox 20">
+                <a:extLst>
+                  <a:ext uri="{FF2B5EF4-FFF2-40B4-BE49-F238E27FC236}">
+                    <a16:creationId xmlns:a16="http://schemas.microsoft.com/office/drawing/2014/main" id="{4F8EBBCE-8B9D-B4D4-C952-FFFD199FFC7E}"/>
+                  </a:ext>
+                </a:extLst>
+              </p:cNvPr>
+              <p:cNvSpPr txBox="1">
+                <a:spLocks noRot="1" noChangeAspect="1" noMove="1" noResize="1" noEditPoints="1" noAdjustHandles="1" noChangeArrowheads="1" noChangeShapeType="1" noTextEdit="1"/>
+              </p:cNvSpPr>
+              <p:nvPr/>
+            </p:nvSpPr>
+            <p:spPr>
+              <a:xfrm>
+                <a:off x="4331428" y="2692519"/>
+                <a:ext cx="195566" cy="307777"/>
+              </a:xfrm>
+              <a:prstGeom prst="rect">
+                <a:avLst/>
+              </a:prstGeom>
+              <a:blipFill>
+                <a:blip r:embed="rId3"/>
+                <a:stretch>
+                  <a:fillRect l="-18750" r="-34375"/>
+                </a:stretch>
+              </a:blipFill>
+            </p:spPr>
+            <p:txBody>
+              <a:bodyPr/>
+              <a:lstStyle/>
+              <a:p>
+                <a:r>
+                  <a:rPr lang="en-IN">
+                    <a:noFill/>
+                  </a:rPr>
+                  <a:t> </a:t>
+                </a:r>
+              </a:p>
+            </p:txBody>
+          </p:sp>
+        </mc:Fallback>
+      </mc:AlternateContent>
+      <mc:AlternateContent xmlns:mc="http://schemas.openxmlformats.org/markup-compatibility/2006">
+        <mc:Choice xmlns:a14="http://schemas.microsoft.com/office/drawing/2010/main" Requires="a14">
+          <p:sp>
+            <p:nvSpPr>
+              <p:cNvPr id="23" name="TextBox 22">
+                <a:extLst>
+                  <a:ext uri="{FF2B5EF4-FFF2-40B4-BE49-F238E27FC236}">
+                    <a16:creationId xmlns:a16="http://schemas.microsoft.com/office/drawing/2014/main" id="{238D0B1A-D815-FF38-B4D6-5709F7B1DE1B}"/>
+                  </a:ext>
+                </a:extLst>
+              </p:cNvPr>
+              <p:cNvSpPr txBox="1"/>
+              <p:nvPr/>
+            </p:nvSpPr>
+            <p:spPr>
+              <a:xfrm>
+                <a:off x="4956091" y="2705139"/>
+                <a:ext cx="221214" cy="307777"/>
+              </a:xfrm>
+              <a:prstGeom prst="rect">
+                <a:avLst/>
+              </a:prstGeom>
+              <a:noFill/>
+            </p:spPr>
+            <p:txBody>
+              <a:bodyPr wrap="none" lIns="0" tIns="0" rIns="0" bIns="0" rtlCol="0">
+                <a:spAutoFit/>
+              </a:bodyPr>
+              <a:lstStyle/>
+              <a:p>
+                <a:pPr/>
+                <a14:m>
+                  <m:oMathPara xmlns:m="http://schemas.openxmlformats.org/officeDocument/2006/math">
+                    <m:oMath>
+                      <m:acc>
+                        <m:accPr>
+                          <m:chr m:val="̅"/>
+                          <m:ctrlPr>
+                            <a:rPr lang="en-US" sz="2000" b="1" i="1" smtClean="0">
+                              <a:latin typeface="Cambria Math" panose="02040503050406030204" pitchFamily="18" charset="0"/>
+                            </a:rPr>
+                          </m:ctrlPr>
+                        </m:accPr>
+                        <m:e>
+                          <m:r>
+                            <a:rPr lang="en-US" sz="2000" b="1" i="1" smtClean="0">
+                              <a:latin typeface="Cambria Math" panose="02040503050406030204" pitchFamily="18" charset="0"/>
+                            </a:rPr>
+                            <m:t>𝑭</m:t>
+                          </m:r>
+                        </m:e>
+                      </m:acc>
+                    </m:oMath>
+                  </m:oMathPara>
+                </a14:m>
+                <a:endParaRPr lang="en-US" sz="2000" dirty="0"/>
+              </a:p>
+            </p:txBody>
+          </p:sp>
+        </mc:Choice>
+        <mc:Fallback>
+          <p:sp>
+            <p:nvSpPr>
+              <p:cNvPr id="23" name="TextBox 22">
+                <a:extLst>
+                  <a:ext uri="{FF2B5EF4-FFF2-40B4-BE49-F238E27FC236}">
+                    <a16:creationId xmlns:a16="http://schemas.microsoft.com/office/drawing/2014/main" id="{238D0B1A-D815-FF38-B4D6-5709F7B1DE1B}"/>
+                  </a:ext>
+                </a:extLst>
+              </p:cNvPr>
+              <p:cNvSpPr txBox="1">
+                <a:spLocks noRot="1" noChangeAspect="1" noMove="1" noResize="1" noEditPoints="1" noAdjustHandles="1" noChangeArrowheads="1" noChangeShapeType="1" noTextEdit="1"/>
+              </p:cNvSpPr>
+              <p:nvPr/>
+            </p:nvSpPr>
+            <p:spPr>
+              <a:xfrm>
+                <a:off x="4956091" y="2705139"/>
+                <a:ext cx="221214" cy="307777"/>
+              </a:xfrm>
+              <a:prstGeom prst="rect">
+                <a:avLst/>
+              </a:prstGeom>
+              <a:blipFill>
+                <a:blip r:embed="rId4"/>
+                <a:stretch>
+                  <a:fillRect l="-25000" t="-2000" r="-30556" b="-6000"/>
+                </a:stretch>
+              </a:blipFill>
+            </p:spPr>
+            <p:txBody>
+              <a:bodyPr/>
+              <a:lstStyle/>
+              <a:p>
+                <a:r>
+                  <a:rPr lang="en-IN">
+                    <a:noFill/>
+                  </a:rPr>
+                  <a:t> </a:t>
+                </a:r>
+              </a:p>
+            </p:txBody>
+          </p:sp>
+        </mc:Fallback>
+      </mc:AlternateContent>
+      <mc:AlternateContent xmlns:mc="http://schemas.openxmlformats.org/markup-compatibility/2006">
+        <mc:Choice xmlns:a14="http://schemas.microsoft.com/office/drawing/2010/main" Requires="a14">
+          <p:sp>
+            <p:nvSpPr>
+              <p:cNvPr id="25" name="TextBox 24">
+                <a:extLst>
+                  <a:ext uri="{FF2B5EF4-FFF2-40B4-BE49-F238E27FC236}">
+                    <a16:creationId xmlns:a16="http://schemas.microsoft.com/office/drawing/2014/main" id="{6A739359-DCD5-419E-76DB-CE2311DBA139}"/>
+                  </a:ext>
+                </a:extLst>
+              </p:cNvPr>
+              <p:cNvSpPr txBox="1"/>
+              <p:nvPr/>
+            </p:nvSpPr>
+            <p:spPr>
+              <a:xfrm>
+                <a:off x="4996429" y="1709898"/>
+                <a:ext cx="276871" cy="307777"/>
+              </a:xfrm>
+              <a:prstGeom prst="rect">
+                <a:avLst/>
+              </a:prstGeom>
+              <a:noFill/>
+            </p:spPr>
+            <p:txBody>
+              <a:bodyPr wrap="none" lIns="0" tIns="0" rIns="0" bIns="0" rtlCol="0">
+                <a:spAutoFit/>
+              </a:bodyPr>
+              <a:lstStyle/>
+              <a:p>
+                <a:pPr/>
+                <a14:m>
+                  <m:oMathPara xmlns:m="http://schemas.openxmlformats.org/officeDocument/2006/math">
+                    <m:oMath>
+                      <m:r>
+                        <a:rPr lang="en-US" sz="2000" b="0" i="1" smtClean="0">
+                          <a:latin typeface="Cambria Math" panose="02040503050406030204" pitchFamily="18" charset="0"/>
+                        </a:rPr>
+                        <m:t>𝑚</m:t>
+                      </m:r>
+                    </m:oMath>
+                  </m:oMathPara>
+                </a14:m>
+                <a:endParaRPr lang="en-US" sz="2000" dirty="0"/>
+              </a:p>
+            </p:txBody>
+          </p:sp>
+        </mc:Choice>
+        <mc:Fallback>
+          <p:sp>
+            <p:nvSpPr>
+              <p:cNvPr id="25" name="TextBox 24">
+                <a:extLst>
+                  <a:ext uri="{FF2B5EF4-FFF2-40B4-BE49-F238E27FC236}">
+                    <a16:creationId xmlns:a16="http://schemas.microsoft.com/office/drawing/2014/main" id="{6A739359-DCD5-419E-76DB-CE2311DBA139}"/>
+                  </a:ext>
+                </a:extLst>
+              </p:cNvPr>
+              <p:cNvSpPr txBox="1">
+                <a:spLocks noRot="1" noChangeAspect="1" noMove="1" noResize="1" noEditPoints="1" noAdjustHandles="1" noChangeArrowheads="1" noChangeShapeType="1" noTextEdit="1"/>
+              </p:cNvSpPr>
+              <p:nvPr/>
+            </p:nvSpPr>
+            <p:spPr>
+              <a:xfrm>
+                <a:off x="4996429" y="1709898"/>
+                <a:ext cx="276871" cy="307777"/>
+              </a:xfrm>
+              <a:prstGeom prst="rect">
+                <a:avLst/>
+              </a:prstGeom>
+              <a:blipFill>
+                <a:blip r:embed="rId5"/>
+                <a:stretch>
+                  <a:fillRect l="-13333" r="-11111"/>
+                </a:stretch>
+              </a:blipFill>
+            </p:spPr>
+            <p:txBody>
+              <a:bodyPr/>
+              <a:lstStyle/>
+              <a:p>
+                <a:r>
+                  <a:rPr lang="en-IN">
+                    <a:noFill/>
+                  </a:rPr>
+                  <a:t> </a:t>
+                </a:r>
+              </a:p>
+            </p:txBody>
+          </p:sp>
+        </mc:Fallback>
+      </mc:AlternateContent>
+      <mc:AlternateContent xmlns:mc="http://schemas.openxmlformats.org/markup-compatibility/2006">
+        <mc:Choice xmlns:a14="http://schemas.microsoft.com/office/drawing/2010/main" Requires="a14">
+          <p:sp>
+            <p:nvSpPr>
+              <p:cNvPr id="31" name="TextBox 30">
+                <a:extLst>
+                  <a:ext uri="{FF2B5EF4-FFF2-40B4-BE49-F238E27FC236}">
+                    <a16:creationId xmlns:a16="http://schemas.microsoft.com/office/drawing/2014/main" id="{87A56E77-AA02-EB3A-75FF-780C6ABE6D61}"/>
+                  </a:ext>
+                </a:extLst>
+              </p:cNvPr>
+              <p:cNvSpPr txBox="1"/>
+              <p:nvPr/>
+            </p:nvSpPr>
+            <p:spPr>
+              <a:xfrm>
+                <a:off x="6096000" y="4054854"/>
+                <a:ext cx="229102" cy="307777"/>
+              </a:xfrm>
+              <a:prstGeom prst="rect">
+                <a:avLst/>
+              </a:prstGeom>
+              <a:noFill/>
+            </p:spPr>
+            <p:txBody>
+              <a:bodyPr wrap="none" lIns="0" tIns="0" rIns="0" bIns="0" rtlCol="0">
+                <a:spAutoFit/>
+              </a:bodyPr>
+              <a:lstStyle/>
+              <a:p>
+                <a:pPr/>
+                <a14:m>
+                  <m:oMathPara xmlns:m="http://schemas.openxmlformats.org/officeDocument/2006/math">
+                    <m:oMath>
+                      <m:r>
+                        <a:rPr lang="en-US" sz="2000" b="0" i="1" smtClean="0">
+                          <a:latin typeface="Cambria Math" panose="02040503050406030204" pitchFamily="18" charset="0"/>
+                        </a:rPr>
+                        <m:t>𝑋</m:t>
+                      </m:r>
+                    </m:oMath>
+                  </m:oMathPara>
+                </a14:m>
+                <a:endParaRPr lang="en-US" sz="2000" dirty="0"/>
+              </a:p>
+            </p:txBody>
+          </p:sp>
+        </mc:Choice>
+        <mc:Fallback>
+          <p:sp>
+            <p:nvSpPr>
+              <p:cNvPr id="31" name="TextBox 30">
+                <a:extLst>
+                  <a:ext uri="{FF2B5EF4-FFF2-40B4-BE49-F238E27FC236}">
+                    <a16:creationId xmlns:a16="http://schemas.microsoft.com/office/drawing/2014/main" id="{87A56E77-AA02-EB3A-75FF-780C6ABE6D61}"/>
+                  </a:ext>
+                </a:extLst>
+              </p:cNvPr>
+              <p:cNvSpPr txBox="1">
+                <a:spLocks noRot="1" noChangeAspect="1" noMove="1" noResize="1" noEditPoints="1" noAdjustHandles="1" noChangeArrowheads="1" noChangeShapeType="1" noTextEdit="1"/>
+              </p:cNvSpPr>
+              <p:nvPr/>
+            </p:nvSpPr>
+            <p:spPr>
+              <a:xfrm>
+                <a:off x="6096000" y="4054854"/>
+                <a:ext cx="229102" cy="307777"/>
+              </a:xfrm>
+              <a:prstGeom prst="rect">
+                <a:avLst/>
+              </a:prstGeom>
+              <a:blipFill>
+                <a:blip r:embed="rId6"/>
+                <a:stretch>
+                  <a:fillRect l="-23684" r="-21053" b="-5882"/>
+                </a:stretch>
+              </a:blipFill>
+            </p:spPr>
+            <p:txBody>
+              <a:bodyPr/>
+              <a:lstStyle/>
+              <a:p>
+                <a:r>
+                  <a:rPr lang="en-IN">
+                    <a:noFill/>
+                  </a:rPr>
+                  <a:t> </a:t>
+                </a:r>
+              </a:p>
+            </p:txBody>
+          </p:sp>
+        </mc:Fallback>
+      </mc:AlternateContent>
+      <mc:AlternateContent xmlns:mc="http://schemas.openxmlformats.org/markup-compatibility/2006">
+        <mc:Choice xmlns:a14="http://schemas.microsoft.com/office/drawing/2010/main" Requires="a14">
+          <p:sp>
+            <p:nvSpPr>
+              <p:cNvPr id="33" name="TextBox 32">
+                <a:extLst>
+                  <a:ext uri="{FF2B5EF4-FFF2-40B4-BE49-F238E27FC236}">
+                    <a16:creationId xmlns:a16="http://schemas.microsoft.com/office/drawing/2014/main" id="{E0A70C23-7BFD-CD6D-9280-83EDA286AA6D}"/>
+                  </a:ext>
+                </a:extLst>
+              </p:cNvPr>
+              <p:cNvSpPr txBox="1"/>
+              <p:nvPr/>
+            </p:nvSpPr>
+            <p:spPr>
+              <a:xfrm>
+                <a:off x="2567688" y="4749112"/>
+                <a:ext cx="216277" cy="307777"/>
+              </a:xfrm>
+              <a:prstGeom prst="rect">
+                <a:avLst/>
+              </a:prstGeom>
+              <a:noFill/>
+            </p:spPr>
+            <p:txBody>
+              <a:bodyPr wrap="none" lIns="0" tIns="0" rIns="0" bIns="0" rtlCol="0">
+                <a:spAutoFit/>
+              </a:bodyPr>
+              <a:lstStyle/>
+              <a:p>
+                <a:pPr/>
+                <a14:m>
+                  <m:oMathPara xmlns:m="http://schemas.openxmlformats.org/officeDocument/2006/math">
+                    <m:oMath>
+                      <m:r>
+                        <a:rPr lang="en-US" sz="2000" b="0" i="1" smtClean="0">
+                          <a:latin typeface="Cambria Math" panose="02040503050406030204" pitchFamily="18" charset="0"/>
+                        </a:rPr>
+                        <m:t>𝑍</m:t>
+                      </m:r>
+                    </m:oMath>
+                  </m:oMathPara>
+                </a14:m>
+                <a:endParaRPr lang="en-US" sz="2000" dirty="0"/>
+              </a:p>
+            </p:txBody>
+          </p:sp>
+        </mc:Choice>
+        <mc:Fallback>
+          <p:sp>
+            <p:nvSpPr>
+              <p:cNvPr id="33" name="TextBox 32">
+                <a:extLst>
+                  <a:ext uri="{FF2B5EF4-FFF2-40B4-BE49-F238E27FC236}">
+                    <a16:creationId xmlns:a16="http://schemas.microsoft.com/office/drawing/2014/main" id="{E0A70C23-7BFD-CD6D-9280-83EDA286AA6D}"/>
+                  </a:ext>
+                </a:extLst>
+              </p:cNvPr>
+              <p:cNvSpPr txBox="1">
+                <a:spLocks noRot="1" noChangeAspect="1" noMove="1" noResize="1" noEditPoints="1" noAdjustHandles="1" noChangeArrowheads="1" noChangeShapeType="1" noTextEdit="1"/>
+              </p:cNvSpPr>
+              <p:nvPr/>
+            </p:nvSpPr>
+            <p:spPr>
+              <a:xfrm>
+                <a:off x="2567688" y="4749112"/>
+                <a:ext cx="216277" cy="307777"/>
+              </a:xfrm>
+              <a:prstGeom prst="rect">
+                <a:avLst/>
+              </a:prstGeom>
+              <a:blipFill>
+                <a:blip r:embed="rId7"/>
+                <a:stretch>
+                  <a:fillRect l="-25000" r="-25000" b="-5882"/>
+                </a:stretch>
+              </a:blipFill>
+            </p:spPr>
+            <p:txBody>
+              <a:bodyPr/>
+              <a:lstStyle/>
+              <a:p>
+                <a:r>
+                  <a:rPr lang="en-IN">
+                    <a:noFill/>
+                  </a:rPr>
+                  <a:t> </a:t>
+                </a:r>
+              </a:p>
+            </p:txBody>
+          </p:sp>
+        </mc:Fallback>
+      </mc:AlternateContent>
+      <mc:AlternateContent xmlns:mc="http://schemas.openxmlformats.org/markup-compatibility/2006">
+        <mc:Choice xmlns:a14="http://schemas.microsoft.com/office/drawing/2010/main" Requires="a14">
+          <p:sp>
+            <p:nvSpPr>
+              <p:cNvPr id="35" name="TextBox 34">
+                <a:extLst>
+                  <a:ext uri="{FF2B5EF4-FFF2-40B4-BE49-F238E27FC236}">
+                    <a16:creationId xmlns:a16="http://schemas.microsoft.com/office/drawing/2014/main" id="{58058E30-90B9-E7D4-FCB5-8569AEC2A37A}"/>
+                  </a:ext>
+                </a:extLst>
+              </p:cNvPr>
+              <p:cNvSpPr txBox="1"/>
+              <p:nvPr/>
+            </p:nvSpPr>
+            <p:spPr>
+              <a:xfrm>
+                <a:off x="3583867" y="1242060"/>
+                <a:ext cx="216277" cy="307777"/>
+              </a:xfrm>
+              <a:prstGeom prst="rect">
+                <a:avLst/>
+              </a:prstGeom>
+              <a:noFill/>
+            </p:spPr>
+            <p:txBody>
+              <a:bodyPr wrap="none" lIns="0" tIns="0" rIns="0" bIns="0" rtlCol="0">
+                <a:spAutoFit/>
+              </a:bodyPr>
+              <a:lstStyle/>
+              <a:p>
+                <a:pPr/>
+                <a14:m>
+                  <m:oMathPara xmlns:m="http://schemas.openxmlformats.org/officeDocument/2006/math">
+                    <m:oMath>
+                      <m:r>
+                        <a:rPr lang="en-US" sz="2000" b="0" i="1" smtClean="0">
+                          <a:latin typeface="Cambria Math" panose="02040503050406030204" pitchFamily="18" charset="0"/>
+                        </a:rPr>
+                        <m:t>𝑌</m:t>
+                      </m:r>
+                    </m:oMath>
+                  </m:oMathPara>
+                </a14:m>
+                <a:endParaRPr lang="en-US" sz="2000" dirty="0"/>
+              </a:p>
+            </p:txBody>
+          </p:sp>
+        </mc:Choice>
+        <mc:Fallback>
+          <p:sp>
+            <p:nvSpPr>
+              <p:cNvPr id="35" name="TextBox 34">
+                <a:extLst>
+                  <a:ext uri="{FF2B5EF4-FFF2-40B4-BE49-F238E27FC236}">
+                    <a16:creationId xmlns:a16="http://schemas.microsoft.com/office/drawing/2014/main" id="{58058E30-90B9-E7D4-FCB5-8569AEC2A37A}"/>
+                  </a:ext>
+                </a:extLst>
+              </p:cNvPr>
+              <p:cNvSpPr txBox="1">
+                <a:spLocks noRot="1" noChangeAspect="1" noMove="1" noResize="1" noEditPoints="1" noAdjustHandles="1" noChangeArrowheads="1" noChangeShapeType="1" noTextEdit="1"/>
+              </p:cNvSpPr>
+              <p:nvPr/>
+            </p:nvSpPr>
+            <p:spPr>
+              <a:xfrm>
+                <a:off x="3583867" y="1242060"/>
+                <a:ext cx="216277" cy="307777"/>
+              </a:xfrm>
+              <a:prstGeom prst="rect">
+                <a:avLst/>
+              </a:prstGeom>
+              <a:blipFill>
+                <a:blip r:embed="rId8"/>
+                <a:stretch>
+                  <a:fillRect l="-28571" r="-25714" b="-6000"/>
+                </a:stretch>
+              </a:blipFill>
+            </p:spPr>
+            <p:txBody>
+              <a:bodyPr/>
+              <a:lstStyle/>
+              <a:p>
+                <a:r>
+                  <a:rPr lang="en-IN">
+                    <a:noFill/>
+                  </a:rPr>
+                  <a:t> </a:t>
+                </a:r>
+              </a:p>
+            </p:txBody>
+          </p:sp>
+        </mc:Fallback>
+      </mc:AlternateContent>
+    </p:spTree>
+    <p:extLst>
+      <p:ext uri="{BB962C8B-B14F-4D97-AF65-F5344CB8AC3E}">
+        <p14:creationId xmlns:p14="http://schemas.microsoft.com/office/powerpoint/2010/main" val="1652973827"/>
+      </p:ext>
+    </p:extLst>
+  </p:cSld>
+  <p:clrMapOvr>
+    <a:masterClrMapping/>
+  </p:clrMapOvr>
+</p:sld>
+</file>
+
+<file path=ppt/slides/slide8.xml><?xml version="1.0" encoding="utf-8"?>
+<p:sld xmlns:a="http://schemas.openxmlformats.org/drawingml/2006/main" xmlns:r="http://schemas.openxmlformats.org/officeDocument/2006/relationships" xmlns:p="http://schemas.openxmlformats.org/presentationml/2006/main">
+  <p:cSld>
+    <p:spTree>
+      <p:nvGrpSpPr>
+        <p:cNvPr id="1" name=""/>
+        <p:cNvGrpSpPr/>
+        <p:nvPr/>
+      </p:nvGrpSpPr>
+      <p:grpSpPr>
+        <a:xfrm>
+          <a:off x="0" y="0"/>
+          <a:ext cx="0" cy="0"/>
+          <a:chOff x="0" y="0"/>
+          <a:chExt cx="0" cy="0"/>
+        </a:xfrm>
+      </p:grpSpPr>
+      <p:cxnSp>
+        <p:nvCxnSpPr>
+          <p:cNvPr id="3" name="Straight Connector 2">
+            <a:extLst>
+              <a:ext uri="{FF2B5EF4-FFF2-40B4-BE49-F238E27FC236}">
+                <a16:creationId xmlns:a16="http://schemas.microsoft.com/office/drawing/2014/main" id="{C6186627-9CD5-90B7-E5B7-2F3585EAAD0B}"/>
+              </a:ext>
+            </a:extLst>
+          </p:cNvPr>
+          <p:cNvCxnSpPr>
+            <a:cxnSpLocks/>
+          </p:cNvCxnSpPr>
+          <p:nvPr/>
+        </p:nvCxnSpPr>
+        <p:spPr>
+          <a:xfrm>
+            <a:off x="3155934" y="5209329"/>
+            <a:ext cx="4638237" cy="0"/>
+          </a:xfrm>
+          <a:prstGeom prst="line">
+            <a:avLst/>
+          </a:prstGeom>
+          <a:ln w="28575" cap="rnd">
+            <a:solidFill>
+              <a:schemeClr val="tx1"/>
+            </a:solidFill>
+            <a:round/>
+          </a:ln>
+        </p:spPr>
+        <p:style>
+          <a:lnRef idx="1">
+            <a:schemeClr val="accent1"/>
+          </a:lnRef>
+          <a:fillRef idx="0">
+            <a:schemeClr val="accent1"/>
+          </a:fillRef>
+          <a:effectRef idx="0">
+            <a:schemeClr val="accent1"/>
+          </a:effectRef>
+          <a:fontRef idx="minor">
+            <a:schemeClr val="tx1"/>
+          </a:fontRef>
+        </p:style>
+      </p:cxnSp>
+      <p:cxnSp>
+        <p:nvCxnSpPr>
+          <p:cNvPr id="5" name="Straight Connector 4">
+            <a:extLst>
+              <a:ext uri="{FF2B5EF4-FFF2-40B4-BE49-F238E27FC236}">
+                <a16:creationId xmlns:a16="http://schemas.microsoft.com/office/drawing/2014/main" id="{1C42820C-25DC-1A10-8739-C9ED86DAD71B}"/>
+              </a:ext>
+            </a:extLst>
+          </p:cNvPr>
+          <p:cNvCxnSpPr>
+            <a:cxnSpLocks/>
+          </p:cNvCxnSpPr>
+          <p:nvPr/>
+        </p:nvCxnSpPr>
+        <p:spPr>
+          <a:xfrm>
+            <a:off x="3155934" y="892166"/>
+            <a:ext cx="0" cy="4317163"/>
+          </a:xfrm>
+          <a:prstGeom prst="line">
+            <a:avLst/>
+          </a:prstGeom>
+          <a:ln w="28575" cap="rnd">
+            <a:solidFill>
+              <a:schemeClr val="tx1"/>
+            </a:solidFill>
+            <a:round/>
+          </a:ln>
+        </p:spPr>
+        <p:style>
+          <a:lnRef idx="1">
+            <a:schemeClr val="accent1"/>
+          </a:lnRef>
+          <a:fillRef idx="0">
+            <a:schemeClr val="accent1"/>
+          </a:fillRef>
+          <a:effectRef idx="0">
+            <a:schemeClr val="accent1"/>
+          </a:effectRef>
+          <a:fontRef idx="minor">
+            <a:schemeClr val="tx1"/>
+          </a:fontRef>
+        </p:style>
+      </p:cxnSp>
+      <p:sp>
+        <p:nvSpPr>
+          <p:cNvPr id="8" name="Arc 7">
+            <a:extLst>
+              <a:ext uri="{FF2B5EF4-FFF2-40B4-BE49-F238E27FC236}">
+                <a16:creationId xmlns:a16="http://schemas.microsoft.com/office/drawing/2014/main" id="{50B1F6DF-68DD-C8D2-7DB6-E59F3A8B68F3}"/>
+              </a:ext>
+            </a:extLst>
+          </p:cNvPr>
+          <p:cNvSpPr/>
+          <p:nvPr/>
+        </p:nvSpPr>
+        <p:spPr>
+          <a:xfrm rot="5400000">
+            <a:off x="3253110" y="1216006"/>
+            <a:ext cx="3884171" cy="4065829"/>
+          </a:xfrm>
+          <a:custGeom>
+            <a:avLst/>
+            <a:gdLst>
+              <a:gd name="csX0" fmla="*/ 0 w 3289821"/>
+              <a:gd name="csY0" fmla="*/ 0 h 2311511"/>
+              <a:gd name="csX1" fmla="*/ 3289821 w 3289821"/>
+              <a:gd name="csY1" fmla="*/ 2311511 h 2311511"/>
+            </a:gdLst>
+            <a:ahLst/>
+            <a:cxnLst>
+              <a:cxn ang="0">
+                <a:pos x="csX0" y="csY0"/>
+              </a:cxn>
+              <a:cxn ang="0">
+                <a:pos x="csX1" y="csY1"/>
+              </a:cxn>
+            </a:cxnLst>
+            <a:rect l="l" t="t" r="r" b="b"/>
+            <a:pathLst>
+              <a:path w="3289821" h="2311511" stroke="0" extrusionOk="0">
+                <a:moveTo>
+                  <a:pt x="666913" y="1455136"/>
+                </a:moveTo>
+                <a:cubicBezTo>
+                  <a:pt x="2619850" y="1670451"/>
+                  <a:pt x="3289821" y="1428067"/>
+                  <a:pt x="3289821" y="2311511"/>
+                </a:cubicBezTo>
+                <a:lnTo>
+                  <a:pt x="666913" y="1455136"/>
+                </a:lnTo>
+                <a:close/>
+              </a:path>
+              <a:path w="3289821" h="2311511" fill="none">
+                <a:moveTo>
+                  <a:pt x="0" y="0"/>
+                </a:moveTo>
+                <a:cubicBezTo>
+                  <a:pt x="1856128" y="510275"/>
+                  <a:pt x="3289821" y="1428067"/>
+                  <a:pt x="3289821" y="2311511"/>
+                </a:cubicBezTo>
+              </a:path>
+            </a:pathLst>
+          </a:custGeom>
+          <a:ln w="38100" cap="rnd">
+            <a:solidFill>
+              <a:srgbClr val="0070C0"/>
+            </a:solidFill>
+            <a:round/>
+          </a:ln>
+        </p:spPr>
+        <p:style>
+          <a:lnRef idx="1">
+            <a:schemeClr val="accent1"/>
+          </a:lnRef>
+          <a:fillRef idx="0">
+            <a:schemeClr val="accent1"/>
+          </a:fillRef>
+          <a:effectRef idx="0">
+            <a:schemeClr val="accent1"/>
+          </a:effectRef>
+          <a:fontRef idx="minor">
+            <a:schemeClr val="tx1"/>
+          </a:fontRef>
+        </p:style>
+        <p:txBody>
+          <a:bodyPr rtlCol="0" anchor="ctr"/>
+          <a:lstStyle/>
+          <a:p>
+            <a:pPr algn="ctr"/>
+            <a:endParaRPr lang="en-IN"/>
+          </a:p>
+        </p:txBody>
+      </p:sp>
+      <mc:AlternateContent xmlns:mc="http://schemas.openxmlformats.org/markup-compatibility/2006">
+        <mc:Choice xmlns:a14="http://schemas.microsoft.com/office/drawing/2010/main" Requires="a14">
+          <p:sp>
+            <p:nvSpPr>
+              <p:cNvPr id="16" name="TextBox 15">
+                <a:extLst>
+                  <a:ext uri="{FF2B5EF4-FFF2-40B4-BE49-F238E27FC236}">
+                    <a16:creationId xmlns:a16="http://schemas.microsoft.com/office/drawing/2014/main" id="{EC2187FB-1E2B-D4C1-3004-00E0BF911649}"/>
+                  </a:ext>
+                </a:extLst>
+              </p:cNvPr>
+              <p:cNvSpPr txBox="1"/>
+              <p:nvPr/>
+            </p:nvSpPr>
+            <p:spPr>
+              <a:xfrm>
+                <a:off x="7608992" y="5319307"/>
+                <a:ext cx="185179" cy="307777"/>
+              </a:xfrm>
+              <a:prstGeom prst="rect">
+                <a:avLst/>
+              </a:prstGeom>
+              <a:noFill/>
+            </p:spPr>
+            <p:txBody>
+              <a:bodyPr wrap="none" lIns="0" tIns="0" rIns="0" bIns="0" rtlCol="0">
+                <a:spAutoFit/>
+              </a:bodyPr>
+              <a:lstStyle/>
+              <a:p>
+                <a:pPr/>
+                <a14:m>
+                  <m:oMathPara xmlns:m="http://schemas.openxmlformats.org/officeDocument/2006/math">
+                    <m:oMath>
+                      <m:r>
+                        <a:rPr lang="en-US" sz="2000" b="0" i="1" smtClean="0">
+                          <a:latin typeface="Cambria Math" panose="02040503050406030204" pitchFamily="18" charset="0"/>
+                        </a:rPr>
+                        <m:t>𝑟</m:t>
+                      </m:r>
+                    </m:oMath>
+                  </m:oMathPara>
+                </a14:m>
+                <a:endParaRPr lang="en-US" sz="2000" dirty="0"/>
+              </a:p>
+            </p:txBody>
+          </p:sp>
+        </mc:Choice>
+        <mc:Fallback>
+          <p:sp>
+            <p:nvSpPr>
+              <p:cNvPr id="16" name="TextBox 15">
+                <a:extLst>
+                  <a:ext uri="{FF2B5EF4-FFF2-40B4-BE49-F238E27FC236}">
+                    <a16:creationId xmlns:a16="http://schemas.microsoft.com/office/drawing/2014/main" id="{EC2187FB-1E2B-D4C1-3004-00E0BF911649}"/>
+                  </a:ext>
+                </a:extLst>
+              </p:cNvPr>
+              <p:cNvSpPr txBox="1">
+                <a:spLocks noRot="1" noChangeAspect="1" noMove="1" noResize="1" noEditPoints="1" noAdjustHandles="1" noChangeArrowheads="1" noChangeShapeType="1" noTextEdit="1"/>
+              </p:cNvSpPr>
+              <p:nvPr/>
+            </p:nvSpPr>
+            <p:spPr>
+              <a:xfrm>
+                <a:off x="7608992" y="5319307"/>
+                <a:ext cx="185179" cy="307777"/>
+              </a:xfrm>
+              <a:prstGeom prst="rect">
+                <a:avLst/>
+              </a:prstGeom>
+              <a:blipFill>
+                <a:blip r:embed="rId2"/>
+                <a:stretch>
+                  <a:fillRect l="-16129" r="-16129"/>
+                </a:stretch>
+              </a:blipFill>
+            </p:spPr>
+            <p:txBody>
+              <a:bodyPr/>
+              <a:lstStyle/>
+              <a:p>
+                <a:r>
+                  <a:rPr lang="en-IN">
+                    <a:noFill/>
+                  </a:rPr>
+                  <a:t> </a:t>
+                </a:r>
+              </a:p>
+            </p:txBody>
+          </p:sp>
+        </mc:Fallback>
+      </mc:AlternateContent>
+      <mc:AlternateContent xmlns:mc="http://schemas.openxmlformats.org/markup-compatibility/2006">
+        <mc:Choice xmlns:a14="http://schemas.microsoft.com/office/drawing/2010/main" Requires="a14">
+          <p:sp>
+            <p:nvSpPr>
+              <p:cNvPr id="18" name="TextBox 17">
+                <a:extLst>
+                  <a:ext uri="{FF2B5EF4-FFF2-40B4-BE49-F238E27FC236}">
+                    <a16:creationId xmlns:a16="http://schemas.microsoft.com/office/drawing/2014/main" id="{51BA4602-3CDA-DEEC-4525-C07A10B9AB9E}"/>
+                  </a:ext>
+                </a:extLst>
+              </p:cNvPr>
+              <p:cNvSpPr txBox="1"/>
+              <p:nvPr/>
+            </p:nvSpPr>
+            <p:spPr>
+              <a:xfrm>
+                <a:off x="2993165" y="5319308"/>
+                <a:ext cx="338234" cy="307777"/>
+              </a:xfrm>
+              <a:prstGeom prst="rect">
+                <a:avLst/>
+              </a:prstGeom>
+              <a:noFill/>
+            </p:spPr>
+            <p:txBody>
+              <a:bodyPr wrap="square" lIns="0" tIns="0" rIns="0" bIns="0" rtlCol="0">
+                <a:spAutoFit/>
+              </a:bodyPr>
+              <a:lstStyle/>
+              <a:p>
+                <a:pPr/>
+                <a14:m>
+                  <m:oMathPara xmlns:m="http://schemas.openxmlformats.org/officeDocument/2006/math">
+                    <m:oMath>
+                      <m:r>
+                        <a:rPr lang="en-US" sz="2000" b="0" i="1" smtClean="0">
+                          <a:latin typeface="Cambria Math" panose="02040503050406030204" pitchFamily="18" charset="0"/>
+                          <a:ea typeface="Cambria Math" panose="02040503050406030204" pitchFamily="18" charset="0"/>
+                        </a:rPr>
+                        <m:t>𝑂</m:t>
+                      </m:r>
+                    </m:oMath>
+                  </m:oMathPara>
+                </a14:m>
+                <a:endParaRPr lang="en-US" sz="2000" i="1" dirty="0"/>
+              </a:p>
+            </p:txBody>
+          </p:sp>
+        </mc:Choice>
+        <mc:Fallback>
+          <p:sp>
+            <p:nvSpPr>
+              <p:cNvPr id="18" name="TextBox 17">
+                <a:extLst>
+                  <a:ext uri="{FF2B5EF4-FFF2-40B4-BE49-F238E27FC236}">
+                    <a16:creationId xmlns:a16="http://schemas.microsoft.com/office/drawing/2014/main" id="{51BA4602-3CDA-DEEC-4525-C07A10B9AB9E}"/>
+                  </a:ext>
+                </a:extLst>
+              </p:cNvPr>
+              <p:cNvSpPr txBox="1">
+                <a:spLocks noRot="1" noChangeAspect="1" noMove="1" noResize="1" noEditPoints="1" noAdjustHandles="1" noChangeArrowheads="1" noChangeShapeType="1" noTextEdit="1"/>
+              </p:cNvSpPr>
+              <p:nvPr/>
+            </p:nvSpPr>
+            <p:spPr>
+              <a:xfrm>
+                <a:off x="2993165" y="5319308"/>
+                <a:ext cx="338234" cy="307777"/>
+              </a:xfrm>
+              <a:prstGeom prst="rect">
+                <a:avLst/>
+              </a:prstGeom>
+              <a:blipFill>
+                <a:blip r:embed="rId3"/>
+                <a:stretch>
+                  <a:fillRect l="-1818" r="-1818" b="-6000"/>
+                </a:stretch>
+              </a:blipFill>
+            </p:spPr>
+            <p:txBody>
+              <a:bodyPr/>
+              <a:lstStyle/>
+              <a:p>
+                <a:r>
+                  <a:rPr lang="en-IN">
+                    <a:noFill/>
+                  </a:rPr>
+                  <a:t> </a:t>
+                </a:r>
+              </a:p>
+            </p:txBody>
+          </p:sp>
+        </mc:Fallback>
+      </mc:AlternateContent>
+      <mc:AlternateContent xmlns:mc="http://schemas.openxmlformats.org/markup-compatibility/2006">
+        <mc:Choice xmlns:a14="http://schemas.microsoft.com/office/drawing/2010/main" Requires="a14">
+          <p:sp>
+            <p:nvSpPr>
+              <p:cNvPr id="20" name="TextBox 19">
+                <a:extLst>
+                  <a:ext uri="{FF2B5EF4-FFF2-40B4-BE49-F238E27FC236}">
+                    <a16:creationId xmlns:a16="http://schemas.microsoft.com/office/drawing/2014/main" id="{B546070A-E6C9-6E3E-2178-E08A22319852}"/>
+                  </a:ext>
+                </a:extLst>
+              </p:cNvPr>
+              <p:cNvSpPr txBox="1"/>
+              <p:nvPr/>
+            </p:nvSpPr>
+            <p:spPr>
+              <a:xfrm>
+                <a:off x="2415058" y="892166"/>
+                <a:ext cx="578107" cy="307777"/>
+              </a:xfrm>
+              <a:prstGeom prst="rect">
+                <a:avLst/>
+              </a:prstGeom>
+              <a:noFill/>
+            </p:spPr>
+            <p:txBody>
+              <a:bodyPr wrap="none" lIns="0" tIns="0" rIns="0" bIns="0" rtlCol="0">
+                <a:spAutoFit/>
+              </a:bodyPr>
+              <a:lstStyle/>
+              <a:p>
+                <a:pPr/>
+                <a14:m>
+                  <m:oMathPara xmlns:m="http://schemas.openxmlformats.org/officeDocument/2006/math">
+                    <m:oMath>
+                      <m:r>
+                        <a:rPr lang="en-US" sz="2000" b="0" i="1" smtClean="0">
+                          <a:latin typeface="Cambria Math" panose="02040503050406030204" pitchFamily="18" charset="0"/>
+                        </a:rPr>
+                        <m:t>𝑈</m:t>
+                      </m:r>
+                      <m:r>
+                        <a:rPr lang="en-US" sz="2000" b="0" i="1" smtClean="0">
+                          <a:latin typeface="Cambria Math" panose="02040503050406030204" pitchFamily="18" charset="0"/>
+                        </a:rPr>
+                        <m:t>(</m:t>
+                      </m:r>
+                      <m:r>
+                        <a:rPr lang="en-US" sz="2000" b="0" i="1" smtClean="0">
+                          <a:latin typeface="Cambria Math" panose="02040503050406030204" pitchFamily="18" charset="0"/>
+                        </a:rPr>
+                        <m:t>𝑟</m:t>
+                      </m:r>
+                      <m:r>
+                        <a:rPr lang="en-US" sz="2000" b="0" i="1" smtClean="0">
+                          <a:latin typeface="Cambria Math" panose="02040503050406030204" pitchFamily="18" charset="0"/>
+                        </a:rPr>
+                        <m:t>)</m:t>
+                      </m:r>
+                    </m:oMath>
+                  </m:oMathPara>
+                </a14:m>
+                <a:endParaRPr lang="en-US" sz="2000" dirty="0"/>
+              </a:p>
+            </p:txBody>
+          </p:sp>
+        </mc:Choice>
+        <mc:Fallback>
+          <p:sp>
+            <p:nvSpPr>
+              <p:cNvPr id="20" name="TextBox 19">
+                <a:extLst>
+                  <a:ext uri="{FF2B5EF4-FFF2-40B4-BE49-F238E27FC236}">
+                    <a16:creationId xmlns:a16="http://schemas.microsoft.com/office/drawing/2014/main" id="{B546070A-E6C9-6E3E-2178-E08A22319852}"/>
+                  </a:ext>
+                </a:extLst>
+              </p:cNvPr>
+              <p:cNvSpPr txBox="1">
+                <a:spLocks noRot="1" noChangeAspect="1" noMove="1" noResize="1" noEditPoints="1" noAdjustHandles="1" noChangeArrowheads="1" noChangeShapeType="1" noTextEdit="1"/>
+              </p:cNvSpPr>
+              <p:nvPr/>
+            </p:nvSpPr>
+            <p:spPr>
+              <a:xfrm>
+                <a:off x="2415058" y="892166"/>
+                <a:ext cx="578107" cy="307777"/>
+              </a:xfrm>
+              <a:prstGeom prst="rect">
+                <a:avLst/>
+              </a:prstGeom>
+              <a:blipFill>
+                <a:blip r:embed="rId4"/>
+                <a:stretch>
+                  <a:fillRect l="-9474" t="-1961" r="-14737" b="-33333"/>
+                </a:stretch>
+              </a:blipFill>
+            </p:spPr>
+            <p:txBody>
+              <a:bodyPr/>
+              <a:lstStyle/>
+              <a:p>
+                <a:r>
+                  <a:rPr lang="en-IN">
+                    <a:noFill/>
+                  </a:rPr>
+                  <a:t> </a:t>
+                </a:r>
+              </a:p>
+            </p:txBody>
+          </p:sp>
+        </mc:Fallback>
+      </mc:AlternateContent>
+    </p:spTree>
+    <p:extLst>
+      <p:ext uri="{BB962C8B-B14F-4D97-AF65-F5344CB8AC3E}">
+        <p14:creationId xmlns:p14="http://schemas.microsoft.com/office/powerpoint/2010/main" val="3588530249"/>
+      </p:ext>
+    </p:extLst>
+  </p:cSld>
+  <p:clrMapOvr>
+    <a:masterClrMapping/>
+  </p:clrMapOvr>
+</p:sld>
+</file>
+
+<file path=ppt/slides/slide9.xml><?xml version="1.0" encoding="utf-8"?>
+<p:sld xmlns:a="http://schemas.openxmlformats.org/drawingml/2006/main" xmlns:r="http://schemas.openxmlformats.org/officeDocument/2006/relationships" xmlns:p="http://schemas.openxmlformats.org/presentationml/2006/main">
+  <p:cSld>
+    <p:spTree>
+      <p:nvGrpSpPr>
+        <p:cNvPr id="1" name="">
+          <a:extLst>
+            <a:ext uri="{FF2B5EF4-FFF2-40B4-BE49-F238E27FC236}">
+              <a16:creationId xmlns:a16="http://schemas.microsoft.com/office/drawing/2014/main" id="{19A1613F-8641-E58E-7C33-0EB2630AD57F}"/>
+            </a:ext>
+          </a:extLst>
+        </p:cNvPr>
+        <p:cNvGrpSpPr/>
+        <p:nvPr/>
+      </p:nvGrpSpPr>
+      <p:grpSpPr>
+        <a:xfrm>
+          <a:off x="0" y="0"/>
+          <a:ext cx="0" cy="0"/>
+          <a:chOff x="0" y="0"/>
+          <a:chExt cx="0" cy="0"/>
+        </a:xfrm>
+      </p:grpSpPr>
+      <p:cxnSp>
+        <p:nvCxnSpPr>
+          <p:cNvPr id="19" name="Straight Connector 18">
+            <a:extLst>
+              <a:ext uri="{FF2B5EF4-FFF2-40B4-BE49-F238E27FC236}">
+                <a16:creationId xmlns:a16="http://schemas.microsoft.com/office/drawing/2014/main" id="{E3EB2415-D0CB-109A-F41B-0A497CD62082}"/>
+              </a:ext>
+            </a:extLst>
+          </p:cNvPr>
+          <p:cNvCxnSpPr>
+            <a:cxnSpLocks/>
+          </p:cNvCxnSpPr>
+          <p:nvPr/>
+        </p:nvCxnSpPr>
+        <p:spPr>
+          <a:xfrm>
+            <a:off x="9159240" y="2956560"/>
+            <a:ext cx="0" cy="2307590"/>
+          </a:xfrm>
+          <a:prstGeom prst="line">
+            <a:avLst/>
+          </a:prstGeom>
+          <a:ln w="19050" cap="rnd">
+            <a:solidFill>
+              <a:schemeClr val="tx1"/>
+            </a:solidFill>
+            <a:prstDash val="dash"/>
+            <a:round/>
+          </a:ln>
+        </p:spPr>
+        <p:style>
+          <a:lnRef idx="1">
+            <a:schemeClr val="accent1"/>
+          </a:lnRef>
+          <a:fillRef idx="0">
+            <a:schemeClr val="accent1"/>
+          </a:fillRef>
+          <a:effectRef idx="0">
+            <a:schemeClr val="accent1"/>
+          </a:effectRef>
+          <a:fontRef idx="minor">
+            <a:schemeClr val="tx1"/>
+          </a:fontRef>
+        </p:style>
+      </p:cxnSp>
+      <p:cxnSp>
+        <p:nvCxnSpPr>
+          <p:cNvPr id="3" name="Straight Connector 2">
+            <a:extLst>
+              <a:ext uri="{FF2B5EF4-FFF2-40B4-BE49-F238E27FC236}">
+                <a16:creationId xmlns:a16="http://schemas.microsoft.com/office/drawing/2014/main" id="{71080CCC-78B1-005E-84A8-D01434184DED}"/>
+              </a:ext>
+            </a:extLst>
+          </p:cNvPr>
+          <p:cNvCxnSpPr>
+            <a:cxnSpLocks/>
+          </p:cNvCxnSpPr>
+          <p:nvPr/>
+        </p:nvCxnSpPr>
+        <p:spPr>
+          <a:xfrm>
+            <a:off x="3155934" y="5209329"/>
+            <a:ext cx="7076637" cy="0"/>
+          </a:xfrm>
+          <a:prstGeom prst="line">
+            <a:avLst/>
+          </a:prstGeom>
+          <a:ln w="28575" cap="rnd">
+            <a:solidFill>
+              <a:schemeClr val="tx1"/>
+            </a:solidFill>
+            <a:round/>
+          </a:ln>
+        </p:spPr>
+        <p:style>
+          <a:lnRef idx="1">
+            <a:schemeClr val="accent1"/>
+          </a:lnRef>
+          <a:fillRef idx="0">
+            <a:schemeClr val="accent1"/>
+          </a:fillRef>
+          <a:effectRef idx="0">
+            <a:schemeClr val="accent1"/>
+          </a:effectRef>
+          <a:fontRef idx="minor">
+            <a:schemeClr val="tx1"/>
+          </a:fontRef>
+        </p:style>
+      </p:cxnSp>
+      <p:cxnSp>
+        <p:nvCxnSpPr>
+          <p:cNvPr id="5" name="Straight Connector 4">
+            <a:extLst>
+              <a:ext uri="{FF2B5EF4-FFF2-40B4-BE49-F238E27FC236}">
+                <a16:creationId xmlns:a16="http://schemas.microsoft.com/office/drawing/2014/main" id="{4ABC47AD-3519-C89F-5B9C-48D6D0B4CC70}"/>
+              </a:ext>
+            </a:extLst>
+          </p:cNvPr>
+          <p:cNvCxnSpPr>
+            <a:cxnSpLocks/>
+          </p:cNvCxnSpPr>
+          <p:nvPr/>
+        </p:nvCxnSpPr>
+        <p:spPr>
+          <a:xfrm>
+            <a:off x="6694252" y="892166"/>
+            <a:ext cx="0" cy="4317163"/>
+          </a:xfrm>
+          <a:prstGeom prst="line">
+            <a:avLst/>
+          </a:prstGeom>
+          <a:ln w="28575" cap="rnd">
+            <a:solidFill>
+              <a:schemeClr val="tx1"/>
+            </a:solidFill>
+            <a:round/>
+          </a:ln>
+        </p:spPr>
+        <p:style>
+          <a:lnRef idx="1">
+            <a:schemeClr val="accent1"/>
+          </a:lnRef>
+          <a:fillRef idx="0">
+            <a:schemeClr val="accent1"/>
+          </a:fillRef>
+          <a:effectRef idx="0">
+            <a:schemeClr val="accent1"/>
+          </a:effectRef>
+          <a:fontRef idx="minor">
+            <a:schemeClr val="tx1"/>
+          </a:fontRef>
+        </p:style>
+      </p:cxnSp>
+      <mc:AlternateContent xmlns:mc="http://schemas.openxmlformats.org/markup-compatibility/2006">
+        <mc:Choice xmlns:a14="http://schemas.microsoft.com/office/drawing/2010/main" Requires="a14">
+          <p:sp>
+            <p:nvSpPr>
+              <p:cNvPr id="16" name="TextBox 15">
+                <a:extLst>
+                  <a:ext uri="{FF2B5EF4-FFF2-40B4-BE49-F238E27FC236}">
+                    <a16:creationId xmlns:a16="http://schemas.microsoft.com/office/drawing/2014/main" id="{3AE878BF-F418-4A8A-DD9B-2A1DCB4A5308}"/>
+                  </a:ext>
+                </a:extLst>
+              </p:cNvPr>
+              <p:cNvSpPr txBox="1"/>
+              <p:nvPr/>
+            </p:nvSpPr>
+            <p:spPr>
+              <a:xfrm>
+                <a:off x="10030849" y="5319307"/>
+                <a:ext cx="201722" cy="307777"/>
+              </a:xfrm>
+              <a:prstGeom prst="rect">
+                <a:avLst/>
+              </a:prstGeom>
+              <a:noFill/>
+            </p:spPr>
+            <p:txBody>
+              <a:bodyPr wrap="none" lIns="0" tIns="0" rIns="0" bIns="0" rtlCol="0">
+                <a:spAutoFit/>
+              </a:bodyPr>
+              <a:lstStyle/>
+              <a:p>
+                <a:pPr/>
+                <a14:m>
+                  <m:oMathPara xmlns:m="http://schemas.openxmlformats.org/officeDocument/2006/math">
+                    <m:oMath>
+                      <m:r>
+                        <a:rPr lang="en-US" sz="2000" b="0" i="1" smtClean="0">
+                          <a:latin typeface="Cambria Math" panose="02040503050406030204" pitchFamily="18" charset="0"/>
+                        </a:rPr>
+                        <m:t>𝑥</m:t>
+                      </m:r>
+                    </m:oMath>
+                  </m:oMathPara>
+                </a14:m>
+                <a:endParaRPr lang="en-US" sz="2000" dirty="0"/>
+              </a:p>
+            </p:txBody>
+          </p:sp>
+        </mc:Choice>
+        <mc:Fallback>
+          <p:sp>
+            <p:nvSpPr>
+              <p:cNvPr id="16" name="TextBox 15">
+                <a:extLst>
+                  <a:ext uri="{FF2B5EF4-FFF2-40B4-BE49-F238E27FC236}">
+                    <a16:creationId xmlns:a16="http://schemas.microsoft.com/office/drawing/2014/main" id="{3AE878BF-F418-4A8A-DD9B-2A1DCB4A5308}"/>
+                  </a:ext>
+                </a:extLst>
+              </p:cNvPr>
+              <p:cNvSpPr txBox="1">
+                <a:spLocks noRot="1" noChangeAspect="1" noMove="1" noResize="1" noEditPoints="1" noAdjustHandles="1" noChangeArrowheads="1" noChangeShapeType="1" noTextEdit="1"/>
+              </p:cNvSpPr>
+              <p:nvPr/>
+            </p:nvSpPr>
+            <p:spPr>
+              <a:xfrm>
+                <a:off x="10030849" y="5319307"/>
+                <a:ext cx="201722" cy="307777"/>
+              </a:xfrm>
+              <a:prstGeom prst="rect">
+                <a:avLst/>
+              </a:prstGeom>
+              <a:blipFill>
+                <a:blip r:embed="rId2"/>
+                <a:stretch>
+                  <a:fillRect l="-14706" r="-11765"/>
+                </a:stretch>
+              </a:blipFill>
+            </p:spPr>
+            <p:txBody>
+              <a:bodyPr/>
+              <a:lstStyle/>
+              <a:p>
+                <a:r>
+                  <a:rPr lang="en-IN">
+                    <a:noFill/>
+                  </a:rPr>
+                  <a:t> </a:t>
+                </a:r>
+              </a:p>
+            </p:txBody>
+          </p:sp>
+        </mc:Fallback>
+      </mc:AlternateContent>
+      <mc:AlternateContent xmlns:mc="http://schemas.openxmlformats.org/markup-compatibility/2006">
+        <mc:Choice xmlns:a14="http://schemas.microsoft.com/office/drawing/2010/main" Requires="a14">
+          <p:sp>
+            <p:nvSpPr>
+              <p:cNvPr id="18" name="TextBox 17">
+                <a:extLst>
+                  <a:ext uri="{FF2B5EF4-FFF2-40B4-BE49-F238E27FC236}">
+                    <a16:creationId xmlns:a16="http://schemas.microsoft.com/office/drawing/2014/main" id="{F3F4B216-299A-BF1A-97FF-6D4334629386}"/>
+                  </a:ext>
+                </a:extLst>
+              </p:cNvPr>
+              <p:cNvSpPr txBox="1"/>
+              <p:nvPr/>
+            </p:nvSpPr>
+            <p:spPr>
+              <a:xfrm>
+                <a:off x="6525135" y="5319308"/>
+                <a:ext cx="338234" cy="307777"/>
+              </a:xfrm>
+              <a:prstGeom prst="rect">
+                <a:avLst/>
+              </a:prstGeom>
+              <a:noFill/>
+            </p:spPr>
+            <p:txBody>
+              <a:bodyPr wrap="square" lIns="0" tIns="0" rIns="0" bIns="0" rtlCol="0">
+                <a:spAutoFit/>
+              </a:bodyPr>
+              <a:lstStyle/>
+              <a:p>
+                <a:pPr/>
+                <a14:m>
+                  <m:oMathPara xmlns:m="http://schemas.openxmlformats.org/officeDocument/2006/math">
+                    <m:oMath>
+                      <m:r>
+                        <a:rPr lang="en-US" sz="2000" b="0" i="1" smtClean="0">
+                          <a:latin typeface="Cambria Math" panose="02040503050406030204" pitchFamily="18" charset="0"/>
+                          <a:ea typeface="Cambria Math" panose="02040503050406030204" pitchFamily="18" charset="0"/>
+                        </a:rPr>
+                        <m:t>𝑂</m:t>
+                      </m:r>
+                    </m:oMath>
+                  </m:oMathPara>
+                </a14:m>
+                <a:endParaRPr lang="en-US" sz="2000" i="1" dirty="0"/>
+              </a:p>
+            </p:txBody>
+          </p:sp>
+        </mc:Choice>
+        <mc:Fallback>
+          <p:sp>
+            <p:nvSpPr>
+              <p:cNvPr id="18" name="TextBox 17">
+                <a:extLst>
+                  <a:ext uri="{FF2B5EF4-FFF2-40B4-BE49-F238E27FC236}">
+                    <a16:creationId xmlns:a16="http://schemas.microsoft.com/office/drawing/2014/main" id="{F3F4B216-299A-BF1A-97FF-6D4334629386}"/>
+                  </a:ext>
+                </a:extLst>
+              </p:cNvPr>
+              <p:cNvSpPr txBox="1">
+                <a:spLocks noRot="1" noChangeAspect="1" noMove="1" noResize="1" noEditPoints="1" noAdjustHandles="1" noChangeArrowheads="1" noChangeShapeType="1" noTextEdit="1"/>
+              </p:cNvSpPr>
+              <p:nvPr/>
+            </p:nvSpPr>
+            <p:spPr>
+              <a:xfrm>
+                <a:off x="6525135" y="5319308"/>
+                <a:ext cx="338234" cy="307777"/>
+              </a:xfrm>
+              <a:prstGeom prst="rect">
+                <a:avLst/>
+              </a:prstGeom>
+              <a:blipFill>
+                <a:blip r:embed="rId3"/>
+                <a:stretch>
+                  <a:fillRect l="-1786" b="-6000"/>
+                </a:stretch>
+              </a:blipFill>
+            </p:spPr>
+            <p:txBody>
+              <a:bodyPr/>
+              <a:lstStyle/>
+              <a:p>
+                <a:r>
+                  <a:rPr lang="en-IN">
+                    <a:noFill/>
+                  </a:rPr>
+                  <a:t> </a:t>
+                </a:r>
+              </a:p>
+            </p:txBody>
+          </p:sp>
+        </mc:Fallback>
+      </mc:AlternateContent>
+      <mc:AlternateContent xmlns:mc="http://schemas.openxmlformats.org/markup-compatibility/2006">
+        <mc:Choice xmlns:a14="http://schemas.microsoft.com/office/drawing/2010/main" Requires="a14">
+          <p:sp>
+            <p:nvSpPr>
+              <p:cNvPr id="20" name="TextBox 19">
+                <a:extLst>
+                  <a:ext uri="{FF2B5EF4-FFF2-40B4-BE49-F238E27FC236}">
+                    <a16:creationId xmlns:a16="http://schemas.microsoft.com/office/drawing/2014/main" id="{1B01B997-E213-3A89-7725-93B106DF9287}"/>
+                  </a:ext>
+                </a:extLst>
+              </p:cNvPr>
+              <p:cNvSpPr txBox="1"/>
+              <p:nvPr/>
+            </p:nvSpPr>
+            <p:spPr>
+              <a:xfrm>
+                <a:off x="6286095" y="888715"/>
+                <a:ext cx="239040" cy="307777"/>
+              </a:xfrm>
+              <a:prstGeom prst="rect">
+                <a:avLst/>
+              </a:prstGeom>
+              <a:noFill/>
+            </p:spPr>
+            <p:txBody>
+              <a:bodyPr wrap="none" lIns="0" tIns="0" rIns="0" bIns="0" rtlCol="0">
+                <a:spAutoFit/>
+              </a:bodyPr>
+              <a:lstStyle/>
+              <a:p>
+                <a:pPr/>
+                <a14:m>
+                  <m:oMathPara xmlns:m="http://schemas.openxmlformats.org/officeDocument/2006/math">
+                    <m:oMath>
+                      <m:r>
+                        <a:rPr lang="en-US" sz="2000" b="0" i="1" smtClean="0">
+                          <a:latin typeface="Cambria Math" panose="02040503050406030204" pitchFamily="18" charset="0"/>
+                        </a:rPr>
+                        <m:t>𝑈</m:t>
+                      </m:r>
+                    </m:oMath>
+                  </m:oMathPara>
+                </a14:m>
+                <a:endParaRPr lang="en-US" sz="2000" dirty="0"/>
+              </a:p>
+            </p:txBody>
+          </p:sp>
+        </mc:Choice>
+        <mc:Fallback>
+          <p:sp>
+            <p:nvSpPr>
+              <p:cNvPr id="20" name="TextBox 19">
+                <a:extLst>
+                  <a:ext uri="{FF2B5EF4-FFF2-40B4-BE49-F238E27FC236}">
+                    <a16:creationId xmlns:a16="http://schemas.microsoft.com/office/drawing/2014/main" id="{1B01B997-E213-3A89-7725-93B106DF9287}"/>
+                  </a:ext>
+                </a:extLst>
+              </p:cNvPr>
+              <p:cNvSpPr txBox="1">
+                <a:spLocks noRot="1" noChangeAspect="1" noMove="1" noResize="1" noEditPoints="1" noAdjustHandles="1" noChangeArrowheads="1" noChangeShapeType="1" noTextEdit="1"/>
+              </p:cNvSpPr>
+              <p:nvPr/>
+            </p:nvSpPr>
+            <p:spPr>
+              <a:xfrm>
+                <a:off x="6286095" y="888715"/>
+                <a:ext cx="239040" cy="307777"/>
+              </a:xfrm>
+              <a:prstGeom prst="rect">
+                <a:avLst/>
+              </a:prstGeom>
+              <a:blipFill>
+                <a:blip r:embed="rId4"/>
+                <a:stretch>
+                  <a:fillRect l="-23077" r="-25641" b="-6000"/>
+                </a:stretch>
+              </a:blipFill>
+            </p:spPr>
+            <p:txBody>
+              <a:bodyPr/>
+              <a:lstStyle/>
+              <a:p>
+                <a:r>
+                  <a:rPr lang="en-IN">
+                    <a:noFill/>
+                  </a:rPr>
+                  <a:t> </a:t>
+                </a:r>
+              </a:p>
+            </p:txBody>
+          </p:sp>
+        </mc:Fallback>
+      </mc:AlternateContent>
+      <p:grpSp>
+        <p:nvGrpSpPr>
+          <p:cNvPr id="6" name="Group 5">
+            <a:extLst>
+              <a:ext uri="{FF2B5EF4-FFF2-40B4-BE49-F238E27FC236}">
+                <a16:creationId xmlns:a16="http://schemas.microsoft.com/office/drawing/2014/main" id="{1BAB9C92-8F9C-E3A6-B78A-CC807FF3CA3E}"/>
+              </a:ext>
+            </a:extLst>
+          </p:cNvPr>
+          <p:cNvGrpSpPr/>
+          <p:nvPr/>
+        </p:nvGrpSpPr>
+        <p:grpSpPr>
+          <a:xfrm>
+            <a:off x="3564279" y="1306470"/>
+            <a:ext cx="6259947" cy="3884536"/>
+            <a:chOff x="3206363" y="1306470"/>
+            <a:chExt cx="6259947" cy="3884536"/>
+          </a:xfrm>
+        </p:grpSpPr>
+        <p:sp>
+          <p:nvSpPr>
+            <p:cNvPr id="8" name="Arc 7">
+              <a:extLst>
+                <a:ext uri="{FF2B5EF4-FFF2-40B4-BE49-F238E27FC236}">
+                  <a16:creationId xmlns:a16="http://schemas.microsoft.com/office/drawing/2014/main" id="{B60326A2-3A4B-EC60-8E46-F70C48898749}"/>
+                </a:ext>
+              </a:extLst>
+            </p:cNvPr>
+            <p:cNvSpPr/>
+            <p:nvPr/>
+          </p:nvSpPr>
+          <p:spPr>
+            <a:xfrm rot="5400000">
+              <a:off x="5961524" y="1686220"/>
+              <a:ext cx="3884171" cy="3125401"/>
+            </a:xfrm>
+            <a:custGeom>
+              <a:avLst/>
+              <a:gdLst>
+                <a:gd name="csX0" fmla="*/ 0 w 3289821"/>
+                <a:gd name="csY0" fmla="*/ 0 h 2311511"/>
+                <a:gd name="csX1" fmla="*/ 3289821 w 3289821"/>
+                <a:gd name="csY1" fmla="*/ 2311511 h 2311511"/>
+              </a:gdLst>
+              <a:ahLst/>
+              <a:cxnLst>
+                <a:cxn ang="0">
+                  <a:pos x="csX0" y="csY0"/>
+                </a:cxn>
+                <a:cxn ang="0">
+                  <a:pos x="csX1" y="csY1"/>
+                </a:cxn>
+              </a:cxnLst>
+              <a:rect l="l" t="t" r="r" b="b"/>
+              <a:pathLst>
+                <a:path w="3289821" h="2311511" stroke="0" extrusionOk="0">
+                  <a:moveTo>
+                    <a:pt x="666913" y="1455136"/>
+                  </a:moveTo>
+                  <a:cubicBezTo>
+                    <a:pt x="2619850" y="1670451"/>
+                    <a:pt x="3289821" y="1428067"/>
+                    <a:pt x="3289821" y="2311511"/>
+                  </a:cubicBezTo>
+                  <a:lnTo>
+                    <a:pt x="666913" y="1455136"/>
+                  </a:lnTo>
+                  <a:close/>
+                </a:path>
+                <a:path w="3289821" h="2311511" fill="none">
+                  <a:moveTo>
+                    <a:pt x="0" y="0"/>
+                  </a:moveTo>
+                  <a:cubicBezTo>
+                    <a:pt x="1856128" y="510275"/>
+                    <a:pt x="3289821" y="1428067"/>
+                    <a:pt x="3289821" y="2311511"/>
+                  </a:cubicBezTo>
+                </a:path>
+              </a:pathLst>
+            </a:custGeom>
+            <a:ln w="38100" cap="rnd">
+              <a:solidFill>
+                <a:srgbClr val="0070C0"/>
+              </a:solidFill>
+              <a:round/>
+            </a:ln>
+          </p:spPr>
+          <p:style>
+            <a:lnRef idx="1">
+              <a:schemeClr val="accent1"/>
+            </a:lnRef>
+            <a:fillRef idx="0">
+              <a:schemeClr val="accent1"/>
+            </a:fillRef>
+            <a:effectRef idx="0">
+              <a:schemeClr val="accent1"/>
+            </a:effectRef>
+            <a:fontRef idx="minor">
+              <a:schemeClr val="tx1"/>
+            </a:fontRef>
+          </p:style>
+          <p:txBody>
+            <a:bodyPr rtlCol="0" anchor="ctr"/>
+            <a:lstStyle/>
+            <a:p>
+              <a:pPr algn="ctr"/>
+              <a:endParaRPr lang="en-IN"/>
+            </a:p>
+          </p:txBody>
+        </p:sp>
+        <p:sp>
+          <p:nvSpPr>
+            <p:cNvPr id="4" name="Arc 7">
+              <a:extLst>
+                <a:ext uri="{FF2B5EF4-FFF2-40B4-BE49-F238E27FC236}">
+                  <a16:creationId xmlns:a16="http://schemas.microsoft.com/office/drawing/2014/main" id="{F6CC75D1-45C4-6896-8382-3ED2132BEB5C}"/>
+                </a:ext>
+              </a:extLst>
+            </p:cNvPr>
+            <p:cNvSpPr/>
+            <p:nvPr/>
+          </p:nvSpPr>
+          <p:spPr>
+            <a:xfrm rot="16200000" flipH="1">
+              <a:off x="2826978" y="1685855"/>
+              <a:ext cx="3884171" cy="3125401"/>
+            </a:xfrm>
+            <a:custGeom>
+              <a:avLst/>
+              <a:gdLst>
+                <a:gd name="csX0" fmla="*/ 0 w 3289821"/>
+                <a:gd name="csY0" fmla="*/ 0 h 2311511"/>
+                <a:gd name="csX1" fmla="*/ 3289821 w 3289821"/>
+                <a:gd name="csY1" fmla="*/ 2311511 h 2311511"/>
+              </a:gdLst>
+              <a:ahLst/>
+              <a:cxnLst>
+                <a:cxn ang="0">
+                  <a:pos x="csX0" y="csY0"/>
+                </a:cxn>
+                <a:cxn ang="0">
+                  <a:pos x="csX1" y="csY1"/>
+                </a:cxn>
+              </a:cxnLst>
+              <a:rect l="l" t="t" r="r" b="b"/>
+              <a:pathLst>
+                <a:path w="3289821" h="2311511" stroke="0" extrusionOk="0">
+                  <a:moveTo>
+                    <a:pt x="666913" y="1455136"/>
+                  </a:moveTo>
+                  <a:cubicBezTo>
+                    <a:pt x="2619850" y="1670451"/>
+                    <a:pt x="3289821" y="1428067"/>
+                    <a:pt x="3289821" y="2311511"/>
+                  </a:cubicBezTo>
+                  <a:lnTo>
+                    <a:pt x="666913" y="1455136"/>
+                  </a:lnTo>
+                  <a:close/>
+                </a:path>
+                <a:path w="3289821" h="2311511" fill="none">
+                  <a:moveTo>
+                    <a:pt x="0" y="0"/>
+                  </a:moveTo>
+                  <a:cubicBezTo>
+                    <a:pt x="1856128" y="510275"/>
+                    <a:pt x="3289821" y="1428067"/>
+                    <a:pt x="3289821" y="2311511"/>
+                  </a:cubicBezTo>
+                </a:path>
+              </a:pathLst>
+            </a:custGeom>
+            <a:ln w="38100" cap="rnd">
+              <a:solidFill>
+                <a:srgbClr val="0070C0"/>
+              </a:solidFill>
+              <a:round/>
+            </a:ln>
+          </p:spPr>
+          <p:style>
+            <a:lnRef idx="1">
+              <a:schemeClr val="accent1"/>
+            </a:lnRef>
+            <a:fillRef idx="0">
+              <a:schemeClr val="accent1"/>
+            </a:fillRef>
+            <a:effectRef idx="0">
+              <a:schemeClr val="accent1"/>
+            </a:effectRef>
+            <a:fontRef idx="minor">
+              <a:schemeClr val="tx1"/>
+            </a:fontRef>
+          </p:style>
+          <p:txBody>
+            <a:bodyPr rtlCol="0" anchor="ctr"/>
+            <a:lstStyle/>
+            <a:p>
+              <a:pPr algn="ctr"/>
+              <a:endParaRPr lang="en-IN"/>
+            </a:p>
+          </p:txBody>
+        </p:sp>
+      </p:grpSp>
+      <mc:AlternateContent xmlns:mc="http://schemas.openxmlformats.org/markup-compatibility/2006">
+        <mc:Choice xmlns:a14="http://schemas.microsoft.com/office/drawing/2010/main" Requires="a14">
+          <p:sp>
+            <p:nvSpPr>
+              <p:cNvPr id="10" name="TextBox 9">
+                <a:extLst>
+                  <a:ext uri="{FF2B5EF4-FFF2-40B4-BE49-F238E27FC236}">
+                    <a16:creationId xmlns:a16="http://schemas.microsoft.com/office/drawing/2014/main" id="{0EED0702-A46A-9763-5C2C-1FDE9DDB36D2}"/>
+                  </a:ext>
+                </a:extLst>
+              </p:cNvPr>
+              <p:cNvSpPr txBox="1"/>
+              <p:nvPr/>
+            </p:nvSpPr>
+            <p:spPr>
+              <a:xfrm>
+                <a:off x="3206363" y="5319307"/>
+                <a:ext cx="394082" cy="307777"/>
+              </a:xfrm>
+              <a:prstGeom prst="rect">
+                <a:avLst/>
+              </a:prstGeom>
+              <a:noFill/>
+            </p:spPr>
+            <p:txBody>
+              <a:bodyPr wrap="none" lIns="0" tIns="0" rIns="0" bIns="0" rtlCol="0">
+                <a:spAutoFit/>
+              </a:bodyPr>
+              <a:lstStyle/>
+              <a:p>
+                <a:pPr/>
+                <a14:m>
+                  <m:oMathPara xmlns:m="http://schemas.openxmlformats.org/officeDocument/2006/math">
+                    <m:oMath>
+                      <m:r>
+                        <a:rPr lang="en-US" sz="2000" b="0" i="1" smtClean="0">
+                          <a:latin typeface="Cambria Math" panose="02040503050406030204" pitchFamily="18" charset="0"/>
+                        </a:rPr>
+                        <m:t>−</m:t>
+                      </m:r>
+                      <m:r>
+                        <a:rPr lang="en-US" sz="2000" b="0" i="1" smtClean="0">
+                          <a:latin typeface="Cambria Math" panose="02040503050406030204" pitchFamily="18" charset="0"/>
+                        </a:rPr>
+                        <m:t>𝑥</m:t>
+                      </m:r>
+                    </m:oMath>
+                  </m:oMathPara>
+                </a14:m>
+                <a:endParaRPr lang="en-US" sz="2000" dirty="0"/>
+              </a:p>
+            </p:txBody>
+          </p:sp>
+        </mc:Choice>
+        <mc:Fallback>
+          <p:sp>
+            <p:nvSpPr>
+              <p:cNvPr id="10" name="TextBox 9">
+                <a:extLst>
+                  <a:ext uri="{FF2B5EF4-FFF2-40B4-BE49-F238E27FC236}">
+                    <a16:creationId xmlns:a16="http://schemas.microsoft.com/office/drawing/2014/main" id="{0EED0702-A46A-9763-5C2C-1FDE9DDB36D2}"/>
+                  </a:ext>
+                </a:extLst>
+              </p:cNvPr>
+              <p:cNvSpPr txBox="1">
+                <a:spLocks noRot="1" noChangeAspect="1" noMove="1" noResize="1" noEditPoints="1" noAdjustHandles="1" noChangeArrowheads="1" noChangeShapeType="1" noTextEdit="1"/>
+              </p:cNvSpPr>
+              <p:nvPr/>
+            </p:nvSpPr>
+            <p:spPr>
+              <a:xfrm>
+                <a:off x="3206363" y="5319307"/>
+                <a:ext cx="394082" cy="307777"/>
+              </a:xfrm>
+              <a:prstGeom prst="rect">
+                <a:avLst/>
+              </a:prstGeom>
+              <a:blipFill>
+                <a:blip r:embed="rId5"/>
+                <a:stretch>
+                  <a:fillRect l="-4615" r="-4615"/>
+                </a:stretch>
+              </a:blipFill>
+            </p:spPr>
+            <p:txBody>
+              <a:bodyPr/>
+              <a:lstStyle/>
+              <a:p>
+                <a:r>
+                  <a:rPr lang="en-IN">
+                    <a:noFill/>
+                  </a:rPr>
+                  <a:t> </a:t>
+                </a:r>
+              </a:p>
+            </p:txBody>
+          </p:sp>
+        </mc:Fallback>
+      </mc:AlternateContent>
+      <p:sp>
+        <p:nvSpPr>
+          <p:cNvPr id="12" name="Oval 11">
+            <a:extLst>
+              <a:ext uri="{FF2B5EF4-FFF2-40B4-BE49-F238E27FC236}">
+                <a16:creationId xmlns:a16="http://schemas.microsoft.com/office/drawing/2014/main" id="{199505DF-9E35-2267-BD6A-0D5CEE741527}"/>
+              </a:ext>
+            </a:extLst>
+          </p:cNvPr>
+          <p:cNvSpPr/>
+          <p:nvPr/>
+        </p:nvSpPr>
+        <p:spPr>
+          <a:xfrm>
+            <a:off x="9091310" y="2890779"/>
+            <a:ext cx="132616" cy="132616"/>
+          </a:xfrm>
+          <a:prstGeom prst="ellipse">
+            <a:avLst/>
+          </a:prstGeom>
+          <a:solidFill>
+            <a:schemeClr val="tx1"/>
+          </a:solidFill>
+          <a:ln>
+            <a:noFill/>
+          </a:ln>
+        </p:spPr>
+        <p:style>
+          <a:lnRef idx="2">
+            <a:schemeClr val="accent1">
+              <a:shade val="15000"/>
+            </a:schemeClr>
+          </a:lnRef>
+          <a:fillRef idx="1">
+            <a:schemeClr val="accent1"/>
+          </a:fillRef>
+          <a:effectRef idx="0">
+            <a:schemeClr val="accent1"/>
+          </a:effectRef>
+          <a:fontRef idx="minor">
+            <a:schemeClr val="lt1"/>
+          </a:fontRef>
+        </p:style>
+        <p:txBody>
+          <a:bodyPr rtlCol="0" anchor="ctr"/>
+          <a:lstStyle/>
+          <a:p>
+            <a:pPr algn="ctr"/>
+            <a:endParaRPr lang="en-IN"/>
+          </a:p>
+        </p:txBody>
+      </p:sp>
+      <p:cxnSp>
+        <p:nvCxnSpPr>
+          <p:cNvPr id="22" name="Straight Connector 21">
+            <a:extLst>
+              <a:ext uri="{FF2B5EF4-FFF2-40B4-BE49-F238E27FC236}">
+                <a16:creationId xmlns:a16="http://schemas.microsoft.com/office/drawing/2014/main" id="{AB419F4F-BDB5-4945-8E0F-59DC41E0CA1A}"/>
+              </a:ext>
+            </a:extLst>
+          </p:cNvPr>
+          <p:cNvCxnSpPr>
+            <a:cxnSpLocks/>
+          </p:cNvCxnSpPr>
+          <p:nvPr/>
+        </p:nvCxnSpPr>
+        <p:spPr>
+          <a:xfrm>
+            <a:off x="8055595" y="4548188"/>
+            <a:ext cx="0" cy="715962"/>
+          </a:xfrm>
+          <a:prstGeom prst="line">
+            <a:avLst/>
+          </a:prstGeom>
+          <a:ln w="19050" cap="rnd">
+            <a:solidFill>
+              <a:schemeClr val="tx1"/>
+            </a:solidFill>
+            <a:prstDash val="dash"/>
+            <a:round/>
+          </a:ln>
+        </p:spPr>
+        <p:style>
+          <a:lnRef idx="1">
+            <a:schemeClr val="accent1"/>
+          </a:lnRef>
+          <a:fillRef idx="0">
+            <a:schemeClr val="accent1"/>
+          </a:fillRef>
+          <a:effectRef idx="0">
+            <a:schemeClr val="accent1"/>
+          </a:effectRef>
+          <a:fontRef idx="minor">
+            <a:schemeClr val="tx1"/>
+          </a:fontRef>
+        </p:style>
+      </p:cxnSp>
+      <p:sp>
+        <p:nvSpPr>
+          <p:cNvPr id="23" name="Oval 22">
+            <a:extLst>
+              <a:ext uri="{FF2B5EF4-FFF2-40B4-BE49-F238E27FC236}">
+                <a16:creationId xmlns:a16="http://schemas.microsoft.com/office/drawing/2014/main" id="{0FE434E0-7726-67E7-722D-084823AFF7B1}"/>
+              </a:ext>
+            </a:extLst>
+          </p:cNvPr>
+          <p:cNvSpPr/>
+          <p:nvPr/>
+        </p:nvSpPr>
+        <p:spPr>
+          <a:xfrm>
+            <a:off x="7994015" y="4442563"/>
+            <a:ext cx="132616" cy="132616"/>
+          </a:xfrm>
+          <a:prstGeom prst="ellipse">
+            <a:avLst/>
+          </a:prstGeom>
+          <a:solidFill>
+            <a:schemeClr val="tx1"/>
+          </a:solidFill>
+          <a:ln>
+            <a:noFill/>
+          </a:ln>
+        </p:spPr>
+        <p:style>
+          <a:lnRef idx="2">
+            <a:schemeClr val="accent1">
+              <a:shade val="15000"/>
+            </a:schemeClr>
+          </a:lnRef>
+          <a:fillRef idx="1">
+            <a:schemeClr val="accent1"/>
+          </a:fillRef>
+          <a:effectRef idx="0">
+            <a:schemeClr val="accent1"/>
+          </a:effectRef>
+          <a:fontRef idx="minor">
+            <a:schemeClr val="lt1"/>
+          </a:fontRef>
+        </p:style>
+        <p:txBody>
+          <a:bodyPr rtlCol="0" anchor="ctr"/>
+          <a:lstStyle/>
+          <a:p>
+            <a:pPr algn="ctr"/>
+            <a:endParaRPr lang="en-IN"/>
+          </a:p>
+        </p:txBody>
+      </p:sp>
+      <mc:AlternateContent xmlns:mc="http://schemas.openxmlformats.org/markup-compatibility/2006">
+        <mc:Choice xmlns:a14="http://schemas.microsoft.com/office/drawing/2010/main" Requires="a14">
+          <p:sp>
+            <p:nvSpPr>
+              <p:cNvPr id="29" name="TextBox 28">
+                <a:extLst>
+                  <a:ext uri="{FF2B5EF4-FFF2-40B4-BE49-F238E27FC236}">
+                    <a16:creationId xmlns:a16="http://schemas.microsoft.com/office/drawing/2014/main" id="{5CACB0C7-528C-E531-3896-972A85AC01D4}"/>
+                  </a:ext>
+                </a:extLst>
+              </p:cNvPr>
+              <p:cNvSpPr txBox="1"/>
+              <p:nvPr/>
+            </p:nvSpPr>
+            <p:spPr>
+              <a:xfrm>
+                <a:off x="8743931" y="2583002"/>
+                <a:ext cx="338234" cy="307777"/>
+              </a:xfrm>
+              <a:prstGeom prst="rect">
+                <a:avLst/>
+              </a:prstGeom>
+              <a:noFill/>
+            </p:spPr>
+            <p:txBody>
+              <a:bodyPr wrap="square" lIns="0" tIns="0" rIns="0" bIns="0" rtlCol="0">
+                <a:spAutoFit/>
+              </a:bodyPr>
+              <a:lstStyle/>
+              <a:p>
+                <a:pPr/>
+                <a14:m>
+                  <m:oMathPara xmlns:m="http://schemas.openxmlformats.org/officeDocument/2006/math">
+                    <m:oMath>
+                      <m:r>
+                        <a:rPr lang="en-US" sz="2000" b="0" i="1" smtClean="0">
+                          <a:latin typeface="Cambria Math" panose="02040503050406030204" pitchFamily="18" charset="0"/>
+                          <a:ea typeface="Cambria Math" panose="02040503050406030204" pitchFamily="18" charset="0"/>
+                        </a:rPr>
+                        <m:t>#1</m:t>
+                      </m:r>
+                    </m:oMath>
+                  </m:oMathPara>
+                </a14:m>
+                <a:endParaRPr lang="en-US" sz="2000" i="1" dirty="0"/>
+              </a:p>
+            </p:txBody>
+          </p:sp>
+        </mc:Choice>
+        <mc:Fallback>
+          <p:sp>
+            <p:nvSpPr>
+              <p:cNvPr id="29" name="TextBox 28">
+                <a:extLst>
+                  <a:ext uri="{FF2B5EF4-FFF2-40B4-BE49-F238E27FC236}">
+                    <a16:creationId xmlns:a16="http://schemas.microsoft.com/office/drawing/2014/main" id="{5CACB0C7-528C-E531-3896-972A85AC01D4}"/>
+                  </a:ext>
+                </a:extLst>
+              </p:cNvPr>
+              <p:cNvSpPr txBox="1">
+                <a:spLocks noRot="1" noChangeAspect="1" noMove="1" noResize="1" noEditPoints="1" noAdjustHandles="1" noChangeArrowheads="1" noChangeShapeType="1" noTextEdit="1"/>
+              </p:cNvSpPr>
+              <p:nvPr/>
+            </p:nvSpPr>
+            <p:spPr>
+              <a:xfrm>
+                <a:off x="8743931" y="2583002"/>
+                <a:ext cx="338234" cy="307777"/>
+              </a:xfrm>
+              <a:prstGeom prst="rect">
+                <a:avLst/>
+              </a:prstGeom>
+              <a:blipFill>
+                <a:blip r:embed="rId6"/>
+                <a:stretch>
+                  <a:fillRect l="-19643" r="-19643" b="-6000"/>
+                </a:stretch>
+              </a:blipFill>
+            </p:spPr>
+            <p:txBody>
+              <a:bodyPr/>
+              <a:lstStyle/>
+              <a:p>
+                <a:r>
+                  <a:rPr lang="en-IN">
+                    <a:noFill/>
+                  </a:rPr>
+                  <a:t> </a:t>
+                </a:r>
+              </a:p>
+            </p:txBody>
+          </p:sp>
+        </mc:Fallback>
+      </mc:AlternateContent>
+      <mc:AlternateContent xmlns:mc="http://schemas.openxmlformats.org/markup-compatibility/2006">
+        <mc:Choice xmlns:a14="http://schemas.microsoft.com/office/drawing/2010/main" Requires="a14">
+          <p:sp>
+            <p:nvSpPr>
+              <p:cNvPr id="31" name="TextBox 30">
+                <a:extLst>
+                  <a:ext uri="{FF2B5EF4-FFF2-40B4-BE49-F238E27FC236}">
+                    <a16:creationId xmlns:a16="http://schemas.microsoft.com/office/drawing/2014/main" id="{1B05E256-DAB1-0061-4E76-1D9EC4FB92C0}"/>
+                  </a:ext>
+                </a:extLst>
+              </p:cNvPr>
+              <p:cNvSpPr txBox="1"/>
+              <p:nvPr/>
+            </p:nvSpPr>
+            <p:spPr>
+              <a:xfrm>
+                <a:off x="7655781" y="4134786"/>
+                <a:ext cx="338234" cy="307777"/>
+              </a:xfrm>
+              <a:prstGeom prst="rect">
+                <a:avLst/>
+              </a:prstGeom>
+              <a:noFill/>
+            </p:spPr>
+            <p:txBody>
+              <a:bodyPr wrap="square" lIns="0" tIns="0" rIns="0" bIns="0" rtlCol="0">
+                <a:spAutoFit/>
+              </a:bodyPr>
+              <a:lstStyle/>
+              <a:p>
+                <a:pPr/>
+                <a14:m>
+                  <m:oMathPara xmlns:m="http://schemas.openxmlformats.org/officeDocument/2006/math">
+                    <m:oMath>
+                      <m:r>
+                        <a:rPr lang="en-US" sz="2000" b="0" i="1" smtClean="0">
+                          <a:latin typeface="Cambria Math" panose="02040503050406030204" pitchFamily="18" charset="0"/>
+                          <a:ea typeface="Cambria Math" panose="02040503050406030204" pitchFamily="18" charset="0"/>
+                        </a:rPr>
+                        <m:t>#2</m:t>
+                      </m:r>
+                    </m:oMath>
+                  </m:oMathPara>
+                </a14:m>
+                <a:endParaRPr lang="en-US" sz="2000" i="1" dirty="0"/>
+              </a:p>
+            </p:txBody>
+          </p:sp>
+        </mc:Choice>
+        <mc:Fallback>
+          <p:sp>
+            <p:nvSpPr>
+              <p:cNvPr id="31" name="TextBox 30">
+                <a:extLst>
+                  <a:ext uri="{FF2B5EF4-FFF2-40B4-BE49-F238E27FC236}">
+                    <a16:creationId xmlns:a16="http://schemas.microsoft.com/office/drawing/2014/main" id="{1B05E256-DAB1-0061-4E76-1D9EC4FB92C0}"/>
+                  </a:ext>
+                </a:extLst>
+              </p:cNvPr>
+              <p:cNvSpPr txBox="1">
+                <a:spLocks noRot="1" noChangeAspect="1" noMove="1" noResize="1" noEditPoints="1" noAdjustHandles="1" noChangeArrowheads="1" noChangeShapeType="1" noTextEdit="1"/>
+              </p:cNvSpPr>
+              <p:nvPr/>
+            </p:nvSpPr>
+            <p:spPr>
+              <a:xfrm>
+                <a:off x="7655781" y="4134786"/>
+                <a:ext cx="338234" cy="307777"/>
+              </a:xfrm>
+              <a:prstGeom prst="rect">
+                <a:avLst/>
+              </a:prstGeom>
+              <a:blipFill>
+                <a:blip r:embed="rId7"/>
+                <a:stretch>
+                  <a:fillRect l="-21818" r="-20000" b="-5882"/>
+                </a:stretch>
+              </a:blipFill>
+            </p:spPr>
+            <p:txBody>
+              <a:bodyPr/>
+              <a:lstStyle/>
+              <a:p>
+                <a:r>
+                  <a:rPr lang="en-IN">
+                    <a:noFill/>
+                  </a:rPr>
+                  <a:t> </a:t>
+                </a:r>
+              </a:p>
+            </p:txBody>
+          </p:sp>
+        </mc:Fallback>
+      </mc:AlternateContent>
+      <p:cxnSp>
+        <p:nvCxnSpPr>
+          <p:cNvPr id="33" name="Straight Arrow Connector 32">
+            <a:extLst>
+              <a:ext uri="{FF2B5EF4-FFF2-40B4-BE49-F238E27FC236}">
+                <a16:creationId xmlns:a16="http://schemas.microsoft.com/office/drawing/2014/main" id="{191627A1-3FE9-BF12-2078-C4D8C811D0FF}"/>
+              </a:ext>
+            </a:extLst>
+          </p:cNvPr>
+          <p:cNvCxnSpPr>
+            <a:cxnSpLocks/>
+          </p:cNvCxnSpPr>
+          <p:nvPr/>
+        </p:nvCxnSpPr>
+        <p:spPr>
+          <a:xfrm flipH="1">
+            <a:off x="8851900" y="3006726"/>
+            <a:ext cx="273375" cy="482599"/>
+          </a:xfrm>
+          <a:prstGeom prst="straightConnector1">
+            <a:avLst/>
+          </a:prstGeom>
+          <a:ln w="38100">
+            <a:solidFill>
+              <a:schemeClr val="tx1"/>
+            </a:solidFill>
+            <a:tailEnd type="triangle" w="lg" len="lg"/>
+          </a:ln>
+        </p:spPr>
+        <p:style>
+          <a:lnRef idx="1">
+            <a:schemeClr val="accent1"/>
+          </a:lnRef>
+          <a:fillRef idx="0">
+            <a:schemeClr val="accent1"/>
+          </a:fillRef>
+          <a:effectRef idx="0">
+            <a:schemeClr val="accent1"/>
+          </a:effectRef>
+          <a:fontRef idx="minor">
+            <a:schemeClr val="tx1"/>
+          </a:fontRef>
+        </p:style>
+      </p:cxnSp>
+      <mc:AlternateContent xmlns:mc="http://schemas.openxmlformats.org/markup-compatibility/2006">
+        <mc:Choice xmlns:a14="http://schemas.microsoft.com/office/drawing/2010/main" Requires="a14">
+          <p:sp>
+            <p:nvSpPr>
+              <p:cNvPr id="38" name="TextBox 37">
+                <a:extLst>
+                  <a:ext uri="{FF2B5EF4-FFF2-40B4-BE49-F238E27FC236}">
+                    <a16:creationId xmlns:a16="http://schemas.microsoft.com/office/drawing/2014/main" id="{791FDD41-8821-51E8-1816-6FDBAAC21848}"/>
+                  </a:ext>
+                </a:extLst>
+              </p:cNvPr>
+              <p:cNvSpPr txBox="1"/>
+              <p:nvPr/>
+            </p:nvSpPr>
+            <p:spPr>
+              <a:xfrm>
+                <a:off x="9034625" y="5227653"/>
+                <a:ext cx="311111" cy="307777"/>
+              </a:xfrm>
+              <a:prstGeom prst="rect">
+                <a:avLst/>
+              </a:prstGeom>
+              <a:noFill/>
+            </p:spPr>
+            <p:txBody>
+              <a:bodyPr wrap="none" lIns="0" tIns="0" rIns="0" bIns="0" rtlCol="0">
+                <a:spAutoFit/>
+              </a:bodyPr>
+              <a:lstStyle/>
+              <a:p>
+                <a:pPr/>
+                <a14:m>
+                  <m:oMathPara xmlns:m="http://schemas.openxmlformats.org/officeDocument/2006/math">
+                    <m:oMath>
+                      <m:sSub>
+                        <m:sSubPr>
+                          <m:ctrlPr>
+                            <a:rPr lang="en-US" sz="2000" b="0" i="1" smtClean="0">
+                              <a:latin typeface="Cambria Math" panose="02040503050406030204" pitchFamily="18" charset="0"/>
+                            </a:rPr>
+                          </m:ctrlPr>
+                        </m:sSubPr>
+                        <m:e>
+                          <m:r>
+                            <a:rPr lang="en-US" sz="2000" b="0" i="1" smtClean="0">
+                              <a:latin typeface="Cambria Math" panose="02040503050406030204" pitchFamily="18" charset="0"/>
+                            </a:rPr>
+                            <m:t>𝑥</m:t>
+                          </m:r>
+                        </m:e>
+                        <m:sub>
+                          <m:r>
+                            <a:rPr lang="en-US" sz="2000" b="0" i="1" smtClean="0">
+                              <a:latin typeface="Cambria Math" panose="02040503050406030204" pitchFamily="18" charset="0"/>
+                            </a:rPr>
+                            <m:t>0</m:t>
+                          </m:r>
+                        </m:sub>
+                      </m:sSub>
+                    </m:oMath>
+                  </m:oMathPara>
+                </a14:m>
+                <a:endParaRPr lang="en-US" sz="2000" dirty="0"/>
+              </a:p>
+            </p:txBody>
+          </p:sp>
+        </mc:Choice>
+        <mc:Fallback>
+          <p:sp>
+            <p:nvSpPr>
+              <p:cNvPr id="38" name="TextBox 37">
+                <a:extLst>
+                  <a:ext uri="{FF2B5EF4-FFF2-40B4-BE49-F238E27FC236}">
+                    <a16:creationId xmlns:a16="http://schemas.microsoft.com/office/drawing/2014/main" id="{791FDD41-8821-51E8-1816-6FDBAAC21848}"/>
+                  </a:ext>
+                </a:extLst>
+              </p:cNvPr>
+              <p:cNvSpPr txBox="1">
+                <a:spLocks noRot="1" noChangeAspect="1" noMove="1" noResize="1" noEditPoints="1" noAdjustHandles="1" noChangeArrowheads="1" noChangeShapeType="1" noTextEdit="1"/>
+              </p:cNvSpPr>
+              <p:nvPr/>
+            </p:nvSpPr>
+            <p:spPr>
+              <a:xfrm>
+                <a:off x="9034625" y="5227653"/>
+                <a:ext cx="311111" cy="307777"/>
+              </a:xfrm>
+              <a:prstGeom prst="rect">
+                <a:avLst/>
+              </a:prstGeom>
+              <a:blipFill>
+                <a:blip r:embed="rId8"/>
+                <a:stretch>
+                  <a:fillRect l="-9804" r="-5882" b="-16000"/>
+                </a:stretch>
+              </a:blipFill>
+            </p:spPr>
+            <p:txBody>
+              <a:bodyPr/>
+              <a:lstStyle/>
+              <a:p>
+                <a:r>
+                  <a:rPr lang="en-IN">
+                    <a:noFill/>
+                  </a:rPr>
+                  <a:t> </a:t>
+                </a:r>
+              </a:p>
+            </p:txBody>
+          </p:sp>
+        </mc:Fallback>
+      </mc:AlternateContent>
+      <mc:AlternateContent xmlns:mc="http://schemas.openxmlformats.org/markup-compatibility/2006">
+        <mc:Choice xmlns:a14="http://schemas.microsoft.com/office/drawing/2010/main" Requires="a14">
+          <p:sp>
+            <p:nvSpPr>
+              <p:cNvPr id="40" name="TextBox 39">
+                <a:extLst>
+                  <a:ext uri="{FF2B5EF4-FFF2-40B4-BE49-F238E27FC236}">
+                    <a16:creationId xmlns:a16="http://schemas.microsoft.com/office/drawing/2014/main" id="{9732CFA6-AA7E-F162-34E9-D0741D29F531}"/>
+                  </a:ext>
+                </a:extLst>
+              </p:cNvPr>
+              <p:cNvSpPr txBox="1"/>
+              <p:nvPr/>
+            </p:nvSpPr>
+            <p:spPr>
+              <a:xfrm>
+                <a:off x="7954734" y="5227652"/>
+                <a:ext cx="201722" cy="307777"/>
+              </a:xfrm>
+              <a:prstGeom prst="rect">
+                <a:avLst/>
+              </a:prstGeom>
+              <a:noFill/>
+            </p:spPr>
+            <p:txBody>
+              <a:bodyPr wrap="none" lIns="0" tIns="0" rIns="0" bIns="0" rtlCol="0">
+                <a:spAutoFit/>
+              </a:bodyPr>
+              <a:lstStyle/>
+              <a:p>
+                <a:pPr/>
+                <a14:m>
+                  <m:oMathPara xmlns:m="http://schemas.openxmlformats.org/officeDocument/2006/math">
+                    <m:oMath>
+                      <m:r>
+                        <a:rPr lang="en-US" sz="2000" b="0" i="1" smtClean="0">
+                          <a:latin typeface="Cambria Math" panose="02040503050406030204" pitchFamily="18" charset="0"/>
+                        </a:rPr>
+                        <m:t>𝑥</m:t>
+                      </m:r>
+                    </m:oMath>
+                  </m:oMathPara>
+                </a14:m>
+                <a:endParaRPr lang="en-US" sz="2000" dirty="0"/>
+              </a:p>
+            </p:txBody>
+          </p:sp>
+        </mc:Choice>
+        <mc:Fallback>
+          <p:sp>
+            <p:nvSpPr>
+              <p:cNvPr id="40" name="TextBox 39">
+                <a:extLst>
+                  <a:ext uri="{FF2B5EF4-FFF2-40B4-BE49-F238E27FC236}">
+                    <a16:creationId xmlns:a16="http://schemas.microsoft.com/office/drawing/2014/main" id="{9732CFA6-AA7E-F162-34E9-D0741D29F531}"/>
+                  </a:ext>
+                </a:extLst>
+              </p:cNvPr>
+              <p:cNvSpPr txBox="1">
+                <a:spLocks noRot="1" noChangeAspect="1" noMove="1" noResize="1" noEditPoints="1" noAdjustHandles="1" noChangeArrowheads="1" noChangeShapeType="1" noTextEdit="1"/>
+              </p:cNvSpPr>
+              <p:nvPr/>
+            </p:nvSpPr>
+            <p:spPr>
+              <a:xfrm>
+                <a:off x="7954734" y="5227652"/>
+                <a:ext cx="201722" cy="307777"/>
+              </a:xfrm>
+              <a:prstGeom prst="rect">
+                <a:avLst/>
+              </a:prstGeom>
+              <a:blipFill>
+                <a:blip r:embed="rId9"/>
+                <a:stretch>
+                  <a:fillRect l="-18182" r="-12121"/>
+                </a:stretch>
+              </a:blipFill>
+            </p:spPr>
+            <p:txBody>
+              <a:bodyPr/>
+              <a:lstStyle/>
+              <a:p>
+                <a:r>
+                  <a:rPr lang="en-IN">
+                    <a:noFill/>
+                  </a:rPr>
+                  <a:t> </a:t>
+                </a:r>
+              </a:p>
+            </p:txBody>
+          </p:sp>
+        </mc:Fallback>
+      </mc:AlternateContent>
+    </p:spTree>
+    <p:extLst>
+      <p:ext uri="{BB962C8B-B14F-4D97-AF65-F5344CB8AC3E}">
+        <p14:creationId xmlns:p14="http://schemas.microsoft.com/office/powerpoint/2010/main" val="4249968890"/>
       </p:ext>
     </p:extLst>
   </p:cSld>

--- a/U2-Work-and-Energy/figures/all-figs.pptx
+++ b/U2-Work-and-Energy/figures/all-figs.pptx
@@ -14,6 +14,7 @@
     <p:sldId id="262" r:id="rId8"/>
     <p:sldId id="263" r:id="rId9"/>
     <p:sldId id="264" r:id="rId10"/>
+    <p:sldId id="265" r:id="rId11"/>
   </p:sldIdLst>
   <p:sldSz cx="12192000" cy="6858000"/>
   <p:notesSz cx="6858000" cy="9144000"/>
@@ -249,7 +250,7 @@
           <a:p>
             <a:fld id="{ED22BB23-F442-40A7-A37A-0DE665FB7F05}" type="datetimeFigureOut">
               <a:rPr lang="en-US" smtClean="0"/>
-              <a:t>10/19/2026</a:t>
+              <a:t>10/20/2026</a:t>
             </a:fld>
             <a:endParaRPr lang="en-US"/>
           </a:p>
@@ -417,7 +418,7 @@
           <a:p>
             <a:fld id="{ED22BB23-F442-40A7-A37A-0DE665FB7F05}" type="datetimeFigureOut">
               <a:rPr lang="en-US" smtClean="0"/>
-              <a:t>10/19/2026</a:t>
+              <a:t>10/20/2026</a:t>
             </a:fld>
             <a:endParaRPr lang="en-US"/>
           </a:p>
@@ -595,7 +596,7 @@
           <a:p>
             <a:fld id="{ED22BB23-F442-40A7-A37A-0DE665FB7F05}" type="datetimeFigureOut">
               <a:rPr lang="en-US" smtClean="0"/>
-              <a:t>10/19/2026</a:t>
+              <a:t>10/20/2026</a:t>
             </a:fld>
             <a:endParaRPr lang="en-US"/>
           </a:p>
@@ -763,7 +764,7 @@
           <a:p>
             <a:fld id="{ED22BB23-F442-40A7-A37A-0DE665FB7F05}" type="datetimeFigureOut">
               <a:rPr lang="en-US" smtClean="0"/>
-              <a:t>10/19/2026</a:t>
+              <a:t>10/20/2026</a:t>
             </a:fld>
             <a:endParaRPr lang="en-US"/>
           </a:p>
@@ -1008,7 +1009,7 @@
           <a:p>
             <a:fld id="{ED22BB23-F442-40A7-A37A-0DE665FB7F05}" type="datetimeFigureOut">
               <a:rPr lang="en-US" smtClean="0"/>
-              <a:t>10/19/2026</a:t>
+              <a:t>10/20/2026</a:t>
             </a:fld>
             <a:endParaRPr lang="en-US"/>
           </a:p>
@@ -1237,7 +1238,7 @@
           <a:p>
             <a:fld id="{ED22BB23-F442-40A7-A37A-0DE665FB7F05}" type="datetimeFigureOut">
               <a:rPr lang="en-US" smtClean="0"/>
-              <a:t>10/19/2026</a:t>
+              <a:t>10/20/2026</a:t>
             </a:fld>
             <a:endParaRPr lang="en-US"/>
           </a:p>
@@ -1601,7 +1602,7 @@
           <a:p>
             <a:fld id="{ED22BB23-F442-40A7-A37A-0DE665FB7F05}" type="datetimeFigureOut">
               <a:rPr lang="en-US" smtClean="0"/>
-              <a:t>10/19/2026</a:t>
+              <a:t>10/20/2026</a:t>
             </a:fld>
             <a:endParaRPr lang="en-US"/>
           </a:p>
@@ -1718,7 +1719,7 @@
           <a:p>
             <a:fld id="{ED22BB23-F442-40A7-A37A-0DE665FB7F05}" type="datetimeFigureOut">
               <a:rPr lang="en-US" smtClean="0"/>
-              <a:t>10/19/2026</a:t>
+              <a:t>10/20/2026</a:t>
             </a:fld>
             <a:endParaRPr lang="en-US"/>
           </a:p>
@@ -1813,7 +1814,7 @@
           <a:p>
             <a:fld id="{ED22BB23-F442-40A7-A37A-0DE665FB7F05}" type="datetimeFigureOut">
               <a:rPr lang="en-US" smtClean="0"/>
-              <a:t>10/19/2026</a:t>
+              <a:t>10/20/2026</a:t>
             </a:fld>
             <a:endParaRPr lang="en-US"/>
           </a:p>
@@ -2088,7 +2089,7 @@
           <a:p>
             <a:fld id="{ED22BB23-F442-40A7-A37A-0DE665FB7F05}" type="datetimeFigureOut">
               <a:rPr lang="en-US" smtClean="0"/>
-              <a:t>10/19/2026</a:t>
+              <a:t>10/20/2026</a:t>
             </a:fld>
             <a:endParaRPr lang="en-US"/>
           </a:p>
@@ -2340,7 +2341,7 @@
           <a:p>
             <a:fld id="{ED22BB23-F442-40A7-A37A-0DE665FB7F05}" type="datetimeFigureOut">
               <a:rPr lang="en-US" smtClean="0"/>
-              <a:t>10/19/2026</a:t>
+              <a:t>10/20/2026</a:t>
             </a:fld>
             <a:endParaRPr lang="en-US"/>
           </a:p>
@@ -2551,7 +2552,7 @@
           <a:p>
             <a:fld id="{ED22BB23-F442-40A7-A37A-0DE665FB7F05}" type="datetimeFigureOut">
               <a:rPr lang="en-US" smtClean="0"/>
-              <a:t>10/19/2026</a:t>
+              <a:t>10/20/2026</a:t>
             </a:fld>
             <a:endParaRPr lang="en-US"/>
           </a:p>
@@ -4447,6 +4448,3651 @@
     <p:extLst>
       <p:ext uri="{BB962C8B-B14F-4D97-AF65-F5344CB8AC3E}">
         <p14:creationId xmlns:p14="http://schemas.microsoft.com/office/powerpoint/2010/main" val="3326414452"/>
+      </p:ext>
+    </p:extLst>
+  </p:cSld>
+  <p:clrMapOvr>
+    <a:masterClrMapping/>
+  </p:clrMapOvr>
+</p:sld>
+</file>
+
+<file path=ppt/slides/slide10.xml><?xml version="1.0" encoding="utf-8"?>
+<p:sld xmlns:a="http://schemas.openxmlformats.org/drawingml/2006/main" xmlns:r="http://schemas.openxmlformats.org/officeDocument/2006/relationships" xmlns:p="http://schemas.openxmlformats.org/presentationml/2006/main">
+  <p:cSld>
+    <p:spTree>
+      <p:nvGrpSpPr>
+        <p:cNvPr id="1" name="">
+          <a:extLst>
+            <a:ext uri="{FF2B5EF4-FFF2-40B4-BE49-F238E27FC236}">
+              <a16:creationId xmlns:a16="http://schemas.microsoft.com/office/drawing/2014/main" id="{28DFEB6A-B496-A195-1E8A-1C7909FF3D32}"/>
+            </a:ext>
+          </a:extLst>
+        </p:cNvPr>
+        <p:cNvGrpSpPr/>
+        <p:nvPr/>
+      </p:nvGrpSpPr>
+      <p:grpSpPr>
+        <a:xfrm>
+          <a:off x="0" y="0"/>
+          <a:ext cx="0" cy="0"/>
+          <a:chOff x="0" y="0"/>
+          <a:chExt cx="0" cy="0"/>
+        </a:xfrm>
+      </p:grpSpPr>
+      <p:cxnSp>
+        <p:nvCxnSpPr>
+          <p:cNvPr id="19" name="Straight Connector 18">
+            <a:extLst>
+              <a:ext uri="{FF2B5EF4-FFF2-40B4-BE49-F238E27FC236}">
+                <a16:creationId xmlns:a16="http://schemas.microsoft.com/office/drawing/2014/main" id="{87BA3E2A-FBAC-F183-8C0A-659CACB54945}"/>
+              </a:ext>
+            </a:extLst>
+          </p:cNvPr>
+          <p:cNvCxnSpPr>
+            <a:cxnSpLocks/>
+          </p:cNvCxnSpPr>
+          <p:nvPr/>
+        </p:nvCxnSpPr>
+        <p:spPr>
+          <a:xfrm>
+            <a:off x="7802913" y="2162175"/>
+            <a:ext cx="0" cy="3140075"/>
+          </a:xfrm>
+          <a:prstGeom prst="line">
+            <a:avLst/>
+          </a:prstGeom>
+          <a:ln w="19050" cap="rnd">
+            <a:solidFill>
+              <a:schemeClr val="tx1"/>
+            </a:solidFill>
+            <a:prstDash val="dash"/>
+            <a:round/>
+          </a:ln>
+        </p:spPr>
+        <p:style>
+          <a:lnRef idx="1">
+            <a:schemeClr val="accent1"/>
+          </a:lnRef>
+          <a:fillRef idx="0">
+            <a:schemeClr val="accent1"/>
+          </a:fillRef>
+          <a:effectRef idx="0">
+            <a:schemeClr val="accent1"/>
+          </a:effectRef>
+          <a:fontRef idx="minor">
+            <a:schemeClr val="tx1"/>
+          </a:fontRef>
+        </p:style>
+      </p:cxnSp>
+      <p:cxnSp>
+        <p:nvCxnSpPr>
+          <p:cNvPr id="3" name="Straight Connector 2">
+            <a:extLst>
+              <a:ext uri="{FF2B5EF4-FFF2-40B4-BE49-F238E27FC236}">
+                <a16:creationId xmlns:a16="http://schemas.microsoft.com/office/drawing/2014/main" id="{2991F7A1-EA65-71C6-2F7D-B860C532E874}"/>
+              </a:ext>
+            </a:extLst>
+          </p:cNvPr>
+          <p:cNvCxnSpPr>
+            <a:cxnSpLocks/>
+          </p:cNvCxnSpPr>
+          <p:nvPr/>
+        </p:nvCxnSpPr>
+        <p:spPr>
+          <a:xfrm>
+            <a:off x="1431307" y="5209329"/>
+            <a:ext cx="7076637" cy="0"/>
+          </a:xfrm>
+          <a:prstGeom prst="line">
+            <a:avLst/>
+          </a:prstGeom>
+          <a:ln w="28575" cap="rnd">
+            <a:solidFill>
+              <a:schemeClr val="tx1"/>
+            </a:solidFill>
+            <a:round/>
+          </a:ln>
+        </p:spPr>
+        <p:style>
+          <a:lnRef idx="1">
+            <a:schemeClr val="accent1"/>
+          </a:lnRef>
+          <a:fillRef idx="0">
+            <a:schemeClr val="accent1"/>
+          </a:fillRef>
+          <a:effectRef idx="0">
+            <a:schemeClr val="accent1"/>
+          </a:effectRef>
+          <a:fontRef idx="minor">
+            <a:schemeClr val="tx1"/>
+          </a:fontRef>
+        </p:style>
+      </p:cxnSp>
+      <p:cxnSp>
+        <p:nvCxnSpPr>
+          <p:cNvPr id="5" name="Straight Connector 4">
+            <a:extLst>
+              <a:ext uri="{FF2B5EF4-FFF2-40B4-BE49-F238E27FC236}">
+                <a16:creationId xmlns:a16="http://schemas.microsoft.com/office/drawing/2014/main" id="{73EB16A4-1407-E596-B8C5-A51C2CFFACA0}"/>
+              </a:ext>
+            </a:extLst>
+          </p:cNvPr>
+          <p:cNvCxnSpPr>
+            <a:cxnSpLocks/>
+          </p:cNvCxnSpPr>
+          <p:nvPr/>
+        </p:nvCxnSpPr>
+        <p:spPr>
+          <a:xfrm>
+            <a:off x="4969625" y="892166"/>
+            <a:ext cx="0" cy="4317163"/>
+          </a:xfrm>
+          <a:prstGeom prst="line">
+            <a:avLst/>
+          </a:prstGeom>
+          <a:ln w="28575" cap="rnd">
+            <a:solidFill>
+              <a:schemeClr val="tx1"/>
+            </a:solidFill>
+            <a:round/>
+          </a:ln>
+        </p:spPr>
+        <p:style>
+          <a:lnRef idx="1">
+            <a:schemeClr val="accent1"/>
+          </a:lnRef>
+          <a:fillRef idx="0">
+            <a:schemeClr val="accent1"/>
+          </a:fillRef>
+          <a:effectRef idx="0">
+            <a:schemeClr val="accent1"/>
+          </a:effectRef>
+          <a:fontRef idx="minor">
+            <a:schemeClr val="tx1"/>
+          </a:fontRef>
+        </p:style>
+      </p:cxnSp>
+      <mc:AlternateContent xmlns:mc="http://schemas.openxmlformats.org/markup-compatibility/2006">
+        <mc:Choice xmlns:a14="http://schemas.microsoft.com/office/drawing/2010/main" Requires="a14">
+          <p:sp>
+            <p:nvSpPr>
+              <p:cNvPr id="16" name="TextBox 15">
+                <a:extLst>
+                  <a:ext uri="{FF2B5EF4-FFF2-40B4-BE49-F238E27FC236}">
+                    <a16:creationId xmlns:a16="http://schemas.microsoft.com/office/drawing/2014/main" id="{E27482D9-90A8-9262-12F0-B372679D93E4}"/>
+                  </a:ext>
+                </a:extLst>
+              </p:cNvPr>
+              <p:cNvSpPr txBox="1"/>
+              <p:nvPr/>
+            </p:nvSpPr>
+            <p:spPr>
+              <a:xfrm>
+                <a:off x="8456697" y="5328832"/>
+                <a:ext cx="201722" cy="307777"/>
+              </a:xfrm>
+              <a:prstGeom prst="rect">
+                <a:avLst/>
+              </a:prstGeom>
+              <a:noFill/>
+            </p:spPr>
+            <p:txBody>
+              <a:bodyPr wrap="none" lIns="0" tIns="0" rIns="0" bIns="0" rtlCol="0">
+                <a:spAutoFit/>
+              </a:bodyPr>
+              <a:lstStyle/>
+              <a:p>
+                <a:pPr/>
+                <a14:m>
+                  <m:oMathPara xmlns:m="http://schemas.openxmlformats.org/officeDocument/2006/math">
+                    <m:oMath>
+                      <m:r>
+                        <a:rPr lang="en-US" sz="2000" b="0" i="1" smtClean="0">
+                          <a:latin typeface="Cambria Math" panose="02040503050406030204" pitchFamily="18" charset="0"/>
+                        </a:rPr>
+                        <m:t>𝑥</m:t>
+                      </m:r>
+                    </m:oMath>
+                  </m:oMathPara>
+                </a14:m>
+                <a:endParaRPr lang="en-US" sz="2000" dirty="0"/>
+              </a:p>
+            </p:txBody>
+          </p:sp>
+        </mc:Choice>
+        <mc:Fallback>
+          <p:sp>
+            <p:nvSpPr>
+              <p:cNvPr id="16" name="TextBox 15">
+                <a:extLst>
+                  <a:ext uri="{FF2B5EF4-FFF2-40B4-BE49-F238E27FC236}">
+                    <a16:creationId xmlns:a16="http://schemas.microsoft.com/office/drawing/2014/main" id="{E27482D9-90A8-9262-12F0-B372679D93E4}"/>
+                  </a:ext>
+                </a:extLst>
+              </p:cNvPr>
+              <p:cNvSpPr txBox="1">
+                <a:spLocks noRot="1" noChangeAspect="1" noMove="1" noResize="1" noEditPoints="1" noAdjustHandles="1" noChangeArrowheads="1" noChangeShapeType="1" noTextEdit="1"/>
+              </p:cNvSpPr>
+              <p:nvPr/>
+            </p:nvSpPr>
+            <p:spPr>
+              <a:xfrm>
+                <a:off x="8456697" y="5328832"/>
+                <a:ext cx="201722" cy="307777"/>
+              </a:xfrm>
+              <a:prstGeom prst="rect">
+                <a:avLst/>
+              </a:prstGeom>
+              <a:blipFill>
+                <a:blip r:embed="rId2"/>
+                <a:stretch>
+                  <a:fillRect l="-15152" r="-15152"/>
+                </a:stretch>
+              </a:blipFill>
+            </p:spPr>
+            <p:txBody>
+              <a:bodyPr/>
+              <a:lstStyle/>
+              <a:p>
+                <a:r>
+                  <a:rPr lang="en-IN">
+                    <a:noFill/>
+                  </a:rPr>
+                  <a:t> </a:t>
+                </a:r>
+              </a:p>
+            </p:txBody>
+          </p:sp>
+        </mc:Fallback>
+      </mc:AlternateContent>
+      <mc:AlternateContent xmlns:mc="http://schemas.openxmlformats.org/markup-compatibility/2006">
+        <mc:Choice xmlns:a14="http://schemas.microsoft.com/office/drawing/2010/main" Requires="a14">
+          <p:sp>
+            <p:nvSpPr>
+              <p:cNvPr id="18" name="TextBox 17">
+                <a:extLst>
+                  <a:ext uri="{FF2B5EF4-FFF2-40B4-BE49-F238E27FC236}">
+                    <a16:creationId xmlns:a16="http://schemas.microsoft.com/office/drawing/2014/main" id="{B0491357-3AFB-CCB0-E883-0935C40E8BE5}"/>
+                  </a:ext>
+                </a:extLst>
+              </p:cNvPr>
+              <p:cNvSpPr txBox="1"/>
+              <p:nvPr/>
+            </p:nvSpPr>
+            <p:spPr>
+              <a:xfrm>
+                <a:off x="4800508" y="5328833"/>
+                <a:ext cx="338234" cy="307777"/>
+              </a:xfrm>
+              <a:prstGeom prst="rect">
+                <a:avLst/>
+              </a:prstGeom>
+              <a:noFill/>
+            </p:spPr>
+            <p:txBody>
+              <a:bodyPr wrap="square" lIns="0" tIns="0" rIns="0" bIns="0" rtlCol="0">
+                <a:spAutoFit/>
+              </a:bodyPr>
+              <a:lstStyle/>
+              <a:p>
+                <a:pPr/>
+                <a14:m>
+                  <m:oMathPara xmlns:m="http://schemas.openxmlformats.org/officeDocument/2006/math">
+                    <m:oMath>
+                      <m:r>
+                        <a:rPr lang="en-US" sz="2000" b="0" i="1" smtClean="0">
+                          <a:latin typeface="Cambria Math" panose="02040503050406030204" pitchFamily="18" charset="0"/>
+                          <a:ea typeface="Cambria Math" panose="02040503050406030204" pitchFamily="18" charset="0"/>
+                        </a:rPr>
+                        <m:t>𝑂</m:t>
+                      </m:r>
+                    </m:oMath>
+                  </m:oMathPara>
+                </a14:m>
+                <a:endParaRPr lang="en-US" sz="2000" i="1" dirty="0"/>
+              </a:p>
+            </p:txBody>
+          </p:sp>
+        </mc:Choice>
+        <mc:Fallback>
+          <p:sp>
+            <p:nvSpPr>
+              <p:cNvPr id="18" name="TextBox 17">
+                <a:extLst>
+                  <a:ext uri="{FF2B5EF4-FFF2-40B4-BE49-F238E27FC236}">
+                    <a16:creationId xmlns:a16="http://schemas.microsoft.com/office/drawing/2014/main" id="{B0491357-3AFB-CCB0-E883-0935C40E8BE5}"/>
+                  </a:ext>
+                </a:extLst>
+              </p:cNvPr>
+              <p:cNvSpPr txBox="1">
+                <a:spLocks noRot="1" noChangeAspect="1" noMove="1" noResize="1" noEditPoints="1" noAdjustHandles="1" noChangeArrowheads="1" noChangeShapeType="1" noTextEdit="1"/>
+              </p:cNvSpPr>
+              <p:nvPr/>
+            </p:nvSpPr>
+            <p:spPr>
+              <a:xfrm>
+                <a:off x="4800508" y="5328833"/>
+                <a:ext cx="338234" cy="307777"/>
+              </a:xfrm>
+              <a:prstGeom prst="rect">
+                <a:avLst/>
+              </a:prstGeom>
+              <a:blipFill>
+                <a:blip r:embed="rId3"/>
+                <a:stretch>
+                  <a:fillRect l="-1786" b="-5882"/>
+                </a:stretch>
+              </a:blipFill>
+            </p:spPr>
+            <p:txBody>
+              <a:bodyPr/>
+              <a:lstStyle/>
+              <a:p>
+                <a:r>
+                  <a:rPr lang="en-IN">
+                    <a:noFill/>
+                  </a:rPr>
+                  <a:t> </a:t>
+                </a:r>
+              </a:p>
+            </p:txBody>
+          </p:sp>
+        </mc:Fallback>
+      </mc:AlternateContent>
+      <mc:AlternateContent xmlns:mc="http://schemas.openxmlformats.org/markup-compatibility/2006">
+        <mc:Choice xmlns:a14="http://schemas.microsoft.com/office/drawing/2010/main" Requires="a14">
+          <p:sp>
+            <p:nvSpPr>
+              <p:cNvPr id="20" name="TextBox 19">
+                <a:extLst>
+                  <a:ext uri="{FF2B5EF4-FFF2-40B4-BE49-F238E27FC236}">
+                    <a16:creationId xmlns:a16="http://schemas.microsoft.com/office/drawing/2014/main" id="{63686BFA-C15E-180E-9315-0D6B0B6C8104}"/>
+                  </a:ext>
+                </a:extLst>
+              </p:cNvPr>
+              <p:cNvSpPr txBox="1"/>
+              <p:nvPr/>
+            </p:nvSpPr>
+            <p:spPr>
+              <a:xfrm>
+                <a:off x="4561468" y="888715"/>
+                <a:ext cx="239040" cy="307777"/>
+              </a:xfrm>
+              <a:prstGeom prst="rect">
+                <a:avLst/>
+              </a:prstGeom>
+              <a:noFill/>
+            </p:spPr>
+            <p:txBody>
+              <a:bodyPr wrap="none" lIns="0" tIns="0" rIns="0" bIns="0" rtlCol="0">
+                <a:spAutoFit/>
+              </a:bodyPr>
+              <a:lstStyle/>
+              <a:p>
+                <a:pPr/>
+                <a14:m>
+                  <m:oMathPara xmlns:m="http://schemas.openxmlformats.org/officeDocument/2006/math">
+                    <m:oMath>
+                      <m:r>
+                        <a:rPr lang="en-US" sz="2000" b="0" i="1" smtClean="0">
+                          <a:latin typeface="Cambria Math" panose="02040503050406030204" pitchFamily="18" charset="0"/>
+                        </a:rPr>
+                        <m:t>𝑈</m:t>
+                      </m:r>
+                    </m:oMath>
+                  </m:oMathPara>
+                </a14:m>
+                <a:endParaRPr lang="en-US" sz="2000" dirty="0"/>
+              </a:p>
+            </p:txBody>
+          </p:sp>
+        </mc:Choice>
+        <mc:Fallback>
+          <p:sp>
+            <p:nvSpPr>
+              <p:cNvPr id="20" name="TextBox 19">
+                <a:extLst>
+                  <a:ext uri="{FF2B5EF4-FFF2-40B4-BE49-F238E27FC236}">
+                    <a16:creationId xmlns:a16="http://schemas.microsoft.com/office/drawing/2014/main" id="{63686BFA-C15E-180E-9315-0D6B0B6C8104}"/>
+                  </a:ext>
+                </a:extLst>
+              </p:cNvPr>
+              <p:cNvSpPr txBox="1">
+                <a:spLocks noRot="1" noChangeAspect="1" noMove="1" noResize="1" noEditPoints="1" noAdjustHandles="1" noChangeArrowheads="1" noChangeShapeType="1" noTextEdit="1"/>
+              </p:cNvSpPr>
+              <p:nvPr/>
+            </p:nvSpPr>
+            <p:spPr>
+              <a:xfrm>
+                <a:off x="4561468" y="888715"/>
+                <a:ext cx="239040" cy="307777"/>
+              </a:xfrm>
+              <a:prstGeom prst="rect">
+                <a:avLst/>
+              </a:prstGeom>
+              <a:blipFill>
+                <a:blip r:embed="rId4"/>
+                <a:stretch>
+                  <a:fillRect l="-23077" r="-25641" b="-6000"/>
+                </a:stretch>
+              </a:blipFill>
+            </p:spPr>
+            <p:txBody>
+              <a:bodyPr/>
+              <a:lstStyle/>
+              <a:p>
+                <a:r>
+                  <a:rPr lang="en-IN">
+                    <a:noFill/>
+                  </a:rPr>
+                  <a:t> </a:t>
+                </a:r>
+              </a:p>
+            </p:txBody>
+          </p:sp>
+        </mc:Fallback>
+      </mc:AlternateContent>
+      <p:grpSp>
+        <p:nvGrpSpPr>
+          <p:cNvPr id="6" name="Group 5">
+            <a:extLst>
+              <a:ext uri="{FF2B5EF4-FFF2-40B4-BE49-F238E27FC236}">
+                <a16:creationId xmlns:a16="http://schemas.microsoft.com/office/drawing/2014/main" id="{5510F983-6536-7775-89A7-E72CDB849655}"/>
+              </a:ext>
+            </a:extLst>
+          </p:cNvPr>
+          <p:cNvGrpSpPr/>
+          <p:nvPr/>
+        </p:nvGrpSpPr>
+        <p:grpSpPr>
+          <a:xfrm>
+            <a:off x="1839652" y="1306470"/>
+            <a:ext cx="6259947" cy="3884536"/>
+            <a:chOff x="3206363" y="1306470"/>
+            <a:chExt cx="6259947" cy="3884536"/>
+          </a:xfrm>
+        </p:grpSpPr>
+        <p:sp>
+          <p:nvSpPr>
+            <p:cNvPr id="8" name="Arc 7">
+              <a:extLst>
+                <a:ext uri="{FF2B5EF4-FFF2-40B4-BE49-F238E27FC236}">
+                  <a16:creationId xmlns:a16="http://schemas.microsoft.com/office/drawing/2014/main" id="{52ACC157-EFD8-AD24-0262-D2A2386EDB09}"/>
+                </a:ext>
+              </a:extLst>
+            </p:cNvPr>
+            <p:cNvSpPr/>
+            <p:nvPr/>
+          </p:nvSpPr>
+          <p:spPr>
+            <a:xfrm rot="5400000">
+              <a:off x="5961524" y="1686220"/>
+              <a:ext cx="3884171" cy="3125401"/>
+            </a:xfrm>
+            <a:custGeom>
+              <a:avLst/>
+              <a:gdLst>
+                <a:gd name="csX0" fmla="*/ 0 w 3289821"/>
+                <a:gd name="csY0" fmla="*/ 0 h 2311511"/>
+                <a:gd name="csX1" fmla="*/ 3289821 w 3289821"/>
+                <a:gd name="csY1" fmla="*/ 2311511 h 2311511"/>
+              </a:gdLst>
+              <a:ahLst/>
+              <a:cxnLst>
+                <a:cxn ang="0">
+                  <a:pos x="csX0" y="csY0"/>
+                </a:cxn>
+                <a:cxn ang="0">
+                  <a:pos x="csX1" y="csY1"/>
+                </a:cxn>
+              </a:cxnLst>
+              <a:rect l="l" t="t" r="r" b="b"/>
+              <a:pathLst>
+                <a:path w="3289821" h="2311511" stroke="0" extrusionOk="0">
+                  <a:moveTo>
+                    <a:pt x="666913" y="1455136"/>
+                  </a:moveTo>
+                  <a:cubicBezTo>
+                    <a:pt x="2619850" y="1670451"/>
+                    <a:pt x="3289821" y="1428067"/>
+                    <a:pt x="3289821" y="2311511"/>
+                  </a:cubicBezTo>
+                  <a:lnTo>
+                    <a:pt x="666913" y="1455136"/>
+                  </a:lnTo>
+                  <a:close/>
+                </a:path>
+                <a:path w="3289821" h="2311511" fill="none">
+                  <a:moveTo>
+                    <a:pt x="0" y="0"/>
+                  </a:moveTo>
+                  <a:cubicBezTo>
+                    <a:pt x="1856128" y="510275"/>
+                    <a:pt x="3289821" y="1428067"/>
+                    <a:pt x="3289821" y="2311511"/>
+                  </a:cubicBezTo>
+                </a:path>
+              </a:pathLst>
+            </a:custGeom>
+            <a:ln w="38100" cap="rnd">
+              <a:solidFill>
+                <a:srgbClr val="0070C0"/>
+              </a:solidFill>
+              <a:round/>
+            </a:ln>
+          </p:spPr>
+          <p:style>
+            <a:lnRef idx="1">
+              <a:schemeClr val="accent1"/>
+            </a:lnRef>
+            <a:fillRef idx="0">
+              <a:schemeClr val="accent1"/>
+            </a:fillRef>
+            <a:effectRef idx="0">
+              <a:schemeClr val="accent1"/>
+            </a:effectRef>
+            <a:fontRef idx="minor">
+              <a:schemeClr val="tx1"/>
+            </a:fontRef>
+          </p:style>
+          <p:txBody>
+            <a:bodyPr rtlCol="0" anchor="ctr"/>
+            <a:lstStyle/>
+            <a:p>
+              <a:pPr algn="ctr"/>
+              <a:endParaRPr lang="en-IN"/>
+            </a:p>
+          </p:txBody>
+        </p:sp>
+        <p:sp>
+          <p:nvSpPr>
+            <p:cNvPr id="4" name="Arc 7">
+              <a:extLst>
+                <a:ext uri="{FF2B5EF4-FFF2-40B4-BE49-F238E27FC236}">
+                  <a16:creationId xmlns:a16="http://schemas.microsoft.com/office/drawing/2014/main" id="{2477264F-BB36-D192-2C6C-BC7A1CD334C5}"/>
+                </a:ext>
+              </a:extLst>
+            </p:cNvPr>
+            <p:cNvSpPr/>
+            <p:nvPr/>
+          </p:nvSpPr>
+          <p:spPr>
+            <a:xfrm rot="16200000" flipH="1">
+              <a:off x="2826978" y="1685855"/>
+              <a:ext cx="3884171" cy="3125401"/>
+            </a:xfrm>
+            <a:custGeom>
+              <a:avLst/>
+              <a:gdLst>
+                <a:gd name="csX0" fmla="*/ 0 w 3289821"/>
+                <a:gd name="csY0" fmla="*/ 0 h 2311511"/>
+                <a:gd name="csX1" fmla="*/ 3289821 w 3289821"/>
+                <a:gd name="csY1" fmla="*/ 2311511 h 2311511"/>
+              </a:gdLst>
+              <a:ahLst/>
+              <a:cxnLst>
+                <a:cxn ang="0">
+                  <a:pos x="csX0" y="csY0"/>
+                </a:cxn>
+                <a:cxn ang="0">
+                  <a:pos x="csX1" y="csY1"/>
+                </a:cxn>
+              </a:cxnLst>
+              <a:rect l="l" t="t" r="r" b="b"/>
+              <a:pathLst>
+                <a:path w="3289821" h="2311511" stroke="0" extrusionOk="0">
+                  <a:moveTo>
+                    <a:pt x="666913" y="1455136"/>
+                  </a:moveTo>
+                  <a:cubicBezTo>
+                    <a:pt x="2619850" y="1670451"/>
+                    <a:pt x="3289821" y="1428067"/>
+                    <a:pt x="3289821" y="2311511"/>
+                  </a:cubicBezTo>
+                  <a:lnTo>
+                    <a:pt x="666913" y="1455136"/>
+                  </a:lnTo>
+                  <a:close/>
+                </a:path>
+                <a:path w="3289821" h="2311511" fill="none">
+                  <a:moveTo>
+                    <a:pt x="0" y="0"/>
+                  </a:moveTo>
+                  <a:cubicBezTo>
+                    <a:pt x="1856128" y="510275"/>
+                    <a:pt x="3289821" y="1428067"/>
+                    <a:pt x="3289821" y="2311511"/>
+                  </a:cubicBezTo>
+                </a:path>
+              </a:pathLst>
+            </a:custGeom>
+            <a:ln w="38100" cap="rnd">
+              <a:solidFill>
+                <a:srgbClr val="0070C0"/>
+              </a:solidFill>
+              <a:round/>
+            </a:ln>
+          </p:spPr>
+          <p:style>
+            <a:lnRef idx="1">
+              <a:schemeClr val="accent1"/>
+            </a:lnRef>
+            <a:fillRef idx="0">
+              <a:schemeClr val="accent1"/>
+            </a:fillRef>
+            <a:effectRef idx="0">
+              <a:schemeClr val="accent1"/>
+            </a:effectRef>
+            <a:fontRef idx="minor">
+              <a:schemeClr val="tx1"/>
+            </a:fontRef>
+          </p:style>
+          <p:txBody>
+            <a:bodyPr rtlCol="0" anchor="ctr"/>
+            <a:lstStyle/>
+            <a:p>
+              <a:pPr algn="ctr"/>
+              <a:endParaRPr lang="en-IN"/>
+            </a:p>
+          </p:txBody>
+        </p:sp>
+      </p:grpSp>
+      <mc:AlternateContent xmlns:mc="http://schemas.openxmlformats.org/markup-compatibility/2006">
+        <mc:Choice xmlns:a14="http://schemas.microsoft.com/office/drawing/2010/main" Requires="a14">
+          <p:sp>
+            <p:nvSpPr>
+              <p:cNvPr id="10" name="TextBox 9">
+                <a:extLst>
+                  <a:ext uri="{FF2B5EF4-FFF2-40B4-BE49-F238E27FC236}">
+                    <a16:creationId xmlns:a16="http://schemas.microsoft.com/office/drawing/2014/main" id="{62785080-A98E-5F78-AE39-51BACE2AAC52}"/>
+                  </a:ext>
+                </a:extLst>
+              </p:cNvPr>
+              <p:cNvSpPr txBox="1"/>
+              <p:nvPr/>
+            </p:nvSpPr>
+            <p:spPr>
+              <a:xfrm>
+                <a:off x="1180792" y="5328832"/>
+                <a:ext cx="394082" cy="307777"/>
+              </a:xfrm>
+              <a:prstGeom prst="rect">
+                <a:avLst/>
+              </a:prstGeom>
+              <a:noFill/>
+            </p:spPr>
+            <p:txBody>
+              <a:bodyPr wrap="none" lIns="0" tIns="0" rIns="0" bIns="0" rtlCol="0">
+                <a:spAutoFit/>
+              </a:bodyPr>
+              <a:lstStyle/>
+              <a:p>
+                <a:pPr/>
+                <a14:m>
+                  <m:oMathPara xmlns:m="http://schemas.openxmlformats.org/officeDocument/2006/math">
+                    <m:oMath>
+                      <m:r>
+                        <a:rPr lang="en-US" sz="2000" b="0" i="1" smtClean="0">
+                          <a:latin typeface="Cambria Math" panose="02040503050406030204" pitchFamily="18" charset="0"/>
+                        </a:rPr>
+                        <m:t>−</m:t>
+                      </m:r>
+                      <m:r>
+                        <a:rPr lang="en-US" sz="2000" b="0" i="1" smtClean="0">
+                          <a:latin typeface="Cambria Math" panose="02040503050406030204" pitchFamily="18" charset="0"/>
+                        </a:rPr>
+                        <m:t>𝑥</m:t>
+                      </m:r>
+                    </m:oMath>
+                  </m:oMathPara>
+                </a14:m>
+                <a:endParaRPr lang="en-US" sz="2000" dirty="0"/>
+              </a:p>
+            </p:txBody>
+          </p:sp>
+        </mc:Choice>
+        <mc:Fallback>
+          <p:sp>
+            <p:nvSpPr>
+              <p:cNvPr id="10" name="TextBox 9">
+                <a:extLst>
+                  <a:ext uri="{FF2B5EF4-FFF2-40B4-BE49-F238E27FC236}">
+                    <a16:creationId xmlns:a16="http://schemas.microsoft.com/office/drawing/2014/main" id="{62785080-A98E-5F78-AE39-51BACE2AAC52}"/>
+                  </a:ext>
+                </a:extLst>
+              </p:cNvPr>
+              <p:cNvSpPr txBox="1">
+                <a:spLocks noRot="1" noChangeAspect="1" noMove="1" noResize="1" noEditPoints="1" noAdjustHandles="1" noChangeArrowheads="1" noChangeShapeType="1" noTextEdit="1"/>
+              </p:cNvSpPr>
+              <p:nvPr/>
+            </p:nvSpPr>
+            <p:spPr>
+              <a:xfrm>
+                <a:off x="1180792" y="5328832"/>
+                <a:ext cx="394082" cy="307777"/>
+              </a:xfrm>
+              <a:prstGeom prst="rect">
+                <a:avLst/>
+              </a:prstGeom>
+              <a:blipFill>
+                <a:blip r:embed="rId5"/>
+                <a:stretch>
+                  <a:fillRect l="-4688" r="-6250"/>
+                </a:stretch>
+              </a:blipFill>
+            </p:spPr>
+            <p:txBody>
+              <a:bodyPr/>
+              <a:lstStyle/>
+              <a:p>
+                <a:r>
+                  <a:rPr lang="en-IN">
+                    <a:noFill/>
+                  </a:rPr>
+                  <a:t> </a:t>
+                </a:r>
+              </a:p>
+            </p:txBody>
+          </p:sp>
+        </mc:Fallback>
+      </mc:AlternateContent>
+      <p:sp>
+        <p:nvSpPr>
+          <p:cNvPr id="12" name="Oval 11">
+            <a:extLst>
+              <a:ext uri="{FF2B5EF4-FFF2-40B4-BE49-F238E27FC236}">
+                <a16:creationId xmlns:a16="http://schemas.microsoft.com/office/drawing/2014/main" id="{D9E297AA-6E6F-79D9-B128-BE7EB2C3C7F3}"/>
+              </a:ext>
+            </a:extLst>
+          </p:cNvPr>
+          <p:cNvSpPr/>
+          <p:nvPr/>
+        </p:nvSpPr>
+        <p:spPr>
+          <a:xfrm>
+            <a:off x="7734983" y="2077979"/>
+            <a:ext cx="132616" cy="132616"/>
+          </a:xfrm>
+          <a:prstGeom prst="ellipse">
+            <a:avLst/>
+          </a:prstGeom>
+          <a:solidFill>
+            <a:schemeClr val="tx1"/>
+          </a:solidFill>
+          <a:ln>
+            <a:noFill/>
+          </a:ln>
+        </p:spPr>
+        <p:style>
+          <a:lnRef idx="2">
+            <a:schemeClr val="accent1">
+              <a:shade val="15000"/>
+            </a:schemeClr>
+          </a:lnRef>
+          <a:fillRef idx="1">
+            <a:schemeClr val="accent1"/>
+          </a:fillRef>
+          <a:effectRef idx="0">
+            <a:schemeClr val="accent1"/>
+          </a:effectRef>
+          <a:fontRef idx="minor">
+            <a:schemeClr val="lt1"/>
+          </a:fontRef>
+        </p:style>
+        <p:txBody>
+          <a:bodyPr rtlCol="0" anchor="ctr"/>
+          <a:lstStyle/>
+          <a:p>
+            <a:pPr algn="ctr"/>
+            <a:endParaRPr lang="en-IN"/>
+          </a:p>
+        </p:txBody>
+      </p:sp>
+      <p:cxnSp>
+        <p:nvCxnSpPr>
+          <p:cNvPr id="22" name="Straight Connector 21">
+            <a:extLst>
+              <a:ext uri="{FF2B5EF4-FFF2-40B4-BE49-F238E27FC236}">
+                <a16:creationId xmlns:a16="http://schemas.microsoft.com/office/drawing/2014/main" id="{CA555E81-0559-CCF8-63C7-14DF9CAE3564}"/>
+              </a:ext>
+            </a:extLst>
+          </p:cNvPr>
+          <p:cNvCxnSpPr>
+            <a:cxnSpLocks/>
+          </p:cNvCxnSpPr>
+          <p:nvPr/>
+        </p:nvCxnSpPr>
+        <p:spPr>
+          <a:xfrm>
+            <a:off x="6914373" y="3895727"/>
+            <a:ext cx="0" cy="1413662"/>
+          </a:xfrm>
+          <a:prstGeom prst="line">
+            <a:avLst/>
+          </a:prstGeom>
+          <a:ln w="19050" cap="rnd">
+            <a:solidFill>
+              <a:schemeClr val="tx1"/>
+            </a:solidFill>
+            <a:prstDash val="dash"/>
+            <a:round/>
+          </a:ln>
+        </p:spPr>
+        <p:style>
+          <a:lnRef idx="1">
+            <a:schemeClr val="accent1"/>
+          </a:lnRef>
+          <a:fillRef idx="0">
+            <a:schemeClr val="accent1"/>
+          </a:fillRef>
+          <a:effectRef idx="0">
+            <a:schemeClr val="accent1"/>
+          </a:effectRef>
+          <a:fontRef idx="minor">
+            <a:schemeClr val="tx1"/>
+          </a:fontRef>
+        </p:style>
+      </p:cxnSp>
+      <p:sp>
+        <p:nvSpPr>
+          <p:cNvPr id="23" name="Oval 22">
+            <a:extLst>
+              <a:ext uri="{FF2B5EF4-FFF2-40B4-BE49-F238E27FC236}">
+                <a16:creationId xmlns:a16="http://schemas.microsoft.com/office/drawing/2014/main" id="{28871921-E80A-E7FB-1DEE-8DC9293D7AD4}"/>
+              </a:ext>
+            </a:extLst>
+          </p:cNvPr>
+          <p:cNvSpPr/>
+          <p:nvPr/>
+        </p:nvSpPr>
+        <p:spPr>
+          <a:xfrm>
+            <a:off x="6840888" y="3756758"/>
+            <a:ext cx="132616" cy="132616"/>
+          </a:xfrm>
+          <a:prstGeom prst="ellipse">
+            <a:avLst/>
+          </a:prstGeom>
+          <a:solidFill>
+            <a:schemeClr val="tx1"/>
+          </a:solidFill>
+          <a:ln>
+            <a:noFill/>
+          </a:ln>
+        </p:spPr>
+        <p:style>
+          <a:lnRef idx="2">
+            <a:schemeClr val="accent1">
+              <a:shade val="15000"/>
+            </a:schemeClr>
+          </a:lnRef>
+          <a:fillRef idx="1">
+            <a:schemeClr val="accent1"/>
+          </a:fillRef>
+          <a:effectRef idx="0">
+            <a:schemeClr val="accent1"/>
+          </a:effectRef>
+          <a:fontRef idx="minor">
+            <a:schemeClr val="lt1"/>
+          </a:fontRef>
+        </p:style>
+        <p:txBody>
+          <a:bodyPr rtlCol="0" anchor="ctr"/>
+          <a:lstStyle/>
+          <a:p>
+            <a:pPr algn="ctr"/>
+            <a:endParaRPr lang="en-IN"/>
+          </a:p>
+        </p:txBody>
+      </p:sp>
+      <p:cxnSp>
+        <p:nvCxnSpPr>
+          <p:cNvPr id="33" name="Straight Arrow Connector 32">
+            <a:extLst>
+              <a:ext uri="{FF2B5EF4-FFF2-40B4-BE49-F238E27FC236}">
+                <a16:creationId xmlns:a16="http://schemas.microsoft.com/office/drawing/2014/main" id="{307BD27B-E748-9D81-73DC-41CE0661545D}"/>
+              </a:ext>
+            </a:extLst>
+          </p:cNvPr>
+          <p:cNvCxnSpPr>
+            <a:cxnSpLocks/>
+          </p:cNvCxnSpPr>
+          <p:nvPr/>
+        </p:nvCxnSpPr>
+        <p:spPr>
+          <a:xfrm flipH="1">
+            <a:off x="7343662" y="2019867"/>
+            <a:ext cx="900000" cy="0"/>
+          </a:xfrm>
+          <a:prstGeom prst="straightConnector1">
+            <a:avLst/>
+          </a:prstGeom>
+          <a:ln w="38100" cap="rnd">
+            <a:solidFill>
+              <a:srgbClr val="C00000"/>
+            </a:solidFill>
+            <a:tailEnd type="triangle" w="lg" len="lg"/>
+          </a:ln>
+        </p:spPr>
+        <p:style>
+          <a:lnRef idx="1">
+            <a:schemeClr val="accent1"/>
+          </a:lnRef>
+          <a:fillRef idx="0">
+            <a:schemeClr val="accent1"/>
+          </a:fillRef>
+          <a:effectRef idx="0">
+            <a:schemeClr val="accent1"/>
+          </a:effectRef>
+          <a:fontRef idx="minor">
+            <a:schemeClr val="tx1"/>
+          </a:fontRef>
+        </p:style>
+      </p:cxnSp>
+      <mc:AlternateContent xmlns:mc="http://schemas.openxmlformats.org/markup-compatibility/2006">
+        <mc:Choice xmlns:a14="http://schemas.microsoft.com/office/drawing/2010/main" Requires="a14">
+          <p:sp>
+            <p:nvSpPr>
+              <p:cNvPr id="38" name="TextBox 37">
+                <a:extLst>
+                  <a:ext uri="{FF2B5EF4-FFF2-40B4-BE49-F238E27FC236}">
+                    <a16:creationId xmlns:a16="http://schemas.microsoft.com/office/drawing/2014/main" id="{F4294A07-0F28-09C5-174B-2144AF69000F}"/>
+                  </a:ext>
+                </a:extLst>
+              </p:cNvPr>
+              <p:cNvSpPr txBox="1"/>
+              <p:nvPr/>
+            </p:nvSpPr>
+            <p:spPr>
+              <a:xfrm>
+                <a:off x="7649720" y="5319307"/>
+                <a:ext cx="311111" cy="307777"/>
+              </a:xfrm>
+              <a:prstGeom prst="rect">
+                <a:avLst/>
+              </a:prstGeom>
+              <a:noFill/>
+            </p:spPr>
+            <p:txBody>
+              <a:bodyPr wrap="none" lIns="0" tIns="0" rIns="0" bIns="0" rtlCol="0">
+                <a:spAutoFit/>
+              </a:bodyPr>
+              <a:lstStyle/>
+              <a:p>
+                <a:pPr/>
+                <a14:m>
+                  <m:oMathPara xmlns:m="http://schemas.openxmlformats.org/officeDocument/2006/math">
+                    <m:oMath>
+                      <m:sSub>
+                        <m:sSubPr>
+                          <m:ctrlPr>
+                            <a:rPr lang="en-US" sz="2000" b="0" i="1" smtClean="0">
+                              <a:latin typeface="Cambria Math" panose="02040503050406030204" pitchFamily="18" charset="0"/>
+                            </a:rPr>
+                          </m:ctrlPr>
+                        </m:sSubPr>
+                        <m:e>
+                          <m:r>
+                            <a:rPr lang="en-US" sz="2000" b="0" i="1" smtClean="0">
+                              <a:latin typeface="Cambria Math" panose="02040503050406030204" pitchFamily="18" charset="0"/>
+                            </a:rPr>
+                            <m:t>𝑥</m:t>
+                          </m:r>
+                        </m:e>
+                        <m:sub>
+                          <m:r>
+                            <a:rPr lang="en-US" sz="2000" b="0" i="1" smtClean="0">
+                              <a:latin typeface="Cambria Math" panose="02040503050406030204" pitchFamily="18" charset="0"/>
+                            </a:rPr>
+                            <m:t>0</m:t>
+                          </m:r>
+                        </m:sub>
+                      </m:sSub>
+                    </m:oMath>
+                  </m:oMathPara>
+                </a14:m>
+                <a:endParaRPr lang="en-US" sz="2000" dirty="0"/>
+              </a:p>
+            </p:txBody>
+          </p:sp>
+        </mc:Choice>
+        <mc:Fallback>
+          <p:sp>
+            <p:nvSpPr>
+              <p:cNvPr id="38" name="TextBox 37">
+                <a:extLst>
+                  <a:ext uri="{FF2B5EF4-FFF2-40B4-BE49-F238E27FC236}">
+                    <a16:creationId xmlns:a16="http://schemas.microsoft.com/office/drawing/2014/main" id="{F4294A07-0F28-09C5-174B-2144AF69000F}"/>
+                  </a:ext>
+                </a:extLst>
+              </p:cNvPr>
+              <p:cNvSpPr txBox="1">
+                <a:spLocks noRot="1" noChangeAspect="1" noMove="1" noResize="1" noEditPoints="1" noAdjustHandles="1" noChangeArrowheads="1" noChangeShapeType="1" noTextEdit="1"/>
+              </p:cNvSpPr>
+              <p:nvPr/>
+            </p:nvSpPr>
+            <p:spPr>
+              <a:xfrm>
+                <a:off x="7649720" y="5319307"/>
+                <a:ext cx="311111" cy="307777"/>
+              </a:xfrm>
+              <a:prstGeom prst="rect">
+                <a:avLst/>
+              </a:prstGeom>
+              <a:blipFill>
+                <a:blip r:embed="rId6"/>
+                <a:stretch>
+                  <a:fillRect l="-11765" r="-5882" b="-16000"/>
+                </a:stretch>
+              </a:blipFill>
+            </p:spPr>
+            <p:txBody>
+              <a:bodyPr/>
+              <a:lstStyle/>
+              <a:p>
+                <a:r>
+                  <a:rPr lang="en-IN">
+                    <a:noFill/>
+                  </a:rPr>
+                  <a:t> </a:t>
+                </a:r>
+              </a:p>
+            </p:txBody>
+          </p:sp>
+        </mc:Fallback>
+      </mc:AlternateContent>
+      <mc:AlternateContent xmlns:mc="http://schemas.openxmlformats.org/markup-compatibility/2006">
+        <mc:Choice xmlns:a14="http://schemas.microsoft.com/office/drawing/2010/main" Requires="a14">
+          <p:sp>
+            <p:nvSpPr>
+              <p:cNvPr id="40" name="TextBox 39">
+                <a:extLst>
+                  <a:ext uri="{FF2B5EF4-FFF2-40B4-BE49-F238E27FC236}">
+                    <a16:creationId xmlns:a16="http://schemas.microsoft.com/office/drawing/2014/main" id="{1AFC93A6-9C8B-9CB5-2329-B3DD23D5B8D1}"/>
+                  </a:ext>
+                </a:extLst>
+              </p:cNvPr>
+              <p:cNvSpPr txBox="1"/>
+              <p:nvPr/>
+            </p:nvSpPr>
+            <p:spPr>
+              <a:xfrm>
+                <a:off x="6813512" y="5319302"/>
+                <a:ext cx="201722" cy="307777"/>
+              </a:xfrm>
+              <a:prstGeom prst="rect">
+                <a:avLst/>
+              </a:prstGeom>
+              <a:noFill/>
+            </p:spPr>
+            <p:txBody>
+              <a:bodyPr wrap="none" lIns="0" tIns="0" rIns="0" bIns="0" rtlCol="0">
+                <a:spAutoFit/>
+              </a:bodyPr>
+              <a:lstStyle/>
+              <a:p>
+                <a:pPr/>
+                <a14:m>
+                  <m:oMathPara xmlns:m="http://schemas.openxmlformats.org/officeDocument/2006/math">
+                    <m:oMath>
+                      <m:r>
+                        <a:rPr lang="en-US" sz="2000" b="0" i="1" smtClean="0">
+                          <a:latin typeface="Cambria Math" panose="02040503050406030204" pitchFamily="18" charset="0"/>
+                        </a:rPr>
+                        <m:t>𝑥</m:t>
+                      </m:r>
+                    </m:oMath>
+                  </m:oMathPara>
+                </a14:m>
+                <a:endParaRPr lang="en-US" sz="2000" dirty="0"/>
+              </a:p>
+            </p:txBody>
+          </p:sp>
+        </mc:Choice>
+        <mc:Fallback>
+          <p:sp>
+            <p:nvSpPr>
+              <p:cNvPr id="40" name="TextBox 39">
+                <a:extLst>
+                  <a:ext uri="{FF2B5EF4-FFF2-40B4-BE49-F238E27FC236}">
+                    <a16:creationId xmlns:a16="http://schemas.microsoft.com/office/drawing/2014/main" id="{1AFC93A6-9C8B-9CB5-2329-B3DD23D5B8D1}"/>
+                  </a:ext>
+                </a:extLst>
+              </p:cNvPr>
+              <p:cNvSpPr txBox="1">
+                <a:spLocks noRot="1" noChangeAspect="1" noMove="1" noResize="1" noEditPoints="1" noAdjustHandles="1" noChangeArrowheads="1" noChangeShapeType="1" noTextEdit="1"/>
+              </p:cNvSpPr>
+              <p:nvPr/>
+            </p:nvSpPr>
+            <p:spPr>
+              <a:xfrm>
+                <a:off x="6813512" y="5319302"/>
+                <a:ext cx="201722" cy="307777"/>
+              </a:xfrm>
+              <a:prstGeom prst="rect">
+                <a:avLst/>
+              </a:prstGeom>
+              <a:blipFill>
+                <a:blip r:embed="rId7"/>
+                <a:stretch>
+                  <a:fillRect l="-18182" r="-12121"/>
+                </a:stretch>
+              </a:blipFill>
+            </p:spPr>
+            <p:txBody>
+              <a:bodyPr/>
+              <a:lstStyle/>
+              <a:p>
+                <a:r>
+                  <a:rPr lang="en-IN">
+                    <a:noFill/>
+                  </a:rPr>
+                  <a:t> </a:t>
+                </a:r>
+              </a:p>
+            </p:txBody>
+          </p:sp>
+        </mc:Fallback>
+      </mc:AlternateContent>
+      <p:cxnSp>
+        <p:nvCxnSpPr>
+          <p:cNvPr id="37" name="Straight Connector 36">
+            <a:extLst>
+              <a:ext uri="{FF2B5EF4-FFF2-40B4-BE49-F238E27FC236}">
+                <a16:creationId xmlns:a16="http://schemas.microsoft.com/office/drawing/2014/main" id="{82EE0097-A31C-B704-2AF7-FAF9AD003B16}"/>
+              </a:ext>
+            </a:extLst>
+          </p:cNvPr>
+          <p:cNvCxnSpPr>
+            <a:cxnSpLocks/>
+          </p:cNvCxnSpPr>
+          <p:nvPr/>
+        </p:nvCxnSpPr>
+        <p:spPr>
+          <a:xfrm>
+            <a:off x="2142204" y="2162171"/>
+            <a:ext cx="0" cy="3140075"/>
+          </a:xfrm>
+          <a:prstGeom prst="line">
+            <a:avLst/>
+          </a:prstGeom>
+          <a:ln w="19050" cap="rnd">
+            <a:solidFill>
+              <a:schemeClr val="tx1"/>
+            </a:solidFill>
+            <a:prstDash val="dash"/>
+            <a:round/>
+          </a:ln>
+        </p:spPr>
+        <p:style>
+          <a:lnRef idx="1">
+            <a:schemeClr val="accent1"/>
+          </a:lnRef>
+          <a:fillRef idx="0">
+            <a:schemeClr val="accent1"/>
+          </a:fillRef>
+          <a:effectRef idx="0">
+            <a:schemeClr val="accent1"/>
+          </a:effectRef>
+          <a:fontRef idx="minor">
+            <a:schemeClr val="tx1"/>
+          </a:fontRef>
+        </p:style>
+      </p:cxnSp>
+      <p:sp>
+        <p:nvSpPr>
+          <p:cNvPr id="39" name="Oval 38">
+            <a:extLst>
+              <a:ext uri="{FF2B5EF4-FFF2-40B4-BE49-F238E27FC236}">
+                <a16:creationId xmlns:a16="http://schemas.microsoft.com/office/drawing/2014/main" id="{F526A2B9-F536-38A1-483E-72D0DB8AD93A}"/>
+              </a:ext>
+            </a:extLst>
+          </p:cNvPr>
+          <p:cNvSpPr/>
+          <p:nvPr/>
+        </p:nvSpPr>
+        <p:spPr>
+          <a:xfrm>
+            <a:off x="2074274" y="2077975"/>
+            <a:ext cx="132616" cy="132616"/>
+          </a:xfrm>
+          <a:prstGeom prst="ellipse">
+            <a:avLst/>
+          </a:prstGeom>
+          <a:solidFill>
+            <a:schemeClr val="tx1"/>
+          </a:solidFill>
+          <a:ln>
+            <a:noFill/>
+          </a:ln>
+        </p:spPr>
+        <p:style>
+          <a:lnRef idx="2">
+            <a:schemeClr val="accent1">
+              <a:shade val="15000"/>
+            </a:schemeClr>
+          </a:lnRef>
+          <a:fillRef idx="1">
+            <a:schemeClr val="accent1"/>
+          </a:fillRef>
+          <a:effectRef idx="0">
+            <a:schemeClr val="accent1"/>
+          </a:effectRef>
+          <a:fontRef idx="minor">
+            <a:schemeClr val="lt1"/>
+          </a:fontRef>
+        </p:style>
+        <p:txBody>
+          <a:bodyPr rtlCol="0" anchor="ctr"/>
+          <a:lstStyle/>
+          <a:p>
+            <a:pPr algn="ctr"/>
+            <a:endParaRPr lang="en-IN"/>
+          </a:p>
+        </p:txBody>
+      </p:sp>
+      <p:cxnSp>
+        <p:nvCxnSpPr>
+          <p:cNvPr id="41" name="Straight Arrow Connector 40">
+            <a:extLst>
+              <a:ext uri="{FF2B5EF4-FFF2-40B4-BE49-F238E27FC236}">
+                <a16:creationId xmlns:a16="http://schemas.microsoft.com/office/drawing/2014/main" id="{37476E1A-0366-0B14-1BF3-9AE967BAE1EC}"/>
+              </a:ext>
+            </a:extLst>
+          </p:cNvPr>
+          <p:cNvCxnSpPr>
+            <a:cxnSpLocks/>
+          </p:cNvCxnSpPr>
+          <p:nvPr/>
+        </p:nvCxnSpPr>
+        <p:spPr>
+          <a:xfrm>
+            <a:off x="1698146" y="2010973"/>
+            <a:ext cx="900000" cy="0"/>
+          </a:xfrm>
+          <a:prstGeom prst="straightConnector1">
+            <a:avLst/>
+          </a:prstGeom>
+          <a:ln w="38100" cap="rnd">
+            <a:solidFill>
+              <a:srgbClr val="C00000"/>
+            </a:solidFill>
+            <a:tailEnd type="triangle" w="lg" len="lg"/>
+          </a:ln>
+        </p:spPr>
+        <p:style>
+          <a:lnRef idx="1">
+            <a:schemeClr val="accent1"/>
+          </a:lnRef>
+          <a:fillRef idx="0">
+            <a:schemeClr val="accent1"/>
+          </a:fillRef>
+          <a:effectRef idx="0">
+            <a:schemeClr val="accent1"/>
+          </a:effectRef>
+          <a:fontRef idx="minor">
+            <a:schemeClr val="tx1"/>
+          </a:fontRef>
+        </p:style>
+      </p:cxnSp>
+      <mc:AlternateContent xmlns:mc="http://schemas.openxmlformats.org/markup-compatibility/2006">
+        <mc:Choice xmlns:a14="http://schemas.microsoft.com/office/drawing/2010/main" Requires="a14">
+          <p:sp>
+            <p:nvSpPr>
+              <p:cNvPr id="42" name="TextBox 41">
+                <a:extLst>
+                  <a:ext uri="{FF2B5EF4-FFF2-40B4-BE49-F238E27FC236}">
+                    <a16:creationId xmlns:a16="http://schemas.microsoft.com/office/drawing/2014/main" id="{89CA82C7-41D2-46A7-E9AF-5E25002C6B89}"/>
+                  </a:ext>
+                </a:extLst>
+              </p:cNvPr>
+              <p:cNvSpPr txBox="1"/>
+              <p:nvPr/>
+            </p:nvSpPr>
+            <p:spPr>
+              <a:xfrm>
+                <a:off x="1896411" y="5319303"/>
+                <a:ext cx="503471" cy="307777"/>
+              </a:xfrm>
+              <a:prstGeom prst="rect">
+                <a:avLst/>
+              </a:prstGeom>
+              <a:noFill/>
+            </p:spPr>
+            <p:txBody>
+              <a:bodyPr wrap="none" lIns="0" tIns="0" rIns="0" bIns="0" rtlCol="0">
+                <a:spAutoFit/>
+              </a:bodyPr>
+              <a:lstStyle/>
+              <a:p>
+                <a:pPr/>
+                <a14:m>
+                  <m:oMathPara xmlns:m="http://schemas.openxmlformats.org/officeDocument/2006/math">
+                    <m:oMath>
+                      <m:r>
+                        <a:rPr lang="en-US" sz="2000" b="0" i="1" smtClean="0">
+                          <a:latin typeface="Cambria Math" panose="02040503050406030204" pitchFamily="18" charset="0"/>
+                        </a:rPr>
+                        <m:t>−</m:t>
+                      </m:r>
+                      <m:sSub>
+                        <m:sSubPr>
+                          <m:ctrlPr>
+                            <a:rPr lang="en-US" sz="2000" b="0" i="1" smtClean="0">
+                              <a:latin typeface="Cambria Math" panose="02040503050406030204" pitchFamily="18" charset="0"/>
+                            </a:rPr>
+                          </m:ctrlPr>
+                        </m:sSubPr>
+                        <m:e>
+                          <m:r>
+                            <a:rPr lang="en-US" sz="2000" b="0" i="1" smtClean="0">
+                              <a:latin typeface="Cambria Math" panose="02040503050406030204" pitchFamily="18" charset="0"/>
+                            </a:rPr>
+                            <m:t>𝑥</m:t>
+                          </m:r>
+                        </m:e>
+                        <m:sub>
+                          <m:r>
+                            <a:rPr lang="en-US" sz="2000" b="0" i="1" smtClean="0">
+                              <a:latin typeface="Cambria Math" panose="02040503050406030204" pitchFamily="18" charset="0"/>
+                            </a:rPr>
+                            <m:t>0</m:t>
+                          </m:r>
+                        </m:sub>
+                      </m:sSub>
+                    </m:oMath>
+                  </m:oMathPara>
+                </a14:m>
+                <a:endParaRPr lang="en-US" sz="2000" dirty="0"/>
+              </a:p>
+            </p:txBody>
+          </p:sp>
+        </mc:Choice>
+        <mc:Fallback>
+          <p:sp>
+            <p:nvSpPr>
+              <p:cNvPr id="42" name="TextBox 41">
+                <a:extLst>
+                  <a:ext uri="{FF2B5EF4-FFF2-40B4-BE49-F238E27FC236}">
+                    <a16:creationId xmlns:a16="http://schemas.microsoft.com/office/drawing/2014/main" id="{89CA82C7-41D2-46A7-E9AF-5E25002C6B89}"/>
+                  </a:ext>
+                </a:extLst>
+              </p:cNvPr>
+              <p:cNvSpPr txBox="1">
+                <a:spLocks noRot="1" noChangeAspect="1" noMove="1" noResize="1" noEditPoints="1" noAdjustHandles="1" noChangeArrowheads="1" noChangeShapeType="1" noTextEdit="1"/>
+              </p:cNvSpPr>
+              <p:nvPr/>
+            </p:nvSpPr>
+            <p:spPr>
+              <a:xfrm>
+                <a:off x="1896411" y="5319303"/>
+                <a:ext cx="503471" cy="307777"/>
+              </a:xfrm>
+              <a:prstGeom prst="rect">
+                <a:avLst/>
+              </a:prstGeom>
+              <a:blipFill>
+                <a:blip r:embed="rId8"/>
+                <a:stretch>
+                  <a:fillRect l="-2410" r="-2410" b="-16000"/>
+                </a:stretch>
+              </a:blipFill>
+            </p:spPr>
+            <p:txBody>
+              <a:bodyPr/>
+              <a:lstStyle/>
+              <a:p>
+                <a:r>
+                  <a:rPr lang="en-IN">
+                    <a:noFill/>
+                  </a:rPr>
+                  <a:t> </a:t>
+                </a:r>
+              </a:p>
+            </p:txBody>
+          </p:sp>
+        </mc:Fallback>
+      </mc:AlternateContent>
+      <p:cxnSp>
+        <p:nvCxnSpPr>
+          <p:cNvPr id="45" name="Straight Arrow Connector 44">
+            <a:extLst>
+              <a:ext uri="{FF2B5EF4-FFF2-40B4-BE49-F238E27FC236}">
+                <a16:creationId xmlns:a16="http://schemas.microsoft.com/office/drawing/2014/main" id="{29BB7228-4768-23B8-724B-747073DAC3B2}"/>
+              </a:ext>
+            </a:extLst>
+          </p:cNvPr>
+          <p:cNvCxnSpPr>
+            <a:cxnSpLocks/>
+          </p:cNvCxnSpPr>
+          <p:nvPr/>
+        </p:nvCxnSpPr>
+        <p:spPr>
+          <a:xfrm flipH="1">
+            <a:off x="6561904" y="3656379"/>
+            <a:ext cx="557967" cy="0"/>
+          </a:xfrm>
+          <a:prstGeom prst="straightConnector1">
+            <a:avLst/>
+          </a:prstGeom>
+          <a:ln w="38100" cap="rnd">
+            <a:solidFill>
+              <a:srgbClr val="C00000"/>
+            </a:solidFill>
+            <a:tailEnd type="triangle" w="lg" len="lg"/>
+          </a:ln>
+        </p:spPr>
+        <p:style>
+          <a:lnRef idx="1">
+            <a:schemeClr val="accent1"/>
+          </a:lnRef>
+          <a:fillRef idx="0">
+            <a:schemeClr val="accent1"/>
+          </a:fillRef>
+          <a:effectRef idx="0">
+            <a:schemeClr val="accent1"/>
+          </a:effectRef>
+          <a:fontRef idx="minor">
+            <a:schemeClr val="tx1"/>
+          </a:fontRef>
+        </p:style>
+      </p:cxnSp>
+      <p:cxnSp>
+        <p:nvCxnSpPr>
+          <p:cNvPr id="47" name="Straight Arrow Connector 46">
+            <a:extLst>
+              <a:ext uri="{FF2B5EF4-FFF2-40B4-BE49-F238E27FC236}">
+                <a16:creationId xmlns:a16="http://schemas.microsoft.com/office/drawing/2014/main" id="{2BAF550B-37EC-0CB5-0EFD-E72AAC927C41}"/>
+              </a:ext>
+            </a:extLst>
+          </p:cNvPr>
+          <p:cNvCxnSpPr>
+            <a:cxnSpLocks/>
+          </p:cNvCxnSpPr>
+          <p:nvPr/>
+        </p:nvCxnSpPr>
+        <p:spPr>
+          <a:xfrm flipH="1">
+            <a:off x="6229350" y="3823066"/>
+            <a:ext cx="596066" cy="0"/>
+          </a:xfrm>
+          <a:prstGeom prst="straightConnector1">
+            <a:avLst/>
+          </a:prstGeom>
+          <a:ln w="38100" cap="rnd">
+            <a:solidFill>
+              <a:srgbClr val="003A00"/>
+            </a:solidFill>
+            <a:tailEnd type="triangle" w="lg" len="lg"/>
+          </a:ln>
+        </p:spPr>
+        <p:style>
+          <a:lnRef idx="1">
+            <a:schemeClr val="accent1"/>
+          </a:lnRef>
+          <a:fillRef idx="0">
+            <a:schemeClr val="accent1"/>
+          </a:fillRef>
+          <a:effectRef idx="0">
+            <a:schemeClr val="accent1"/>
+          </a:effectRef>
+          <a:fontRef idx="minor">
+            <a:schemeClr val="tx1"/>
+          </a:fontRef>
+        </p:style>
+      </p:cxnSp>
+      <p:cxnSp>
+        <p:nvCxnSpPr>
+          <p:cNvPr id="52" name="Straight Arrow Connector 51">
+            <a:extLst>
+              <a:ext uri="{FF2B5EF4-FFF2-40B4-BE49-F238E27FC236}">
+                <a16:creationId xmlns:a16="http://schemas.microsoft.com/office/drawing/2014/main" id="{5C2E1A08-1B16-514E-1C87-BD99CA21FB64}"/>
+              </a:ext>
+            </a:extLst>
+          </p:cNvPr>
+          <p:cNvCxnSpPr>
+            <a:cxnSpLocks/>
+          </p:cNvCxnSpPr>
+          <p:nvPr/>
+        </p:nvCxnSpPr>
+        <p:spPr>
+          <a:xfrm>
+            <a:off x="6990171" y="3823066"/>
+            <a:ext cx="596066" cy="0"/>
+          </a:xfrm>
+          <a:prstGeom prst="straightConnector1">
+            <a:avLst/>
+          </a:prstGeom>
+          <a:ln w="38100" cap="rnd">
+            <a:solidFill>
+              <a:srgbClr val="003A00"/>
+            </a:solidFill>
+            <a:tailEnd type="triangle" w="lg" len="lg"/>
+          </a:ln>
+        </p:spPr>
+        <p:style>
+          <a:lnRef idx="1">
+            <a:schemeClr val="accent1"/>
+          </a:lnRef>
+          <a:fillRef idx="0">
+            <a:schemeClr val="accent1"/>
+          </a:fillRef>
+          <a:effectRef idx="0">
+            <a:schemeClr val="accent1"/>
+          </a:effectRef>
+          <a:fontRef idx="minor">
+            <a:schemeClr val="tx1"/>
+          </a:fontRef>
+        </p:style>
+      </p:cxnSp>
+      <p:sp>
+        <p:nvSpPr>
+          <p:cNvPr id="54" name="Oval 53">
+            <a:extLst>
+              <a:ext uri="{FF2B5EF4-FFF2-40B4-BE49-F238E27FC236}">
+                <a16:creationId xmlns:a16="http://schemas.microsoft.com/office/drawing/2014/main" id="{B0E34A6F-D98C-51B9-487F-1905ADCAA0FC}"/>
+              </a:ext>
+            </a:extLst>
+          </p:cNvPr>
+          <p:cNvSpPr/>
+          <p:nvPr/>
+        </p:nvSpPr>
+        <p:spPr>
+          <a:xfrm>
+            <a:off x="4904715" y="5143383"/>
+            <a:ext cx="132616" cy="132616"/>
+          </a:xfrm>
+          <a:prstGeom prst="ellipse">
+            <a:avLst/>
+          </a:prstGeom>
+          <a:solidFill>
+            <a:schemeClr val="tx1"/>
+          </a:solidFill>
+          <a:ln>
+            <a:noFill/>
+          </a:ln>
+        </p:spPr>
+        <p:style>
+          <a:lnRef idx="2">
+            <a:schemeClr val="accent1">
+              <a:shade val="15000"/>
+            </a:schemeClr>
+          </a:lnRef>
+          <a:fillRef idx="1">
+            <a:schemeClr val="accent1"/>
+          </a:fillRef>
+          <a:effectRef idx="0">
+            <a:schemeClr val="accent1"/>
+          </a:effectRef>
+          <a:fontRef idx="minor">
+            <a:schemeClr val="lt1"/>
+          </a:fontRef>
+        </p:style>
+        <p:txBody>
+          <a:bodyPr rtlCol="0" anchor="ctr"/>
+          <a:lstStyle/>
+          <a:p>
+            <a:pPr algn="ctr"/>
+            <a:endParaRPr lang="en-IN"/>
+          </a:p>
+        </p:txBody>
+      </p:sp>
+      <p:cxnSp>
+        <p:nvCxnSpPr>
+          <p:cNvPr id="55" name="Straight Arrow Connector 54">
+            <a:extLst>
+              <a:ext uri="{FF2B5EF4-FFF2-40B4-BE49-F238E27FC236}">
+                <a16:creationId xmlns:a16="http://schemas.microsoft.com/office/drawing/2014/main" id="{4A43D085-61D3-D833-F331-A2E9786489EB}"/>
+              </a:ext>
+            </a:extLst>
+          </p:cNvPr>
+          <p:cNvCxnSpPr>
+            <a:cxnSpLocks/>
+          </p:cNvCxnSpPr>
+          <p:nvPr/>
+        </p:nvCxnSpPr>
+        <p:spPr>
+          <a:xfrm flipH="1">
+            <a:off x="3807399" y="5210489"/>
+            <a:ext cx="1080000" cy="0"/>
+          </a:xfrm>
+          <a:prstGeom prst="straightConnector1">
+            <a:avLst/>
+          </a:prstGeom>
+          <a:ln w="38100" cap="rnd">
+            <a:solidFill>
+              <a:srgbClr val="003A00"/>
+            </a:solidFill>
+            <a:tailEnd type="triangle" w="lg" len="lg"/>
+          </a:ln>
+        </p:spPr>
+        <p:style>
+          <a:lnRef idx="1">
+            <a:schemeClr val="accent1"/>
+          </a:lnRef>
+          <a:fillRef idx="0">
+            <a:schemeClr val="accent1"/>
+          </a:fillRef>
+          <a:effectRef idx="0">
+            <a:schemeClr val="accent1"/>
+          </a:effectRef>
+          <a:fontRef idx="minor">
+            <a:schemeClr val="tx1"/>
+          </a:fontRef>
+        </p:style>
+      </p:cxnSp>
+      <p:cxnSp>
+        <p:nvCxnSpPr>
+          <p:cNvPr id="56" name="Straight Arrow Connector 55">
+            <a:extLst>
+              <a:ext uri="{FF2B5EF4-FFF2-40B4-BE49-F238E27FC236}">
+                <a16:creationId xmlns:a16="http://schemas.microsoft.com/office/drawing/2014/main" id="{DDCAD28F-A733-F9A4-1C46-8CDBF48E8937}"/>
+              </a:ext>
+            </a:extLst>
+          </p:cNvPr>
+          <p:cNvCxnSpPr>
+            <a:cxnSpLocks/>
+          </p:cNvCxnSpPr>
+          <p:nvPr/>
+        </p:nvCxnSpPr>
+        <p:spPr>
+          <a:xfrm>
+            <a:off x="5053998" y="5210489"/>
+            <a:ext cx="1080000" cy="0"/>
+          </a:xfrm>
+          <a:prstGeom prst="straightConnector1">
+            <a:avLst/>
+          </a:prstGeom>
+          <a:ln w="38100" cap="rnd">
+            <a:solidFill>
+              <a:srgbClr val="003A00"/>
+            </a:solidFill>
+            <a:tailEnd type="triangle" w="lg" len="lg"/>
+          </a:ln>
+        </p:spPr>
+        <p:style>
+          <a:lnRef idx="1">
+            <a:schemeClr val="accent1"/>
+          </a:lnRef>
+          <a:fillRef idx="0">
+            <a:schemeClr val="accent1"/>
+          </a:fillRef>
+          <a:effectRef idx="0">
+            <a:schemeClr val="accent1"/>
+          </a:effectRef>
+          <a:fontRef idx="minor">
+            <a:schemeClr val="tx1"/>
+          </a:fontRef>
+        </p:style>
+      </p:cxnSp>
+      <p:grpSp>
+        <p:nvGrpSpPr>
+          <p:cNvPr id="74" name="Group 73">
+            <a:extLst>
+              <a:ext uri="{FF2B5EF4-FFF2-40B4-BE49-F238E27FC236}">
+                <a16:creationId xmlns:a16="http://schemas.microsoft.com/office/drawing/2014/main" id="{F6842202-EAE7-B235-6F19-60FD5F5C823D}"/>
+              </a:ext>
+            </a:extLst>
+          </p:cNvPr>
+          <p:cNvGrpSpPr/>
+          <p:nvPr/>
+        </p:nvGrpSpPr>
+        <p:grpSpPr>
+          <a:xfrm>
+            <a:off x="6422133" y="3019426"/>
+            <a:ext cx="888448" cy="514213"/>
+            <a:chOff x="6422133" y="3019426"/>
+            <a:chExt cx="888448" cy="514213"/>
+          </a:xfrm>
+        </p:grpSpPr>
+        <p:sp>
+          <p:nvSpPr>
+            <p:cNvPr id="60" name="Rectangle 59">
+              <a:extLst>
+                <a:ext uri="{FF2B5EF4-FFF2-40B4-BE49-F238E27FC236}">
+                  <a16:creationId xmlns:a16="http://schemas.microsoft.com/office/drawing/2014/main" id="{CBB6D8C2-48DE-DC22-9ACF-7F4E9E05BD53}"/>
+                </a:ext>
+              </a:extLst>
+            </p:cNvPr>
+            <p:cNvSpPr/>
+            <p:nvPr/>
+          </p:nvSpPr>
+          <p:spPr>
+            <a:xfrm>
+              <a:off x="6422135" y="3019426"/>
+              <a:ext cx="888444" cy="514213"/>
+            </a:xfrm>
+            <a:prstGeom prst="rect">
+              <a:avLst/>
+            </a:prstGeom>
+            <a:solidFill>
+              <a:schemeClr val="bg1">
+                <a:lumMod val="85000"/>
+                <a:alpha val="50000"/>
+              </a:schemeClr>
+            </a:solidFill>
+            <a:ln>
+              <a:noFill/>
+            </a:ln>
+          </p:spPr>
+          <p:style>
+            <a:lnRef idx="2">
+              <a:schemeClr val="accent1">
+                <a:shade val="15000"/>
+              </a:schemeClr>
+            </a:lnRef>
+            <a:fillRef idx="1">
+              <a:schemeClr val="accent1"/>
+            </a:fillRef>
+            <a:effectRef idx="0">
+              <a:schemeClr val="accent1"/>
+            </a:effectRef>
+            <a:fontRef idx="minor">
+              <a:schemeClr val="lt1"/>
+            </a:fontRef>
+          </p:style>
+          <p:txBody>
+            <a:bodyPr rtlCol="0" anchor="ctr"/>
+            <a:lstStyle/>
+            <a:p>
+              <a:pPr algn="ctr"/>
+              <a:endParaRPr lang="en-IN"/>
+            </a:p>
+          </p:txBody>
+        </p:sp>
+        <mc:AlternateContent xmlns:mc="http://schemas.openxmlformats.org/markup-compatibility/2006">
+          <mc:Choice xmlns:a14="http://schemas.microsoft.com/office/drawing/2010/main" Requires="a14">
+            <p:sp>
+              <p:nvSpPr>
+                <p:cNvPr id="57" name="TextBox 56">
+                  <a:extLst>
+                    <a:ext uri="{FF2B5EF4-FFF2-40B4-BE49-F238E27FC236}">
+                      <a16:creationId xmlns:a16="http://schemas.microsoft.com/office/drawing/2014/main" id="{CE89B31F-F3FD-35DA-D0DE-793E1D95E071}"/>
+                    </a:ext>
+                  </a:extLst>
+                </p:cNvPr>
+                <p:cNvSpPr txBox="1"/>
+                <p:nvPr/>
+              </p:nvSpPr>
+              <p:spPr>
+                <a:xfrm>
+                  <a:off x="6422133" y="3057370"/>
+                  <a:ext cx="888448" cy="438325"/>
+                </a:xfrm>
+                <a:prstGeom prst="rect">
+                  <a:avLst/>
+                </a:prstGeom>
+                <a:noFill/>
+              </p:spPr>
+              <p:txBody>
+                <a:bodyPr wrap="none" lIns="0" tIns="0" rIns="0" bIns="0" rtlCol="0">
+                  <a:spAutoFit/>
+                </a:bodyPr>
+                <a:lstStyle/>
+                <a:p>
+                  <a14:m>
+                    <m:oMathPara xmlns:m="http://schemas.openxmlformats.org/officeDocument/2006/math">
+                      <m:oMath>
+                        <m:r>
+                          <a:rPr lang="en-IN" sz="1500" b="0" i="1" smtClean="0">
+                            <a:solidFill>
+                              <a:srgbClr val="C00000"/>
+                            </a:solidFill>
+                            <a:latin typeface="Cambria Math" panose="02040503050406030204" pitchFamily="18" charset="0"/>
+                          </a:rPr>
+                          <m:t>𝑎</m:t>
+                        </m:r>
+                        <m:r>
+                          <a:rPr lang="en-IN" sz="1500" b="0" i="1" smtClean="0">
+                            <a:solidFill>
+                              <a:srgbClr val="C00000"/>
+                            </a:solidFill>
+                            <a:latin typeface="Cambria Math" panose="02040503050406030204" pitchFamily="18" charset="0"/>
+                          </a:rPr>
+                          <m:t>=−</m:t>
+                        </m:r>
+                        <m:f>
+                          <m:fPr>
+                            <m:ctrlPr>
+                              <a:rPr lang="en-IN" sz="1500" b="0" i="1" smtClean="0">
+                                <a:solidFill>
+                                  <a:srgbClr val="C00000"/>
+                                </a:solidFill>
+                                <a:latin typeface="Cambria Math" panose="02040503050406030204" pitchFamily="18" charset="0"/>
+                              </a:rPr>
+                            </m:ctrlPr>
+                          </m:fPr>
+                          <m:num>
+                            <m:r>
+                              <a:rPr lang="en-IN" sz="1500" b="0" i="1" smtClean="0">
+                                <a:solidFill>
+                                  <a:srgbClr val="C00000"/>
+                                </a:solidFill>
+                                <a:latin typeface="Cambria Math" panose="02040503050406030204" pitchFamily="18" charset="0"/>
+                              </a:rPr>
+                              <m:t>𝑘</m:t>
+                            </m:r>
+                          </m:num>
+                          <m:den>
+                            <m:r>
+                              <a:rPr lang="en-IN" sz="1500" b="0" i="1" smtClean="0">
+                                <a:solidFill>
+                                  <a:srgbClr val="C00000"/>
+                                </a:solidFill>
+                                <a:latin typeface="Cambria Math" panose="02040503050406030204" pitchFamily="18" charset="0"/>
+                              </a:rPr>
+                              <m:t>𝑚</m:t>
+                            </m:r>
+                          </m:den>
+                        </m:f>
+                        <m:r>
+                          <a:rPr lang="en-IN" sz="1500" b="0" i="1" smtClean="0">
+                            <a:solidFill>
+                              <a:srgbClr val="C00000"/>
+                            </a:solidFill>
+                            <a:latin typeface="Cambria Math" panose="02040503050406030204" pitchFamily="18" charset="0"/>
+                          </a:rPr>
+                          <m:t>𝑥</m:t>
+                        </m:r>
+                      </m:oMath>
+                    </m:oMathPara>
+                  </a14:m>
+                  <a:endParaRPr lang="en-IN" sz="1500" dirty="0">
+                    <a:solidFill>
+                      <a:srgbClr val="C00000"/>
+                    </a:solidFill>
+                  </a:endParaRPr>
+                </a:p>
+              </p:txBody>
+            </p:sp>
+          </mc:Choice>
+          <mc:Fallback>
+            <p:sp>
+              <p:nvSpPr>
+                <p:cNvPr id="57" name="TextBox 56">
+                  <a:extLst>
+                    <a:ext uri="{FF2B5EF4-FFF2-40B4-BE49-F238E27FC236}">
+                      <a16:creationId xmlns:a16="http://schemas.microsoft.com/office/drawing/2014/main" id="{CE89B31F-F3FD-35DA-D0DE-793E1D95E071}"/>
+                    </a:ext>
+                  </a:extLst>
+                </p:cNvPr>
+                <p:cNvSpPr txBox="1">
+                  <a:spLocks noRot="1" noChangeAspect="1" noMove="1" noResize="1" noEditPoints="1" noAdjustHandles="1" noChangeArrowheads="1" noChangeShapeType="1" noTextEdit="1"/>
+                </p:cNvSpPr>
+                <p:nvPr/>
+              </p:nvSpPr>
+              <p:spPr>
+                <a:xfrm>
+                  <a:off x="6422133" y="3057370"/>
+                  <a:ext cx="888448" cy="438325"/>
+                </a:xfrm>
+                <a:prstGeom prst="rect">
+                  <a:avLst/>
+                </a:prstGeom>
+                <a:blipFill>
+                  <a:blip r:embed="rId9"/>
+                  <a:stretch>
+                    <a:fillRect/>
+                  </a:stretch>
+                </a:blipFill>
+              </p:spPr>
+              <p:txBody>
+                <a:bodyPr/>
+                <a:lstStyle/>
+                <a:p>
+                  <a:r>
+                    <a:rPr lang="en-IN">
+                      <a:noFill/>
+                    </a:rPr>
+                    <a:t> </a:t>
+                  </a:r>
+                </a:p>
+              </p:txBody>
+            </p:sp>
+          </mc:Fallback>
+        </mc:AlternateContent>
+      </p:grpSp>
+      <p:grpSp>
+        <p:nvGrpSpPr>
+          <p:cNvPr id="75" name="Group 74">
+            <a:extLst>
+              <a:ext uri="{FF2B5EF4-FFF2-40B4-BE49-F238E27FC236}">
+                <a16:creationId xmlns:a16="http://schemas.microsoft.com/office/drawing/2014/main" id="{8D36F9B4-34F1-2672-5D50-5EF25743BF94}"/>
+              </a:ext>
+            </a:extLst>
+          </p:cNvPr>
+          <p:cNvGrpSpPr/>
+          <p:nvPr/>
+        </p:nvGrpSpPr>
+        <p:grpSpPr>
+          <a:xfrm>
+            <a:off x="5932757" y="3953015"/>
+            <a:ext cx="1747723" cy="728523"/>
+            <a:chOff x="5932757" y="3953015"/>
+            <a:chExt cx="1747723" cy="728523"/>
+          </a:xfrm>
+        </p:grpSpPr>
+        <p:sp>
+          <p:nvSpPr>
+            <p:cNvPr id="62" name="Rectangle 61">
+              <a:extLst>
+                <a:ext uri="{FF2B5EF4-FFF2-40B4-BE49-F238E27FC236}">
+                  <a16:creationId xmlns:a16="http://schemas.microsoft.com/office/drawing/2014/main" id="{E20BB753-2DEB-09BA-9B82-569AB4B81497}"/>
+                </a:ext>
+              </a:extLst>
+            </p:cNvPr>
+            <p:cNvSpPr/>
+            <p:nvPr/>
+          </p:nvSpPr>
+          <p:spPr>
+            <a:xfrm>
+              <a:off x="5953930" y="3953015"/>
+              <a:ext cx="1705377" cy="728523"/>
+            </a:xfrm>
+            <a:prstGeom prst="rect">
+              <a:avLst/>
+            </a:prstGeom>
+            <a:solidFill>
+              <a:schemeClr val="bg1">
+                <a:lumMod val="85000"/>
+                <a:alpha val="50000"/>
+              </a:schemeClr>
+            </a:solidFill>
+            <a:ln>
+              <a:noFill/>
+            </a:ln>
+          </p:spPr>
+          <p:style>
+            <a:lnRef idx="2">
+              <a:schemeClr val="accent1">
+                <a:shade val="15000"/>
+              </a:schemeClr>
+            </a:lnRef>
+            <a:fillRef idx="1">
+              <a:schemeClr val="accent1"/>
+            </a:fillRef>
+            <a:effectRef idx="0">
+              <a:schemeClr val="accent1"/>
+            </a:effectRef>
+            <a:fontRef idx="minor">
+              <a:schemeClr val="lt1"/>
+            </a:fontRef>
+          </p:style>
+          <p:txBody>
+            <a:bodyPr rtlCol="0" anchor="ctr"/>
+            <a:lstStyle/>
+            <a:p>
+              <a:pPr algn="ctr"/>
+              <a:endParaRPr lang="en-IN"/>
+            </a:p>
+          </p:txBody>
+        </p:sp>
+        <mc:AlternateContent xmlns:mc="http://schemas.openxmlformats.org/markup-compatibility/2006">
+          <mc:Choice xmlns:a14="http://schemas.microsoft.com/office/drawing/2010/main" Requires="a14">
+            <p:sp>
+              <p:nvSpPr>
+                <p:cNvPr id="59" name="TextBox 58">
+                  <a:extLst>
+                    <a:ext uri="{FF2B5EF4-FFF2-40B4-BE49-F238E27FC236}">
+                      <a16:creationId xmlns:a16="http://schemas.microsoft.com/office/drawing/2014/main" id="{BB7AD21E-0660-6E99-8293-2944F689B5C8}"/>
+                    </a:ext>
+                  </a:extLst>
+                </p:cNvPr>
+                <p:cNvSpPr txBox="1"/>
+                <p:nvPr/>
+              </p:nvSpPr>
+              <p:spPr>
+                <a:xfrm>
+                  <a:off x="5932757" y="3976285"/>
+                  <a:ext cx="1747723" cy="681982"/>
+                </a:xfrm>
+                <a:prstGeom prst="rect">
+                  <a:avLst/>
+                </a:prstGeom>
+                <a:noFill/>
+              </p:spPr>
+              <p:txBody>
+                <a:bodyPr wrap="none" lIns="0" tIns="0" rIns="0" bIns="0" rtlCol="0">
+                  <a:spAutoFit/>
+                </a:bodyPr>
+                <a:lstStyle/>
+                <a:p>
+                  <a:pPr/>
+                  <a14:m>
+                    <m:oMathPara xmlns:m="http://schemas.openxmlformats.org/officeDocument/2006/math">
+                      <m:oMath>
+                        <m:r>
+                          <a:rPr lang="en-IN" sz="1500" b="0" i="1" smtClean="0">
+                            <a:solidFill>
+                              <a:srgbClr val="003A00"/>
+                            </a:solidFill>
+                            <a:latin typeface="Cambria Math" panose="02040503050406030204" pitchFamily="18" charset="0"/>
+                          </a:rPr>
+                          <m:t>𝑣</m:t>
+                        </m:r>
+                        <m:r>
+                          <a:rPr lang="en-IN" sz="1500" b="0" i="1" smtClean="0">
+                            <a:solidFill>
+                              <a:srgbClr val="003A00"/>
+                            </a:solidFill>
+                            <a:latin typeface="Cambria Math" panose="02040503050406030204" pitchFamily="18" charset="0"/>
+                          </a:rPr>
+                          <m:t>=</m:t>
+                        </m:r>
+                        <m:r>
+                          <a:rPr lang="en-IN" sz="1500" b="0" i="1" smtClean="0">
+                            <a:solidFill>
+                              <a:srgbClr val="003A00"/>
+                            </a:solidFill>
+                            <a:latin typeface="Cambria Math" panose="02040503050406030204" pitchFamily="18" charset="0"/>
+                            <a:ea typeface="Cambria Math" panose="02040503050406030204" pitchFamily="18" charset="0"/>
+                          </a:rPr>
+                          <m:t>±</m:t>
+                        </m:r>
+                        <m:rad>
+                          <m:radPr>
+                            <m:degHide m:val="on"/>
+                            <m:ctrlPr>
+                              <a:rPr lang="en-IN" sz="1500" b="0" i="1" smtClean="0">
+                                <a:solidFill>
+                                  <a:srgbClr val="003A00"/>
+                                </a:solidFill>
+                                <a:latin typeface="Cambria Math" panose="02040503050406030204" pitchFamily="18" charset="0"/>
+                                <a:ea typeface="Cambria Math" panose="02040503050406030204" pitchFamily="18" charset="0"/>
+                              </a:rPr>
+                            </m:ctrlPr>
+                          </m:radPr>
+                          <m:deg/>
+                          <m:e>
+                            <m:f>
+                              <m:fPr>
+                                <m:ctrlPr>
+                                  <a:rPr lang="en-IN" sz="1500" b="0" i="1" smtClean="0">
+                                    <a:solidFill>
+                                      <a:srgbClr val="003A00"/>
+                                    </a:solidFill>
+                                    <a:latin typeface="Cambria Math" panose="02040503050406030204" pitchFamily="18" charset="0"/>
+                                    <a:ea typeface="Cambria Math" panose="02040503050406030204" pitchFamily="18" charset="0"/>
+                                  </a:rPr>
+                                </m:ctrlPr>
+                              </m:fPr>
+                              <m:num>
+                                <m:r>
+                                  <a:rPr lang="en-IN" sz="1500" b="0" i="1" smtClean="0">
+                                    <a:solidFill>
+                                      <a:srgbClr val="003A00"/>
+                                    </a:solidFill>
+                                    <a:latin typeface="Cambria Math" panose="02040503050406030204" pitchFamily="18" charset="0"/>
+                                    <a:ea typeface="Cambria Math" panose="02040503050406030204" pitchFamily="18" charset="0"/>
+                                  </a:rPr>
+                                  <m:t>𝑘</m:t>
+                                </m:r>
+                              </m:num>
+                              <m:den>
+                                <m:r>
+                                  <a:rPr lang="en-IN" sz="1500" b="0" i="1" smtClean="0">
+                                    <a:solidFill>
+                                      <a:srgbClr val="003A00"/>
+                                    </a:solidFill>
+                                    <a:latin typeface="Cambria Math" panose="02040503050406030204" pitchFamily="18" charset="0"/>
+                                    <a:ea typeface="Cambria Math" panose="02040503050406030204" pitchFamily="18" charset="0"/>
+                                  </a:rPr>
+                                  <m:t>𝑚</m:t>
+                                </m:r>
+                              </m:den>
+                            </m:f>
+                            <m:d>
+                              <m:dPr>
+                                <m:ctrlPr>
+                                  <a:rPr lang="en-IN" sz="1500" b="0" i="1" smtClean="0">
+                                    <a:solidFill>
+                                      <a:srgbClr val="003A00"/>
+                                    </a:solidFill>
+                                    <a:latin typeface="Cambria Math" panose="02040503050406030204" pitchFamily="18" charset="0"/>
+                                    <a:ea typeface="Cambria Math" panose="02040503050406030204" pitchFamily="18" charset="0"/>
+                                  </a:rPr>
+                                </m:ctrlPr>
+                              </m:dPr>
+                              <m:e>
+                                <m:sSubSup>
+                                  <m:sSubSupPr>
+                                    <m:ctrlPr>
+                                      <a:rPr lang="en-IN" sz="1500" b="0" i="1" smtClean="0">
+                                        <a:solidFill>
+                                          <a:srgbClr val="003A00"/>
+                                        </a:solidFill>
+                                        <a:latin typeface="Cambria Math" panose="02040503050406030204" pitchFamily="18" charset="0"/>
+                                        <a:ea typeface="Cambria Math" panose="02040503050406030204" pitchFamily="18" charset="0"/>
+                                      </a:rPr>
+                                    </m:ctrlPr>
+                                  </m:sSubSupPr>
+                                  <m:e>
+                                    <m:r>
+                                      <a:rPr lang="en-IN" sz="1500" b="0" i="1" smtClean="0">
+                                        <a:solidFill>
+                                          <a:srgbClr val="003A00"/>
+                                        </a:solidFill>
+                                        <a:latin typeface="Cambria Math" panose="02040503050406030204" pitchFamily="18" charset="0"/>
+                                        <a:ea typeface="Cambria Math" panose="02040503050406030204" pitchFamily="18" charset="0"/>
+                                      </a:rPr>
+                                      <m:t>𝑥</m:t>
+                                    </m:r>
+                                  </m:e>
+                                  <m:sub>
+                                    <m:r>
+                                      <a:rPr lang="en-IN" sz="1500" b="0" i="1" smtClean="0">
+                                        <a:solidFill>
+                                          <a:srgbClr val="003A00"/>
+                                        </a:solidFill>
+                                        <a:latin typeface="Cambria Math" panose="02040503050406030204" pitchFamily="18" charset="0"/>
+                                        <a:ea typeface="Cambria Math" panose="02040503050406030204" pitchFamily="18" charset="0"/>
+                                      </a:rPr>
+                                      <m:t>0</m:t>
+                                    </m:r>
+                                  </m:sub>
+                                  <m:sup>
+                                    <m:r>
+                                      <a:rPr lang="en-IN" sz="1500" b="0" i="1" smtClean="0">
+                                        <a:solidFill>
+                                          <a:srgbClr val="003A00"/>
+                                        </a:solidFill>
+                                        <a:latin typeface="Cambria Math" panose="02040503050406030204" pitchFamily="18" charset="0"/>
+                                        <a:ea typeface="Cambria Math" panose="02040503050406030204" pitchFamily="18" charset="0"/>
+                                      </a:rPr>
+                                      <m:t>2</m:t>
+                                    </m:r>
+                                  </m:sup>
+                                </m:sSubSup>
+                                <m:r>
+                                  <a:rPr lang="en-IN" sz="1500" b="0" i="1" smtClean="0">
+                                    <a:solidFill>
+                                      <a:srgbClr val="003A00"/>
+                                    </a:solidFill>
+                                    <a:latin typeface="Cambria Math" panose="02040503050406030204" pitchFamily="18" charset="0"/>
+                                    <a:ea typeface="Cambria Math" panose="02040503050406030204" pitchFamily="18" charset="0"/>
+                                  </a:rPr>
+                                  <m:t>−</m:t>
+                                </m:r>
+                                <m:sSup>
+                                  <m:sSupPr>
+                                    <m:ctrlPr>
+                                      <a:rPr lang="en-IN" sz="1500" b="0" i="1" smtClean="0">
+                                        <a:solidFill>
+                                          <a:srgbClr val="003A00"/>
+                                        </a:solidFill>
+                                        <a:latin typeface="Cambria Math" panose="02040503050406030204" pitchFamily="18" charset="0"/>
+                                        <a:ea typeface="Cambria Math" panose="02040503050406030204" pitchFamily="18" charset="0"/>
+                                      </a:rPr>
+                                    </m:ctrlPr>
+                                  </m:sSupPr>
+                                  <m:e>
+                                    <m:r>
+                                      <a:rPr lang="en-IN" sz="1500" b="0" i="1" smtClean="0">
+                                        <a:solidFill>
+                                          <a:srgbClr val="003A00"/>
+                                        </a:solidFill>
+                                        <a:latin typeface="Cambria Math" panose="02040503050406030204" pitchFamily="18" charset="0"/>
+                                        <a:ea typeface="Cambria Math" panose="02040503050406030204" pitchFamily="18" charset="0"/>
+                                      </a:rPr>
+                                      <m:t>𝑥</m:t>
+                                    </m:r>
+                                  </m:e>
+                                  <m:sup>
+                                    <m:r>
+                                      <a:rPr lang="en-IN" sz="1500" b="0" i="1" smtClean="0">
+                                        <a:solidFill>
+                                          <a:srgbClr val="003A00"/>
+                                        </a:solidFill>
+                                        <a:latin typeface="Cambria Math" panose="02040503050406030204" pitchFamily="18" charset="0"/>
+                                        <a:ea typeface="Cambria Math" panose="02040503050406030204" pitchFamily="18" charset="0"/>
+                                      </a:rPr>
+                                      <m:t>2</m:t>
+                                    </m:r>
+                                  </m:sup>
+                                </m:sSup>
+                              </m:e>
+                            </m:d>
+                          </m:e>
+                        </m:rad>
+                      </m:oMath>
+                    </m:oMathPara>
+                  </a14:m>
+                  <a:endParaRPr lang="en-IN" sz="1500" dirty="0">
+                    <a:solidFill>
+                      <a:srgbClr val="003A00"/>
+                    </a:solidFill>
+                  </a:endParaRPr>
+                </a:p>
+              </p:txBody>
+            </p:sp>
+          </mc:Choice>
+          <mc:Fallback>
+            <p:sp>
+              <p:nvSpPr>
+                <p:cNvPr id="59" name="TextBox 58">
+                  <a:extLst>
+                    <a:ext uri="{FF2B5EF4-FFF2-40B4-BE49-F238E27FC236}">
+                      <a16:creationId xmlns:a16="http://schemas.microsoft.com/office/drawing/2014/main" id="{BB7AD21E-0660-6E99-8293-2944F689B5C8}"/>
+                    </a:ext>
+                  </a:extLst>
+                </p:cNvPr>
+                <p:cNvSpPr txBox="1">
+                  <a:spLocks noRot="1" noChangeAspect="1" noMove="1" noResize="1" noEditPoints="1" noAdjustHandles="1" noChangeArrowheads="1" noChangeShapeType="1" noTextEdit="1"/>
+                </p:cNvSpPr>
+                <p:nvPr/>
+              </p:nvSpPr>
+              <p:spPr>
+                <a:xfrm>
+                  <a:off x="5932757" y="3976285"/>
+                  <a:ext cx="1747723" cy="681982"/>
+                </a:xfrm>
+                <a:prstGeom prst="rect">
+                  <a:avLst/>
+                </a:prstGeom>
+                <a:blipFill>
+                  <a:blip r:embed="rId10"/>
+                  <a:stretch>
+                    <a:fillRect/>
+                  </a:stretch>
+                </a:blipFill>
+              </p:spPr>
+              <p:txBody>
+                <a:bodyPr/>
+                <a:lstStyle/>
+                <a:p>
+                  <a:r>
+                    <a:rPr lang="en-IN">
+                      <a:noFill/>
+                    </a:rPr>
+                    <a:t> </a:t>
+                  </a:r>
+                </a:p>
+              </p:txBody>
+            </p:sp>
+          </mc:Fallback>
+        </mc:AlternateContent>
+      </p:grpSp>
+      <p:grpSp>
+        <p:nvGrpSpPr>
+          <p:cNvPr id="89" name="Group 88">
+            <a:extLst>
+              <a:ext uri="{FF2B5EF4-FFF2-40B4-BE49-F238E27FC236}">
+                <a16:creationId xmlns:a16="http://schemas.microsoft.com/office/drawing/2014/main" id="{BBB41EEB-1067-2D1B-1EA2-F017DC09918F}"/>
+              </a:ext>
+            </a:extLst>
+          </p:cNvPr>
+          <p:cNvGrpSpPr/>
+          <p:nvPr/>
+        </p:nvGrpSpPr>
+        <p:grpSpPr>
+          <a:xfrm>
+            <a:off x="7345646" y="1409887"/>
+            <a:ext cx="970522" cy="514213"/>
+            <a:chOff x="7195628" y="1409887"/>
+            <a:chExt cx="970522" cy="514213"/>
+          </a:xfrm>
+        </p:grpSpPr>
+        <p:sp>
+          <p:nvSpPr>
+            <p:cNvPr id="64" name="Rectangle 63">
+              <a:extLst>
+                <a:ext uri="{FF2B5EF4-FFF2-40B4-BE49-F238E27FC236}">
+                  <a16:creationId xmlns:a16="http://schemas.microsoft.com/office/drawing/2014/main" id="{BF327C7B-81BF-840D-5792-EDA8C0E1610F}"/>
+                </a:ext>
+              </a:extLst>
+            </p:cNvPr>
+            <p:cNvSpPr/>
+            <p:nvPr/>
+          </p:nvSpPr>
+          <p:spPr>
+            <a:xfrm>
+              <a:off x="7206198" y="1409887"/>
+              <a:ext cx="949382" cy="514213"/>
+            </a:xfrm>
+            <a:prstGeom prst="rect">
+              <a:avLst/>
+            </a:prstGeom>
+            <a:solidFill>
+              <a:schemeClr val="bg1">
+                <a:lumMod val="85000"/>
+                <a:alpha val="50000"/>
+              </a:schemeClr>
+            </a:solidFill>
+            <a:ln>
+              <a:noFill/>
+            </a:ln>
+          </p:spPr>
+          <p:style>
+            <a:lnRef idx="2">
+              <a:schemeClr val="accent1">
+                <a:shade val="15000"/>
+              </a:schemeClr>
+            </a:lnRef>
+            <a:fillRef idx="1">
+              <a:schemeClr val="accent1"/>
+            </a:fillRef>
+            <a:effectRef idx="0">
+              <a:schemeClr val="accent1"/>
+            </a:effectRef>
+            <a:fontRef idx="minor">
+              <a:schemeClr val="lt1"/>
+            </a:fontRef>
+          </p:style>
+          <p:txBody>
+            <a:bodyPr rtlCol="0" anchor="ctr"/>
+            <a:lstStyle/>
+            <a:p>
+              <a:pPr algn="ctr"/>
+              <a:endParaRPr lang="en-IN"/>
+            </a:p>
+          </p:txBody>
+        </p:sp>
+        <mc:AlternateContent xmlns:mc="http://schemas.openxmlformats.org/markup-compatibility/2006">
+          <mc:Choice xmlns:a14="http://schemas.microsoft.com/office/drawing/2010/main" Requires="a14">
+            <p:sp>
+              <p:nvSpPr>
+                <p:cNvPr id="66" name="TextBox 65">
+                  <a:extLst>
+                    <a:ext uri="{FF2B5EF4-FFF2-40B4-BE49-F238E27FC236}">
+                      <a16:creationId xmlns:a16="http://schemas.microsoft.com/office/drawing/2014/main" id="{20FD82DF-29BA-A7B7-C959-D41D4E70273E}"/>
+                    </a:ext>
+                  </a:extLst>
+                </p:cNvPr>
+                <p:cNvSpPr txBox="1"/>
+                <p:nvPr/>
+              </p:nvSpPr>
+              <p:spPr>
+                <a:xfrm>
+                  <a:off x="7195628" y="1447831"/>
+                  <a:ext cx="970522" cy="438325"/>
+                </a:xfrm>
+                <a:prstGeom prst="rect">
+                  <a:avLst/>
+                </a:prstGeom>
+                <a:noFill/>
+              </p:spPr>
+              <p:txBody>
+                <a:bodyPr wrap="none" lIns="0" tIns="0" rIns="0" bIns="0" rtlCol="0">
+                  <a:spAutoFit/>
+                </a:bodyPr>
+                <a:lstStyle/>
+                <a:p>
+                  <a:pPr/>
+                  <a14:m>
+                    <m:oMathPara xmlns:m="http://schemas.openxmlformats.org/officeDocument/2006/math">
+                      <m:oMath>
+                        <m:r>
+                          <a:rPr lang="en-IN" sz="1500" b="0" i="1" smtClean="0">
+                            <a:solidFill>
+                              <a:srgbClr val="C00000"/>
+                            </a:solidFill>
+                            <a:latin typeface="Cambria Math" panose="02040503050406030204" pitchFamily="18" charset="0"/>
+                          </a:rPr>
+                          <m:t>𝑎</m:t>
+                        </m:r>
+                        <m:r>
+                          <a:rPr lang="en-IN" sz="1500" b="0" i="1" smtClean="0">
+                            <a:solidFill>
+                              <a:srgbClr val="C00000"/>
+                            </a:solidFill>
+                            <a:latin typeface="Cambria Math" panose="02040503050406030204" pitchFamily="18" charset="0"/>
+                          </a:rPr>
+                          <m:t>=−</m:t>
+                        </m:r>
+                        <m:f>
+                          <m:fPr>
+                            <m:ctrlPr>
+                              <a:rPr lang="en-IN" sz="1500" b="0" i="1" smtClean="0">
+                                <a:solidFill>
+                                  <a:srgbClr val="C00000"/>
+                                </a:solidFill>
+                                <a:latin typeface="Cambria Math" panose="02040503050406030204" pitchFamily="18" charset="0"/>
+                              </a:rPr>
+                            </m:ctrlPr>
+                          </m:fPr>
+                          <m:num>
+                            <m:r>
+                              <a:rPr lang="en-IN" sz="1500" b="0" i="1" smtClean="0">
+                                <a:solidFill>
+                                  <a:srgbClr val="C00000"/>
+                                </a:solidFill>
+                                <a:latin typeface="Cambria Math" panose="02040503050406030204" pitchFamily="18" charset="0"/>
+                              </a:rPr>
+                              <m:t>𝑘</m:t>
+                            </m:r>
+                          </m:num>
+                          <m:den>
+                            <m:r>
+                              <a:rPr lang="en-IN" sz="1500" b="0" i="1" smtClean="0">
+                                <a:solidFill>
+                                  <a:srgbClr val="C00000"/>
+                                </a:solidFill>
+                                <a:latin typeface="Cambria Math" panose="02040503050406030204" pitchFamily="18" charset="0"/>
+                              </a:rPr>
+                              <m:t>𝑚</m:t>
+                            </m:r>
+                          </m:den>
+                        </m:f>
+                        <m:sSub>
+                          <m:sSubPr>
+                            <m:ctrlPr>
+                              <a:rPr lang="en-IN" sz="1500" b="0" i="1" smtClean="0">
+                                <a:solidFill>
+                                  <a:srgbClr val="C00000"/>
+                                </a:solidFill>
+                                <a:latin typeface="Cambria Math" panose="02040503050406030204" pitchFamily="18" charset="0"/>
+                              </a:rPr>
+                            </m:ctrlPr>
+                          </m:sSubPr>
+                          <m:e>
+                            <m:r>
+                              <a:rPr lang="en-IN" sz="1500" b="0" i="1" smtClean="0">
+                                <a:solidFill>
+                                  <a:srgbClr val="C00000"/>
+                                </a:solidFill>
+                                <a:latin typeface="Cambria Math" panose="02040503050406030204" pitchFamily="18" charset="0"/>
+                              </a:rPr>
+                              <m:t>𝑥</m:t>
+                            </m:r>
+                          </m:e>
+                          <m:sub>
+                            <m:r>
+                              <a:rPr lang="en-IN" sz="1500" b="0" i="1" smtClean="0">
+                                <a:solidFill>
+                                  <a:srgbClr val="C00000"/>
+                                </a:solidFill>
+                                <a:latin typeface="Cambria Math" panose="02040503050406030204" pitchFamily="18" charset="0"/>
+                              </a:rPr>
+                              <m:t>0</m:t>
+                            </m:r>
+                          </m:sub>
+                        </m:sSub>
+                      </m:oMath>
+                    </m:oMathPara>
+                  </a14:m>
+                  <a:endParaRPr lang="en-IN" sz="1500" dirty="0">
+                    <a:solidFill>
+                      <a:srgbClr val="C00000"/>
+                    </a:solidFill>
+                  </a:endParaRPr>
+                </a:p>
+              </p:txBody>
+            </p:sp>
+          </mc:Choice>
+          <mc:Fallback>
+            <p:sp>
+              <p:nvSpPr>
+                <p:cNvPr id="66" name="TextBox 65">
+                  <a:extLst>
+                    <a:ext uri="{FF2B5EF4-FFF2-40B4-BE49-F238E27FC236}">
+                      <a16:creationId xmlns:a16="http://schemas.microsoft.com/office/drawing/2014/main" id="{20FD82DF-29BA-A7B7-C959-D41D4E70273E}"/>
+                    </a:ext>
+                  </a:extLst>
+                </p:cNvPr>
+                <p:cNvSpPr txBox="1">
+                  <a:spLocks noRot="1" noChangeAspect="1" noMove="1" noResize="1" noEditPoints="1" noAdjustHandles="1" noChangeArrowheads="1" noChangeShapeType="1" noTextEdit="1"/>
+                </p:cNvSpPr>
+                <p:nvPr/>
+              </p:nvSpPr>
+              <p:spPr>
+                <a:xfrm>
+                  <a:off x="7195628" y="1447831"/>
+                  <a:ext cx="970522" cy="438325"/>
+                </a:xfrm>
+                <a:prstGeom prst="rect">
+                  <a:avLst/>
+                </a:prstGeom>
+                <a:blipFill>
+                  <a:blip r:embed="rId11"/>
+                  <a:stretch>
+                    <a:fillRect/>
+                  </a:stretch>
+                </a:blipFill>
+              </p:spPr>
+              <p:txBody>
+                <a:bodyPr/>
+                <a:lstStyle/>
+                <a:p>
+                  <a:r>
+                    <a:rPr lang="en-IN">
+                      <a:noFill/>
+                    </a:rPr>
+                    <a:t> </a:t>
+                  </a:r>
+                </a:p>
+              </p:txBody>
+            </p:sp>
+          </mc:Fallback>
+        </mc:AlternateContent>
+      </p:grpSp>
+      <p:grpSp>
+        <p:nvGrpSpPr>
+          <p:cNvPr id="90" name="Group 89">
+            <a:extLst>
+              <a:ext uri="{FF2B5EF4-FFF2-40B4-BE49-F238E27FC236}">
+                <a16:creationId xmlns:a16="http://schemas.microsoft.com/office/drawing/2014/main" id="{5FFD5242-8060-6488-3428-0F150E5F8FFD}"/>
+              </a:ext>
+            </a:extLst>
+          </p:cNvPr>
+          <p:cNvGrpSpPr/>
+          <p:nvPr/>
+        </p:nvGrpSpPr>
+        <p:grpSpPr>
+          <a:xfrm>
+            <a:off x="7547726" y="2249629"/>
+            <a:ext cx="511366" cy="263474"/>
+            <a:chOff x="7378657" y="2268677"/>
+            <a:chExt cx="511366" cy="263474"/>
+          </a:xfrm>
+        </p:grpSpPr>
+        <p:sp>
+          <p:nvSpPr>
+            <p:cNvPr id="68" name="Rectangle 67">
+              <a:extLst>
+                <a:ext uri="{FF2B5EF4-FFF2-40B4-BE49-F238E27FC236}">
+                  <a16:creationId xmlns:a16="http://schemas.microsoft.com/office/drawing/2014/main" id="{A1EC44EB-7308-EDD6-5210-4B4D8FB5A0D2}"/>
+                </a:ext>
+              </a:extLst>
+            </p:cNvPr>
+            <p:cNvSpPr/>
+            <p:nvPr/>
+          </p:nvSpPr>
+          <p:spPr>
+            <a:xfrm>
+              <a:off x="7378657" y="2268677"/>
+              <a:ext cx="511366" cy="263474"/>
+            </a:xfrm>
+            <a:prstGeom prst="rect">
+              <a:avLst/>
+            </a:prstGeom>
+            <a:solidFill>
+              <a:schemeClr val="bg1">
+                <a:lumMod val="85000"/>
+                <a:alpha val="50000"/>
+              </a:schemeClr>
+            </a:solidFill>
+            <a:ln>
+              <a:noFill/>
+            </a:ln>
+          </p:spPr>
+          <p:style>
+            <a:lnRef idx="2">
+              <a:schemeClr val="accent1">
+                <a:shade val="15000"/>
+              </a:schemeClr>
+            </a:lnRef>
+            <a:fillRef idx="1">
+              <a:schemeClr val="accent1"/>
+            </a:fillRef>
+            <a:effectRef idx="0">
+              <a:schemeClr val="accent1"/>
+            </a:effectRef>
+            <a:fontRef idx="minor">
+              <a:schemeClr val="lt1"/>
+            </a:fontRef>
+          </p:style>
+          <p:txBody>
+            <a:bodyPr rtlCol="0" anchor="ctr"/>
+            <a:lstStyle/>
+            <a:p>
+              <a:pPr algn="ctr"/>
+              <a:endParaRPr lang="en-IN"/>
+            </a:p>
+          </p:txBody>
+        </p:sp>
+        <mc:AlternateContent xmlns:mc="http://schemas.openxmlformats.org/markup-compatibility/2006">
+          <mc:Choice xmlns:a14="http://schemas.microsoft.com/office/drawing/2010/main" Requires="a14">
+            <p:sp>
+              <p:nvSpPr>
+                <p:cNvPr id="70" name="TextBox 69">
+                  <a:extLst>
+                    <a:ext uri="{FF2B5EF4-FFF2-40B4-BE49-F238E27FC236}">
+                      <a16:creationId xmlns:a16="http://schemas.microsoft.com/office/drawing/2014/main" id="{02265463-370A-1D22-DF4C-2D94F7986959}"/>
+                    </a:ext>
+                  </a:extLst>
+                </p:cNvPr>
+                <p:cNvSpPr txBox="1"/>
+                <p:nvPr/>
+              </p:nvSpPr>
+              <p:spPr>
+                <a:xfrm>
+                  <a:off x="7379335" y="2284998"/>
+                  <a:ext cx="510011" cy="230832"/>
+                </a:xfrm>
+                <a:prstGeom prst="rect">
+                  <a:avLst/>
+                </a:prstGeom>
+                <a:noFill/>
+              </p:spPr>
+              <p:txBody>
+                <a:bodyPr wrap="none" lIns="0" tIns="0" rIns="0" bIns="0" rtlCol="0">
+                  <a:spAutoFit/>
+                </a:bodyPr>
+                <a:lstStyle/>
+                <a:p>
+                  <a:pPr/>
+                  <a14:m>
+                    <m:oMathPara xmlns:m="http://schemas.openxmlformats.org/officeDocument/2006/math">
+                      <m:oMath>
+                        <m:r>
+                          <a:rPr lang="en-IN" sz="1500" b="0" i="1" smtClean="0">
+                            <a:solidFill>
+                              <a:srgbClr val="003A00"/>
+                            </a:solidFill>
+                            <a:latin typeface="Cambria Math" panose="02040503050406030204" pitchFamily="18" charset="0"/>
+                          </a:rPr>
+                          <m:t>𝑣</m:t>
+                        </m:r>
+                        <m:r>
+                          <a:rPr lang="en-IN" sz="1500" b="0" i="1" smtClean="0">
+                            <a:solidFill>
+                              <a:srgbClr val="003A00"/>
+                            </a:solidFill>
+                            <a:latin typeface="Cambria Math" panose="02040503050406030204" pitchFamily="18" charset="0"/>
+                          </a:rPr>
+                          <m:t>=</m:t>
+                        </m:r>
+                        <m:r>
+                          <a:rPr lang="en-IN" sz="1500" b="0" i="1" smtClean="0">
+                            <a:solidFill>
+                              <a:srgbClr val="003A00"/>
+                            </a:solidFill>
+                            <a:latin typeface="Cambria Math" panose="02040503050406030204" pitchFamily="18" charset="0"/>
+                          </a:rPr>
+                          <m:t>0</m:t>
+                        </m:r>
+                      </m:oMath>
+                    </m:oMathPara>
+                  </a14:m>
+                  <a:endParaRPr lang="en-IN" sz="1500" dirty="0">
+                    <a:solidFill>
+                      <a:srgbClr val="003A00"/>
+                    </a:solidFill>
+                  </a:endParaRPr>
+                </a:p>
+              </p:txBody>
+            </p:sp>
+          </mc:Choice>
+          <mc:Fallback>
+            <p:sp>
+              <p:nvSpPr>
+                <p:cNvPr id="70" name="TextBox 69">
+                  <a:extLst>
+                    <a:ext uri="{FF2B5EF4-FFF2-40B4-BE49-F238E27FC236}">
+                      <a16:creationId xmlns:a16="http://schemas.microsoft.com/office/drawing/2014/main" id="{02265463-370A-1D22-DF4C-2D94F7986959}"/>
+                    </a:ext>
+                  </a:extLst>
+                </p:cNvPr>
+                <p:cNvSpPr txBox="1">
+                  <a:spLocks noRot="1" noChangeAspect="1" noMove="1" noResize="1" noEditPoints="1" noAdjustHandles="1" noChangeArrowheads="1" noChangeShapeType="1" noTextEdit="1"/>
+                </p:cNvSpPr>
+                <p:nvPr/>
+              </p:nvSpPr>
+              <p:spPr>
+                <a:xfrm>
+                  <a:off x="7379335" y="2284998"/>
+                  <a:ext cx="510011" cy="230832"/>
+                </a:xfrm>
+                <a:prstGeom prst="rect">
+                  <a:avLst/>
+                </a:prstGeom>
+                <a:blipFill>
+                  <a:blip r:embed="rId12"/>
+                  <a:stretch>
+                    <a:fillRect l="-4762" r="-8333" b="-5263"/>
+                  </a:stretch>
+                </a:blipFill>
+              </p:spPr>
+              <p:txBody>
+                <a:bodyPr/>
+                <a:lstStyle/>
+                <a:p>
+                  <a:r>
+                    <a:rPr lang="en-IN">
+                      <a:noFill/>
+                    </a:rPr>
+                    <a:t> </a:t>
+                  </a:r>
+                </a:p>
+              </p:txBody>
+            </p:sp>
+          </mc:Fallback>
+        </mc:AlternateContent>
+      </p:grpSp>
+      <p:grpSp>
+        <p:nvGrpSpPr>
+          <p:cNvPr id="95" name="Group 94">
+            <a:extLst>
+              <a:ext uri="{FF2B5EF4-FFF2-40B4-BE49-F238E27FC236}">
+                <a16:creationId xmlns:a16="http://schemas.microsoft.com/office/drawing/2014/main" id="{889A79A5-4E13-EB60-34AC-C0A6A06CBE17}"/>
+              </a:ext>
+            </a:extLst>
+          </p:cNvPr>
+          <p:cNvGrpSpPr/>
+          <p:nvPr/>
+        </p:nvGrpSpPr>
+        <p:grpSpPr>
+          <a:xfrm>
+            <a:off x="4411139" y="4370827"/>
+            <a:ext cx="1116858" cy="728523"/>
+            <a:chOff x="4311125" y="4361303"/>
+            <a:chExt cx="1116858" cy="728523"/>
+          </a:xfrm>
+        </p:grpSpPr>
+        <p:sp>
+          <p:nvSpPr>
+            <p:cNvPr id="77" name="Rectangle 76">
+              <a:extLst>
+                <a:ext uri="{FF2B5EF4-FFF2-40B4-BE49-F238E27FC236}">
+                  <a16:creationId xmlns:a16="http://schemas.microsoft.com/office/drawing/2014/main" id="{E00855F3-68D5-C940-5ECD-546451B06A24}"/>
+                </a:ext>
+              </a:extLst>
+            </p:cNvPr>
+            <p:cNvSpPr/>
+            <p:nvPr/>
+          </p:nvSpPr>
+          <p:spPr>
+            <a:xfrm>
+              <a:off x="4311125" y="4361303"/>
+              <a:ext cx="1116858" cy="728523"/>
+            </a:xfrm>
+            <a:prstGeom prst="rect">
+              <a:avLst/>
+            </a:prstGeom>
+            <a:solidFill>
+              <a:schemeClr val="bg1">
+                <a:lumMod val="85000"/>
+                <a:alpha val="50000"/>
+              </a:schemeClr>
+            </a:solidFill>
+            <a:ln>
+              <a:noFill/>
+            </a:ln>
+          </p:spPr>
+          <p:style>
+            <a:lnRef idx="2">
+              <a:schemeClr val="accent1">
+                <a:shade val="15000"/>
+              </a:schemeClr>
+            </a:lnRef>
+            <a:fillRef idx="1">
+              <a:schemeClr val="accent1"/>
+            </a:fillRef>
+            <a:effectRef idx="0">
+              <a:schemeClr val="accent1"/>
+            </a:effectRef>
+            <a:fontRef idx="minor">
+              <a:schemeClr val="lt1"/>
+            </a:fontRef>
+          </p:style>
+          <p:txBody>
+            <a:bodyPr rtlCol="0" anchor="ctr"/>
+            <a:lstStyle/>
+            <a:p>
+              <a:pPr algn="ctr"/>
+              <a:endParaRPr lang="en-IN"/>
+            </a:p>
+          </p:txBody>
+        </p:sp>
+        <mc:AlternateContent xmlns:mc="http://schemas.openxmlformats.org/markup-compatibility/2006">
+          <mc:Choice xmlns:a14="http://schemas.microsoft.com/office/drawing/2010/main" Requires="a14">
+            <p:sp>
+              <p:nvSpPr>
+                <p:cNvPr id="78" name="TextBox 77">
+                  <a:extLst>
+                    <a:ext uri="{FF2B5EF4-FFF2-40B4-BE49-F238E27FC236}">
+                      <a16:creationId xmlns:a16="http://schemas.microsoft.com/office/drawing/2014/main" id="{FA853D07-0A58-79A7-6A62-08AB2F537B5A}"/>
+                    </a:ext>
+                  </a:extLst>
+                </p:cNvPr>
+                <p:cNvSpPr txBox="1"/>
+                <p:nvPr/>
+              </p:nvSpPr>
+              <p:spPr>
+                <a:xfrm>
+                  <a:off x="4321712" y="4384573"/>
+                  <a:ext cx="1095685" cy="681982"/>
+                </a:xfrm>
+                <a:prstGeom prst="rect">
+                  <a:avLst/>
+                </a:prstGeom>
+                <a:noFill/>
+              </p:spPr>
+              <p:txBody>
+                <a:bodyPr wrap="none" lIns="0" tIns="0" rIns="0" bIns="0" rtlCol="0">
+                  <a:spAutoFit/>
+                </a:bodyPr>
+                <a:lstStyle/>
+                <a:p>
+                  <a:pPr/>
+                  <a14:m>
+                    <m:oMathPara xmlns:m="http://schemas.openxmlformats.org/officeDocument/2006/math">
+                      <m:oMath>
+                        <m:r>
+                          <a:rPr lang="en-IN" sz="1500" b="0" i="1" smtClean="0">
+                            <a:solidFill>
+                              <a:srgbClr val="003A00"/>
+                            </a:solidFill>
+                            <a:latin typeface="Cambria Math" panose="02040503050406030204" pitchFamily="18" charset="0"/>
+                          </a:rPr>
+                          <m:t>𝑣</m:t>
+                        </m:r>
+                        <m:r>
+                          <a:rPr lang="en-IN" sz="1500" b="0" i="1" smtClean="0">
+                            <a:solidFill>
+                              <a:srgbClr val="003A00"/>
+                            </a:solidFill>
+                            <a:latin typeface="Cambria Math" panose="02040503050406030204" pitchFamily="18" charset="0"/>
+                          </a:rPr>
+                          <m:t>=</m:t>
+                        </m:r>
+                        <m:r>
+                          <a:rPr lang="en-IN" sz="1500" b="0" i="1" smtClean="0">
+                            <a:solidFill>
+                              <a:srgbClr val="003A00"/>
+                            </a:solidFill>
+                            <a:latin typeface="Cambria Math" panose="02040503050406030204" pitchFamily="18" charset="0"/>
+                            <a:ea typeface="Cambria Math" panose="02040503050406030204" pitchFamily="18" charset="0"/>
+                          </a:rPr>
+                          <m:t>±</m:t>
+                        </m:r>
+                        <m:rad>
+                          <m:radPr>
+                            <m:degHide m:val="on"/>
+                            <m:ctrlPr>
+                              <a:rPr lang="en-IN" sz="1500" b="0" i="1" smtClean="0">
+                                <a:solidFill>
+                                  <a:srgbClr val="003A00"/>
+                                </a:solidFill>
+                                <a:latin typeface="Cambria Math" panose="02040503050406030204" pitchFamily="18" charset="0"/>
+                                <a:ea typeface="Cambria Math" panose="02040503050406030204" pitchFamily="18" charset="0"/>
+                              </a:rPr>
+                            </m:ctrlPr>
+                          </m:radPr>
+                          <m:deg/>
+                          <m:e>
+                            <m:f>
+                              <m:fPr>
+                                <m:ctrlPr>
+                                  <a:rPr lang="en-IN" sz="1500" b="0" i="1" smtClean="0">
+                                    <a:solidFill>
+                                      <a:srgbClr val="003A00"/>
+                                    </a:solidFill>
+                                    <a:latin typeface="Cambria Math" panose="02040503050406030204" pitchFamily="18" charset="0"/>
+                                    <a:ea typeface="Cambria Math" panose="02040503050406030204" pitchFamily="18" charset="0"/>
+                                  </a:rPr>
+                                </m:ctrlPr>
+                              </m:fPr>
+                              <m:num>
+                                <m:r>
+                                  <a:rPr lang="en-IN" sz="1500" b="0" i="1" smtClean="0">
+                                    <a:solidFill>
+                                      <a:srgbClr val="003A00"/>
+                                    </a:solidFill>
+                                    <a:latin typeface="Cambria Math" panose="02040503050406030204" pitchFamily="18" charset="0"/>
+                                    <a:ea typeface="Cambria Math" panose="02040503050406030204" pitchFamily="18" charset="0"/>
+                                  </a:rPr>
+                                  <m:t>𝑘</m:t>
+                                </m:r>
+                              </m:num>
+                              <m:den>
+                                <m:r>
+                                  <a:rPr lang="en-IN" sz="1500" b="0" i="1" smtClean="0">
+                                    <a:solidFill>
+                                      <a:srgbClr val="003A00"/>
+                                    </a:solidFill>
+                                    <a:latin typeface="Cambria Math" panose="02040503050406030204" pitchFamily="18" charset="0"/>
+                                    <a:ea typeface="Cambria Math" panose="02040503050406030204" pitchFamily="18" charset="0"/>
+                                  </a:rPr>
+                                  <m:t>𝑚</m:t>
+                                </m:r>
+                              </m:den>
+                            </m:f>
+                            <m:sSubSup>
+                              <m:sSubSupPr>
+                                <m:ctrlPr>
+                                  <a:rPr lang="en-IN" sz="1500" i="1">
+                                    <a:solidFill>
+                                      <a:srgbClr val="003A00"/>
+                                    </a:solidFill>
+                                    <a:latin typeface="Cambria Math" panose="02040503050406030204" pitchFamily="18" charset="0"/>
+                                    <a:ea typeface="Cambria Math" panose="02040503050406030204" pitchFamily="18" charset="0"/>
+                                  </a:rPr>
+                                </m:ctrlPr>
+                              </m:sSubSupPr>
+                              <m:e>
+                                <m:r>
+                                  <a:rPr lang="en-IN" sz="1500" i="1">
+                                    <a:solidFill>
+                                      <a:srgbClr val="003A00"/>
+                                    </a:solidFill>
+                                    <a:latin typeface="Cambria Math" panose="02040503050406030204" pitchFamily="18" charset="0"/>
+                                    <a:ea typeface="Cambria Math" panose="02040503050406030204" pitchFamily="18" charset="0"/>
+                                  </a:rPr>
+                                  <m:t>𝑥</m:t>
+                                </m:r>
+                              </m:e>
+                              <m:sub>
+                                <m:r>
+                                  <a:rPr lang="en-IN" sz="1500" i="1">
+                                    <a:solidFill>
+                                      <a:srgbClr val="003A00"/>
+                                    </a:solidFill>
+                                    <a:latin typeface="Cambria Math" panose="02040503050406030204" pitchFamily="18" charset="0"/>
+                                    <a:ea typeface="Cambria Math" panose="02040503050406030204" pitchFamily="18" charset="0"/>
+                                  </a:rPr>
+                                  <m:t>0</m:t>
+                                </m:r>
+                              </m:sub>
+                              <m:sup>
+                                <m:r>
+                                  <a:rPr lang="en-IN" sz="1500" i="1">
+                                    <a:solidFill>
+                                      <a:srgbClr val="003A00"/>
+                                    </a:solidFill>
+                                    <a:latin typeface="Cambria Math" panose="02040503050406030204" pitchFamily="18" charset="0"/>
+                                    <a:ea typeface="Cambria Math" panose="02040503050406030204" pitchFamily="18" charset="0"/>
+                                  </a:rPr>
+                                  <m:t>2</m:t>
+                                </m:r>
+                              </m:sup>
+                            </m:sSubSup>
+                          </m:e>
+                        </m:rad>
+                      </m:oMath>
+                    </m:oMathPara>
+                  </a14:m>
+                  <a:endParaRPr lang="en-IN" sz="1500" dirty="0">
+                    <a:solidFill>
+                      <a:srgbClr val="003A00"/>
+                    </a:solidFill>
+                  </a:endParaRPr>
+                </a:p>
+              </p:txBody>
+            </p:sp>
+          </mc:Choice>
+          <mc:Fallback>
+            <p:sp>
+              <p:nvSpPr>
+                <p:cNvPr id="78" name="TextBox 77">
+                  <a:extLst>
+                    <a:ext uri="{FF2B5EF4-FFF2-40B4-BE49-F238E27FC236}">
+                      <a16:creationId xmlns:a16="http://schemas.microsoft.com/office/drawing/2014/main" id="{FA853D07-0A58-79A7-6A62-08AB2F537B5A}"/>
+                    </a:ext>
+                  </a:extLst>
+                </p:cNvPr>
+                <p:cNvSpPr txBox="1">
+                  <a:spLocks noRot="1" noChangeAspect="1" noMove="1" noResize="1" noEditPoints="1" noAdjustHandles="1" noChangeArrowheads="1" noChangeShapeType="1" noTextEdit="1"/>
+                </p:cNvSpPr>
+                <p:nvPr/>
+              </p:nvSpPr>
+              <p:spPr>
+                <a:xfrm>
+                  <a:off x="4321712" y="4384573"/>
+                  <a:ext cx="1095685" cy="681982"/>
+                </a:xfrm>
+                <a:prstGeom prst="rect">
+                  <a:avLst/>
+                </a:prstGeom>
+                <a:blipFill>
+                  <a:blip r:embed="rId13"/>
+                  <a:stretch>
+                    <a:fillRect/>
+                  </a:stretch>
+                </a:blipFill>
+              </p:spPr>
+              <p:txBody>
+                <a:bodyPr/>
+                <a:lstStyle/>
+                <a:p>
+                  <a:r>
+                    <a:rPr lang="en-IN">
+                      <a:noFill/>
+                    </a:rPr>
+                    <a:t> </a:t>
+                  </a:r>
+                </a:p>
+              </p:txBody>
+            </p:sp>
+          </mc:Fallback>
+        </mc:AlternateContent>
+      </p:grpSp>
+      <p:grpSp>
+        <p:nvGrpSpPr>
+          <p:cNvPr id="94" name="Group 93">
+            <a:extLst>
+              <a:ext uri="{FF2B5EF4-FFF2-40B4-BE49-F238E27FC236}">
+                <a16:creationId xmlns:a16="http://schemas.microsoft.com/office/drawing/2014/main" id="{27A9109D-7BF0-A94B-FB91-F5065FAFD4C4}"/>
+              </a:ext>
+            </a:extLst>
+          </p:cNvPr>
+          <p:cNvGrpSpPr/>
+          <p:nvPr/>
+        </p:nvGrpSpPr>
+        <p:grpSpPr>
+          <a:xfrm>
+            <a:off x="4709248" y="4100906"/>
+            <a:ext cx="512255" cy="230833"/>
+            <a:chOff x="4530862" y="3991746"/>
+            <a:chExt cx="512255" cy="230833"/>
+          </a:xfrm>
+        </p:grpSpPr>
+        <p:sp>
+          <p:nvSpPr>
+            <p:cNvPr id="81" name="Rectangle 80">
+              <a:extLst>
+                <a:ext uri="{FF2B5EF4-FFF2-40B4-BE49-F238E27FC236}">
+                  <a16:creationId xmlns:a16="http://schemas.microsoft.com/office/drawing/2014/main" id="{3E323040-DDE9-98CD-29D7-F75FFE132DC1}"/>
+                </a:ext>
+              </a:extLst>
+            </p:cNvPr>
+            <p:cNvSpPr/>
+            <p:nvPr/>
+          </p:nvSpPr>
+          <p:spPr>
+            <a:xfrm>
+              <a:off x="4530863" y="3991746"/>
+              <a:ext cx="512252" cy="230833"/>
+            </a:xfrm>
+            <a:prstGeom prst="rect">
+              <a:avLst/>
+            </a:prstGeom>
+            <a:solidFill>
+              <a:schemeClr val="bg1">
+                <a:lumMod val="85000"/>
+                <a:alpha val="50000"/>
+              </a:schemeClr>
+            </a:solidFill>
+            <a:ln>
+              <a:noFill/>
+            </a:ln>
+          </p:spPr>
+          <p:style>
+            <a:lnRef idx="2">
+              <a:schemeClr val="accent1">
+                <a:shade val="15000"/>
+              </a:schemeClr>
+            </a:lnRef>
+            <a:fillRef idx="1">
+              <a:schemeClr val="accent1"/>
+            </a:fillRef>
+            <a:effectRef idx="0">
+              <a:schemeClr val="accent1"/>
+            </a:effectRef>
+            <a:fontRef idx="minor">
+              <a:schemeClr val="lt1"/>
+            </a:fontRef>
+          </p:style>
+          <p:txBody>
+            <a:bodyPr rtlCol="0" anchor="ctr"/>
+            <a:lstStyle/>
+            <a:p>
+              <a:pPr algn="ctr"/>
+              <a:endParaRPr lang="en-IN"/>
+            </a:p>
+          </p:txBody>
+        </p:sp>
+        <mc:AlternateContent xmlns:mc="http://schemas.openxmlformats.org/markup-compatibility/2006">
+          <mc:Choice xmlns:a14="http://schemas.microsoft.com/office/drawing/2010/main" Requires="a14">
+            <p:sp>
+              <p:nvSpPr>
+                <p:cNvPr id="82" name="TextBox 81">
+                  <a:extLst>
+                    <a:ext uri="{FF2B5EF4-FFF2-40B4-BE49-F238E27FC236}">
+                      <a16:creationId xmlns:a16="http://schemas.microsoft.com/office/drawing/2014/main" id="{C1153642-EDD5-4AB8-C50C-71D211781863}"/>
+                    </a:ext>
+                  </a:extLst>
+                </p:cNvPr>
+                <p:cNvSpPr txBox="1"/>
+                <p:nvPr/>
+              </p:nvSpPr>
+              <p:spPr>
+                <a:xfrm>
+                  <a:off x="4530862" y="3991746"/>
+                  <a:ext cx="512255" cy="230832"/>
+                </a:xfrm>
+                <a:prstGeom prst="rect">
+                  <a:avLst/>
+                </a:prstGeom>
+                <a:noFill/>
+              </p:spPr>
+              <p:txBody>
+                <a:bodyPr wrap="none" lIns="0" tIns="0" rIns="0" bIns="0" rtlCol="0">
+                  <a:spAutoFit/>
+                </a:bodyPr>
+                <a:lstStyle/>
+                <a:p>
+                  <a14:m>
+                    <m:oMathPara xmlns:m="http://schemas.openxmlformats.org/officeDocument/2006/math">
+                      <m:oMath>
+                        <m:r>
+                          <a:rPr lang="en-IN" sz="1500" b="0" i="1" smtClean="0">
+                            <a:solidFill>
+                              <a:srgbClr val="C00000"/>
+                            </a:solidFill>
+                            <a:latin typeface="Cambria Math" panose="02040503050406030204" pitchFamily="18" charset="0"/>
+                          </a:rPr>
+                          <m:t>𝑎</m:t>
+                        </m:r>
+                        <m:r>
+                          <a:rPr lang="en-IN" sz="1500" b="0" i="1" smtClean="0">
+                            <a:solidFill>
+                              <a:srgbClr val="C00000"/>
+                            </a:solidFill>
+                            <a:latin typeface="Cambria Math" panose="02040503050406030204" pitchFamily="18" charset="0"/>
+                          </a:rPr>
+                          <m:t>=0</m:t>
+                        </m:r>
+                      </m:oMath>
+                    </m:oMathPara>
+                  </a14:m>
+                  <a:endParaRPr lang="en-IN" sz="1500" dirty="0">
+                    <a:solidFill>
+                      <a:srgbClr val="C00000"/>
+                    </a:solidFill>
+                  </a:endParaRPr>
+                </a:p>
+              </p:txBody>
+            </p:sp>
+          </mc:Choice>
+          <mc:Fallback>
+            <p:sp>
+              <p:nvSpPr>
+                <p:cNvPr id="82" name="TextBox 81">
+                  <a:extLst>
+                    <a:ext uri="{FF2B5EF4-FFF2-40B4-BE49-F238E27FC236}">
+                      <a16:creationId xmlns:a16="http://schemas.microsoft.com/office/drawing/2014/main" id="{C1153642-EDD5-4AB8-C50C-71D211781863}"/>
+                    </a:ext>
+                  </a:extLst>
+                </p:cNvPr>
+                <p:cNvSpPr txBox="1">
+                  <a:spLocks noRot="1" noChangeAspect="1" noMove="1" noResize="1" noEditPoints="1" noAdjustHandles="1" noChangeArrowheads="1" noChangeShapeType="1" noTextEdit="1"/>
+                </p:cNvSpPr>
+                <p:nvPr/>
+              </p:nvSpPr>
+              <p:spPr>
+                <a:xfrm>
+                  <a:off x="4530862" y="3991746"/>
+                  <a:ext cx="512255" cy="230832"/>
+                </a:xfrm>
+                <a:prstGeom prst="rect">
+                  <a:avLst/>
+                </a:prstGeom>
+                <a:blipFill>
+                  <a:blip r:embed="rId14"/>
+                  <a:stretch>
+                    <a:fillRect l="-4762" r="-8333" b="-5263"/>
+                  </a:stretch>
+                </a:blipFill>
+              </p:spPr>
+              <p:txBody>
+                <a:bodyPr/>
+                <a:lstStyle/>
+                <a:p>
+                  <a:r>
+                    <a:rPr lang="en-IN">
+                      <a:noFill/>
+                    </a:rPr>
+                    <a:t> </a:t>
+                  </a:r>
+                </a:p>
+              </p:txBody>
+            </p:sp>
+          </mc:Fallback>
+        </mc:AlternateContent>
+      </p:grpSp>
+      <p:grpSp>
+        <p:nvGrpSpPr>
+          <p:cNvPr id="88" name="Group 87">
+            <a:extLst>
+              <a:ext uri="{FF2B5EF4-FFF2-40B4-BE49-F238E27FC236}">
+                <a16:creationId xmlns:a16="http://schemas.microsoft.com/office/drawing/2014/main" id="{C416FF25-12FE-FDB6-F0E5-46A7F266362E}"/>
+              </a:ext>
+            </a:extLst>
+          </p:cNvPr>
+          <p:cNvGrpSpPr/>
+          <p:nvPr/>
+        </p:nvGrpSpPr>
+        <p:grpSpPr>
+          <a:xfrm>
+            <a:off x="1722522" y="1336862"/>
+            <a:ext cx="804402" cy="513885"/>
+            <a:chOff x="1503447" y="1409887"/>
+            <a:chExt cx="804402" cy="513885"/>
+          </a:xfrm>
+        </p:grpSpPr>
+        <p:sp>
+          <p:nvSpPr>
+            <p:cNvPr id="86" name="Rectangle 85">
+              <a:extLst>
+                <a:ext uri="{FF2B5EF4-FFF2-40B4-BE49-F238E27FC236}">
+                  <a16:creationId xmlns:a16="http://schemas.microsoft.com/office/drawing/2014/main" id="{2D5339D6-C281-65D5-27C4-FA41B01AC478}"/>
+                </a:ext>
+              </a:extLst>
+            </p:cNvPr>
+            <p:cNvSpPr/>
+            <p:nvPr/>
+          </p:nvSpPr>
+          <p:spPr>
+            <a:xfrm>
+              <a:off x="1503447" y="1409887"/>
+              <a:ext cx="804402" cy="513885"/>
+            </a:xfrm>
+            <a:prstGeom prst="rect">
+              <a:avLst/>
+            </a:prstGeom>
+            <a:solidFill>
+              <a:schemeClr val="bg1">
+                <a:lumMod val="85000"/>
+                <a:alpha val="50000"/>
+              </a:schemeClr>
+            </a:solidFill>
+            <a:ln>
+              <a:noFill/>
+            </a:ln>
+          </p:spPr>
+          <p:style>
+            <a:lnRef idx="2">
+              <a:schemeClr val="accent1">
+                <a:shade val="15000"/>
+              </a:schemeClr>
+            </a:lnRef>
+            <a:fillRef idx="1">
+              <a:schemeClr val="accent1"/>
+            </a:fillRef>
+            <a:effectRef idx="0">
+              <a:schemeClr val="accent1"/>
+            </a:effectRef>
+            <a:fontRef idx="minor">
+              <a:schemeClr val="lt1"/>
+            </a:fontRef>
+          </p:style>
+          <p:txBody>
+            <a:bodyPr rtlCol="0" anchor="ctr"/>
+            <a:lstStyle/>
+            <a:p>
+              <a:pPr algn="ctr"/>
+              <a:endParaRPr lang="en-IN"/>
+            </a:p>
+          </p:txBody>
+        </p:sp>
+        <mc:AlternateContent xmlns:mc="http://schemas.openxmlformats.org/markup-compatibility/2006">
+          <mc:Choice xmlns:a14="http://schemas.microsoft.com/office/drawing/2010/main" Requires="a14">
+            <p:sp>
+              <p:nvSpPr>
+                <p:cNvPr id="87" name="TextBox 86">
+                  <a:extLst>
+                    <a:ext uri="{FF2B5EF4-FFF2-40B4-BE49-F238E27FC236}">
+                      <a16:creationId xmlns:a16="http://schemas.microsoft.com/office/drawing/2014/main" id="{33AED081-5C77-2BE6-FE83-5AF899DDF8A1}"/>
+                    </a:ext>
+                  </a:extLst>
+                </p:cNvPr>
+                <p:cNvSpPr txBox="1"/>
+                <p:nvPr/>
+              </p:nvSpPr>
+              <p:spPr>
+                <a:xfrm>
+                  <a:off x="1508552" y="1447667"/>
+                  <a:ext cx="794192" cy="438325"/>
+                </a:xfrm>
+                <a:prstGeom prst="rect">
+                  <a:avLst/>
+                </a:prstGeom>
+                <a:noFill/>
+              </p:spPr>
+              <p:txBody>
+                <a:bodyPr wrap="none" lIns="0" tIns="0" rIns="0" bIns="0" rtlCol="0">
+                  <a:spAutoFit/>
+                </a:bodyPr>
+                <a:lstStyle/>
+                <a:p>
+                  <a:pPr/>
+                  <a14:m>
+                    <m:oMathPara xmlns:m="http://schemas.openxmlformats.org/officeDocument/2006/math">
+                      <m:oMath>
+                        <m:r>
+                          <a:rPr lang="en-IN" sz="1500" b="0" i="1" smtClean="0">
+                            <a:solidFill>
+                              <a:srgbClr val="C00000"/>
+                            </a:solidFill>
+                            <a:latin typeface="Cambria Math" panose="02040503050406030204" pitchFamily="18" charset="0"/>
+                          </a:rPr>
+                          <m:t>𝑎</m:t>
+                        </m:r>
+                        <m:r>
+                          <a:rPr lang="en-IN" sz="1500" b="0" i="1" smtClean="0">
+                            <a:solidFill>
+                              <a:srgbClr val="C00000"/>
+                            </a:solidFill>
+                            <a:latin typeface="Cambria Math" panose="02040503050406030204" pitchFamily="18" charset="0"/>
+                          </a:rPr>
+                          <m:t>=</m:t>
+                        </m:r>
+                        <m:f>
+                          <m:fPr>
+                            <m:ctrlPr>
+                              <a:rPr lang="en-IN" sz="1500" b="0" i="1" smtClean="0">
+                                <a:solidFill>
+                                  <a:srgbClr val="C00000"/>
+                                </a:solidFill>
+                                <a:latin typeface="Cambria Math" panose="02040503050406030204" pitchFamily="18" charset="0"/>
+                              </a:rPr>
+                            </m:ctrlPr>
+                          </m:fPr>
+                          <m:num>
+                            <m:r>
+                              <a:rPr lang="en-IN" sz="1500" b="0" i="1" smtClean="0">
+                                <a:solidFill>
+                                  <a:srgbClr val="C00000"/>
+                                </a:solidFill>
+                                <a:latin typeface="Cambria Math" panose="02040503050406030204" pitchFamily="18" charset="0"/>
+                              </a:rPr>
+                              <m:t>𝑘</m:t>
+                            </m:r>
+                          </m:num>
+                          <m:den>
+                            <m:r>
+                              <a:rPr lang="en-IN" sz="1500" b="0" i="1" smtClean="0">
+                                <a:solidFill>
+                                  <a:srgbClr val="C00000"/>
+                                </a:solidFill>
+                                <a:latin typeface="Cambria Math" panose="02040503050406030204" pitchFamily="18" charset="0"/>
+                              </a:rPr>
+                              <m:t>𝑚</m:t>
+                            </m:r>
+                          </m:den>
+                        </m:f>
+                        <m:sSub>
+                          <m:sSubPr>
+                            <m:ctrlPr>
+                              <a:rPr lang="en-IN" sz="1500" b="0" i="1" smtClean="0">
+                                <a:solidFill>
+                                  <a:srgbClr val="C00000"/>
+                                </a:solidFill>
+                                <a:latin typeface="Cambria Math" panose="02040503050406030204" pitchFamily="18" charset="0"/>
+                              </a:rPr>
+                            </m:ctrlPr>
+                          </m:sSubPr>
+                          <m:e>
+                            <m:r>
+                              <a:rPr lang="en-IN" sz="1500" b="0" i="1" smtClean="0">
+                                <a:solidFill>
+                                  <a:srgbClr val="C00000"/>
+                                </a:solidFill>
+                                <a:latin typeface="Cambria Math" panose="02040503050406030204" pitchFamily="18" charset="0"/>
+                              </a:rPr>
+                              <m:t>𝑥</m:t>
+                            </m:r>
+                          </m:e>
+                          <m:sub>
+                            <m:r>
+                              <a:rPr lang="en-IN" sz="1500" b="0" i="1" smtClean="0">
+                                <a:solidFill>
+                                  <a:srgbClr val="C00000"/>
+                                </a:solidFill>
+                                <a:latin typeface="Cambria Math" panose="02040503050406030204" pitchFamily="18" charset="0"/>
+                              </a:rPr>
+                              <m:t>0</m:t>
+                            </m:r>
+                          </m:sub>
+                        </m:sSub>
+                      </m:oMath>
+                    </m:oMathPara>
+                  </a14:m>
+                  <a:endParaRPr lang="en-IN" sz="1500" dirty="0">
+                    <a:solidFill>
+                      <a:srgbClr val="C00000"/>
+                    </a:solidFill>
+                  </a:endParaRPr>
+                </a:p>
+              </p:txBody>
+            </p:sp>
+          </mc:Choice>
+          <mc:Fallback>
+            <p:sp>
+              <p:nvSpPr>
+                <p:cNvPr id="87" name="TextBox 86">
+                  <a:extLst>
+                    <a:ext uri="{FF2B5EF4-FFF2-40B4-BE49-F238E27FC236}">
+                      <a16:creationId xmlns:a16="http://schemas.microsoft.com/office/drawing/2014/main" id="{33AED081-5C77-2BE6-FE83-5AF899DDF8A1}"/>
+                    </a:ext>
+                  </a:extLst>
+                </p:cNvPr>
+                <p:cNvSpPr txBox="1">
+                  <a:spLocks noRot="1" noChangeAspect="1" noMove="1" noResize="1" noEditPoints="1" noAdjustHandles="1" noChangeArrowheads="1" noChangeShapeType="1" noTextEdit="1"/>
+                </p:cNvSpPr>
+                <p:nvPr/>
+              </p:nvSpPr>
+              <p:spPr>
+                <a:xfrm>
+                  <a:off x="1508552" y="1447667"/>
+                  <a:ext cx="794192" cy="438325"/>
+                </a:xfrm>
+                <a:prstGeom prst="rect">
+                  <a:avLst/>
+                </a:prstGeom>
+                <a:blipFill>
+                  <a:blip r:embed="rId15"/>
+                  <a:stretch>
+                    <a:fillRect/>
+                  </a:stretch>
+                </a:blipFill>
+              </p:spPr>
+              <p:txBody>
+                <a:bodyPr/>
+                <a:lstStyle/>
+                <a:p>
+                  <a:r>
+                    <a:rPr lang="en-IN">
+                      <a:noFill/>
+                    </a:rPr>
+                    <a:t> </a:t>
+                  </a:r>
+                </a:p>
+              </p:txBody>
+            </p:sp>
+          </mc:Fallback>
+        </mc:AlternateContent>
+      </p:grpSp>
+      <p:grpSp>
+        <p:nvGrpSpPr>
+          <p:cNvPr id="91" name="Group 90">
+            <a:extLst>
+              <a:ext uri="{FF2B5EF4-FFF2-40B4-BE49-F238E27FC236}">
+                <a16:creationId xmlns:a16="http://schemas.microsoft.com/office/drawing/2014/main" id="{BE3F9658-CD73-FC21-CF4D-E575FFFDE593}"/>
+              </a:ext>
+            </a:extLst>
+          </p:cNvPr>
+          <p:cNvGrpSpPr/>
+          <p:nvPr/>
+        </p:nvGrpSpPr>
+        <p:grpSpPr>
+          <a:xfrm>
+            <a:off x="1885076" y="2249629"/>
+            <a:ext cx="511366" cy="263474"/>
+            <a:chOff x="7378657" y="2268677"/>
+            <a:chExt cx="511366" cy="263474"/>
+          </a:xfrm>
+        </p:grpSpPr>
+        <p:sp>
+          <p:nvSpPr>
+            <p:cNvPr id="92" name="Rectangle 91">
+              <a:extLst>
+                <a:ext uri="{FF2B5EF4-FFF2-40B4-BE49-F238E27FC236}">
+                  <a16:creationId xmlns:a16="http://schemas.microsoft.com/office/drawing/2014/main" id="{C6A17AD9-5344-316F-1233-C72022AD97C9}"/>
+                </a:ext>
+              </a:extLst>
+            </p:cNvPr>
+            <p:cNvSpPr/>
+            <p:nvPr/>
+          </p:nvSpPr>
+          <p:spPr>
+            <a:xfrm>
+              <a:off x="7378657" y="2268677"/>
+              <a:ext cx="511366" cy="263474"/>
+            </a:xfrm>
+            <a:prstGeom prst="rect">
+              <a:avLst/>
+            </a:prstGeom>
+            <a:solidFill>
+              <a:schemeClr val="bg1">
+                <a:lumMod val="85000"/>
+                <a:alpha val="50000"/>
+              </a:schemeClr>
+            </a:solidFill>
+            <a:ln>
+              <a:noFill/>
+            </a:ln>
+          </p:spPr>
+          <p:style>
+            <a:lnRef idx="2">
+              <a:schemeClr val="accent1">
+                <a:shade val="15000"/>
+              </a:schemeClr>
+            </a:lnRef>
+            <a:fillRef idx="1">
+              <a:schemeClr val="accent1"/>
+            </a:fillRef>
+            <a:effectRef idx="0">
+              <a:schemeClr val="accent1"/>
+            </a:effectRef>
+            <a:fontRef idx="minor">
+              <a:schemeClr val="lt1"/>
+            </a:fontRef>
+          </p:style>
+          <p:txBody>
+            <a:bodyPr rtlCol="0" anchor="ctr"/>
+            <a:lstStyle/>
+            <a:p>
+              <a:pPr algn="ctr"/>
+              <a:endParaRPr lang="en-IN"/>
+            </a:p>
+          </p:txBody>
+        </p:sp>
+        <mc:AlternateContent xmlns:mc="http://schemas.openxmlformats.org/markup-compatibility/2006">
+          <mc:Choice xmlns:a14="http://schemas.microsoft.com/office/drawing/2010/main" Requires="a14">
+            <p:sp>
+              <p:nvSpPr>
+                <p:cNvPr id="93" name="TextBox 92">
+                  <a:extLst>
+                    <a:ext uri="{FF2B5EF4-FFF2-40B4-BE49-F238E27FC236}">
+                      <a16:creationId xmlns:a16="http://schemas.microsoft.com/office/drawing/2014/main" id="{A2857BE2-779F-7FF4-897A-18F959FC39C1}"/>
+                    </a:ext>
+                  </a:extLst>
+                </p:cNvPr>
+                <p:cNvSpPr txBox="1"/>
+                <p:nvPr/>
+              </p:nvSpPr>
+              <p:spPr>
+                <a:xfrm>
+                  <a:off x="7379335" y="2284998"/>
+                  <a:ext cx="510011" cy="230832"/>
+                </a:xfrm>
+                <a:prstGeom prst="rect">
+                  <a:avLst/>
+                </a:prstGeom>
+                <a:noFill/>
+              </p:spPr>
+              <p:txBody>
+                <a:bodyPr wrap="none" lIns="0" tIns="0" rIns="0" bIns="0" rtlCol="0">
+                  <a:spAutoFit/>
+                </a:bodyPr>
+                <a:lstStyle/>
+                <a:p>
+                  <a:pPr/>
+                  <a14:m>
+                    <m:oMathPara xmlns:m="http://schemas.openxmlformats.org/officeDocument/2006/math">
+                      <m:oMath>
+                        <m:r>
+                          <a:rPr lang="en-IN" sz="1500" b="0" i="1" smtClean="0">
+                            <a:solidFill>
+                              <a:srgbClr val="003A00"/>
+                            </a:solidFill>
+                            <a:latin typeface="Cambria Math" panose="02040503050406030204" pitchFamily="18" charset="0"/>
+                          </a:rPr>
+                          <m:t>𝑣</m:t>
+                        </m:r>
+                        <m:r>
+                          <a:rPr lang="en-IN" sz="1500" b="0" i="1" smtClean="0">
+                            <a:solidFill>
+                              <a:srgbClr val="003A00"/>
+                            </a:solidFill>
+                            <a:latin typeface="Cambria Math" panose="02040503050406030204" pitchFamily="18" charset="0"/>
+                          </a:rPr>
+                          <m:t>=</m:t>
+                        </m:r>
+                        <m:r>
+                          <a:rPr lang="en-IN" sz="1500" b="0" i="1" smtClean="0">
+                            <a:solidFill>
+                              <a:srgbClr val="003A00"/>
+                            </a:solidFill>
+                            <a:latin typeface="Cambria Math" panose="02040503050406030204" pitchFamily="18" charset="0"/>
+                          </a:rPr>
+                          <m:t>0</m:t>
+                        </m:r>
+                      </m:oMath>
+                    </m:oMathPara>
+                  </a14:m>
+                  <a:endParaRPr lang="en-IN" sz="1500" dirty="0">
+                    <a:solidFill>
+                      <a:srgbClr val="003A00"/>
+                    </a:solidFill>
+                  </a:endParaRPr>
+                </a:p>
+              </p:txBody>
+            </p:sp>
+          </mc:Choice>
+          <mc:Fallback>
+            <p:sp>
+              <p:nvSpPr>
+                <p:cNvPr id="93" name="TextBox 92">
+                  <a:extLst>
+                    <a:ext uri="{FF2B5EF4-FFF2-40B4-BE49-F238E27FC236}">
+                      <a16:creationId xmlns:a16="http://schemas.microsoft.com/office/drawing/2014/main" id="{A2857BE2-779F-7FF4-897A-18F959FC39C1}"/>
+                    </a:ext>
+                  </a:extLst>
+                </p:cNvPr>
+                <p:cNvSpPr txBox="1">
+                  <a:spLocks noRot="1" noChangeAspect="1" noMove="1" noResize="1" noEditPoints="1" noAdjustHandles="1" noChangeArrowheads="1" noChangeShapeType="1" noTextEdit="1"/>
+                </p:cNvSpPr>
+                <p:nvPr/>
+              </p:nvSpPr>
+              <p:spPr>
+                <a:xfrm>
+                  <a:off x="7379335" y="2284998"/>
+                  <a:ext cx="510011" cy="230832"/>
+                </a:xfrm>
+                <a:prstGeom prst="rect">
+                  <a:avLst/>
+                </a:prstGeom>
+                <a:blipFill>
+                  <a:blip r:embed="rId16"/>
+                  <a:stretch>
+                    <a:fillRect l="-4762" r="-8333" b="-5263"/>
+                  </a:stretch>
+                </a:blipFill>
+              </p:spPr>
+              <p:txBody>
+                <a:bodyPr/>
+                <a:lstStyle/>
+                <a:p>
+                  <a:r>
+                    <a:rPr lang="en-IN">
+                      <a:noFill/>
+                    </a:rPr>
+                    <a:t> </a:t>
+                  </a:r>
+                </a:p>
+              </p:txBody>
+            </p:sp>
+          </mc:Fallback>
+        </mc:AlternateContent>
+      </p:grpSp>
+    </p:spTree>
+    <p:extLst>
+      <p:ext uri="{BB962C8B-B14F-4D97-AF65-F5344CB8AC3E}">
+        <p14:creationId xmlns:p14="http://schemas.microsoft.com/office/powerpoint/2010/main" val="1570491181"/>
       </p:ext>
     </p:extLst>
   </p:cSld>
@@ -11769,8 +15415,8 @@
           </a:fontRef>
         </p:style>
       </p:cxnSp>
-      <mc:AlternateContent xmlns:mc="http://schemas.openxmlformats.org/markup-compatibility/2006">
-        <mc:Choice xmlns:a14="http://schemas.microsoft.com/office/drawing/2010/main" Requires="a14">
+      <mc:AlternateContent xmlns:mc="http://schemas.openxmlformats.org/markup-compatibility/2006" xmlns:a14="http://schemas.microsoft.com/office/drawing/2010/main">
+        <mc:Choice Requires="a14">
           <p:sp>
             <p:nvSpPr>
               <p:cNvPr id="19" name="TextBox 18">
@@ -11818,7 +15464,7 @@
             </p:txBody>
           </p:sp>
         </mc:Choice>
-        <mc:Fallback>
+        <mc:Fallback xmlns="">
           <p:sp>
             <p:nvSpPr>
               <p:cNvPr id="19" name="TextBox 18">
@@ -11863,8 +15509,8 @@
           </p:sp>
         </mc:Fallback>
       </mc:AlternateContent>
-      <mc:AlternateContent xmlns:mc="http://schemas.openxmlformats.org/markup-compatibility/2006">
-        <mc:Choice xmlns:a14="http://schemas.microsoft.com/office/drawing/2010/main" Requires="a14">
+      <mc:AlternateContent xmlns:mc="http://schemas.openxmlformats.org/markup-compatibility/2006" xmlns:a14="http://schemas.microsoft.com/office/drawing/2010/main">
+        <mc:Choice Requires="a14">
           <p:sp>
             <p:nvSpPr>
               <p:cNvPr id="21" name="TextBox 20">
@@ -11923,7 +15569,7 @@
             </p:txBody>
           </p:sp>
         </mc:Choice>
-        <mc:Fallback>
+        <mc:Fallback xmlns="">
           <p:sp>
             <p:nvSpPr>
               <p:cNvPr id="21" name="TextBox 20">
@@ -11968,8 +15614,8 @@
           </p:sp>
         </mc:Fallback>
       </mc:AlternateContent>
-      <mc:AlternateContent xmlns:mc="http://schemas.openxmlformats.org/markup-compatibility/2006">
-        <mc:Choice xmlns:a14="http://schemas.microsoft.com/office/drawing/2010/main" Requires="a14">
+      <mc:AlternateContent xmlns:mc="http://schemas.openxmlformats.org/markup-compatibility/2006" xmlns:a14="http://schemas.microsoft.com/office/drawing/2010/main">
+        <mc:Choice Requires="a14">
           <p:sp>
             <p:nvSpPr>
               <p:cNvPr id="23" name="TextBox 22">
@@ -12028,7 +15674,7 @@
             </p:txBody>
           </p:sp>
         </mc:Choice>
-        <mc:Fallback>
+        <mc:Fallback xmlns="">
           <p:sp>
             <p:nvSpPr>
               <p:cNvPr id="23" name="TextBox 22">
@@ -12073,8 +15719,8 @@
           </p:sp>
         </mc:Fallback>
       </mc:AlternateContent>
-      <mc:AlternateContent xmlns:mc="http://schemas.openxmlformats.org/markup-compatibility/2006">
-        <mc:Choice xmlns:a14="http://schemas.microsoft.com/office/drawing/2010/main" Requires="a14">
+      <mc:AlternateContent xmlns:mc="http://schemas.openxmlformats.org/markup-compatibility/2006" xmlns:a14="http://schemas.microsoft.com/office/drawing/2010/main">
+        <mc:Choice Requires="a14">
           <p:sp>
             <p:nvSpPr>
               <p:cNvPr id="25" name="TextBox 24">
@@ -12121,7 +15767,7 @@
             </p:txBody>
           </p:sp>
         </mc:Choice>
-        <mc:Fallback>
+        <mc:Fallback xmlns="">
           <p:sp>
             <p:nvSpPr>
               <p:cNvPr id="25" name="TextBox 24">
@@ -12166,8 +15812,8 @@
           </p:sp>
         </mc:Fallback>
       </mc:AlternateContent>
-      <mc:AlternateContent xmlns:mc="http://schemas.openxmlformats.org/markup-compatibility/2006">
-        <mc:Choice xmlns:a14="http://schemas.microsoft.com/office/drawing/2010/main" Requires="a14">
+      <mc:AlternateContent xmlns:mc="http://schemas.openxmlformats.org/markup-compatibility/2006" xmlns:a14="http://schemas.microsoft.com/office/drawing/2010/main">
+        <mc:Choice Requires="a14">
           <p:sp>
             <p:nvSpPr>
               <p:cNvPr id="31" name="TextBox 30">
@@ -12214,7 +15860,7 @@
             </p:txBody>
           </p:sp>
         </mc:Choice>
-        <mc:Fallback>
+        <mc:Fallback xmlns="">
           <p:sp>
             <p:nvSpPr>
               <p:cNvPr id="31" name="TextBox 30">
@@ -12259,8 +15905,8 @@
           </p:sp>
         </mc:Fallback>
       </mc:AlternateContent>
-      <mc:AlternateContent xmlns:mc="http://schemas.openxmlformats.org/markup-compatibility/2006">
-        <mc:Choice xmlns:a14="http://schemas.microsoft.com/office/drawing/2010/main" Requires="a14">
+      <mc:AlternateContent xmlns:mc="http://schemas.openxmlformats.org/markup-compatibility/2006" xmlns:a14="http://schemas.microsoft.com/office/drawing/2010/main">
+        <mc:Choice Requires="a14">
           <p:sp>
             <p:nvSpPr>
               <p:cNvPr id="33" name="TextBox 32">
@@ -12307,7 +15953,7 @@
             </p:txBody>
           </p:sp>
         </mc:Choice>
-        <mc:Fallback>
+        <mc:Fallback xmlns="">
           <p:sp>
             <p:nvSpPr>
               <p:cNvPr id="33" name="TextBox 32">
@@ -12352,8 +15998,8 @@
           </p:sp>
         </mc:Fallback>
       </mc:AlternateContent>
-      <mc:AlternateContent xmlns:mc="http://schemas.openxmlformats.org/markup-compatibility/2006">
-        <mc:Choice xmlns:a14="http://schemas.microsoft.com/office/drawing/2010/main" Requires="a14">
+      <mc:AlternateContent xmlns:mc="http://schemas.openxmlformats.org/markup-compatibility/2006" xmlns:a14="http://schemas.microsoft.com/office/drawing/2010/main">
+        <mc:Choice Requires="a14">
           <p:sp>
             <p:nvSpPr>
               <p:cNvPr id="35" name="TextBox 34">
@@ -12400,7 +16046,7 @@
             </p:txBody>
           </p:sp>
         </mc:Choice>
-        <mc:Fallback>
+        <mc:Fallback xmlns="">
           <p:sp>
             <p:nvSpPr>
               <p:cNvPr id="35" name="TextBox 34">
@@ -12655,8 +16301,8 @@
           </a:p>
         </p:txBody>
       </p:sp>
-      <mc:AlternateContent xmlns:mc="http://schemas.openxmlformats.org/markup-compatibility/2006">
-        <mc:Choice xmlns:a14="http://schemas.microsoft.com/office/drawing/2010/main" Requires="a14">
+      <mc:AlternateContent xmlns:mc="http://schemas.openxmlformats.org/markup-compatibility/2006" xmlns:a14="http://schemas.microsoft.com/office/drawing/2010/main">
+        <mc:Choice Requires="a14">
           <p:sp>
             <p:nvSpPr>
               <p:cNvPr id="16" name="TextBox 15">
@@ -12703,7 +16349,7 @@
             </p:txBody>
           </p:sp>
         </mc:Choice>
-        <mc:Fallback>
+        <mc:Fallback xmlns="">
           <p:sp>
             <p:nvSpPr>
               <p:cNvPr id="16" name="TextBox 15">
@@ -12748,8 +16394,8 @@
           </p:sp>
         </mc:Fallback>
       </mc:AlternateContent>
-      <mc:AlternateContent xmlns:mc="http://schemas.openxmlformats.org/markup-compatibility/2006">
-        <mc:Choice xmlns:a14="http://schemas.microsoft.com/office/drawing/2010/main" Requires="a14">
+      <mc:AlternateContent xmlns:mc="http://schemas.openxmlformats.org/markup-compatibility/2006" xmlns:a14="http://schemas.microsoft.com/office/drawing/2010/main">
+        <mc:Choice Requires="a14">
           <p:sp>
             <p:nvSpPr>
               <p:cNvPr id="18" name="TextBox 17">
@@ -12797,7 +16443,7 @@
             </p:txBody>
           </p:sp>
         </mc:Choice>
-        <mc:Fallback>
+        <mc:Fallback xmlns="">
           <p:sp>
             <p:nvSpPr>
               <p:cNvPr id="18" name="TextBox 17">
@@ -12842,8 +16488,8 @@
           </p:sp>
         </mc:Fallback>
       </mc:AlternateContent>
-      <mc:AlternateContent xmlns:mc="http://schemas.openxmlformats.org/markup-compatibility/2006">
-        <mc:Choice xmlns:a14="http://schemas.microsoft.com/office/drawing/2010/main" Requires="a14">
+      <mc:AlternateContent xmlns:mc="http://schemas.openxmlformats.org/markup-compatibility/2006" xmlns:a14="http://schemas.microsoft.com/office/drawing/2010/main">
+        <mc:Choice Requires="a14">
           <p:sp>
             <p:nvSpPr>
               <p:cNvPr id="20" name="TextBox 19">
@@ -12908,7 +16554,7 @@
             </p:txBody>
           </p:sp>
         </mc:Choice>
-        <mc:Fallback>
+        <mc:Fallback xmlns="">
           <p:sp>
             <p:nvSpPr>
               <p:cNvPr id="20" name="TextBox 19">
@@ -13122,8 +16768,8 @@
           </a:fontRef>
         </p:style>
       </p:cxnSp>
-      <mc:AlternateContent xmlns:mc="http://schemas.openxmlformats.org/markup-compatibility/2006">
-        <mc:Choice xmlns:a14="http://schemas.microsoft.com/office/drawing/2010/main" Requires="a14">
+      <mc:AlternateContent xmlns:mc="http://schemas.openxmlformats.org/markup-compatibility/2006" xmlns:a14="http://schemas.microsoft.com/office/drawing/2010/main">
+        <mc:Choice Requires="a14">
           <p:sp>
             <p:nvSpPr>
               <p:cNvPr id="16" name="TextBox 15">
@@ -13170,7 +16816,7 @@
             </p:txBody>
           </p:sp>
         </mc:Choice>
-        <mc:Fallback>
+        <mc:Fallback xmlns="">
           <p:sp>
             <p:nvSpPr>
               <p:cNvPr id="16" name="TextBox 15">
@@ -13215,8 +16861,8 @@
           </p:sp>
         </mc:Fallback>
       </mc:AlternateContent>
-      <mc:AlternateContent xmlns:mc="http://schemas.openxmlformats.org/markup-compatibility/2006">
-        <mc:Choice xmlns:a14="http://schemas.microsoft.com/office/drawing/2010/main" Requires="a14">
+      <mc:AlternateContent xmlns:mc="http://schemas.openxmlformats.org/markup-compatibility/2006" xmlns:a14="http://schemas.microsoft.com/office/drawing/2010/main">
+        <mc:Choice Requires="a14">
           <p:sp>
             <p:nvSpPr>
               <p:cNvPr id="18" name="TextBox 17">
@@ -13264,7 +16910,7 @@
             </p:txBody>
           </p:sp>
         </mc:Choice>
-        <mc:Fallback>
+        <mc:Fallback xmlns="">
           <p:sp>
             <p:nvSpPr>
               <p:cNvPr id="18" name="TextBox 17">
@@ -13309,8 +16955,8 @@
           </p:sp>
         </mc:Fallback>
       </mc:AlternateContent>
-      <mc:AlternateContent xmlns:mc="http://schemas.openxmlformats.org/markup-compatibility/2006">
-        <mc:Choice xmlns:a14="http://schemas.microsoft.com/office/drawing/2010/main" Requires="a14">
+      <mc:AlternateContent xmlns:mc="http://schemas.openxmlformats.org/markup-compatibility/2006" xmlns:a14="http://schemas.microsoft.com/office/drawing/2010/main">
+        <mc:Choice Requires="a14">
           <p:sp>
             <p:nvSpPr>
               <p:cNvPr id="20" name="TextBox 19">
@@ -13357,7 +17003,7 @@
             </p:txBody>
           </p:sp>
         </mc:Choice>
-        <mc:Fallback>
+        <mc:Fallback xmlns="">
           <p:sp>
             <p:nvSpPr>
               <p:cNvPr id="20" name="TextBox 19">
@@ -13607,8 +17253,8 @@
           </p:txBody>
         </p:sp>
       </p:grpSp>
-      <mc:AlternateContent xmlns:mc="http://schemas.openxmlformats.org/markup-compatibility/2006">
-        <mc:Choice xmlns:a14="http://schemas.microsoft.com/office/drawing/2010/main" Requires="a14">
+      <mc:AlternateContent xmlns:mc="http://schemas.openxmlformats.org/markup-compatibility/2006" xmlns:a14="http://schemas.microsoft.com/office/drawing/2010/main">
+        <mc:Choice Requires="a14">
           <p:sp>
             <p:nvSpPr>
               <p:cNvPr id="10" name="TextBox 9">
@@ -13661,7 +17307,7 @@
             </p:txBody>
           </p:sp>
         </mc:Choice>
-        <mc:Fallback>
+        <mc:Fallback xmlns="">
           <p:sp>
             <p:nvSpPr>
               <p:cNvPr id="10" name="TextBox 9">
@@ -13855,8 +17501,8 @@
           </a:p>
         </p:txBody>
       </p:sp>
-      <mc:AlternateContent xmlns:mc="http://schemas.openxmlformats.org/markup-compatibility/2006">
-        <mc:Choice xmlns:a14="http://schemas.microsoft.com/office/drawing/2010/main" Requires="a14">
+      <mc:AlternateContent xmlns:mc="http://schemas.openxmlformats.org/markup-compatibility/2006" xmlns:a14="http://schemas.microsoft.com/office/drawing/2010/main">
+        <mc:Choice Requires="a14">
           <p:sp>
             <p:nvSpPr>
               <p:cNvPr id="29" name="TextBox 28">
@@ -13904,7 +17550,7 @@
             </p:txBody>
           </p:sp>
         </mc:Choice>
-        <mc:Fallback>
+        <mc:Fallback xmlns="">
           <p:sp>
             <p:nvSpPr>
               <p:cNvPr id="29" name="TextBox 28">
@@ -13949,8 +17595,8 @@
           </p:sp>
         </mc:Fallback>
       </mc:AlternateContent>
-      <mc:AlternateContent xmlns:mc="http://schemas.openxmlformats.org/markup-compatibility/2006">
-        <mc:Choice xmlns:a14="http://schemas.microsoft.com/office/drawing/2010/main" Requires="a14">
+      <mc:AlternateContent xmlns:mc="http://schemas.openxmlformats.org/markup-compatibility/2006" xmlns:a14="http://schemas.microsoft.com/office/drawing/2010/main">
+        <mc:Choice Requires="a14">
           <p:sp>
             <p:nvSpPr>
               <p:cNvPr id="31" name="TextBox 30">
@@ -13998,7 +17644,7 @@
             </p:txBody>
           </p:sp>
         </mc:Choice>
-        <mc:Fallback>
+        <mc:Fallback xmlns="">
           <p:sp>
             <p:nvSpPr>
               <p:cNvPr id="31" name="TextBox 30">
@@ -14087,8 +17733,8 @@
           </a:fontRef>
         </p:style>
       </p:cxnSp>
-      <mc:AlternateContent xmlns:mc="http://schemas.openxmlformats.org/markup-compatibility/2006">
-        <mc:Choice xmlns:a14="http://schemas.microsoft.com/office/drawing/2010/main" Requires="a14">
+      <mc:AlternateContent xmlns:mc="http://schemas.openxmlformats.org/markup-compatibility/2006" xmlns:a14="http://schemas.microsoft.com/office/drawing/2010/main">
+        <mc:Choice Requires="a14">
           <p:sp>
             <p:nvSpPr>
               <p:cNvPr id="38" name="TextBox 37">
@@ -14154,7 +17800,7 @@
             </p:txBody>
           </p:sp>
         </mc:Choice>
-        <mc:Fallback>
+        <mc:Fallback xmlns="">
           <p:sp>
             <p:nvSpPr>
               <p:cNvPr id="38" name="TextBox 37">
@@ -14199,8 +17845,8 @@
           </p:sp>
         </mc:Fallback>
       </mc:AlternateContent>
-      <mc:AlternateContent xmlns:mc="http://schemas.openxmlformats.org/markup-compatibility/2006">
-        <mc:Choice xmlns:a14="http://schemas.microsoft.com/office/drawing/2010/main" Requires="a14">
+      <mc:AlternateContent xmlns:mc="http://schemas.openxmlformats.org/markup-compatibility/2006" xmlns:a14="http://schemas.microsoft.com/office/drawing/2010/main">
+        <mc:Choice Requires="a14">
           <p:sp>
             <p:nvSpPr>
               <p:cNvPr id="40" name="TextBox 39">
@@ -14247,7 +17893,7 @@
             </p:txBody>
           </p:sp>
         </mc:Choice>
-        <mc:Fallback>
+        <mc:Fallback xmlns="">
           <p:sp>
             <p:nvSpPr>
               <p:cNvPr id="40" name="TextBox 39">

--- a/U2-Work-and-Energy/figures/all-figs.pptx
+++ b/U2-Work-and-Energy/figures/all-figs.pptx
@@ -15,6 +15,8 @@
     <p:sldId id="263" r:id="rId9"/>
     <p:sldId id="264" r:id="rId10"/>
     <p:sldId id="265" r:id="rId11"/>
+    <p:sldId id="266" r:id="rId12"/>
+    <p:sldId id="267" r:id="rId13"/>
   </p:sldIdLst>
   <p:sldSz cx="12192000" cy="6858000"/>
   <p:notesSz cx="6858000" cy="9144000"/>
@@ -250,7 +252,7 @@
           <a:p>
             <a:fld id="{ED22BB23-F442-40A7-A37A-0DE665FB7F05}" type="datetimeFigureOut">
               <a:rPr lang="en-US" smtClean="0"/>
-              <a:t>10/20/2026</a:t>
+              <a:t>10/24/2026</a:t>
             </a:fld>
             <a:endParaRPr lang="en-US"/>
           </a:p>
@@ -418,7 +420,7 @@
           <a:p>
             <a:fld id="{ED22BB23-F442-40A7-A37A-0DE665FB7F05}" type="datetimeFigureOut">
               <a:rPr lang="en-US" smtClean="0"/>
-              <a:t>10/20/2026</a:t>
+              <a:t>10/24/2026</a:t>
             </a:fld>
             <a:endParaRPr lang="en-US"/>
           </a:p>
@@ -596,7 +598,7 @@
           <a:p>
             <a:fld id="{ED22BB23-F442-40A7-A37A-0DE665FB7F05}" type="datetimeFigureOut">
               <a:rPr lang="en-US" smtClean="0"/>
-              <a:t>10/20/2026</a:t>
+              <a:t>10/24/2026</a:t>
             </a:fld>
             <a:endParaRPr lang="en-US"/>
           </a:p>
@@ -764,7 +766,7 @@
           <a:p>
             <a:fld id="{ED22BB23-F442-40A7-A37A-0DE665FB7F05}" type="datetimeFigureOut">
               <a:rPr lang="en-US" smtClean="0"/>
-              <a:t>10/20/2026</a:t>
+              <a:t>10/24/2026</a:t>
             </a:fld>
             <a:endParaRPr lang="en-US"/>
           </a:p>
@@ -1009,7 +1011,7 @@
           <a:p>
             <a:fld id="{ED22BB23-F442-40A7-A37A-0DE665FB7F05}" type="datetimeFigureOut">
               <a:rPr lang="en-US" smtClean="0"/>
-              <a:t>10/20/2026</a:t>
+              <a:t>10/24/2026</a:t>
             </a:fld>
             <a:endParaRPr lang="en-US"/>
           </a:p>
@@ -1238,7 +1240,7 @@
           <a:p>
             <a:fld id="{ED22BB23-F442-40A7-A37A-0DE665FB7F05}" type="datetimeFigureOut">
               <a:rPr lang="en-US" smtClean="0"/>
-              <a:t>10/20/2026</a:t>
+              <a:t>10/24/2026</a:t>
             </a:fld>
             <a:endParaRPr lang="en-US"/>
           </a:p>
@@ -1602,7 +1604,7 @@
           <a:p>
             <a:fld id="{ED22BB23-F442-40A7-A37A-0DE665FB7F05}" type="datetimeFigureOut">
               <a:rPr lang="en-US" smtClean="0"/>
-              <a:t>10/20/2026</a:t>
+              <a:t>10/24/2026</a:t>
             </a:fld>
             <a:endParaRPr lang="en-US"/>
           </a:p>
@@ -1719,7 +1721,7 @@
           <a:p>
             <a:fld id="{ED22BB23-F442-40A7-A37A-0DE665FB7F05}" type="datetimeFigureOut">
               <a:rPr lang="en-US" smtClean="0"/>
-              <a:t>10/20/2026</a:t>
+              <a:t>10/24/2026</a:t>
             </a:fld>
             <a:endParaRPr lang="en-US"/>
           </a:p>
@@ -1814,7 +1816,7 @@
           <a:p>
             <a:fld id="{ED22BB23-F442-40A7-A37A-0DE665FB7F05}" type="datetimeFigureOut">
               <a:rPr lang="en-US" smtClean="0"/>
-              <a:t>10/20/2026</a:t>
+              <a:t>10/24/2026</a:t>
             </a:fld>
             <a:endParaRPr lang="en-US"/>
           </a:p>
@@ -2089,7 +2091,7 @@
           <a:p>
             <a:fld id="{ED22BB23-F442-40A7-A37A-0DE665FB7F05}" type="datetimeFigureOut">
               <a:rPr lang="en-US" smtClean="0"/>
-              <a:t>10/20/2026</a:t>
+              <a:t>10/24/2026</a:t>
             </a:fld>
             <a:endParaRPr lang="en-US"/>
           </a:p>
@@ -2341,7 +2343,7 @@
           <a:p>
             <a:fld id="{ED22BB23-F442-40A7-A37A-0DE665FB7F05}" type="datetimeFigureOut">
               <a:rPr lang="en-US" smtClean="0"/>
-              <a:t>10/20/2026</a:t>
+              <a:t>10/24/2026</a:t>
             </a:fld>
             <a:endParaRPr lang="en-US"/>
           </a:p>
@@ -2552,7 +2554,7 @@
           <a:p>
             <a:fld id="{ED22BB23-F442-40A7-A37A-0DE665FB7F05}" type="datetimeFigureOut">
               <a:rPr lang="en-US" smtClean="0"/>
-              <a:t>10/20/2026</a:t>
+              <a:t>10/24/2026</a:t>
             </a:fld>
             <a:endParaRPr lang="en-US"/>
           </a:p>
@@ -4613,8 +4615,8 @@
           </a:fontRef>
         </p:style>
       </p:cxnSp>
-      <mc:AlternateContent xmlns:mc="http://schemas.openxmlformats.org/markup-compatibility/2006">
-        <mc:Choice xmlns:a14="http://schemas.microsoft.com/office/drawing/2010/main" Requires="a14">
+      <mc:AlternateContent xmlns:mc="http://schemas.openxmlformats.org/markup-compatibility/2006" xmlns:a14="http://schemas.microsoft.com/office/drawing/2010/main">
+        <mc:Choice Requires="a14">
           <p:sp>
             <p:nvSpPr>
               <p:cNvPr id="16" name="TextBox 15">
@@ -4661,7 +4663,7 @@
             </p:txBody>
           </p:sp>
         </mc:Choice>
-        <mc:Fallback>
+        <mc:Fallback xmlns="">
           <p:sp>
             <p:nvSpPr>
               <p:cNvPr id="16" name="TextBox 15">
@@ -4706,8 +4708,8 @@
           </p:sp>
         </mc:Fallback>
       </mc:AlternateContent>
-      <mc:AlternateContent xmlns:mc="http://schemas.openxmlformats.org/markup-compatibility/2006">
-        <mc:Choice xmlns:a14="http://schemas.microsoft.com/office/drawing/2010/main" Requires="a14">
+      <mc:AlternateContent xmlns:mc="http://schemas.openxmlformats.org/markup-compatibility/2006" xmlns:a14="http://schemas.microsoft.com/office/drawing/2010/main">
+        <mc:Choice Requires="a14">
           <p:sp>
             <p:nvSpPr>
               <p:cNvPr id="18" name="TextBox 17">
@@ -4755,7 +4757,7 @@
             </p:txBody>
           </p:sp>
         </mc:Choice>
-        <mc:Fallback>
+        <mc:Fallback xmlns="">
           <p:sp>
             <p:nvSpPr>
               <p:cNvPr id="18" name="TextBox 17">
@@ -4800,8 +4802,8 @@
           </p:sp>
         </mc:Fallback>
       </mc:AlternateContent>
-      <mc:AlternateContent xmlns:mc="http://schemas.openxmlformats.org/markup-compatibility/2006">
-        <mc:Choice xmlns:a14="http://schemas.microsoft.com/office/drawing/2010/main" Requires="a14">
+      <mc:AlternateContent xmlns:mc="http://schemas.openxmlformats.org/markup-compatibility/2006" xmlns:a14="http://schemas.microsoft.com/office/drawing/2010/main">
+        <mc:Choice Requires="a14">
           <p:sp>
             <p:nvSpPr>
               <p:cNvPr id="20" name="TextBox 19">
@@ -4848,7 +4850,7 @@
             </p:txBody>
           </p:sp>
         </mc:Choice>
-        <mc:Fallback>
+        <mc:Fallback xmlns="">
           <p:sp>
             <p:nvSpPr>
               <p:cNvPr id="20" name="TextBox 19">
@@ -5098,8 +5100,8 @@
           </p:txBody>
         </p:sp>
       </p:grpSp>
-      <mc:AlternateContent xmlns:mc="http://schemas.openxmlformats.org/markup-compatibility/2006">
-        <mc:Choice xmlns:a14="http://schemas.microsoft.com/office/drawing/2010/main" Requires="a14">
+      <mc:AlternateContent xmlns:mc="http://schemas.openxmlformats.org/markup-compatibility/2006" xmlns:a14="http://schemas.microsoft.com/office/drawing/2010/main">
+        <mc:Choice Requires="a14">
           <p:sp>
             <p:nvSpPr>
               <p:cNvPr id="10" name="TextBox 9">
@@ -5152,7 +5154,7 @@
             </p:txBody>
           </p:sp>
         </mc:Choice>
-        <mc:Fallback>
+        <mc:Fallback xmlns="">
           <p:sp>
             <p:nvSpPr>
               <p:cNvPr id="10" name="TextBox 9">
@@ -5390,8 +5392,8 @@
           </a:fontRef>
         </p:style>
       </p:cxnSp>
-      <mc:AlternateContent xmlns:mc="http://schemas.openxmlformats.org/markup-compatibility/2006">
-        <mc:Choice xmlns:a14="http://schemas.microsoft.com/office/drawing/2010/main" Requires="a14">
+      <mc:AlternateContent xmlns:mc="http://schemas.openxmlformats.org/markup-compatibility/2006" xmlns:a14="http://schemas.microsoft.com/office/drawing/2010/main">
+        <mc:Choice Requires="a14">
           <p:sp>
             <p:nvSpPr>
               <p:cNvPr id="38" name="TextBox 37">
@@ -5457,7 +5459,7 @@
             </p:txBody>
           </p:sp>
         </mc:Choice>
-        <mc:Fallback>
+        <mc:Fallback xmlns="">
           <p:sp>
             <p:nvSpPr>
               <p:cNvPr id="38" name="TextBox 37">
@@ -5502,8 +5504,8 @@
           </p:sp>
         </mc:Fallback>
       </mc:AlternateContent>
-      <mc:AlternateContent xmlns:mc="http://schemas.openxmlformats.org/markup-compatibility/2006">
-        <mc:Choice xmlns:a14="http://schemas.microsoft.com/office/drawing/2010/main" Requires="a14">
+      <mc:AlternateContent xmlns:mc="http://schemas.openxmlformats.org/markup-compatibility/2006" xmlns:a14="http://schemas.microsoft.com/office/drawing/2010/main">
+        <mc:Choice Requires="a14">
           <p:sp>
             <p:nvSpPr>
               <p:cNvPr id="40" name="TextBox 39">
@@ -5550,7 +5552,7 @@
             </p:txBody>
           </p:sp>
         </mc:Choice>
-        <mc:Fallback>
+        <mc:Fallback xmlns="">
           <p:sp>
             <p:nvSpPr>
               <p:cNvPr id="40" name="TextBox 39">
@@ -5736,8 +5738,8 @@
           </a:fontRef>
         </p:style>
       </p:cxnSp>
-      <mc:AlternateContent xmlns:mc="http://schemas.openxmlformats.org/markup-compatibility/2006">
-        <mc:Choice xmlns:a14="http://schemas.microsoft.com/office/drawing/2010/main" Requires="a14">
+      <mc:AlternateContent xmlns:mc="http://schemas.openxmlformats.org/markup-compatibility/2006" xmlns:a14="http://schemas.microsoft.com/office/drawing/2010/main">
+        <mc:Choice Requires="a14">
           <p:sp>
             <p:nvSpPr>
               <p:cNvPr id="42" name="TextBox 41">
@@ -5809,7 +5811,7 @@
             </p:txBody>
           </p:sp>
         </mc:Choice>
-        <mc:Fallback>
+        <mc:Fallback xmlns="">
           <p:sp>
             <p:nvSpPr>
               <p:cNvPr id="42" name="TextBox 41">
@@ -6201,8 +6203,8 @@
             </a:p>
           </p:txBody>
         </p:sp>
-        <mc:AlternateContent xmlns:mc="http://schemas.openxmlformats.org/markup-compatibility/2006">
-          <mc:Choice xmlns:a14="http://schemas.microsoft.com/office/drawing/2010/main" Requires="a14">
+        <mc:AlternateContent xmlns:mc="http://schemas.openxmlformats.org/markup-compatibility/2006" xmlns:a14="http://schemas.microsoft.com/office/drawing/2010/main">
+          <mc:Choice Requires="a14">
             <p:sp>
               <p:nvSpPr>
                 <p:cNvPr id="57" name="TextBox 56">
@@ -6231,6 +6233,7 @@
                 </a:bodyPr>
                 <a:lstStyle/>
                 <a:p>
+                  <a:pPr/>
                   <a14:m>
                     <m:oMathPara xmlns:m="http://schemas.openxmlformats.org/officeDocument/2006/math">
                       <m:oMath>
@@ -6307,7 +6310,7 @@
               </p:txBody>
             </p:sp>
           </mc:Choice>
-          <mc:Fallback>
+          <mc:Fallback xmlns="">
             <p:sp>
               <p:nvSpPr>
                 <p:cNvPr id="57" name="TextBox 56">
@@ -6428,8 +6431,8 @@
             </a:p>
           </p:txBody>
         </p:sp>
-        <mc:AlternateContent xmlns:mc="http://schemas.openxmlformats.org/markup-compatibility/2006">
-          <mc:Choice xmlns:a14="http://schemas.microsoft.com/office/drawing/2010/main" Requires="a14">
+        <mc:AlternateContent xmlns:mc="http://schemas.openxmlformats.org/markup-compatibility/2006" xmlns:a14="http://schemas.microsoft.com/office/drawing/2010/main">
+          <mc:Choice Requires="a14">
             <p:sp>
               <p:nvSpPr>
                 <p:cNvPr id="59" name="TextBox 58">
@@ -6478,17 +6481,7 @@
                             </a:solidFill>
                             <a:latin typeface="Cambria Math" panose="02040503050406030204" pitchFamily="18" charset="0"/>
                           </a:rPr>
-                          <m:t>=</m:t>
-                        </m:r>
-                        <m:r>
-                          <a:rPr lang="en-IN" sz="1500" b="0" i="1" smtClean="0">
-                            <a:solidFill>
-                              <a:srgbClr val="003A00"/>
-                            </a:solidFill>
-                            <a:latin typeface="Cambria Math" panose="02040503050406030204" pitchFamily="18" charset="0"/>
-                            <a:ea typeface="Cambria Math" panose="02040503050406030204" pitchFamily="18" charset="0"/>
-                          </a:rPr>
-                          <m:t>±</m:t>
+                          <m:t>=±</m:t>
                         </m:r>
                         <m:rad>
                           <m:radPr>
@@ -6667,7 +6660,7 @@
               </p:txBody>
             </p:sp>
           </mc:Choice>
-          <mc:Fallback>
+          <mc:Fallback xmlns="">
             <p:sp>
               <p:nvSpPr>
                 <p:cNvPr id="59" name="TextBox 58">
@@ -6788,8 +6781,8 @@
             </a:p>
           </p:txBody>
         </p:sp>
-        <mc:AlternateContent xmlns:mc="http://schemas.openxmlformats.org/markup-compatibility/2006">
-          <mc:Choice xmlns:a14="http://schemas.microsoft.com/office/drawing/2010/main" Requires="a14">
+        <mc:AlternateContent xmlns:mc="http://schemas.openxmlformats.org/markup-compatibility/2006" xmlns:a14="http://schemas.microsoft.com/office/drawing/2010/main">
+          <mc:Choice Requires="a14">
             <p:sp>
               <p:nvSpPr>
                 <p:cNvPr id="66" name="TextBox 65">
@@ -6920,7 +6913,7 @@
               </p:txBody>
             </p:sp>
           </mc:Choice>
-          <mc:Fallback>
+          <mc:Fallback xmlns="">
             <p:sp>
               <p:nvSpPr>
                 <p:cNvPr id="66" name="TextBox 65">
@@ -7041,8 +7034,8 @@
             </a:p>
           </p:txBody>
         </p:sp>
-        <mc:AlternateContent xmlns:mc="http://schemas.openxmlformats.org/markup-compatibility/2006">
-          <mc:Choice xmlns:a14="http://schemas.microsoft.com/office/drawing/2010/main" Requires="a14">
+        <mc:AlternateContent xmlns:mc="http://schemas.openxmlformats.org/markup-compatibility/2006" xmlns:a14="http://schemas.microsoft.com/office/drawing/2010/main">
+          <mc:Choice Requires="a14">
             <p:sp>
               <p:nvSpPr>
                 <p:cNvPr id="70" name="TextBox 69">
@@ -7091,16 +7084,7 @@
                             </a:solidFill>
                             <a:latin typeface="Cambria Math" panose="02040503050406030204" pitchFamily="18" charset="0"/>
                           </a:rPr>
-                          <m:t>=</m:t>
-                        </m:r>
-                        <m:r>
-                          <a:rPr lang="en-IN" sz="1500" b="0" i="1" smtClean="0">
-                            <a:solidFill>
-                              <a:srgbClr val="003A00"/>
-                            </a:solidFill>
-                            <a:latin typeface="Cambria Math" panose="02040503050406030204" pitchFamily="18" charset="0"/>
-                          </a:rPr>
-                          <m:t>0</m:t>
+                          <m:t>=0</m:t>
                         </m:r>
                       </m:oMath>
                     </m:oMathPara>
@@ -7114,7 +7098,7 @@
               </p:txBody>
             </p:sp>
           </mc:Choice>
-          <mc:Fallback>
+          <mc:Fallback xmlns="">
             <p:sp>
               <p:nvSpPr>
                 <p:cNvPr id="70" name="TextBox 69">
@@ -7235,8 +7219,8 @@
             </a:p>
           </p:txBody>
         </p:sp>
-        <mc:AlternateContent xmlns:mc="http://schemas.openxmlformats.org/markup-compatibility/2006">
-          <mc:Choice xmlns:a14="http://schemas.microsoft.com/office/drawing/2010/main" Requires="a14">
+        <mc:AlternateContent xmlns:mc="http://schemas.openxmlformats.org/markup-compatibility/2006" xmlns:a14="http://schemas.microsoft.com/office/drawing/2010/main">
+          <mc:Choice Requires="a14">
             <p:sp>
               <p:nvSpPr>
                 <p:cNvPr id="78" name="TextBox 77">
@@ -7285,17 +7269,7 @@
                             </a:solidFill>
                             <a:latin typeface="Cambria Math" panose="02040503050406030204" pitchFamily="18" charset="0"/>
                           </a:rPr>
-                          <m:t>=</m:t>
-                        </m:r>
-                        <m:r>
-                          <a:rPr lang="en-IN" sz="1500" b="0" i="1" smtClean="0">
-                            <a:solidFill>
-                              <a:srgbClr val="003A00"/>
-                            </a:solidFill>
-                            <a:latin typeface="Cambria Math" panose="02040503050406030204" pitchFamily="18" charset="0"/>
-                            <a:ea typeface="Cambria Math" panose="02040503050406030204" pitchFamily="18" charset="0"/>
-                          </a:rPr>
-                          <m:t>±</m:t>
+                          <m:t>=±</m:t>
                         </m:r>
                         <m:rad>
                           <m:radPr>
@@ -7412,7 +7386,7 @@
               </p:txBody>
             </p:sp>
           </mc:Choice>
-          <mc:Fallback>
+          <mc:Fallback xmlns="">
             <p:sp>
               <p:nvSpPr>
                 <p:cNvPr id="78" name="TextBox 77">
@@ -7533,8 +7507,8 @@
             </a:p>
           </p:txBody>
         </p:sp>
-        <mc:AlternateContent xmlns:mc="http://schemas.openxmlformats.org/markup-compatibility/2006">
-          <mc:Choice xmlns:a14="http://schemas.microsoft.com/office/drawing/2010/main" Requires="a14">
+        <mc:AlternateContent xmlns:mc="http://schemas.openxmlformats.org/markup-compatibility/2006" xmlns:a14="http://schemas.microsoft.com/office/drawing/2010/main">
+          <mc:Choice Requires="a14">
             <p:sp>
               <p:nvSpPr>
                 <p:cNvPr id="82" name="TextBox 81">
@@ -7563,6 +7537,7 @@
                 </a:bodyPr>
                 <a:lstStyle/>
                 <a:p>
+                  <a:pPr/>
                   <a14:m>
                     <m:oMathPara xmlns:m="http://schemas.openxmlformats.org/officeDocument/2006/math">
                       <m:oMath>
@@ -7596,7 +7571,7 @@
               </p:txBody>
             </p:sp>
           </mc:Choice>
-          <mc:Fallback>
+          <mc:Fallback xmlns="">
             <p:sp>
               <p:nvSpPr>
                 <p:cNvPr id="82" name="TextBox 81">
@@ -7717,8 +7692,8 @@
             </a:p>
           </p:txBody>
         </p:sp>
-        <mc:AlternateContent xmlns:mc="http://schemas.openxmlformats.org/markup-compatibility/2006">
-          <mc:Choice xmlns:a14="http://schemas.microsoft.com/office/drawing/2010/main" Requires="a14">
+        <mc:AlternateContent xmlns:mc="http://schemas.openxmlformats.org/markup-compatibility/2006" xmlns:a14="http://schemas.microsoft.com/office/drawing/2010/main">
+          <mc:Choice Requires="a14">
             <p:sp>
               <p:nvSpPr>
                 <p:cNvPr id="87" name="TextBox 86">
@@ -7849,7 +7824,7 @@
               </p:txBody>
             </p:sp>
           </mc:Choice>
-          <mc:Fallback>
+          <mc:Fallback xmlns="">
             <p:sp>
               <p:nvSpPr>
                 <p:cNvPr id="87" name="TextBox 86">
@@ -7970,8 +7945,8 @@
             </a:p>
           </p:txBody>
         </p:sp>
-        <mc:AlternateContent xmlns:mc="http://schemas.openxmlformats.org/markup-compatibility/2006">
-          <mc:Choice xmlns:a14="http://schemas.microsoft.com/office/drawing/2010/main" Requires="a14">
+        <mc:AlternateContent xmlns:mc="http://schemas.openxmlformats.org/markup-compatibility/2006" xmlns:a14="http://schemas.microsoft.com/office/drawing/2010/main">
+          <mc:Choice Requires="a14">
             <p:sp>
               <p:nvSpPr>
                 <p:cNvPr id="93" name="TextBox 92">
@@ -8020,16 +7995,7 @@
                             </a:solidFill>
                             <a:latin typeface="Cambria Math" panose="02040503050406030204" pitchFamily="18" charset="0"/>
                           </a:rPr>
-                          <m:t>=</m:t>
-                        </m:r>
-                        <m:r>
-                          <a:rPr lang="en-IN" sz="1500" b="0" i="1" smtClean="0">
-                            <a:solidFill>
-                              <a:srgbClr val="003A00"/>
-                            </a:solidFill>
-                            <a:latin typeface="Cambria Math" panose="02040503050406030204" pitchFamily="18" charset="0"/>
-                          </a:rPr>
-                          <m:t>0</m:t>
+                          <m:t>=0</m:t>
                         </m:r>
                       </m:oMath>
                     </m:oMathPara>
@@ -8043,7 +8009,7 @@
               </p:txBody>
             </p:sp>
           </mc:Choice>
-          <mc:Fallback>
+          <mc:Fallback xmlns="">
             <p:sp>
               <p:nvSpPr>
                 <p:cNvPr id="93" name="TextBox 92">
@@ -8093,6 +8059,5773 @@
     <p:extLst>
       <p:ext uri="{BB962C8B-B14F-4D97-AF65-F5344CB8AC3E}">
         <p14:creationId xmlns:p14="http://schemas.microsoft.com/office/powerpoint/2010/main" val="1570491181"/>
+      </p:ext>
+    </p:extLst>
+  </p:cSld>
+  <p:clrMapOvr>
+    <a:masterClrMapping/>
+  </p:clrMapOvr>
+</p:sld>
+</file>
+
+<file path=ppt/slides/slide11.xml><?xml version="1.0" encoding="utf-8"?>
+<p:sld xmlns:a="http://schemas.openxmlformats.org/drawingml/2006/main" xmlns:r="http://schemas.openxmlformats.org/officeDocument/2006/relationships" xmlns:p="http://schemas.openxmlformats.org/presentationml/2006/main">
+  <p:cSld>
+    <p:spTree>
+      <p:nvGrpSpPr>
+        <p:cNvPr id="1" name="">
+          <a:extLst>
+            <a:ext uri="{FF2B5EF4-FFF2-40B4-BE49-F238E27FC236}">
+              <a16:creationId xmlns:a16="http://schemas.microsoft.com/office/drawing/2014/main" id="{F3B997F0-7F14-CDCF-FD2F-648F614625AA}"/>
+            </a:ext>
+          </a:extLst>
+        </p:cNvPr>
+        <p:cNvGrpSpPr/>
+        <p:nvPr/>
+      </p:nvGrpSpPr>
+      <p:grpSpPr>
+        <a:xfrm>
+          <a:off x="0" y="0"/>
+          <a:ext cx="0" cy="0"/>
+          <a:chOff x="0" y="0"/>
+          <a:chExt cx="0" cy="0"/>
+        </a:xfrm>
+      </p:grpSpPr>
+      <p:cxnSp>
+        <p:nvCxnSpPr>
+          <p:cNvPr id="43" name="Straight Connector 42">
+            <a:extLst>
+              <a:ext uri="{FF2B5EF4-FFF2-40B4-BE49-F238E27FC236}">
+                <a16:creationId xmlns:a16="http://schemas.microsoft.com/office/drawing/2014/main" id="{32457D13-BEE8-1887-791E-2827C76B246B}"/>
+              </a:ext>
+            </a:extLst>
+          </p:cNvPr>
+          <p:cNvCxnSpPr>
+            <a:cxnSpLocks/>
+          </p:cNvCxnSpPr>
+          <p:nvPr/>
+        </p:nvCxnSpPr>
+        <p:spPr>
+          <a:xfrm flipV="1">
+            <a:off x="7222019" y="2305050"/>
+            <a:ext cx="0" cy="2906307"/>
+          </a:xfrm>
+          <a:prstGeom prst="line">
+            <a:avLst/>
+          </a:prstGeom>
+          <a:ln w="28575" cap="rnd">
+            <a:solidFill>
+              <a:schemeClr val="tx1">
+                <a:lumMod val="75000"/>
+                <a:lumOff val="25000"/>
+              </a:schemeClr>
+            </a:solidFill>
+            <a:prstDash val="dash"/>
+            <a:round/>
+          </a:ln>
+        </p:spPr>
+        <p:style>
+          <a:lnRef idx="1">
+            <a:schemeClr val="accent1"/>
+          </a:lnRef>
+          <a:fillRef idx="0">
+            <a:schemeClr val="accent1"/>
+          </a:fillRef>
+          <a:effectRef idx="0">
+            <a:schemeClr val="accent1"/>
+          </a:effectRef>
+          <a:fontRef idx="minor">
+            <a:schemeClr val="tx1"/>
+          </a:fontRef>
+        </p:style>
+      </p:cxnSp>
+      <p:cxnSp>
+        <p:nvCxnSpPr>
+          <p:cNvPr id="40" name="Straight Connector 39">
+            <a:extLst>
+              <a:ext uri="{FF2B5EF4-FFF2-40B4-BE49-F238E27FC236}">
+                <a16:creationId xmlns:a16="http://schemas.microsoft.com/office/drawing/2014/main" id="{298FF6E3-41C7-15E5-38A9-1029B0680458}"/>
+              </a:ext>
+            </a:extLst>
+          </p:cNvPr>
+          <p:cNvCxnSpPr>
+            <a:cxnSpLocks/>
+          </p:cNvCxnSpPr>
+          <p:nvPr/>
+        </p:nvCxnSpPr>
+        <p:spPr>
+          <a:xfrm flipV="1">
+            <a:off x="6279360" y="3567113"/>
+            <a:ext cx="0" cy="1642210"/>
+          </a:xfrm>
+          <a:prstGeom prst="line">
+            <a:avLst/>
+          </a:prstGeom>
+          <a:ln w="28575" cap="rnd">
+            <a:solidFill>
+              <a:schemeClr val="tx1">
+                <a:lumMod val="75000"/>
+                <a:lumOff val="25000"/>
+              </a:schemeClr>
+            </a:solidFill>
+            <a:prstDash val="dash"/>
+            <a:round/>
+          </a:ln>
+        </p:spPr>
+        <p:style>
+          <a:lnRef idx="1">
+            <a:schemeClr val="accent1"/>
+          </a:lnRef>
+          <a:fillRef idx="0">
+            <a:schemeClr val="accent1"/>
+          </a:fillRef>
+          <a:effectRef idx="0">
+            <a:schemeClr val="accent1"/>
+          </a:effectRef>
+          <a:fontRef idx="minor">
+            <a:schemeClr val="tx1"/>
+          </a:fontRef>
+        </p:style>
+      </p:cxnSp>
+      <p:cxnSp>
+        <p:nvCxnSpPr>
+          <p:cNvPr id="34" name="Straight Connector 33">
+            <a:extLst>
+              <a:ext uri="{FF2B5EF4-FFF2-40B4-BE49-F238E27FC236}">
+                <a16:creationId xmlns:a16="http://schemas.microsoft.com/office/drawing/2014/main" id="{883AF625-2085-FB90-DA68-3377C1359653}"/>
+              </a:ext>
+            </a:extLst>
+          </p:cNvPr>
+          <p:cNvCxnSpPr>
+            <a:cxnSpLocks/>
+          </p:cNvCxnSpPr>
+          <p:nvPr/>
+        </p:nvCxnSpPr>
+        <p:spPr>
+          <a:xfrm flipV="1">
+            <a:off x="5414956" y="2695266"/>
+            <a:ext cx="0" cy="2514061"/>
+          </a:xfrm>
+          <a:prstGeom prst="line">
+            <a:avLst/>
+          </a:prstGeom>
+          <a:ln w="28575" cap="rnd">
+            <a:solidFill>
+              <a:schemeClr val="tx1">
+                <a:lumMod val="75000"/>
+                <a:lumOff val="25000"/>
+              </a:schemeClr>
+            </a:solidFill>
+            <a:prstDash val="dash"/>
+            <a:round/>
+          </a:ln>
+        </p:spPr>
+        <p:style>
+          <a:lnRef idx="1">
+            <a:schemeClr val="accent1"/>
+          </a:lnRef>
+          <a:fillRef idx="0">
+            <a:schemeClr val="accent1"/>
+          </a:fillRef>
+          <a:effectRef idx="0">
+            <a:schemeClr val="accent1"/>
+          </a:effectRef>
+          <a:fontRef idx="minor">
+            <a:schemeClr val="tx1"/>
+          </a:fontRef>
+        </p:style>
+      </p:cxnSp>
+      <p:cxnSp>
+        <p:nvCxnSpPr>
+          <p:cNvPr id="32" name="Straight Connector 31">
+            <a:extLst>
+              <a:ext uri="{FF2B5EF4-FFF2-40B4-BE49-F238E27FC236}">
+                <a16:creationId xmlns:a16="http://schemas.microsoft.com/office/drawing/2014/main" id="{BB827653-54E8-36A8-FF52-F0493F107535}"/>
+              </a:ext>
+            </a:extLst>
+          </p:cNvPr>
+          <p:cNvCxnSpPr>
+            <a:cxnSpLocks/>
+          </p:cNvCxnSpPr>
+          <p:nvPr/>
+        </p:nvCxnSpPr>
+        <p:spPr>
+          <a:xfrm flipV="1">
+            <a:off x="4541515" y="4074319"/>
+            <a:ext cx="0" cy="1135010"/>
+          </a:xfrm>
+          <a:prstGeom prst="line">
+            <a:avLst/>
+          </a:prstGeom>
+          <a:ln w="28575" cap="rnd">
+            <a:solidFill>
+              <a:schemeClr val="tx1">
+                <a:lumMod val="75000"/>
+                <a:lumOff val="25000"/>
+              </a:schemeClr>
+            </a:solidFill>
+            <a:prstDash val="dash"/>
+            <a:round/>
+          </a:ln>
+        </p:spPr>
+        <p:style>
+          <a:lnRef idx="1">
+            <a:schemeClr val="accent1"/>
+          </a:lnRef>
+          <a:fillRef idx="0">
+            <a:schemeClr val="accent1"/>
+          </a:fillRef>
+          <a:effectRef idx="0">
+            <a:schemeClr val="accent1"/>
+          </a:effectRef>
+          <a:fontRef idx="minor">
+            <a:schemeClr val="tx1"/>
+          </a:fontRef>
+        </p:style>
+      </p:cxnSp>
+      <p:sp>
+        <p:nvSpPr>
+          <p:cNvPr id="2" name="Freeform: Shape 1">
+            <a:extLst>
+              <a:ext uri="{FF2B5EF4-FFF2-40B4-BE49-F238E27FC236}">
+                <a16:creationId xmlns:a16="http://schemas.microsoft.com/office/drawing/2014/main" id="{FA33458E-42F6-8995-025B-2E6ADDA6A2C5}"/>
+              </a:ext>
+            </a:extLst>
+          </p:cNvPr>
+          <p:cNvSpPr/>
+          <p:nvPr/>
+        </p:nvSpPr>
+        <p:spPr>
+          <a:xfrm>
+            <a:off x="3167365" y="1805648"/>
+            <a:ext cx="4256838" cy="2254867"/>
+          </a:xfrm>
+          <a:custGeom>
+            <a:avLst/>
+            <a:gdLst>
+              <a:gd name="csX0" fmla="*/ 0 w 4086933"/>
+              <a:gd name="csY0" fmla="*/ 0 h 2254867"/>
+              <a:gd name="csX1" fmla="*/ 1311078 w 4086933"/>
+              <a:gd name="csY1" fmla="*/ 2254856 h 2254867"/>
+              <a:gd name="csX2" fmla="*/ 2153316 w 4086933"/>
+              <a:gd name="csY2" fmla="*/ 885162 h 2254867"/>
+              <a:gd name="csX3" fmla="*/ 3004690 w 4086933"/>
+              <a:gd name="csY3" fmla="*/ 1741992 h 2254867"/>
+              <a:gd name="csX4" fmla="*/ 4086933 w 4086933"/>
+              <a:gd name="csY4" fmla="*/ 626106 h 2254867"/>
+            </a:gdLst>
+            <a:ahLst/>
+            <a:cxnLst>
+              <a:cxn ang="0">
+                <a:pos x="csX0" y="csY0"/>
+              </a:cxn>
+              <a:cxn ang="0">
+                <a:pos x="csX1" y="csY1"/>
+              </a:cxn>
+              <a:cxn ang="0">
+                <a:pos x="csX2" y="csY2"/>
+              </a:cxn>
+              <a:cxn ang="0">
+                <a:pos x="csX3" y="csY3"/>
+              </a:cxn>
+              <a:cxn ang="0">
+                <a:pos x="csX4" y="csY4"/>
+              </a:cxn>
+            </a:cxnLst>
+            <a:rect l="l" t="t" r="r" b="b"/>
+            <a:pathLst>
+              <a:path w="4086933" h="2254867">
+                <a:moveTo>
+                  <a:pt x="0" y="0"/>
+                </a:moveTo>
+                <a:cubicBezTo>
+                  <a:pt x="682613" y="5445"/>
+                  <a:pt x="961337" y="2250204"/>
+                  <a:pt x="1311078" y="2254856"/>
+                </a:cubicBezTo>
+                <a:cubicBezTo>
+                  <a:pt x="1660819" y="2259508"/>
+                  <a:pt x="1825321" y="884914"/>
+                  <a:pt x="2153316" y="885162"/>
+                </a:cubicBezTo>
+                <a:cubicBezTo>
+                  <a:pt x="2481311" y="885410"/>
+                  <a:pt x="2677849" y="1747068"/>
+                  <a:pt x="3004690" y="1741992"/>
+                </a:cubicBezTo>
+                <a:cubicBezTo>
+                  <a:pt x="3331531" y="1736916"/>
+                  <a:pt x="3672247" y="-64336"/>
+                  <a:pt x="4086933" y="626106"/>
+                </a:cubicBezTo>
+              </a:path>
+            </a:pathLst>
+          </a:custGeom>
+          <a:noFill/>
+          <a:ln w="38100" cap="rnd">
+            <a:solidFill>
+              <a:schemeClr val="accent1">
+                <a:lumMod val="75000"/>
+              </a:schemeClr>
+            </a:solidFill>
+            <a:round/>
+          </a:ln>
+        </p:spPr>
+        <p:style>
+          <a:lnRef idx="2">
+            <a:schemeClr val="accent1">
+              <a:shade val="15000"/>
+            </a:schemeClr>
+          </a:lnRef>
+          <a:fillRef idx="1">
+            <a:schemeClr val="accent1"/>
+          </a:fillRef>
+          <a:effectRef idx="0">
+            <a:schemeClr val="accent1"/>
+          </a:effectRef>
+          <a:fontRef idx="minor">
+            <a:schemeClr val="lt1"/>
+          </a:fontRef>
+        </p:style>
+        <p:txBody>
+          <a:bodyPr rtlCol="0" anchor="ctr"/>
+          <a:lstStyle/>
+          <a:p>
+            <a:pPr algn="ctr"/>
+            <a:endParaRPr lang="en-IN"/>
+          </a:p>
+        </p:txBody>
+      </p:sp>
+      <p:cxnSp>
+        <p:nvCxnSpPr>
+          <p:cNvPr id="3" name="Straight Connector 2">
+            <a:extLst>
+              <a:ext uri="{FF2B5EF4-FFF2-40B4-BE49-F238E27FC236}">
+                <a16:creationId xmlns:a16="http://schemas.microsoft.com/office/drawing/2014/main" id="{9D89CC12-A6E0-E05E-B45A-EFF12A118584}"/>
+              </a:ext>
+            </a:extLst>
+          </p:cNvPr>
+          <p:cNvCxnSpPr>
+            <a:cxnSpLocks/>
+          </p:cNvCxnSpPr>
+          <p:nvPr/>
+        </p:nvCxnSpPr>
+        <p:spPr>
+          <a:xfrm>
+            <a:off x="3155934" y="5209329"/>
+            <a:ext cx="4638237" cy="0"/>
+          </a:xfrm>
+          <a:prstGeom prst="line">
+            <a:avLst/>
+          </a:prstGeom>
+          <a:ln w="28575" cap="rnd">
+            <a:solidFill>
+              <a:schemeClr val="tx1"/>
+            </a:solidFill>
+            <a:round/>
+          </a:ln>
+        </p:spPr>
+        <p:style>
+          <a:lnRef idx="1">
+            <a:schemeClr val="accent1"/>
+          </a:lnRef>
+          <a:fillRef idx="0">
+            <a:schemeClr val="accent1"/>
+          </a:fillRef>
+          <a:effectRef idx="0">
+            <a:schemeClr val="accent1"/>
+          </a:effectRef>
+          <a:fontRef idx="minor">
+            <a:schemeClr val="tx1"/>
+          </a:fontRef>
+        </p:style>
+      </p:cxnSp>
+      <p:cxnSp>
+        <p:nvCxnSpPr>
+          <p:cNvPr id="5" name="Straight Connector 4">
+            <a:extLst>
+              <a:ext uri="{FF2B5EF4-FFF2-40B4-BE49-F238E27FC236}">
+                <a16:creationId xmlns:a16="http://schemas.microsoft.com/office/drawing/2014/main" id="{13FE4A84-C17D-D71F-FCC2-BCED4DD7E660}"/>
+              </a:ext>
+            </a:extLst>
+          </p:cNvPr>
+          <p:cNvCxnSpPr>
+            <a:cxnSpLocks/>
+          </p:cNvCxnSpPr>
+          <p:nvPr/>
+        </p:nvCxnSpPr>
+        <p:spPr>
+          <a:xfrm>
+            <a:off x="3155934" y="892166"/>
+            <a:ext cx="0" cy="4317163"/>
+          </a:xfrm>
+          <a:prstGeom prst="line">
+            <a:avLst/>
+          </a:prstGeom>
+          <a:ln w="28575" cap="rnd">
+            <a:solidFill>
+              <a:schemeClr val="tx1"/>
+            </a:solidFill>
+            <a:round/>
+          </a:ln>
+        </p:spPr>
+        <p:style>
+          <a:lnRef idx="1">
+            <a:schemeClr val="accent1"/>
+          </a:lnRef>
+          <a:fillRef idx="0">
+            <a:schemeClr val="accent1"/>
+          </a:fillRef>
+          <a:effectRef idx="0">
+            <a:schemeClr val="accent1"/>
+          </a:effectRef>
+          <a:fontRef idx="minor">
+            <a:schemeClr val="tx1"/>
+          </a:fontRef>
+        </p:style>
+      </p:cxnSp>
+      <mc:AlternateContent xmlns:mc="http://schemas.openxmlformats.org/markup-compatibility/2006">
+        <mc:Choice xmlns:a14="http://schemas.microsoft.com/office/drawing/2010/main" Requires="a14">
+          <p:sp>
+            <p:nvSpPr>
+              <p:cNvPr id="16" name="TextBox 15">
+                <a:extLst>
+                  <a:ext uri="{FF2B5EF4-FFF2-40B4-BE49-F238E27FC236}">
+                    <a16:creationId xmlns:a16="http://schemas.microsoft.com/office/drawing/2014/main" id="{48EE0450-4A1C-39F6-AE9A-7EAA7F49C36E}"/>
+                  </a:ext>
+                </a:extLst>
+              </p:cNvPr>
+              <p:cNvSpPr txBox="1"/>
+              <p:nvPr/>
+            </p:nvSpPr>
+            <p:spPr>
+              <a:xfrm>
+                <a:off x="7608992" y="5319307"/>
+                <a:ext cx="201722" cy="307777"/>
+              </a:xfrm>
+              <a:prstGeom prst="rect">
+                <a:avLst/>
+              </a:prstGeom>
+              <a:noFill/>
+            </p:spPr>
+            <p:txBody>
+              <a:bodyPr wrap="none" lIns="0" tIns="0" rIns="0" bIns="0" rtlCol="0">
+                <a:spAutoFit/>
+              </a:bodyPr>
+              <a:lstStyle/>
+              <a:p>
+                <a:pPr/>
+                <a14:m>
+                  <m:oMathPara xmlns:m="http://schemas.openxmlformats.org/officeDocument/2006/math">
+                    <m:oMath>
+                      <m:r>
+                        <a:rPr lang="en-US" sz="2000" b="0" i="1" smtClean="0">
+                          <a:latin typeface="Cambria Math" panose="02040503050406030204" pitchFamily="18" charset="0"/>
+                        </a:rPr>
+                        <m:t>𝑥</m:t>
+                      </m:r>
+                    </m:oMath>
+                  </m:oMathPara>
+                </a14:m>
+                <a:endParaRPr lang="en-US" sz="2000" dirty="0"/>
+              </a:p>
+            </p:txBody>
+          </p:sp>
+        </mc:Choice>
+        <mc:Fallback>
+          <p:sp>
+            <p:nvSpPr>
+              <p:cNvPr id="16" name="TextBox 15">
+                <a:extLst>
+                  <a:ext uri="{FF2B5EF4-FFF2-40B4-BE49-F238E27FC236}">
+                    <a16:creationId xmlns:a16="http://schemas.microsoft.com/office/drawing/2014/main" id="{48EE0450-4A1C-39F6-AE9A-7EAA7F49C36E}"/>
+                  </a:ext>
+                </a:extLst>
+              </p:cNvPr>
+              <p:cNvSpPr txBox="1">
+                <a:spLocks noRot="1" noChangeAspect="1" noMove="1" noResize="1" noEditPoints="1" noAdjustHandles="1" noChangeArrowheads="1" noChangeShapeType="1" noTextEdit="1"/>
+              </p:cNvSpPr>
+              <p:nvPr/>
+            </p:nvSpPr>
+            <p:spPr>
+              <a:xfrm>
+                <a:off x="7608992" y="5319307"/>
+                <a:ext cx="201722" cy="307777"/>
+              </a:xfrm>
+              <a:prstGeom prst="rect">
+                <a:avLst/>
+              </a:prstGeom>
+              <a:blipFill>
+                <a:blip r:embed="rId2"/>
+                <a:stretch>
+                  <a:fillRect l="-15152" r="-15152"/>
+                </a:stretch>
+              </a:blipFill>
+            </p:spPr>
+            <p:txBody>
+              <a:bodyPr/>
+              <a:lstStyle/>
+              <a:p>
+                <a:r>
+                  <a:rPr lang="en-IN">
+                    <a:noFill/>
+                  </a:rPr>
+                  <a:t> </a:t>
+                </a:r>
+              </a:p>
+            </p:txBody>
+          </p:sp>
+        </mc:Fallback>
+      </mc:AlternateContent>
+      <mc:AlternateContent xmlns:mc="http://schemas.openxmlformats.org/markup-compatibility/2006">
+        <mc:Choice xmlns:a14="http://schemas.microsoft.com/office/drawing/2010/main" Requires="a14">
+          <p:sp>
+            <p:nvSpPr>
+              <p:cNvPr id="18" name="TextBox 17">
+                <a:extLst>
+                  <a:ext uri="{FF2B5EF4-FFF2-40B4-BE49-F238E27FC236}">
+                    <a16:creationId xmlns:a16="http://schemas.microsoft.com/office/drawing/2014/main" id="{AF5C6DF2-625D-0E87-9FA5-98A198792D5A}"/>
+                  </a:ext>
+                </a:extLst>
+              </p:cNvPr>
+              <p:cNvSpPr txBox="1"/>
+              <p:nvPr/>
+            </p:nvSpPr>
+            <p:spPr>
+              <a:xfrm>
+                <a:off x="2993165" y="5319308"/>
+                <a:ext cx="338234" cy="307777"/>
+              </a:xfrm>
+              <a:prstGeom prst="rect">
+                <a:avLst/>
+              </a:prstGeom>
+              <a:noFill/>
+            </p:spPr>
+            <p:txBody>
+              <a:bodyPr wrap="square" lIns="0" tIns="0" rIns="0" bIns="0" rtlCol="0">
+                <a:spAutoFit/>
+              </a:bodyPr>
+              <a:lstStyle/>
+              <a:p>
+                <a:pPr/>
+                <a14:m>
+                  <m:oMathPara xmlns:m="http://schemas.openxmlformats.org/officeDocument/2006/math">
+                    <m:oMath>
+                      <m:r>
+                        <a:rPr lang="en-US" sz="2000" b="0" i="1" smtClean="0">
+                          <a:latin typeface="Cambria Math" panose="02040503050406030204" pitchFamily="18" charset="0"/>
+                          <a:ea typeface="Cambria Math" panose="02040503050406030204" pitchFamily="18" charset="0"/>
+                        </a:rPr>
+                        <m:t>𝑂</m:t>
+                      </m:r>
+                    </m:oMath>
+                  </m:oMathPara>
+                </a14:m>
+                <a:endParaRPr lang="en-US" sz="2000" i="1" dirty="0"/>
+              </a:p>
+            </p:txBody>
+          </p:sp>
+        </mc:Choice>
+        <mc:Fallback>
+          <p:sp>
+            <p:nvSpPr>
+              <p:cNvPr id="18" name="TextBox 17">
+                <a:extLst>
+                  <a:ext uri="{FF2B5EF4-FFF2-40B4-BE49-F238E27FC236}">
+                    <a16:creationId xmlns:a16="http://schemas.microsoft.com/office/drawing/2014/main" id="{AF5C6DF2-625D-0E87-9FA5-98A198792D5A}"/>
+                  </a:ext>
+                </a:extLst>
+              </p:cNvPr>
+              <p:cNvSpPr txBox="1">
+                <a:spLocks noRot="1" noChangeAspect="1" noMove="1" noResize="1" noEditPoints="1" noAdjustHandles="1" noChangeArrowheads="1" noChangeShapeType="1" noTextEdit="1"/>
+              </p:cNvSpPr>
+              <p:nvPr/>
+            </p:nvSpPr>
+            <p:spPr>
+              <a:xfrm>
+                <a:off x="2993165" y="5319308"/>
+                <a:ext cx="338234" cy="307777"/>
+              </a:xfrm>
+              <a:prstGeom prst="rect">
+                <a:avLst/>
+              </a:prstGeom>
+              <a:blipFill>
+                <a:blip r:embed="rId3"/>
+                <a:stretch>
+                  <a:fillRect l="-1818" r="-1818" b="-6000"/>
+                </a:stretch>
+              </a:blipFill>
+            </p:spPr>
+            <p:txBody>
+              <a:bodyPr/>
+              <a:lstStyle/>
+              <a:p>
+                <a:r>
+                  <a:rPr lang="en-IN">
+                    <a:noFill/>
+                  </a:rPr>
+                  <a:t> </a:t>
+                </a:r>
+              </a:p>
+            </p:txBody>
+          </p:sp>
+        </mc:Fallback>
+      </mc:AlternateContent>
+      <mc:AlternateContent xmlns:mc="http://schemas.openxmlformats.org/markup-compatibility/2006">
+        <mc:Choice xmlns:a14="http://schemas.microsoft.com/office/drawing/2010/main" Requires="a14">
+          <p:sp>
+            <p:nvSpPr>
+              <p:cNvPr id="20" name="TextBox 19">
+                <a:extLst>
+                  <a:ext uri="{FF2B5EF4-FFF2-40B4-BE49-F238E27FC236}">
+                    <a16:creationId xmlns:a16="http://schemas.microsoft.com/office/drawing/2014/main" id="{385FB603-46F5-5589-4BD1-E775CC7B0AF9}"/>
+                  </a:ext>
+                </a:extLst>
+              </p:cNvPr>
+              <p:cNvSpPr txBox="1"/>
+              <p:nvPr/>
+            </p:nvSpPr>
+            <p:spPr>
+              <a:xfrm>
+                <a:off x="2415058" y="892166"/>
+                <a:ext cx="594650" cy="307777"/>
+              </a:xfrm>
+              <a:prstGeom prst="rect">
+                <a:avLst/>
+              </a:prstGeom>
+              <a:noFill/>
+            </p:spPr>
+            <p:txBody>
+              <a:bodyPr wrap="none" lIns="0" tIns="0" rIns="0" bIns="0" rtlCol="0">
+                <a:spAutoFit/>
+              </a:bodyPr>
+              <a:lstStyle/>
+              <a:p>
+                <a:pPr/>
+                <a14:m>
+                  <m:oMathPara xmlns:m="http://schemas.openxmlformats.org/officeDocument/2006/math">
+                    <m:oMath>
+                      <m:r>
+                        <a:rPr lang="en-US" sz="2000" b="0" i="1" smtClean="0">
+                          <a:latin typeface="Cambria Math" panose="02040503050406030204" pitchFamily="18" charset="0"/>
+                        </a:rPr>
+                        <m:t>𝑈</m:t>
+                      </m:r>
+                      <m:r>
+                        <a:rPr lang="en-US" sz="2000" b="0" i="1" smtClean="0">
+                          <a:latin typeface="Cambria Math" panose="02040503050406030204" pitchFamily="18" charset="0"/>
+                        </a:rPr>
+                        <m:t>(</m:t>
+                      </m:r>
+                      <m:r>
+                        <a:rPr lang="en-US" sz="2000" b="0" i="1" smtClean="0">
+                          <a:latin typeface="Cambria Math" panose="02040503050406030204" pitchFamily="18" charset="0"/>
+                        </a:rPr>
+                        <m:t>𝑥</m:t>
+                      </m:r>
+                      <m:r>
+                        <a:rPr lang="en-US" sz="2000" b="0" i="1" smtClean="0">
+                          <a:latin typeface="Cambria Math" panose="02040503050406030204" pitchFamily="18" charset="0"/>
+                        </a:rPr>
+                        <m:t>)</m:t>
+                      </m:r>
+                    </m:oMath>
+                  </m:oMathPara>
+                </a14:m>
+                <a:endParaRPr lang="en-US" sz="2000" dirty="0"/>
+              </a:p>
+            </p:txBody>
+          </p:sp>
+        </mc:Choice>
+        <mc:Fallback>
+          <p:sp>
+            <p:nvSpPr>
+              <p:cNvPr id="20" name="TextBox 19">
+                <a:extLst>
+                  <a:ext uri="{FF2B5EF4-FFF2-40B4-BE49-F238E27FC236}">
+                    <a16:creationId xmlns:a16="http://schemas.microsoft.com/office/drawing/2014/main" id="{385FB603-46F5-5589-4BD1-E775CC7B0AF9}"/>
+                  </a:ext>
+                </a:extLst>
+              </p:cNvPr>
+              <p:cNvSpPr txBox="1">
+                <a:spLocks noRot="1" noChangeAspect="1" noMove="1" noResize="1" noEditPoints="1" noAdjustHandles="1" noChangeArrowheads="1" noChangeShapeType="1" noTextEdit="1"/>
+              </p:cNvSpPr>
+              <p:nvPr/>
+            </p:nvSpPr>
+            <p:spPr>
+              <a:xfrm>
+                <a:off x="2415058" y="892166"/>
+                <a:ext cx="594650" cy="307777"/>
+              </a:xfrm>
+              <a:prstGeom prst="rect">
+                <a:avLst/>
+              </a:prstGeom>
+              <a:blipFill>
+                <a:blip r:embed="rId4"/>
+                <a:stretch>
+                  <a:fillRect l="-9184" t="-1961" r="-14286" b="-33333"/>
+                </a:stretch>
+              </a:blipFill>
+            </p:spPr>
+            <p:txBody>
+              <a:bodyPr/>
+              <a:lstStyle/>
+              <a:p>
+                <a:r>
+                  <a:rPr lang="en-IN">
+                    <a:noFill/>
+                  </a:rPr>
+                  <a:t> </a:t>
+                </a:r>
+              </a:p>
+            </p:txBody>
+          </p:sp>
+        </mc:Fallback>
+      </mc:AlternateContent>
+      <p:sp>
+        <p:nvSpPr>
+          <p:cNvPr id="6" name="Oval 5">
+            <a:extLst>
+              <a:ext uri="{FF2B5EF4-FFF2-40B4-BE49-F238E27FC236}">
+                <a16:creationId xmlns:a16="http://schemas.microsoft.com/office/drawing/2014/main" id="{F2F7F456-AAA0-9F49-6CA8-16893EA00227}"/>
+              </a:ext>
+            </a:extLst>
+          </p:cNvPr>
+          <p:cNvSpPr/>
+          <p:nvPr/>
+        </p:nvSpPr>
+        <p:spPr>
+          <a:xfrm>
+            <a:off x="3106586" y="1758680"/>
+            <a:ext cx="98696" cy="98696"/>
+          </a:xfrm>
+          <a:prstGeom prst="ellipse">
+            <a:avLst/>
+          </a:prstGeom>
+          <a:solidFill>
+            <a:schemeClr val="tx1"/>
+          </a:solidFill>
+          <a:ln>
+            <a:noFill/>
+          </a:ln>
+        </p:spPr>
+        <p:style>
+          <a:lnRef idx="2">
+            <a:schemeClr val="accent1">
+              <a:shade val="15000"/>
+            </a:schemeClr>
+          </a:lnRef>
+          <a:fillRef idx="1">
+            <a:schemeClr val="accent1"/>
+          </a:fillRef>
+          <a:effectRef idx="0">
+            <a:schemeClr val="accent1"/>
+          </a:effectRef>
+          <a:fontRef idx="minor">
+            <a:schemeClr val="lt1"/>
+          </a:fontRef>
+        </p:style>
+        <p:txBody>
+          <a:bodyPr rtlCol="0" anchor="ctr"/>
+          <a:lstStyle/>
+          <a:p>
+            <a:pPr algn="ctr"/>
+            <a:endParaRPr lang="en-IN"/>
+          </a:p>
+        </p:txBody>
+      </p:sp>
+      <p:sp>
+        <p:nvSpPr>
+          <p:cNvPr id="9" name="Oval 8">
+            <a:extLst>
+              <a:ext uri="{FF2B5EF4-FFF2-40B4-BE49-F238E27FC236}">
+                <a16:creationId xmlns:a16="http://schemas.microsoft.com/office/drawing/2014/main" id="{16111B94-C7FF-694E-A8A4-2B02FCD041EE}"/>
+              </a:ext>
+            </a:extLst>
+          </p:cNvPr>
+          <p:cNvSpPr/>
+          <p:nvPr/>
+        </p:nvSpPr>
+        <p:spPr>
+          <a:xfrm>
+            <a:off x="4492473" y="4013549"/>
+            <a:ext cx="98696" cy="98696"/>
+          </a:xfrm>
+          <a:prstGeom prst="ellipse">
+            <a:avLst/>
+          </a:prstGeom>
+          <a:solidFill>
+            <a:schemeClr val="tx1"/>
+          </a:solidFill>
+          <a:ln>
+            <a:noFill/>
+          </a:ln>
+        </p:spPr>
+        <p:style>
+          <a:lnRef idx="2">
+            <a:schemeClr val="accent1">
+              <a:shade val="15000"/>
+            </a:schemeClr>
+          </a:lnRef>
+          <a:fillRef idx="1">
+            <a:schemeClr val="accent1"/>
+          </a:fillRef>
+          <a:effectRef idx="0">
+            <a:schemeClr val="accent1"/>
+          </a:effectRef>
+          <a:fontRef idx="minor">
+            <a:schemeClr val="lt1"/>
+          </a:fontRef>
+        </p:style>
+        <p:txBody>
+          <a:bodyPr rtlCol="0" anchor="ctr"/>
+          <a:lstStyle/>
+          <a:p>
+            <a:pPr algn="ctr"/>
+            <a:endParaRPr lang="en-IN"/>
+          </a:p>
+        </p:txBody>
+      </p:sp>
+      <p:sp>
+        <p:nvSpPr>
+          <p:cNvPr id="11" name="Oval 10">
+            <a:extLst>
+              <a:ext uri="{FF2B5EF4-FFF2-40B4-BE49-F238E27FC236}">
+                <a16:creationId xmlns:a16="http://schemas.microsoft.com/office/drawing/2014/main" id="{0C0D3AC6-B45F-A312-D626-D958C3374FE5}"/>
+              </a:ext>
+            </a:extLst>
+          </p:cNvPr>
+          <p:cNvSpPr/>
+          <p:nvPr/>
+        </p:nvSpPr>
+        <p:spPr>
+          <a:xfrm>
+            <a:off x="5364452" y="2648299"/>
+            <a:ext cx="98696" cy="98696"/>
+          </a:xfrm>
+          <a:prstGeom prst="ellipse">
+            <a:avLst/>
+          </a:prstGeom>
+          <a:solidFill>
+            <a:schemeClr val="tx1"/>
+          </a:solidFill>
+          <a:ln>
+            <a:noFill/>
+          </a:ln>
+        </p:spPr>
+        <p:style>
+          <a:lnRef idx="2">
+            <a:schemeClr val="accent1">
+              <a:shade val="15000"/>
+            </a:schemeClr>
+          </a:lnRef>
+          <a:fillRef idx="1">
+            <a:schemeClr val="accent1"/>
+          </a:fillRef>
+          <a:effectRef idx="0">
+            <a:schemeClr val="accent1"/>
+          </a:effectRef>
+          <a:fontRef idx="minor">
+            <a:schemeClr val="lt1"/>
+          </a:fontRef>
+        </p:style>
+        <p:txBody>
+          <a:bodyPr rtlCol="0" anchor="ctr"/>
+          <a:lstStyle/>
+          <a:p>
+            <a:pPr algn="ctr"/>
+            <a:endParaRPr lang="en-IN"/>
+          </a:p>
+        </p:txBody>
+      </p:sp>
+      <p:sp>
+        <p:nvSpPr>
+          <p:cNvPr id="13" name="Oval 12">
+            <a:extLst>
+              <a:ext uri="{FF2B5EF4-FFF2-40B4-BE49-F238E27FC236}">
+                <a16:creationId xmlns:a16="http://schemas.microsoft.com/office/drawing/2014/main" id="{DEB0BDA2-8853-0D92-0B81-48ED3D8BE7AF}"/>
+              </a:ext>
+            </a:extLst>
+          </p:cNvPr>
+          <p:cNvSpPr/>
+          <p:nvPr/>
+        </p:nvSpPr>
+        <p:spPr>
+          <a:xfrm>
+            <a:off x="6230667" y="3498293"/>
+            <a:ext cx="98696" cy="98696"/>
+          </a:xfrm>
+          <a:prstGeom prst="ellipse">
+            <a:avLst/>
+          </a:prstGeom>
+          <a:solidFill>
+            <a:schemeClr val="tx1"/>
+          </a:solidFill>
+          <a:ln>
+            <a:noFill/>
+          </a:ln>
+        </p:spPr>
+        <p:style>
+          <a:lnRef idx="2">
+            <a:schemeClr val="accent1">
+              <a:shade val="15000"/>
+            </a:schemeClr>
+          </a:lnRef>
+          <a:fillRef idx="1">
+            <a:schemeClr val="accent1"/>
+          </a:fillRef>
+          <a:effectRef idx="0">
+            <a:schemeClr val="accent1"/>
+          </a:effectRef>
+          <a:fontRef idx="minor">
+            <a:schemeClr val="lt1"/>
+          </a:fontRef>
+        </p:style>
+        <p:txBody>
+          <a:bodyPr rtlCol="0" anchor="ctr"/>
+          <a:lstStyle/>
+          <a:p>
+            <a:pPr algn="ctr"/>
+            <a:endParaRPr lang="en-IN"/>
+          </a:p>
+        </p:txBody>
+      </p:sp>
+      <p:sp>
+        <p:nvSpPr>
+          <p:cNvPr id="15" name="Oval 14">
+            <a:extLst>
+              <a:ext uri="{FF2B5EF4-FFF2-40B4-BE49-F238E27FC236}">
+                <a16:creationId xmlns:a16="http://schemas.microsoft.com/office/drawing/2014/main" id="{8A032505-6E17-7506-CFCC-754DE502D91C}"/>
+              </a:ext>
+            </a:extLst>
+          </p:cNvPr>
+          <p:cNvSpPr/>
+          <p:nvPr/>
+        </p:nvSpPr>
+        <p:spPr>
+          <a:xfrm>
+            <a:off x="7174707" y="2229087"/>
+            <a:ext cx="98696" cy="98696"/>
+          </a:xfrm>
+          <a:prstGeom prst="ellipse">
+            <a:avLst/>
+          </a:prstGeom>
+          <a:solidFill>
+            <a:schemeClr val="tx1"/>
+          </a:solidFill>
+          <a:ln>
+            <a:noFill/>
+          </a:ln>
+        </p:spPr>
+        <p:style>
+          <a:lnRef idx="2">
+            <a:schemeClr val="accent1">
+              <a:shade val="15000"/>
+            </a:schemeClr>
+          </a:lnRef>
+          <a:fillRef idx="1">
+            <a:schemeClr val="accent1"/>
+          </a:fillRef>
+          <a:effectRef idx="0">
+            <a:schemeClr val="accent1"/>
+          </a:effectRef>
+          <a:fontRef idx="minor">
+            <a:schemeClr val="lt1"/>
+          </a:fontRef>
+        </p:style>
+        <p:txBody>
+          <a:bodyPr rtlCol="0" anchor="ctr"/>
+          <a:lstStyle/>
+          <a:p>
+            <a:pPr algn="ctr"/>
+            <a:endParaRPr lang="en-IN"/>
+          </a:p>
+        </p:txBody>
+      </p:sp>
+      <mc:AlternateContent xmlns:mc="http://schemas.openxmlformats.org/markup-compatibility/2006">
+        <mc:Choice xmlns:a14="http://schemas.microsoft.com/office/drawing/2010/main" Requires="a14">
+          <p:sp>
+            <p:nvSpPr>
+              <p:cNvPr id="22" name="TextBox 21">
+                <a:extLst>
+                  <a:ext uri="{FF2B5EF4-FFF2-40B4-BE49-F238E27FC236}">
+                    <a16:creationId xmlns:a16="http://schemas.microsoft.com/office/drawing/2014/main" id="{A60EBDAC-91F0-F2CF-BC5B-FDDAE6EF6811}"/>
+                  </a:ext>
+                </a:extLst>
+              </p:cNvPr>
+              <p:cNvSpPr txBox="1"/>
+              <p:nvPr/>
+            </p:nvSpPr>
+            <p:spPr>
+              <a:xfrm>
+                <a:off x="3183960" y="1455010"/>
+                <a:ext cx="222112" cy="307777"/>
+              </a:xfrm>
+              <a:prstGeom prst="rect">
+                <a:avLst/>
+              </a:prstGeom>
+              <a:noFill/>
+            </p:spPr>
+            <p:txBody>
+              <a:bodyPr wrap="none" lIns="0" tIns="0" rIns="0" bIns="0" rtlCol="0">
+                <a:spAutoFit/>
+              </a:bodyPr>
+              <a:lstStyle/>
+              <a:p>
+                <a:pPr/>
+                <a14:m>
+                  <m:oMathPara xmlns:m="http://schemas.openxmlformats.org/officeDocument/2006/math">
+                    <m:oMath>
+                      <m:r>
+                        <a:rPr lang="en-US" sz="2000" b="0" i="1" smtClean="0">
+                          <a:latin typeface="Cambria Math" panose="02040503050406030204" pitchFamily="18" charset="0"/>
+                        </a:rPr>
+                        <m:t>𝐴</m:t>
+                      </m:r>
+                    </m:oMath>
+                  </m:oMathPara>
+                </a14:m>
+                <a:endParaRPr lang="en-US" sz="2000" dirty="0"/>
+              </a:p>
+            </p:txBody>
+          </p:sp>
+        </mc:Choice>
+        <mc:Fallback>
+          <p:sp>
+            <p:nvSpPr>
+              <p:cNvPr id="22" name="TextBox 21">
+                <a:extLst>
+                  <a:ext uri="{FF2B5EF4-FFF2-40B4-BE49-F238E27FC236}">
+                    <a16:creationId xmlns:a16="http://schemas.microsoft.com/office/drawing/2014/main" id="{A60EBDAC-91F0-F2CF-BC5B-FDDAE6EF6811}"/>
+                  </a:ext>
+                </a:extLst>
+              </p:cNvPr>
+              <p:cNvSpPr txBox="1">
+                <a:spLocks noRot="1" noChangeAspect="1" noMove="1" noResize="1" noEditPoints="1" noAdjustHandles="1" noChangeArrowheads="1" noChangeShapeType="1" noTextEdit="1"/>
+              </p:cNvSpPr>
+              <p:nvPr/>
+            </p:nvSpPr>
+            <p:spPr>
+              <a:xfrm>
+                <a:off x="3183960" y="1455010"/>
+                <a:ext cx="222112" cy="307777"/>
+              </a:xfrm>
+              <a:prstGeom prst="rect">
+                <a:avLst/>
+              </a:prstGeom>
+              <a:blipFill>
+                <a:blip r:embed="rId5"/>
+                <a:stretch>
+                  <a:fillRect l="-24324" r="-27027" b="-6000"/>
+                </a:stretch>
+              </a:blipFill>
+            </p:spPr>
+            <p:txBody>
+              <a:bodyPr/>
+              <a:lstStyle/>
+              <a:p>
+                <a:r>
+                  <a:rPr lang="en-IN">
+                    <a:noFill/>
+                  </a:rPr>
+                  <a:t> </a:t>
+                </a:r>
+              </a:p>
+            </p:txBody>
+          </p:sp>
+        </mc:Fallback>
+      </mc:AlternateContent>
+      <mc:AlternateContent xmlns:mc="http://schemas.openxmlformats.org/markup-compatibility/2006">
+        <mc:Choice xmlns:a14="http://schemas.microsoft.com/office/drawing/2010/main" Requires="a14">
+          <p:sp>
+            <p:nvSpPr>
+              <p:cNvPr id="24" name="TextBox 23">
+                <a:extLst>
+                  <a:ext uri="{FF2B5EF4-FFF2-40B4-BE49-F238E27FC236}">
+                    <a16:creationId xmlns:a16="http://schemas.microsoft.com/office/drawing/2014/main" id="{9246CEE5-01E3-8E71-424E-9D2C356FE737}"/>
+                  </a:ext>
+                </a:extLst>
+              </p:cNvPr>
+              <p:cNvSpPr txBox="1"/>
+              <p:nvPr/>
+            </p:nvSpPr>
+            <p:spPr>
+              <a:xfrm>
+                <a:off x="4427692" y="3694618"/>
+                <a:ext cx="232884" cy="307777"/>
+              </a:xfrm>
+              <a:prstGeom prst="rect">
+                <a:avLst/>
+              </a:prstGeom>
+              <a:noFill/>
+            </p:spPr>
+            <p:txBody>
+              <a:bodyPr wrap="none" lIns="0" tIns="0" rIns="0" bIns="0" rtlCol="0">
+                <a:spAutoFit/>
+              </a:bodyPr>
+              <a:lstStyle/>
+              <a:p>
+                <a:pPr/>
+                <a14:m>
+                  <m:oMathPara xmlns:m="http://schemas.openxmlformats.org/officeDocument/2006/math">
+                    <m:oMath>
+                      <m:r>
+                        <a:rPr lang="en-US" sz="2000" b="0" i="1" smtClean="0">
+                          <a:latin typeface="Cambria Math" panose="02040503050406030204" pitchFamily="18" charset="0"/>
+                        </a:rPr>
+                        <m:t>𝐵</m:t>
+                      </m:r>
+                    </m:oMath>
+                  </m:oMathPara>
+                </a14:m>
+                <a:endParaRPr lang="en-US" sz="2000" dirty="0"/>
+              </a:p>
+            </p:txBody>
+          </p:sp>
+        </mc:Choice>
+        <mc:Fallback>
+          <p:sp>
+            <p:nvSpPr>
+              <p:cNvPr id="24" name="TextBox 23">
+                <a:extLst>
+                  <a:ext uri="{FF2B5EF4-FFF2-40B4-BE49-F238E27FC236}">
+                    <a16:creationId xmlns:a16="http://schemas.microsoft.com/office/drawing/2014/main" id="{9246CEE5-01E3-8E71-424E-9D2C356FE737}"/>
+                  </a:ext>
+                </a:extLst>
+              </p:cNvPr>
+              <p:cNvSpPr txBox="1">
+                <a:spLocks noRot="1" noChangeAspect="1" noMove="1" noResize="1" noEditPoints="1" noAdjustHandles="1" noChangeArrowheads="1" noChangeShapeType="1" noTextEdit="1"/>
+              </p:cNvSpPr>
+              <p:nvPr/>
+            </p:nvSpPr>
+            <p:spPr>
+              <a:xfrm>
+                <a:off x="4427692" y="3694618"/>
+                <a:ext cx="232884" cy="307777"/>
+              </a:xfrm>
+              <a:prstGeom prst="rect">
+                <a:avLst/>
+              </a:prstGeom>
+              <a:blipFill>
+                <a:blip r:embed="rId6"/>
+                <a:stretch>
+                  <a:fillRect l="-23077" r="-23077" b="-5882"/>
+                </a:stretch>
+              </a:blipFill>
+            </p:spPr>
+            <p:txBody>
+              <a:bodyPr/>
+              <a:lstStyle/>
+              <a:p>
+                <a:r>
+                  <a:rPr lang="en-IN">
+                    <a:noFill/>
+                  </a:rPr>
+                  <a:t> </a:t>
+                </a:r>
+              </a:p>
+            </p:txBody>
+          </p:sp>
+        </mc:Fallback>
+      </mc:AlternateContent>
+      <mc:AlternateContent xmlns:mc="http://schemas.openxmlformats.org/markup-compatibility/2006">
+        <mc:Choice xmlns:a14="http://schemas.microsoft.com/office/drawing/2010/main" Requires="a14">
+          <p:sp>
+            <p:nvSpPr>
+              <p:cNvPr id="26" name="TextBox 25">
+                <a:extLst>
+                  <a:ext uri="{FF2B5EF4-FFF2-40B4-BE49-F238E27FC236}">
+                    <a16:creationId xmlns:a16="http://schemas.microsoft.com/office/drawing/2014/main" id="{A9147D8C-2E9E-DE9E-0590-76D8D4CF8085}"/>
+                  </a:ext>
+                </a:extLst>
+              </p:cNvPr>
+              <p:cNvSpPr txBox="1"/>
+              <p:nvPr/>
+            </p:nvSpPr>
+            <p:spPr>
+              <a:xfrm>
+                <a:off x="5302120" y="2335760"/>
+                <a:ext cx="221278" cy="307777"/>
+              </a:xfrm>
+              <a:prstGeom prst="rect">
+                <a:avLst/>
+              </a:prstGeom>
+              <a:noFill/>
+            </p:spPr>
+            <p:txBody>
+              <a:bodyPr wrap="none" lIns="0" tIns="0" rIns="0" bIns="0" rtlCol="0">
+                <a:spAutoFit/>
+              </a:bodyPr>
+              <a:lstStyle/>
+              <a:p>
+                <a:pPr/>
+                <a14:m>
+                  <m:oMathPara xmlns:m="http://schemas.openxmlformats.org/officeDocument/2006/math">
+                    <m:oMath>
+                      <m:r>
+                        <a:rPr lang="en-US" sz="2000" b="0" i="1" smtClean="0">
+                          <a:latin typeface="Cambria Math" panose="02040503050406030204" pitchFamily="18" charset="0"/>
+                        </a:rPr>
+                        <m:t>𝐶</m:t>
+                      </m:r>
+                    </m:oMath>
+                  </m:oMathPara>
+                </a14:m>
+                <a:endParaRPr lang="en-US" sz="2000" dirty="0"/>
+              </a:p>
+            </p:txBody>
+          </p:sp>
+        </mc:Choice>
+        <mc:Fallback>
+          <p:sp>
+            <p:nvSpPr>
+              <p:cNvPr id="26" name="TextBox 25">
+                <a:extLst>
+                  <a:ext uri="{FF2B5EF4-FFF2-40B4-BE49-F238E27FC236}">
+                    <a16:creationId xmlns:a16="http://schemas.microsoft.com/office/drawing/2014/main" id="{A9147D8C-2E9E-DE9E-0590-76D8D4CF8085}"/>
+                  </a:ext>
+                </a:extLst>
+              </p:cNvPr>
+              <p:cNvSpPr txBox="1">
+                <a:spLocks noRot="1" noChangeAspect="1" noMove="1" noResize="1" noEditPoints="1" noAdjustHandles="1" noChangeArrowheads="1" noChangeShapeType="1" noTextEdit="1"/>
+              </p:cNvSpPr>
+              <p:nvPr/>
+            </p:nvSpPr>
+            <p:spPr>
+              <a:xfrm>
+                <a:off x="5302120" y="2335760"/>
+                <a:ext cx="221278" cy="307777"/>
+              </a:xfrm>
+              <a:prstGeom prst="rect">
+                <a:avLst/>
+              </a:prstGeom>
+              <a:blipFill>
+                <a:blip r:embed="rId7"/>
+                <a:stretch>
+                  <a:fillRect l="-27778" r="-22222" b="-5882"/>
+                </a:stretch>
+              </a:blipFill>
+            </p:spPr>
+            <p:txBody>
+              <a:bodyPr/>
+              <a:lstStyle/>
+              <a:p>
+                <a:r>
+                  <a:rPr lang="en-IN">
+                    <a:noFill/>
+                  </a:rPr>
+                  <a:t> </a:t>
+                </a:r>
+              </a:p>
+            </p:txBody>
+          </p:sp>
+        </mc:Fallback>
+      </mc:AlternateContent>
+      <mc:AlternateContent xmlns:mc="http://schemas.openxmlformats.org/markup-compatibility/2006">
+        <mc:Choice xmlns:a14="http://schemas.microsoft.com/office/drawing/2010/main" Requires="a14">
+          <p:sp>
+            <p:nvSpPr>
+              <p:cNvPr id="28" name="TextBox 27">
+                <a:extLst>
+                  <a:ext uri="{FF2B5EF4-FFF2-40B4-BE49-F238E27FC236}">
+                    <a16:creationId xmlns:a16="http://schemas.microsoft.com/office/drawing/2014/main" id="{00E323BD-306C-B8AC-C339-39F27267F3E8}"/>
+                  </a:ext>
+                </a:extLst>
+              </p:cNvPr>
+              <p:cNvSpPr txBox="1"/>
+              <p:nvPr/>
+            </p:nvSpPr>
+            <p:spPr>
+              <a:xfrm>
+                <a:off x="6159717" y="3186476"/>
+                <a:ext cx="243143" cy="307777"/>
+              </a:xfrm>
+              <a:prstGeom prst="rect">
+                <a:avLst/>
+              </a:prstGeom>
+              <a:noFill/>
+            </p:spPr>
+            <p:txBody>
+              <a:bodyPr wrap="none" lIns="0" tIns="0" rIns="0" bIns="0" rtlCol="0">
+                <a:spAutoFit/>
+              </a:bodyPr>
+              <a:lstStyle/>
+              <a:p>
+                <a:pPr/>
+                <a14:m>
+                  <m:oMathPara xmlns:m="http://schemas.openxmlformats.org/officeDocument/2006/math">
+                    <m:oMath>
+                      <m:r>
+                        <a:rPr lang="en-US" sz="2000" b="0" i="1" smtClean="0">
+                          <a:latin typeface="Cambria Math" panose="02040503050406030204" pitchFamily="18" charset="0"/>
+                        </a:rPr>
+                        <m:t>𝐷</m:t>
+                      </m:r>
+                    </m:oMath>
+                  </m:oMathPara>
+                </a14:m>
+                <a:endParaRPr lang="en-US" sz="2000" dirty="0"/>
+              </a:p>
+            </p:txBody>
+          </p:sp>
+        </mc:Choice>
+        <mc:Fallback>
+          <p:sp>
+            <p:nvSpPr>
+              <p:cNvPr id="28" name="TextBox 27">
+                <a:extLst>
+                  <a:ext uri="{FF2B5EF4-FFF2-40B4-BE49-F238E27FC236}">
+                    <a16:creationId xmlns:a16="http://schemas.microsoft.com/office/drawing/2014/main" id="{00E323BD-306C-B8AC-C339-39F27267F3E8}"/>
+                  </a:ext>
+                </a:extLst>
+              </p:cNvPr>
+              <p:cNvSpPr txBox="1">
+                <a:spLocks noRot="1" noChangeAspect="1" noMove="1" noResize="1" noEditPoints="1" noAdjustHandles="1" noChangeArrowheads="1" noChangeShapeType="1" noTextEdit="1"/>
+              </p:cNvSpPr>
+              <p:nvPr/>
+            </p:nvSpPr>
+            <p:spPr>
+              <a:xfrm>
+                <a:off x="6159717" y="3186476"/>
+                <a:ext cx="243143" cy="307777"/>
+              </a:xfrm>
+              <a:prstGeom prst="rect">
+                <a:avLst/>
+              </a:prstGeom>
+              <a:blipFill>
+                <a:blip r:embed="rId8"/>
+                <a:stretch>
+                  <a:fillRect l="-22500" r="-22500" b="-6000"/>
+                </a:stretch>
+              </a:blipFill>
+            </p:spPr>
+            <p:txBody>
+              <a:bodyPr/>
+              <a:lstStyle/>
+              <a:p>
+                <a:r>
+                  <a:rPr lang="en-IN">
+                    <a:noFill/>
+                  </a:rPr>
+                  <a:t> </a:t>
+                </a:r>
+              </a:p>
+            </p:txBody>
+          </p:sp>
+        </mc:Fallback>
+      </mc:AlternateContent>
+      <mc:AlternateContent xmlns:mc="http://schemas.openxmlformats.org/markup-compatibility/2006">
+        <mc:Choice xmlns:a14="http://schemas.microsoft.com/office/drawing/2010/main" Requires="a14">
+          <p:sp>
+            <p:nvSpPr>
+              <p:cNvPr id="30" name="TextBox 29">
+                <a:extLst>
+                  <a:ext uri="{FF2B5EF4-FFF2-40B4-BE49-F238E27FC236}">
+                    <a16:creationId xmlns:a16="http://schemas.microsoft.com/office/drawing/2014/main" id="{4F072301-249C-42F0-41DB-5000CFBE0E40}"/>
+                  </a:ext>
+                </a:extLst>
+              </p:cNvPr>
+              <p:cNvSpPr txBox="1"/>
+              <p:nvPr/>
+            </p:nvSpPr>
+            <p:spPr>
+              <a:xfrm>
+                <a:off x="7109626" y="1917596"/>
+                <a:ext cx="228011" cy="307777"/>
+              </a:xfrm>
+              <a:prstGeom prst="rect">
+                <a:avLst/>
+              </a:prstGeom>
+              <a:noFill/>
+            </p:spPr>
+            <p:txBody>
+              <a:bodyPr wrap="none" lIns="0" tIns="0" rIns="0" bIns="0" rtlCol="0">
+                <a:spAutoFit/>
+              </a:bodyPr>
+              <a:lstStyle/>
+              <a:p>
+                <a:pPr/>
+                <a14:m>
+                  <m:oMathPara xmlns:m="http://schemas.openxmlformats.org/officeDocument/2006/math">
+                    <m:oMath>
+                      <m:r>
+                        <a:rPr lang="en-US" sz="2000" b="0" i="1" smtClean="0">
+                          <a:latin typeface="Cambria Math" panose="02040503050406030204" pitchFamily="18" charset="0"/>
+                        </a:rPr>
+                        <m:t>𝐸</m:t>
+                      </m:r>
+                    </m:oMath>
+                  </m:oMathPara>
+                </a14:m>
+                <a:endParaRPr lang="en-US" sz="2000" dirty="0"/>
+              </a:p>
+            </p:txBody>
+          </p:sp>
+        </mc:Choice>
+        <mc:Fallback>
+          <p:sp>
+            <p:nvSpPr>
+              <p:cNvPr id="30" name="TextBox 29">
+                <a:extLst>
+                  <a:ext uri="{FF2B5EF4-FFF2-40B4-BE49-F238E27FC236}">
+                    <a16:creationId xmlns:a16="http://schemas.microsoft.com/office/drawing/2014/main" id="{4F072301-249C-42F0-41DB-5000CFBE0E40}"/>
+                  </a:ext>
+                </a:extLst>
+              </p:cNvPr>
+              <p:cNvSpPr txBox="1">
+                <a:spLocks noRot="1" noChangeAspect="1" noMove="1" noResize="1" noEditPoints="1" noAdjustHandles="1" noChangeArrowheads="1" noChangeShapeType="1" noTextEdit="1"/>
+              </p:cNvSpPr>
+              <p:nvPr/>
+            </p:nvSpPr>
+            <p:spPr>
+              <a:xfrm>
+                <a:off x="7109626" y="1917596"/>
+                <a:ext cx="228011" cy="307777"/>
+              </a:xfrm>
+              <a:prstGeom prst="rect">
+                <a:avLst/>
+              </a:prstGeom>
+              <a:blipFill>
+                <a:blip r:embed="rId9"/>
+                <a:stretch>
+                  <a:fillRect l="-23684" r="-21053" b="-6000"/>
+                </a:stretch>
+              </a:blipFill>
+            </p:spPr>
+            <p:txBody>
+              <a:bodyPr/>
+              <a:lstStyle/>
+              <a:p>
+                <a:r>
+                  <a:rPr lang="en-IN">
+                    <a:noFill/>
+                  </a:rPr>
+                  <a:t> </a:t>
+                </a:r>
+              </a:p>
+            </p:txBody>
+          </p:sp>
+        </mc:Fallback>
+      </mc:AlternateContent>
+      <mc:AlternateContent xmlns:mc="http://schemas.openxmlformats.org/markup-compatibility/2006">
+        <mc:Choice xmlns:a14="http://schemas.microsoft.com/office/drawing/2010/main" Requires="a14">
+          <p:sp>
+            <p:nvSpPr>
+              <p:cNvPr id="50" name="TextBox 49">
+                <a:extLst>
+                  <a:ext uri="{FF2B5EF4-FFF2-40B4-BE49-F238E27FC236}">
+                    <a16:creationId xmlns:a16="http://schemas.microsoft.com/office/drawing/2014/main" id="{A0327905-90DA-B938-3052-8A8CE4D9260A}"/>
+                  </a:ext>
+                </a:extLst>
+              </p:cNvPr>
+              <p:cNvSpPr txBox="1"/>
+              <p:nvPr/>
+            </p:nvSpPr>
+            <p:spPr>
+              <a:xfrm>
+                <a:off x="3505200" y="3095625"/>
+                <a:ext cx="519758" cy="350609"/>
+              </a:xfrm>
+              <a:prstGeom prst="rect">
+                <a:avLst/>
+              </a:prstGeom>
+              <a:noFill/>
+            </p:spPr>
+            <p:txBody>
+              <a:bodyPr wrap="none" lIns="0" tIns="0" rIns="0" bIns="0" rtlCol="0">
+                <a:spAutoFit/>
+              </a:bodyPr>
+              <a:lstStyle/>
+              <a:p>
+                <a14:m>
+                  <m:oMathPara xmlns:m="http://schemas.openxmlformats.org/officeDocument/2006/math">
+                    <m:oMath>
+                      <m:f>
+                        <m:fPr>
+                          <m:ctrlPr>
+                            <a:rPr lang="en-IN" sz="1200" i="1" smtClean="0">
+                              <a:latin typeface="Cambria Math" panose="02040503050406030204" pitchFamily="18" charset="0"/>
+                            </a:rPr>
+                          </m:ctrlPr>
+                        </m:fPr>
+                        <m:num>
+                          <m:r>
+                            <a:rPr lang="en-IN" sz="1200" i="1" smtClean="0">
+                              <a:latin typeface="Cambria Math" panose="02040503050406030204" pitchFamily="18" charset="0"/>
+                            </a:rPr>
+                            <m:t>𝑑</m:t>
+                          </m:r>
+                          <m:r>
+                            <a:rPr lang="en-IN" sz="1200" b="0" i="1" smtClean="0">
+                              <a:latin typeface="Cambria Math" panose="02040503050406030204" pitchFamily="18" charset="0"/>
+                            </a:rPr>
+                            <m:t>𝑈</m:t>
+                          </m:r>
+                        </m:num>
+                        <m:den>
+                          <m:r>
+                            <a:rPr lang="en-IN" sz="1200" i="1" smtClean="0">
+                              <a:latin typeface="Cambria Math" panose="02040503050406030204" pitchFamily="18" charset="0"/>
+                            </a:rPr>
+                            <m:t>𝑑𝑥</m:t>
+                          </m:r>
+                        </m:den>
+                      </m:f>
+                      <m:r>
+                        <a:rPr lang="en-IN" sz="1200" b="0" i="1" smtClean="0">
+                          <a:latin typeface="Cambria Math" panose="02040503050406030204" pitchFamily="18" charset="0"/>
+                        </a:rPr>
+                        <m:t>&lt;0</m:t>
+                      </m:r>
+                    </m:oMath>
+                  </m:oMathPara>
+                </a14:m>
+                <a:endParaRPr lang="en-IN" sz="1200" dirty="0"/>
+              </a:p>
+            </p:txBody>
+          </p:sp>
+        </mc:Choice>
+        <mc:Fallback>
+          <p:sp>
+            <p:nvSpPr>
+              <p:cNvPr id="50" name="TextBox 49">
+                <a:extLst>
+                  <a:ext uri="{FF2B5EF4-FFF2-40B4-BE49-F238E27FC236}">
+                    <a16:creationId xmlns:a16="http://schemas.microsoft.com/office/drawing/2014/main" id="{A0327905-90DA-B938-3052-8A8CE4D9260A}"/>
+                  </a:ext>
+                </a:extLst>
+              </p:cNvPr>
+              <p:cNvSpPr txBox="1">
+                <a:spLocks noRot="1" noChangeAspect="1" noMove="1" noResize="1" noEditPoints="1" noAdjustHandles="1" noChangeArrowheads="1" noChangeShapeType="1" noTextEdit="1"/>
+              </p:cNvSpPr>
+              <p:nvPr/>
+            </p:nvSpPr>
+            <p:spPr>
+              <a:xfrm>
+                <a:off x="3505200" y="3095625"/>
+                <a:ext cx="519758" cy="350609"/>
+              </a:xfrm>
+              <a:prstGeom prst="rect">
+                <a:avLst/>
+              </a:prstGeom>
+              <a:blipFill>
+                <a:blip r:embed="rId10"/>
+                <a:stretch>
+                  <a:fillRect l="-7059" t="-3509" r="-7059" b="-15789"/>
+                </a:stretch>
+              </a:blipFill>
+            </p:spPr>
+            <p:txBody>
+              <a:bodyPr/>
+              <a:lstStyle/>
+              <a:p>
+                <a:r>
+                  <a:rPr lang="en-IN">
+                    <a:noFill/>
+                  </a:rPr>
+                  <a:t> </a:t>
+                </a:r>
+              </a:p>
+            </p:txBody>
+          </p:sp>
+        </mc:Fallback>
+      </mc:AlternateContent>
+      <mc:AlternateContent xmlns:mc="http://schemas.openxmlformats.org/markup-compatibility/2006">
+        <mc:Choice xmlns:a14="http://schemas.microsoft.com/office/drawing/2010/main" Requires="a14">
+          <p:sp>
+            <p:nvSpPr>
+              <p:cNvPr id="52" name="TextBox 51">
+                <a:extLst>
+                  <a:ext uri="{FF2B5EF4-FFF2-40B4-BE49-F238E27FC236}">
+                    <a16:creationId xmlns:a16="http://schemas.microsoft.com/office/drawing/2014/main" id="{DB97FE80-2220-EB38-048C-32E8C0275257}"/>
+                  </a:ext>
+                </a:extLst>
+              </p:cNvPr>
+              <p:cNvSpPr txBox="1"/>
+              <p:nvPr/>
+            </p:nvSpPr>
+            <p:spPr>
+              <a:xfrm>
+                <a:off x="4629150" y="2667000"/>
+                <a:ext cx="519758" cy="350609"/>
+              </a:xfrm>
+              <a:prstGeom prst="rect">
+                <a:avLst/>
+              </a:prstGeom>
+              <a:noFill/>
+            </p:spPr>
+            <p:txBody>
+              <a:bodyPr wrap="none" lIns="0" tIns="0" rIns="0" bIns="0" rtlCol="0">
+                <a:spAutoFit/>
+              </a:bodyPr>
+              <a:lstStyle/>
+              <a:p>
+                <a:pPr/>
+                <a14:m>
+                  <m:oMathPara xmlns:m="http://schemas.openxmlformats.org/officeDocument/2006/math">
+                    <m:oMath>
+                      <m:f>
+                        <m:fPr>
+                          <m:ctrlPr>
+                            <a:rPr lang="en-IN" sz="1200" i="1" smtClean="0">
+                              <a:latin typeface="Cambria Math" panose="02040503050406030204" pitchFamily="18" charset="0"/>
+                            </a:rPr>
+                          </m:ctrlPr>
+                        </m:fPr>
+                        <m:num>
+                          <m:r>
+                            <a:rPr lang="en-IN" sz="1200" i="1" smtClean="0">
+                              <a:latin typeface="Cambria Math" panose="02040503050406030204" pitchFamily="18" charset="0"/>
+                            </a:rPr>
+                            <m:t>𝑑</m:t>
+                          </m:r>
+                          <m:r>
+                            <a:rPr lang="en-IN" sz="1200" b="0" i="1" smtClean="0">
+                              <a:latin typeface="Cambria Math" panose="02040503050406030204" pitchFamily="18" charset="0"/>
+                            </a:rPr>
+                            <m:t>𝑈</m:t>
+                          </m:r>
+                        </m:num>
+                        <m:den>
+                          <m:r>
+                            <a:rPr lang="en-IN" sz="1200" i="1" smtClean="0">
+                              <a:latin typeface="Cambria Math" panose="02040503050406030204" pitchFamily="18" charset="0"/>
+                            </a:rPr>
+                            <m:t>𝑑𝑥</m:t>
+                          </m:r>
+                        </m:den>
+                      </m:f>
+                      <m:r>
+                        <a:rPr lang="en-IN" sz="1200" b="0" i="1" smtClean="0">
+                          <a:latin typeface="Cambria Math" panose="02040503050406030204" pitchFamily="18" charset="0"/>
+                        </a:rPr>
+                        <m:t>&gt;</m:t>
+                      </m:r>
+                      <m:r>
+                        <a:rPr lang="en-IN" sz="1200" b="0" i="1" smtClean="0">
+                          <a:latin typeface="Cambria Math" panose="02040503050406030204" pitchFamily="18" charset="0"/>
+                        </a:rPr>
+                        <m:t>0</m:t>
+                      </m:r>
+                    </m:oMath>
+                  </m:oMathPara>
+                </a14:m>
+                <a:endParaRPr lang="en-IN" sz="1200" dirty="0"/>
+              </a:p>
+            </p:txBody>
+          </p:sp>
+        </mc:Choice>
+        <mc:Fallback>
+          <p:sp>
+            <p:nvSpPr>
+              <p:cNvPr id="52" name="TextBox 51">
+                <a:extLst>
+                  <a:ext uri="{FF2B5EF4-FFF2-40B4-BE49-F238E27FC236}">
+                    <a16:creationId xmlns:a16="http://schemas.microsoft.com/office/drawing/2014/main" id="{DB97FE80-2220-EB38-048C-32E8C0275257}"/>
+                  </a:ext>
+                </a:extLst>
+              </p:cNvPr>
+              <p:cNvSpPr txBox="1">
+                <a:spLocks noRot="1" noChangeAspect="1" noMove="1" noResize="1" noEditPoints="1" noAdjustHandles="1" noChangeArrowheads="1" noChangeShapeType="1" noTextEdit="1"/>
+              </p:cNvSpPr>
+              <p:nvPr/>
+            </p:nvSpPr>
+            <p:spPr>
+              <a:xfrm>
+                <a:off x="4629150" y="2667000"/>
+                <a:ext cx="519758" cy="350609"/>
+              </a:xfrm>
+              <a:prstGeom prst="rect">
+                <a:avLst/>
+              </a:prstGeom>
+              <a:blipFill>
+                <a:blip r:embed="rId11"/>
+                <a:stretch>
+                  <a:fillRect l="-6977" t="-3509" r="-5814" b="-15789"/>
+                </a:stretch>
+              </a:blipFill>
+            </p:spPr>
+            <p:txBody>
+              <a:bodyPr/>
+              <a:lstStyle/>
+              <a:p>
+                <a:r>
+                  <a:rPr lang="en-IN">
+                    <a:noFill/>
+                  </a:rPr>
+                  <a:t> </a:t>
+                </a:r>
+              </a:p>
+            </p:txBody>
+          </p:sp>
+        </mc:Fallback>
+      </mc:AlternateContent>
+      <mc:AlternateContent xmlns:mc="http://schemas.openxmlformats.org/markup-compatibility/2006">
+        <mc:Choice xmlns:a14="http://schemas.microsoft.com/office/drawing/2010/main" Requires="a14">
+          <p:sp>
+            <p:nvSpPr>
+              <p:cNvPr id="53" name="TextBox 52">
+                <a:extLst>
+                  <a:ext uri="{FF2B5EF4-FFF2-40B4-BE49-F238E27FC236}">
+                    <a16:creationId xmlns:a16="http://schemas.microsoft.com/office/drawing/2014/main" id="{DF798538-D55A-5790-DA4D-2492BC503E41}"/>
+                  </a:ext>
+                </a:extLst>
+              </p:cNvPr>
+              <p:cNvSpPr txBox="1"/>
+              <p:nvPr/>
+            </p:nvSpPr>
+            <p:spPr>
+              <a:xfrm>
+                <a:off x="6351183" y="2314575"/>
+                <a:ext cx="519758" cy="350609"/>
+              </a:xfrm>
+              <a:prstGeom prst="rect">
+                <a:avLst/>
+              </a:prstGeom>
+              <a:noFill/>
+            </p:spPr>
+            <p:txBody>
+              <a:bodyPr wrap="none" lIns="0" tIns="0" rIns="0" bIns="0" rtlCol="0">
+                <a:spAutoFit/>
+              </a:bodyPr>
+              <a:lstStyle/>
+              <a:p>
+                <a:pPr/>
+                <a14:m>
+                  <m:oMathPara xmlns:m="http://schemas.openxmlformats.org/officeDocument/2006/math">
+                    <m:oMath>
+                      <m:f>
+                        <m:fPr>
+                          <m:ctrlPr>
+                            <a:rPr lang="en-IN" sz="1200" i="1" smtClean="0">
+                              <a:latin typeface="Cambria Math" panose="02040503050406030204" pitchFamily="18" charset="0"/>
+                            </a:rPr>
+                          </m:ctrlPr>
+                        </m:fPr>
+                        <m:num>
+                          <m:r>
+                            <a:rPr lang="en-IN" sz="1200" i="1" smtClean="0">
+                              <a:latin typeface="Cambria Math" panose="02040503050406030204" pitchFamily="18" charset="0"/>
+                            </a:rPr>
+                            <m:t>𝑑</m:t>
+                          </m:r>
+                          <m:r>
+                            <a:rPr lang="en-IN" sz="1200" b="0" i="1" smtClean="0">
+                              <a:latin typeface="Cambria Math" panose="02040503050406030204" pitchFamily="18" charset="0"/>
+                            </a:rPr>
+                            <m:t>𝑈</m:t>
+                          </m:r>
+                        </m:num>
+                        <m:den>
+                          <m:r>
+                            <a:rPr lang="en-IN" sz="1200" i="1" smtClean="0">
+                              <a:latin typeface="Cambria Math" panose="02040503050406030204" pitchFamily="18" charset="0"/>
+                            </a:rPr>
+                            <m:t>𝑑𝑥</m:t>
+                          </m:r>
+                        </m:den>
+                      </m:f>
+                      <m:r>
+                        <a:rPr lang="en-IN" sz="1200" b="0" i="1" smtClean="0">
+                          <a:latin typeface="Cambria Math" panose="02040503050406030204" pitchFamily="18" charset="0"/>
+                        </a:rPr>
+                        <m:t>&gt;</m:t>
+                      </m:r>
+                      <m:r>
+                        <a:rPr lang="en-IN" sz="1200" b="0" i="1" smtClean="0">
+                          <a:latin typeface="Cambria Math" panose="02040503050406030204" pitchFamily="18" charset="0"/>
+                        </a:rPr>
+                        <m:t>0</m:t>
+                      </m:r>
+                    </m:oMath>
+                  </m:oMathPara>
+                </a14:m>
+                <a:endParaRPr lang="en-IN" sz="1200" dirty="0"/>
+              </a:p>
+            </p:txBody>
+          </p:sp>
+        </mc:Choice>
+        <mc:Fallback>
+          <p:sp>
+            <p:nvSpPr>
+              <p:cNvPr id="53" name="TextBox 52">
+                <a:extLst>
+                  <a:ext uri="{FF2B5EF4-FFF2-40B4-BE49-F238E27FC236}">
+                    <a16:creationId xmlns:a16="http://schemas.microsoft.com/office/drawing/2014/main" id="{DF798538-D55A-5790-DA4D-2492BC503E41}"/>
+                  </a:ext>
+                </a:extLst>
+              </p:cNvPr>
+              <p:cNvSpPr txBox="1">
+                <a:spLocks noRot="1" noChangeAspect="1" noMove="1" noResize="1" noEditPoints="1" noAdjustHandles="1" noChangeArrowheads="1" noChangeShapeType="1" noTextEdit="1"/>
+              </p:cNvSpPr>
+              <p:nvPr/>
+            </p:nvSpPr>
+            <p:spPr>
+              <a:xfrm>
+                <a:off x="6351183" y="2314575"/>
+                <a:ext cx="519758" cy="350609"/>
+              </a:xfrm>
+              <a:prstGeom prst="rect">
+                <a:avLst/>
+              </a:prstGeom>
+              <a:blipFill>
+                <a:blip r:embed="rId12"/>
+                <a:stretch>
+                  <a:fillRect l="-8235" t="-3509" r="-7059" b="-15789"/>
+                </a:stretch>
+              </a:blipFill>
+            </p:spPr>
+            <p:txBody>
+              <a:bodyPr/>
+              <a:lstStyle/>
+              <a:p>
+                <a:r>
+                  <a:rPr lang="en-IN">
+                    <a:noFill/>
+                  </a:rPr>
+                  <a:t> </a:t>
+                </a:r>
+              </a:p>
+            </p:txBody>
+          </p:sp>
+        </mc:Fallback>
+      </mc:AlternateContent>
+      <mc:AlternateContent xmlns:mc="http://schemas.openxmlformats.org/markup-compatibility/2006">
+        <mc:Choice xmlns:a14="http://schemas.microsoft.com/office/drawing/2010/main" Requires="a14">
+          <p:sp>
+            <p:nvSpPr>
+              <p:cNvPr id="54" name="TextBox 53">
+                <a:extLst>
+                  <a:ext uri="{FF2B5EF4-FFF2-40B4-BE49-F238E27FC236}">
+                    <a16:creationId xmlns:a16="http://schemas.microsoft.com/office/drawing/2014/main" id="{CE2B5EED-7849-78DC-8A8C-49F156B44627}"/>
+                  </a:ext>
+                </a:extLst>
+              </p:cNvPr>
+              <p:cNvSpPr txBox="1"/>
+              <p:nvPr/>
+            </p:nvSpPr>
+            <p:spPr>
+              <a:xfrm>
+                <a:off x="5584063" y="3389084"/>
+                <a:ext cx="519758" cy="350609"/>
+              </a:xfrm>
+              <a:prstGeom prst="rect">
+                <a:avLst/>
+              </a:prstGeom>
+              <a:noFill/>
+            </p:spPr>
+            <p:txBody>
+              <a:bodyPr wrap="none" lIns="0" tIns="0" rIns="0" bIns="0" rtlCol="0">
+                <a:spAutoFit/>
+              </a:bodyPr>
+              <a:lstStyle/>
+              <a:p>
+                <a14:m>
+                  <m:oMathPara xmlns:m="http://schemas.openxmlformats.org/officeDocument/2006/math">
+                    <m:oMath>
+                      <m:f>
+                        <m:fPr>
+                          <m:ctrlPr>
+                            <a:rPr lang="en-IN" sz="1200" i="1" smtClean="0">
+                              <a:latin typeface="Cambria Math" panose="02040503050406030204" pitchFamily="18" charset="0"/>
+                            </a:rPr>
+                          </m:ctrlPr>
+                        </m:fPr>
+                        <m:num>
+                          <m:r>
+                            <a:rPr lang="en-IN" sz="1200" i="1" smtClean="0">
+                              <a:latin typeface="Cambria Math" panose="02040503050406030204" pitchFamily="18" charset="0"/>
+                            </a:rPr>
+                            <m:t>𝑑</m:t>
+                          </m:r>
+                          <m:r>
+                            <a:rPr lang="en-IN" sz="1200" b="0" i="1" smtClean="0">
+                              <a:latin typeface="Cambria Math" panose="02040503050406030204" pitchFamily="18" charset="0"/>
+                            </a:rPr>
+                            <m:t>𝑈</m:t>
+                          </m:r>
+                        </m:num>
+                        <m:den>
+                          <m:r>
+                            <a:rPr lang="en-IN" sz="1200" i="1" smtClean="0">
+                              <a:latin typeface="Cambria Math" panose="02040503050406030204" pitchFamily="18" charset="0"/>
+                            </a:rPr>
+                            <m:t>𝑑𝑥</m:t>
+                          </m:r>
+                        </m:den>
+                      </m:f>
+                      <m:r>
+                        <a:rPr lang="en-IN" sz="1200" b="0" i="1" smtClean="0">
+                          <a:latin typeface="Cambria Math" panose="02040503050406030204" pitchFamily="18" charset="0"/>
+                        </a:rPr>
+                        <m:t>&lt;0</m:t>
+                      </m:r>
+                    </m:oMath>
+                  </m:oMathPara>
+                </a14:m>
+                <a:endParaRPr lang="en-IN" sz="1200" dirty="0"/>
+              </a:p>
+            </p:txBody>
+          </p:sp>
+        </mc:Choice>
+        <mc:Fallback>
+          <p:sp>
+            <p:nvSpPr>
+              <p:cNvPr id="54" name="TextBox 53">
+                <a:extLst>
+                  <a:ext uri="{FF2B5EF4-FFF2-40B4-BE49-F238E27FC236}">
+                    <a16:creationId xmlns:a16="http://schemas.microsoft.com/office/drawing/2014/main" id="{CE2B5EED-7849-78DC-8A8C-49F156B44627}"/>
+                  </a:ext>
+                </a:extLst>
+              </p:cNvPr>
+              <p:cNvSpPr txBox="1">
+                <a:spLocks noRot="1" noChangeAspect="1" noMove="1" noResize="1" noEditPoints="1" noAdjustHandles="1" noChangeArrowheads="1" noChangeShapeType="1" noTextEdit="1"/>
+              </p:cNvSpPr>
+              <p:nvPr/>
+            </p:nvSpPr>
+            <p:spPr>
+              <a:xfrm>
+                <a:off x="5584063" y="3389084"/>
+                <a:ext cx="519758" cy="350609"/>
+              </a:xfrm>
+              <a:prstGeom prst="rect">
+                <a:avLst/>
+              </a:prstGeom>
+              <a:blipFill>
+                <a:blip r:embed="rId10"/>
+                <a:stretch>
+                  <a:fillRect l="-7059" t="-3509" r="-7059" b="-15789"/>
+                </a:stretch>
+              </a:blipFill>
+            </p:spPr>
+            <p:txBody>
+              <a:bodyPr/>
+              <a:lstStyle/>
+              <a:p>
+                <a:r>
+                  <a:rPr lang="en-IN">
+                    <a:noFill/>
+                  </a:rPr>
+                  <a:t> </a:t>
+                </a:r>
+              </a:p>
+            </p:txBody>
+          </p:sp>
+        </mc:Fallback>
+      </mc:AlternateContent>
+      <p:cxnSp>
+        <p:nvCxnSpPr>
+          <p:cNvPr id="57" name="Straight Arrow Connector 56">
+            <a:extLst>
+              <a:ext uri="{FF2B5EF4-FFF2-40B4-BE49-F238E27FC236}">
+                <a16:creationId xmlns:a16="http://schemas.microsoft.com/office/drawing/2014/main" id="{423E56BB-B570-ED74-F18F-F5AE8564A37C}"/>
+              </a:ext>
+            </a:extLst>
+          </p:cNvPr>
+          <p:cNvCxnSpPr>
+            <a:cxnSpLocks/>
+          </p:cNvCxnSpPr>
+          <p:nvPr/>
+        </p:nvCxnSpPr>
+        <p:spPr>
+          <a:xfrm>
+            <a:off x="3505200" y="4739694"/>
+            <a:ext cx="781050" cy="0"/>
+          </a:xfrm>
+          <a:prstGeom prst="straightConnector1">
+            <a:avLst/>
+          </a:prstGeom>
+          <a:ln w="28575" cap="rnd">
+            <a:solidFill>
+              <a:srgbClr val="003A00"/>
+            </a:solidFill>
+            <a:round/>
+            <a:tailEnd type="triangle" w="lg" len="lg"/>
+          </a:ln>
+        </p:spPr>
+        <p:style>
+          <a:lnRef idx="1">
+            <a:schemeClr val="accent1"/>
+          </a:lnRef>
+          <a:fillRef idx="0">
+            <a:schemeClr val="accent1"/>
+          </a:fillRef>
+          <a:effectRef idx="0">
+            <a:schemeClr val="accent1"/>
+          </a:effectRef>
+          <a:fontRef idx="minor">
+            <a:schemeClr val="tx1"/>
+          </a:fontRef>
+        </p:style>
+      </p:cxnSp>
+      <p:cxnSp>
+        <p:nvCxnSpPr>
+          <p:cNvPr id="61" name="Straight Arrow Connector 60">
+            <a:extLst>
+              <a:ext uri="{FF2B5EF4-FFF2-40B4-BE49-F238E27FC236}">
+                <a16:creationId xmlns:a16="http://schemas.microsoft.com/office/drawing/2014/main" id="{4133C77F-7E28-BA67-485C-E3B1454CF738}"/>
+              </a:ext>
+            </a:extLst>
+          </p:cNvPr>
+          <p:cNvCxnSpPr>
+            <a:cxnSpLocks/>
+          </p:cNvCxnSpPr>
+          <p:nvPr/>
+        </p:nvCxnSpPr>
+        <p:spPr>
+          <a:xfrm flipH="1">
+            <a:off x="4660576" y="4739694"/>
+            <a:ext cx="584084" cy="0"/>
+          </a:xfrm>
+          <a:prstGeom prst="straightConnector1">
+            <a:avLst/>
+          </a:prstGeom>
+          <a:ln w="28575" cap="rnd">
+            <a:solidFill>
+              <a:srgbClr val="003A00"/>
+            </a:solidFill>
+            <a:round/>
+            <a:tailEnd type="triangle" w="lg" len="lg"/>
+          </a:ln>
+        </p:spPr>
+        <p:style>
+          <a:lnRef idx="1">
+            <a:schemeClr val="accent1"/>
+          </a:lnRef>
+          <a:fillRef idx="0">
+            <a:schemeClr val="accent1"/>
+          </a:fillRef>
+          <a:effectRef idx="0">
+            <a:schemeClr val="accent1"/>
+          </a:effectRef>
+          <a:fontRef idx="minor">
+            <a:schemeClr val="tx1"/>
+          </a:fontRef>
+        </p:style>
+      </p:cxnSp>
+      <p:cxnSp>
+        <p:nvCxnSpPr>
+          <p:cNvPr id="64" name="Straight Arrow Connector 63">
+            <a:extLst>
+              <a:ext uri="{FF2B5EF4-FFF2-40B4-BE49-F238E27FC236}">
+                <a16:creationId xmlns:a16="http://schemas.microsoft.com/office/drawing/2014/main" id="{35BD1271-645E-3482-6632-59C99BD7B60A}"/>
+              </a:ext>
+            </a:extLst>
+          </p:cNvPr>
+          <p:cNvCxnSpPr>
+            <a:cxnSpLocks/>
+          </p:cNvCxnSpPr>
+          <p:nvPr/>
+        </p:nvCxnSpPr>
+        <p:spPr>
+          <a:xfrm>
+            <a:off x="5554206" y="4739694"/>
+            <a:ext cx="605511" cy="0"/>
+          </a:xfrm>
+          <a:prstGeom prst="straightConnector1">
+            <a:avLst/>
+          </a:prstGeom>
+          <a:ln w="28575" cap="rnd">
+            <a:solidFill>
+              <a:srgbClr val="003A00"/>
+            </a:solidFill>
+            <a:round/>
+            <a:tailEnd type="triangle" w="lg" len="lg"/>
+          </a:ln>
+        </p:spPr>
+        <p:style>
+          <a:lnRef idx="1">
+            <a:schemeClr val="accent1"/>
+          </a:lnRef>
+          <a:fillRef idx="0">
+            <a:schemeClr val="accent1"/>
+          </a:fillRef>
+          <a:effectRef idx="0">
+            <a:schemeClr val="accent1"/>
+          </a:effectRef>
+          <a:fontRef idx="minor">
+            <a:schemeClr val="tx1"/>
+          </a:fontRef>
+        </p:style>
+      </p:cxnSp>
+      <p:cxnSp>
+        <p:nvCxnSpPr>
+          <p:cNvPr id="66" name="Straight Arrow Connector 65">
+            <a:extLst>
+              <a:ext uri="{FF2B5EF4-FFF2-40B4-BE49-F238E27FC236}">
+                <a16:creationId xmlns:a16="http://schemas.microsoft.com/office/drawing/2014/main" id="{6D37049D-30AE-163E-A114-001AE1211DC9}"/>
+              </a:ext>
+            </a:extLst>
+          </p:cNvPr>
+          <p:cNvCxnSpPr>
+            <a:cxnSpLocks/>
+          </p:cNvCxnSpPr>
+          <p:nvPr/>
+        </p:nvCxnSpPr>
+        <p:spPr>
+          <a:xfrm flipH="1">
+            <a:off x="6402860" y="4739694"/>
+            <a:ext cx="706766" cy="0"/>
+          </a:xfrm>
+          <a:prstGeom prst="straightConnector1">
+            <a:avLst/>
+          </a:prstGeom>
+          <a:ln w="28575" cap="rnd">
+            <a:solidFill>
+              <a:srgbClr val="003A00"/>
+            </a:solidFill>
+            <a:round/>
+            <a:tailEnd type="triangle" w="lg" len="lg"/>
+          </a:ln>
+        </p:spPr>
+        <p:style>
+          <a:lnRef idx="1">
+            <a:schemeClr val="accent1"/>
+          </a:lnRef>
+          <a:fillRef idx="0">
+            <a:schemeClr val="accent1"/>
+          </a:fillRef>
+          <a:effectRef idx="0">
+            <a:schemeClr val="accent1"/>
+          </a:effectRef>
+          <a:fontRef idx="minor">
+            <a:schemeClr val="tx1"/>
+          </a:fontRef>
+        </p:style>
+      </p:cxnSp>
+      <mc:AlternateContent xmlns:mc="http://schemas.openxmlformats.org/markup-compatibility/2006">
+        <mc:Choice xmlns:a14="http://schemas.microsoft.com/office/drawing/2010/main" Requires="a14">
+          <p:sp>
+            <p:nvSpPr>
+              <p:cNvPr id="70" name="TextBox 69">
+                <a:extLst>
+                  <a:ext uri="{FF2B5EF4-FFF2-40B4-BE49-F238E27FC236}">
+                    <a16:creationId xmlns:a16="http://schemas.microsoft.com/office/drawing/2014/main" id="{E701D75F-E8F7-1F18-07E5-82317C19F22C}"/>
+                  </a:ext>
+                </a:extLst>
+              </p:cNvPr>
+              <p:cNvSpPr txBox="1"/>
+              <p:nvPr/>
+            </p:nvSpPr>
+            <p:spPr>
+              <a:xfrm>
+                <a:off x="3649657" y="4411359"/>
+                <a:ext cx="421782" cy="184666"/>
+              </a:xfrm>
+              <a:prstGeom prst="rect">
+                <a:avLst/>
+              </a:prstGeom>
+              <a:noFill/>
+            </p:spPr>
+            <p:txBody>
+              <a:bodyPr wrap="none" lIns="0" tIns="0" rIns="0" bIns="0" rtlCol="0">
+                <a:spAutoFit/>
+              </a:bodyPr>
+              <a:lstStyle/>
+              <a:p>
+                <a:pPr/>
+                <a14:m>
+                  <m:oMathPara xmlns:m="http://schemas.openxmlformats.org/officeDocument/2006/math">
+                    <m:oMath>
+                      <m:r>
+                        <a:rPr lang="en-IN" sz="1200" b="0" i="1" smtClean="0">
+                          <a:latin typeface="Cambria Math" panose="02040503050406030204" pitchFamily="18" charset="0"/>
+                        </a:rPr>
+                        <m:t>𝐹</m:t>
+                      </m:r>
+                      <m:r>
+                        <a:rPr lang="en-IN" sz="1200" b="0" i="1" smtClean="0">
+                          <a:latin typeface="Cambria Math" panose="02040503050406030204" pitchFamily="18" charset="0"/>
+                        </a:rPr>
+                        <m:t>&gt;0</m:t>
+                      </m:r>
+                    </m:oMath>
+                  </m:oMathPara>
+                </a14:m>
+                <a:endParaRPr lang="en-IN" sz="1200" dirty="0"/>
+              </a:p>
+            </p:txBody>
+          </p:sp>
+        </mc:Choice>
+        <mc:Fallback>
+          <p:sp>
+            <p:nvSpPr>
+              <p:cNvPr id="70" name="TextBox 69">
+                <a:extLst>
+                  <a:ext uri="{FF2B5EF4-FFF2-40B4-BE49-F238E27FC236}">
+                    <a16:creationId xmlns:a16="http://schemas.microsoft.com/office/drawing/2014/main" id="{E701D75F-E8F7-1F18-07E5-82317C19F22C}"/>
+                  </a:ext>
+                </a:extLst>
+              </p:cNvPr>
+              <p:cNvSpPr txBox="1">
+                <a:spLocks noRot="1" noChangeAspect="1" noMove="1" noResize="1" noEditPoints="1" noAdjustHandles="1" noChangeArrowheads="1" noChangeShapeType="1" noTextEdit="1"/>
+              </p:cNvSpPr>
+              <p:nvPr/>
+            </p:nvSpPr>
+            <p:spPr>
+              <a:xfrm>
+                <a:off x="3649657" y="4411359"/>
+                <a:ext cx="421782" cy="184666"/>
+              </a:xfrm>
+              <a:prstGeom prst="rect">
+                <a:avLst/>
+              </a:prstGeom>
+              <a:blipFill>
+                <a:blip r:embed="rId13"/>
+                <a:stretch>
+                  <a:fillRect l="-8696" r="-8696" b="-6667"/>
+                </a:stretch>
+              </a:blipFill>
+            </p:spPr>
+            <p:txBody>
+              <a:bodyPr/>
+              <a:lstStyle/>
+              <a:p>
+                <a:r>
+                  <a:rPr lang="en-IN">
+                    <a:noFill/>
+                  </a:rPr>
+                  <a:t> </a:t>
+                </a:r>
+              </a:p>
+            </p:txBody>
+          </p:sp>
+        </mc:Fallback>
+      </mc:AlternateContent>
+      <mc:AlternateContent xmlns:mc="http://schemas.openxmlformats.org/markup-compatibility/2006">
+        <mc:Choice xmlns:a14="http://schemas.microsoft.com/office/drawing/2010/main" Requires="a14">
+          <p:sp>
+            <p:nvSpPr>
+              <p:cNvPr id="71" name="TextBox 70">
+                <a:extLst>
+                  <a:ext uri="{FF2B5EF4-FFF2-40B4-BE49-F238E27FC236}">
+                    <a16:creationId xmlns:a16="http://schemas.microsoft.com/office/drawing/2014/main" id="{7B5885EE-0BC4-8478-6A01-620C12047AA2}"/>
+                  </a:ext>
+                </a:extLst>
+              </p:cNvPr>
+              <p:cNvSpPr txBox="1"/>
+              <p:nvPr/>
+            </p:nvSpPr>
+            <p:spPr>
+              <a:xfrm>
+                <a:off x="4777765" y="4411359"/>
+                <a:ext cx="421782" cy="184666"/>
+              </a:xfrm>
+              <a:prstGeom prst="rect">
+                <a:avLst/>
+              </a:prstGeom>
+              <a:noFill/>
+            </p:spPr>
+            <p:txBody>
+              <a:bodyPr wrap="none" lIns="0" tIns="0" rIns="0" bIns="0" rtlCol="0">
+                <a:spAutoFit/>
+              </a:bodyPr>
+              <a:lstStyle/>
+              <a:p>
+                <a:pPr/>
+                <a14:m>
+                  <m:oMathPara xmlns:m="http://schemas.openxmlformats.org/officeDocument/2006/math">
+                    <m:oMath>
+                      <m:r>
+                        <a:rPr lang="en-IN" sz="1200" b="0" i="1" smtClean="0">
+                          <a:latin typeface="Cambria Math" panose="02040503050406030204" pitchFamily="18" charset="0"/>
+                        </a:rPr>
+                        <m:t>𝐹</m:t>
+                      </m:r>
+                      <m:r>
+                        <a:rPr lang="en-IN" sz="1200" b="0" i="1" smtClean="0">
+                          <a:latin typeface="Cambria Math" panose="02040503050406030204" pitchFamily="18" charset="0"/>
+                        </a:rPr>
+                        <m:t>&lt;0</m:t>
+                      </m:r>
+                    </m:oMath>
+                  </m:oMathPara>
+                </a14:m>
+                <a:endParaRPr lang="en-IN" sz="1200" dirty="0"/>
+              </a:p>
+            </p:txBody>
+          </p:sp>
+        </mc:Choice>
+        <mc:Fallback>
+          <p:sp>
+            <p:nvSpPr>
+              <p:cNvPr id="71" name="TextBox 70">
+                <a:extLst>
+                  <a:ext uri="{FF2B5EF4-FFF2-40B4-BE49-F238E27FC236}">
+                    <a16:creationId xmlns:a16="http://schemas.microsoft.com/office/drawing/2014/main" id="{7B5885EE-0BC4-8478-6A01-620C12047AA2}"/>
+                  </a:ext>
+                </a:extLst>
+              </p:cNvPr>
+              <p:cNvSpPr txBox="1">
+                <a:spLocks noRot="1" noChangeAspect="1" noMove="1" noResize="1" noEditPoints="1" noAdjustHandles="1" noChangeArrowheads="1" noChangeShapeType="1" noTextEdit="1"/>
+              </p:cNvSpPr>
+              <p:nvPr/>
+            </p:nvSpPr>
+            <p:spPr>
+              <a:xfrm>
+                <a:off x="4777765" y="4411359"/>
+                <a:ext cx="421782" cy="184666"/>
+              </a:xfrm>
+              <a:prstGeom prst="rect">
+                <a:avLst/>
+              </a:prstGeom>
+              <a:blipFill>
+                <a:blip r:embed="rId14"/>
+                <a:stretch>
+                  <a:fillRect l="-8696" r="-8696" b="-6667"/>
+                </a:stretch>
+              </a:blipFill>
+            </p:spPr>
+            <p:txBody>
+              <a:bodyPr/>
+              <a:lstStyle/>
+              <a:p>
+                <a:r>
+                  <a:rPr lang="en-IN">
+                    <a:noFill/>
+                  </a:rPr>
+                  <a:t> </a:t>
+                </a:r>
+              </a:p>
+            </p:txBody>
+          </p:sp>
+        </mc:Fallback>
+      </mc:AlternateContent>
+      <mc:AlternateContent xmlns:mc="http://schemas.openxmlformats.org/markup-compatibility/2006">
+        <mc:Choice xmlns:a14="http://schemas.microsoft.com/office/drawing/2010/main" Requires="a14">
+          <p:sp>
+            <p:nvSpPr>
+              <p:cNvPr id="72" name="TextBox 71">
+                <a:extLst>
+                  <a:ext uri="{FF2B5EF4-FFF2-40B4-BE49-F238E27FC236}">
+                    <a16:creationId xmlns:a16="http://schemas.microsoft.com/office/drawing/2014/main" id="{87A0725F-0125-2873-DDF5-C80787FD39FD}"/>
+                  </a:ext>
+                </a:extLst>
+              </p:cNvPr>
+              <p:cNvSpPr txBox="1"/>
+              <p:nvPr/>
+            </p:nvSpPr>
+            <p:spPr>
+              <a:xfrm>
+                <a:off x="5630366" y="4411359"/>
+                <a:ext cx="421782" cy="184666"/>
+              </a:xfrm>
+              <a:prstGeom prst="rect">
+                <a:avLst/>
+              </a:prstGeom>
+              <a:noFill/>
+            </p:spPr>
+            <p:txBody>
+              <a:bodyPr wrap="none" lIns="0" tIns="0" rIns="0" bIns="0" rtlCol="0">
+                <a:spAutoFit/>
+              </a:bodyPr>
+              <a:lstStyle/>
+              <a:p>
+                <a:pPr/>
+                <a14:m>
+                  <m:oMathPara xmlns:m="http://schemas.openxmlformats.org/officeDocument/2006/math">
+                    <m:oMath>
+                      <m:r>
+                        <a:rPr lang="en-IN" sz="1200" b="0" i="1" smtClean="0">
+                          <a:latin typeface="Cambria Math" panose="02040503050406030204" pitchFamily="18" charset="0"/>
+                        </a:rPr>
+                        <m:t>𝐹</m:t>
+                      </m:r>
+                      <m:r>
+                        <a:rPr lang="en-IN" sz="1200" b="0" i="1" smtClean="0">
+                          <a:latin typeface="Cambria Math" panose="02040503050406030204" pitchFamily="18" charset="0"/>
+                        </a:rPr>
+                        <m:t>&gt;0</m:t>
+                      </m:r>
+                    </m:oMath>
+                  </m:oMathPara>
+                </a14:m>
+                <a:endParaRPr lang="en-IN" sz="1200" dirty="0"/>
+              </a:p>
+            </p:txBody>
+          </p:sp>
+        </mc:Choice>
+        <mc:Fallback>
+          <p:sp>
+            <p:nvSpPr>
+              <p:cNvPr id="72" name="TextBox 71">
+                <a:extLst>
+                  <a:ext uri="{FF2B5EF4-FFF2-40B4-BE49-F238E27FC236}">
+                    <a16:creationId xmlns:a16="http://schemas.microsoft.com/office/drawing/2014/main" id="{87A0725F-0125-2873-DDF5-C80787FD39FD}"/>
+                  </a:ext>
+                </a:extLst>
+              </p:cNvPr>
+              <p:cNvSpPr txBox="1">
+                <a:spLocks noRot="1" noChangeAspect="1" noMove="1" noResize="1" noEditPoints="1" noAdjustHandles="1" noChangeArrowheads="1" noChangeShapeType="1" noTextEdit="1"/>
+              </p:cNvSpPr>
+              <p:nvPr/>
+            </p:nvSpPr>
+            <p:spPr>
+              <a:xfrm>
+                <a:off x="5630366" y="4411359"/>
+                <a:ext cx="421782" cy="184666"/>
+              </a:xfrm>
+              <a:prstGeom prst="rect">
+                <a:avLst/>
+              </a:prstGeom>
+              <a:blipFill>
+                <a:blip r:embed="rId13"/>
+                <a:stretch>
+                  <a:fillRect l="-8696" r="-8696" b="-6667"/>
+                </a:stretch>
+              </a:blipFill>
+            </p:spPr>
+            <p:txBody>
+              <a:bodyPr/>
+              <a:lstStyle/>
+              <a:p>
+                <a:r>
+                  <a:rPr lang="en-IN">
+                    <a:noFill/>
+                  </a:rPr>
+                  <a:t> </a:t>
+                </a:r>
+              </a:p>
+            </p:txBody>
+          </p:sp>
+        </mc:Fallback>
+      </mc:AlternateContent>
+      <mc:AlternateContent xmlns:mc="http://schemas.openxmlformats.org/markup-compatibility/2006">
+        <mc:Choice xmlns:a14="http://schemas.microsoft.com/office/drawing/2010/main" Requires="a14">
+          <p:sp>
+            <p:nvSpPr>
+              <p:cNvPr id="73" name="TextBox 72">
+                <a:extLst>
+                  <a:ext uri="{FF2B5EF4-FFF2-40B4-BE49-F238E27FC236}">
+                    <a16:creationId xmlns:a16="http://schemas.microsoft.com/office/drawing/2014/main" id="{047DC9DD-F66C-68D5-50D8-1E347C82C95B}"/>
+                  </a:ext>
+                </a:extLst>
+              </p:cNvPr>
+              <p:cNvSpPr txBox="1"/>
+              <p:nvPr/>
+            </p:nvSpPr>
+            <p:spPr>
+              <a:xfrm>
+                <a:off x="6573024" y="4411359"/>
+                <a:ext cx="421782" cy="184666"/>
+              </a:xfrm>
+              <a:prstGeom prst="rect">
+                <a:avLst/>
+              </a:prstGeom>
+              <a:noFill/>
+            </p:spPr>
+            <p:txBody>
+              <a:bodyPr wrap="none" lIns="0" tIns="0" rIns="0" bIns="0" rtlCol="0">
+                <a:spAutoFit/>
+              </a:bodyPr>
+              <a:lstStyle/>
+              <a:p>
+                <a:pPr/>
+                <a14:m>
+                  <m:oMathPara xmlns:m="http://schemas.openxmlformats.org/officeDocument/2006/math">
+                    <m:oMath>
+                      <m:r>
+                        <a:rPr lang="en-IN" sz="1200" b="0" i="1" smtClean="0">
+                          <a:latin typeface="Cambria Math" panose="02040503050406030204" pitchFamily="18" charset="0"/>
+                        </a:rPr>
+                        <m:t>𝐹</m:t>
+                      </m:r>
+                      <m:r>
+                        <a:rPr lang="en-IN" sz="1200" b="0" i="1" smtClean="0">
+                          <a:latin typeface="Cambria Math" panose="02040503050406030204" pitchFamily="18" charset="0"/>
+                        </a:rPr>
+                        <m:t>&lt;0</m:t>
+                      </m:r>
+                    </m:oMath>
+                  </m:oMathPara>
+                </a14:m>
+                <a:endParaRPr lang="en-IN" sz="1200" dirty="0"/>
+              </a:p>
+            </p:txBody>
+          </p:sp>
+        </mc:Choice>
+        <mc:Fallback>
+          <p:sp>
+            <p:nvSpPr>
+              <p:cNvPr id="73" name="TextBox 72">
+                <a:extLst>
+                  <a:ext uri="{FF2B5EF4-FFF2-40B4-BE49-F238E27FC236}">
+                    <a16:creationId xmlns:a16="http://schemas.microsoft.com/office/drawing/2014/main" id="{047DC9DD-F66C-68D5-50D8-1E347C82C95B}"/>
+                  </a:ext>
+                </a:extLst>
+              </p:cNvPr>
+              <p:cNvSpPr txBox="1">
+                <a:spLocks noRot="1" noChangeAspect="1" noMove="1" noResize="1" noEditPoints="1" noAdjustHandles="1" noChangeArrowheads="1" noChangeShapeType="1" noTextEdit="1"/>
+              </p:cNvSpPr>
+              <p:nvPr/>
+            </p:nvSpPr>
+            <p:spPr>
+              <a:xfrm>
+                <a:off x="6573024" y="4411359"/>
+                <a:ext cx="421782" cy="184666"/>
+              </a:xfrm>
+              <a:prstGeom prst="rect">
+                <a:avLst/>
+              </a:prstGeom>
+              <a:blipFill>
+                <a:blip r:embed="rId14"/>
+                <a:stretch>
+                  <a:fillRect l="-8696" r="-8696" b="-6667"/>
+                </a:stretch>
+              </a:blipFill>
+            </p:spPr>
+            <p:txBody>
+              <a:bodyPr/>
+              <a:lstStyle/>
+              <a:p>
+                <a:r>
+                  <a:rPr lang="en-IN">
+                    <a:noFill/>
+                  </a:rPr>
+                  <a:t> </a:t>
+                </a:r>
+              </a:p>
+            </p:txBody>
+          </p:sp>
+        </mc:Fallback>
+      </mc:AlternateContent>
+    </p:spTree>
+    <p:extLst>
+      <p:ext uri="{BB962C8B-B14F-4D97-AF65-F5344CB8AC3E}">
+        <p14:creationId xmlns:p14="http://schemas.microsoft.com/office/powerpoint/2010/main" val="2388451525"/>
+      </p:ext>
+    </p:extLst>
+  </p:cSld>
+  <p:clrMapOvr>
+    <a:masterClrMapping/>
+  </p:clrMapOvr>
+</p:sld>
+</file>
+
+<file path=ppt/slides/slide12.xml><?xml version="1.0" encoding="utf-8"?>
+<p:sld xmlns:a="http://schemas.openxmlformats.org/drawingml/2006/main" xmlns:r="http://schemas.openxmlformats.org/officeDocument/2006/relationships" xmlns:p="http://schemas.openxmlformats.org/presentationml/2006/main">
+  <p:cSld>
+    <p:spTree>
+      <p:nvGrpSpPr>
+        <p:cNvPr id="1" name="">
+          <a:extLst>
+            <a:ext uri="{FF2B5EF4-FFF2-40B4-BE49-F238E27FC236}">
+              <a16:creationId xmlns:a16="http://schemas.microsoft.com/office/drawing/2014/main" id="{8111C22C-1130-C3BB-303B-81B50F97E439}"/>
+            </a:ext>
+          </a:extLst>
+        </p:cNvPr>
+        <p:cNvGrpSpPr/>
+        <p:nvPr/>
+      </p:nvGrpSpPr>
+      <p:grpSpPr>
+        <a:xfrm>
+          <a:off x="0" y="0"/>
+          <a:ext cx="0" cy="0"/>
+          <a:chOff x="0" y="0"/>
+          <a:chExt cx="0" cy="0"/>
+        </a:xfrm>
+      </p:grpSpPr>
+      <p:cxnSp>
+        <p:nvCxnSpPr>
+          <p:cNvPr id="31" name="Straight Connector 30">
+            <a:extLst>
+              <a:ext uri="{FF2B5EF4-FFF2-40B4-BE49-F238E27FC236}">
+                <a16:creationId xmlns:a16="http://schemas.microsoft.com/office/drawing/2014/main" id="{F5DCEC93-AA6C-05AA-B54F-4BDD4DBAF8A6}"/>
+              </a:ext>
+            </a:extLst>
+          </p:cNvPr>
+          <p:cNvCxnSpPr>
+            <a:cxnSpLocks/>
+          </p:cNvCxnSpPr>
+          <p:nvPr/>
+        </p:nvCxnSpPr>
+        <p:spPr>
+          <a:xfrm flipV="1">
+            <a:off x="8800310" y="3446234"/>
+            <a:ext cx="0" cy="1813889"/>
+          </a:xfrm>
+          <a:prstGeom prst="line">
+            <a:avLst/>
+          </a:prstGeom>
+          <a:ln w="28575" cap="rnd">
+            <a:solidFill>
+              <a:schemeClr val="tx1">
+                <a:lumMod val="75000"/>
+                <a:lumOff val="25000"/>
+              </a:schemeClr>
+            </a:solidFill>
+            <a:prstDash val="dash"/>
+            <a:round/>
+          </a:ln>
+        </p:spPr>
+        <p:style>
+          <a:lnRef idx="1">
+            <a:schemeClr val="accent1"/>
+          </a:lnRef>
+          <a:fillRef idx="0">
+            <a:schemeClr val="accent1"/>
+          </a:fillRef>
+          <a:effectRef idx="0">
+            <a:schemeClr val="accent1"/>
+          </a:effectRef>
+          <a:fontRef idx="minor">
+            <a:schemeClr val="tx1"/>
+          </a:fontRef>
+        </p:style>
+      </p:cxnSp>
+      <p:cxnSp>
+        <p:nvCxnSpPr>
+          <p:cNvPr id="40" name="Straight Connector 39">
+            <a:extLst>
+              <a:ext uri="{FF2B5EF4-FFF2-40B4-BE49-F238E27FC236}">
+                <a16:creationId xmlns:a16="http://schemas.microsoft.com/office/drawing/2014/main" id="{651C4CDE-9A41-2D65-FC7C-FBA74C7878AD}"/>
+              </a:ext>
+            </a:extLst>
+          </p:cNvPr>
+          <p:cNvCxnSpPr>
+            <a:cxnSpLocks/>
+          </p:cNvCxnSpPr>
+          <p:nvPr/>
+        </p:nvCxnSpPr>
+        <p:spPr>
+          <a:xfrm flipV="1">
+            <a:off x="7289010" y="3446234"/>
+            <a:ext cx="0" cy="1813889"/>
+          </a:xfrm>
+          <a:prstGeom prst="line">
+            <a:avLst/>
+          </a:prstGeom>
+          <a:ln w="28575" cap="rnd">
+            <a:solidFill>
+              <a:schemeClr val="tx1">
+                <a:lumMod val="75000"/>
+                <a:lumOff val="25000"/>
+              </a:schemeClr>
+            </a:solidFill>
+            <a:prstDash val="dash"/>
+            <a:round/>
+          </a:ln>
+        </p:spPr>
+        <p:style>
+          <a:lnRef idx="1">
+            <a:schemeClr val="accent1"/>
+          </a:lnRef>
+          <a:fillRef idx="0">
+            <a:schemeClr val="accent1"/>
+          </a:fillRef>
+          <a:effectRef idx="0">
+            <a:schemeClr val="accent1"/>
+          </a:effectRef>
+          <a:fontRef idx="minor">
+            <a:schemeClr val="tx1"/>
+          </a:fontRef>
+        </p:style>
+      </p:cxnSp>
+      <p:cxnSp>
+        <p:nvCxnSpPr>
+          <p:cNvPr id="34" name="Straight Connector 33">
+            <a:extLst>
+              <a:ext uri="{FF2B5EF4-FFF2-40B4-BE49-F238E27FC236}">
+                <a16:creationId xmlns:a16="http://schemas.microsoft.com/office/drawing/2014/main" id="{E64FD253-7DD1-8597-CFA3-BBFC1074B5DE}"/>
+              </a:ext>
+            </a:extLst>
+          </p:cNvPr>
+          <p:cNvCxnSpPr>
+            <a:cxnSpLocks/>
+          </p:cNvCxnSpPr>
+          <p:nvPr/>
+        </p:nvCxnSpPr>
+        <p:spPr>
+          <a:xfrm flipV="1">
+            <a:off x="6029325" y="1912144"/>
+            <a:ext cx="0" cy="3347190"/>
+          </a:xfrm>
+          <a:prstGeom prst="line">
+            <a:avLst/>
+          </a:prstGeom>
+          <a:ln w="28575" cap="rnd">
+            <a:solidFill>
+              <a:schemeClr val="tx1">
+                <a:lumMod val="75000"/>
+                <a:lumOff val="25000"/>
+              </a:schemeClr>
+            </a:solidFill>
+            <a:prstDash val="dash"/>
+            <a:round/>
+          </a:ln>
+        </p:spPr>
+        <p:style>
+          <a:lnRef idx="1">
+            <a:schemeClr val="accent1"/>
+          </a:lnRef>
+          <a:fillRef idx="0">
+            <a:schemeClr val="accent1"/>
+          </a:fillRef>
+          <a:effectRef idx="0">
+            <a:schemeClr val="accent1"/>
+          </a:effectRef>
+          <a:fontRef idx="minor">
+            <a:schemeClr val="tx1"/>
+          </a:fontRef>
+        </p:style>
+      </p:cxnSp>
+      <p:cxnSp>
+        <p:nvCxnSpPr>
+          <p:cNvPr id="32" name="Straight Connector 31">
+            <a:extLst>
+              <a:ext uri="{FF2B5EF4-FFF2-40B4-BE49-F238E27FC236}">
+                <a16:creationId xmlns:a16="http://schemas.microsoft.com/office/drawing/2014/main" id="{647162D5-BD77-3FFB-4BEF-758E06DD534B}"/>
+              </a:ext>
+            </a:extLst>
+          </p:cNvPr>
+          <p:cNvCxnSpPr>
+            <a:cxnSpLocks/>
+          </p:cNvCxnSpPr>
+          <p:nvPr/>
+        </p:nvCxnSpPr>
+        <p:spPr>
+          <a:xfrm flipV="1">
+            <a:off x="4318470" y="4051300"/>
+            <a:ext cx="0" cy="1204119"/>
+          </a:xfrm>
+          <a:prstGeom prst="line">
+            <a:avLst/>
+          </a:prstGeom>
+          <a:ln w="28575" cap="rnd">
+            <a:solidFill>
+              <a:schemeClr val="tx1">
+                <a:lumMod val="75000"/>
+                <a:lumOff val="25000"/>
+              </a:schemeClr>
+            </a:solidFill>
+            <a:prstDash val="dash"/>
+            <a:round/>
+          </a:ln>
+        </p:spPr>
+        <p:style>
+          <a:lnRef idx="1">
+            <a:schemeClr val="accent1"/>
+          </a:lnRef>
+          <a:fillRef idx="0">
+            <a:schemeClr val="accent1"/>
+          </a:fillRef>
+          <a:effectRef idx="0">
+            <a:schemeClr val="accent1"/>
+          </a:effectRef>
+          <a:fontRef idx="minor">
+            <a:schemeClr val="tx1"/>
+          </a:fontRef>
+        </p:style>
+      </p:cxnSp>
+      <p:sp>
+        <p:nvSpPr>
+          <p:cNvPr id="2" name="Freeform: Shape 1">
+            <a:extLst>
+              <a:ext uri="{FF2B5EF4-FFF2-40B4-BE49-F238E27FC236}">
+                <a16:creationId xmlns:a16="http://schemas.microsoft.com/office/drawing/2014/main" id="{057D8950-4A3E-7A88-E7A0-5D5E23C4028D}"/>
+              </a:ext>
+            </a:extLst>
+          </p:cNvPr>
+          <p:cNvSpPr/>
+          <p:nvPr/>
+        </p:nvSpPr>
+        <p:spPr>
+          <a:xfrm>
+            <a:off x="3167364" y="1873704"/>
+            <a:ext cx="6202027" cy="2180309"/>
+          </a:xfrm>
+          <a:custGeom>
+            <a:avLst/>
+            <a:gdLst>
+              <a:gd name="csX0" fmla="*/ 0 w 4086933"/>
+              <a:gd name="csY0" fmla="*/ 547891 h 2180309"/>
+              <a:gd name="csX1" fmla="*/ 796392 w 4086933"/>
+              <a:gd name="csY1" fmla="*/ 2174097 h 2180309"/>
+              <a:gd name="csX2" fmla="*/ 1856221 w 4086933"/>
+              <a:gd name="csY2" fmla="*/ 4303 h 2180309"/>
+              <a:gd name="csX3" fmla="*/ 2738455 w 4086933"/>
+              <a:gd name="csY3" fmla="*/ 1574714 h 2180309"/>
+              <a:gd name="csX4" fmla="*/ 3692049 w 4086933"/>
+              <a:gd name="csY4" fmla="*/ 1575932 h 2180309"/>
+              <a:gd name="csX5" fmla="*/ 4086933 w 4086933"/>
+              <a:gd name="csY5" fmla="*/ 558047 h 2180309"/>
+            </a:gdLst>
+            <a:ahLst/>
+            <a:cxnLst>
+              <a:cxn ang="0">
+                <a:pos x="csX0" y="csY0"/>
+              </a:cxn>
+              <a:cxn ang="0">
+                <a:pos x="csX1" y="csY1"/>
+              </a:cxn>
+              <a:cxn ang="0">
+                <a:pos x="csX2" y="csY2"/>
+              </a:cxn>
+              <a:cxn ang="0">
+                <a:pos x="csX3" y="csY3"/>
+              </a:cxn>
+              <a:cxn ang="0">
+                <a:pos x="csX4" y="csY4"/>
+              </a:cxn>
+              <a:cxn ang="0">
+                <a:pos x="csX5" y="csY5"/>
+              </a:cxn>
+            </a:cxnLst>
+            <a:rect l="l" t="t" r="r" b="b"/>
+            <a:pathLst>
+              <a:path w="4086933" h="2180309">
+                <a:moveTo>
+                  <a:pt x="0" y="547891"/>
+                </a:moveTo>
+                <a:cubicBezTo>
+                  <a:pt x="347858" y="1347086"/>
+                  <a:pt x="487022" y="2264695"/>
+                  <a:pt x="796392" y="2174097"/>
+                </a:cubicBezTo>
+                <a:cubicBezTo>
+                  <a:pt x="1105762" y="2083499"/>
+                  <a:pt x="1532544" y="104200"/>
+                  <a:pt x="1856221" y="4303"/>
+                </a:cubicBezTo>
+                <a:cubicBezTo>
+                  <a:pt x="2179898" y="-95594"/>
+                  <a:pt x="2407377" y="1577094"/>
+                  <a:pt x="2738455" y="1574714"/>
+                </a:cubicBezTo>
+                <a:lnTo>
+                  <a:pt x="3692049" y="1575932"/>
+                </a:lnTo>
+                <a:cubicBezTo>
+                  <a:pt x="3959163" y="1575557"/>
+                  <a:pt x="4057646" y="717111"/>
+                  <a:pt x="4086933" y="558047"/>
+                </a:cubicBezTo>
+              </a:path>
+            </a:pathLst>
+          </a:custGeom>
+          <a:noFill/>
+          <a:ln w="38100" cap="rnd">
+            <a:solidFill>
+              <a:schemeClr val="accent1">
+                <a:lumMod val="75000"/>
+              </a:schemeClr>
+            </a:solidFill>
+            <a:round/>
+          </a:ln>
+        </p:spPr>
+        <p:style>
+          <a:lnRef idx="2">
+            <a:schemeClr val="accent1">
+              <a:shade val="15000"/>
+            </a:schemeClr>
+          </a:lnRef>
+          <a:fillRef idx="1">
+            <a:schemeClr val="accent1"/>
+          </a:fillRef>
+          <a:effectRef idx="0">
+            <a:schemeClr val="accent1"/>
+          </a:effectRef>
+          <a:fontRef idx="minor">
+            <a:schemeClr val="lt1"/>
+          </a:fontRef>
+        </p:style>
+        <p:txBody>
+          <a:bodyPr rtlCol="0" anchor="ctr"/>
+          <a:lstStyle/>
+          <a:p>
+            <a:pPr algn="ctr"/>
+            <a:endParaRPr lang="en-IN" dirty="0"/>
+          </a:p>
+        </p:txBody>
+      </p:sp>
+      <p:cxnSp>
+        <p:nvCxnSpPr>
+          <p:cNvPr id="8" name="Straight Connector 7">
+            <a:extLst>
+              <a:ext uri="{FF2B5EF4-FFF2-40B4-BE49-F238E27FC236}">
+                <a16:creationId xmlns:a16="http://schemas.microsoft.com/office/drawing/2014/main" id="{0E6D6E11-84A0-2E13-EE8B-E543DC96237D}"/>
+              </a:ext>
+            </a:extLst>
+          </p:cNvPr>
+          <p:cNvCxnSpPr>
+            <a:cxnSpLocks/>
+          </p:cNvCxnSpPr>
+          <p:nvPr/>
+        </p:nvCxnSpPr>
+        <p:spPr>
+          <a:xfrm>
+            <a:off x="6940550" y="3448615"/>
+            <a:ext cx="2168525" cy="0"/>
+          </a:xfrm>
+          <a:prstGeom prst="line">
+            <a:avLst/>
+          </a:prstGeom>
+          <a:ln w="19050" cap="rnd">
+            <a:solidFill>
+              <a:srgbClr val="C00000"/>
+            </a:solidFill>
+            <a:round/>
+          </a:ln>
+        </p:spPr>
+        <p:style>
+          <a:lnRef idx="1">
+            <a:schemeClr val="accent1"/>
+          </a:lnRef>
+          <a:fillRef idx="0">
+            <a:schemeClr val="accent1"/>
+          </a:fillRef>
+          <a:effectRef idx="0">
+            <a:schemeClr val="accent1"/>
+          </a:effectRef>
+          <a:fontRef idx="minor">
+            <a:schemeClr val="tx1"/>
+          </a:fontRef>
+        </p:style>
+      </p:cxnSp>
+      <p:cxnSp>
+        <p:nvCxnSpPr>
+          <p:cNvPr id="3" name="Straight Connector 2">
+            <a:extLst>
+              <a:ext uri="{FF2B5EF4-FFF2-40B4-BE49-F238E27FC236}">
+                <a16:creationId xmlns:a16="http://schemas.microsoft.com/office/drawing/2014/main" id="{741BF1A6-B7D4-BEB0-3AE2-35A969408483}"/>
+              </a:ext>
+            </a:extLst>
+          </p:cNvPr>
+          <p:cNvCxnSpPr>
+            <a:cxnSpLocks/>
+          </p:cNvCxnSpPr>
+          <p:nvPr/>
+        </p:nvCxnSpPr>
+        <p:spPr>
+          <a:xfrm>
+            <a:off x="3155934" y="5209329"/>
+            <a:ext cx="6312157" cy="0"/>
+          </a:xfrm>
+          <a:prstGeom prst="line">
+            <a:avLst/>
+          </a:prstGeom>
+          <a:ln w="28575" cap="rnd">
+            <a:solidFill>
+              <a:schemeClr val="tx1"/>
+            </a:solidFill>
+            <a:round/>
+          </a:ln>
+        </p:spPr>
+        <p:style>
+          <a:lnRef idx="1">
+            <a:schemeClr val="accent1"/>
+          </a:lnRef>
+          <a:fillRef idx="0">
+            <a:schemeClr val="accent1"/>
+          </a:fillRef>
+          <a:effectRef idx="0">
+            <a:schemeClr val="accent1"/>
+          </a:effectRef>
+          <a:fontRef idx="minor">
+            <a:schemeClr val="tx1"/>
+          </a:fontRef>
+        </p:style>
+      </p:cxnSp>
+      <p:cxnSp>
+        <p:nvCxnSpPr>
+          <p:cNvPr id="5" name="Straight Connector 4">
+            <a:extLst>
+              <a:ext uri="{FF2B5EF4-FFF2-40B4-BE49-F238E27FC236}">
+                <a16:creationId xmlns:a16="http://schemas.microsoft.com/office/drawing/2014/main" id="{6B018765-A5CB-A187-EA3B-C77044EC95B3}"/>
+              </a:ext>
+            </a:extLst>
+          </p:cNvPr>
+          <p:cNvCxnSpPr>
+            <a:cxnSpLocks/>
+          </p:cNvCxnSpPr>
+          <p:nvPr/>
+        </p:nvCxnSpPr>
+        <p:spPr>
+          <a:xfrm>
+            <a:off x="3155934" y="892166"/>
+            <a:ext cx="0" cy="4317163"/>
+          </a:xfrm>
+          <a:prstGeom prst="line">
+            <a:avLst/>
+          </a:prstGeom>
+          <a:ln w="28575" cap="rnd">
+            <a:solidFill>
+              <a:schemeClr val="tx1"/>
+            </a:solidFill>
+            <a:round/>
+          </a:ln>
+        </p:spPr>
+        <p:style>
+          <a:lnRef idx="1">
+            <a:schemeClr val="accent1"/>
+          </a:lnRef>
+          <a:fillRef idx="0">
+            <a:schemeClr val="accent1"/>
+          </a:fillRef>
+          <a:effectRef idx="0">
+            <a:schemeClr val="accent1"/>
+          </a:effectRef>
+          <a:fontRef idx="minor">
+            <a:schemeClr val="tx1"/>
+          </a:fontRef>
+        </p:style>
+      </p:cxnSp>
+      <mc:AlternateContent xmlns:mc="http://schemas.openxmlformats.org/markup-compatibility/2006">
+        <mc:Choice xmlns:a14="http://schemas.microsoft.com/office/drawing/2010/main" Requires="a14">
+          <p:sp>
+            <p:nvSpPr>
+              <p:cNvPr id="16" name="TextBox 15">
+                <a:extLst>
+                  <a:ext uri="{FF2B5EF4-FFF2-40B4-BE49-F238E27FC236}">
+                    <a16:creationId xmlns:a16="http://schemas.microsoft.com/office/drawing/2014/main" id="{6595A209-6785-6D0B-F55A-5865077BDA77}"/>
+                  </a:ext>
+                </a:extLst>
+              </p:cNvPr>
+              <p:cNvSpPr txBox="1"/>
+              <p:nvPr/>
+            </p:nvSpPr>
+            <p:spPr>
+              <a:xfrm>
+                <a:off x="9322049" y="5249857"/>
+                <a:ext cx="201722" cy="307777"/>
+              </a:xfrm>
+              <a:prstGeom prst="rect">
+                <a:avLst/>
+              </a:prstGeom>
+              <a:noFill/>
+            </p:spPr>
+            <p:txBody>
+              <a:bodyPr wrap="none" lIns="0" tIns="0" rIns="0" bIns="0" rtlCol="0">
+                <a:spAutoFit/>
+              </a:bodyPr>
+              <a:lstStyle/>
+              <a:p>
+                <a:pPr/>
+                <a14:m>
+                  <m:oMathPara xmlns:m="http://schemas.openxmlformats.org/officeDocument/2006/math">
+                    <m:oMath>
+                      <m:r>
+                        <a:rPr lang="en-US" sz="2000" b="0" i="1" smtClean="0">
+                          <a:latin typeface="Cambria Math" panose="02040503050406030204" pitchFamily="18" charset="0"/>
+                        </a:rPr>
+                        <m:t>𝑥</m:t>
+                      </m:r>
+                    </m:oMath>
+                  </m:oMathPara>
+                </a14:m>
+                <a:endParaRPr lang="en-US" sz="2000" dirty="0"/>
+              </a:p>
+            </p:txBody>
+          </p:sp>
+        </mc:Choice>
+        <mc:Fallback>
+          <p:sp>
+            <p:nvSpPr>
+              <p:cNvPr id="16" name="TextBox 15">
+                <a:extLst>
+                  <a:ext uri="{FF2B5EF4-FFF2-40B4-BE49-F238E27FC236}">
+                    <a16:creationId xmlns:a16="http://schemas.microsoft.com/office/drawing/2014/main" id="{6595A209-6785-6D0B-F55A-5865077BDA77}"/>
+                  </a:ext>
+                </a:extLst>
+              </p:cNvPr>
+              <p:cNvSpPr txBox="1">
+                <a:spLocks noRot="1" noChangeAspect="1" noMove="1" noResize="1" noEditPoints="1" noAdjustHandles="1" noChangeArrowheads="1" noChangeShapeType="1" noTextEdit="1"/>
+              </p:cNvSpPr>
+              <p:nvPr/>
+            </p:nvSpPr>
+            <p:spPr>
+              <a:xfrm>
+                <a:off x="9322049" y="5249857"/>
+                <a:ext cx="201722" cy="307777"/>
+              </a:xfrm>
+              <a:prstGeom prst="rect">
+                <a:avLst/>
+              </a:prstGeom>
+              <a:blipFill>
+                <a:blip r:embed="rId2"/>
+                <a:stretch>
+                  <a:fillRect l="-15152" r="-15152"/>
+                </a:stretch>
+              </a:blipFill>
+            </p:spPr>
+            <p:txBody>
+              <a:bodyPr/>
+              <a:lstStyle/>
+              <a:p>
+                <a:r>
+                  <a:rPr lang="en-IN">
+                    <a:noFill/>
+                  </a:rPr>
+                  <a:t> </a:t>
+                </a:r>
+              </a:p>
+            </p:txBody>
+          </p:sp>
+        </mc:Fallback>
+      </mc:AlternateContent>
+      <mc:AlternateContent xmlns:mc="http://schemas.openxmlformats.org/markup-compatibility/2006">
+        <mc:Choice xmlns:a14="http://schemas.microsoft.com/office/drawing/2010/main" Requires="a14">
+          <p:sp>
+            <p:nvSpPr>
+              <p:cNvPr id="18" name="TextBox 17">
+                <a:extLst>
+                  <a:ext uri="{FF2B5EF4-FFF2-40B4-BE49-F238E27FC236}">
+                    <a16:creationId xmlns:a16="http://schemas.microsoft.com/office/drawing/2014/main" id="{75F88964-C745-22E7-A290-C6D886253DEF}"/>
+                  </a:ext>
+                </a:extLst>
+              </p:cNvPr>
+              <p:cNvSpPr txBox="1"/>
+              <p:nvPr/>
+            </p:nvSpPr>
+            <p:spPr>
+              <a:xfrm>
+                <a:off x="2993165" y="5273008"/>
+                <a:ext cx="338234" cy="307777"/>
+              </a:xfrm>
+              <a:prstGeom prst="rect">
+                <a:avLst/>
+              </a:prstGeom>
+              <a:noFill/>
+            </p:spPr>
+            <p:txBody>
+              <a:bodyPr wrap="square" lIns="0" tIns="0" rIns="0" bIns="0" rtlCol="0">
+                <a:spAutoFit/>
+              </a:bodyPr>
+              <a:lstStyle/>
+              <a:p>
+                <a:pPr/>
+                <a14:m>
+                  <m:oMathPara xmlns:m="http://schemas.openxmlformats.org/officeDocument/2006/math">
+                    <m:oMath>
+                      <m:r>
+                        <a:rPr lang="en-US" sz="2000" b="0" i="1" smtClean="0">
+                          <a:latin typeface="Cambria Math" panose="02040503050406030204" pitchFamily="18" charset="0"/>
+                          <a:ea typeface="Cambria Math" panose="02040503050406030204" pitchFamily="18" charset="0"/>
+                        </a:rPr>
+                        <m:t>𝑂</m:t>
+                      </m:r>
+                    </m:oMath>
+                  </m:oMathPara>
+                </a14:m>
+                <a:endParaRPr lang="en-US" sz="2000" i="1" dirty="0"/>
+              </a:p>
+            </p:txBody>
+          </p:sp>
+        </mc:Choice>
+        <mc:Fallback>
+          <p:sp>
+            <p:nvSpPr>
+              <p:cNvPr id="18" name="TextBox 17">
+                <a:extLst>
+                  <a:ext uri="{FF2B5EF4-FFF2-40B4-BE49-F238E27FC236}">
+                    <a16:creationId xmlns:a16="http://schemas.microsoft.com/office/drawing/2014/main" id="{75F88964-C745-22E7-A290-C6D886253DEF}"/>
+                  </a:ext>
+                </a:extLst>
+              </p:cNvPr>
+              <p:cNvSpPr txBox="1">
+                <a:spLocks noRot="1" noChangeAspect="1" noMove="1" noResize="1" noEditPoints="1" noAdjustHandles="1" noChangeArrowheads="1" noChangeShapeType="1" noTextEdit="1"/>
+              </p:cNvSpPr>
+              <p:nvPr/>
+            </p:nvSpPr>
+            <p:spPr>
+              <a:xfrm>
+                <a:off x="2993165" y="5273008"/>
+                <a:ext cx="338234" cy="307777"/>
+              </a:xfrm>
+              <a:prstGeom prst="rect">
+                <a:avLst/>
+              </a:prstGeom>
+              <a:blipFill>
+                <a:blip r:embed="rId3"/>
+                <a:stretch>
+                  <a:fillRect l="-1818" r="-1818" b="-6000"/>
+                </a:stretch>
+              </a:blipFill>
+            </p:spPr>
+            <p:txBody>
+              <a:bodyPr/>
+              <a:lstStyle/>
+              <a:p>
+                <a:r>
+                  <a:rPr lang="en-IN">
+                    <a:noFill/>
+                  </a:rPr>
+                  <a:t> </a:t>
+                </a:r>
+              </a:p>
+            </p:txBody>
+          </p:sp>
+        </mc:Fallback>
+      </mc:AlternateContent>
+      <mc:AlternateContent xmlns:mc="http://schemas.openxmlformats.org/markup-compatibility/2006">
+        <mc:Choice xmlns:a14="http://schemas.microsoft.com/office/drawing/2010/main" Requires="a14">
+          <p:sp>
+            <p:nvSpPr>
+              <p:cNvPr id="20" name="TextBox 19">
+                <a:extLst>
+                  <a:ext uri="{FF2B5EF4-FFF2-40B4-BE49-F238E27FC236}">
+                    <a16:creationId xmlns:a16="http://schemas.microsoft.com/office/drawing/2014/main" id="{42E9804D-3CE0-528D-1CF0-780300B208F9}"/>
+                  </a:ext>
+                </a:extLst>
+              </p:cNvPr>
+              <p:cNvSpPr txBox="1"/>
+              <p:nvPr/>
+            </p:nvSpPr>
+            <p:spPr>
+              <a:xfrm>
+                <a:off x="2415058" y="892166"/>
+                <a:ext cx="594650" cy="307777"/>
+              </a:xfrm>
+              <a:prstGeom prst="rect">
+                <a:avLst/>
+              </a:prstGeom>
+              <a:noFill/>
+            </p:spPr>
+            <p:txBody>
+              <a:bodyPr wrap="none" lIns="0" tIns="0" rIns="0" bIns="0" rtlCol="0">
+                <a:spAutoFit/>
+              </a:bodyPr>
+              <a:lstStyle/>
+              <a:p>
+                <a:pPr/>
+                <a14:m>
+                  <m:oMathPara xmlns:m="http://schemas.openxmlformats.org/officeDocument/2006/math">
+                    <m:oMath>
+                      <m:r>
+                        <a:rPr lang="en-US" sz="2000" b="0" i="1" smtClean="0">
+                          <a:latin typeface="Cambria Math" panose="02040503050406030204" pitchFamily="18" charset="0"/>
+                        </a:rPr>
+                        <m:t>𝑈</m:t>
+                      </m:r>
+                      <m:r>
+                        <a:rPr lang="en-US" sz="2000" b="0" i="1" smtClean="0">
+                          <a:latin typeface="Cambria Math" panose="02040503050406030204" pitchFamily="18" charset="0"/>
+                        </a:rPr>
+                        <m:t>(</m:t>
+                      </m:r>
+                      <m:r>
+                        <a:rPr lang="en-US" sz="2000" b="0" i="1" smtClean="0">
+                          <a:latin typeface="Cambria Math" panose="02040503050406030204" pitchFamily="18" charset="0"/>
+                        </a:rPr>
+                        <m:t>𝑥</m:t>
+                      </m:r>
+                      <m:r>
+                        <a:rPr lang="en-US" sz="2000" b="0" i="1" smtClean="0">
+                          <a:latin typeface="Cambria Math" panose="02040503050406030204" pitchFamily="18" charset="0"/>
+                        </a:rPr>
+                        <m:t>)</m:t>
+                      </m:r>
+                    </m:oMath>
+                  </m:oMathPara>
+                </a14:m>
+                <a:endParaRPr lang="en-US" sz="2000" dirty="0"/>
+              </a:p>
+            </p:txBody>
+          </p:sp>
+        </mc:Choice>
+        <mc:Fallback>
+          <p:sp>
+            <p:nvSpPr>
+              <p:cNvPr id="20" name="TextBox 19">
+                <a:extLst>
+                  <a:ext uri="{FF2B5EF4-FFF2-40B4-BE49-F238E27FC236}">
+                    <a16:creationId xmlns:a16="http://schemas.microsoft.com/office/drawing/2014/main" id="{42E9804D-3CE0-528D-1CF0-780300B208F9}"/>
+                  </a:ext>
+                </a:extLst>
+              </p:cNvPr>
+              <p:cNvSpPr txBox="1">
+                <a:spLocks noRot="1" noChangeAspect="1" noMove="1" noResize="1" noEditPoints="1" noAdjustHandles="1" noChangeArrowheads="1" noChangeShapeType="1" noTextEdit="1"/>
+              </p:cNvSpPr>
+              <p:nvPr/>
+            </p:nvSpPr>
+            <p:spPr>
+              <a:xfrm>
+                <a:off x="2415058" y="892166"/>
+                <a:ext cx="594650" cy="307777"/>
+              </a:xfrm>
+              <a:prstGeom prst="rect">
+                <a:avLst/>
+              </a:prstGeom>
+              <a:blipFill>
+                <a:blip r:embed="rId4"/>
+                <a:stretch>
+                  <a:fillRect l="-9184" t="-1961" r="-14286" b="-33333"/>
+                </a:stretch>
+              </a:blipFill>
+            </p:spPr>
+            <p:txBody>
+              <a:bodyPr/>
+              <a:lstStyle/>
+              <a:p>
+                <a:r>
+                  <a:rPr lang="en-IN">
+                    <a:noFill/>
+                  </a:rPr>
+                  <a:t> </a:t>
+                </a:r>
+              </a:p>
+            </p:txBody>
+          </p:sp>
+        </mc:Fallback>
+      </mc:AlternateContent>
+      <p:sp>
+        <p:nvSpPr>
+          <p:cNvPr id="11" name="Oval 10">
+            <a:extLst>
+              <a:ext uri="{FF2B5EF4-FFF2-40B4-BE49-F238E27FC236}">
+                <a16:creationId xmlns:a16="http://schemas.microsoft.com/office/drawing/2014/main" id="{F82D35FB-1FE7-A21E-8C63-B4271647498F}"/>
+              </a:ext>
+            </a:extLst>
+          </p:cNvPr>
+          <p:cNvSpPr/>
+          <p:nvPr/>
+        </p:nvSpPr>
+        <p:spPr>
+          <a:xfrm>
+            <a:off x="7241555" y="3399365"/>
+            <a:ext cx="98696" cy="98696"/>
+          </a:xfrm>
+          <a:prstGeom prst="ellipse">
+            <a:avLst/>
+          </a:prstGeom>
+          <a:solidFill>
+            <a:schemeClr val="tx1"/>
+          </a:solidFill>
+          <a:ln>
+            <a:noFill/>
+          </a:ln>
+        </p:spPr>
+        <p:style>
+          <a:lnRef idx="2">
+            <a:schemeClr val="accent1">
+              <a:shade val="15000"/>
+            </a:schemeClr>
+          </a:lnRef>
+          <a:fillRef idx="1">
+            <a:schemeClr val="accent1"/>
+          </a:fillRef>
+          <a:effectRef idx="0">
+            <a:schemeClr val="accent1"/>
+          </a:effectRef>
+          <a:fontRef idx="minor">
+            <a:schemeClr val="lt1"/>
+          </a:fontRef>
+        </p:style>
+        <p:txBody>
+          <a:bodyPr rtlCol="0" anchor="ctr"/>
+          <a:lstStyle/>
+          <a:p>
+            <a:pPr algn="ctr"/>
+            <a:endParaRPr lang="en-IN"/>
+          </a:p>
+        </p:txBody>
+      </p:sp>
+      <p:sp>
+        <p:nvSpPr>
+          <p:cNvPr id="13" name="Oval 12">
+            <a:extLst>
+              <a:ext uri="{FF2B5EF4-FFF2-40B4-BE49-F238E27FC236}">
+                <a16:creationId xmlns:a16="http://schemas.microsoft.com/office/drawing/2014/main" id="{3C923118-858A-0279-F1C7-717114F5FD1A}"/>
+              </a:ext>
+            </a:extLst>
+          </p:cNvPr>
+          <p:cNvSpPr/>
+          <p:nvPr/>
+        </p:nvSpPr>
+        <p:spPr>
+          <a:xfrm>
+            <a:off x="8752192" y="3400757"/>
+            <a:ext cx="98696" cy="98696"/>
+          </a:xfrm>
+          <a:prstGeom prst="ellipse">
+            <a:avLst/>
+          </a:prstGeom>
+          <a:solidFill>
+            <a:schemeClr val="tx1"/>
+          </a:solidFill>
+          <a:ln>
+            <a:noFill/>
+          </a:ln>
+        </p:spPr>
+        <p:style>
+          <a:lnRef idx="2">
+            <a:schemeClr val="accent1">
+              <a:shade val="15000"/>
+            </a:schemeClr>
+          </a:lnRef>
+          <a:fillRef idx="1">
+            <a:schemeClr val="accent1"/>
+          </a:fillRef>
+          <a:effectRef idx="0">
+            <a:schemeClr val="accent1"/>
+          </a:effectRef>
+          <a:fontRef idx="minor">
+            <a:schemeClr val="lt1"/>
+          </a:fontRef>
+        </p:style>
+        <p:txBody>
+          <a:bodyPr rtlCol="0" anchor="ctr"/>
+          <a:lstStyle/>
+          <a:p>
+            <a:pPr algn="ctr"/>
+            <a:endParaRPr lang="en-IN"/>
+          </a:p>
+        </p:txBody>
+      </p:sp>
+      <mc:AlternateContent xmlns:mc="http://schemas.openxmlformats.org/markup-compatibility/2006">
+        <mc:Choice xmlns:a14="http://schemas.microsoft.com/office/drawing/2010/main" Requires="a14">
+          <p:sp>
+            <p:nvSpPr>
+              <p:cNvPr id="22" name="TextBox 21">
+                <a:extLst>
+                  <a:ext uri="{FF2B5EF4-FFF2-40B4-BE49-F238E27FC236}">
+                    <a16:creationId xmlns:a16="http://schemas.microsoft.com/office/drawing/2014/main" id="{077A99FA-8248-898C-C1FF-71DA07AC5990}"/>
+                  </a:ext>
+                </a:extLst>
+              </p:cNvPr>
+              <p:cNvSpPr txBox="1"/>
+              <p:nvPr/>
+            </p:nvSpPr>
+            <p:spPr>
+              <a:xfrm>
+                <a:off x="4212229" y="3700355"/>
+                <a:ext cx="222112" cy="307777"/>
+              </a:xfrm>
+              <a:prstGeom prst="rect">
+                <a:avLst/>
+              </a:prstGeom>
+              <a:noFill/>
+            </p:spPr>
+            <p:txBody>
+              <a:bodyPr wrap="none" lIns="0" tIns="0" rIns="0" bIns="0" rtlCol="0">
+                <a:spAutoFit/>
+              </a:bodyPr>
+              <a:lstStyle/>
+              <a:p>
+                <a:pPr/>
+                <a14:m>
+                  <m:oMathPara xmlns:m="http://schemas.openxmlformats.org/officeDocument/2006/math">
+                    <m:oMath>
+                      <m:r>
+                        <a:rPr lang="en-US" sz="2000" b="0" i="1" smtClean="0">
+                          <a:latin typeface="Cambria Math" panose="02040503050406030204" pitchFamily="18" charset="0"/>
+                        </a:rPr>
+                        <m:t>𝐴</m:t>
+                      </m:r>
+                    </m:oMath>
+                  </m:oMathPara>
+                </a14:m>
+                <a:endParaRPr lang="en-US" sz="2000" dirty="0"/>
+              </a:p>
+            </p:txBody>
+          </p:sp>
+        </mc:Choice>
+        <mc:Fallback>
+          <p:sp>
+            <p:nvSpPr>
+              <p:cNvPr id="22" name="TextBox 21">
+                <a:extLst>
+                  <a:ext uri="{FF2B5EF4-FFF2-40B4-BE49-F238E27FC236}">
+                    <a16:creationId xmlns:a16="http://schemas.microsoft.com/office/drawing/2014/main" id="{077A99FA-8248-898C-C1FF-71DA07AC5990}"/>
+                  </a:ext>
+                </a:extLst>
+              </p:cNvPr>
+              <p:cNvSpPr txBox="1">
+                <a:spLocks noRot="1" noChangeAspect="1" noMove="1" noResize="1" noEditPoints="1" noAdjustHandles="1" noChangeArrowheads="1" noChangeShapeType="1" noTextEdit="1"/>
+              </p:cNvSpPr>
+              <p:nvPr/>
+            </p:nvSpPr>
+            <p:spPr>
+              <a:xfrm>
+                <a:off x="4212229" y="3700355"/>
+                <a:ext cx="222112" cy="307777"/>
+              </a:xfrm>
+              <a:prstGeom prst="rect">
+                <a:avLst/>
+              </a:prstGeom>
+              <a:blipFill>
+                <a:blip r:embed="rId5"/>
+                <a:stretch>
+                  <a:fillRect l="-27778" r="-27778" b="-5882"/>
+                </a:stretch>
+              </a:blipFill>
+            </p:spPr>
+            <p:txBody>
+              <a:bodyPr/>
+              <a:lstStyle/>
+              <a:p>
+                <a:r>
+                  <a:rPr lang="en-IN">
+                    <a:noFill/>
+                  </a:rPr>
+                  <a:t> </a:t>
+                </a:r>
+              </a:p>
+            </p:txBody>
+          </p:sp>
+        </mc:Fallback>
+      </mc:AlternateContent>
+      <mc:AlternateContent xmlns:mc="http://schemas.openxmlformats.org/markup-compatibility/2006">
+        <mc:Choice xmlns:a14="http://schemas.microsoft.com/office/drawing/2010/main" Requires="a14">
+          <p:sp>
+            <p:nvSpPr>
+              <p:cNvPr id="24" name="TextBox 23">
+                <a:extLst>
+                  <a:ext uri="{FF2B5EF4-FFF2-40B4-BE49-F238E27FC236}">
+                    <a16:creationId xmlns:a16="http://schemas.microsoft.com/office/drawing/2014/main" id="{9C47F1AC-DE0F-ED8C-6132-0A224DF146C2}"/>
+                  </a:ext>
+                </a:extLst>
+              </p:cNvPr>
+              <p:cNvSpPr txBox="1"/>
+              <p:nvPr/>
+            </p:nvSpPr>
+            <p:spPr>
+              <a:xfrm>
+                <a:off x="5914928" y="1514246"/>
+                <a:ext cx="232884" cy="307777"/>
+              </a:xfrm>
+              <a:prstGeom prst="rect">
+                <a:avLst/>
+              </a:prstGeom>
+              <a:noFill/>
+            </p:spPr>
+            <p:txBody>
+              <a:bodyPr wrap="none" lIns="0" tIns="0" rIns="0" bIns="0" rtlCol="0">
+                <a:spAutoFit/>
+              </a:bodyPr>
+              <a:lstStyle/>
+              <a:p>
+                <a:pPr/>
+                <a14:m>
+                  <m:oMathPara xmlns:m="http://schemas.openxmlformats.org/officeDocument/2006/math">
+                    <m:oMath>
+                      <m:r>
+                        <a:rPr lang="en-US" sz="2000" b="0" i="1" smtClean="0">
+                          <a:latin typeface="Cambria Math" panose="02040503050406030204" pitchFamily="18" charset="0"/>
+                        </a:rPr>
+                        <m:t>𝐵</m:t>
+                      </m:r>
+                    </m:oMath>
+                  </m:oMathPara>
+                </a14:m>
+                <a:endParaRPr lang="en-US" sz="2000" dirty="0"/>
+              </a:p>
+            </p:txBody>
+          </p:sp>
+        </mc:Choice>
+        <mc:Fallback>
+          <p:sp>
+            <p:nvSpPr>
+              <p:cNvPr id="24" name="TextBox 23">
+                <a:extLst>
+                  <a:ext uri="{FF2B5EF4-FFF2-40B4-BE49-F238E27FC236}">
+                    <a16:creationId xmlns:a16="http://schemas.microsoft.com/office/drawing/2014/main" id="{9C47F1AC-DE0F-ED8C-6132-0A224DF146C2}"/>
+                  </a:ext>
+                </a:extLst>
+              </p:cNvPr>
+              <p:cNvSpPr txBox="1">
+                <a:spLocks noRot="1" noChangeAspect="1" noMove="1" noResize="1" noEditPoints="1" noAdjustHandles="1" noChangeArrowheads="1" noChangeShapeType="1" noTextEdit="1"/>
+              </p:cNvSpPr>
+              <p:nvPr/>
+            </p:nvSpPr>
+            <p:spPr>
+              <a:xfrm>
+                <a:off x="5914928" y="1514246"/>
+                <a:ext cx="232884" cy="307777"/>
+              </a:xfrm>
+              <a:prstGeom prst="rect">
+                <a:avLst/>
+              </a:prstGeom>
+              <a:blipFill>
+                <a:blip r:embed="rId6"/>
+                <a:stretch>
+                  <a:fillRect l="-23684" r="-26316" b="-5882"/>
+                </a:stretch>
+              </a:blipFill>
+            </p:spPr>
+            <p:txBody>
+              <a:bodyPr/>
+              <a:lstStyle/>
+              <a:p>
+                <a:r>
+                  <a:rPr lang="en-IN">
+                    <a:noFill/>
+                  </a:rPr>
+                  <a:t> </a:t>
+                </a:r>
+              </a:p>
+            </p:txBody>
+          </p:sp>
+        </mc:Fallback>
+      </mc:AlternateContent>
+      <mc:AlternateContent xmlns:mc="http://schemas.openxmlformats.org/markup-compatibility/2006">
+        <mc:Choice xmlns:a14="http://schemas.microsoft.com/office/drawing/2010/main" Requires="a14">
+          <p:sp>
+            <p:nvSpPr>
+              <p:cNvPr id="26" name="TextBox 25">
+                <a:extLst>
+                  <a:ext uri="{FF2B5EF4-FFF2-40B4-BE49-F238E27FC236}">
+                    <a16:creationId xmlns:a16="http://schemas.microsoft.com/office/drawing/2014/main" id="{ED265156-05D1-668C-7B65-D8F2296B352F}"/>
+                  </a:ext>
+                </a:extLst>
+              </p:cNvPr>
+              <p:cNvSpPr txBox="1"/>
+              <p:nvPr/>
+            </p:nvSpPr>
+            <p:spPr>
+              <a:xfrm>
+                <a:off x="7179223" y="3086826"/>
+                <a:ext cx="221278" cy="307777"/>
+              </a:xfrm>
+              <a:prstGeom prst="rect">
+                <a:avLst/>
+              </a:prstGeom>
+              <a:noFill/>
+            </p:spPr>
+            <p:txBody>
+              <a:bodyPr wrap="none" lIns="0" tIns="0" rIns="0" bIns="0" rtlCol="0">
+                <a:spAutoFit/>
+              </a:bodyPr>
+              <a:lstStyle/>
+              <a:p>
+                <a:pPr/>
+                <a14:m>
+                  <m:oMathPara xmlns:m="http://schemas.openxmlformats.org/officeDocument/2006/math">
+                    <m:oMath>
+                      <m:r>
+                        <a:rPr lang="en-US" sz="2000" b="0" i="1" smtClean="0">
+                          <a:latin typeface="Cambria Math" panose="02040503050406030204" pitchFamily="18" charset="0"/>
+                        </a:rPr>
+                        <m:t>𝐶</m:t>
+                      </m:r>
+                    </m:oMath>
+                  </m:oMathPara>
+                </a14:m>
+                <a:endParaRPr lang="en-US" sz="2000" dirty="0"/>
+              </a:p>
+            </p:txBody>
+          </p:sp>
+        </mc:Choice>
+        <mc:Fallback>
+          <p:sp>
+            <p:nvSpPr>
+              <p:cNvPr id="26" name="TextBox 25">
+                <a:extLst>
+                  <a:ext uri="{FF2B5EF4-FFF2-40B4-BE49-F238E27FC236}">
+                    <a16:creationId xmlns:a16="http://schemas.microsoft.com/office/drawing/2014/main" id="{ED265156-05D1-668C-7B65-D8F2296B352F}"/>
+                  </a:ext>
+                </a:extLst>
+              </p:cNvPr>
+              <p:cNvSpPr txBox="1">
+                <a:spLocks noRot="1" noChangeAspect="1" noMove="1" noResize="1" noEditPoints="1" noAdjustHandles="1" noChangeArrowheads="1" noChangeShapeType="1" noTextEdit="1"/>
+              </p:cNvSpPr>
+              <p:nvPr/>
+            </p:nvSpPr>
+            <p:spPr>
+              <a:xfrm>
+                <a:off x="7179223" y="3086826"/>
+                <a:ext cx="221278" cy="307777"/>
+              </a:xfrm>
+              <a:prstGeom prst="rect">
+                <a:avLst/>
+              </a:prstGeom>
+              <a:blipFill>
+                <a:blip r:embed="rId7"/>
+                <a:stretch>
+                  <a:fillRect l="-27778" r="-22222" b="-5882"/>
+                </a:stretch>
+              </a:blipFill>
+            </p:spPr>
+            <p:txBody>
+              <a:bodyPr/>
+              <a:lstStyle/>
+              <a:p>
+                <a:r>
+                  <a:rPr lang="en-IN">
+                    <a:noFill/>
+                  </a:rPr>
+                  <a:t> </a:t>
+                </a:r>
+              </a:p>
+            </p:txBody>
+          </p:sp>
+        </mc:Fallback>
+      </mc:AlternateContent>
+      <mc:AlternateContent xmlns:mc="http://schemas.openxmlformats.org/markup-compatibility/2006">
+        <mc:Choice xmlns:a14="http://schemas.microsoft.com/office/drawing/2010/main" Requires="a14">
+          <p:sp>
+            <p:nvSpPr>
+              <p:cNvPr id="28" name="TextBox 27">
+                <a:extLst>
+                  <a:ext uri="{FF2B5EF4-FFF2-40B4-BE49-F238E27FC236}">
+                    <a16:creationId xmlns:a16="http://schemas.microsoft.com/office/drawing/2014/main" id="{B9DE17EA-A31F-B27F-FFA3-C10DC85763FA}"/>
+                  </a:ext>
+                </a:extLst>
+              </p:cNvPr>
+              <p:cNvSpPr txBox="1"/>
+              <p:nvPr/>
+            </p:nvSpPr>
+            <p:spPr>
+              <a:xfrm>
+                <a:off x="8681242" y="3088940"/>
+                <a:ext cx="243143" cy="307777"/>
+              </a:xfrm>
+              <a:prstGeom prst="rect">
+                <a:avLst/>
+              </a:prstGeom>
+              <a:noFill/>
+            </p:spPr>
+            <p:txBody>
+              <a:bodyPr wrap="none" lIns="0" tIns="0" rIns="0" bIns="0" rtlCol="0">
+                <a:spAutoFit/>
+              </a:bodyPr>
+              <a:lstStyle/>
+              <a:p>
+                <a:pPr/>
+                <a14:m>
+                  <m:oMathPara xmlns:m="http://schemas.openxmlformats.org/officeDocument/2006/math">
+                    <m:oMath>
+                      <m:r>
+                        <a:rPr lang="en-US" sz="2000" b="0" i="1" smtClean="0">
+                          <a:latin typeface="Cambria Math" panose="02040503050406030204" pitchFamily="18" charset="0"/>
+                        </a:rPr>
+                        <m:t>𝐷</m:t>
+                      </m:r>
+                    </m:oMath>
+                  </m:oMathPara>
+                </a14:m>
+                <a:endParaRPr lang="en-US" sz="2000" dirty="0"/>
+              </a:p>
+            </p:txBody>
+          </p:sp>
+        </mc:Choice>
+        <mc:Fallback>
+          <p:sp>
+            <p:nvSpPr>
+              <p:cNvPr id="28" name="TextBox 27">
+                <a:extLst>
+                  <a:ext uri="{FF2B5EF4-FFF2-40B4-BE49-F238E27FC236}">
+                    <a16:creationId xmlns:a16="http://schemas.microsoft.com/office/drawing/2014/main" id="{B9DE17EA-A31F-B27F-FFA3-C10DC85763FA}"/>
+                  </a:ext>
+                </a:extLst>
+              </p:cNvPr>
+              <p:cNvSpPr txBox="1">
+                <a:spLocks noRot="1" noChangeAspect="1" noMove="1" noResize="1" noEditPoints="1" noAdjustHandles="1" noChangeArrowheads="1" noChangeShapeType="1" noTextEdit="1"/>
+              </p:cNvSpPr>
+              <p:nvPr/>
+            </p:nvSpPr>
+            <p:spPr>
+              <a:xfrm>
+                <a:off x="8681242" y="3088940"/>
+                <a:ext cx="243143" cy="307777"/>
+              </a:xfrm>
+              <a:prstGeom prst="rect">
+                <a:avLst/>
+              </a:prstGeom>
+              <a:blipFill>
+                <a:blip r:embed="rId8"/>
+                <a:stretch>
+                  <a:fillRect l="-22500" r="-22500" b="-6000"/>
+                </a:stretch>
+              </a:blipFill>
+            </p:spPr>
+            <p:txBody>
+              <a:bodyPr/>
+              <a:lstStyle/>
+              <a:p>
+                <a:r>
+                  <a:rPr lang="en-IN">
+                    <a:noFill/>
+                  </a:rPr>
+                  <a:t> </a:t>
+                </a:r>
+              </a:p>
+            </p:txBody>
+          </p:sp>
+        </mc:Fallback>
+      </mc:AlternateContent>
+      <mc:AlternateContent xmlns:mc="http://schemas.openxmlformats.org/markup-compatibility/2006">
+        <mc:Choice xmlns:a14="http://schemas.microsoft.com/office/drawing/2010/main" Requires="a14">
+          <p:sp>
+            <p:nvSpPr>
+              <p:cNvPr id="50" name="TextBox 49">
+                <a:extLst>
+                  <a:ext uri="{FF2B5EF4-FFF2-40B4-BE49-F238E27FC236}">
+                    <a16:creationId xmlns:a16="http://schemas.microsoft.com/office/drawing/2014/main" id="{EB142BA3-48F6-7BFF-3CEC-E2C49175E817}"/>
+                  </a:ext>
+                </a:extLst>
+              </p:cNvPr>
+              <p:cNvSpPr txBox="1"/>
+              <p:nvPr/>
+            </p:nvSpPr>
+            <p:spPr>
+              <a:xfrm>
+                <a:off x="4835785" y="3631022"/>
+                <a:ext cx="519758" cy="350609"/>
+              </a:xfrm>
+              <a:prstGeom prst="rect">
+                <a:avLst/>
+              </a:prstGeom>
+              <a:noFill/>
+            </p:spPr>
+            <p:txBody>
+              <a:bodyPr wrap="none" lIns="0" tIns="0" rIns="0" bIns="0" rtlCol="0">
+                <a:spAutoFit/>
+              </a:bodyPr>
+              <a:lstStyle/>
+              <a:p>
+                <a:pPr/>
+                <a14:m>
+                  <m:oMathPara xmlns:m="http://schemas.openxmlformats.org/officeDocument/2006/math">
+                    <m:oMath>
+                      <m:f>
+                        <m:fPr>
+                          <m:ctrlPr>
+                            <a:rPr lang="en-IN" sz="1200" i="1" smtClean="0">
+                              <a:latin typeface="Cambria Math" panose="02040503050406030204" pitchFamily="18" charset="0"/>
+                            </a:rPr>
+                          </m:ctrlPr>
+                        </m:fPr>
+                        <m:num>
+                          <m:r>
+                            <a:rPr lang="en-IN" sz="1200" i="1" smtClean="0">
+                              <a:latin typeface="Cambria Math" panose="02040503050406030204" pitchFamily="18" charset="0"/>
+                            </a:rPr>
+                            <m:t>𝑑</m:t>
+                          </m:r>
+                          <m:r>
+                            <a:rPr lang="en-IN" sz="1200" b="0" i="1" smtClean="0">
+                              <a:latin typeface="Cambria Math" panose="02040503050406030204" pitchFamily="18" charset="0"/>
+                            </a:rPr>
+                            <m:t>𝑈</m:t>
+                          </m:r>
+                        </m:num>
+                        <m:den>
+                          <m:r>
+                            <a:rPr lang="en-IN" sz="1200" i="1" smtClean="0">
+                              <a:latin typeface="Cambria Math" panose="02040503050406030204" pitchFamily="18" charset="0"/>
+                            </a:rPr>
+                            <m:t>𝑑𝑥</m:t>
+                          </m:r>
+                        </m:den>
+                      </m:f>
+                      <m:r>
+                        <a:rPr lang="en-IN" sz="1200" b="0" i="1" smtClean="0">
+                          <a:latin typeface="Cambria Math" panose="02040503050406030204" pitchFamily="18" charset="0"/>
+                        </a:rPr>
+                        <m:t>=</m:t>
+                      </m:r>
+                      <m:r>
+                        <a:rPr lang="en-IN" sz="1200" b="0" i="1" smtClean="0">
+                          <a:latin typeface="Cambria Math" panose="02040503050406030204" pitchFamily="18" charset="0"/>
+                        </a:rPr>
+                        <m:t>0</m:t>
+                      </m:r>
+                    </m:oMath>
+                  </m:oMathPara>
+                </a14:m>
+                <a:endParaRPr lang="en-IN" sz="1200" dirty="0"/>
+              </a:p>
+            </p:txBody>
+          </p:sp>
+        </mc:Choice>
+        <mc:Fallback>
+          <p:sp>
+            <p:nvSpPr>
+              <p:cNvPr id="50" name="TextBox 49">
+                <a:extLst>
+                  <a:ext uri="{FF2B5EF4-FFF2-40B4-BE49-F238E27FC236}">
+                    <a16:creationId xmlns:a16="http://schemas.microsoft.com/office/drawing/2014/main" id="{EB142BA3-48F6-7BFF-3CEC-E2C49175E817}"/>
+                  </a:ext>
+                </a:extLst>
+              </p:cNvPr>
+              <p:cNvSpPr txBox="1">
+                <a:spLocks noRot="1" noChangeAspect="1" noMove="1" noResize="1" noEditPoints="1" noAdjustHandles="1" noChangeArrowheads="1" noChangeShapeType="1" noTextEdit="1"/>
+              </p:cNvSpPr>
+              <p:nvPr/>
+            </p:nvSpPr>
+            <p:spPr>
+              <a:xfrm>
+                <a:off x="4835785" y="3631022"/>
+                <a:ext cx="519758" cy="350609"/>
+              </a:xfrm>
+              <a:prstGeom prst="rect">
+                <a:avLst/>
+              </a:prstGeom>
+              <a:blipFill>
+                <a:blip r:embed="rId9"/>
+                <a:stretch>
+                  <a:fillRect l="-6977" t="-3509" r="-5814" b="-15789"/>
+                </a:stretch>
+              </a:blipFill>
+            </p:spPr>
+            <p:txBody>
+              <a:bodyPr/>
+              <a:lstStyle/>
+              <a:p>
+                <a:r>
+                  <a:rPr lang="en-IN">
+                    <a:noFill/>
+                  </a:rPr>
+                  <a:t> </a:t>
+                </a:r>
+              </a:p>
+            </p:txBody>
+          </p:sp>
+        </mc:Fallback>
+      </mc:AlternateContent>
+      <mc:AlternateContent xmlns:mc="http://schemas.openxmlformats.org/markup-compatibility/2006">
+        <mc:Choice xmlns:a14="http://schemas.microsoft.com/office/drawing/2010/main" Requires="a14">
+          <p:sp>
+            <p:nvSpPr>
+              <p:cNvPr id="72" name="TextBox 71">
+                <a:extLst>
+                  <a:ext uri="{FF2B5EF4-FFF2-40B4-BE49-F238E27FC236}">
+                    <a16:creationId xmlns:a16="http://schemas.microsoft.com/office/drawing/2014/main" id="{229F6B6C-09D3-98EA-2F7B-8ECA6E4CAAD0}"/>
+                  </a:ext>
+                </a:extLst>
+              </p:cNvPr>
+              <p:cNvSpPr txBox="1"/>
+              <p:nvPr/>
+            </p:nvSpPr>
+            <p:spPr>
+              <a:xfrm>
+                <a:off x="4122274" y="3538689"/>
+                <a:ext cx="421782" cy="184666"/>
+              </a:xfrm>
+              <a:prstGeom prst="rect">
+                <a:avLst/>
+              </a:prstGeom>
+              <a:noFill/>
+            </p:spPr>
+            <p:txBody>
+              <a:bodyPr wrap="none" lIns="0" tIns="0" rIns="0" bIns="0" rtlCol="0">
+                <a:spAutoFit/>
+              </a:bodyPr>
+              <a:lstStyle/>
+              <a:p>
+                <a:pPr/>
+                <a14:m>
+                  <m:oMathPara xmlns:m="http://schemas.openxmlformats.org/officeDocument/2006/math">
+                    <m:oMath>
+                      <m:r>
+                        <a:rPr lang="en-IN" sz="1200" b="0" i="1" smtClean="0">
+                          <a:latin typeface="Cambria Math" panose="02040503050406030204" pitchFamily="18" charset="0"/>
+                        </a:rPr>
+                        <m:t>𝐹</m:t>
+                      </m:r>
+                      <m:r>
+                        <a:rPr lang="en-IN" sz="1200" b="0" i="1" smtClean="0">
+                          <a:latin typeface="Cambria Math" panose="02040503050406030204" pitchFamily="18" charset="0"/>
+                        </a:rPr>
+                        <m:t>=0</m:t>
+                      </m:r>
+                    </m:oMath>
+                  </m:oMathPara>
+                </a14:m>
+                <a:endParaRPr lang="en-IN" sz="1200" dirty="0"/>
+              </a:p>
+            </p:txBody>
+          </p:sp>
+        </mc:Choice>
+        <mc:Fallback>
+          <p:sp>
+            <p:nvSpPr>
+              <p:cNvPr id="72" name="TextBox 71">
+                <a:extLst>
+                  <a:ext uri="{FF2B5EF4-FFF2-40B4-BE49-F238E27FC236}">
+                    <a16:creationId xmlns:a16="http://schemas.microsoft.com/office/drawing/2014/main" id="{229F6B6C-09D3-98EA-2F7B-8ECA6E4CAAD0}"/>
+                  </a:ext>
+                </a:extLst>
+              </p:cNvPr>
+              <p:cNvSpPr txBox="1">
+                <a:spLocks noRot="1" noChangeAspect="1" noMove="1" noResize="1" noEditPoints="1" noAdjustHandles="1" noChangeArrowheads="1" noChangeShapeType="1" noTextEdit="1"/>
+              </p:cNvSpPr>
+              <p:nvPr/>
+            </p:nvSpPr>
+            <p:spPr>
+              <a:xfrm>
+                <a:off x="4122274" y="3538689"/>
+                <a:ext cx="421782" cy="184666"/>
+              </a:xfrm>
+              <a:prstGeom prst="rect">
+                <a:avLst/>
+              </a:prstGeom>
+              <a:blipFill>
+                <a:blip r:embed="rId10"/>
+                <a:stretch>
+                  <a:fillRect l="-8696" r="-8696" b="-3226"/>
+                </a:stretch>
+              </a:blipFill>
+            </p:spPr>
+            <p:txBody>
+              <a:bodyPr/>
+              <a:lstStyle/>
+              <a:p>
+                <a:r>
+                  <a:rPr lang="en-IN">
+                    <a:noFill/>
+                  </a:rPr>
+                  <a:t> </a:t>
+                </a:r>
+              </a:p>
+            </p:txBody>
+          </p:sp>
+        </mc:Fallback>
+      </mc:AlternateContent>
+      <p:cxnSp>
+        <p:nvCxnSpPr>
+          <p:cNvPr id="35" name="Straight Connector 34">
+            <a:extLst>
+              <a:ext uri="{FF2B5EF4-FFF2-40B4-BE49-F238E27FC236}">
+                <a16:creationId xmlns:a16="http://schemas.microsoft.com/office/drawing/2014/main" id="{C87B6332-E5F0-E1DD-2B54-DD66B153515D}"/>
+              </a:ext>
+            </a:extLst>
+          </p:cNvPr>
+          <p:cNvCxnSpPr>
+            <a:cxnSpLocks/>
+          </p:cNvCxnSpPr>
+          <p:nvPr/>
+        </p:nvCxnSpPr>
+        <p:spPr>
+          <a:xfrm>
+            <a:off x="3838576" y="4052803"/>
+            <a:ext cx="950119" cy="0"/>
+          </a:xfrm>
+          <a:prstGeom prst="line">
+            <a:avLst/>
+          </a:prstGeom>
+          <a:ln w="19050" cap="rnd">
+            <a:solidFill>
+              <a:srgbClr val="C00000"/>
+            </a:solidFill>
+            <a:round/>
+          </a:ln>
+        </p:spPr>
+        <p:style>
+          <a:lnRef idx="1">
+            <a:schemeClr val="accent1"/>
+          </a:lnRef>
+          <a:fillRef idx="0">
+            <a:schemeClr val="accent1"/>
+          </a:fillRef>
+          <a:effectRef idx="0">
+            <a:schemeClr val="accent1"/>
+          </a:effectRef>
+          <a:fontRef idx="minor">
+            <a:schemeClr val="tx1"/>
+          </a:fontRef>
+        </p:style>
+      </p:cxnSp>
+      <p:sp>
+        <p:nvSpPr>
+          <p:cNvPr id="6" name="Oval 5">
+            <a:extLst>
+              <a:ext uri="{FF2B5EF4-FFF2-40B4-BE49-F238E27FC236}">
+                <a16:creationId xmlns:a16="http://schemas.microsoft.com/office/drawing/2014/main" id="{02DFDBB0-1774-E098-8FDB-82EF9717B03E}"/>
+              </a:ext>
+            </a:extLst>
+          </p:cNvPr>
+          <p:cNvSpPr/>
+          <p:nvPr/>
+        </p:nvSpPr>
+        <p:spPr>
+          <a:xfrm>
+            <a:off x="4271380" y="4004025"/>
+            <a:ext cx="98696" cy="98696"/>
+          </a:xfrm>
+          <a:prstGeom prst="ellipse">
+            <a:avLst/>
+          </a:prstGeom>
+          <a:solidFill>
+            <a:schemeClr val="tx1"/>
+          </a:solidFill>
+          <a:ln>
+            <a:noFill/>
+          </a:ln>
+        </p:spPr>
+        <p:style>
+          <a:lnRef idx="2">
+            <a:schemeClr val="accent1">
+              <a:shade val="15000"/>
+            </a:schemeClr>
+          </a:lnRef>
+          <a:fillRef idx="1">
+            <a:schemeClr val="accent1"/>
+          </a:fillRef>
+          <a:effectRef idx="0">
+            <a:schemeClr val="accent1"/>
+          </a:effectRef>
+          <a:fontRef idx="minor">
+            <a:schemeClr val="lt1"/>
+          </a:fontRef>
+        </p:style>
+        <p:txBody>
+          <a:bodyPr rtlCol="0" anchor="ctr"/>
+          <a:lstStyle/>
+          <a:p>
+            <a:pPr algn="ctr"/>
+            <a:endParaRPr lang="en-IN"/>
+          </a:p>
+        </p:txBody>
+      </p:sp>
+      <p:cxnSp>
+        <p:nvCxnSpPr>
+          <p:cNvPr id="38" name="Straight Connector 37">
+            <a:extLst>
+              <a:ext uri="{FF2B5EF4-FFF2-40B4-BE49-F238E27FC236}">
+                <a16:creationId xmlns:a16="http://schemas.microsoft.com/office/drawing/2014/main" id="{9E12FFF0-53F4-82FA-57DE-E1987848CE0B}"/>
+              </a:ext>
+            </a:extLst>
+          </p:cNvPr>
+          <p:cNvCxnSpPr>
+            <a:cxnSpLocks/>
+          </p:cNvCxnSpPr>
+          <p:nvPr/>
+        </p:nvCxnSpPr>
+        <p:spPr>
+          <a:xfrm>
+            <a:off x="5559418" y="1882349"/>
+            <a:ext cx="950119" cy="0"/>
+          </a:xfrm>
+          <a:prstGeom prst="line">
+            <a:avLst/>
+          </a:prstGeom>
+          <a:ln w="19050" cap="rnd">
+            <a:solidFill>
+              <a:srgbClr val="C00000"/>
+            </a:solidFill>
+            <a:round/>
+          </a:ln>
+        </p:spPr>
+        <p:style>
+          <a:lnRef idx="1">
+            <a:schemeClr val="accent1"/>
+          </a:lnRef>
+          <a:fillRef idx="0">
+            <a:schemeClr val="accent1"/>
+          </a:fillRef>
+          <a:effectRef idx="0">
+            <a:schemeClr val="accent1"/>
+          </a:effectRef>
+          <a:fontRef idx="minor">
+            <a:schemeClr val="tx1"/>
+          </a:fontRef>
+        </p:style>
+      </p:cxnSp>
+      <p:sp>
+        <p:nvSpPr>
+          <p:cNvPr id="9" name="Oval 8">
+            <a:extLst>
+              <a:ext uri="{FF2B5EF4-FFF2-40B4-BE49-F238E27FC236}">
+                <a16:creationId xmlns:a16="http://schemas.microsoft.com/office/drawing/2014/main" id="{18488F8A-3D2E-0F90-B50A-E20B24E76B22}"/>
+              </a:ext>
+            </a:extLst>
+          </p:cNvPr>
+          <p:cNvSpPr/>
+          <p:nvPr/>
+        </p:nvSpPr>
+        <p:spPr>
+          <a:xfrm>
+            <a:off x="5979709" y="1833177"/>
+            <a:ext cx="98696" cy="98696"/>
+          </a:xfrm>
+          <a:prstGeom prst="ellipse">
+            <a:avLst/>
+          </a:prstGeom>
+          <a:solidFill>
+            <a:schemeClr val="tx1"/>
+          </a:solidFill>
+          <a:ln>
+            <a:noFill/>
+          </a:ln>
+        </p:spPr>
+        <p:style>
+          <a:lnRef idx="2">
+            <a:schemeClr val="accent1">
+              <a:shade val="15000"/>
+            </a:schemeClr>
+          </a:lnRef>
+          <a:fillRef idx="1">
+            <a:schemeClr val="accent1"/>
+          </a:fillRef>
+          <a:effectRef idx="0">
+            <a:schemeClr val="accent1"/>
+          </a:effectRef>
+          <a:fontRef idx="minor">
+            <a:schemeClr val="lt1"/>
+          </a:fontRef>
+        </p:style>
+        <p:txBody>
+          <a:bodyPr rtlCol="0" anchor="ctr"/>
+          <a:lstStyle/>
+          <a:p>
+            <a:pPr algn="ctr"/>
+            <a:endParaRPr lang="en-IN"/>
+          </a:p>
+        </p:txBody>
+      </p:sp>
+      <mc:AlternateContent xmlns:mc="http://schemas.openxmlformats.org/markup-compatibility/2006">
+        <mc:Choice xmlns:a14="http://schemas.microsoft.com/office/drawing/2010/main" Requires="a14">
+          <p:sp>
+            <p:nvSpPr>
+              <p:cNvPr id="46" name="TextBox 45">
+                <a:extLst>
+                  <a:ext uri="{FF2B5EF4-FFF2-40B4-BE49-F238E27FC236}">
+                    <a16:creationId xmlns:a16="http://schemas.microsoft.com/office/drawing/2014/main" id="{666A31CD-708B-1A3F-8D0A-5A56B76C36FD}"/>
+                  </a:ext>
+                </a:extLst>
+              </p:cNvPr>
+              <p:cNvSpPr txBox="1"/>
+              <p:nvPr/>
+            </p:nvSpPr>
+            <p:spPr>
+              <a:xfrm>
+                <a:off x="5818166" y="1325524"/>
+                <a:ext cx="421782" cy="184666"/>
+              </a:xfrm>
+              <a:prstGeom prst="rect">
+                <a:avLst/>
+              </a:prstGeom>
+              <a:noFill/>
+            </p:spPr>
+            <p:txBody>
+              <a:bodyPr wrap="none" lIns="0" tIns="0" rIns="0" bIns="0" rtlCol="0">
+                <a:spAutoFit/>
+              </a:bodyPr>
+              <a:lstStyle/>
+              <a:p>
+                <a:pPr/>
+                <a14:m>
+                  <m:oMathPara xmlns:m="http://schemas.openxmlformats.org/officeDocument/2006/math">
+                    <m:oMath>
+                      <m:r>
+                        <a:rPr lang="en-IN" sz="1200" b="0" i="1" smtClean="0">
+                          <a:latin typeface="Cambria Math" panose="02040503050406030204" pitchFamily="18" charset="0"/>
+                        </a:rPr>
+                        <m:t>𝐹</m:t>
+                      </m:r>
+                      <m:r>
+                        <a:rPr lang="en-IN" sz="1200" b="0" i="1" smtClean="0">
+                          <a:latin typeface="Cambria Math" panose="02040503050406030204" pitchFamily="18" charset="0"/>
+                        </a:rPr>
+                        <m:t>=0</m:t>
+                      </m:r>
+                    </m:oMath>
+                  </m:oMathPara>
+                </a14:m>
+                <a:endParaRPr lang="en-IN" sz="1200" dirty="0"/>
+              </a:p>
+            </p:txBody>
+          </p:sp>
+        </mc:Choice>
+        <mc:Fallback>
+          <p:sp>
+            <p:nvSpPr>
+              <p:cNvPr id="46" name="TextBox 45">
+                <a:extLst>
+                  <a:ext uri="{FF2B5EF4-FFF2-40B4-BE49-F238E27FC236}">
+                    <a16:creationId xmlns:a16="http://schemas.microsoft.com/office/drawing/2014/main" id="{666A31CD-708B-1A3F-8D0A-5A56B76C36FD}"/>
+                  </a:ext>
+                </a:extLst>
+              </p:cNvPr>
+              <p:cNvSpPr txBox="1">
+                <a:spLocks noRot="1" noChangeAspect="1" noMove="1" noResize="1" noEditPoints="1" noAdjustHandles="1" noChangeArrowheads="1" noChangeShapeType="1" noTextEdit="1"/>
+              </p:cNvSpPr>
+              <p:nvPr/>
+            </p:nvSpPr>
+            <p:spPr>
+              <a:xfrm>
+                <a:off x="5818166" y="1325524"/>
+                <a:ext cx="421782" cy="184666"/>
+              </a:xfrm>
+              <a:prstGeom prst="rect">
+                <a:avLst/>
+              </a:prstGeom>
+              <a:blipFill>
+                <a:blip r:embed="rId11"/>
+                <a:stretch>
+                  <a:fillRect l="-8571" r="-7143" b="-3226"/>
+                </a:stretch>
+              </a:blipFill>
+            </p:spPr>
+            <p:txBody>
+              <a:bodyPr/>
+              <a:lstStyle/>
+              <a:p>
+                <a:r>
+                  <a:rPr lang="en-IN">
+                    <a:noFill/>
+                  </a:rPr>
+                  <a:t> </a:t>
+                </a:r>
+              </a:p>
+            </p:txBody>
+          </p:sp>
+        </mc:Fallback>
+      </mc:AlternateContent>
+      <mc:AlternateContent xmlns:mc="http://schemas.openxmlformats.org/markup-compatibility/2006">
+        <mc:Choice xmlns:a14="http://schemas.microsoft.com/office/drawing/2010/main" Requires="a14">
+          <p:sp>
+            <p:nvSpPr>
+              <p:cNvPr id="55" name="TextBox 54">
+                <a:extLst>
+                  <a:ext uri="{FF2B5EF4-FFF2-40B4-BE49-F238E27FC236}">
+                    <a16:creationId xmlns:a16="http://schemas.microsoft.com/office/drawing/2014/main" id="{C4774125-9E1E-E93A-1B6B-D4AF3D05798D}"/>
+                  </a:ext>
+                </a:extLst>
+              </p:cNvPr>
+              <p:cNvSpPr txBox="1"/>
+              <p:nvPr/>
+            </p:nvSpPr>
+            <p:spPr>
+              <a:xfrm>
+                <a:off x="7850384" y="3167081"/>
+                <a:ext cx="421782" cy="184666"/>
+              </a:xfrm>
+              <a:prstGeom prst="rect">
+                <a:avLst/>
+              </a:prstGeom>
+              <a:noFill/>
+            </p:spPr>
+            <p:txBody>
+              <a:bodyPr wrap="none" lIns="0" tIns="0" rIns="0" bIns="0" rtlCol="0">
+                <a:spAutoFit/>
+              </a:bodyPr>
+              <a:lstStyle/>
+              <a:p>
+                <a:pPr/>
+                <a14:m>
+                  <m:oMathPara xmlns:m="http://schemas.openxmlformats.org/officeDocument/2006/math">
+                    <m:oMath>
+                      <m:r>
+                        <a:rPr lang="en-IN" sz="1200" b="0" i="1" smtClean="0">
+                          <a:latin typeface="Cambria Math" panose="02040503050406030204" pitchFamily="18" charset="0"/>
+                        </a:rPr>
+                        <m:t>𝐹</m:t>
+                      </m:r>
+                      <m:r>
+                        <a:rPr lang="en-IN" sz="1200" b="0" i="1" smtClean="0">
+                          <a:latin typeface="Cambria Math" panose="02040503050406030204" pitchFamily="18" charset="0"/>
+                        </a:rPr>
+                        <m:t>=0</m:t>
+                      </m:r>
+                    </m:oMath>
+                  </m:oMathPara>
+                </a14:m>
+                <a:endParaRPr lang="en-IN" sz="1200" dirty="0"/>
+              </a:p>
+            </p:txBody>
+          </p:sp>
+        </mc:Choice>
+        <mc:Fallback>
+          <p:sp>
+            <p:nvSpPr>
+              <p:cNvPr id="55" name="TextBox 54">
+                <a:extLst>
+                  <a:ext uri="{FF2B5EF4-FFF2-40B4-BE49-F238E27FC236}">
+                    <a16:creationId xmlns:a16="http://schemas.microsoft.com/office/drawing/2014/main" id="{C4774125-9E1E-E93A-1B6B-D4AF3D05798D}"/>
+                  </a:ext>
+                </a:extLst>
+              </p:cNvPr>
+              <p:cNvSpPr txBox="1">
+                <a:spLocks noRot="1" noChangeAspect="1" noMove="1" noResize="1" noEditPoints="1" noAdjustHandles="1" noChangeArrowheads="1" noChangeShapeType="1" noTextEdit="1"/>
+              </p:cNvSpPr>
+              <p:nvPr/>
+            </p:nvSpPr>
+            <p:spPr>
+              <a:xfrm>
+                <a:off x="7850384" y="3167081"/>
+                <a:ext cx="421782" cy="184666"/>
+              </a:xfrm>
+              <a:prstGeom prst="rect">
+                <a:avLst/>
+              </a:prstGeom>
+              <a:blipFill>
+                <a:blip r:embed="rId11"/>
+                <a:stretch>
+                  <a:fillRect l="-8696" r="-8696" b="-6667"/>
+                </a:stretch>
+              </a:blipFill>
+            </p:spPr>
+            <p:txBody>
+              <a:bodyPr/>
+              <a:lstStyle/>
+              <a:p>
+                <a:r>
+                  <a:rPr lang="en-IN">
+                    <a:noFill/>
+                  </a:rPr>
+                  <a:t> </a:t>
+                </a:r>
+              </a:p>
+            </p:txBody>
+          </p:sp>
+        </mc:Fallback>
+      </mc:AlternateContent>
+      <mc:AlternateContent xmlns:mc="http://schemas.openxmlformats.org/markup-compatibility/2006">
+        <mc:Choice xmlns:a14="http://schemas.microsoft.com/office/drawing/2010/main" Requires="a14">
+          <p:sp>
+            <p:nvSpPr>
+              <p:cNvPr id="58" name="TextBox 57">
+                <a:extLst>
+                  <a:ext uri="{FF2B5EF4-FFF2-40B4-BE49-F238E27FC236}">
+                    <a16:creationId xmlns:a16="http://schemas.microsoft.com/office/drawing/2014/main" id="{C5C4727A-176A-AA0E-8A25-648AFC8F0ABD}"/>
+                  </a:ext>
+                </a:extLst>
+              </p:cNvPr>
+              <p:cNvSpPr txBox="1"/>
+              <p:nvPr/>
+            </p:nvSpPr>
+            <p:spPr>
+              <a:xfrm>
+                <a:off x="4156348" y="5273008"/>
+                <a:ext cx="314573" cy="307777"/>
+              </a:xfrm>
+              <a:prstGeom prst="rect">
+                <a:avLst/>
+              </a:prstGeom>
+              <a:noFill/>
+            </p:spPr>
+            <p:txBody>
+              <a:bodyPr wrap="none" lIns="0" tIns="0" rIns="0" bIns="0" rtlCol="0">
+                <a:spAutoFit/>
+              </a:bodyPr>
+              <a:lstStyle/>
+              <a:p>
+                <a:pPr/>
+                <a14:m>
+                  <m:oMathPara xmlns:m="http://schemas.openxmlformats.org/officeDocument/2006/math">
+                    <m:oMath>
+                      <m:sSub>
+                        <m:sSubPr>
+                          <m:ctrlPr>
+                            <a:rPr lang="en-US" sz="2000" b="0" i="1" smtClean="0">
+                              <a:latin typeface="Cambria Math" panose="02040503050406030204" pitchFamily="18" charset="0"/>
+                            </a:rPr>
+                          </m:ctrlPr>
+                        </m:sSubPr>
+                        <m:e>
+                          <m:r>
+                            <a:rPr lang="en-US" sz="2000" b="0" i="1" smtClean="0">
+                              <a:latin typeface="Cambria Math" panose="02040503050406030204" pitchFamily="18" charset="0"/>
+                            </a:rPr>
+                            <m:t>𝑥</m:t>
+                          </m:r>
+                        </m:e>
+                        <m:sub>
+                          <m:r>
+                            <a:rPr lang="en-US" sz="2000" b="0" i="1" smtClean="0">
+                              <a:latin typeface="Cambria Math" panose="02040503050406030204" pitchFamily="18" charset="0"/>
+                            </a:rPr>
+                            <m:t>𝐴</m:t>
+                          </m:r>
+                        </m:sub>
+                      </m:sSub>
+                    </m:oMath>
+                  </m:oMathPara>
+                </a14:m>
+                <a:endParaRPr lang="en-US" sz="2000" dirty="0"/>
+              </a:p>
+            </p:txBody>
+          </p:sp>
+        </mc:Choice>
+        <mc:Fallback>
+          <p:sp>
+            <p:nvSpPr>
+              <p:cNvPr id="58" name="TextBox 57">
+                <a:extLst>
+                  <a:ext uri="{FF2B5EF4-FFF2-40B4-BE49-F238E27FC236}">
+                    <a16:creationId xmlns:a16="http://schemas.microsoft.com/office/drawing/2014/main" id="{C5C4727A-176A-AA0E-8A25-648AFC8F0ABD}"/>
+                  </a:ext>
+                </a:extLst>
+              </p:cNvPr>
+              <p:cNvSpPr txBox="1">
+                <a:spLocks noRot="1" noChangeAspect="1" noMove="1" noResize="1" noEditPoints="1" noAdjustHandles="1" noChangeArrowheads="1" noChangeShapeType="1" noTextEdit="1"/>
+              </p:cNvSpPr>
+              <p:nvPr/>
+            </p:nvSpPr>
+            <p:spPr>
+              <a:xfrm>
+                <a:off x="4156348" y="5273008"/>
+                <a:ext cx="314573" cy="307777"/>
+              </a:xfrm>
+              <a:prstGeom prst="rect">
+                <a:avLst/>
+              </a:prstGeom>
+              <a:blipFill>
+                <a:blip r:embed="rId12"/>
+                <a:stretch>
+                  <a:fillRect l="-11765" r="-7843" b="-16000"/>
+                </a:stretch>
+              </a:blipFill>
+            </p:spPr>
+            <p:txBody>
+              <a:bodyPr/>
+              <a:lstStyle/>
+              <a:p>
+                <a:r>
+                  <a:rPr lang="en-IN">
+                    <a:noFill/>
+                  </a:rPr>
+                  <a:t> </a:t>
+                </a:r>
+              </a:p>
+            </p:txBody>
+          </p:sp>
+        </mc:Fallback>
+      </mc:AlternateContent>
+      <mc:AlternateContent xmlns:mc="http://schemas.openxmlformats.org/markup-compatibility/2006">
+        <mc:Choice xmlns:a14="http://schemas.microsoft.com/office/drawing/2010/main" Requires="a14">
+          <p:sp>
+            <p:nvSpPr>
+              <p:cNvPr id="59" name="TextBox 58">
+                <a:extLst>
+                  <a:ext uri="{FF2B5EF4-FFF2-40B4-BE49-F238E27FC236}">
+                    <a16:creationId xmlns:a16="http://schemas.microsoft.com/office/drawing/2014/main" id="{C015B5B3-1501-06E3-EB32-E1E153E5E3F7}"/>
+                  </a:ext>
+                </a:extLst>
+              </p:cNvPr>
+              <p:cNvSpPr txBox="1"/>
+              <p:nvPr/>
+            </p:nvSpPr>
+            <p:spPr>
+              <a:xfrm>
+                <a:off x="5871770" y="5273008"/>
+                <a:ext cx="333746" cy="307777"/>
+              </a:xfrm>
+              <a:prstGeom prst="rect">
+                <a:avLst/>
+              </a:prstGeom>
+              <a:noFill/>
+            </p:spPr>
+            <p:txBody>
+              <a:bodyPr wrap="none" lIns="0" tIns="0" rIns="0" bIns="0" rtlCol="0">
+                <a:spAutoFit/>
+              </a:bodyPr>
+              <a:lstStyle/>
+              <a:p>
+                <a:pPr/>
+                <a14:m>
+                  <m:oMathPara xmlns:m="http://schemas.openxmlformats.org/officeDocument/2006/math">
+                    <m:oMath>
+                      <m:sSub>
+                        <m:sSubPr>
+                          <m:ctrlPr>
+                            <a:rPr lang="en-US" sz="2000" b="0" i="1" smtClean="0">
+                              <a:latin typeface="Cambria Math" panose="02040503050406030204" pitchFamily="18" charset="0"/>
+                            </a:rPr>
+                          </m:ctrlPr>
+                        </m:sSubPr>
+                        <m:e>
+                          <m:r>
+                            <a:rPr lang="en-US" sz="2000" b="0" i="1" smtClean="0">
+                              <a:latin typeface="Cambria Math" panose="02040503050406030204" pitchFamily="18" charset="0"/>
+                            </a:rPr>
+                            <m:t>𝑥</m:t>
+                          </m:r>
+                        </m:e>
+                        <m:sub>
+                          <m:r>
+                            <a:rPr lang="en-US" sz="2000" b="0" i="1" smtClean="0">
+                              <a:latin typeface="Cambria Math" panose="02040503050406030204" pitchFamily="18" charset="0"/>
+                            </a:rPr>
+                            <m:t>𝐵</m:t>
+                          </m:r>
+                        </m:sub>
+                      </m:sSub>
+                    </m:oMath>
+                  </m:oMathPara>
+                </a14:m>
+                <a:endParaRPr lang="en-US" sz="2000" dirty="0"/>
+              </a:p>
+            </p:txBody>
+          </p:sp>
+        </mc:Choice>
+        <mc:Fallback>
+          <p:sp>
+            <p:nvSpPr>
+              <p:cNvPr id="59" name="TextBox 58">
+                <a:extLst>
+                  <a:ext uri="{FF2B5EF4-FFF2-40B4-BE49-F238E27FC236}">
+                    <a16:creationId xmlns:a16="http://schemas.microsoft.com/office/drawing/2014/main" id="{C015B5B3-1501-06E3-EB32-E1E153E5E3F7}"/>
+                  </a:ext>
+                </a:extLst>
+              </p:cNvPr>
+              <p:cNvSpPr txBox="1">
+                <a:spLocks noRot="1" noChangeAspect="1" noMove="1" noResize="1" noEditPoints="1" noAdjustHandles="1" noChangeArrowheads="1" noChangeShapeType="1" noTextEdit="1"/>
+              </p:cNvSpPr>
+              <p:nvPr/>
+            </p:nvSpPr>
+            <p:spPr>
+              <a:xfrm>
+                <a:off x="5871770" y="5273008"/>
+                <a:ext cx="333746" cy="307777"/>
+              </a:xfrm>
+              <a:prstGeom prst="rect">
+                <a:avLst/>
+              </a:prstGeom>
+              <a:blipFill>
+                <a:blip r:embed="rId13"/>
+                <a:stretch>
+                  <a:fillRect l="-9091" r="-3636" b="-16000"/>
+                </a:stretch>
+              </a:blipFill>
+            </p:spPr>
+            <p:txBody>
+              <a:bodyPr/>
+              <a:lstStyle/>
+              <a:p>
+                <a:r>
+                  <a:rPr lang="en-IN">
+                    <a:noFill/>
+                  </a:rPr>
+                  <a:t> </a:t>
+                </a:r>
+              </a:p>
+            </p:txBody>
+          </p:sp>
+        </mc:Fallback>
+      </mc:AlternateContent>
+      <mc:AlternateContent xmlns:mc="http://schemas.openxmlformats.org/markup-compatibility/2006">
+        <mc:Choice xmlns:a14="http://schemas.microsoft.com/office/drawing/2010/main" Requires="a14">
+          <p:sp>
+            <p:nvSpPr>
+              <p:cNvPr id="60" name="TextBox 59">
+                <a:extLst>
+                  <a:ext uri="{FF2B5EF4-FFF2-40B4-BE49-F238E27FC236}">
+                    <a16:creationId xmlns:a16="http://schemas.microsoft.com/office/drawing/2014/main" id="{CA734BD9-3729-F0E8-1E33-9889EA9C3F44}"/>
+                  </a:ext>
+                </a:extLst>
+              </p:cNvPr>
+              <p:cNvSpPr txBox="1"/>
+              <p:nvPr/>
+            </p:nvSpPr>
+            <p:spPr>
+              <a:xfrm>
+                <a:off x="7122137" y="5278493"/>
+                <a:ext cx="324127" cy="307777"/>
+              </a:xfrm>
+              <a:prstGeom prst="rect">
+                <a:avLst/>
+              </a:prstGeom>
+              <a:noFill/>
+            </p:spPr>
+            <p:txBody>
+              <a:bodyPr wrap="none" lIns="0" tIns="0" rIns="0" bIns="0" rtlCol="0">
+                <a:spAutoFit/>
+              </a:bodyPr>
+              <a:lstStyle/>
+              <a:p>
+                <a:pPr/>
+                <a14:m>
+                  <m:oMathPara xmlns:m="http://schemas.openxmlformats.org/officeDocument/2006/math">
+                    <m:oMath>
+                      <m:sSub>
+                        <m:sSubPr>
+                          <m:ctrlPr>
+                            <a:rPr lang="en-US" sz="2000" b="0" i="1" smtClean="0">
+                              <a:latin typeface="Cambria Math" panose="02040503050406030204" pitchFamily="18" charset="0"/>
+                            </a:rPr>
+                          </m:ctrlPr>
+                        </m:sSubPr>
+                        <m:e>
+                          <m:r>
+                            <a:rPr lang="en-US" sz="2000" b="0" i="1" smtClean="0">
+                              <a:latin typeface="Cambria Math" panose="02040503050406030204" pitchFamily="18" charset="0"/>
+                            </a:rPr>
+                            <m:t>𝑥</m:t>
+                          </m:r>
+                        </m:e>
+                        <m:sub>
+                          <m:r>
+                            <a:rPr lang="en-US" sz="2000" b="0" i="1" smtClean="0">
+                              <a:latin typeface="Cambria Math" panose="02040503050406030204" pitchFamily="18" charset="0"/>
+                            </a:rPr>
+                            <m:t>𝐶</m:t>
+                          </m:r>
+                        </m:sub>
+                      </m:sSub>
+                    </m:oMath>
+                  </m:oMathPara>
+                </a14:m>
+                <a:endParaRPr lang="en-US" sz="2000" dirty="0"/>
+              </a:p>
+            </p:txBody>
+          </p:sp>
+        </mc:Choice>
+        <mc:Fallback>
+          <p:sp>
+            <p:nvSpPr>
+              <p:cNvPr id="60" name="TextBox 59">
+                <a:extLst>
+                  <a:ext uri="{FF2B5EF4-FFF2-40B4-BE49-F238E27FC236}">
+                    <a16:creationId xmlns:a16="http://schemas.microsoft.com/office/drawing/2014/main" id="{CA734BD9-3729-F0E8-1E33-9889EA9C3F44}"/>
+                  </a:ext>
+                </a:extLst>
+              </p:cNvPr>
+              <p:cNvSpPr txBox="1">
+                <a:spLocks noRot="1" noChangeAspect="1" noMove="1" noResize="1" noEditPoints="1" noAdjustHandles="1" noChangeArrowheads="1" noChangeShapeType="1" noTextEdit="1"/>
+              </p:cNvSpPr>
+              <p:nvPr/>
+            </p:nvSpPr>
+            <p:spPr>
+              <a:xfrm>
+                <a:off x="7122137" y="5278493"/>
+                <a:ext cx="324127" cy="307777"/>
+              </a:xfrm>
+              <a:prstGeom prst="rect">
+                <a:avLst/>
+              </a:prstGeom>
+              <a:blipFill>
+                <a:blip r:embed="rId14"/>
+                <a:stretch>
+                  <a:fillRect l="-9259" r="-1852" b="-16000"/>
+                </a:stretch>
+              </a:blipFill>
+            </p:spPr>
+            <p:txBody>
+              <a:bodyPr/>
+              <a:lstStyle/>
+              <a:p>
+                <a:r>
+                  <a:rPr lang="en-IN">
+                    <a:noFill/>
+                  </a:rPr>
+                  <a:t> </a:t>
+                </a:r>
+              </a:p>
+            </p:txBody>
+          </p:sp>
+        </mc:Fallback>
+      </mc:AlternateContent>
+      <mc:AlternateContent xmlns:mc="http://schemas.openxmlformats.org/markup-compatibility/2006">
+        <mc:Choice xmlns:a14="http://schemas.microsoft.com/office/drawing/2010/main" Requires="a14">
+          <p:sp>
+            <p:nvSpPr>
+              <p:cNvPr id="62" name="TextBox 61">
+                <a:extLst>
+                  <a:ext uri="{FF2B5EF4-FFF2-40B4-BE49-F238E27FC236}">
+                    <a16:creationId xmlns:a16="http://schemas.microsoft.com/office/drawing/2014/main" id="{6333CC33-27A6-777E-8107-8C4C3F08FEC4}"/>
+                  </a:ext>
+                </a:extLst>
+              </p:cNvPr>
+              <p:cNvSpPr txBox="1"/>
+              <p:nvPr/>
+            </p:nvSpPr>
+            <p:spPr>
+              <a:xfrm>
+                <a:off x="8638246" y="5278493"/>
+                <a:ext cx="341312" cy="307777"/>
+              </a:xfrm>
+              <a:prstGeom prst="rect">
+                <a:avLst/>
+              </a:prstGeom>
+              <a:noFill/>
+            </p:spPr>
+            <p:txBody>
+              <a:bodyPr wrap="none" lIns="0" tIns="0" rIns="0" bIns="0" rtlCol="0">
+                <a:spAutoFit/>
+              </a:bodyPr>
+              <a:lstStyle/>
+              <a:p>
+                <a:pPr/>
+                <a14:m>
+                  <m:oMathPara xmlns:m="http://schemas.openxmlformats.org/officeDocument/2006/math">
+                    <m:oMath>
+                      <m:sSub>
+                        <m:sSubPr>
+                          <m:ctrlPr>
+                            <a:rPr lang="en-US" sz="2000" b="0" i="1" smtClean="0">
+                              <a:latin typeface="Cambria Math" panose="02040503050406030204" pitchFamily="18" charset="0"/>
+                            </a:rPr>
+                          </m:ctrlPr>
+                        </m:sSubPr>
+                        <m:e>
+                          <m:r>
+                            <a:rPr lang="en-US" sz="2000" b="0" i="1" smtClean="0">
+                              <a:latin typeface="Cambria Math" panose="02040503050406030204" pitchFamily="18" charset="0"/>
+                            </a:rPr>
+                            <m:t>𝑥</m:t>
+                          </m:r>
+                        </m:e>
+                        <m:sub>
+                          <m:r>
+                            <a:rPr lang="en-US" sz="2000" b="0" i="1" smtClean="0">
+                              <a:latin typeface="Cambria Math" panose="02040503050406030204" pitchFamily="18" charset="0"/>
+                            </a:rPr>
+                            <m:t>𝐷</m:t>
+                          </m:r>
+                        </m:sub>
+                      </m:sSub>
+                    </m:oMath>
+                  </m:oMathPara>
+                </a14:m>
+                <a:endParaRPr lang="en-US" sz="2000" dirty="0"/>
+              </a:p>
+            </p:txBody>
+          </p:sp>
+        </mc:Choice>
+        <mc:Fallback>
+          <p:sp>
+            <p:nvSpPr>
+              <p:cNvPr id="62" name="TextBox 61">
+                <a:extLst>
+                  <a:ext uri="{FF2B5EF4-FFF2-40B4-BE49-F238E27FC236}">
+                    <a16:creationId xmlns:a16="http://schemas.microsoft.com/office/drawing/2014/main" id="{6333CC33-27A6-777E-8107-8C4C3F08FEC4}"/>
+                  </a:ext>
+                </a:extLst>
+              </p:cNvPr>
+              <p:cNvSpPr txBox="1">
+                <a:spLocks noRot="1" noChangeAspect="1" noMove="1" noResize="1" noEditPoints="1" noAdjustHandles="1" noChangeArrowheads="1" noChangeShapeType="1" noTextEdit="1"/>
+              </p:cNvSpPr>
+              <p:nvPr/>
+            </p:nvSpPr>
+            <p:spPr>
+              <a:xfrm>
+                <a:off x="8638246" y="5278493"/>
+                <a:ext cx="341312" cy="307777"/>
+              </a:xfrm>
+              <a:prstGeom prst="rect">
+                <a:avLst/>
+              </a:prstGeom>
+              <a:blipFill>
+                <a:blip r:embed="rId15"/>
+                <a:stretch>
+                  <a:fillRect l="-8929" r="-3571" b="-16000"/>
+                </a:stretch>
+              </a:blipFill>
+            </p:spPr>
+            <p:txBody>
+              <a:bodyPr/>
+              <a:lstStyle/>
+              <a:p>
+                <a:r>
+                  <a:rPr lang="en-IN">
+                    <a:noFill/>
+                  </a:rPr>
+                  <a:t> </a:t>
+                </a:r>
+              </a:p>
+            </p:txBody>
+          </p:sp>
+        </mc:Fallback>
+      </mc:AlternateContent>
+      <p:sp>
+        <p:nvSpPr>
+          <p:cNvPr id="63" name="TextBox 62">
+            <a:extLst>
+              <a:ext uri="{FF2B5EF4-FFF2-40B4-BE49-F238E27FC236}">
+                <a16:creationId xmlns:a16="http://schemas.microsoft.com/office/drawing/2014/main" id="{2025B69C-95EE-3D75-AA44-C59747217BD5}"/>
+              </a:ext>
+            </a:extLst>
+          </p:cNvPr>
+          <p:cNvSpPr txBox="1"/>
+          <p:nvPr/>
+        </p:nvSpPr>
+        <p:spPr>
+          <a:xfrm>
+            <a:off x="3823069" y="5622197"/>
+            <a:ext cx="981130" cy="338554"/>
+          </a:xfrm>
+          <a:prstGeom prst="rect">
+            <a:avLst/>
+          </a:prstGeom>
+          <a:noFill/>
+        </p:spPr>
+        <p:txBody>
+          <a:bodyPr wrap="square" rtlCol="0">
+            <a:spAutoFit/>
+          </a:bodyPr>
+          <a:lstStyle/>
+          <a:p>
+            <a:pPr algn="ctr"/>
+            <a:r>
+              <a:rPr lang="en-US" sz="1600" dirty="0">
+                <a:latin typeface="Cambria Math" panose="02040503050406030204" pitchFamily="18" charset="0"/>
+                <a:ea typeface="Cambria Math" panose="02040503050406030204" pitchFamily="18" charset="0"/>
+              </a:rPr>
+              <a:t>(stable)</a:t>
+            </a:r>
+            <a:endParaRPr lang="en-IN" sz="1600" dirty="0">
+              <a:latin typeface="Cambria Math" panose="02040503050406030204" pitchFamily="18" charset="0"/>
+              <a:ea typeface="Cambria Math" panose="02040503050406030204" pitchFamily="18" charset="0"/>
+            </a:endParaRPr>
+          </a:p>
+        </p:txBody>
+      </p:sp>
+      <p:sp>
+        <p:nvSpPr>
+          <p:cNvPr id="65" name="TextBox 64">
+            <a:extLst>
+              <a:ext uri="{FF2B5EF4-FFF2-40B4-BE49-F238E27FC236}">
+                <a16:creationId xmlns:a16="http://schemas.microsoft.com/office/drawing/2014/main" id="{4F284B68-38B1-76C0-BDB1-82D4246C0A6D}"/>
+              </a:ext>
+            </a:extLst>
+          </p:cNvPr>
+          <p:cNvSpPr txBox="1"/>
+          <p:nvPr/>
+        </p:nvSpPr>
+        <p:spPr>
+          <a:xfrm>
+            <a:off x="5458942" y="5622197"/>
+            <a:ext cx="1140230" cy="338554"/>
+          </a:xfrm>
+          <a:prstGeom prst="rect">
+            <a:avLst/>
+          </a:prstGeom>
+          <a:noFill/>
+        </p:spPr>
+        <p:txBody>
+          <a:bodyPr wrap="square" rtlCol="0">
+            <a:spAutoFit/>
+          </a:bodyPr>
+          <a:lstStyle/>
+          <a:p>
+            <a:pPr algn="ctr"/>
+            <a:r>
+              <a:rPr lang="en-US" sz="1600" dirty="0">
+                <a:latin typeface="Cambria Math" panose="02040503050406030204" pitchFamily="18" charset="0"/>
+                <a:ea typeface="Cambria Math" panose="02040503050406030204" pitchFamily="18" charset="0"/>
+              </a:rPr>
+              <a:t>(unstable)</a:t>
+            </a:r>
+            <a:endParaRPr lang="en-IN" sz="1600" dirty="0">
+              <a:latin typeface="Cambria Math" panose="02040503050406030204" pitchFamily="18" charset="0"/>
+              <a:ea typeface="Cambria Math" panose="02040503050406030204" pitchFamily="18" charset="0"/>
+            </a:endParaRPr>
+          </a:p>
+        </p:txBody>
+      </p:sp>
+      <p:sp>
+        <p:nvSpPr>
+          <p:cNvPr id="67" name="TextBox 66">
+            <a:extLst>
+              <a:ext uri="{FF2B5EF4-FFF2-40B4-BE49-F238E27FC236}">
+                <a16:creationId xmlns:a16="http://schemas.microsoft.com/office/drawing/2014/main" id="{E2DDBBE7-DA32-4073-6268-C779ADA26DA1}"/>
+              </a:ext>
+            </a:extLst>
+          </p:cNvPr>
+          <p:cNvSpPr txBox="1"/>
+          <p:nvPr/>
+        </p:nvSpPr>
+        <p:spPr>
+          <a:xfrm>
+            <a:off x="7491160" y="5622197"/>
+            <a:ext cx="1140230" cy="338554"/>
+          </a:xfrm>
+          <a:prstGeom prst="rect">
+            <a:avLst/>
+          </a:prstGeom>
+          <a:noFill/>
+        </p:spPr>
+        <p:txBody>
+          <a:bodyPr wrap="square" rtlCol="0">
+            <a:spAutoFit/>
+          </a:bodyPr>
+          <a:lstStyle/>
+          <a:p>
+            <a:pPr algn="ctr"/>
+            <a:r>
+              <a:rPr lang="en-US" sz="1600" dirty="0">
+                <a:latin typeface="Cambria Math" panose="02040503050406030204" pitchFamily="18" charset="0"/>
+                <a:ea typeface="Cambria Math" panose="02040503050406030204" pitchFamily="18" charset="0"/>
+              </a:rPr>
+              <a:t>(neutral)</a:t>
+            </a:r>
+            <a:endParaRPr lang="en-IN" sz="1600" dirty="0">
+              <a:latin typeface="Cambria Math" panose="02040503050406030204" pitchFamily="18" charset="0"/>
+              <a:ea typeface="Cambria Math" panose="02040503050406030204" pitchFamily="18" charset="0"/>
+            </a:endParaRPr>
+          </a:p>
+        </p:txBody>
+      </p:sp>
+      <mc:AlternateContent xmlns:mc="http://schemas.openxmlformats.org/markup-compatibility/2006">
+        <mc:Choice xmlns:a14="http://schemas.microsoft.com/office/drawing/2010/main" Requires="a14">
+          <p:sp>
+            <p:nvSpPr>
+              <p:cNvPr id="69" name="TextBox 68">
+                <a:extLst>
+                  <a:ext uri="{FF2B5EF4-FFF2-40B4-BE49-F238E27FC236}">
+                    <a16:creationId xmlns:a16="http://schemas.microsoft.com/office/drawing/2014/main" id="{69046328-3B90-C47E-C970-E95D7E339020}"/>
+                  </a:ext>
+                </a:extLst>
+              </p:cNvPr>
+              <p:cNvSpPr txBox="1"/>
+              <p:nvPr/>
+            </p:nvSpPr>
+            <p:spPr>
+              <a:xfrm>
+                <a:off x="4835785" y="4110202"/>
+                <a:ext cx="615040" cy="381836"/>
+              </a:xfrm>
+              <a:prstGeom prst="rect">
+                <a:avLst/>
+              </a:prstGeom>
+              <a:noFill/>
+            </p:spPr>
+            <p:txBody>
+              <a:bodyPr wrap="none" lIns="0" tIns="0" rIns="0" bIns="0" rtlCol="0">
+                <a:spAutoFit/>
+              </a:bodyPr>
+              <a:lstStyle/>
+              <a:p>
+                <a:pPr/>
+                <a14:m>
+                  <m:oMathPara xmlns:m="http://schemas.openxmlformats.org/officeDocument/2006/math">
+                    <m:oMath>
+                      <m:f>
+                        <m:fPr>
+                          <m:ctrlPr>
+                            <a:rPr lang="en-IN" sz="1200" i="1" smtClean="0">
+                              <a:latin typeface="Cambria Math" panose="02040503050406030204" pitchFamily="18" charset="0"/>
+                            </a:rPr>
+                          </m:ctrlPr>
+                        </m:fPr>
+                        <m:num>
+                          <m:sSup>
+                            <m:sSupPr>
+                              <m:ctrlPr>
+                                <a:rPr lang="en-IN" sz="1200" b="0" i="1" smtClean="0">
+                                  <a:latin typeface="Cambria Math" panose="02040503050406030204" pitchFamily="18" charset="0"/>
+                                </a:rPr>
+                              </m:ctrlPr>
+                            </m:sSupPr>
+                            <m:e>
+                              <m:r>
+                                <a:rPr lang="en-IN" sz="1200" b="0" i="1" smtClean="0">
+                                  <a:latin typeface="Cambria Math" panose="02040503050406030204" pitchFamily="18" charset="0"/>
+                                </a:rPr>
+                                <m:t>𝑑</m:t>
+                              </m:r>
+                            </m:e>
+                            <m:sup>
+                              <m:r>
+                                <a:rPr lang="en-IN" sz="1200" b="0" i="1" smtClean="0">
+                                  <a:latin typeface="Cambria Math" panose="02040503050406030204" pitchFamily="18" charset="0"/>
+                                </a:rPr>
+                                <m:t>2</m:t>
+                              </m:r>
+                            </m:sup>
+                          </m:sSup>
+                          <m:r>
+                            <a:rPr lang="en-IN" sz="1200" b="0" i="1" smtClean="0">
+                              <a:latin typeface="Cambria Math" panose="02040503050406030204" pitchFamily="18" charset="0"/>
+                            </a:rPr>
+                            <m:t>𝑈</m:t>
+                          </m:r>
+                        </m:num>
+                        <m:den>
+                          <m:r>
+                            <a:rPr lang="en-IN" sz="1200" i="1" smtClean="0">
+                              <a:latin typeface="Cambria Math" panose="02040503050406030204" pitchFamily="18" charset="0"/>
+                            </a:rPr>
+                            <m:t>𝑑</m:t>
+                          </m:r>
+                          <m:sSup>
+                            <m:sSupPr>
+                              <m:ctrlPr>
+                                <a:rPr lang="en-IN" sz="1200" b="0" i="1" smtClean="0">
+                                  <a:latin typeface="Cambria Math" panose="02040503050406030204" pitchFamily="18" charset="0"/>
+                                </a:rPr>
+                              </m:ctrlPr>
+                            </m:sSupPr>
+                            <m:e>
+                              <m:r>
+                                <a:rPr lang="en-IN" sz="1200" b="0" i="1" smtClean="0">
+                                  <a:latin typeface="Cambria Math" panose="02040503050406030204" pitchFamily="18" charset="0"/>
+                                </a:rPr>
+                                <m:t>𝑥</m:t>
+                              </m:r>
+                            </m:e>
+                            <m:sup>
+                              <m:r>
+                                <a:rPr lang="en-IN" sz="1200" b="0" i="1" smtClean="0">
+                                  <a:latin typeface="Cambria Math" panose="02040503050406030204" pitchFamily="18" charset="0"/>
+                                </a:rPr>
+                                <m:t>2</m:t>
+                              </m:r>
+                            </m:sup>
+                          </m:sSup>
+                        </m:den>
+                      </m:f>
+                      <m:r>
+                        <a:rPr lang="en-IN" sz="1200" b="0" i="1" smtClean="0">
+                          <a:latin typeface="Cambria Math" panose="02040503050406030204" pitchFamily="18" charset="0"/>
+                        </a:rPr>
+                        <m:t>&gt;</m:t>
+                      </m:r>
+                      <m:r>
+                        <a:rPr lang="en-IN" sz="1200" b="0" i="1" smtClean="0">
+                          <a:latin typeface="Cambria Math" panose="02040503050406030204" pitchFamily="18" charset="0"/>
+                        </a:rPr>
+                        <m:t>0</m:t>
+                      </m:r>
+                    </m:oMath>
+                  </m:oMathPara>
+                </a14:m>
+                <a:endParaRPr lang="en-IN" sz="1200" dirty="0"/>
+              </a:p>
+            </p:txBody>
+          </p:sp>
+        </mc:Choice>
+        <mc:Fallback>
+          <p:sp>
+            <p:nvSpPr>
+              <p:cNvPr id="69" name="TextBox 68">
+                <a:extLst>
+                  <a:ext uri="{FF2B5EF4-FFF2-40B4-BE49-F238E27FC236}">
+                    <a16:creationId xmlns:a16="http://schemas.microsoft.com/office/drawing/2014/main" id="{69046328-3B90-C47E-C970-E95D7E339020}"/>
+                  </a:ext>
+                </a:extLst>
+              </p:cNvPr>
+              <p:cNvSpPr txBox="1">
+                <a:spLocks noRot="1" noChangeAspect="1" noMove="1" noResize="1" noEditPoints="1" noAdjustHandles="1" noChangeArrowheads="1" noChangeShapeType="1" noTextEdit="1"/>
+              </p:cNvSpPr>
+              <p:nvPr/>
+            </p:nvSpPr>
+            <p:spPr>
+              <a:xfrm>
+                <a:off x="4835785" y="4110202"/>
+                <a:ext cx="615040" cy="381836"/>
+              </a:xfrm>
+              <a:prstGeom prst="rect">
+                <a:avLst/>
+              </a:prstGeom>
+              <a:blipFill>
+                <a:blip r:embed="rId16"/>
+                <a:stretch>
+                  <a:fillRect l="-3960" r="-3960" b="-11111"/>
+                </a:stretch>
+              </a:blipFill>
+            </p:spPr>
+            <p:txBody>
+              <a:bodyPr/>
+              <a:lstStyle/>
+              <a:p>
+                <a:r>
+                  <a:rPr lang="en-IN">
+                    <a:noFill/>
+                  </a:rPr>
+                  <a:t> </a:t>
+                </a:r>
+              </a:p>
+            </p:txBody>
+          </p:sp>
+        </mc:Fallback>
+      </mc:AlternateContent>
+      <mc:AlternateContent xmlns:mc="http://schemas.openxmlformats.org/markup-compatibility/2006">
+        <mc:Choice xmlns:a14="http://schemas.microsoft.com/office/drawing/2010/main" Requires="a14">
+          <p:sp>
+            <p:nvSpPr>
+              <p:cNvPr id="76" name="TextBox 75">
+                <a:extLst>
+                  <a:ext uri="{FF2B5EF4-FFF2-40B4-BE49-F238E27FC236}">
+                    <a16:creationId xmlns:a16="http://schemas.microsoft.com/office/drawing/2014/main" id="{6CA3576A-57AB-9C37-7B15-82C8EB8CC048}"/>
+                  </a:ext>
+                </a:extLst>
+              </p:cNvPr>
+              <p:cNvSpPr txBox="1"/>
+              <p:nvPr/>
+            </p:nvSpPr>
+            <p:spPr>
+              <a:xfrm>
+                <a:off x="6586685" y="1432283"/>
+                <a:ext cx="519758" cy="350609"/>
+              </a:xfrm>
+              <a:prstGeom prst="rect">
+                <a:avLst/>
+              </a:prstGeom>
+              <a:noFill/>
+            </p:spPr>
+            <p:txBody>
+              <a:bodyPr wrap="none" lIns="0" tIns="0" rIns="0" bIns="0" rtlCol="0">
+                <a:spAutoFit/>
+              </a:bodyPr>
+              <a:lstStyle/>
+              <a:p>
+                <a:pPr/>
+                <a14:m>
+                  <m:oMathPara xmlns:m="http://schemas.openxmlformats.org/officeDocument/2006/math">
+                    <m:oMath>
+                      <m:f>
+                        <m:fPr>
+                          <m:ctrlPr>
+                            <a:rPr lang="en-IN" sz="1200" i="1" smtClean="0">
+                              <a:latin typeface="Cambria Math" panose="02040503050406030204" pitchFamily="18" charset="0"/>
+                            </a:rPr>
+                          </m:ctrlPr>
+                        </m:fPr>
+                        <m:num>
+                          <m:r>
+                            <a:rPr lang="en-IN" sz="1200" i="1" smtClean="0">
+                              <a:latin typeface="Cambria Math" panose="02040503050406030204" pitchFamily="18" charset="0"/>
+                            </a:rPr>
+                            <m:t>𝑑</m:t>
+                          </m:r>
+                          <m:r>
+                            <a:rPr lang="en-IN" sz="1200" b="0" i="1" smtClean="0">
+                              <a:latin typeface="Cambria Math" panose="02040503050406030204" pitchFamily="18" charset="0"/>
+                            </a:rPr>
+                            <m:t>𝑈</m:t>
+                          </m:r>
+                        </m:num>
+                        <m:den>
+                          <m:r>
+                            <a:rPr lang="en-IN" sz="1200" i="1" smtClean="0">
+                              <a:latin typeface="Cambria Math" panose="02040503050406030204" pitchFamily="18" charset="0"/>
+                            </a:rPr>
+                            <m:t>𝑑𝑥</m:t>
+                          </m:r>
+                        </m:den>
+                      </m:f>
+                      <m:r>
+                        <a:rPr lang="en-IN" sz="1200" b="0" i="1" smtClean="0">
+                          <a:latin typeface="Cambria Math" panose="02040503050406030204" pitchFamily="18" charset="0"/>
+                        </a:rPr>
+                        <m:t>=</m:t>
+                      </m:r>
+                      <m:r>
+                        <a:rPr lang="en-IN" sz="1200" b="0" i="1" smtClean="0">
+                          <a:latin typeface="Cambria Math" panose="02040503050406030204" pitchFamily="18" charset="0"/>
+                        </a:rPr>
+                        <m:t>0</m:t>
+                      </m:r>
+                    </m:oMath>
+                  </m:oMathPara>
+                </a14:m>
+                <a:endParaRPr lang="en-IN" sz="1200" dirty="0"/>
+              </a:p>
+            </p:txBody>
+          </p:sp>
+        </mc:Choice>
+        <mc:Fallback>
+          <p:sp>
+            <p:nvSpPr>
+              <p:cNvPr id="76" name="TextBox 75">
+                <a:extLst>
+                  <a:ext uri="{FF2B5EF4-FFF2-40B4-BE49-F238E27FC236}">
+                    <a16:creationId xmlns:a16="http://schemas.microsoft.com/office/drawing/2014/main" id="{6CA3576A-57AB-9C37-7B15-82C8EB8CC048}"/>
+                  </a:ext>
+                </a:extLst>
+              </p:cNvPr>
+              <p:cNvSpPr txBox="1">
+                <a:spLocks noRot="1" noChangeAspect="1" noMove="1" noResize="1" noEditPoints="1" noAdjustHandles="1" noChangeArrowheads="1" noChangeShapeType="1" noTextEdit="1"/>
+              </p:cNvSpPr>
+              <p:nvPr/>
+            </p:nvSpPr>
+            <p:spPr>
+              <a:xfrm>
+                <a:off x="6586685" y="1432283"/>
+                <a:ext cx="519758" cy="350609"/>
+              </a:xfrm>
+              <a:prstGeom prst="rect">
+                <a:avLst/>
+              </a:prstGeom>
+              <a:blipFill>
+                <a:blip r:embed="rId17"/>
+                <a:stretch>
+                  <a:fillRect l="-6977" t="-3509" r="-5814" b="-15789"/>
+                </a:stretch>
+              </a:blipFill>
+            </p:spPr>
+            <p:txBody>
+              <a:bodyPr/>
+              <a:lstStyle/>
+              <a:p>
+                <a:r>
+                  <a:rPr lang="en-IN">
+                    <a:noFill/>
+                  </a:rPr>
+                  <a:t> </a:t>
+                </a:r>
+              </a:p>
+            </p:txBody>
+          </p:sp>
+        </mc:Fallback>
+      </mc:AlternateContent>
+      <mc:AlternateContent xmlns:mc="http://schemas.openxmlformats.org/markup-compatibility/2006">
+        <mc:Choice xmlns:a14="http://schemas.microsoft.com/office/drawing/2010/main" Requires="a14">
+          <p:sp>
+            <p:nvSpPr>
+              <p:cNvPr id="77" name="TextBox 76">
+                <a:extLst>
+                  <a:ext uri="{FF2B5EF4-FFF2-40B4-BE49-F238E27FC236}">
+                    <a16:creationId xmlns:a16="http://schemas.microsoft.com/office/drawing/2014/main" id="{5F6868B3-D29E-C9C1-D359-BBB6EB6B6911}"/>
+                  </a:ext>
+                </a:extLst>
+              </p:cNvPr>
+              <p:cNvSpPr txBox="1"/>
+              <p:nvPr/>
+            </p:nvSpPr>
+            <p:spPr>
+              <a:xfrm>
+                <a:off x="6586685" y="1911463"/>
+                <a:ext cx="615040" cy="381836"/>
+              </a:xfrm>
+              <a:prstGeom prst="rect">
+                <a:avLst/>
+              </a:prstGeom>
+              <a:noFill/>
+            </p:spPr>
+            <p:txBody>
+              <a:bodyPr wrap="none" lIns="0" tIns="0" rIns="0" bIns="0" rtlCol="0">
+                <a:spAutoFit/>
+              </a:bodyPr>
+              <a:lstStyle/>
+              <a:p>
+                <a:pPr/>
+                <a14:m>
+                  <m:oMathPara xmlns:m="http://schemas.openxmlformats.org/officeDocument/2006/math">
+                    <m:oMath>
+                      <m:f>
+                        <m:fPr>
+                          <m:ctrlPr>
+                            <a:rPr lang="en-IN" sz="1200" i="1" smtClean="0">
+                              <a:latin typeface="Cambria Math" panose="02040503050406030204" pitchFamily="18" charset="0"/>
+                            </a:rPr>
+                          </m:ctrlPr>
+                        </m:fPr>
+                        <m:num>
+                          <m:sSup>
+                            <m:sSupPr>
+                              <m:ctrlPr>
+                                <a:rPr lang="en-IN" sz="1200" b="0" i="1" smtClean="0">
+                                  <a:latin typeface="Cambria Math" panose="02040503050406030204" pitchFamily="18" charset="0"/>
+                                </a:rPr>
+                              </m:ctrlPr>
+                            </m:sSupPr>
+                            <m:e>
+                              <m:r>
+                                <a:rPr lang="en-IN" sz="1200" b="0" i="1" smtClean="0">
+                                  <a:latin typeface="Cambria Math" panose="02040503050406030204" pitchFamily="18" charset="0"/>
+                                </a:rPr>
+                                <m:t>𝑑</m:t>
+                              </m:r>
+                            </m:e>
+                            <m:sup>
+                              <m:r>
+                                <a:rPr lang="en-IN" sz="1200" b="0" i="1" smtClean="0">
+                                  <a:latin typeface="Cambria Math" panose="02040503050406030204" pitchFamily="18" charset="0"/>
+                                </a:rPr>
+                                <m:t>2</m:t>
+                              </m:r>
+                            </m:sup>
+                          </m:sSup>
+                          <m:r>
+                            <a:rPr lang="en-IN" sz="1200" b="0" i="1" smtClean="0">
+                              <a:latin typeface="Cambria Math" panose="02040503050406030204" pitchFamily="18" charset="0"/>
+                            </a:rPr>
+                            <m:t>𝑈</m:t>
+                          </m:r>
+                        </m:num>
+                        <m:den>
+                          <m:r>
+                            <a:rPr lang="en-IN" sz="1200" i="1" smtClean="0">
+                              <a:latin typeface="Cambria Math" panose="02040503050406030204" pitchFamily="18" charset="0"/>
+                            </a:rPr>
+                            <m:t>𝑑</m:t>
+                          </m:r>
+                          <m:sSup>
+                            <m:sSupPr>
+                              <m:ctrlPr>
+                                <a:rPr lang="en-IN" sz="1200" b="0" i="1" smtClean="0">
+                                  <a:latin typeface="Cambria Math" panose="02040503050406030204" pitchFamily="18" charset="0"/>
+                                </a:rPr>
+                              </m:ctrlPr>
+                            </m:sSupPr>
+                            <m:e>
+                              <m:r>
+                                <a:rPr lang="en-IN" sz="1200" b="0" i="1" smtClean="0">
+                                  <a:latin typeface="Cambria Math" panose="02040503050406030204" pitchFamily="18" charset="0"/>
+                                </a:rPr>
+                                <m:t>𝑥</m:t>
+                              </m:r>
+                            </m:e>
+                            <m:sup>
+                              <m:r>
+                                <a:rPr lang="en-IN" sz="1200" b="0" i="1" smtClean="0">
+                                  <a:latin typeface="Cambria Math" panose="02040503050406030204" pitchFamily="18" charset="0"/>
+                                </a:rPr>
+                                <m:t>2</m:t>
+                              </m:r>
+                            </m:sup>
+                          </m:sSup>
+                        </m:den>
+                      </m:f>
+                      <m:r>
+                        <a:rPr lang="en-IN" sz="1200" b="0" i="1" smtClean="0">
+                          <a:latin typeface="Cambria Math" panose="02040503050406030204" pitchFamily="18" charset="0"/>
+                        </a:rPr>
+                        <m:t>&lt;</m:t>
+                      </m:r>
+                      <m:r>
+                        <a:rPr lang="en-IN" sz="1200" b="0" i="1" smtClean="0">
+                          <a:latin typeface="Cambria Math" panose="02040503050406030204" pitchFamily="18" charset="0"/>
+                        </a:rPr>
+                        <m:t>0</m:t>
+                      </m:r>
+                    </m:oMath>
+                  </m:oMathPara>
+                </a14:m>
+                <a:endParaRPr lang="en-IN" sz="1200" dirty="0"/>
+              </a:p>
+            </p:txBody>
+          </p:sp>
+        </mc:Choice>
+        <mc:Fallback>
+          <p:sp>
+            <p:nvSpPr>
+              <p:cNvPr id="77" name="TextBox 76">
+                <a:extLst>
+                  <a:ext uri="{FF2B5EF4-FFF2-40B4-BE49-F238E27FC236}">
+                    <a16:creationId xmlns:a16="http://schemas.microsoft.com/office/drawing/2014/main" id="{5F6868B3-D29E-C9C1-D359-BBB6EB6B6911}"/>
+                  </a:ext>
+                </a:extLst>
+              </p:cNvPr>
+              <p:cNvSpPr txBox="1">
+                <a:spLocks noRot="1" noChangeAspect="1" noMove="1" noResize="1" noEditPoints="1" noAdjustHandles="1" noChangeArrowheads="1" noChangeShapeType="1" noTextEdit="1"/>
+              </p:cNvSpPr>
+              <p:nvPr/>
+            </p:nvSpPr>
+            <p:spPr>
+              <a:xfrm>
+                <a:off x="6586685" y="1911463"/>
+                <a:ext cx="615040" cy="381836"/>
+              </a:xfrm>
+              <a:prstGeom prst="rect">
+                <a:avLst/>
+              </a:prstGeom>
+              <a:blipFill>
+                <a:blip r:embed="rId18"/>
+                <a:stretch>
+                  <a:fillRect l="-3960" r="-3960" b="-11290"/>
+                </a:stretch>
+              </a:blipFill>
+            </p:spPr>
+            <p:txBody>
+              <a:bodyPr/>
+              <a:lstStyle/>
+              <a:p>
+                <a:r>
+                  <a:rPr lang="en-IN">
+                    <a:noFill/>
+                  </a:rPr>
+                  <a:t> </a:t>
+                </a:r>
+              </a:p>
+            </p:txBody>
+          </p:sp>
+        </mc:Fallback>
+      </mc:AlternateContent>
+      <mc:AlternateContent xmlns:mc="http://schemas.openxmlformats.org/markup-compatibility/2006">
+        <mc:Choice xmlns:a14="http://schemas.microsoft.com/office/drawing/2010/main" Requires="a14">
+          <p:sp>
+            <p:nvSpPr>
+              <p:cNvPr id="78" name="TextBox 77">
+                <a:extLst>
+                  <a:ext uri="{FF2B5EF4-FFF2-40B4-BE49-F238E27FC236}">
+                    <a16:creationId xmlns:a16="http://schemas.microsoft.com/office/drawing/2014/main" id="{4197FD0F-2BD4-8C80-D194-B7230CED4CC3}"/>
+                  </a:ext>
+                </a:extLst>
+              </p:cNvPr>
+              <p:cNvSpPr txBox="1"/>
+              <p:nvPr/>
+            </p:nvSpPr>
+            <p:spPr>
+              <a:xfrm>
+                <a:off x="7806324" y="3531065"/>
+                <a:ext cx="519758" cy="350609"/>
+              </a:xfrm>
+              <a:prstGeom prst="rect">
+                <a:avLst/>
+              </a:prstGeom>
+              <a:noFill/>
+            </p:spPr>
+            <p:txBody>
+              <a:bodyPr wrap="square" lIns="0" tIns="0" rIns="0" bIns="0" rtlCol="0">
+                <a:spAutoFit/>
+              </a:bodyPr>
+              <a:lstStyle/>
+              <a:p>
+                <a:pPr/>
+                <a14:m>
+                  <m:oMathPara xmlns:m="http://schemas.openxmlformats.org/officeDocument/2006/math">
+                    <m:oMath>
+                      <m:f>
+                        <m:fPr>
+                          <m:ctrlPr>
+                            <a:rPr lang="en-IN" sz="1200" i="1" smtClean="0">
+                              <a:latin typeface="Cambria Math" panose="02040503050406030204" pitchFamily="18" charset="0"/>
+                            </a:rPr>
+                          </m:ctrlPr>
+                        </m:fPr>
+                        <m:num>
+                          <m:r>
+                            <a:rPr lang="en-IN" sz="1200" i="1" smtClean="0">
+                              <a:latin typeface="Cambria Math" panose="02040503050406030204" pitchFamily="18" charset="0"/>
+                            </a:rPr>
+                            <m:t>𝑑</m:t>
+                          </m:r>
+                          <m:r>
+                            <a:rPr lang="en-IN" sz="1200" b="0" i="1" smtClean="0">
+                              <a:latin typeface="Cambria Math" panose="02040503050406030204" pitchFamily="18" charset="0"/>
+                            </a:rPr>
+                            <m:t>𝑈</m:t>
+                          </m:r>
+                        </m:num>
+                        <m:den>
+                          <m:r>
+                            <a:rPr lang="en-IN" sz="1200" i="1" smtClean="0">
+                              <a:latin typeface="Cambria Math" panose="02040503050406030204" pitchFamily="18" charset="0"/>
+                            </a:rPr>
+                            <m:t>𝑑𝑥</m:t>
+                          </m:r>
+                        </m:den>
+                      </m:f>
+                      <m:r>
+                        <a:rPr lang="en-IN" sz="1200" b="0" i="1" smtClean="0">
+                          <a:latin typeface="Cambria Math" panose="02040503050406030204" pitchFamily="18" charset="0"/>
+                        </a:rPr>
+                        <m:t>=</m:t>
+                      </m:r>
+                      <m:r>
+                        <a:rPr lang="en-IN" sz="1200" b="0" i="1" smtClean="0">
+                          <a:latin typeface="Cambria Math" panose="02040503050406030204" pitchFamily="18" charset="0"/>
+                        </a:rPr>
+                        <m:t>0</m:t>
+                      </m:r>
+                    </m:oMath>
+                  </m:oMathPara>
+                </a14:m>
+                <a:endParaRPr lang="en-IN" sz="1200" dirty="0"/>
+              </a:p>
+            </p:txBody>
+          </p:sp>
+        </mc:Choice>
+        <mc:Fallback>
+          <p:sp>
+            <p:nvSpPr>
+              <p:cNvPr id="78" name="TextBox 77">
+                <a:extLst>
+                  <a:ext uri="{FF2B5EF4-FFF2-40B4-BE49-F238E27FC236}">
+                    <a16:creationId xmlns:a16="http://schemas.microsoft.com/office/drawing/2014/main" id="{4197FD0F-2BD4-8C80-D194-B7230CED4CC3}"/>
+                  </a:ext>
+                </a:extLst>
+              </p:cNvPr>
+              <p:cNvSpPr txBox="1">
+                <a:spLocks noRot="1" noChangeAspect="1" noMove="1" noResize="1" noEditPoints="1" noAdjustHandles="1" noChangeArrowheads="1" noChangeShapeType="1" noTextEdit="1"/>
+              </p:cNvSpPr>
+              <p:nvPr/>
+            </p:nvSpPr>
+            <p:spPr>
+              <a:xfrm>
+                <a:off x="7806324" y="3531065"/>
+                <a:ext cx="519758" cy="350609"/>
+              </a:xfrm>
+              <a:prstGeom prst="rect">
+                <a:avLst/>
+              </a:prstGeom>
+              <a:blipFill>
+                <a:blip r:embed="rId19"/>
+                <a:stretch>
+                  <a:fillRect l="-8235" t="-3448" r="-7059" b="-15517"/>
+                </a:stretch>
+              </a:blipFill>
+            </p:spPr>
+            <p:txBody>
+              <a:bodyPr/>
+              <a:lstStyle/>
+              <a:p>
+                <a:r>
+                  <a:rPr lang="en-IN">
+                    <a:noFill/>
+                  </a:rPr>
+                  <a:t> </a:t>
+                </a:r>
+              </a:p>
+            </p:txBody>
+          </p:sp>
+        </mc:Fallback>
+      </mc:AlternateContent>
+      <mc:AlternateContent xmlns:mc="http://schemas.openxmlformats.org/markup-compatibility/2006">
+        <mc:Choice xmlns:a14="http://schemas.microsoft.com/office/drawing/2010/main" Requires="a14">
+          <p:sp>
+            <p:nvSpPr>
+              <p:cNvPr id="79" name="TextBox 78">
+                <a:extLst>
+                  <a:ext uri="{FF2B5EF4-FFF2-40B4-BE49-F238E27FC236}">
+                    <a16:creationId xmlns:a16="http://schemas.microsoft.com/office/drawing/2014/main" id="{9EC10B85-1F8B-4FC7-EFBB-D3DA5DD0B17C}"/>
+                  </a:ext>
+                </a:extLst>
+              </p:cNvPr>
+              <p:cNvSpPr txBox="1"/>
+              <p:nvPr/>
+            </p:nvSpPr>
+            <p:spPr>
+              <a:xfrm>
+                <a:off x="7806324" y="4010245"/>
+                <a:ext cx="615040" cy="381836"/>
+              </a:xfrm>
+              <a:prstGeom prst="rect">
+                <a:avLst/>
+              </a:prstGeom>
+              <a:noFill/>
+            </p:spPr>
+            <p:txBody>
+              <a:bodyPr wrap="square" lIns="0" tIns="0" rIns="0" bIns="0" rtlCol="0">
+                <a:spAutoFit/>
+              </a:bodyPr>
+              <a:lstStyle/>
+              <a:p>
+                <a:pPr/>
+                <a14:m>
+                  <m:oMathPara xmlns:m="http://schemas.openxmlformats.org/officeDocument/2006/math">
+                    <m:oMath>
+                      <m:f>
+                        <m:fPr>
+                          <m:ctrlPr>
+                            <a:rPr lang="en-IN" sz="1200" i="1" smtClean="0">
+                              <a:latin typeface="Cambria Math" panose="02040503050406030204" pitchFamily="18" charset="0"/>
+                            </a:rPr>
+                          </m:ctrlPr>
+                        </m:fPr>
+                        <m:num>
+                          <m:sSup>
+                            <m:sSupPr>
+                              <m:ctrlPr>
+                                <a:rPr lang="en-IN" sz="1200" b="0" i="1" smtClean="0">
+                                  <a:latin typeface="Cambria Math" panose="02040503050406030204" pitchFamily="18" charset="0"/>
+                                </a:rPr>
+                              </m:ctrlPr>
+                            </m:sSupPr>
+                            <m:e>
+                              <m:r>
+                                <a:rPr lang="en-IN" sz="1200" b="0" i="1" smtClean="0">
+                                  <a:latin typeface="Cambria Math" panose="02040503050406030204" pitchFamily="18" charset="0"/>
+                                </a:rPr>
+                                <m:t>𝑑</m:t>
+                              </m:r>
+                            </m:e>
+                            <m:sup>
+                              <m:r>
+                                <a:rPr lang="en-IN" sz="1200" b="0" i="1" smtClean="0">
+                                  <a:latin typeface="Cambria Math" panose="02040503050406030204" pitchFamily="18" charset="0"/>
+                                </a:rPr>
+                                <m:t>2</m:t>
+                              </m:r>
+                            </m:sup>
+                          </m:sSup>
+                          <m:r>
+                            <a:rPr lang="en-IN" sz="1200" b="0" i="1" smtClean="0">
+                              <a:latin typeface="Cambria Math" panose="02040503050406030204" pitchFamily="18" charset="0"/>
+                            </a:rPr>
+                            <m:t>𝑈</m:t>
+                          </m:r>
+                        </m:num>
+                        <m:den>
+                          <m:r>
+                            <a:rPr lang="en-IN" sz="1200" i="1" smtClean="0">
+                              <a:latin typeface="Cambria Math" panose="02040503050406030204" pitchFamily="18" charset="0"/>
+                            </a:rPr>
+                            <m:t>𝑑</m:t>
+                          </m:r>
+                          <m:sSup>
+                            <m:sSupPr>
+                              <m:ctrlPr>
+                                <a:rPr lang="en-IN" sz="1200" b="0" i="1" smtClean="0">
+                                  <a:latin typeface="Cambria Math" panose="02040503050406030204" pitchFamily="18" charset="0"/>
+                                </a:rPr>
+                              </m:ctrlPr>
+                            </m:sSupPr>
+                            <m:e>
+                              <m:r>
+                                <a:rPr lang="en-IN" sz="1200" b="0" i="1" smtClean="0">
+                                  <a:latin typeface="Cambria Math" panose="02040503050406030204" pitchFamily="18" charset="0"/>
+                                </a:rPr>
+                                <m:t>𝑥</m:t>
+                              </m:r>
+                            </m:e>
+                            <m:sup>
+                              <m:r>
+                                <a:rPr lang="en-IN" sz="1200" b="0" i="1" smtClean="0">
+                                  <a:latin typeface="Cambria Math" panose="02040503050406030204" pitchFamily="18" charset="0"/>
+                                </a:rPr>
+                                <m:t>2</m:t>
+                              </m:r>
+                            </m:sup>
+                          </m:sSup>
+                        </m:den>
+                      </m:f>
+                      <m:r>
+                        <a:rPr lang="en-IN" sz="1200" b="0" i="1" smtClean="0">
+                          <a:latin typeface="Cambria Math" panose="02040503050406030204" pitchFamily="18" charset="0"/>
+                        </a:rPr>
+                        <m:t>=</m:t>
+                      </m:r>
+                      <m:r>
+                        <a:rPr lang="en-IN" sz="1200" b="0" i="1" smtClean="0">
+                          <a:latin typeface="Cambria Math" panose="02040503050406030204" pitchFamily="18" charset="0"/>
+                        </a:rPr>
+                        <m:t>0</m:t>
+                      </m:r>
+                    </m:oMath>
+                  </m:oMathPara>
+                </a14:m>
+                <a:endParaRPr lang="en-IN" sz="1200" dirty="0"/>
+              </a:p>
+            </p:txBody>
+          </p:sp>
+        </mc:Choice>
+        <mc:Fallback>
+          <p:sp>
+            <p:nvSpPr>
+              <p:cNvPr id="79" name="TextBox 78">
+                <a:extLst>
+                  <a:ext uri="{FF2B5EF4-FFF2-40B4-BE49-F238E27FC236}">
+                    <a16:creationId xmlns:a16="http://schemas.microsoft.com/office/drawing/2014/main" id="{9EC10B85-1F8B-4FC7-EFBB-D3DA5DD0B17C}"/>
+                  </a:ext>
+                </a:extLst>
+              </p:cNvPr>
+              <p:cNvSpPr txBox="1">
+                <a:spLocks noRot="1" noChangeAspect="1" noMove="1" noResize="1" noEditPoints="1" noAdjustHandles="1" noChangeArrowheads="1" noChangeShapeType="1" noTextEdit="1"/>
+              </p:cNvSpPr>
+              <p:nvPr/>
+            </p:nvSpPr>
+            <p:spPr>
+              <a:xfrm>
+                <a:off x="7806324" y="4010245"/>
+                <a:ext cx="615040" cy="381836"/>
+              </a:xfrm>
+              <a:prstGeom prst="rect">
+                <a:avLst/>
+              </a:prstGeom>
+              <a:blipFill>
+                <a:blip r:embed="rId20"/>
+                <a:stretch>
+                  <a:fillRect l="-5000" r="-5000" b="-11290"/>
+                </a:stretch>
+              </a:blipFill>
+            </p:spPr>
+            <p:txBody>
+              <a:bodyPr/>
+              <a:lstStyle/>
+              <a:p>
+                <a:r>
+                  <a:rPr lang="en-IN">
+                    <a:noFill/>
+                  </a:rPr>
+                  <a:t> </a:t>
+                </a:r>
+              </a:p>
+            </p:txBody>
+          </p:sp>
+        </mc:Fallback>
+      </mc:AlternateContent>
+    </p:spTree>
+    <p:extLst>
+      <p:ext uri="{BB962C8B-B14F-4D97-AF65-F5344CB8AC3E}">
+        <p14:creationId xmlns:p14="http://schemas.microsoft.com/office/powerpoint/2010/main" val="2150050303"/>
       </p:ext>
     </p:extLst>
   </p:cSld>
